--- a/folletos/2026-04/pptx/FIP_VANTRUST_LIQUIDEZ_PERMANENTE.pptx
+++ b/folletos/2026-04/pptx/FIP_VANTRUST_LIQUIDEZ_PERMANENTE.pptx
@@ -2927,7 +2927,7 @@
                 <a:ea typeface="Calibri" pitchFamily="34" charset="-122"/>
                 <a:cs typeface="Calibri" pitchFamily="34" charset="-120"/>
               </a:rPr>
-              <a:t>prueba CLP</a:t>
+              <a:t>prueba 2 CLP</a:t>
             </a:r>
             <a:endParaRPr lang="en-US" sz="800" dirty="0"/>
           </a:p>

--- a/folletos/2026-04/pptx/FIP_VANTRUST_LIQUIDEZ_PERMANENTE.pptx
+++ b/folletos/2026-04/pptx/FIP_VANTRUST_LIQUIDEZ_PERMANENTE.pptx
@@ -5363,7 +5363,7 @@
                 <a:ea typeface="Calibri" pitchFamily="34" charset="-122"/>
                 <a:cs typeface="Calibri" pitchFamily="34" charset="-120"/>
               </a:rPr>
-              <a:t>prueba CLP</a:t>
+              <a:t>prueba 3 CLP</a:t>
             </a:r>
             <a:endParaRPr lang="en-US" sz="800" dirty="0"/>
           </a:p>

--- a/folletos/2026-04/pptx/FIP_VANTRUST_LIQUIDEZ_PERMANENTE.pptx
+++ b/folletos/2026-04/pptx/FIP_VANTRUST_LIQUIDEZ_PERMANENTE.pptx
@@ -6323,7 +6323,7 @@
                 <a:ea typeface="Calibri" pitchFamily="34" charset="-122"/>
                 <a:cs typeface="Calibri" pitchFamily="34" charset="-120"/>
               </a:rPr>
-              <a:t>prueba CLP</a:t>
+              <a:t>prueba 4 CLP</a:t>
             </a:r>
             <a:endParaRPr lang="en-US" sz="800" dirty="0"/>
           </a:p>

--- a/folletos/2026-04/pptx/FIP_VANTRUST_LIQUIDEZ_PERMANENTE.pptx
+++ b/folletos/2026-04/pptx/FIP_VANTRUST_LIQUIDEZ_PERMANENTE.pptx
@@ -6373,7 +6373,7 @@
                 <a:ea typeface="Calibri" pitchFamily="34" charset="-122"/>
                 <a:cs typeface="Calibri" pitchFamily="34" charset="-120"/>
               </a:rPr>
-              <a:t>prueba CLP</a:t>
+              <a:t>prueba 6 CLP</a:t>
             </a:r>
             <a:endParaRPr lang="en-US" sz="800" dirty="0"/>
           </a:p>

--- a/folletos/2026-04/pptx/FIP_VANTRUST_LIQUIDEZ_PERMANENTE.pptx
+++ b/folletos/2026-04/pptx/FIP_VANTRUST_LIQUIDEZ_PERMANENTE.pptx
@@ -6373,7 +6373,7 @@
                 <a:ea typeface="Calibri" pitchFamily="34" charset="-122"/>
                 <a:cs typeface="Calibri" pitchFamily="34" charset="-120"/>
               </a:rPr>
-              <a:t>prueba 6 CLP</a:t>
+              <a:t>prueba CLP</a:t>
             </a:r>
             <a:endParaRPr lang="en-US" sz="800" dirty="0"/>
           </a:p>
@@ -33352,13 +33352,91 @@
       </p:sp>
       <p:sp>
         <p:nvSpPr>
-          <p:cNvPr id="8" name="Shape 6"/>
+          <p:cNvPr id="8" name="Text 6"/>
           <p:cNvSpPr/>
           <p:nvPr/>
         </p:nvSpPr>
         <p:spPr>
           <a:xfrm>
-            <a:off x="118872" y="1810512"/>
+            <a:off x="118872" y="1719072"/>
+            <a:ext cx="1188720" cy="173736"/>
+          </a:xfrm>
+          <a:prstGeom prst="rect">
+            <a:avLst/>
+          </a:prstGeom>
+          <a:noFill/>
+          <a:ln/>
+        </p:spPr>
+        <p:txBody>
+          <a:bodyPr wrap="square" lIns="0" tIns="0" rIns="0" bIns="0" rtlCol="0" anchor="ctr"/>
+          <a:lstStyle/>
+          <a:p>
+            <a:pPr indent="0" marL="0">
+              <a:buNone/>
+            </a:pPr>
+            <a:r>
+              <a:rPr lang="en-US" sz="750" dirty="0">
+                <a:solidFill>
+                  <a:srgbClr val="000000"/>
+                </a:solidFill>
+                <a:latin typeface="Calibri" pitchFamily="34" charset="0"/>
+                <a:ea typeface="Calibri" pitchFamily="34" charset="-122"/>
+                <a:cs typeface="Calibri" pitchFamily="34" charset="-120"/>
+              </a:rPr>
+              <a:t>CLP</a:t>
+            </a:r>
+            <a:endParaRPr lang="en-US" sz="750" dirty="0"/>
+          </a:p>
+        </p:txBody>
+      </p:sp>
+      <p:sp>
+        <p:nvSpPr>
+          <p:cNvPr id="9" name="Text 7"/>
+          <p:cNvSpPr/>
+          <p:nvPr/>
+        </p:nvSpPr>
+        <p:spPr>
+          <a:xfrm>
+            <a:off x="1307592" y="1719072"/>
+            <a:ext cx="1024128" cy="173736"/>
+          </a:xfrm>
+          <a:prstGeom prst="rect">
+            <a:avLst/>
+          </a:prstGeom>
+          <a:noFill/>
+          <a:ln/>
+        </p:spPr>
+        <p:txBody>
+          <a:bodyPr wrap="square" lIns="0" tIns="0" rIns="0" bIns="0" rtlCol="0" anchor="ctr"/>
+          <a:lstStyle/>
+          <a:p>
+            <a:pPr algn="r" indent="0" marL="0">
+              <a:buNone/>
+            </a:pPr>
+            <a:r>
+              <a:rPr lang="en-US" sz="750" b="1" dirty="0">
+                <a:solidFill>
+                  <a:srgbClr val="000000"/>
+                </a:solidFill>
+                <a:latin typeface="Calibri" pitchFamily="34" charset="0"/>
+                <a:ea typeface="Calibri" pitchFamily="34" charset="-122"/>
+                <a:cs typeface="Calibri" pitchFamily="34" charset="-120"/>
+              </a:rPr>
+              <a:t>100,00%</a:t>
+            </a:r>
+            <a:endParaRPr lang="en-US" sz="750" dirty="0"/>
+          </a:p>
+        </p:txBody>
+      </p:sp>
+      <p:sp>
+        <p:nvSpPr>
+          <p:cNvPr id="10" name="Shape 8"/>
+          <p:cNvSpPr/>
+          <p:nvPr/>
+        </p:nvSpPr>
+        <p:spPr>
+          <a:xfrm>
+            <a:off x="118872" y="2002536"/>
             <a:ext cx="2212848" cy="0"/>
           </a:xfrm>
           <a:prstGeom prst="line">
@@ -33375,13 +33453,13 @@
       </p:sp>
       <p:sp>
         <p:nvSpPr>
-          <p:cNvPr id="9" name="Text 7"/>
+          <p:cNvPr id="11" name="Text 9"/>
           <p:cNvSpPr/>
           <p:nvPr/>
         </p:nvSpPr>
         <p:spPr>
           <a:xfrm>
-            <a:off x="118872" y="1901952"/>
+            <a:off x="118872" y="2093976"/>
             <a:ext cx="2212848" cy="164592"/>
           </a:xfrm>
           <a:prstGeom prst="rect">
@@ -33414,13 +33492,13 @@
       </p:sp>
       <p:sp>
         <p:nvSpPr>
-          <p:cNvPr id="10" name="Shape 8"/>
+          <p:cNvPr id="12" name="Shape 10"/>
           <p:cNvSpPr/>
           <p:nvPr/>
         </p:nvSpPr>
         <p:spPr>
           <a:xfrm>
-            <a:off x="118872" y="2084832"/>
+            <a:off x="118872" y="2276856"/>
             <a:ext cx="2212848" cy="0"/>
           </a:xfrm>
           <a:prstGeom prst="line">
@@ -33437,13 +33515,91 @@
       </p:sp>
       <p:sp>
         <p:nvSpPr>
-          <p:cNvPr id="11" name="Text 9"/>
+          <p:cNvPr id="13" name="Text 11"/>
           <p:cNvSpPr/>
           <p:nvPr/>
         </p:nvSpPr>
         <p:spPr>
           <a:xfrm>
-            <a:off x="118872" y="2157984"/>
+            <a:off x="118872" y="2350008"/>
+            <a:ext cx="1371600" cy="164592"/>
+          </a:xfrm>
+          <a:prstGeom prst="rect">
+            <a:avLst/>
+          </a:prstGeom>
+          <a:noFill/>
+          <a:ln/>
+        </p:spPr>
+        <p:txBody>
+          <a:bodyPr wrap="square" lIns="0" tIns="0" rIns="0" bIns="0" rtlCol="0" anchor="ctr"/>
+          <a:lstStyle/>
+          <a:p>
+            <a:pPr indent="0" marL="0">
+              <a:buNone/>
+            </a:pPr>
+            <a:r>
+              <a:rPr lang="en-US" sz="700" dirty="0">
+                <a:solidFill>
+                  <a:srgbClr val="000000"/>
+                </a:solidFill>
+                <a:latin typeface="Calibri" pitchFamily="34" charset="0"/>
+                <a:ea typeface="Calibri" pitchFamily="34" charset="-122"/>
+                <a:cs typeface="Calibri" pitchFamily="34" charset="-120"/>
+              </a:rPr>
+              <a:t>Inmob</a:t>
+            </a:r>
+            <a:endParaRPr lang="en-US" sz="700" dirty="0"/>
+          </a:p>
+        </p:txBody>
+      </p:sp>
+      <p:sp>
+        <p:nvSpPr>
+          <p:cNvPr id="14" name="Text 12"/>
+          <p:cNvSpPr/>
+          <p:nvPr/>
+        </p:nvSpPr>
+        <p:spPr>
+          <a:xfrm>
+            <a:off x="1490472" y="2350008"/>
+            <a:ext cx="841248" cy="164592"/>
+          </a:xfrm>
+          <a:prstGeom prst="rect">
+            <a:avLst/>
+          </a:prstGeom>
+          <a:noFill/>
+          <a:ln/>
+        </p:spPr>
+        <p:txBody>
+          <a:bodyPr wrap="square" lIns="0" tIns="0" rIns="0" bIns="0" rtlCol="0" anchor="ctr"/>
+          <a:lstStyle/>
+          <a:p>
+            <a:pPr algn="r" indent="0" marL="0">
+              <a:buNone/>
+            </a:pPr>
+            <a:r>
+              <a:rPr lang="en-US" sz="700" b="1" dirty="0">
+                <a:solidFill>
+                  <a:srgbClr val="000000"/>
+                </a:solidFill>
+                <a:latin typeface="Calibri" pitchFamily="34" charset="0"/>
+                <a:ea typeface="Calibri" pitchFamily="34" charset="-122"/>
+                <a:cs typeface="Calibri" pitchFamily="34" charset="-120"/>
+              </a:rPr>
+              <a:t>78,10%</a:t>
+            </a:r>
+            <a:endParaRPr lang="en-US" sz="700" dirty="0"/>
+          </a:p>
+        </p:txBody>
+      </p:sp>
+      <p:sp>
+        <p:nvSpPr>
+          <p:cNvPr id="15" name="Text 13"/>
+          <p:cNvSpPr/>
+          <p:nvPr/>
+        </p:nvSpPr>
+        <p:spPr>
+          <a:xfrm>
+            <a:off x="118872" y="2523744"/>
             <a:ext cx="1371600" cy="164592"/>
           </a:xfrm>
           <a:prstGeom prst="rect">
@@ -33476,13 +33632,13 @@
       </p:sp>
       <p:sp>
         <p:nvSpPr>
-          <p:cNvPr id="12" name="Text 10"/>
+          <p:cNvPr id="16" name="Text 14"/>
           <p:cNvSpPr/>
           <p:nvPr/>
         </p:nvSpPr>
         <p:spPr>
           <a:xfrm>
-            <a:off x="1490472" y="2157984"/>
+            <a:off x="1490472" y="2523744"/>
             <a:ext cx="841248" cy="164592"/>
           </a:xfrm>
           <a:prstGeom prst="rect">
@@ -33507,7 +33663,7 @@
                 <a:ea typeface="Calibri" pitchFamily="34" charset="-122"/>
                 <a:cs typeface="Calibri" pitchFamily="34" charset="-120"/>
               </a:rPr>
-              <a:t>100,00%</a:t>
+              <a:t>20,82%</a:t>
             </a:r>
             <a:endParaRPr lang="en-US" sz="700" dirty="0"/>
           </a:p>
@@ -33515,13 +33671,91 @@
       </p:sp>
       <p:sp>
         <p:nvSpPr>
-          <p:cNvPr id="13" name="Shape 11"/>
+          <p:cNvPr id="17" name="Text 15"/>
           <p:cNvSpPr/>
           <p:nvPr/>
         </p:nvSpPr>
         <p:spPr>
           <a:xfrm>
-            <a:off x="118872" y="2423160"/>
+            <a:off x="118872" y="2697480"/>
+            <a:ext cx="1371600" cy="164592"/>
+          </a:xfrm>
+          <a:prstGeom prst="rect">
+            <a:avLst/>
+          </a:prstGeom>
+          <a:noFill/>
+          <a:ln/>
+        </p:spPr>
+        <p:txBody>
+          <a:bodyPr wrap="square" lIns="0" tIns="0" rIns="0" bIns="0" rtlCol="0" anchor="ctr"/>
+          <a:lstStyle/>
+          <a:p>
+            <a:pPr indent="0" marL="0">
+              <a:buNone/>
+            </a:pPr>
+            <a:r>
+              <a:rPr lang="en-US" sz="700" dirty="0">
+                <a:solidFill>
+                  <a:srgbClr val="000000"/>
+                </a:solidFill>
+                <a:latin typeface="Calibri" pitchFamily="34" charset="0"/>
+                <a:ea typeface="Calibri" pitchFamily="34" charset="-122"/>
+                <a:cs typeface="Calibri" pitchFamily="34" charset="-120"/>
+              </a:rPr>
+              <a:t>Nota estructurada</a:t>
+            </a:r>
+            <a:endParaRPr lang="en-US" sz="700" dirty="0"/>
+          </a:p>
+        </p:txBody>
+      </p:sp>
+      <p:sp>
+        <p:nvSpPr>
+          <p:cNvPr id="18" name="Text 16"/>
+          <p:cNvSpPr/>
+          <p:nvPr/>
+        </p:nvSpPr>
+        <p:spPr>
+          <a:xfrm>
+            <a:off x="1490472" y="2697480"/>
+            <a:ext cx="841248" cy="164592"/>
+          </a:xfrm>
+          <a:prstGeom prst="rect">
+            <a:avLst/>
+          </a:prstGeom>
+          <a:noFill/>
+          <a:ln/>
+        </p:spPr>
+        <p:txBody>
+          <a:bodyPr wrap="square" lIns="0" tIns="0" rIns="0" bIns="0" rtlCol="0" anchor="ctr"/>
+          <a:lstStyle/>
+          <a:p>
+            <a:pPr algn="r" indent="0" marL="0">
+              <a:buNone/>
+            </a:pPr>
+            <a:r>
+              <a:rPr lang="en-US" sz="700" b="1" dirty="0">
+                <a:solidFill>
+                  <a:srgbClr val="000000"/>
+                </a:solidFill>
+                <a:latin typeface="Calibri" pitchFamily="34" charset="0"/>
+                <a:ea typeface="Calibri" pitchFamily="34" charset="-122"/>
+                <a:cs typeface="Calibri" pitchFamily="34" charset="-120"/>
+              </a:rPr>
+              <a:t>1,07%</a:t>
+            </a:r>
+            <a:endParaRPr lang="en-US" sz="700" dirty="0"/>
+          </a:p>
+        </p:txBody>
+      </p:sp>
+      <p:sp>
+        <p:nvSpPr>
+          <p:cNvPr id="19" name="Shape 17"/>
+          <p:cNvSpPr/>
+          <p:nvPr/>
+        </p:nvSpPr>
+        <p:spPr>
+          <a:xfrm>
+            <a:off x="118872" y="2962656"/>
             <a:ext cx="2212848" cy="0"/>
           </a:xfrm>
           <a:prstGeom prst="line">
@@ -33538,13 +33772,13 @@
       </p:sp>
       <p:sp>
         <p:nvSpPr>
-          <p:cNvPr id="14" name="Text 12"/>
+          <p:cNvPr id="20" name="Text 18"/>
           <p:cNvSpPr/>
           <p:nvPr/>
         </p:nvSpPr>
         <p:spPr>
           <a:xfrm>
-            <a:off x="118872" y="2514600"/>
+            <a:off x="118872" y="3054096"/>
             <a:ext cx="2212848" cy="164592"/>
           </a:xfrm>
           <a:prstGeom prst="rect">
@@ -33577,13 +33811,13 @@
       </p:sp>
       <p:sp>
         <p:nvSpPr>
-          <p:cNvPr id="15" name="Shape 13"/>
+          <p:cNvPr id="21" name="Shape 19"/>
           <p:cNvSpPr/>
           <p:nvPr/>
         </p:nvSpPr>
         <p:spPr>
           <a:xfrm>
-            <a:off x="118872" y="2697480"/>
+            <a:off x="118872" y="3236976"/>
             <a:ext cx="2212848" cy="0"/>
           </a:xfrm>
           <a:prstGeom prst="line">
@@ -33600,13 +33834,13 @@
       </p:sp>
       <p:sp>
         <p:nvSpPr>
-          <p:cNvPr id="16" name="Text 14"/>
+          <p:cNvPr id="22" name="Text 20"/>
           <p:cNvSpPr/>
           <p:nvPr/>
         </p:nvSpPr>
         <p:spPr>
           <a:xfrm>
-            <a:off x="118872" y="2770632"/>
+            <a:off x="118872" y="3310128"/>
             <a:ext cx="1371600" cy="182880"/>
           </a:xfrm>
           <a:prstGeom prst="rect">
@@ -33639,13 +33873,13 @@
       </p:sp>
       <p:sp>
         <p:nvSpPr>
-          <p:cNvPr id="17" name="Text 15"/>
+          <p:cNvPr id="23" name="Text 21"/>
           <p:cNvSpPr/>
           <p:nvPr/>
         </p:nvSpPr>
         <p:spPr>
           <a:xfrm>
-            <a:off x="1490472" y="2770632"/>
+            <a:off x="1490472" y="3310128"/>
             <a:ext cx="841248" cy="182880"/>
           </a:xfrm>
           <a:prstGeom prst="rect">
@@ -33670,7 +33904,7 @@
                 <a:ea typeface="Calibri" pitchFamily="34" charset="-122"/>
                 <a:cs typeface="Calibri" pitchFamily="34" charset="-120"/>
               </a:rPr>
-              <a:t>63,16%</a:t>
+              <a:t>13,67%</a:t>
             </a:r>
             <a:endParaRPr lang="en-US" sz="750" dirty="0"/>
           </a:p>
@@ -33678,13 +33912,13 @@
       </p:sp>
       <p:sp>
         <p:nvSpPr>
-          <p:cNvPr id="18" name="Text 16"/>
+          <p:cNvPr id="24" name="Text 22"/>
           <p:cNvSpPr/>
           <p:nvPr/>
         </p:nvSpPr>
         <p:spPr>
           <a:xfrm>
-            <a:off x="118872" y="2971800"/>
+            <a:off x="118872" y="3511296"/>
             <a:ext cx="1371600" cy="182880"/>
           </a:xfrm>
           <a:prstGeom prst="rect">
@@ -33717,13 +33951,13 @@
       </p:sp>
       <p:sp>
         <p:nvSpPr>
-          <p:cNvPr id="19" name="Text 17"/>
+          <p:cNvPr id="25" name="Text 23"/>
           <p:cNvSpPr/>
           <p:nvPr/>
         </p:nvSpPr>
         <p:spPr>
           <a:xfrm>
-            <a:off x="1490472" y="2971800"/>
+            <a:off x="1490472" y="3511296"/>
             <a:ext cx="841248" cy="182880"/>
           </a:xfrm>
           <a:prstGeom prst="rect">
@@ -33748,7 +33982,7 @@
                 <a:ea typeface="Calibri" pitchFamily="34" charset="-122"/>
                 <a:cs typeface="Calibri" pitchFamily="34" charset="-120"/>
               </a:rPr>
-              <a:t>28,00%</a:t>
+              <a:t>12,68%</a:t>
             </a:r>
             <a:endParaRPr lang="en-US" sz="750" dirty="0"/>
           </a:p>
@@ -33756,13 +33990,13 @@
       </p:sp>
       <p:sp>
         <p:nvSpPr>
-          <p:cNvPr id="20" name="Text 18"/>
+          <p:cNvPr id="26" name="Text 24"/>
           <p:cNvSpPr/>
           <p:nvPr/>
         </p:nvSpPr>
         <p:spPr>
           <a:xfrm>
-            <a:off x="118872" y="3172968"/>
+            <a:off x="118872" y="3712464"/>
             <a:ext cx="1371600" cy="182880"/>
           </a:xfrm>
           <a:prstGeom prst="rect">
@@ -33795,13 +34029,13 @@
       </p:sp>
       <p:sp>
         <p:nvSpPr>
-          <p:cNvPr id="21" name="Text 19"/>
+          <p:cNvPr id="27" name="Text 25"/>
           <p:cNvSpPr/>
           <p:nvPr/>
         </p:nvSpPr>
         <p:spPr>
           <a:xfrm>
-            <a:off x="1490472" y="3172968"/>
+            <a:off x="1490472" y="3712464"/>
             <a:ext cx="841248" cy="182880"/>
           </a:xfrm>
           <a:prstGeom prst="rect">
@@ -33826,7 +34060,7 @@
                 <a:ea typeface="Calibri" pitchFamily="34" charset="-122"/>
                 <a:cs typeface="Calibri" pitchFamily="34" charset="-120"/>
               </a:rPr>
-              <a:t>8,84%</a:t>
+              <a:t>73,65%</a:t>
             </a:r>
             <a:endParaRPr lang="en-US" sz="750" dirty="0"/>
           </a:p>
@@ -33834,13 +34068,13 @@
       </p:sp>
       <p:sp>
         <p:nvSpPr>
-          <p:cNvPr id="22" name="Text 20"/>
+          <p:cNvPr id="28" name="Text 26"/>
           <p:cNvSpPr/>
           <p:nvPr/>
         </p:nvSpPr>
         <p:spPr>
           <a:xfrm>
-            <a:off x="118872" y="3374136"/>
+            <a:off x="118872" y="3913632"/>
             <a:ext cx="1371600" cy="182880"/>
           </a:xfrm>
           <a:prstGeom prst="rect">
@@ -33873,13 +34107,13 @@
       </p:sp>
       <p:sp>
         <p:nvSpPr>
-          <p:cNvPr id="23" name="Text 21"/>
+          <p:cNvPr id="29" name="Text 27"/>
           <p:cNvSpPr/>
           <p:nvPr/>
         </p:nvSpPr>
         <p:spPr>
           <a:xfrm>
-            <a:off x="1490472" y="3374136"/>
+            <a:off x="1490472" y="3913632"/>
             <a:ext cx="841248" cy="182880"/>
           </a:xfrm>
           <a:prstGeom prst="rect">
@@ -33912,7 +34146,7 @@
       </p:sp>
       <p:sp>
         <p:nvSpPr>
-          <p:cNvPr id="24" name="Text 22"/>
+          <p:cNvPr id="30" name="Text 28"/>
           <p:cNvSpPr/>
           <p:nvPr/>
         </p:nvSpPr>
@@ -33951,7 +34185,7 @@
       </p:sp>
       <p:sp>
         <p:nvSpPr>
-          <p:cNvPr id="25" name="Shape 23"/>
+          <p:cNvPr id="31" name="Shape 29"/>
           <p:cNvSpPr/>
           <p:nvPr/>
         </p:nvSpPr>
@@ -33974,7 +34208,7 @@
       </p:sp>
       <p:sp>
         <p:nvSpPr>
-          <p:cNvPr id="26" name="Text 24"/>
+          <p:cNvPr id="32" name="Text 30"/>
           <p:cNvSpPr/>
           <p:nvPr/>
         </p:nvSpPr>
@@ -34030,7 +34264,7 @@
       </p:sp>
       <p:sp>
         <p:nvSpPr>
-          <p:cNvPr id="27" name="Text 25"/>
+          <p:cNvPr id="33" name="Text 31"/>
           <p:cNvSpPr/>
           <p:nvPr/>
         </p:nvSpPr>
@@ -34086,7 +34320,7 @@
       </p:sp>
       <p:sp>
         <p:nvSpPr>
-          <p:cNvPr id="28" name="Text 26"/>
+          <p:cNvPr id="34" name="Text 32"/>
           <p:cNvSpPr/>
           <p:nvPr/>
         </p:nvSpPr>
@@ -34142,7 +34376,7 @@
       </p:sp>
       <p:sp>
         <p:nvSpPr>
-          <p:cNvPr id="29" name="Text 27"/>
+          <p:cNvPr id="35" name="Text 33"/>
           <p:cNvSpPr/>
           <p:nvPr/>
         </p:nvSpPr>
@@ -34198,7 +34432,7 @@
       </p:sp>
       <p:sp>
         <p:nvSpPr>
-          <p:cNvPr id="30" name="Text 28"/>
+          <p:cNvPr id="36" name="Text 34"/>
           <p:cNvSpPr/>
           <p:nvPr/>
         </p:nvSpPr>
@@ -34254,7 +34488,7 @@
       </p:sp>
       <p:sp>
         <p:nvSpPr>
-          <p:cNvPr id="31" name="Text 29"/>
+          <p:cNvPr id="37" name="Text 35"/>
           <p:cNvSpPr/>
           <p:nvPr/>
         </p:nvSpPr>
@@ -34310,7 +34544,7 @@
       </p:sp>
       <p:sp>
         <p:nvSpPr>
-          <p:cNvPr id="32" name="Text 30"/>
+          <p:cNvPr id="38" name="Text 36"/>
           <p:cNvSpPr/>
           <p:nvPr/>
         </p:nvSpPr>
@@ -34366,7 +34600,7 @@
       </p:sp>
       <p:sp>
         <p:nvSpPr>
-          <p:cNvPr id="33" name="Text 31"/>
+          <p:cNvPr id="39" name="Text 37"/>
           <p:cNvSpPr/>
           <p:nvPr/>
         </p:nvSpPr>
@@ -34422,7 +34656,7 @@
       </p:sp>
       <p:sp>
         <p:nvSpPr>
-          <p:cNvPr id="34" name="Text 32"/>
+          <p:cNvPr id="40" name="Text 38"/>
           <p:cNvSpPr/>
           <p:nvPr/>
         </p:nvSpPr>
@@ -34478,7 +34712,7 @@
       </p:sp>
       <p:sp>
         <p:nvSpPr>
-          <p:cNvPr id="35" name="Shape 33"/>
+          <p:cNvPr id="41" name="Shape 39"/>
           <p:cNvSpPr/>
           <p:nvPr/>
         </p:nvSpPr>
@@ -34501,7 +34735,7 @@
       </p:sp>
       <p:sp>
         <p:nvSpPr>
-          <p:cNvPr id="36" name="Text 34"/>
+          <p:cNvPr id="42" name="Text 40"/>
           <p:cNvSpPr/>
           <p:nvPr/>
         </p:nvSpPr>
@@ -34540,7 +34774,7 @@
       </p:sp>
       <p:sp>
         <p:nvSpPr>
-          <p:cNvPr id="37" name="Shape 35"/>
+          <p:cNvPr id="43" name="Shape 41"/>
           <p:cNvSpPr/>
           <p:nvPr/>
         </p:nvSpPr>
@@ -34563,7 +34797,7 @@
       </p:sp>
       <p:sp>
         <p:nvSpPr>
-          <p:cNvPr id="38" name="Text 36"/>
+          <p:cNvPr id="44" name="Text 42"/>
           <p:cNvSpPr/>
           <p:nvPr/>
         </p:nvSpPr>

--- a/folletos/2026-04/pptx/FIP_VANTRUST_LIQUIDEZ_PERMANENTE.pptx
+++ b/folletos/2026-04/pptx/FIP_VANTRUST_LIQUIDEZ_PERMANENTE.pptx
@@ -6373,7 +6373,7 @@
                 <a:ea typeface="Calibri" pitchFamily="34" charset="-122"/>
                 <a:cs typeface="Calibri" pitchFamily="34" charset="-120"/>
               </a:rPr>
-              <a:t>prueba CLP</a:t>
+              <a:t>prueba 8 CLP</a:t>
             </a:r>
             <a:endParaRPr lang="en-US" sz="800" dirty="0"/>
           </a:p>

--- a/folletos/2026-04/pptx/FIP_VANTRUST_LIQUIDEZ_PERMANENTE.pptx
+++ b/folletos/2026-04/pptx/FIP_VANTRUST_LIQUIDEZ_PERMANENTE.pptx
@@ -3114,7 +3114,7 @@
                 <a:ea typeface="Calibri" pitchFamily="34" charset="-122"/>
                 <a:cs typeface="Calibri" pitchFamily="34" charset="-120"/>
               </a:rPr>
-              <a:t>prueba CLP</a:t>
+              <a:t>prueba 10 CLP</a:t>
             </a:r>
             <a:endParaRPr lang="en-US" sz="800" dirty="0"/>
           </a:p>

--- a/folletos/2026-04/pptx/FIP_VANTRUST_LIQUIDEZ_PERMANENTE.pptx
+++ b/folletos/2026-04/pptx/FIP_VANTRUST_LIQUIDEZ_PERMANENTE.pptx
@@ -3114,7 +3114,7 @@
                 <a:ea typeface="Calibri" pitchFamily="34" charset="-122"/>
                 <a:cs typeface="Calibri" pitchFamily="34" charset="-120"/>
               </a:rPr>
-              <a:t>prueba 10 CLP</a:t>
+              <a:t>prueba 11 CLP</a:t>
             </a:r>
             <a:endParaRPr lang="en-US" sz="800" dirty="0"/>
           </a:p>

--- a/folletos/2026-04/pptx/FIP_VANTRUST_LIQUIDEZ_PERMANENTE.pptx
+++ b/folletos/2026-04/pptx/FIP_VANTRUST_LIQUIDEZ_PERMANENTE.pptx
@@ -3131,7 +3131,7 @@
                 <a:ea typeface="Calibri" pitchFamily="34" charset="-122"/>
                 <a:cs typeface="Calibri" pitchFamily="34" charset="-120"/>
               </a:rPr>
-              <a:t>prueba CLP</a:t>
+              <a:t>prueba 11 CLP</a:t>
             </a:r>
             <a:endParaRPr lang="en-US" sz="800" dirty="0"/>
           </a:p>

--- a/folletos/2026-04/pptx/FIP_VANTRUST_LIQUIDEZ_PERMANENTE.pptx
+++ b/folletos/2026-04/pptx/FIP_VANTRUST_LIQUIDEZ_PERMANENTE.pptx
@@ -3131,7 +3131,7 @@
                 <a:ea typeface="Calibri" pitchFamily="34" charset="-122"/>
                 <a:cs typeface="Calibri" pitchFamily="34" charset="-120"/>
               </a:rPr>
-              <a:t>prueba 11 CLP</a:t>
+              <a:t>prueba 12 CLP</a:t>
             </a:r>
             <a:endParaRPr lang="en-US" sz="800" dirty="0"/>
           </a:p>

--- a/folletos/2026-04/pptx/FIP_VANTRUST_LIQUIDEZ_PERMANENTE.pptx
+++ b/folletos/2026-04/pptx/FIP_VANTRUST_LIQUIDEZ_PERMANENTE.pptx
@@ -189,42 +189,39 @@
           </c:marker>
           <c:cat>
             <c:multiLvlStrRef>
-              <c:f>Sheet1!$A$2:$A$12</c:f>
+              <c:f>Sheet1!$A$2:$A$11</c:f>
               <c:multiLvlStrCache>
-                <c:ptCount val="11"/>
+                <c:ptCount val="10"/>
                 <c:lvl>
                   <c:pt idx="0">
-                    <c:v>2025-07-31</c:v>
+                    <c:v>Jul 2025</c:v>
                   </c:pt>
                   <c:pt idx="1">
-                    <c:v>2025-08-31</c:v>
+                    <c:v>Aug 2025</c:v>
                   </c:pt>
                   <c:pt idx="2">
-                    <c:v>2025-09-30</c:v>
+                    <c:v>Sep 2025</c:v>
                   </c:pt>
                   <c:pt idx="3">
-                    <c:v>2025-10-31</c:v>
+                    <c:v>Oct 2025</c:v>
                   </c:pt>
                   <c:pt idx="4">
-                    <c:v>2025-11-30</c:v>
+                    <c:v>Nov 2025</c:v>
                   </c:pt>
                   <c:pt idx="5">
-                    <c:v>2025-12-31</c:v>
+                    <c:v>Dec 2025</c:v>
                   </c:pt>
                   <c:pt idx="6">
-                    <c:v>2026-01-31</c:v>
+                    <c:v>Jan 2026</c:v>
                   </c:pt>
                   <c:pt idx="7">
-                    <c:v>2026-02-28</c:v>
+                    <c:v>Feb 2026</c:v>
                   </c:pt>
                   <c:pt idx="8">
-                    <c:v>2026-03-31</c:v>
+                    <c:v>Mar 2026</c:v>
                   </c:pt>
                   <c:pt idx="9">
-                    <c:v>2026-04-30</c:v>
-                  </c:pt>
-                  <c:pt idx="10">
-                    <c:v>2026-05-31</c:v>
+                    <c:v>Apr 2026</c:v>
                   </c:pt>
                 </c:lvl>
               </c:multiLvlStrCache>
@@ -232,42 +229,39 @@
           </c:cat>
           <c:val>
             <c:numRef>
-              <c:f>Sheet1!$B$2:$B$12</c:f>
+              <c:f>Sheet1!$B$2:$B$11</c:f>
               <c:numCache>
                 <c:formatCode>General</c:formatCode>
-                <c:ptCount val="11"/>
+                <c:ptCount val="10"/>
                 <c:pt idx="0">
-                  <c:v>519.78</c:v>
+                  <c:v>100</c:v>
                 </c:pt>
                 <c:pt idx="1">
-                  <c:v>522.32</c:v>
+                  <c:v>100.4</c:v>
                 </c:pt>
                 <c:pt idx="2">
-                  <c:v>523.75</c:v>
+                  <c:v>100.79</c:v>
                 </c:pt>
                 <c:pt idx="3">
-                  <c:v>524.58</c:v>
+                  <c:v>101.19</c:v>
                 </c:pt>
                 <c:pt idx="4">
-                  <c:v>525.18</c:v>
+                  <c:v>101.59</c:v>
                 </c:pt>
                 <c:pt idx="5">
-                  <c:v>525.63</c:v>
+                  <c:v>101.98</c:v>
                 </c:pt>
                 <c:pt idx="6">
-                  <c:v>525.88</c:v>
+                  <c:v>102.37</c:v>
                 </c:pt>
                 <c:pt idx="7">
-                  <c:v>526.1</c:v>
+                  <c:v>102.75</c:v>
                 </c:pt>
                 <c:pt idx="8">
-                  <c:v>526.32</c:v>
+                  <c:v>103.14</c:v>
                 </c:pt>
                 <c:pt idx="9">
-                  <c:v>526.54</c:v>
-                </c:pt>
-                <c:pt idx="10">
-                  <c:v>526.76</c:v>
+                  <c:v>103.52</c:v>
                 </c:pt>
               </c:numCache>
             </c:numRef>
@@ -283,7 +277,7 @@
               <c:strCache>
                 <c:ptCount val="1"/>
                 <c:pt idx="0">
-                  <c:v>FIP LIQUIDEZ PERMANENTE</c:v>
+                  <c:v>FIP LIQUIDEZ Permanente</c:v>
                 </c:pt>
               </c:strCache>
             </c:strRef>
@@ -345,42 +339,39 @@
           </c:marker>
           <c:cat>
             <c:multiLvlStrRef>
-              <c:f>Sheet1!$A$2:$A$12</c:f>
+              <c:f>Sheet1!$A$2:$A$11</c:f>
               <c:multiLvlStrCache>
-                <c:ptCount val="11"/>
+                <c:ptCount val="10"/>
                 <c:lvl>
                   <c:pt idx="0">
-                    <c:v>2025-07-31</c:v>
+                    <c:v>Jul 2025</c:v>
                   </c:pt>
                   <c:pt idx="1">
-                    <c:v>2025-08-31</c:v>
+                    <c:v>Aug 2025</c:v>
                   </c:pt>
                   <c:pt idx="2">
-                    <c:v>2025-09-30</c:v>
+                    <c:v>Sep 2025</c:v>
                   </c:pt>
                   <c:pt idx="3">
-                    <c:v>2025-10-31</c:v>
+                    <c:v>Oct 2025</c:v>
                   </c:pt>
                   <c:pt idx="4">
-                    <c:v>2025-11-30</c:v>
+                    <c:v>Nov 2025</c:v>
                   </c:pt>
                   <c:pt idx="5">
-                    <c:v>2025-12-31</c:v>
+                    <c:v>Dec 2025</c:v>
                   </c:pt>
                   <c:pt idx="6">
-                    <c:v>2026-01-31</c:v>
+                    <c:v>Jan 2026</c:v>
                   </c:pt>
                   <c:pt idx="7">
-                    <c:v>2026-02-28</c:v>
+                    <c:v>Feb 2026</c:v>
                   </c:pt>
                   <c:pt idx="8">
-                    <c:v>2026-03-31</c:v>
+                    <c:v>Mar 2026</c:v>
                   </c:pt>
                   <c:pt idx="9">
-                    <c:v>2026-04-30</c:v>
-                  </c:pt>
-                  <c:pt idx="10">
-                    <c:v>2026-05-31</c:v>
+                    <c:v>Apr 2026</c:v>
                   </c:pt>
                 </c:lvl>
               </c:multiLvlStrCache>
@@ -388,42 +379,39 @@
           </c:cat>
           <c:val>
             <c:numRef>
-              <c:f>Sheet1!$C$2:$C$12</c:f>
+              <c:f>Sheet1!$C$2:$C$11</c:f>
               <c:numCache>
                 <c:formatCode>General</c:formatCode>
-                <c:ptCount val="11"/>
+                <c:ptCount val="10"/>
                 <c:pt idx="0">
-                  <c:v>1000</c:v>
+                  <c:v>100</c:v>
                 </c:pt>
                 <c:pt idx="1">
-                  <c:v>1006.65</c:v>
+                  <c:v>100.67</c:v>
                 </c:pt>
                 <c:pt idx="2">
-                  <c:v>1012.74</c:v>
+                  <c:v>101.27</c:v>
                 </c:pt>
                 <c:pt idx="3">
-                  <c:v>1018.64</c:v>
+                  <c:v>101.86</c:v>
                 </c:pt>
                 <c:pt idx="4">
-                  <c:v>1026.71</c:v>
+                  <c:v>102.67</c:v>
                 </c:pt>
                 <c:pt idx="5">
-                  <c:v>1068.18</c:v>
+                  <c:v>106.82</c:v>
                 </c:pt>
                 <c:pt idx="6">
-                  <c:v>1041.19</c:v>
+                  <c:v>104.12</c:v>
                 </c:pt>
                 <c:pt idx="7">
-                  <c:v>1046.85</c:v>
+                  <c:v>104.68</c:v>
                 </c:pt>
                 <c:pt idx="8">
-                  <c:v>1052.84</c:v>
+                  <c:v>105.28</c:v>
                 </c:pt>
                 <c:pt idx="9">
-                  <c:v>1058.77</c:v>
-                </c:pt>
-                <c:pt idx="10">
-                  <c:v>1059.72</c:v>
+                  <c:v>105.88</c:v>
                 </c:pt>
               </c:numCache>
             </c:numRef>
@@ -501,42 +489,39 @@
           </c:marker>
           <c:cat>
             <c:multiLvlStrRef>
-              <c:f>Sheet1!$A$2:$A$12</c:f>
+              <c:f>Sheet1!$A$2:$A$11</c:f>
               <c:multiLvlStrCache>
-                <c:ptCount val="11"/>
+                <c:ptCount val="10"/>
                 <c:lvl>
                   <c:pt idx="0">
-                    <c:v>2025-07-31</c:v>
+                    <c:v>Jul 2025</c:v>
                   </c:pt>
                   <c:pt idx="1">
-                    <c:v>2025-08-31</c:v>
+                    <c:v>Aug 2025</c:v>
                   </c:pt>
                   <c:pt idx="2">
-                    <c:v>2025-09-30</c:v>
+                    <c:v>Sep 2025</c:v>
                   </c:pt>
                   <c:pt idx="3">
-                    <c:v>2025-10-31</c:v>
+                    <c:v>Oct 2025</c:v>
                   </c:pt>
                   <c:pt idx="4">
-                    <c:v>2025-11-30</c:v>
+                    <c:v>Nov 2025</c:v>
                   </c:pt>
                   <c:pt idx="5">
-                    <c:v>2025-12-31</c:v>
+                    <c:v>Dec 2025</c:v>
                   </c:pt>
                   <c:pt idx="6">
-                    <c:v>2026-01-31</c:v>
+                    <c:v>Jan 2026</c:v>
                   </c:pt>
                   <c:pt idx="7">
-                    <c:v>2026-02-28</c:v>
+                    <c:v>Feb 2026</c:v>
                   </c:pt>
                   <c:pt idx="8">
-                    <c:v>2026-03-31</c:v>
+                    <c:v>Mar 2026</c:v>
                   </c:pt>
                   <c:pt idx="9">
-                    <c:v>2026-04-30</c:v>
-                  </c:pt>
-                  <c:pt idx="10">
-                    <c:v>2026-05-31</c:v>
+                    <c:v>Apr 2026</c:v>
                   </c:pt>
                 </c:lvl>
               </c:multiLvlStrCache>
@@ -544,42 +529,39 @@
           </c:cat>
           <c:val>
             <c:numRef>
-              <c:f>Sheet1!$D$2:$D$12</c:f>
+              <c:f>Sheet1!$D$2:$D$11</c:f>
               <c:numCache>
                 <c:formatCode>General</c:formatCode>
-                <c:ptCount val="11"/>
+                <c:ptCount val="10"/>
                 <c:pt idx="0">
-                  <c:v>907.63</c:v>
+                  <c:v>100</c:v>
                 </c:pt>
                 <c:pt idx="1">
-                  <c:v>909.53</c:v>
+                  <c:v>100.3</c:v>
                 </c:pt>
                 <c:pt idx="2">
-                  <c:v>913.59</c:v>
+                  <c:v>100.58</c:v>
                 </c:pt>
                 <c:pt idx="3">
-                  <c:v>913.59</c:v>
+                  <c:v>100.87</c:v>
                 </c:pt>
                 <c:pt idx="4">
-                  <c:v>915.24</c:v>
+                  <c:v>101.15</c:v>
                 </c:pt>
                 <c:pt idx="5">
-                  <c:v>917.14</c:v>
+                  <c:v>101.71</c:v>
                 </c:pt>
                 <c:pt idx="6">
-                  <c:v>919.08</c:v>
+                  <c:v>101.71</c:v>
                 </c:pt>
                 <c:pt idx="7">
-                  <c:v>921.04</c:v>
+                  <c:v>101.96</c:v>
                 </c:pt>
                 <c:pt idx="8">
-                  <c:v>923.01</c:v>
+                  <c:v>102.23</c:v>
                 </c:pt>
                 <c:pt idx="9">
-                  <c:v>925.03</c:v>
-                </c:pt>
-                <c:pt idx="10">
-                  <c:v>926.95</c:v>
+                  <c:v>102.5</c:v>
                 </c:pt>
               </c:numCache>
             </c:numRef>
@@ -661,7 +643,7 @@
         <c:axId val="2094734552"/>
         <c:scaling>
           <c:orientation val="minMax"/>
-          <c:min val="504"/>
+          <c:min val="97"/>
         </c:scaling>
         <c:delete val="0"/>
         <c:axPos val="l"/>
@@ -3131,7 +3113,7 @@
                 <a:ea typeface="Calibri" pitchFamily="34" charset="-122"/>
                 <a:cs typeface="Calibri" pitchFamily="34" charset="-120"/>
               </a:rPr>
-              <a:t>prueba 12 CLP</a:t>
+              <a:t>prueba CLP</a:t>
             </a:r>
             <a:endParaRPr lang="en-US" sz="800" dirty="0"/>
           </a:p>
@@ -3642,28 +3624,7 @@
                           <a:ea typeface="Calibri" pitchFamily="34" charset="-122"/>
                           <a:cs typeface="Calibri" pitchFamily="34" charset="-120"/>
                         </a:rPr>
-                        <a:t>Acum.</a:t>
-                      </a:r>
-                      <a:endParaRPr lang="en-US" sz="750" dirty="0">
-                        <a:latin typeface="Calibri" charset="0"/>
-                        <a:ea typeface="Calibri" charset="0"/>
-                        <a:cs typeface="Calibri" charset="0"/>
-                      </a:endParaRPr>
-                    </a:p>
-                    <a:p>
-                      <a:pPr algn="ctr" indent="0" marL="0">
-                        <a:buNone/>
-                      </a:pPr>
-                      <a:r>
-                        <a:rPr lang="en-US" sz="750" b="1" dirty="0">
-                          <a:solidFill>
-                            <a:srgbClr val="000000"/>
-                          </a:solidFill>
-                          <a:latin typeface="Calibri" pitchFamily="34" charset="0"/>
-                          <a:ea typeface="Calibri" pitchFamily="34" charset="-122"/>
-                          <a:cs typeface="Calibri" pitchFamily="34" charset="-120"/>
-                        </a:rPr>
-                        <a:t>2026 (*)</a:t>
+                        <a:t>Acum 2026 (*)</a:t>
                       </a:r>
                       <a:endParaRPr lang="en-US" sz="750" dirty="0">
                         <a:latin typeface="Calibri" charset="0"/>
@@ -3801,7 +3762,7 @@
                           <a:ea typeface="Calibri" pitchFamily="34" charset="-122"/>
                           <a:cs typeface="Calibri" pitchFamily="34" charset="-120"/>
                         </a:rPr>
-                        <a:t>0,37%</a:t>
+                        <a:t>0.37%</a:t>
                       </a:r>
                       <a:endParaRPr lang="en-US" sz="750" dirty="0">
                         <a:latin typeface="Calibri" charset="0"/>
@@ -3848,7 +3809,7 @@
                       <a:tailEnd type="none" w="med" len="med"/>
                     </a:lnB>
                     <a:solidFill>
-                      <a:srgbClr val="FFFFFF"/>
+                      <a:srgbClr val="F9F9F9"/>
                     </a:solidFill>
                   </a:tcPr>
                 </a:tc>
@@ -3869,7 +3830,7 @@
                           <a:ea typeface="Calibri" pitchFamily="34" charset="-122"/>
                           <a:cs typeface="Calibri" pitchFamily="34" charset="-120"/>
                         </a:rPr>
-                        <a:t>1,13%</a:t>
+                        <a:t>1.13%</a:t>
                       </a:r>
                       <a:endParaRPr lang="en-US" sz="750" dirty="0">
                         <a:latin typeface="Calibri" charset="0"/>
@@ -3916,7 +3877,7 @@
                       <a:tailEnd type="none" w="med" len="med"/>
                     </a:lnB>
                     <a:solidFill>
-                      <a:srgbClr val="FFFFFF"/>
+                      <a:srgbClr val="F9F9F9"/>
                     </a:solidFill>
                   </a:tcPr>
                 </a:tc>
@@ -3937,7 +3898,7 @@
                           <a:ea typeface="Calibri" pitchFamily="34" charset="-122"/>
                           <a:cs typeface="Calibri" pitchFamily="34" charset="-120"/>
                         </a:rPr>
-                        <a:t>2,30%</a:t>
+                        <a:t>2.30%</a:t>
                       </a:r>
                       <a:endParaRPr lang="en-US" sz="750" dirty="0">
                         <a:latin typeface="Calibri" charset="0"/>
@@ -3984,7 +3945,7 @@
                       <a:tailEnd type="none" w="med" len="med"/>
                     </a:lnB>
                     <a:solidFill>
-                      <a:srgbClr val="FFFFFF"/>
+                      <a:srgbClr val="F9F9F9"/>
                     </a:solidFill>
                   </a:tcPr>
                 </a:tc>
@@ -4005,7 +3966,7 @@
                           <a:ea typeface="Calibri" pitchFamily="34" charset="-122"/>
                           <a:cs typeface="Calibri" pitchFamily="34" charset="-120"/>
                         </a:rPr>
-                        <a:t>4,82%</a:t>
+                        <a:t>4.82%</a:t>
                       </a:r>
                       <a:endParaRPr lang="en-US" sz="750" dirty="0">
                         <a:latin typeface="Calibri" charset="0"/>
@@ -4052,7 +4013,7 @@
                       <a:tailEnd type="none" w="med" len="med"/>
                     </a:lnB>
                     <a:solidFill>
-                      <a:srgbClr val="FFFFFF"/>
+                      <a:srgbClr val="F9F9F9"/>
                     </a:solidFill>
                   </a:tcPr>
                 </a:tc>
@@ -4073,7 +4034,7 @@
                           <a:ea typeface="Calibri" pitchFamily="34" charset="-122"/>
                           <a:cs typeface="Calibri" pitchFamily="34" charset="-120"/>
                         </a:rPr>
-                        <a:t>3,39%</a:t>
+                        <a:t>3.39%</a:t>
                       </a:r>
                       <a:endParaRPr lang="en-US" sz="750" dirty="0">
                         <a:latin typeface="Calibri" charset="0"/>
@@ -4120,7 +4081,7 @@
                       <a:tailEnd type="none" w="med" len="med"/>
                     </a:lnB>
                     <a:solidFill>
-                      <a:srgbClr val="FFFFFF"/>
+                      <a:srgbClr val="F9F9F9"/>
                     </a:solidFill>
                   </a:tcPr>
                 </a:tc>
@@ -4211,7 +4172,7 @@
                           <a:ea typeface="Calibri" pitchFamily="34" charset="-122"/>
                           <a:cs typeface="Calibri" pitchFamily="34" charset="-120"/>
                         </a:rPr>
-                        <a:t>0,26%</a:t>
+                        <a:t>0.26%</a:t>
                       </a:r>
                       <a:endParaRPr lang="en-US" sz="750" dirty="0">
                         <a:latin typeface="Calibri" charset="0"/>
@@ -4279,7 +4240,7 @@
                           <a:ea typeface="Calibri" pitchFamily="34" charset="-122"/>
                           <a:cs typeface="Calibri" pitchFamily="34" charset="-120"/>
                         </a:rPr>
-                        <a:t>0,77%</a:t>
+                        <a:t>0.77%</a:t>
                       </a:r>
                       <a:endParaRPr lang="en-US" sz="750" dirty="0">
                         <a:latin typeface="Calibri" charset="0"/>
@@ -4347,7 +4308,7 @@
                           <a:ea typeface="Calibri" pitchFamily="34" charset="-122"/>
                           <a:cs typeface="Calibri" pitchFamily="34" charset="-120"/>
                         </a:rPr>
-                        <a:t>1,62%</a:t>
+                        <a:t>1.62%</a:t>
                       </a:r>
                       <a:endParaRPr lang="en-US" sz="750" dirty="0">
                         <a:latin typeface="Calibri" charset="0"/>
@@ -4415,7 +4376,7 @@
                           <a:ea typeface="Calibri" pitchFamily="34" charset="-122"/>
                           <a:cs typeface="Calibri" pitchFamily="34" charset="-120"/>
                         </a:rPr>
-                        <a:t>3,43%</a:t>
+                        <a:t>3.43%</a:t>
                       </a:r>
                       <a:endParaRPr lang="en-US" sz="750" dirty="0">
                         <a:latin typeface="Calibri" charset="0"/>
@@ -4483,7 +4444,7 @@
                           <a:ea typeface="Calibri" pitchFamily="34" charset="-122"/>
                           <a:cs typeface="Calibri" pitchFamily="34" charset="-120"/>
                         </a:rPr>
-                        <a:t>2,32%</a:t>
+                        <a:t>2.32%</a:t>
                       </a:r>
                       <a:endParaRPr lang="en-US" sz="750" dirty="0">
                         <a:latin typeface="Calibri" charset="0"/>
@@ -4553,7 +4514,7 @@
                           <a:ea typeface="Calibri" pitchFamily="34" charset="-122"/>
                           <a:cs typeface="Calibri" pitchFamily="34" charset="-120"/>
                         </a:rPr>
-                        <a:t>FIP LIQUIDEZ PERMANENTE</a:t>
+                        <a:t>FIP LIQUIDEZ Permanente</a:t>
                       </a:r>
                       <a:endParaRPr lang="en-US" sz="750" dirty="0">
                         <a:latin typeface="Calibri" charset="0"/>
@@ -4621,7 +4582,7 @@
                           <a:ea typeface="Calibri" pitchFamily="34" charset="-122"/>
                           <a:cs typeface="Calibri" pitchFamily="34" charset="-120"/>
                         </a:rPr>
-                        <a:t>0,56%</a:t>
+                        <a:t>0.56%</a:t>
                       </a:r>
                       <a:endParaRPr lang="en-US" sz="750" dirty="0">
                         <a:latin typeface="Calibri" charset="0"/>
@@ -4668,7 +4629,7 @@
                       <a:tailEnd type="none" w="med" len="med"/>
                     </a:lnB>
                     <a:solidFill>
-                      <a:srgbClr val="FFFFFF"/>
+                      <a:srgbClr val="F9F9F9"/>
                     </a:solidFill>
                   </a:tcPr>
                 </a:tc>
@@ -4689,7 +4650,7 @@
                           <a:ea typeface="Calibri" pitchFamily="34" charset="-122"/>
                           <a:cs typeface="Calibri" pitchFamily="34" charset="-120"/>
                         </a:rPr>
-                        <a:t>1,69%</a:t>
+                        <a:t>1.69%</a:t>
                       </a:r>
                       <a:endParaRPr lang="en-US" sz="750" dirty="0">
                         <a:latin typeface="Calibri" charset="0"/>
@@ -4736,7 +4697,7 @@
                       <a:tailEnd type="none" w="med" len="med"/>
                     </a:lnB>
                     <a:solidFill>
-                      <a:srgbClr val="FFFFFF"/>
+                      <a:srgbClr val="F9F9F9"/>
                     </a:solidFill>
                   </a:tcPr>
                 </a:tc>
@@ -4757,7 +4718,7 @@
                           <a:ea typeface="Calibri" pitchFamily="34" charset="-122"/>
                           <a:cs typeface="Calibri" pitchFamily="34" charset="-120"/>
                         </a:rPr>
-                        <a:t>3,94%</a:t>
+                        <a:t>3.94%</a:t>
                       </a:r>
                       <a:endParaRPr lang="en-US" sz="750" dirty="0">
                         <a:latin typeface="Calibri" charset="0"/>
@@ -4804,7 +4765,7 @@
                       <a:tailEnd type="none" w="med" len="med"/>
                     </a:lnB>
                     <a:solidFill>
-                      <a:srgbClr val="FFFFFF"/>
+                      <a:srgbClr val="F9F9F9"/>
                     </a:solidFill>
                   </a:tcPr>
                 </a:tc>
@@ -4872,7 +4833,7 @@
                       <a:tailEnd type="none" w="med" len="med"/>
                     </a:lnB>
                     <a:solidFill>
-                      <a:srgbClr val="FFFFFF"/>
+                      <a:srgbClr val="F9F9F9"/>
                     </a:solidFill>
                   </a:tcPr>
                 </a:tc>
@@ -4893,7 +4854,7 @@
                           <a:ea typeface="Calibri" pitchFamily="34" charset="-122"/>
                           <a:cs typeface="Calibri" pitchFamily="34" charset="-120"/>
                         </a:rPr>
-                        <a:t>5,06%</a:t>
+                        <a:t>5.06%</a:t>
                       </a:r>
                       <a:endParaRPr lang="en-US" sz="750" dirty="0">
                         <a:latin typeface="Calibri" charset="0"/>
@@ -4940,7 +4901,7 @@
                       <a:tailEnd type="none" w="med" len="med"/>
                     </a:lnB>
                     <a:solidFill>
-                      <a:srgbClr val="FFFFFF"/>
+                      <a:srgbClr val="F9F9F9"/>
                     </a:solidFill>
                   </a:tcPr>
                 </a:tc>
@@ -5050,7 +5011,7 @@
                 <a:gridCol w="246888"/>
                 <a:gridCol w="283464"/>
               </a:tblGrid>
-              <a:tr h="118872">
+              <a:tr h="123444">
                 <a:tc>
                   <a:txBody>
                     <a:bodyPr/>
@@ -6048,7 +6009,5660 @@
                   </a:tcPr>
                 </a:tc>
               </a:tr>
-              <a:tr h="118872">
+              <a:tr h="123444">
+                <a:tc>
+                  <a:txBody>
+                    <a:bodyPr/>
+                    <a:lstStyle/>
+                    <a:p>
+                      <a:pPr algn="l" indent="0" marL="0">
+                        <a:buNone/>
+                      </a:pPr>
+                      <a:r>
+                        <a:rPr lang="en-US" sz="500" b="1" dirty="0">
+                          <a:solidFill>
+                            <a:srgbClr val="000000"/>
+                          </a:solidFill>
+                          <a:latin typeface="Calibri" pitchFamily="34" charset="0"/>
+                          <a:ea typeface="Calibri" pitchFamily="34" charset="-122"/>
+                          <a:cs typeface="Calibri" pitchFamily="34" charset="-120"/>
+                        </a:rPr>
+                        <a:t>2023</a:t>
+                      </a:r>
+                      <a:endParaRPr lang="en-US" sz="500" dirty="0">
+                        <a:latin typeface="Calibri" charset="0"/>
+                        <a:ea typeface="Calibri" charset="0"/>
+                        <a:cs typeface="Calibri" charset="0"/>
+                      </a:endParaRPr>
+                    </a:p>
+                  </a:txBody>
+                  <a:tcPr marL="91440" marR="91440" marT="45720" marB="45720">
+                    <a:lnL w="2540" cap="flat" cmpd="sng" algn="ctr">
+                      <a:solidFill>
+                        <a:srgbClr val="EEEEEE"/>
+                      </a:solidFill>
+                      <a:prstDash val="solid"/>
+                      <a:round/>
+                      <a:headEnd type="none" w="med" len="med"/>
+                      <a:tailEnd type="none" w="med" len="med"/>
+                    </a:lnL>
+                    <a:lnR w="2540" cap="flat" cmpd="sng" algn="ctr">
+                      <a:solidFill>
+                        <a:srgbClr val="EEEEEE"/>
+                      </a:solidFill>
+                      <a:prstDash val="solid"/>
+                      <a:round/>
+                      <a:headEnd type="none" w="med" len="med"/>
+                      <a:tailEnd type="none" w="med" len="med"/>
+                    </a:lnR>
+                    <a:lnT w="2540" cap="flat" cmpd="sng" algn="ctr">
+                      <a:solidFill>
+                        <a:srgbClr val="EEEEEE"/>
+                      </a:solidFill>
+                      <a:prstDash val="solid"/>
+                      <a:round/>
+                      <a:headEnd type="none" w="med" len="med"/>
+                      <a:tailEnd type="none" w="med" len="med"/>
+                    </a:lnT>
+                    <a:lnB w="2540" cap="flat" cmpd="sng" algn="ctr">
+                      <a:solidFill>
+                        <a:srgbClr val="EEEEEE"/>
+                      </a:solidFill>
+                      <a:prstDash val="solid"/>
+                      <a:round/>
+                      <a:headEnd type="none" w="med" len="med"/>
+                      <a:tailEnd type="none" w="med" len="med"/>
+                    </a:lnB>
+                  </a:tcPr>
+                </a:tc>
+                <a:tc>
+                  <a:txBody>
+                    <a:bodyPr/>
+                    <a:lstStyle/>
+                    <a:p>
+                      <a:pPr algn="l" indent="0" marL="0">
+                        <a:buNone/>
+                      </a:pPr>
+                      <a:r>
+                        <a:rPr lang="en-US" sz="500" dirty="0">
+                          <a:solidFill>
+                            <a:srgbClr val="777777"/>
+                          </a:solidFill>
+                          <a:latin typeface="Calibri" pitchFamily="34" charset="0"/>
+                          <a:ea typeface="Calibri" pitchFamily="34" charset="-122"/>
+                          <a:cs typeface="Calibri" pitchFamily="34" charset="-120"/>
+                        </a:rPr>
+                        <a:t>ICP</a:t>
+                      </a:r>
+                      <a:endParaRPr lang="en-US" sz="500" dirty="0">
+                        <a:latin typeface="Calibri" charset="0"/>
+                        <a:ea typeface="Calibri" charset="0"/>
+                        <a:cs typeface="Calibri" charset="0"/>
+                      </a:endParaRPr>
+                    </a:p>
+                  </a:txBody>
+                  <a:tcPr marL="91440" marR="91440" marT="45720" marB="45720">
+                    <a:lnL w="2540" cap="flat" cmpd="sng" algn="ctr">
+                      <a:solidFill>
+                        <a:srgbClr val="EEEEEE"/>
+                      </a:solidFill>
+                      <a:prstDash val="solid"/>
+                      <a:round/>
+                      <a:headEnd type="none" w="med" len="med"/>
+                      <a:tailEnd type="none" w="med" len="med"/>
+                    </a:lnL>
+                    <a:lnR w="2540" cap="flat" cmpd="sng" algn="ctr">
+                      <a:solidFill>
+                        <a:srgbClr val="EEEEEE"/>
+                      </a:solidFill>
+                      <a:prstDash val="solid"/>
+                      <a:round/>
+                      <a:headEnd type="none" w="med" len="med"/>
+                      <a:tailEnd type="none" w="med" len="med"/>
+                    </a:lnR>
+                    <a:lnT w="2540" cap="flat" cmpd="sng" algn="ctr">
+                      <a:solidFill>
+                        <a:srgbClr val="EEEEEE"/>
+                      </a:solidFill>
+                      <a:prstDash val="solid"/>
+                      <a:round/>
+                      <a:headEnd type="none" w="med" len="med"/>
+                      <a:tailEnd type="none" w="med" len="med"/>
+                    </a:lnT>
+                    <a:lnB w="2540" cap="flat" cmpd="sng" algn="ctr">
+                      <a:solidFill>
+                        <a:srgbClr val="EEEEEE"/>
+                      </a:solidFill>
+                      <a:prstDash val="solid"/>
+                      <a:round/>
+                      <a:headEnd type="none" w="med" len="med"/>
+                      <a:tailEnd type="none" w="med" len="med"/>
+                    </a:lnB>
+                  </a:tcPr>
+                </a:tc>
+                <a:tc>
+                  <a:txBody>
+                    <a:bodyPr/>
+                    <a:lstStyle/>
+                    <a:p>
+                      <a:pPr algn="ctr" indent="0" marL="0">
+                        <a:buNone/>
+                      </a:pPr>
+                      <a:r>
+                        <a:rPr lang="en-US" sz="500" dirty="0">
+                          <a:solidFill>
+                            <a:srgbClr val="777777"/>
+                          </a:solidFill>
+                          <a:latin typeface="Calibri" pitchFamily="34" charset="0"/>
+                          <a:ea typeface="Calibri" pitchFamily="34" charset="-122"/>
+                          <a:cs typeface="Calibri" pitchFamily="34" charset="-120"/>
+                        </a:rPr>
+                        <a:t>0.94%</a:t>
+                      </a:r>
+                      <a:endParaRPr lang="en-US" sz="500" dirty="0">
+                        <a:latin typeface="Calibri" charset="0"/>
+                        <a:ea typeface="Calibri" charset="0"/>
+                        <a:cs typeface="Calibri" charset="0"/>
+                      </a:endParaRPr>
+                    </a:p>
+                  </a:txBody>
+                  <a:tcPr marL="91440" marR="91440" marT="45720" marB="45720">
+                    <a:lnL w="2540" cap="flat" cmpd="sng" algn="ctr">
+                      <a:solidFill>
+                        <a:srgbClr val="EEEEEE"/>
+                      </a:solidFill>
+                      <a:prstDash val="solid"/>
+                      <a:round/>
+                      <a:headEnd type="none" w="med" len="med"/>
+                      <a:tailEnd type="none" w="med" len="med"/>
+                    </a:lnL>
+                    <a:lnR w="2540" cap="flat" cmpd="sng" algn="ctr">
+                      <a:solidFill>
+                        <a:srgbClr val="EEEEEE"/>
+                      </a:solidFill>
+                      <a:prstDash val="solid"/>
+                      <a:round/>
+                      <a:headEnd type="none" w="med" len="med"/>
+                      <a:tailEnd type="none" w="med" len="med"/>
+                    </a:lnR>
+                    <a:lnT w="2540" cap="flat" cmpd="sng" algn="ctr">
+                      <a:solidFill>
+                        <a:srgbClr val="EEEEEE"/>
+                      </a:solidFill>
+                      <a:prstDash val="solid"/>
+                      <a:round/>
+                      <a:headEnd type="none" w="med" len="med"/>
+                      <a:tailEnd type="none" w="med" len="med"/>
+                    </a:lnT>
+                    <a:lnB w="2540" cap="flat" cmpd="sng" algn="ctr">
+                      <a:solidFill>
+                        <a:srgbClr val="EEEEEE"/>
+                      </a:solidFill>
+                      <a:prstDash val="solid"/>
+                      <a:round/>
+                      <a:headEnd type="none" w="med" len="med"/>
+                      <a:tailEnd type="none" w="med" len="med"/>
+                    </a:lnB>
+                  </a:tcPr>
+                </a:tc>
+                <a:tc>
+                  <a:txBody>
+                    <a:bodyPr/>
+                    <a:lstStyle/>
+                    <a:p>
+                      <a:pPr algn="ctr" indent="0" marL="0">
+                        <a:buNone/>
+                      </a:pPr>
+                      <a:r>
+                        <a:rPr lang="en-US" sz="500" dirty="0">
+                          <a:solidFill>
+                            <a:srgbClr val="777777"/>
+                          </a:solidFill>
+                          <a:latin typeface="Calibri" pitchFamily="34" charset="0"/>
+                          <a:ea typeface="Calibri" pitchFamily="34" charset="-122"/>
+                          <a:cs typeface="Calibri" pitchFamily="34" charset="-120"/>
+                        </a:rPr>
+                        <a:t>0.94%</a:t>
+                      </a:r>
+                      <a:endParaRPr lang="en-US" sz="500" dirty="0">
+                        <a:latin typeface="Calibri" charset="0"/>
+                        <a:ea typeface="Calibri" charset="0"/>
+                        <a:cs typeface="Calibri" charset="0"/>
+                      </a:endParaRPr>
+                    </a:p>
+                  </a:txBody>
+                  <a:tcPr marL="91440" marR="91440" marT="45720" marB="45720">
+                    <a:lnL w="2540" cap="flat" cmpd="sng" algn="ctr">
+                      <a:solidFill>
+                        <a:srgbClr val="EEEEEE"/>
+                      </a:solidFill>
+                      <a:prstDash val="solid"/>
+                      <a:round/>
+                      <a:headEnd type="none" w="med" len="med"/>
+                      <a:tailEnd type="none" w="med" len="med"/>
+                    </a:lnL>
+                    <a:lnR w="2540" cap="flat" cmpd="sng" algn="ctr">
+                      <a:solidFill>
+                        <a:srgbClr val="EEEEEE"/>
+                      </a:solidFill>
+                      <a:prstDash val="solid"/>
+                      <a:round/>
+                      <a:headEnd type="none" w="med" len="med"/>
+                      <a:tailEnd type="none" w="med" len="med"/>
+                    </a:lnR>
+                    <a:lnT w="2540" cap="flat" cmpd="sng" algn="ctr">
+                      <a:solidFill>
+                        <a:srgbClr val="EEEEEE"/>
+                      </a:solidFill>
+                      <a:prstDash val="solid"/>
+                      <a:round/>
+                      <a:headEnd type="none" w="med" len="med"/>
+                      <a:tailEnd type="none" w="med" len="med"/>
+                    </a:lnT>
+                    <a:lnB w="2540" cap="flat" cmpd="sng" algn="ctr">
+                      <a:solidFill>
+                        <a:srgbClr val="EEEEEE"/>
+                      </a:solidFill>
+                      <a:prstDash val="solid"/>
+                      <a:round/>
+                      <a:headEnd type="none" w="med" len="med"/>
+                      <a:tailEnd type="none" w="med" len="med"/>
+                    </a:lnB>
+                  </a:tcPr>
+                </a:tc>
+                <a:tc>
+                  <a:txBody>
+                    <a:bodyPr/>
+                    <a:lstStyle/>
+                    <a:p>
+                      <a:pPr algn="ctr" indent="0" marL="0">
+                        <a:buNone/>
+                      </a:pPr>
+                      <a:r>
+                        <a:rPr lang="en-US" sz="500" dirty="0">
+                          <a:solidFill>
+                            <a:srgbClr val="777777"/>
+                          </a:solidFill>
+                          <a:latin typeface="Calibri" pitchFamily="34" charset="0"/>
+                          <a:ea typeface="Calibri" pitchFamily="34" charset="-122"/>
+                          <a:cs typeface="Calibri" pitchFamily="34" charset="-120"/>
+                        </a:rPr>
+                        <a:t>0.94%</a:t>
+                      </a:r>
+                      <a:endParaRPr lang="en-US" sz="500" dirty="0">
+                        <a:latin typeface="Calibri" charset="0"/>
+                        <a:ea typeface="Calibri" charset="0"/>
+                        <a:cs typeface="Calibri" charset="0"/>
+                      </a:endParaRPr>
+                    </a:p>
+                  </a:txBody>
+                  <a:tcPr marL="91440" marR="91440" marT="45720" marB="45720">
+                    <a:lnL w="2540" cap="flat" cmpd="sng" algn="ctr">
+                      <a:solidFill>
+                        <a:srgbClr val="EEEEEE"/>
+                      </a:solidFill>
+                      <a:prstDash val="solid"/>
+                      <a:round/>
+                      <a:headEnd type="none" w="med" len="med"/>
+                      <a:tailEnd type="none" w="med" len="med"/>
+                    </a:lnL>
+                    <a:lnR w="2540" cap="flat" cmpd="sng" algn="ctr">
+                      <a:solidFill>
+                        <a:srgbClr val="EEEEEE"/>
+                      </a:solidFill>
+                      <a:prstDash val="solid"/>
+                      <a:round/>
+                      <a:headEnd type="none" w="med" len="med"/>
+                      <a:tailEnd type="none" w="med" len="med"/>
+                    </a:lnR>
+                    <a:lnT w="2540" cap="flat" cmpd="sng" algn="ctr">
+                      <a:solidFill>
+                        <a:srgbClr val="EEEEEE"/>
+                      </a:solidFill>
+                      <a:prstDash val="solid"/>
+                      <a:round/>
+                      <a:headEnd type="none" w="med" len="med"/>
+                      <a:tailEnd type="none" w="med" len="med"/>
+                    </a:lnT>
+                    <a:lnB w="2540" cap="flat" cmpd="sng" algn="ctr">
+                      <a:solidFill>
+                        <a:srgbClr val="EEEEEE"/>
+                      </a:solidFill>
+                      <a:prstDash val="solid"/>
+                      <a:round/>
+                      <a:headEnd type="none" w="med" len="med"/>
+                      <a:tailEnd type="none" w="med" len="med"/>
+                    </a:lnB>
+                  </a:tcPr>
+                </a:tc>
+                <a:tc>
+                  <a:txBody>
+                    <a:bodyPr/>
+                    <a:lstStyle/>
+                    <a:p>
+                      <a:pPr algn="ctr" indent="0" marL="0">
+                        <a:buNone/>
+                      </a:pPr>
+                      <a:r>
+                        <a:rPr lang="en-US" sz="500" dirty="0">
+                          <a:solidFill>
+                            <a:srgbClr val="777777"/>
+                          </a:solidFill>
+                          <a:latin typeface="Calibri" pitchFamily="34" charset="0"/>
+                          <a:ea typeface="Calibri" pitchFamily="34" charset="-122"/>
+                          <a:cs typeface="Calibri" pitchFamily="34" charset="-120"/>
+                        </a:rPr>
+                        <a:t>0.94%</a:t>
+                      </a:r>
+                      <a:endParaRPr lang="en-US" sz="500" dirty="0">
+                        <a:latin typeface="Calibri" charset="0"/>
+                        <a:ea typeface="Calibri" charset="0"/>
+                        <a:cs typeface="Calibri" charset="0"/>
+                      </a:endParaRPr>
+                    </a:p>
+                  </a:txBody>
+                  <a:tcPr marL="91440" marR="91440" marT="45720" marB="45720">
+                    <a:lnL w="2540" cap="flat" cmpd="sng" algn="ctr">
+                      <a:solidFill>
+                        <a:srgbClr val="EEEEEE"/>
+                      </a:solidFill>
+                      <a:prstDash val="solid"/>
+                      <a:round/>
+                      <a:headEnd type="none" w="med" len="med"/>
+                      <a:tailEnd type="none" w="med" len="med"/>
+                    </a:lnL>
+                    <a:lnR w="2540" cap="flat" cmpd="sng" algn="ctr">
+                      <a:solidFill>
+                        <a:srgbClr val="EEEEEE"/>
+                      </a:solidFill>
+                      <a:prstDash val="solid"/>
+                      <a:round/>
+                      <a:headEnd type="none" w="med" len="med"/>
+                      <a:tailEnd type="none" w="med" len="med"/>
+                    </a:lnR>
+                    <a:lnT w="2540" cap="flat" cmpd="sng" algn="ctr">
+                      <a:solidFill>
+                        <a:srgbClr val="EEEEEE"/>
+                      </a:solidFill>
+                      <a:prstDash val="solid"/>
+                      <a:round/>
+                      <a:headEnd type="none" w="med" len="med"/>
+                      <a:tailEnd type="none" w="med" len="med"/>
+                    </a:lnT>
+                    <a:lnB w="2540" cap="flat" cmpd="sng" algn="ctr">
+                      <a:solidFill>
+                        <a:srgbClr val="EEEEEE"/>
+                      </a:solidFill>
+                      <a:prstDash val="solid"/>
+                      <a:round/>
+                      <a:headEnd type="none" w="med" len="med"/>
+                      <a:tailEnd type="none" w="med" len="med"/>
+                    </a:lnB>
+                  </a:tcPr>
+                </a:tc>
+                <a:tc>
+                  <a:txBody>
+                    <a:bodyPr/>
+                    <a:lstStyle/>
+                    <a:p>
+                      <a:pPr algn="ctr" indent="0" marL="0">
+                        <a:buNone/>
+                      </a:pPr>
+                      <a:r>
+                        <a:rPr lang="en-US" sz="500" dirty="0">
+                          <a:solidFill>
+                            <a:srgbClr val="777777"/>
+                          </a:solidFill>
+                          <a:latin typeface="Calibri" pitchFamily="34" charset="0"/>
+                          <a:ea typeface="Calibri" pitchFamily="34" charset="-122"/>
+                          <a:cs typeface="Calibri" pitchFamily="34" charset="-120"/>
+                        </a:rPr>
+                        <a:t>0.94%</a:t>
+                      </a:r>
+                      <a:endParaRPr lang="en-US" sz="500" dirty="0">
+                        <a:latin typeface="Calibri" charset="0"/>
+                        <a:ea typeface="Calibri" charset="0"/>
+                        <a:cs typeface="Calibri" charset="0"/>
+                      </a:endParaRPr>
+                    </a:p>
+                  </a:txBody>
+                  <a:tcPr marL="91440" marR="91440" marT="45720" marB="45720">
+                    <a:lnL w="2540" cap="flat" cmpd="sng" algn="ctr">
+                      <a:solidFill>
+                        <a:srgbClr val="EEEEEE"/>
+                      </a:solidFill>
+                      <a:prstDash val="solid"/>
+                      <a:round/>
+                      <a:headEnd type="none" w="med" len="med"/>
+                      <a:tailEnd type="none" w="med" len="med"/>
+                    </a:lnL>
+                    <a:lnR w="2540" cap="flat" cmpd="sng" algn="ctr">
+                      <a:solidFill>
+                        <a:srgbClr val="EEEEEE"/>
+                      </a:solidFill>
+                      <a:prstDash val="solid"/>
+                      <a:round/>
+                      <a:headEnd type="none" w="med" len="med"/>
+                      <a:tailEnd type="none" w="med" len="med"/>
+                    </a:lnR>
+                    <a:lnT w="2540" cap="flat" cmpd="sng" algn="ctr">
+                      <a:solidFill>
+                        <a:srgbClr val="EEEEEE"/>
+                      </a:solidFill>
+                      <a:prstDash val="solid"/>
+                      <a:round/>
+                      <a:headEnd type="none" w="med" len="med"/>
+                      <a:tailEnd type="none" w="med" len="med"/>
+                    </a:lnT>
+                    <a:lnB w="2540" cap="flat" cmpd="sng" algn="ctr">
+                      <a:solidFill>
+                        <a:srgbClr val="EEEEEE"/>
+                      </a:solidFill>
+                      <a:prstDash val="solid"/>
+                      <a:round/>
+                      <a:headEnd type="none" w="med" len="med"/>
+                      <a:tailEnd type="none" w="med" len="med"/>
+                    </a:lnB>
+                  </a:tcPr>
+                </a:tc>
+                <a:tc>
+                  <a:txBody>
+                    <a:bodyPr/>
+                    <a:lstStyle/>
+                    <a:p>
+                      <a:pPr algn="ctr" indent="0" marL="0">
+                        <a:buNone/>
+                      </a:pPr>
+                      <a:r>
+                        <a:rPr lang="en-US" sz="500" dirty="0">
+                          <a:solidFill>
+                            <a:srgbClr val="777777"/>
+                          </a:solidFill>
+                          <a:latin typeface="Calibri" pitchFamily="34" charset="0"/>
+                          <a:ea typeface="Calibri" pitchFamily="34" charset="-122"/>
+                          <a:cs typeface="Calibri" pitchFamily="34" charset="-120"/>
+                        </a:rPr>
+                        <a:t>0.94%</a:t>
+                      </a:r>
+                      <a:endParaRPr lang="en-US" sz="500" dirty="0">
+                        <a:latin typeface="Calibri" charset="0"/>
+                        <a:ea typeface="Calibri" charset="0"/>
+                        <a:cs typeface="Calibri" charset="0"/>
+                      </a:endParaRPr>
+                    </a:p>
+                  </a:txBody>
+                  <a:tcPr marL="91440" marR="91440" marT="45720" marB="45720">
+                    <a:lnL w="2540" cap="flat" cmpd="sng" algn="ctr">
+                      <a:solidFill>
+                        <a:srgbClr val="EEEEEE"/>
+                      </a:solidFill>
+                      <a:prstDash val="solid"/>
+                      <a:round/>
+                      <a:headEnd type="none" w="med" len="med"/>
+                      <a:tailEnd type="none" w="med" len="med"/>
+                    </a:lnL>
+                    <a:lnR w="2540" cap="flat" cmpd="sng" algn="ctr">
+                      <a:solidFill>
+                        <a:srgbClr val="EEEEEE"/>
+                      </a:solidFill>
+                      <a:prstDash val="solid"/>
+                      <a:round/>
+                      <a:headEnd type="none" w="med" len="med"/>
+                      <a:tailEnd type="none" w="med" len="med"/>
+                    </a:lnR>
+                    <a:lnT w="2540" cap="flat" cmpd="sng" algn="ctr">
+                      <a:solidFill>
+                        <a:srgbClr val="EEEEEE"/>
+                      </a:solidFill>
+                      <a:prstDash val="solid"/>
+                      <a:round/>
+                      <a:headEnd type="none" w="med" len="med"/>
+                      <a:tailEnd type="none" w="med" len="med"/>
+                    </a:lnT>
+                    <a:lnB w="2540" cap="flat" cmpd="sng" algn="ctr">
+                      <a:solidFill>
+                        <a:srgbClr val="EEEEEE"/>
+                      </a:solidFill>
+                      <a:prstDash val="solid"/>
+                      <a:round/>
+                      <a:headEnd type="none" w="med" len="med"/>
+                      <a:tailEnd type="none" w="med" len="med"/>
+                    </a:lnB>
+                  </a:tcPr>
+                </a:tc>
+                <a:tc>
+                  <a:txBody>
+                    <a:bodyPr/>
+                    <a:lstStyle/>
+                    <a:p>
+                      <a:pPr algn="ctr" indent="0" marL="0">
+                        <a:buNone/>
+                      </a:pPr>
+                      <a:r>
+                        <a:rPr lang="en-US" sz="500" dirty="0">
+                          <a:solidFill>
+                            <a:srgbClr val="777777"/>
+                          </a:solidFill>
+                          <a:latin typeface="Calibri" pitchFamily="34" charset="0"/>
+                          <a:ea typeface="Calibri" pitchFamily="34" charset="-122"/>
+                          <a:cs typeface="Calibri" pitchFamily="34" charset="-120"/>
+                        </a:rPr>
+                        <a:t>0.93%</a:t>
+                      </a:r>
+                      <a:endParaRPr lang="en-US" sz="500" dirty="0">
+                        <a:latin typeface="Calibri" charset="0"/>
+                        <a:ea typeface="Calibri" charset="0"/>
+                        <a:cs typeface="Calibri" charset="0"/>
+                      </a:endParaRPr>
+                    </a:p>
+                  </a:txBody>
+                  <a:tcPr marL="91440" marR="91440" marT="45720" marB="45720">
+                    <a:lnL w="2540" cap="flat" cmpd="sng" algn="ctr">
+                      <a:solidFill>
+                        <a:srgbClr val="EEEEEE"/>
+                      </a:solidFill>
+                      <a:prstDash val="solid"/>
+                      <a:round/>
+                      <a:headEnd type="none" w="med" len="med"/>
+                      <a:tailEnd type="none" w="med" len="med"/>
+                    </a:lnL>
+                    <a:lnR w="2540" cap="flat" cmpd="sng" algn="ctr">
+                      <a:solidFill>
+                        <a:srgbClr val="EEEEEE"/>
+                      </a:solidFill>
+                      <a:prstDash val="solid"/>
+                      <a:round/>
+                      <a:headEnd type="none" w="med" len="med"/>
+                      <a:tailEnd type="none" w="med" len="med"/>
+                    </a:lnR>
+                    <a:lnT w="2540" cap="flat" cmpd="sng" algn="ctr">
+                      <a:solidFill>
+                        <a:srgbClr val="EEEEEE"/>
+                      </a:solidFill>
+                      <a:prstDash val="solid"/>
+                      <a:round/>
+                      <a:headEnd type="none" w="med" len="med"/>
+                      <a:tailEnd type="none" w="med" len="med"/>
+                    </a:lnT>
+                    <a:lnB w="2540" cap="flat" cmpd="sng" algn="ctr">
+                      <a:solidFill>
+                        <a:srgbClr val="EEEEEE"/>
+                      </a:solidFill>
+                      <a:prstDash val="solid"/>
+                      <a:round/>
+                      <a:headEnd type="none" w="med" len="med"/>
+                      <a:tailEnd type="none" w="med" len="med"/>
+                    </a:lnB>
+                  </a:tcPr>
+                </a:tc>
+                <a:tc>
+                  <a:txBody>
+                    <a:bodyPr/>
+                    <a:lstStyle/>
+                    <a:p>
+                      <a:pPr algn="ctr" indent="0" marL="0">
+                        <a:buNone/>
+                      </a:pPr>
+                      <a:r>
+                        <a:rPr lang="en-US" sz="500" dirty="0">
+                          <a:solidFill>
+                            <a:srgbClr val="777777"/>
+                          </a:solidFill>
+                          <a:latin typeface="Calibri" pitchFamily="34" charset="0"/>
+                          <a:ea typeface="Calibri" pitchFamily="34" charset="-122"/>
+                          <a:cs typeface="Calibri" pitchFamily="34" charset="-120"/>
+                        </a:rPr>
+                        <a:t>0.85%</a:t>
+                      </a:r>
+                      <a:endParaRPr lang="en-US" sz="500" dirty="0">
+                        <a:latin typeface="Calibri" charset="0"/>
+                        <a:ea typeface="Calibri" charset="0"/>
+                        <a:cs typeface="Calibri" charset="0"/>
+                      </a:endParaRPr>
+                    </a:p>
+                  </a:txBody>
+                  <a:tcPr marL="91440" marR="91440" marT="45720" marB="45720">
+                    <a:lnL w="2540" cap="flat" cmpd="sng" algn="ctr">
+                      <a:solidFill>
+                        <a:srgbClr val="EEEEEE"/>
+                      </a:solidFill>
+                      <a:prstDash val="solid"/>
+                      <a:round/>
+                      <a:headEnd type="none" w="med" len="med"/>
+                      <a:tailEnd type="none" w="med" len="med"/>
+                    </a:lnL>
+                    <a:lnR w="2540" cap="flat" cmpd="sng" algn="ctr">
+                      <a:solidFill>
+                        <a:srgbClr val="EEEEEE"/>
+                      </a:solidFill>
+                      <a:prstDash val="solid"/>
+                      <a:round/>
+                      <a:headEnd type="none" w="med" len="med"/>
+                      <a:tailEnd type="none" w="med" len="med"/>
+                    </a:lnR>
+                    <a:lnT w="2540" cap="flat" cmpd="sng" algn="ctr">
+                      <a:solidFill>
+                        <a:srgbClr val="EEEEEE"/>
+                      </a:solidFill>
+                      <a:prstDash val="solid"/>
+                      <a:round/>
+                      <a:headEnd type="none" w="med" len="med"/>
+                      <a:tailEnd type="none" w="med" len="med"/>
+                    </a:lnT>
+                    <a:lnB w="2540" cap="flat" cmpd="sng" algn="ctr">
+                      <a:solidFill>
+                        <a:srgbClr val="EEEEEE"/>
+                      </a:solidFill>
+                      <a:prstDash val="solid"/>
+                      <a:round/>
+                      <a:headEnd type="none" w="med" len="med"/>
+                      <a:tailEnd type="none" w="med" len="med"/>
+                    </a:lnB>
+                  </a:tcPr>
+                </a:tc>
+                <a:tc>
+                  <a:txBody>
+                    <a:bodyPr/>
+                    <a:lstStyle/>
+                    <a:p>
+                      <a:pPr algn="ctr" indent="0" marL="0">
+                        <a:buNone/>
+                      </a:pPr>
+                      <a:r>
+                        <a:rPr lang="en-US" sz="500" dirty="0">
+                          <a:solidFill>
+                            <a:srgbClr val="777777"/>
+                          </a:solidFill>
+                          <a:latin typeface="Calibri" pitchFamily="34" charset="0"/>
+                          <a:ea typeface="Calibri" pitchFamily="34" charset="-122"/>
+                          <a:cs typeface="Calibri" pitchFamily="34" charset="-120"/>
+                        </a:rPr>
+                        <a:t>0.80%</a:t>
+                      </a:r>
+                      <a:endParaRPr lang="en-US" sz="500" dirty="0">
+                        <a:latin typeface="Calibri" charset="0"/>
+                        <a:ea typeface="Calibri" charset="0"/>
+                        <a:cs typeface="Calibri" charset="0"/>
+                      </a:endParaRPr>
+                    </a:p>
+                  </a:txBody>
+                  <a:tcPr marL="91440" marR="91440" marT="45720" marB="45720">
+                    <a:lnL w="2540" cap="flat" cmpd="sng" algn="ctr">
+                      <a:solidFill>
+                        <a:srgbClr val="EEEEEE"/>
+                      </a:solidFill>
+                      <a:prstDash val="solid"/>
+                      <a:round/>
+                      <a:headEnd type="none" w="med" len="med"/>
+                      <a:tailEnd type="none" w="med" len="med"/>
+                    </a:lnL>
+                    <a:lnR w="2540" cap="flat" cmpd="sng" algn="ctr">
+                      <a:solidFill>
+                        <a:srgbClr val="EEEEEE"/>
+                      </a:solidFill>
+                      <a:prstDash val="solid"/>
+                      <a:round/>
+                      <a:headEnd type="none" w="med" len="med"/>
+                      <a:tailEnd type="none" w="med" len="med"/>
+                    </a:lnR>
+                    <a:lnT w="2540" cap="flat" cmpd="sng" algn="ctr">
+                      <a:solidFill>
+                        <a:srgbClr val="EEEEEE"/>
+                      </a:solidFill>
+                      <a:prstDash val="solid"/>
+                      <a:round/>
+                      <a:headEnd type="none" w="med" len="med"/>
+                      <a:tailEnd type="none" w="med" len="med"/>
+                    </a:lnT>
+                    <a:lnB w="2540" cap="flat" cmpd="sng" algn="ctr">
+                      <a:solidFill>
+                        <a:srgbClr val="EEEEEE"/>
+                      </a:solidFill>
+                      <a:prstDash val="solid"/>
+                      <a:round/>
+                      <a:headEnd type="none" w="med" len="med"/>
+                      <a:tailEnd type="none" w="med" len="med"/>
+                    </a:lnB>
+                  </a:tcPr>
+                </a:tc>
+                <a:tc>
+                  <a:txBody>
+                    <a:bodyPr/>
+                    <a:lstStyle/>
+                    <a:p>
+                      <a:pPr algn="ctr" indent="0" marL="0">
+                        <a:buNone/>
+                      </a:pPr>
+                      <a:r>
+                        <a:rPr lang="en-US" sz="500" dirty="0">
+                          <a:solidFill>
+                            <a:srgbClr val="777777"/>
+                          </a:solidFill>
+                          <a:latin typeface="Calibri" pitchFamily="34" charset="0"/>
+                          <a:ea typeface="Calibri" pitchFamily="34" charset="-122"/>
+                          <a:cs typeface="Calibri" pitchFamily="34" charset="-120"/>
+                        </a:rPr>
+                        <a:t>0.79%</a:t>
+                      </a:r>
+                      <a:endParaRPr lang="en-US" sz="500" dirty="0">
+                        <a:latin typeface="Calibri" charset="0"/>
+                        <a:ea typeface="Calibri" charset="0"/>
+                        <a:cs typeface="Calibri" charset="0"/>
+                      </a:endParaRPr>
+                    </a:p>
+                  </a:txBody>
+                  <a:tcPr marL="91440" marR="91440" marT="45720" marB="45720">
+                    <a:lnL w="2540" cap="flat" cmpd="sng" algn="ctr">
+                      <a:solidFill>
+                        <a:srgbClr val="EEEEEE"/>
+                      </a:solidFill>
+                      <a:prstDash val="solid"/>
+                      <a:round/>
+                      <a:headEnd type="none" w="med" len="med"/>
+                      <a:tailEnd type="none" w="med" len="med"/>
+                    </a:lnL>
+                    <a:lnR w="2540" cap="flat" cmpd="sng" algn="ctr">
+                      <a:solidFill>
+                        <a:srgbClr val="EEEEEE"/>
+                      </a:solidFill>
+                      <a:prstDash val="solid"/>
+                      <a:round/>
+                      <a:headEnd type="none" w="med" len="med"/>
+                      <a:tailEnd type="none" w="med" len="med"/>
+                    </a:lnR>
+                    <a:lnT w="2540" cap="flat" cmpd="sng" algn="ctr">
+                      <a:solidFill>
+                        <a:srgbClr val="EEEEEE"/>
+                      </a:solidFill>
+                      <a:prstDash val="solid"/>
+                      <a:round/>
+                      <a:headEnd type="none" w="med" len="med"/>
+                      <a:tailEnd type="none" w="med" len="med"/>
+                    </a:lnT>
+                    <a:lnB w="2540" cap="flat" cmpd="sng" algn="ctr">
+                      <a:solidFill>
+                        <a:srgbClr val="EEEEEE"/>
+                      </a:solidFill>
+                      <a:prstDash val="solid"/>
+                      <a:round/>
+                      <a:headEnd type="none" w="med" len="med"/>
+                      <a:tailEnd type="none" w="med" len="med"/>
+                    </a:lnB>
+                  </a:tcPr>
+                </a:tc>
+                <a:tc>
+                  <a:txBody>
+                    <a:bodyPr/>
+                    <a:lstStyle/>
+                    <a:p>
+                      <a:pPr algn="ctr" indent="0" marL="0">
+                        <a:buNone/>
+                      </a:pPr>
+                      <a:r>
+                        <a:rPr lang="en-US" sz="500" dirty="0">
+                          <a:solidFill>
+                            <a:srgbClr val="777777"/>
+                          </a:solidFill>
+                          <a:latin typeface="Calibri" pitchFamily="34" charset="0"/>
+                          <a:ea typeface="Calibri" pitchFamily="34" charset="-122"/>
+                          <a:cs typeface="Calibri" pitchFamily="34" charset="-120"/>
+                        </a:rPr>
+                        <a:t>0.75%</a:t>
+                      </a:r>
+                      <a:endParaRPr lang="en-US" sz="500" dirty="0">
+                        <a:latin typeface="Calibri" charset="0"/>
+                        <a:ea typeface="Calibri" charset="0"/>
+                        <a:cs typeface="Calibri" charset="0"/>
+                      </a:endParaRPr>
+                    </a:p>
+                  </a:txBody>
+                  <a:tcPr marL="91440" marR="91440" marT="45720" marB="45720">
+                    <a:lnL w="2540" cap="flat" cmpd="sng" algn="ctr">
+                      <a:solidFill>
+                        <a:srgbClr val="EEEEEE"/>
+                      </a:solidFill>
+                      <a:prstDash val="solid"/>
+                      <a:round/>
+                      <a:headEnd type="none" w="med" len="med"/>
+                      <a:tailEnd type="none" w="med" len="med"/>
+                    </a:lnL>
+                    <a:lnR w="2540" cap="flat" cmpd="sng" algn="ctr">
+                      <a:solidFill>
+                        <a:srgbClr val="EEEEEE"/>
+                      </a:solidFill>
+                      <a:prstDash val="solid"/>
+                      <a:round/>
+                      <a:headEnd type="none" w="med" len="med"/>
+                      <a:tailEnd type="none" w="med" len="med"/>
+                    </a:lnR>
+                    <a:lnT w="2540" cap="flat" cmpd="sng" algn="ctr">
+                      <a:solidFill>
+                        <a:srgbClr val="EEEEEE"/>
+                      </a:solidFill>
+                      <a:prstDash val="solid"/>
+                      <a:round/>
+                      <a:headEnd type="none" w="med" len="med"/>
+                      <a:tailEnd type="none" w="med" len="med"/>
+                    </a:lnT>
+                    <a:lnB w="2540" cap="flat" cmpd="sng" algn="ctr">
+                      <a:solidFill>
+                        <a:srgbClr val="EEEEEE"/>
+                      </a:solidFill>
+                      <a:prstDash val="solid"/>
+                      <a:round/>
+                      <a:headEnd type="none" w="med" len="med"/>
+                      <a:tailEnd type="none" w="med" len="med"/>
+                    </a:lnB>
+                  </a:tcPr>
+                </a:tc>
+                <a:tc>
+                  <a:txBody>
+                    <a:bodyPr/>
+                    <a:lstStyle/>
+                    <a:p>
+                      <a:pPr algn="ctr" indent="0" marL="0">
+                        <a:buNone/>
+                      </a:pPr>
+                      <a:r>
+                        <a:rPr lang="en-US" sz="500" dirty="0">
+                          <a:solidFill>
+                            <a:srgbClr val="777777"/>
+                          </a:solidFill>
+                          <a:latin typeface="Calibri" pitchFamily="34" charset="0"/>
+                          <a:ea typeface="Calibri" pitchFamily="34" charset="-122"/>
+                          <a:cs typeface="Calibri" pitchFamily="34" charset="-120"/>
+                        </a:rPr>
+                        <a:t>0.73%</a:t>
+                      </a:r>
+                      <a:endParaRPr lang="en-US" sz="500" dirty="0">
+                        <a:latin typeface="Calibri" charset="0"/>
+                        <a:ea typeface="Calibri" charset="0"/>
+                        <a:cs typeface="Calibri" charset="0"/>
+                      </a:endParaRPr>
+                    </a:p>
+                  </a:txBody>
+                  <a:tcPr marL="91440" marR="91440" marT="45720" marB="45720">
+                    <a:lnL w="2540" cap="flat" cmpd="sng" algn="ctr">
+                      <a:solidFill>
+                        <a:srgbClr val="EEEEEE"/>
+                      </a:solidFill>
+                      <a:prstDash val="solid"/>
+                      <a:round/>
+                      <a:headEnd type="none" w="med" len="med"/>
+                      <a:tailEnd type="none" w="med" len="med"/>
+                    </a:lnL>
+                    <a:lnR w="2540" cap="flat" cmpd="sng" algn="ctr">
+                      <a:solidFill>
+                        <a:srgbClr val="EEEEEE"/>
+                      </a:solidFill>
+                      <a:prstDash val="solid"/>
+                      <a:round/>
+                      <a:headEnd type="none" w="med" len="med"/>
+                      <a:tailEnd type="none" w="med" len="med"/>
+                    </a:lnR>
+                    <a:lnT w="2540" cap="flat" cmpd="sng" algn="ctr">
+                      <a:solidFill>
+                        <a:srgbClr val="EEEEEE"/>
+                      </a:solidFill>
+                      <a:prstDash val="solid"/>
+                      <a:round/>
+                      <a:headEnd type="none" w="med" len="med"/>
+                      <a:tailEnd type="none" w="med" len="med"/>
+                    </a:lnT>
+                    <a:lnB w="2540" cap="flat" cmpd="sng" algn="ctr">
+                      <a:solidFill>
+                        <a:srgbClr val="EEEEEE"/>
+                      </a:solidFill>
+                      <a:prstDash val="solid"/>
+                      <a:round/>
+                      <a:headEnd type="none" w="med" len="med"/>
+                      <a:tailEnd type="none" w="med" len="med"/>
+                    </a:lnB>
+                  </a:tcPr>
+                </a:tc>
+                <a:tc>
+                  <a:txBody>
+                    <a:bodyPr/>
+                    <a:lstStyle/>
+                    <a:p>
+                      <a:pPr algn="ctr" indent="0" marL="0">
+                        <a:buNone/>
+                      </a:pPr>
+                      <a:r>
+                        <a:rPr lang="en-US" sz="500" b="1" dirty="0">
+                          <a:solidFill>
+                            <a:srgbClr val="777777"/>
+                          </a:solidFill>
+                          <a:latin typeface="Calibri" pitchFamily="34" charset="0"/>
+                          <a:ea typeface="Calibri" pitchFamily="34" charset="-122"/>
+                          <a:cs typeface="Calibri" pitchFamily="34" charset="-120"/>
+                        </a:rPr>
+                        <a:t>11.00%</a:t>
+                      </a:r>
+                      <a:endParaRPr lang="en-US" sz="500" dirty="0">
+                        <a:latin typeface="Calibri" charset="0"/>
+                        <a:ea typeface="Calibri" charset="0"/>
+                        <a:cs typeface="Calibri" charset="0"/>
+                      </a:endParaRPr>
+                    </a:p>
+                  </a:txBody>
+                  <a:tcPr marL="91440" marR="91440" marT="45720" marB="45720">
+                    <a:lnL w="2540" cap="flat" cmpd="sng" algn="ctr">
+                      <a:solidFill>
+                        <a:srgbClr val="EEEEEE"/>
+                      </a:solidFill>
+                      <a:prstDash val="solid"/>
+                      <a:round/>
+                      <a:headEnd type="none" w="med" len="med"/>
+                      <a:tailEnd type="none" w="med" len="med"/>
+                    </a:lnL>
+                    <a:lnR w="2540" cap="flat" cmpd="sng" algn="ctr">
+                      <a:solidFill>
+                        <a:srgbClr val="EEEEEE"/>
+                      </a:solidFill>
+                      <a:prstDash val="solid"/>
+                      <a:round/>
+                      <a:headEnd type="none" w="med" len="med"/>
+                      <a:tailEnd type="none" w="med" len="med"/>
+                    </a:lnR>
+                    <a:lnT w="2540" cap="flat" cmpd="sng" algn="ctr">
+                      <a:solidFill>
+                        <a:srgbClr val="EEEEEE"/>
+                      </a:solidFill>
+                      <a:prstDash val="solid"/>
+                      <a:round/>
+                      <a:headEnd type="none" w="med" len="med"/>
+                      <a:tailEnd type="none" w="med" len="med"/>
+                    </a:lnT>
+                    <a:lnB w="2540" cap="flat" cmpd="sng" algn="ctr">
+                      <a:solidFill>
+                        <a:srgbClr val="EEEEEE"/>
+                      </a:solidFill>
+                      <a:prstDash val="solid"/>
+                      <a:round/>
+                      <a:headEnd type="none" w="med" len="med"/>
+                      <a:tailEnd type="none" w="med" len="med"/>
+                    </a:lnB>
+                  </a:tcPr>
+                </a:tc>
+              </a:tr>
+              <a:tr h="123444">
+                <a:tc>
+                  <a:txBody>
+                    <a:bodyPr/>
+                    <a:lstStyle/>
+                    <a:p>
+                      <a:pPr algn="l" indent="0" marL="0">
+                        <a:buNone/>
+                      </a:pPr>
+                      <a:endParaRPr lang="en-US" sz="500" dirty="0">
+                        <a:latin typeface="Calibri" charset="0"/>
+                        <a:ea typeface="Calibri" charset="0"/>
+                        <a:cs typeface="Calibri" charset="0"/>
+                      </a:endParaRPr>
+                    </a:p>
+                  </a:txBody>
+                  <a:tcPr marL="91440" marR="91440" marT="45720" marB="45720">
+                    <a:lnL w="2540" cap="flat" cmpd="sng" algn="ctr">
+                      <a:solidFill>
+                        <a:srgbClr val="EEEEEE"/>
+                      </a:solidFill>
+                      <a:prstDash val="solid"/>
+                      <a:round/>
+                      <a:headEnd type="none" w="med" len="med"/>
+                      <a:tailEnd type="none" w="med" len="med"/>
+                    </a:lnL>
+                    <a:lnR w="2540" cap="flat" cmpd="sng" algn="ctr">
+                      <a:solidFill>
+                        <a:srgbClr val="EEEEEE"/>
+                      </a:solidFill>
+                      <a:prstDash val="solid"/>
+                      <a:round/>
+                      <a:headEnd type="none" w="med" len="med"/>
+                      <a:tailEnd type="none" w="med" len="med"/>
+                    </a:lnR>
+                    <a:lnT w="2540" cap="flat" cmpd="sng" algn="ctr">
+                      <a:solidFill>
+                        <a:srgbClr val="EEEEEE"/>
+                      </a:solidFill>
+                      <a:prstDash val="solid"/>
+                      <a:round/>
+                      <a:headEnd type="none" w="med" len="med"/>
+                      <a:tailEnd type="none" w="med" len="med"/>
+                    </a:lnT>
+                    <a:lnB w="2540" cap="flat" cmpd="sng" algn="ctr">
+                      <a:solidFill>
+                        <a:srgbClr val="EEEEEE"/>
+                      </a:solidFill>
+                      <a:prstDash val="solid"/>
+                      <a:round/>
+                      <a:headEnd type="none" w="med" len="med"/>
+                      <a:tailEnd type="none" w="med" len="med"/>
+                    </a:lnB>
+                  </a:tcPr>
+                </a:tc>
+                <a:tc>
+                  <a:txBody>
+                    <a:bodyPr/>
+                    <a:lstStyle/>
+                    <a:p>
+                      <a:pPr algn="l" indent="0" marL="0">
+                        <a:buNone/>
+                      </a:pPr>
+                      <a:r>
+                        <a:rPr lang="en-US" sz="500" dirty="0">
+                          <a:solidFill>
+                            <a:srgbClr val="999999"/>
+                          </a:solidFill>
+                          <a:latin typeface="Calibri" pitchFamily="34" charset="0"/>
+                          <a:ea typeface="Calibri" pitchFamily="34" charset="-122"/>
+                          <a:cs typeface="Calibri" pitchFamily="34" charset="-120"/>
+                        </a:rPr>
+                        <a:t>Competencia</a:t>
+                      </a:r>
+                      <a:endParaRPr lang="en-US" sz="500" dirty="0">
+                        <a:latin typeface="Calibri" charset="0"/>
+                        <a:ea typeface="Calibri" charset="0"/>
+                        <a:cs typeface="Calibri" charset="0"/>
+                      </a:endParaRPr>
+                    </a:p>
+                  </a:txBody>
+                  <a:tcPr marL="91440" marR="91440" marT="45720" marB="45720">
+                    <a:lnL w="2540" cap="flat" cmpd="sng" algn="ctr">
+                      <a:solidFill>
+                        <a:srgbClr val="EEEEEE"/>
+                      </a:solidFill>
+                      <a:prstDash val="solid"/>
+                      <a:round/>
+                      <a:headEnd type="none" w="med" len="med"/>
+                      <a:tailEnd type="none" w="med" len="med"/>
+                    </a:lnL>
+                    <a:lnR w="2540" cap="flat" cmpd="sng" algn="ctr">
+                      <a:solidFill>
+                        <a:srgbClr val="EEEEEE"/>
+                      </a:solidFill>
+                      <a:prstDash val="solid"/>
+                      <a:round/>
+                      <a:headEnd type="none" w="med" len="med"/>
+                      <a:tailEnd type="none" w="med" len="med"/>
+                    </a:lnR>
+                    <a:lnT w="2540" cap="flat" cmpd="sng" algn="ctr">
+                      <a:solidFill>
+                        <a:srgbClr val="EEEEEE"/>
+                      </a:solidFill>
+                      <a:prstDash val="solid"/>
+                      <a:round/>
+                      <a:headEnd type="none" w="med" len="med"/>
+                      <a:tailEnd type="none" w="med" len="med"/>
+                    </a:lnT>
+                    <a:lnB w="2540" cap="flat" cmpd="sng" algn="ctr">
+                      <a:solidFill>
+                        <a:srgbClr val="EEEEEE"/>
+                      </a:solidFill>
+                      <a:prstDash val="solid"/>
+                      <a:round/>
+                      <a:headEnd type="none" w="med" len="med"/>
+                      <a:tailEnd type="none" w="med" len="med"/>
+                    </a:lnB>
+                  </a:tcPr>
+                </a:tc>
+                <a:tc>
+                  <a:txBody>
+                    <a:bodyPr/>
+                    <a:lstStyle/>
+                    <a:p>
+                      <a:pPr algn="ctr" indent="0" marL="0">
+                        <a:buNone/>
+                      </a:pPr>
+                      <a:r>
+                        <a:rPr lang="en-US" sz="500" dirty="0">
+                          <a:solidFill>
+                            <a:srgbClr val="999999"/>
+                          </a:solidFill>
+                          <a:latin typeface="Calibri" pitchFamily="34" charset="0"/>
+                          <a:ea typeface="Calibri" pitchFamily="34" charset="-122"/>
+                          <a:cs typeface="Calibri" pitchFamily="34" charset="-120"/>
+                        </a:rPr>
+                        <a:t>0.00%</a:t>
+                      </a:r>
+                      <a:endParaRPr lang="en-US" sz="500" dirty="0">
+                        <a:latin typeface="Calibri" charset="0"/>
+                        <a:ea typeface="Calibri" charset="0"/>
+                        <a:cs typeface="Calibri" charset="0"/>
+                      </a:endParaRPr>
+                    </a:p>
+                  </a:txBody>
+                  <a:tcPr marL="91440" marR="91440" marT="45720" marB="45720">
+                    <a:lnL w="2540" cap="flat" cmpd="sng" algn="ctr">
+                      <a:solidFill>
+                        <a:srgbClr val="EEEEEE"/>
+                      </a:solidFill>
+                      <a:prstDash val="solid"/>
+                      <a:round/>
+                      <a:headEnd type="none" w="med" len="med"/>
+                      <a:tailEnd type="none" w="med" len="med"/>
+                    </a:lnL>
+                    <a:lnR w="2540" cap="flat" cmpd="sng" algn="ctr">
+                      <a:solidFill>
+                        <a:srgbClr val="EEEEEE"/>
+                      </a:solidFill>
+                      <a:prstDash val="solid"/>
+                      <a:round/>
+                      <a:headEnd type="none" w="med" len="med"/>
+                      <a:tailEnd type="none" w="med" len="med"/>
+                    </a:lnR>
+                    <a:lnT w="2540" cap="flat" cmpd="sng" algn="ctr">
+                      <a:solidFill>
+                        <a:srgbClr val="EEEEEE"/>
+                      </a:solidFill>
+                      <a:prstDash val="solid"/>
+                      <a:round/>
+                      <a:headEnd type="none" w="med" len="med"/>
+                      <a:tailEnd type="none" w="med" len="med"/>
+                    </a:lnT>
+                    <a:lnB w="2540" cap="flat" cmpd="sng" algn="ctr">
+                      <a:solidFill>
+                        <a:srgbClr val="EEEEEE"/>
+                      </a:solidFill>
+                      <a:prstDash val="solid"/>
+                      <a:round/>
+                      <a:headEnd type="none" w="med" len="med"/>
+                      <a:tailEnd type="none" w="med" len="med"/>
+                    </a:lnB>
+                  </a:tcPr>
+                </a:tc>
+                <a:tc>
+                  <a:txBody>
+                    <a:bodyPr/>
+                    <a:lstStyle/>
+                    <a:p>
+                      <a:pPr algn="ctr" indent="0" marL="0">
+                        <a:buNone/>
+                      </a:pPr>
+                      <a:endParaRPr lang="en-US" sz="500" dirty="0">
+                        <a:latin typeface="Calibri" charset="0"/>
+                        <a:ea typeface="Calibri" charset="0"/>
+                        <a:cs typeface="Calibri" charset="0"/>
+                      </a:endParaRPr>
+                    </a:p>
+                  </a:txBody>
+                  <a:tcPr marL="91440" marR="91440" marT="45720" marB="45720">
+                    <a:lnL w="2540" cap="flat" cmpd="sng" algn="ctr">
+                      <a:solidFill>
+                        <a:srgbClr val="EEEEEE"/>
+                      </a:solidFill>
+                      <a:prstDash val="solid"/>
+                      <a:round/>
+                      <a:headEnd type="none" w="med" len="med"/>
+                      <a:tailEnd type="none" w="med" len="med"/>
+                    </a:lnL>
+                    <a:lnR w="2540" cap="flat" cmpd="sng" algn="ctr">
+                      <a:solidFill>
+                        <a:srgbClr val="EEEEEE"/>
+                      </a:solidFill>
+                      <a:prstDash val="solid"/>
+                      <a:round/>
+                      <a:headEnd type="none" w="med" len="med"/>
+                      <a:tailEnd type="none" w="med" len="med"/>
+                    </a:lnR>
+                    <a:lnT w="2540" cap="flat" cmpd="sng" algn="ctr">
+                      <a:solidFill>
+                        <a:srgbClr val="EEEEEE"/>
+                      </a:solidFill>
+                      <a:prstDash val="solid"/>
+                      <a:round/>
+                      <a:headEnd type="none" w="med" len="med"/>
+                      <a:tailEnd type="none" w="med" len="med"/>
+                    </a:lnT>
+                    <a:lnB w="2540" cap="flat" cmpd="sng" algn="ctr">
+                      <a:solidFill>
+                        <a:srgbClr val="EEEEEE"/>
+                      </a:solidFill>
+                      <a:prstDash val="solid"/>
+                      <a:round/>
+                      <a:headEnd type="none" w="med" len="med"/>
+                      <a:tailEnd type="none" w="med" len="med"/>
+                    </a:lnB>
+                  </a:tcPr>
+                </a:tc>
+                <a:tc>
+                  <a:txBody>
+                    <a:bodyPr/>
+                    <a:lstStyle/>
+                    <a:p>
+                      <a:pPr algn="ctr" indent="0" marL="0">
+                        <a:buNone/>
+                      </a:pPr>
+                      <a:endParaRPr lang="en-US" sz="500" dirty="0">
+                        <a:latin typeface="Calibri" charset="0"/>
+                        <a:ea typeface="Calibri" charset="0"/>
+                        <a:cs typeface="Calibri" charset="0"/>
+                      </a:endParaRPr>
+                    </a:p>
+                  </a:txBody>
+                  <a:tcPr marL="91440" marR="91440" marT="45720" marB="45720">
+                    <a:lnL w="2540" cap="flat" cmpd="sng" algn="ctr">
+                      <a:solidFill>
+                        <a:srgbClr val="EEEEEE"/>
+                      </a:solidFill>
+                      <a:prstDash val="solid"/>
+                      <a:round/>
+                      <a:headEnd type="none" w="med" len="med"/>
+                      <a:tailEnd type="none" w="med" len="med"/>
+                    </a:lnL>
+                    <a:lnR w="2540" cap="flat" cmpd="sng" algn="ctr">
+                      <a:solidFill>
+                        <a:srgbClr val="EEEEEE"/>
+                      </a:solidFill>
+                      <a:prstDash val="solid"/>
+                      <a:round/>
+                      <a:headEnd type="none" w="med" len="med"/>
+                      <a:tailEnd type="none" w="med" len="med"/>
+                    </a:lnR>
+                    <a:lnT w="2540" cap="flat" cmpd="sng" algn="ctr">
+                      <a:solidFill>
+                        <a:srgbClr val="EEEEEE"/>
+                      </a:solidFill>
+                      <a:prstDash val="solid"/>
+                      <a:round/>
+                      <a:headEnd type="none" w="med" len="med"/>
+                      <a:tailEnd type="none" w="med" len="med"/>
+                    </a:lnT>
+                    <a:lnB w="2540" cap="flat" cmpd="sng" algn="ctr">
+                      <a:solidFill>
+                        <a:srgbClr val="EEEEEE"/>
+                      </a:solidFill>
+                      <a:prstDash val="solid"/>
+                      <a:round/>
+                      <a:headEnd type="none" w="med" len="med"/>
+                      <a:tailEnd type="none" w="med" len="med"/>
+                    </a:lnB>
+                  </a:tcPr>
+                </a:tc>
+                <a:tc>
+                  <a:txBody>
+                    <a:bodyPr/>
+                    <a:lstStyle/>
+                    <a:p>
+                      <a:pPr algn="ctr" indent="0" marL="0">
+                        <a:buNone/>
+                      </a:pPr>
+                      <a:endParaRPr lang="en-US" sz="500" dirty="0">
+                        <a:latin typeface="Calibri" charset="0"/>
+                        <a:ea typeface="Calibri" charset="0"/>
+                        <a:cs typeface="Calibri" charset="0"/>
+                      </a:endParaRPr>
+                    </a:p>
+                  </a:txBody>
+                  <a:tcPr marL="91440" marR="91440" marT="45720" marB="45720">
+                    <a:lnL w="2540" cap="flat" cmpd="sng" algn="ctr">
+                      <a:solidFill>
+                        <a:srgbClr val="EEEEEE"/>
+                      </a:solidFill>
+                      <a:prstDash val="solid"/>
+                      <a:round/>
+                      <a:headEnd type="none" w="med" len="med"/>
+                      <a:tailEnd type="none" w="med" len="med"/>
+                    </a:lnL>
+                    <a:lnR w="2540" cap="flat" cmpd="sng" algn="ctr">
+                      <a:solidFill>
+                        <a:srgbClr val="EEEEEE"/>
+                      </a:solidFill>
+                      <a:prstDash val="solid"/>
+                      <a:round/>
+                      <a:headEnd type="none" w="med" len="med"/>
+                      <a:tailEnd type="none" w="med" len="med"/>
+                    </a:lnR>
+                    <a:lnT w="2540" cap="flat" cmpd="sng" algn="ctr">
+                      <a:solidFill>
+                        <a:srgbClr val="EEEEEE"/>
+                      </a:solidFill>
+                      <a:prstDash val="solid"/>
+                      <a:round/>
+                      <a:headEnd type="none" w="med" len="med"/>
+                      <a:tailEnd type="none" w="med" len="med"/>
+                    </a:lnT>
+                    <a:lnB w="2540" cap="flat" cmpd="sng" algn="ctr">
+                      <a:solidFill>
+                        <a:srgbClr val="EEEEEE"/>
+                      </a:solidFill>
+                      <a:prstDash val="solid"/>
+                      <a:round/>
+                      <a:headEnd type="none" w="med" len="med"/>
+                      <a:tailEnd type="none" w="med" len="med"/>
+                    </a:lnB>
+                  </a:tcPr>
+                </a:tc>
+                <a:tc>
+                  <a:txBody>
+                    <a:bodyPr/>
+                    <a:lstStyle/>
+                    <a:p>
+                      <a:pPr algn="ctr" indent="0" marL="0">
+                        <a:buNone/>
+                      </a:pPr>
+                      <a:endParaRPr lang="en-US" sz="500" dirty="0">
+                        <a:latin typeface="Calibri" charset="0"/>
+                        <a:ea typeface="Calibri" charset="0"/>
+                        <a:cs typeface="Calibri" charset="0"/>
+                      </a:endParaRPr>
+                    </a:p>
+                  </a:txBody>
+                  <a:tcPr marL="91440" marR="91440" marT="45720" marB="45720">
+                    <a:lnL w="2540" cap="flat" cmpd="sng" algn="ctr">
+                      <a:solidFill>
+                        <a:srgbClr val="EEEEEE"/>
+                      </a:solidFill>
+                      <a:prstDash val="solid"/>
+                      <a:round/>
+                      <a:headEnd type="none" w="med" len="med"/>
+                      <a:tailEnd type="none" w="med" len="med"/>
+                    </a:lnL>
+                    <a:lnR w="2540" cap="flat" cmpd="sng" algn="ctr">
+                      <a:solidFill>
+                        <a:srgbClr val="EEEEEE"/>
+                      </a:solidFill>
+                      <a:prstDash val="solid"/>
+                      <a:round/>
+                      <a:headEnd type="none" w="med" len="med"/>
+                      <a:tailEnd type="none" w="med" len="med"/>
+                    </a:lnR>
+                    <a:lnT w="2540" cap="flat" cmpd="sng" algn="ctr">
+                      <a:solidFill>
+                        <a:srgbClr val="EEEEEE"/>
+                      </a:solidFill>
+                      <a:prstDash val="solid"/>
+                      <a:round/>
+                      <a:headEnd type="none" w="med" len="med"/>
+                      <a:tailEnd type="none" w="med" len="med"/>
+                    </a:lnT>
+                    <a:lnB w="2540" cap="flat" cmpd="sng" algn="ctr">
+                      <a:solidFill>
+                        <a:srgbClr val="EEEEEE"/>
+                      </a:solidFill>
+                      <a:prstDash val="solid"/>
+                      <a:round/>
+                      <a:headEnd type="none" w="med" len="med"/>
+                      <a:tailEnd type="none" w="med" len="med"/>
+                    </a:lnB>
+                  </a:tcPr>
+                </a:tc>
+                <a:tc>
+                  <a:txBody>
+                    <a:bodyPr/>
+                    <a:lstStyle/>
+                    <a:p>
+                      <a:pPr algn="ctr" indent="0" marL="0">
+                        <a:buNone/>
+                      </a:pPr>
+                      <a:endParaRPr lang="en-US" sz="500" dirty="0">
+                        <a:latin typeface="Calibri" charset="0"/>
+                        <a:ea typeface="Calibri" charset="0"/>
+                        <a:cs typeface="Calibri" charset="0"/>
+                      </a:endParaRPr>
+                    </a:p>
+                  </a:txBody>
+                  <a:tcPr marL="91440" marR="91440" marT="45720" marB="45720">
+                    <a:lnL w="2540" cap="flat" cmpd="sng" algn="ctr">
+                      <a:solidFill>
+                        <a:srgbClr val="EEEEEE"/>
+                      </a:solidFill>
+                      <a:prstDash val="solid"/>
+                      <a:round/>
+                      <a:headEnd type="none" w="med" len="med"/>
+                      <a:tailEnd type="none" w="med" len="med"/>
+                    </a:lnL>
+                    <a:lnR w="2540" cap="flat" cmpd="sng" algn="ctr">
+                      <a:solidFill>
+                        <a:srgbClr val="EEEEEE"/>
+                      </a:solidFill>
+                      <a:prstDash val="solid"/>
+                      <a:round/>
+                      <a:headEnd type="none" w="med" len="med"/>
+                      <a:tailEnd type="none" w="med" len="med"/>
+                    </a:lnR>
+                    <a:lnT w="2540" cap="flat" cmpd="sng" algn="ctr">
+                      <a:solidFill>
+                        <a:srgbClr val="EEEEEE"/>
+                      </a:solidFill>
+                      <a:prstDash val="solid"/>
+                      <a:round/>
+                      <a:headEnd type="none" w="med" len="med"/>
+                      <a:tailEnd type="none" w="med" len="med"/>
+                    </a:lnT>
+                    <a:lnB w="2540" cap="flat" cmpd="sng" algn="ctr">
+                      <a:solidFill>
+                        <a:srgbClr val="EEEEEE"/>
+                      </a:solidFill>
+                      <a:prstDash val="solid"/>
+                      <a:round/>
+                      <a:headEnd type="none" w="med" len="med"/>
+                      <a:tailEnd type="none" w="med" len="med"/>
+                    </a:lnB>
+                  </a:tcPr>
+                </a:tc>
+                <a:tc>
+                  <a:txBody>
+                    <a:bodyPr/>
+                    <a:lstStyle/>
+                    <a:p>
+                      <a:pPr algn="ctr" indent="0" marL="0">
+                        <a:buNone/>
+                      </a:pPr>
+                      <a:endParaRPr lang="en-US" sz="500" dirty="0">
+                        <a:latin typeface="Calibri" charset="0"/>
+                        <a:ea typeface="Calibri" charset="0"/>
+                        <a:cs typeface="Calibri" charset="0"/>
+                      </a:endParaRPr>
+                    </a:p>
+                  </a:txBody>
+                  <a:tcPr marL="91440" marR="91440" marT="45720" marB="45720">
+                    <a:lnL w="2540" cap="flat" cmpd="sng" algn="ctr">
+                      <a:solidFill>
+                        <a:srgbClr val="EEEEEE"/>
+                      </a:solidFill>
+                      <a:prstDash val="solid"/>
+                      <a:round/>
+                      <a:headEnd type="none" w="med" len="med"/>
+                      <a:tailEnd type="none" w="med" len="med"/>
+                    </a:lnL>
+                    <a:lnR w="2540" cap="flat" cmpd="sng" algn="ctr">
+                      <a:solidFill>
+                        <a:srgbClr val="EEEEEE"/>
+                      </a:solidFill>
+                      <a:prstDash val="solid"/>
+                      <a:round/>
+                      <a:headEnd type="none" w="med" len="med"/>
+                      <a:tailEnd type="none" w="med" len="med"/>
+                    </a:lnR>
+                    <a:lnT w="2540" cap="flat" cmpd="sng" algn="ctr">
+                      <a:solidFill>
+                        <a:srgbClr val="EEEEEE"/>
+                      </a:solidFill>
+                      <a:prstDash val="solid"/>
+                      <a:round/>
+                      <a:headEnd type="none" w="med" len="med"/>
+                      <a:tailEnd type="none" w="med" len="med"/>
+                    </a:lnT>
+                    <a:lnB w="2540" cap="flat" cmpd="sng" algn="ctr">
+                      <a:solidFill>
+                        <a:srgbClr val="EEEEEE"/>
+                      </a:solidFill>
+                      <a:prstDash val="solid"/>
+                      <a:round/>
+                      <a:headEnd type="none" w="med" len="med"/>
+                      <a:tailEnd type="none" w="med" len="med"/>
+                    </a:lnB>
+                  </a:tcPr>
+                </a:tc>
+                <a:tc>
+                  <a:txBody>
+                    <a:bodyPr/>
+                    <a:lstStyle/>
+                    <a:p>
+                      <a:pPr algn="ctr" indent="0" marL="0">
+                        <a:buNone/>
+                      </a:pPr>
+                      <a:endParaRPr lang="en-US" sz="500" dirty="0">
+                        <a:latin typeface="Calibri" charset="0"/>
+                        <a:ea typeface="Calibri" charset="0"/>
+                        <a:cs typeface="Calibri" charset="0"/>
+                      </a:endParaRPr>
+                    </a:p>
+                  </a:txBody>
+                  <a:tcPr marL="91440" marR="91440" marT="45720" marB="45720">
+                    <a:lnL w="2540" cap="flat" cmpd="sng" algn="ctr">
+                      <a:solidFill>
+                        <a:srgbClr val="EEEEEE"/>
+                      </a:solidFill>
+                      <a:prstDash val="solid"/>
+                      <a:round/>
+                      <a:headEnd type="none" w="med" len="med"/>
+                      <a:tailEnd type="none" w="med" len="med"/>
+                    </a:lnL>
+                    <a:lnR w="2540" cap="flat" cmpd="sng" algn="ctr">
+                      <a:solidFill>
+                        <a:srgbClr val="EEEEEE"/>
+                      </a:solidFill>
+                      <a:prstDash val="solid"/>
+                      <a:round/>
+                      <a:headEnd type="none" w="med" len="med"/>
+                      <a:tailEnd type="none" w="med" len="med"/>
+                    </a:lnR>
+                    <a:lnT w="2540" cap="flat" cmpd="sng" algn="ctr">
+                      <a:solidFill>
+                        <a:srgbClr val="EEEEEE"/>
+                      </a:solidFill>
+                      <a:prstDash val="solid"/>
+                      <a:round/>
+                      <a:headEnd type="none" w="med" len="med"/>
+                      <a:tailEnd type="none" w="med" len="med"/>
+                    </a:lnT>
+                    <a:lnB w="2540" cap="flat" cmpd="sng" algn="ctr">
+                      <a:solidFill>
+                        <a:srgbClr val="EEEEEE"/>
+                      </a:solidFill>
+                      <a:prstDash val="solid"/>
+                      <a:round/>
+                      <a:headEnd type="none" w="med" len="med"/>
+                      <a:tailEnd type="none" w="med" len="med"/>
+                    </a:lnB>
+                  </a:tcPr>
+                </a:tc>
+                <a:tc>
+                  <a:txBody>
+                    <a:bodyPr/>
+                    <a:lstStyle/>
+                    <a:p>
+                      <a:pPr algn="ctr" indent="0" marL="0">
+                        <a:buNone/>
+                      </a:pPr>
+                      <a:r>
+                        <a:rPr lang="en-US" sz="500" dirty="0">
+                          <a:solidFill>
+                            <a:srgbClr val="999999"/>
+                          </a:solidFill>
+                          <a:latin typeface="Calibri" pitchFamily="34" charset="0"/>
+                          <a:ea typeface="Calibri" pitchFamily="34" charset="-122"/>
+                          <a:cs typeface="Calibri" pitchFamily="34" charset="-120"/>
+                        </a:rPr>
+                        <a:t>0.01%</a:t>
+                      </a:r>
+                      <a:endParaRPr lang="en-US" sz="500" dirty="0">
+                        <a:latin typeface="Calibri" charset="0"/>
+                        <a:ea typeface="Calibri" charset="0"/>
+                        <a:cs typeface="Calibri" charset="0"/>
+                      </a:endParaRPr>
+                    </a:p>
+                  </a:txBody>
+                  <a:tcPr marL="91440" marR="91440" marT="45720" marB="45720">
+                    <a:lnL w="2540" cap="flat" cmpd="sng" algn="ctr">
+                      <a:solidFill>
+                        <a:srgbClr val="EEEEEE"/>
+                      </a:solidFill>
+                      <a:prstDash val="solid"/>
+                      <a:round/>
+                      <a:headEnd type="none" w="med" len="med"/>
+                      <a:tailEnd type="none" w="med" len="med"/>
+                    </a:lnL>
+                    <a:lnR w="2540" cap="flat" cmpd="sng" algn="ctr">
+                      <a:solidFill>
+                        <a:srgbClr val="EEEEEE"/>
+                      </a:solidFill>
+                      <a:prstDash val="solid"/>
+                      <a:round/>
+                      <a:headEnd type="none" w="med" len="med"/>
+                      <a:tailEnd type="none" w="med" len="med"/>
+                    </a:lnR>
+                    <a:lnT w="2540" cap="flat" cmpd="sng" algn="ctr">
+                      <a:solidFill>
+                        <a:srgbClr val="EEEEEE"/>
+                      </a:solidFill>
+                      <a:prstDash val="solid"/>
+                      <a:round/>
+                      <a:headEnd type="none" w="med" len="med"/>
+                      <a:tailEnd type="none" w="med" len="med"/>
+                    </a:lnT>
+                    <a:lnB w="2540" cap="flat" cmpd="sng" algn="ctr">
+                      <a:solidFill>
+                        <a:srgbClr val="EEEEEE"/>
+                      </a:solidFill>
+                      <a:prstDash val="solid"/>
+                      <a:round/>
+                      <a:headEnd type="none" w="med" len="med"/>
+                      <a:tailEnd type="none" w="med" len="med"/>
+                    </a:lnB>
+                  </a:tcPr>
+                </a:tc>
+                <a:tc>
+                  <a:txBody>
+                    <a:bodyPr/>
+                    <a:lstStyle/>
+                    <a:p>
+                      <a:pPr algn="ctr" indent="0" marL="0">
+                        <a:buNone/>
+                      </a:pPr>
+                      <a:r>
+                        <a:rPr lang="en-US" sz="500" dirty="0">
+                          <a:solidFill>
+                            <a:srgbClr val="999999"/>
+                          </a:solidFill>
+                          <a:latin typeface="Calibri" pitchFamily="34" charset="0"/>
+                          <a:ea typeface="Calibri" pitchFamily="34" charset="-122"/>
+                          <a:cs typeface="Calibri" pitchFamily="34" charset="-120"/>
+                        </a:rPr>
+                        <a:t>0.01%</a:t>
+                      </a:r>
+                      <a:endParaRPr lang="en-US" sz="500" dirty="0">
+                        <a:latin typeface="Calibri" charset="0"/>
+                        <a:ea typeface="Calibri" charset="0"/>
+                        <a:cs typeface="Calibri" charset="0"/>
+                      </a:endParaRPr>
+                    </a:p>
+                  </a:txBody>
+                  <a:tcPr marL="91440" marR="91440" marT="45720" marB="45720">
+                    <a:lnL w="2540" cap="flat" cmpd="sng" algn="ctr">
+                      <a:solidFill>
+                        <a:srgbClr val="EEEEEE"/>
+                      </a:solidFill>
+                      <a:prstDash val="solid"/>
+                      <a:round/>
+                      <a:headEnd type="none" w="med" len="med"/>
+                      <a:tailEnd type="none" w="med" len="med"/>
+                    </a:lnL>
+                    <a:lnR w="2540" cap="flat" cmpd="sng" algn="ctr">
+                      <a:solidFill>
+                        <a:srgbClr val="EEEEEE"/>
+                      </a:solidFill>
+                      <a:prstDash val="solid"/>
+                      <a:round/>
+                      <a:headEnd type="none" w="med" len="med"/>
+                      <a:tailEnd type="none" w="med" len="med"/>
+                    </a:lnR>
+                    <a:lnT w="2540" cap="flat" cmpd="sng" algn="ctr">
+                      <a:solidFill>
+                        <a:srgbClr val="EEEEEE"/>
+                      </a:solidFill>
+                      <a:prstDash val="solid"/>
+                      <a:round/>
+                      <a:headEnd type="none" w="med" len="med"/>
+                      <a:tailEnd type="none" w="med" len="med"/>
+                    </a:lnT>
+                    <a:lnB w="2540" cap="flat" cmpd="sng" algn="ctr">
+                      <a:solidFill>
+                        <a:srgbClr val="EEEEEE"/>
+                      </a:solidFill>
+                      <a:prstDash val="solid"/>
+                      <a:round/>
+                      <a:headEnd type="none" w="med" len="med"/>
+                      <a:tailEnd type="none" w="med" len="med"/>
+                    </a:lnB>
+                  </a:tcPr>
+                </a:tc>
+                <a:tc>
+                  <a:txBody>
+                    <a:bodyPr/>
+                    <a:lstStyle/>
+                    <a:p>
+                      <a:pPr algn="ctr" indent="0" marL="0">
+                        <a:buNone/>
+                      </a:pPr>
+                      <a:r>
+                        <a:rPr lang="en-US" sz="500" dirty="0">
+                          <a:solidFill>
+                            <a:srgbClr val="999999"/>
+                          </a:solidFill>
+                          <a:latin typeface="Calibri" pitchFamily="34" charset="0"/>
+                          <a:ea typeface="Calibri" pitchFamily="34" charset="-122"/>
+                          <a:cs typeface="Calibri" pitchFamily="34" charset="-120"/>
+                        </a:rPr>
+                        <a:t>0.01%</a:t>
+                      </a:r>
+                      <a:endParaRPr lang="en-US" sz="500" dirty="0">
+                        <a:latin typeface="Calibri" charset="0"/>
+                        <a:ea typeface="Calibri" charset="0"/>
+                        <a:cs typeface="Calibri" charset="0"/>
+                      </a:endParaRPr>
+                    </a:p>
+                  </a:txBody>
+                  <a:tcPr marL="91440" marR="91440" marT="45720" marB="45720">
+                    <a:lnL w="2540" cap="flat" cmpd="sng" algn="ctr">
+                      <a:solidFill>
+                        <a:srgbClr val="EEEEEE"/>
+                      </a:solidFill>
+                      <a:prstDash val="solid"/>
+                      <a:round/>
+                      <a:headEnd type="none" w="med" len="med"/>
+                      <a:tailEnd type="none" w="med" len="med"/>
+                    </a:lnL>
+                    <a:lnR w="2540" cap="flat" cmpd="sng" algn="ctr">
+                      <a:solidFill>
+                        <a:srgbClr val="EEEEEE"/>
+                      </a:solidFill>
+                      <a:prstDash val="solid"/>
+                      <a:round/>
+                      <a:headEnd type="none" w="med" len="med"/>
+                      <a:tailEnd type="none" w="med" len="med"/>
+                    </a:lnR>
+                    <a:lnT w="2540" cap="flat" cmpd="sng" algn="ctr">
+                      <a:solidFill>
+                        <a:srgbClr val="EEEEEE"/>
+                      </a:solidFill>
+                      <a:prstDash val="solid"/>
+                      <a:round/>
+                      <a:headEnd type="none" w="med" len="med"/>
+                      <a:tailEnd type="none" w="med" len="med"/>
+                    </a:lnT>
+                    <a:lnB w="2540" cap="flat" cmpd="sng" algn="ctr">
+                      <a:solidFill>
+                        <a:srgbClr val="EEEEEE"/>
+                      </a:solidFill>
+                      <a:prstDash val="solid"/>
+                      <a:round/>
+                      <a:headEnd type="none" w="med" len="med"/>
+                      <a:tailEnd type="none" w="med" len="med"/>
+                    </a:lnB>
+                  </a:tcPr>
+                </a:tc>
+                <a:tc>
+                  <a:txBody>
+                    <a:bodyPr/>
+                    <a:lstStyle/>
+                    <a:p>
+                      <a:pPr algn="ctr" indent="0" marL="0">
+                        <a:buNone/>
+                      </a:pPr>
+                      <a:r>
+                        <a:rPr lang="en-US" sz="500" dirty="0">
+                          <a:solidFill>
+                            <a:srgbClr val="999999"/>
+                          </a:solidFill>
+                          <a:latin typeface="Calibri" pitchFamily="34" charset="0"/>
+                          <a:ea typeface="Calibri" pitchFamily="34" charset="-122"/>
+                          <a:cs typeface="Calibri" pitchFamily="34" charset="-120"/>
+                        </a:rPr>
+                        <a:t>7.49%</a:t>
+                      </a:r>
+                      <a:endParaRPr lang="en-US" sz="500" dirty="0">
+                        <a:latin typeface="Calibri" charset="0"/>
+                        <a:ea typeface="Calibri" charset="0"/>
+                        <a:cs typeface="Calibri" charset="0"/>
+                      </a:endParaRPr>
+                    </a:p>
+                  </a:txBody>
+                  <a:tcPr marL="91440" marR="91440" marT="45720" marB="45720">
+                    <a:lnL w="2540" cap="flat" cmpd="sng" algn="ctr">
+                      <a:solidFill>
+                        <a:srgbClr val="EEEEEE"/>
+                      </a:solidFill>
+                      <a:prstDash val="solid"/>
+                      <a:round/>
+                      <a:headEnd type="none" w="med" len="med"/>
+                      <a:tailEnd type="none" w="med" len="med"/>
+                    </a:lnL>
+                    <a:lnR w="2540" cap="flat" cmpd="sng" algn="ctr">
+                      <a:solidFill>
+                        <a:srgbClr val="EEEEEE"/>
+                      </a:solidFill>
+                      <a:prstDash val="solid"/>
+                      <a:round/>
+                      <a:headEnd type="none" w="med" len="med"/>
+                      <a:tailEnd type="none" w="med" len="med"/>
+                    </a:lnR>
+                    <a:lnT w="2540" cap="flat" cmpd="sng" algn="ctr">
+                      <a:solidFill>
+                        <a:srgbClr val="EEEEEE"/>
+                      </a:solidFill>
+                      <a:prstDash val="solid"/>
+                      <a:round/>
+                      <a:headEnd type="none" w="med" len="med"/>
+                      <a:tailEnd type="none" w="med" len="med"/>
+                    </a:lnT>
+                    <a:lnB w="2540" cap="flat" cmpd="sng" algn="ctr">
+                      <a:solidFill>
+                        <a:srgbClr val="EEEEEE"/>
+                      </a:solidFill>
+                      <a:prstDash val="solid"/>
+                      <a:round/>
+                      <a:headEnd type="none" w="med" len="med"/>
+                      <a:tailEnd type="none" w="med" len="med"/>
+                    </a:lnB>
+                  </a:tcPr>
+                </a:tc>
+                <a:tc>
+                  <a:txBody>
+                    <a:bodyPr/>
+                    <a:lstStyle/>
+                    <a:p>
+                      <a:pPr algn="ctr" indent="0" marL="0">
+                        <a:buNone/>
+                      </a:pPr>
+                      <a:r>
+                        <a:rPr lang="en-US" sz="500" b="1" dirty="0">
+                          <a:solidFill>
+                            <a:srgbClr val="999999"/>
+                          </a:solidFill>
+                          <a:latin typeface="Calibri" pitchFamily="34" charset="0"/>
+                          <a:ea typeface="Calibri" pitchFamily="34" charset="-122"/>
+                          <a:cs typeface="Calibri" pitchFamily="34" charset="-120"/>
+                        </a:rPr>
+                        <a:t>7.51%</a:t>
+                      </a:r>
+                      <a:endParaRPr lang="en-US" sz="500" dirty="0">
+                        <a:latin typeface="Calibri" charset="0"/>
+                        <a:ea typeface="Calibri" charset="0"/>
+                        <a:cs typeface="Calibri" charset="0"/>
+                      </a:endParaRPr>
+                    </a:p>
+                  </a:txBody>
+                  <a:tcPr marL="91440" marR="91440" marT="45720" marB="45720">
+                    <a:lnL w="2540" cap="flat" cmpd="sng" algn="ctr">
+                      <a:solidFill>
+                        <a:srgbClr val="EEEEEE"/>
+                      </a:solidFill>
+                      <a:prstDash val="solid"/>
+                      <a:round/>
+                      <a:headEnd type="none" w="med" len="med"/>
+                      <a:tailEnd type="none" w="med" len="med"/>
+                    </a:lnL>
+                    <a:lnR w="2540" cap="flat" cmpd="sng" algn="ctr">
+                      <a:solidFill>
+                        <a:srgbClr val="EEEEEE"/>
+                      </a:solidFill>
+                      <a:prstDash val="solid"/>
+                      <a:round/>
+                      <a:headEnd type="none" w="med" len="med"/>
+                      <a:tailEnd type="none" w="med" len="med"/>
+                    </a:lnR>
+                    <a:lnT w="2540" cap="flat" cmpd="sng" algn="ctr">
+                      <a:solidFill>
+                        <a:srgbClr val="EEEEEE"/>
+                      </a:solidFill>
+                      <a:prstDash val="solid"/>
+                      <a:round/>
+                      <a:headEnd type="none" w="med" len="med"/>
+                      <a:tailEnd type="none" w="med" len="med"/>
+                    </a:lnT>
+                    <a:lnB w="2540" cap="flat" cmpd="sng" algn="ctr">
+                      <a:solidFill>
+                        <a:srgbClr val="EEEEEE"/>
+                      </a:solidFill>
+                      <a:prstDash val="solid"/>
+                      <a:round/>
+                      <a:headEnd type="none" w="med" len="med"/>
+                      <a:tailEnd type="none" w="med" len="med"/>
+                    </a:lnB>
+                  </a:tcPr>
+                </a:tc>
+              </a:tr>
+              <a:tr h="123444">
+                <a:tc>
+                  <a:txBody>
+                    <a:bodyPr/>
+                    <a:lstStyle/>
+                    <a:p>
+                      <a:pPr algn="l" indent="0" marL="0">
+                        <a:buNone/>
+                      </a:pPr>
+                      <a:endParaRPr lang="en-US" sz="500" dirty="0">
+                        <a:latin typeface="Calibri" charset="0"/>
+                        <a:ea typeface="Calibri" charset="0"/>
+                        <a:cs typeface="Calibri" charset="0"/>
+                      </a:endParaRPr>
+                    </a:p>
+                  </a:txBody>
+                  <a:tcPr marL="91440" marR="91440" marT="45720" marB="45720">
+                    <a:lnL w="2540" cap="flat" cmpd="sng" algn="ctr">
+                      <a:solidFill>
+                        <a:srgbClr val="EEEEEE"/>
+                      </a:solidFill>
+                      <a:prstDash val="solid"/>
+                      <a:round/>
+                      <a:headEnd type="none" w="med" len="med"/>
+                      <a:tailEnd type="none" w="med" len="med"/>
+                    </a:lnL>
+                    <a:lnR w="2540" cap="flat" cmpd="sng" algn="ctr">
+                      <a:solidFill>
+                        <a:srgbClr val="EEEEEE"/>
+                      </a:solidFill>
+                      <a:prstDash val="solid"/>
+                      <a:round/>
+                      <a:headEnd type="none" w="med" len="med"/>
+                      <a:tailEnd type="none" w="med" len="med"/>
+                    </a:lnR>
+                    <a:lnT w="2540" cap="flat" cmpd="sng" algn="ctr">
+                      <a:solidFill>
+                        <a:srgbClr val="EEEEEE"/>
+                      </a:solidFill>
+                      <a:prstDash val="solid"/>
+                      <a:round/>
+                      <a:headEnd type="none" w="med" len="med"/>
+                      <a:tailEnd type="none" w="med" len="med"/>
+                    </a:lnT>
+                    <a:lnB w="2540" cap="flat" cmpd="sng" algn="ctr">
+                      <a:solidFill>
+                        <a:srgbClr val="EEEEEE"/>
+                      </a:solidFill>
+                      <a:prstDash val="solid"/>
+                      <a:round/>
+                      <a:headEnd type="none" w="med" len="med"/>
+                      <a:tailEnd type="none" w="med" len="med"/>
+                    </a:lnB>
+                  </a:tcPr>
+                </a:tc>
+                <a:tc>
+                  <a:txBody>
+                    <a:bodyPr/>
+                    <a:lstStyle/>
+                    <a:p>
+                      <a:pPr algn="l" indent="0" marL="0">
+                        <a:buNone/>
+                      </a:pPr>
+                      <a:r>
+                        <a:rPr lang="en-US" sz="500" dirty="0">
+                          <a:solidFill>
+                            <a:srgbClr val="000000"/>
+                          </a:solidFill>
+                          <a:latin typeface="Calibri" pitchFamily="34" charset="0"/>
+                          <a:ea typeface="Calibri" pitchFamily="34" charset="-122"/>
+                          <a:cs typeface="Calibri" pitchFamily="34" charset="-120"/>
+                        </a:rPr>
+                        <a:t>FIP LIQUIDEZ Permanente</a:t>
+                      </a:r>
+                      <a:endParaRPr lang="en-US" sz="500" dirty="0">
+                        <a:latin typeface="Calibri" charset="0"/>
+                        <a:ea typeface="Calibri" charset="0"/>
+                        <a:cs typeface="Calibri" charset="0"/>
+                      </a:endParaRPr>
+                    </a:p>
+                  </a:txBody>
+                  <a:tcPr marL="91440" marR="91440" marT="45720" marB="45720">
+                    <a:lnL w="2540" cap="flat" cmpd="sng" algn="ctr">
+                      <a:solidFill>
+                        <a:srgbClr val="EEEEEE"/>
+                      </a:solidFill>
+                      <a:prstDash val="solid"/>
+                      <a:round/>
+                      <a:headEnd type="none" w="med" len="med"/>
+                      <a:tailEnd type="none" w="med" len="med"/>
+                    </a:lnL>
+                    <a:lnR w="2540" cap="flat" cmpd="sng" algn="ctr">
+                      <a:solidFill>
+                        <a:srgbClr val="EEEEEE"/>
+                      </a:solidFill>
+                      <a:prstDash val="solid"/>
+                      <a:round/>
+                      <a:headEnd type="none" w="med" len="med"/>
+                      <a:tailEnd type="none" w="med" len="med"/>
+                    </a:lnR>
+                    <a:lnT w="2540" cap="flat" cmpd="sng" algn="ctr">
+                      <a:solidFill>
+                        <a:srgbClr val="EEEEEE"/>
+                      </a:solidFill>
+                      <a:prstDash val="solid"/>
+                      <a:round/>
+                      <a:headEnd type="none" w="med" len="med"/>
+                      <a:tailEnd type="none" w="med" len="med"/>
+                    </a:lnT>
+                    <a:lnB w="2540" cap="flat" cmpd="sng" algn="ctr">
+                      <a:solidFill>
+                        <a:srgbClr val="EEEEEE"/>
+                      </a:solidFill>
+                      <a:prstDash val="solid"/>
+                      <a:round/>
+                      <a:headEnd type="none" w="med" len="med"/>
+                      <a:tailEnd type="none" w="med" len="med"/>
+                    </a:lnB>
+                  </a:tcPr>
+                </a:tc>
+                <a:tc>
+                  <a:txBody>
+                    <a:bodyPr/>
+                    <a:lstStyle/>
+                    <a:p>
+                      <a:pPr algn="ctr" indent="0" marL="0">
+                        <a:buNone/>
+                      </a:pPr>
+                      <a:endParaRPr lang="en-US" sz="500" dirty="0">
+                        <a:latin typeface="Calibri" charset="0"/>
+                        <a:ea typeface="Calibri" charset="0"/>
+                        <a:cs typeface="Calibri" charset="0"/>
+                      </a:endParaRPr>
+                    </a:p>
+                  </a:txBody>
+                  <a:tcPr marL="91440" marR="91440" marT="45720" marB="45720">
+                    <a:lnL w="2540" cap="flat" cmpd="sng" algn="ctr">
+                      <a:solidFill>
+                        <a:srgbClr val="EEEEEE"/>
+                      </a:solidFill>
+                      <a:prstDash val="solid"/>
+                      <a:round/>
+                      <a:headEnd type="none" w="med" len="med"/>
+                      <a:tailEnd type="none" w="med" len="med"/>
+                    </a:lnL>
+                    <a:lnR w="2540" cap="flat" cmpd="sng" algn="ctr">
+                      <a:solidFill>
+                        <a:srgbClr val="EEEEEE"/>
+                      </a:solidFill>
+                      <a:prstDash val="solid"/>
+                      <a:round/>
+                      <a:headEnd type="none" w="med" len="med"/>
+                      <a:tailEnd type="none" w="med" len="med"/>
+                    </a:lnR>
+                    <a:lnT w="2540" cap="flat" cmpd="sng" algn="ctr">
+                      <a:solidFill>
+                        <a:srgbClr val="EEEEEE"/>
+                      </a:solidFill>
+                      <a:prstDash val="solid"/>
+                      <a:round/>
+                      <a:headEnd type="none" w="med" len="med"/>
+                      <a:tailEnd type="none" w="med" len="med"/>
+                    </a:lnT>
+                    <a:lnB w="2540" cap="flat" cmpd="sng" algn="ctr">
+                      <a:solidFill>
+                        <a:srgbClr val="EEEEEE"/>
+                      </a:solidFill>
+                      <a:prstDash val="solid"/>
+                      <a:round/>
+                      <a:headEnd type="none" w="med" len="med"/>
+                      <a:tailEnd type="none" w="med" len="med"/>
+                    </a:lnB>
+                  </a:tcPr>
+                </a:tc>
+                <a:tc>
+                  <a:txBody>
+                    <a:bodyPr/>
+                    <a:lstStyle/>
+                    <a:p>
+                      <a:pPr algn="ctr" indent="0" marL="0">
+                        <a:buNone/>
+                      </a:pPr>
+                      <a:endParaRPr lang="en-US" sz="500" dirty="0">
+                        <a:latin typeface="Calibri" charset="0"/>
+                        <a:ea typeface="Calibri" charset="0"/>
+                        <a:cs typeface="Calibri" charset="0"/>
+                      </a:endParaRPr>
+                    </a:p>
+                  </a:txBody>
+                  <a:tcPr marL="91440" marR="91440" marT="45720" marB="45720">
+                    <a:lnL w="2540" cap="flat" cmpd="sng" algn="ctr">
+                      <a:solidFill>
+                        <a:srgbClr val="EEEEEE"/>
+                      </a:solidFill>
+                      <a:prstDash val="solid"/>
+                      <a:round/>
+                      <a:headEnd type="none" w="med" len="med"/>
+                      <a:tailEnd type="none" w="med" len="med"/>
+                    </a:lnL>
+                    <a:lnR w="2540" cap="flat" cmpd="sng" algn="ctr">
+                      <a:solidFill>
+                        <a:srgbClr val="EEEEEE"/>
+                      </a:solidFill>
+                      <a:prstDash val="solid"/>
+                      <a:round/>
+                      <a:headEnd type="none" w="med" len="med"/>
+                      <a:tailEnd type="none" w="med" len="med"/>
+                    </a:lnR>
+                    <a:lnT w="2540" cap="flat" cmpd="sng" algn="ctr">
+                      <a:solidFill>
+                        <a:srgbClr val="EEEEEE"/>
+                      </a:solidFill>
+                      <a:prstDash val="solid"/>
+                      <a:round/>
+                      <a:headEnd type="none" w="med" len="med"/>
+                      <a:tailEnd type="none" w="med" len="med"/>
+                    </a:lnT>
+                    <a:lnB w="2540" cap="flat" cmpd="sng" algn="ctr">
+                      <a:solidFill>
+                        <a:srgbClr val="EEEEEE"/>
+                      </a:solidFill>
+                      <a:prstDash val="solid"/>
+                      <a:round/>
+                      <a:headEnd type="none" w="med" len="med"/>
+                      <a:tailEnd type="none" w="med" len="med"/>
+                    </a:lnB>
+                  </a:tcPr>
+                </a:tc>
+                <a:tc>
+                  <a:txBody>
+                    <a:bodyPr/>
+                    <a:lstStyle/>
+                    <a:p>
+                      <a:pPr algn="ctr" indent="0" marL="0">
+                        <a:buNone/>
+                      </a:pPr>
+                      <a:endParaRPr lang="en-US" sz="500" dirty="0">
+                        <a:latin typeface="Calibri" charset="0"/>
+                        <a:ea typeface="Calibri" charset="0"/>
+                        <a:cs typeface="Calibri" charset="0"/>
+                      </a:endParaRPr>
+                    </a:p>
+                  </a:txBody>
+                  <a:tcPr marL="91440" marR="91440" marT="45720" marB="45720">
+                    <a:lnL w="2540" cap="flat" cmpd="sng" algn="ctr">
+                      <a:solidFill>
+                        <a:srgbClr val="EEEEEE"/>
+                      </a:solidFill>
+                      <a:prstDash val="solid"/>
+                      <a:round/>
+                      <a:headEnd type="none" w="med" len="med"/>
+                      <a:tailEnd type="none" w="med" len="med"/>
+                    </a:lnL>
+                    <a:lnR w="2540" cap="flat" cmpd="sng" algn="ctr">
+                      <a:solidFill>
+                        <a:srgbClr val="EEEEEE"/>
+                      </a:solidFill>
+                      <a:prstDash val="solid"/>
+                      <a:round/>
+                      <a:headEnd type="none" w="med" len="med"/>
+                      <a:tailEnd type="none" w="med" len="med"/>
+                    </a:lnR>
+                    <a:lnT w="2540" cap="flat" cmpd="sng" algn="ctr">
+                      <a:solidFill>
+                        <a:srgbClr val="EEEEEE"/>
+                      </a:solidFill>
+                      <a:prstDash val="solid"/>
+                      <a:round/>
+                      <a:headEnd type="none" w="med" len="med"/>
+                      <a:tailEnd type="none" w="med" len="med"/>
+                    </a:lnT>
+                    <a:lnB w="2540" cap="flat" cmpd="sng" algn="ctr">
+                      <a:solidFill>
+                        <a:srgbClr val="EEEEEE"/>
+                      </a:solidFill>
+                      <a:prstDash val="solid"/>
+                      <a:round/>
+                      <a:headEnd type="none" w="med" len="med"/>
+                      <a:tailEnd type="none" w="med" len="med"/>
+                    </a:lnB>
+                  </a:tcPr>
+                </a:tc>
+                <a:tc>
+                  <a:txBody>
+                    <a:bodyPr/>
+                    <a:lstStyle/>
+                    <a:p>
+                      <a:pPr algn="ctr" indent="0" marL="0">
+                        <a:buNone/>
+                      </a:pPr>
+                      <a:endParaRPr lang="en-US" sz="500" dirty="0">
+                        <a:latin typeface="Calibri" charset="0"/>
+                        <a:ea typeface="Calibri" charset="0"/>
+                        <a:cs typeface="Calibri" charset="0"/>
+                      </a:endParaRPr>
+                    </a:p>
+                  </a:txBody>
+                  <a:tcPr marL="91440" marR="91440" marT="45720" marB="45720">
+                    <a:lnL w="2540" cap="flat" cmpd="sng" algn="ctr">
+                      <a:solidFill>
+                        <a:srgbClr val="EEEEEE"/>
+                      </a:solidFill>
+                      <a:prstDash val="solid"/>
+                      <a:round/>
+                      <a:headEnd type="none" w="med" len="med"/>
+                      <a:tailEnd type="none" w="med" len="med"/>
+                    </a:lnL>
+                    <a:lnR w="2540" cap="flat" cmpd="sng" algn="ctr">
+                      <a:solidFill>
+                        <a:srgbClr val="EEEEEE"/>
+                      </a:solidFill>
+                      <a:prstDash val="solid"/>
+                      <a:round/>
+                      <a:headEnd type="none" w="med" len="med"/>
+                      <a:tailEnd type="none" w="med" len="med"/>
+                    </a:lnR>
+                    <a:lnT w="2540" cap="flat" cmpd="sng" algn="ctr">
+                      <a:solidFill>
+                        <a:srgbClr val="EEEEEE"/>
+                      </a:solidFill>
+                      <a:prstDash val="solid"/>
+                      <a:round/>
+                      <a:headEnd type="none" w="med" len="med"/>
+                      <a:tailEnd type="none" w="med" len="med"/>
+                    </a:lnT>
+                    <a:lnB w="2540" cap="flat" cmpd="sng" algn="ctr">
+                      <a:solidFill>
+                        <a:srgbClr val="EEEEEE"/>
+                      </a:solidFill>
+                      <a:prstDash val="solid"/>
+                      <a:round/>
+                      <a:headEnd type="none" w="med" len="med"/>
+                      <a:tailEnd type="none" w="med" len="med"/>
+                    </a:lnB>
+                  </a:tcPr>
+                </a:tc>
+                <a:tc>
+                  <a:txBody>
+                    <a:bodyPr/>
+                    <a:lstStyle/>
+                    <a:p>
+                      <a:pPr algn="ctr" indent="0" marL="0">
+                        <a:buNone/>
+                      </a:pPr>
+                      <a:endParaRPr lang="en-US" sz="500" dirty="0">
+                        <a:latin typeface="Calibri" charset="0"/>
+                        <a:ea typeface="Calibri" charset="0"/>
+                        <a:cs typeface="Calibri" charset="0"/>
+                      </a:endParaRPr>
+                    </a:p>
+                  </a:txBody>
+                  <a:tcPr marL="91440" marR="91440" marT="45720" marB="45720">
+                    <a:lnL w="2540" cap="flat" cmpd="sng" algn="ctr">
+                      <a:solidFill>
+                        <a:srgbClr val="EEEEEE"/>
+                      </a:solidFill>
+                      <a:prstDash val="solid"/>
+                      <a:round/>
+                      <a:headEnd type="none" w="med" len="med"/>
+                      <a:tailEnd type="none" w="med" len="med"/>
+                    </a:lnL>
+                    <a:lnR w="2540" cap="flat" cmpd="sng" algn="ctr">
+                      <a:solidFill>
+                        <a:srgbClr val="EEEEEE"/>
+                      </a:solidFill>
+                      <a:prstDash val="solid"/>
+                      <a:round/>
+                      <a:headEnd type="none" w="med" len="med"/>
+                      <a:tailEnd type="none" w="med" len="med"/>
+                    </a:lnR>
+                    <a:lnT w="2540" cap="flat" cmpd="sng" algn="ctr">
+                      <a:solidFill>
+                        <a:srgbClr val="EEEEEE"/>
+                      </a:solidFill>
+                      <a:prstDash val="solid"/>
+                      <a:round/>
+                      <a:headEnd type="none" w="med" len="med"/>
+                      <a:tailEnd type="none" w="med" len="med"/>
+                    </a:lnT>
+                    <a:lnB w="2540" cap="flat" cmpd="sng" algn="ctr">
+                      <a:solidFill>
+                        <a:srgbClr val="EEEEEE"/>
+                      </a:solidFill>
+                      <a:prstDash val="solid"/>
+                      <a:round/>
+                      <a:headEnd type="none" w="med" len="med"/>
+                      <a:tailEnd type="none" w="med" len="med"/>
+                    </a:lnB>
+                  </a:tcPr>
+                </a:tc>
+                <a:tc>
+                  <a:txBody>
+                    <a:bodyPr/>
+                    <a:lstStyle/>
+                    <a:p>
+                      <a:pPr algn="ctr" indent="0" marL="0">
+                        <a:buNone/>
+                      </a:pPr>
+                      <a:endParaRPr lang="en-US" sz="500" dirty="0">
+                        <a:latin typeface="Calibri" charset="0"/>
+                        <a:ea typeface="Calibri" charset="0"/>
+                        <a:cs typeface="Calibri" charset="0"/>
+                      </a:endParaRPr>
+                    </a:p>
+                  </a:txBody>
+                  <a:tcPr marL="91440" marR="91440" marT="45720" marB="45720">
+                    <a:lnL w="2540" cap="flat" cmpd="sng" algn="ctr">
+                      <a:solidFill>
+                        <a:srgbClr val="EEEEEE"/>
+                      </a:solidFill>
+                      <a:prstDash val="solid"/>
+                      <a:round/>
+                      <a:headEnd type="none" w="med" len="med"/>
+                      <a:tailEnd type="none" w="med" len="med"/>
+                    </a:lnL>
+                    <a:lnR w="2540" cap="flat" cmpd="sng" algn="ctr">
+                      <a:solidFill>
+                        <a:srgbClr val="EEEEEE"/>
+                      </a:solidFill>
+                      <a:prstDash val="solid"/>
+                      <a:round/>
+                      <a:headEnd type="none" w="med" len="med"/>
+                      <a:tailEnd type="none" w="med" len="med"/>
+                    </a:lnR>
+                    <a:lnT w="2540" cap="flat" cmpd="sng" algn="ctr">
+                      <a:solidFill>
+                        <a:srgbClr val="EEEEEE"/>
+                      </a:solidFill>
+                      <a:prstDash val="solid"/>
+                      <a:round/>
+                      <a:headEnd type="none" w="med" len="med"/>
+                      <a:tailEnd type="none" w="med" len="med"/>
+                    </a:lnT>
+                    <a:lnB w="2540" cap="flat" cmpd="sng" algn="ctr">
+                      <a:solidFill>
+                        <a:srgbClr val="EEEEEE"/>
+                      </a:solidFill>
+                      <a:prstDash val="solid"/>
+                      <a:round/>
+                      <a:headEnd type="none" w="med" len="med"/>
+                      <a:tailEnd type="none" w="med" len="med"/>
+                    </a:lnB>
+                  </a:tcPr>
+                </a:tc>
+                <a:tc>
+                  <a:txBody>
+                    <a:bodyPr/>
+                    <a:lstStyle/>
+                    <a:p>
+                      <a:pPr algn="ctr" indent="0" marL="0">
+                        <a:buNone/>
+                      </a:pPr>
+                      <a:endParaRPr lang="en-US" sz="500" dirty="0">
+                        <a:latin typeface="Calibri" charset="0"/>
+                        <a:ea typeface="Calibri" charset="0"/>
+                        <a:cs typeface="Calibri" charset="0"/>
+                      </a:endParaRPr>
+                    </a:p>
+                  </a:txBody>
+                  <a:tcPr marL="91440" marR="91440" marT="45720" marB="45720">
+                    <a:lnL w="2540" cap="flat" cmpd="sng" algn="ctr">
+                      <a:solidFill>
+                        <a:srgbClr val="EEEEEE"/>
+                      </a:solidFill>
+                      <a:prstDash val="solid"/>
+                      <a:round/>
+                      <a:headEnd type="none" w="med" len="med"/>
+                      <a:tailEnd type="none" w="med" len="med"/>
+                    </a:lnL>
+                    <a:lnR w="2540" cap="flat" cmpd="sng" algn="ctr">
+                      <a:solidFill>
+                        <a:srgbClr val="EEEEEE"/>
+                      </a:solidFill>
+                      <a:prstDash val="solid"/>
+                      <a:round/>
+                      <a:headEnd type="none" w="med" len="med"/>
+                      <a:tailEnd type="none" w="med" len="med"/>
+                    </a:lnR>
+                    <a:lnT w="2540" cap="flat" cmpd="sng" algn="ctr">
+                      <a:solidFill>
+                        <a:srgbClr val="EEEEEE"/>
+                      </a:solidFill>
+                      <a:prstDash val="solid"/>
+                      <a:round/>
+                      <a:headEnd type="none" w="med" len="med"/>
+                      <a:tailEnd type="none" w="med" len="med"/>
+                    </a:lnT>
+                    <a:lnB w="2540" cap="flat" cmpd="sng" algn="ctr">
+                      <a:solidFill>
+                        <a:srgbClr val="EEEEEE"/>
+                      </a:solidFill>
+                      <a:prstDash val="solid"/>
+                      <a:round/>
+                      <a:headEnd type="none" w="med" len="med"/>
+                      <a:tailEnd type="none" w="med" len="med"/>
+                    </a:lnB>
+                  </a:tcPr>
+                </a:tc>
+                <a:tc>
+                  <a:txBody>
+                    <a:bodyPr/>
+                    <a:lstStyle/>
+                    <a:p>
+                      <a:pPr algn="ctr" indent="0" marL="0">
+                        <a:buNone/>
+                      </a:pPr>
+                      <a:endParaRPr lang="en-US" sz="500" dirty="0">
+                        <a:latin typeface="Calibri" charset="0"/>
+                        <a:ea typeface="Calibri" charset="0"/>
+                        <a:cs typeface="Calibri" charset="0"/>
+                      </a:endParaRPr>
+                    </a:p>
+                  </a:txBody>
+                  <a:tcPr marL="91440" marR="91440" marT="45720" marB="45720">
+                    <a:lnL w="2540" cap="flat" cmpd="sng" algn="ctr">
+                      <a:solidFill>
+                        <a:srgbClr val="EEEEEE"/>
+                      </a:solidFill>
+                      <a:prstDash val="solid"/>
+                      <a:round/>
+                      <a:headEnd type="none" w="med" len="med"/>
+                      <a:tailEnd type="none" w="med" len="med"/>
+                    </a:lnL>
+                    <a:lnR w="2540" cap="flat" cmpd="sng" algn="ctr">
+                      <a:solidFill>
+                        <a:srgbClr val="EEEEEE"/>
+                      </a:solidFill>
+                      <a:prstDash val="solid"/>
+                      <a:round/>
+                      <a:headEnd type="none" w="med" len="med"/>
+                      <a:tailEnd type="none" w="med" len="med"/>
+                    </a:lnR>
+                    <a:lnT w="2540" cap="flat" cmpd="sng" algn="ctr">
+                      <a:solidFill>
+                        <a:srgbClr val="EEEEEE"/>
+                      </a:solidFill>
+                      <a:prstDash val="solid"/>
+                      <a:round/>
+                      <a:headEnd type="none" w="med" len="med"/>
+                      <a:tailEnd type="none" w="med" len="med"/>
+                    </a:lnT>
+                    <a:lnB w="2540" cap="flat" cmpd="sng" algn="ctr">
+                      <a:solidFill>
+                        <a:srgbClr val="EEEEEE"/>
+                      </a:solidFill>
+                      <a:prstDash val="solid"/>
+                      <a:round/>
+                      <a:headEnd type="none" w="med" len="med"/>
+                      <a:tailEnd type="none" w="med" len="med"/>
+                    </a:lnB>
+                  </a:tcPr>
+                </a:tc>
+                <a:tc>
+                  <a:txBody>
+                    <a:bodyPr/>
+                    <a:lstStyle/>
+                    <a:p>
+                      <a:pPr algn="ctr" indent="0" marL="0">
+                        <a:buNone/>
+                      </a:pPr>
+                      <a:r>
+                        <a:rPr lang="en-US" sz="500" dirty="0">
+                          <a:solidFill>
+                            <a:srgbClr val="000000"/>
+                          </a:solidFill>
+                          <a:latin typeface="Calibri" pitchFamily="34" charset="0"/>
+                          <a:ea typeface="Calibri" pitchFamily="34" charset="-122"/>
+                          <a:cs typeface="Calibri" pitchFamily="34" charset="-120"/>
+                        </a:rPr>
+                        <a:t>0.01%</a:t>
+                      </a:r>
+                      <a:endParaRPr lang="en-US" sz="500" dirty="0">
+                        <a:latin typeface="Calibri" charset="0"/>
+                        <a:ea typeface="Calibri" charset="0"/>
+                        <a:cs typeface="Calibri" charset="0"/>
+                      </a:endParaRPr>
+                    </a:p>
+                  </a:txBody>
+                  <a:tcPr marL="91440" marR="91440" marT="45720" marB="45720">
+                    <a:lnL w="2540" cap="flat" cmpd="sng" algn="ctr">
+                      <a:solidFill>
+                        <a:srgbClr val="EEEEEE"/>
+                      </a:solidFill>
+                      <a:prstDash val="solid"/>
+                      <a:round/>
+                      <a:headEnd type="none" w="med" len="med"/>
+                      <a:tailEnd type="none" w="med" len="med"/>
+                    </a:lnL>
+                    <a:lnR w="2540" cap="flat" cmpd="sng" algn="ctr">
+                      <a:solidFill>
+                        <a:srgbClr val="EEEEEE"/>
+                      </a:solidFill>
+                      <a:prstDash val="solid"/>
+                      <a:round/>
+                      <a:headEnd type="none" w="med" len="med"/>
+                      <a:tailEnd type="none" w="med" len="med"/>
+                    </a:lnR>
+                    <a:lnT w="2540" cap="flat" cmpd="sng" algn="ctr">
+                      <a:solidFill>
+                        <a:srgbClr val="EEEEEE"/>
+                      </a:solidFill>
+                      <a:prstDash val="solid"/>
+                      <a:round/>
+                      <a:headEnd type="none" w="med" len="med"/>
+                      <a:tailEnd type="none" w="med" len="med"/>
+                    </a:lnT>
+                    <a:lnB w="2540" cap="flat" cmpd="sng" algn="ctr">
+                      <a:solidFill>
+                        <a:srgbClr val="EEEEEE"/>
+                      </a:solidFill>
+                      <a:prstDash val="solid"/>
+                      <a:round/>
+                      <a:headEnd type="none" w="med" len="med"/>
+                      <a:tailEnd type="none" w="med" len="med"/>
+                    </a:lnB>
+                  </a:tcPr>
+                </a:tc>
+                <a:tc>
+                  <a:txBody>
+                    <a:bodyPr/>
+                    <a:lstStyle/>
+                    <a:p>
+                      <a:pPr algn="ctr" indent="0" marL="0">
+                        <a:buNone/>
+                      </a:pPr>
+                      <a:r>
+                        <a:rPr lang="en-US" sz="500" dirty="0">
+                          <a:solidFill>
+                            <a:srgbClr val="000000"/>
+                          </a:solidFill>
+                          <a:latin typeface="Calibri" pitchFamily="34" charset="0"/>
+                          <a:ea typeface="Calibri" pitchFamily="34" charset="-122"/>
+                          <a:cs typeface="Calibri" pitchFamily="34" charset="-120"/>
+                        </a:rPr>
+                        <a:t>0.01%</a:t>
+                      </a:r>
+                      <a:endParaRPr lang="en-US" sz="500" dirty="0">
+                        <a:latin typeface="Calibri" charset="0"/>
+                        <a:ea typeface="Calibri" charset="0"/>
+                        <a:cs typeface="Calibri" charset="0"/>
+                      </a:endParaRPr>
+                    </a:p>
+                  </a:txBody>
+                  <a:tcPr marL="91440" marR="91440" marT="45720" marB="45720">
+                    <a:lnL w="2540" cap="flat" cmpd="sng" algn="ctr">
+                      <a:solidFill>
+                        <a:srgbClr val="EEEEEE"/>
+                      </a:solidFill>
+                      <a:prstDash val="solid"/>
+                      <a:round/>
+                      <a:headEnd type="none" w="med" len="med"/>
+                      <a:tailEnd type="none" w="med" len="med"/>
+                    </a:lnL>
+                    <a:lnR w="2540" cap="flat" cmpd="sng" algn="ctr">
+                      <a:solidFill>
+                        <a:srgbClr val="EEEEEE"/>
+                      </a:solidFill>
+                      <a:prstDash val="solid"/>
+                      <a:round/>
+                      <a:headEnd type="none" w="med" len="med"/>
+                      <a:tailEnd type="none" w="med" len="med"/>
+                    </a:lnR>
+                    <a:lnT w="2540" cap="flat" cmpd="sng" algn="ctr">
+                      <a:solidFill>
+                        <a:srgbClr val="EEEEEE"/>
+                      </a:solidFill>
+                      <a:prstDash val="solid"/>
+                      <a:round/>
+                      <a:headEnd type="none" w="med" len="med"/>
+                      <a:tailEnd type="none" w="med" len="med"/>
+                    </a:lnT>
+                    <a:lnB w="2540" cap="flat" cmpd="sng" algn="ctr">
+                      <a:solidFill>
+                        <a:srgbClr val="EEEEEE"/>
+                      </a:solidFill>
+                      <a:prstDash val="solid"/>
+                      <a:round/>
+                      <a:headEnd type="none" w="med" len="med"/>
+                      <a:tailEnd type="none" w="med" len="med"/>
+                    </a:lnB>
+                  </a:tcPr>
+                </a:tc>
+                <a:tc>
+                  <a:txBody>
+                    <a:bodyPr/>
+                    <a:lstStyle/>
+                    <a:p>
+                      <a:pPr algn="ctr" indent="0" marL="0">
+                        <a:buNone/>
+                      </a:pPr>
+                      <a:r>
+                        <a:rPr lang="en-US" sz="500" dirty="0">
+                          <a:solidFill>
+                            <a:srgbClr val="000000"/>
+                          </a:solidFill>
+                          <a:latin typeface="Calibri" pitchFamily="34" charset="0"/>
+                          <a:ea typeface="Calibri" pitchFamily="34" charset="-122"/>
+                          <a:cs typeface="Calibri" pitchFamily="34" charset="-120"/>
+                        </a:rPr>
+                        <a:t>0.01%</a:t>
+                      </a:r>
+                      <a:endParaRPr lang="en-US" sz="500" dirty="0">
+                        <a:latin typeface="Calibri" charset="0"/>
+                        <a:ea typeface="Calibri" charset="0"/>
+                        <a:cs typeface="Calibri" charset="0"/>
+                      </a:endParaRPr>
+                    </a:p>
+                  </a:txBody>
+                  <a:tcPr marL="91440" marR="91440" marT="45720" marB="45720">
+                    <a:lnL w="2540" cap="flat" cmpd="sng" algn="ctr">
+                      <a:solidFill>
+                        <a:srgbClr val="EEEEEE"/>
+                      </a:solidFill>
+                      <a:prstDash val="solid"/>
+                      <a:round/>
+                      <a:headEnd type="none" w="med" len="med"/>
+                      <a:tailEnd type="none" w="med" len="med"/>
+                    </a:lnL>
+                    <a:lnR w="2540" cap="flat" cmpd="sng" algn="ctr">
+                      <a:solidFill>
+                        <a:srgbClr val="EEEEEE"/>
+                      </a:solidFill>
+                      <a:prstDash val="solid"/>
+                      <a:round/>
+                      <a:headEnd type="none" w="med" len="med"/>
+                      <a:tailEnd type="none" w="med" len="med"/>
+                    </a:lnR>
+                    <a:lnT w="2540" cap="flat" cmpd="sng" algn="ctr">
+                      <a:solidFill>
+                        <a:srgbClr val="EEEEEE"/>
+                      </a:solidFill>
+                      <a:prstDash val="solid"/>
+                      <a:round/>
+                      <a:headEnd type="none" w="med" len="med"/>
+                      <a:tailEnd type="none" w="med" len="med"/>
+                    </a:lnT>
+                    <a:lnB w="2540" cap="flat" cmpd="sng" algn="ctr">
+                      <a:solidFill>
+                        <a:srgbClr val="EEEEEE"/>
+                      </a:solidFill>
+                      <a:prstDash val="solid"/>
+                      <a:round/>
+                      <a:headEnd type="none" w="med" len="med"/>
+                      <a:tailEnd type="none" w="med" len="med"/>
+                    </a:lnB>
+                  </a:tcPr>
+                </a:tc>
+                <a:tc>
+                  <a:txBody>
+                    <a:bodyPr/>
+                    <a:lstStyle/>
+                    <a:p>
+                      <a:pPr algn="ctr" indent="0" marL="0">
+                        <a:buNone/>
+                      </a:pPr>
+                      <a:r>
+                        <a:rPr lang="en-US" sz="500" dirty="0">
+                          <a:solidFill>
+                            <a:srgbClr val="000000"/>
+                          </a:solidFill>
+                          <a:latin typeface="Calibri" pitchFamily="34" charset="0"/>
+                          <a:ea typeface="Calibri" pitchFamily="34" charset="-122"/>
+                          <a:cs typeface="Calibri" pitchFamily="34" charset="-120"/>
+                        </a:rPr>
+                        <a:t>0.01%</a:t>
+                      </a:r>
+                      <a:endParaRPr lang="en-US" sz="500" dirty="0">
+                        <a:latin typeface="Calibri" charset="0"/>
+                        <a:ea typeface="Calibri" charset="0"/>
+                        <a:cs typeface="Calibri" charset="0"/>
+                      </a:endParaRPr>
+                    </a:p>
+                  </a:txBody>
+                  <a:tcPr marL="91440" marR="91440" marT="45720" marB="45720">
+                    <a:lnL w="2540" cap="flat" cmpd="sng" algn="ctr">
+                      <a:solidFill>
+                        <a:srgbClr val="EEEEEE"/>
+                      </a:solidFill>
+                      <a:prstDash val="solid"/>
+                      <a:round/>
+                      <a:headEnd type="none" w="med" len="med"/>
+                      <a:tailEnd type="none" w="med" len="med"/>
+                    </a:lnL>
+                    <a:lnR w="2540" cap="flat" cmpd="sng" algn="ctr">
+                      <a:solidFill>
+                        <a:srgbClr val="EEEEEE"/>
+                      </a:solidFill>
+                      <a:prstDash val="solid"/>
+                      <a:round/>
+                      <a:headEnd type="none" w="med" len="med"/>
+                      <a:tailEnd type="none" w="med" len="med"/>
+                    </a:lnR>
+                    <a:lnT w="2540" cap="flat" cmpd="sng" algn="ctr">
+                      <a:solidFill>
+                        <a:srgbClr val="EEEEEE"/>
+                      </a:solidFill>
+                      <a:prstDash val="solid"/>
+                      <a:round/>
+                      <a:headEnd type="none" w="med" len="med"/>
+                      <a:tailEnd type="none" w="med" len="med"/>
+                    </a:lnT>
+                    <a:lnB w="2540" cap="flat" cmpd="sng" algn="ctr">
+                      <a:solidFill>
+                        <a:srgbClr val="EEEEEE"/>
+                      </a:solidFill>
+                      <a:prstDash val="solid"/>
+                      <a:round/>
+                      <a:headEnd type="none" w="med" len="med"/>
+                      <a:tailEnd type="none" w="med" len="med"/>
+                    </a:lnB>
+                  </a:tcPr>
+                </a:tc>
+                <a:tc>
+                  <a:txBody>
+                    <a:bodyPr/>
+                    <a:lstStyle/>
+                    <a:p>
+                      <a:pPr algn="ctr" indent="0" marL="0">
+                        <a:buNone/>
+                      </a:pPr>
+                      <a:r>
+                        <a:rPr lang="en-US" sz="500" b="1" dirty="0">
+                          <a:solidFill>
+                            <a:srgbClr val="000000"/>
+                          </a:solidFill>
+                          <a:latin typeface="Calibri" pitchFamily="34" charset="0"/>
+                          <a:ea typeface="Calibri" pitchFamily="34" charset="-122"/>
+                          <a:cs typeface="Calibri" pitchFamily="34" charset="-120"/>
+                        </a:rPr>
+                        <a:t>0.03%</a:t>
+                      </a:r>
+                      <a:endParaRPr lang="en-US" sz="500" dirty="0">
+                        <a:latin typeface="Calibri" charset="0"/>
+                        <a:ea typeface="Calibri" charset="0"/>
+                        <a:cs typeface="Calibri" charset="0"/>
+                      </a:endParaRPr>
+                    </a:p>
+                  </a:txBody>
+                  <a:tcPr marL="91440" marR="91440" marT="45720" marB="45720">
+                    <a:lnL w="2540" cap="flat" cmpd="sng" algn="ctr">
+                      <a:solidFill>
+                        <a:srgbClr val="EEEEEE"/>
+                      </a:solidFill>
+                      <a:prstDash val="solid"/>
+                      <a:round/>
+                      <a:headEnd type="none" w="med" len="med"/>
+                      <a:tailEnd type="none" w="med" len="med"/>
+                    </a:lnL>
+                    <a:lnR w="2540" cap="flat" cmpd="sng" algn="ctr">
+                      <a:solidFill>
+                        <a:srgbClr val="EEEEEE"/>
+                      </a:solidFill>
+                      <a:prstDash val="solid"/>
+                      <a:round/>
+                      <a:headEnd type="none" w="med" len="med"/>
+                      <a:tailEnd type="none" w="med" len="med"/>
+                    </a:lnR>
+                    <a:lnT w="2540" cap="flat" cmpd="sng" algn="ctr">
+                      <a:solidFill>
+                        <a:srgbClr val="EEEEEE"/>
+                      </a:solidFill>
+                      <a:prstDash val="solid"/>
+                      <a:round/>
+                      <a:headEnd type="none" w="med" len="med"/>
+                      <a:tailEnd type="none" w="med" len="med"/>
+                    </a:lnT>
+                    <a:lnB w="2540" cap="flat" cmpd="sng" algn="ctr">
+                      <a:solidFill>
+                        <a:srgbClr val="EEEEEE"/>
+                      </a:solidFill>
+                      <a:prstDash val="solid"/>
+                      <a:round/>
+                      <a:headEnd type="none" w="med" len="med"/>
+                      <a:tailEnd type="none" w="med" len="med"/>
+                    </a:lnB>
+                  </a:tcPr>
+                </a:tc>
+              </a:tr>
+              <a:tr h="123444">
+                <a:tc>
+                  <a:txBody>
+                    <a:bodyPr/>
+                    <a:lstStyle/>
+                    <a:p>
+                      <a:pPr algn="l" indent="0" marL="0">
+                        <a:buNone/>
+                      </a:pPr>
+                      <a:r>
+                        <a:rPr lang="en-US" sz="500" b="1" dirty="0">
+                          <a:solidFill>
+                            <a:srgbClr val="000000"/>
+                          </a:solidFill>
+                          <a:latin typeface="Calibri" pitchFamily="34" charset="0"/>
+                          <a:ea typeface="Calibri" pitchFamily="34" charset="-122"/>
+                          <a:cs typeface="Calibri" pitchFamily="34" charset="-120"/>
+                        </a:rPr>
+                        <a:t>2024</a:t>
+                      </a:r>
+                      <a:endParaRPr lang="en-US" sz="500" dirty="0">
+                        <a:latin typeface="Calibri" charset="0"/>
+                        <a:ea typeface="Calibri" charset="0"/>
+                        <a:cs typeface="Calibri" charset="0"/>
+                      </a:endParaRPr>
+                    </a:p>
+                  </a:txBody>
+                  <a:tcPr marL="91440" marR="91440" marT="45720" marB="45720">
+                    <a:lnL w="2540" cap="flat" cmpd="sng" algn="ctr">
+                      <a:solidFill>
+                        <a:srgbClr val="EEEEEE"/>
+                      </a:solidFill>
+                      <a:prstDash val="solid"/>
+                      <a:round/>
+                      <a:headEnd type="none" w="med" len="med"/>
+                      <a:tailEnd type="none" w="med" len="med"/>
+                    </a:lnL>
+                    <a:lnR w="2540" cap="flat" cmpd="sng" algn="ctr">
+                      <a:solidFill>
+                        <a:srgbClr val="EEEEEE"/>
+                      </a:solidFill>
+                      <a:prstDash val="solid"/>
+                      <a:round/>
+                      <a:headEnd type="none" w="med" len="med"/>
+                      <a:tailEnd type="none" w="med" len="med"/>
+                    </a:lnR>
+                    <a:lnT w="2540" cap="flat" cmpd="sng" algn="ctr">
+                      <a:solidFill>
+                        <a:srgbClr val="EEEEEE"/>
+                      </a:solidFill>
+                      <a:prstDash val="solid"/>
+                      <a:round/>
+                      <a:headEnd type="none" w="med" len="med"/>
+                      <a:tailEnd type="none" w="med" len="med"/>
+                    </a:lnT>
+                    <a:lnB w="2540" cap="flat" cmpd="sng" algn="ctr">
+                      <a:solidFill>
+                        <a:srgbClr val="EEEEEE"/>
+                      </a:solidFill>
+                      <a:prstDash val="solid"/>
+                      <a:round/>
+                      <a:headEnd type="none" w="med" len="med"/>
+                      <a:tailEnd type="none" w="med" len="med"/>
+                    </a:lnB>
+                  </a:tcPr>
+                </a:tc>
+                <a:tc>
+                  <a:txBody>
+                    <a:bodyPr/>
+                    <a:lstStyle/>
+                    <a:p>
+                      <a:pPr algn="l" indent="0" marL="0">
+                        <a:buNone/>
+                      </a:pPr>
+                      <a:r>
+                        <a:rPr lang="en-US" sz="500" dirty="0">
+                          <a:solidFill>
+                            <a:srgbClr val="777777"/>
+                          </a:solidFill>
+                          <a:latin typeface="Calibri" pitchFamily="34" charset="0"/>
+                          <a:ea typeface="Calibri" pitchFamily="34" charset="-122"/>
+                          <a:cs typeface="Calibri" pitchFamily="34" charset="-120"/>
+                        </a:rPr>
+                        <a:t>ICP</a:t>
+                      </a:r>
+                      <a:endParaRPr lang="en-US" sz="500" dirty="0">
+                        <a:latin typeface="Calibri" charset="0"/>
+                        <a:ea typeface="Calibri" charset="0"/>
+                        <a:cs typeface="Calibri" charset="0"/>
+                      </a:endParaRPr>
+                    </a:p>
+                  </a:txBody>
+                  <a:tcPr marL="91440" marR="91440" marT="45720" marB="45720">
+                    <a:lnL w="2540" cap="flat" cmpd="sng" algn="ctr">
+                      <a:solidFill>
+                        <a:srgbClr val="EEEEEE"/>
+                      </a:solidFill>
+                      <a:prstDash val="solid"/>
+                      <a:round/>
+                      <a:headEnd type="none" w="med" len="med"/>
+                      <a:tailEnd type="none" w="med" len="med"/>
+                    </a:lnL>
+                    <a:lnR w="2540" cap="flat" cmpd="sng" algn="ctr">
+                      <a:solidFill>
+                        <a:srgbClr val="EEEEEE"/>
+                      </a:solidFill>
+                      <a:prstDash val="solid"/>
+                      <a:round/>
+                      <a:headEnd type="none" w="med" len="med"/>
+                      <a:tailEnd type="none" w="med" len="med"/>
+                    </a:lnR>
+                    <a:lnT w="2540" cap="flat" cmpd="sng" algn="ctr">
+                      <a:solidFill>
+                        <a:srgbClr val="EEEEEE"/>
+                      </a:solidFill>
+                      <a:prstDash val="solid"/>
+                      <a:round/>
+                      <a:headEnd type="none" w="med" len="med"/>
+                      <a:tailEnd type="none" w="med" len="med"/>
+                    </a:lnT>
+                    <a:lnB w="2540" cap="flat" cmpd="sng" algn="ctr">
+                      <a:solidFill>
+                        <a:srgbClr val="EEEEEE"/>
+                      </a:solidFill>
+                      <a:prstDash val="solid"/>
+                      <a:round/>
+                      <a:headEnd type="none" w="med" len="med"/>
+                      <a:tailEnd type="none" w="med" len="med"/>
+                    </a:lnB>
+                  </a:tcPr>
+                </a:tc>
+                <a:tc>
+                  <a:txBody>
+                    <a:bodyPr/>
+                    <a:lstStyle/>
+                    <a:p>
+                      <a:pPr algn="ctr" indent="0" marL="0">
+                        <a:buNone/>
+                      </a:pPr>
+                      <a:r>
+                        <a:rPr lang="en-US" sz="500" dirty="0">
+                          <a:solidFill>
+                            <a:srgbClr val="777777"/>
+                          </a:solidFill>
+                          <a:latin typeface="Calibri" pitchFamily="34" charset="0"/>
+                          <a:ea typeface="Calibri" pitchFamily="34" charset="-122"/>
+                          <a:cs typeface="Calibri" pitchFamily="34" charset="-120"/>
+                        </a:rPr>
+                        <a:t>0.69%</a:t>
+                      </a:r>
+                      <a:endParaRPr lang="en-US" sz="500" dirty="0">
+                        <a:latin typeface="Calibri" charset="0"/>
+                        <a:ea typeface="Calibri" charset="0"/>
+                        <a:cs typeface="Calibri" charset="0"/>
+                      </a:endParaRPr>
+                    </a:p>
+                  </a:txBody>
+                  <a:tcPr marL="91440" marR="91440" marT="45720" marB="45720">
+                    <a:lnL w="2540" cap="flat" cmpd="sng" algn="ctr">
+                      <a:solidFill>
+                        <a:srgbClr val="EEEEEE"/>
+                      </a:solidFill>
+                      <a:prstDash val="solid"/>
+                      <a:round/>
+                      <a:headEnd type="none" w="med" len="med"/>
+                      <a:tailEnd type="none" w="med" len="med"/>
+                    </a:lnL>
+                    <a:lnR w="2540" cap="flat" cmpd="sng" algn="ctr">
+                      <a:solidFill>
+                        <a:srgbClr val="EEEEEE"/>
+                      </a:solidFill>
+                      <a:prstDash val="solid"/>
+                      <a:round/>
+                      <a:headEnd type="none" w="med" len="med"/>
+                      <a:tailEnd type="none" w="med" len="med"/>
+                    </a:lnR>
+                    <a:lnT w="2540" cap="flat" cmpd="sng" algn="ctr">
+                      <a:solidFill>
+                        <a:srgbClr val="EEEEEE"/>
+                      </a:solidFill>
+                      <a:prstDash val="solid"/>
+                      <a:round/>
+                      <a:headEnd type="none" w="med" len="med"/>
+                      <a:tailEnd type="none" w="med" len="med"/>
+                    </a:lnT>
+                    <a:lnB w="2540" cap="flat" cmpd="sng" algn="ctr">
+                      <a:solidFill>
+                        <a:srgbClr val="EEEEEE"/>
+                      </a:solidFill>
+                      <a:prstDash val="solid"/>
+                      <a:round/>
+                      <a:headEnd type="none" w="med" len="med"/>
+                      <a:tailEnd type="none" w="med" len="med"/>
+                    </a:lnB>
+                  </a:tcPr>
+                </a:tc>
+                <a:tc>
+                  <a:txBody>
+                    <a:bodyPr/>
+                    <a:lstStyle/>
+                    <a:p>
+                      <a:pPr algn="ctr" indent="0" marL="0">
+                        <a:buNone/>
+                      </a:pPr>
+                      <a:r>
+                        <a:rPr lang="en-US" sz="500" dirty="0">
+                          <a:solidFill>
+                            <a:srgbClr val="777777"/>
+                          </a:solidFill>
+                          <a:latin typeface="Calibri" pitchFamily="34" charset="0"/>
+                          <a:ea typeface="Calibri" pitchFamily="34" charset="-122"/>
+                          <a:cs typeface="Calibri" pitchFamily="34" charset="-120"/>
+                        </a:rPr>
+                        <a:t>0.60%</a:t>
+                      </a:r>
+                      <a:endParaRPr lang="en-US" sz="500" dirty="0">
+                        <a:latin typeface="Calibri" charset="0"/>
+                        <a:ea typeface="Calibri" charset="0"/>
+                        <a:cs typeface="Calibri" charset="0"/>
+                      </a:endParaRPr>
+                    </a:p>
+                  </a:txBody>
+                  <a:tcPr marL="91440" marR="91440" marT="45720" marB="45720">
+                    <a:lnL w="2540" cap="flat" cmpd="sng" algn="ctr">
+                      <a:solidFill>
+                        <a:srgbClr val="EEEEEE"/>
+                      </a:solidFill>
+                      <a:prstDash val="solid"/>
+                      <a:round/>
+                      <a:headEnd type="none" w="med" len="med"/>
+                      <a:tailEnd type="none" w="med" len="med"/>
+                    </a:lnL>
+                    <a:lnR w="2540" cap="flat" cmpd="sng" algn="ctr">
+                      <a:solidFill>
+                        <a:srgbClr val="EEEEEE"/>
+                      </a:solidFill>
+                      <a:prstDash val="solid"/>
+                      <a:round/>
+                      <a:headEnd type="none" w="med" len="med"/>
+                      <a:tailEnd type="none" w="med" len="med"/>
+                    </a:lnR>
+                    <a:lnT w="2540" cap="flat" cmpd="sng" algn="ctr">
+                      <a:solidFill>
+                        <a:srgbClr val="EEEEEE"/>
+                      </a:solidFill>
+                      <a:prstDash val="solid"/>
+                      <a:round/>
+                      <a:headEnd type="none" w="med" len="med"/>
+                      <a:tailEnd type="none" w="med" len="med"/>
+                    </a:lnT>
+                    <a:lnB w="2540" cap="flat" cmpd="sng" algn="ctr">
+                      <a:solidFill>
+                        <a:srgbClr val="EEEEEE"/>
+                      </a:solidFill>
+                      <a:prstDash val="solid"/>
+                      <a:round/>
+                      <a:headEnd type="none" w="med" len="med"/>
+                      <a:tailEnd type="none" w="med" len="med"/>
+                    </a:lnB>
+                  </a:tcPr>
+                </a:tc>
+                <a:tc>
+                  <a:txBody>
+                    <a:bodyPr/>
+                    <a:lstStyle/>
+                    <a:p>
+                      <a:pPr algn="ctr" indent="0" marL="0">
+                        <a:buNone/>
+                      </a:pPr>
+                      <a:r>
+                        <a:rPr lang="en-US" sz="500" dirty="0">
+                          <a:solidFill>
+                            <a:srgbClr val="777777"/>
+                          </a:solidFill>
+                          <a:latin typeface="Calibri" pitchFamily="34" charset="0"/>
+                          <a:ea typeface="Calibri" pitchFamily="34" charset="-122"/>
+                          <a:cs typeface="Calibri" pitchFamily="34" charset="-120"/>
+                        </a:rPr>
+                        <a:t>0.60%</a:t>
+                      </a:r>
+                      <a:endParaRPr lang="en-US" sz="500" dirty="0">
+                        <a:latin typeface="Calibri" charset="0"/>
+                        <a:ea typeface="Calibri" charset="0"/>
+                        <a:cs typeface="Calibri" charset="0"/>
+                      </a:endParaRPr>
+                    </a:p>
+                  </a:txBody>
+                  <a:tcPr marL="91440" marR="91440" marT="45720" marB="45720">
+                    <a:lnL w="2540" cap="flat" cmpd="sng" algn="ctr">
+                      <a:solidFill>
+                        <a:srgbClr val="EEEEEE"/>
+                      </a:solidFill>
+                      <a:prstDash val="solid"/>
+                      <a:round/>
+                      <a:headEnd type="none" w="med" len="med"/>
+                      <a:tailEnd type="none" w="med" len="med"/>
+                    </a:lnL>
+                    <a:lnR w="2540" cap="flat" cmpd="sng" algn="ctr">
+                      <a:solidFill>
+                        <a:srgbClr val="EEEEEE"/>
+                      </a:solidFill>
+                      <a:prstDash val="solid"/>
+                      <a:round/>
+                      <a:headEnd type="none" w="med" len="med"/>
+                      <a:tailEnd type="none" w="med" len="med"/>
+                    </a:lnR>
+                    <a:lnT w="2540" cap="flat" cmpd="sng" algn="ctr">
+                      <a:solidFill>
+                        <a:srgbClr val="EEEEEE"/>
+                      </a:solidFill>
+                      <a:prstDash val="solid"/>
+                      <a:round/>
+                      <a:headEnd type="none" w="med" len="med"/>
+                      <a:tailEnd type="none" w="med" len="med"/>
+                    </a:lnT>
+                    <a:lnB w="2540" cap="flat" cmpd="sng" algn="ctr">
+                      <a:solidFill>
+                        <a:srgbClr val="EEEEEE"/>
+                      </a:solidFill>
+                      <a:prstDash val="solid"/>
+                      <a:round/>
+                      <a:headEnd type="none" w="med" len="med"/>
+                      <a:tailEnd type="none" w="med" len="med"/>
+                    </a:lnB>
+                  </a:tcPr>
+                </a:tc>
+                <a:tc>
+                  <a:txBody>
+                    <a:bodyPr/>
+                    <a:lstStyle/>
+                    <a:p>
+                      <a:pPr algn="ctr" indent="0" marL="0">
+                        <a:buNone/>
+                      </a:pPr>
+                      <a:r>
+                        <a:rPr lang="en-US" sz="500" dirty="0">
+                          <a:solidFill>
+                            <a:srgbClr val="777777"/>
+                          </a:solidFill>
+                          <a:latin typeface="Calibri" pitchFamily="34" charset="0"/>
+                          <a:ea typeface="Calibri" pitchFamily="34" charset="-122"/>
+                          <a:cs typeface="Calibri" pitchFamily="34" charset="-120"/>
+                        </a:rPr>
+                        <a:t>0.55%</a:t>
+                      </a:r>
+                      <a:endParaRPr lang="en-US" sz="500" dirty="0">
+                        <a:latin typeface="Calibri" charset="0"/>
+                        <a:ea typeface="Calibri" charset="0"/>
+                        <a:cs typeface="Calibri" charset="0"/>
+                      </a:endParaRPr>
+                    </a:p>
+                  </a:txBody>
+                  <a:tcPr marL="91440" marR="91440" marT="45720" marB="45720">
+                    <a:lnL w="2540" cap="flat" cmpd="sng" algn="ctr">
+                      <a:solidFill>
+                        <a:srgbClr val="EEEEEE"/>
+                      </a:solidFill>
+                      <a:prstDash val="solid"/>
+                      <a:round/>
+                      <a:headEnd type="none" w="med" len="med"/>
+                      <a:tailEnd type="none" w="med" len="med"/>
+                    </a:lnL>
+                    <a:lnR w="2540" cap="flat" cmpd="sng" algn="ctr">
+                      <a:solidFill>
+                        <a:srgbClr val="EEEEEE"/>
+                      </a:solidFill>
+                      <a:prstDash val="solid"/>
+                      <a:round/>
+                      <a:headEnd type="none" w="med" len="med"/>
+                      <a:tailEnd type="none" w="med" len="med"/>
+                    </a:lnR>
+                    <a:lnT w="2540" cap="flat" cmpd="sng" algn="ctr">
+                      <a:solidFill>
+                        <a:srgbClr val="EEEEEE"/>
+                      </a:solidFill>
+                      <a:prstDash val="solid"/>
+                      <a:round/>
+                      <a:headEnd type="none" w="med" len="med"/>
+                      <a:tailEnd type="none" w="med" len="med"/>
+                    </a:lnT>
+                    <a:lnB w="2540" cap="flat" cmpd="sng" algn="ctr">
+                      <a:solidFill>
+                        <a:srgbClr val="EEEEEE"/>
+                      </a:solidFill>
+                      <a:prstDash val="solid"/>
+                      <a:round/>
+                      <a:headEnd type="none" w="med" len="med"/>
+                      <a:tailEnd type="none" w="med" len="med"/>
+                    </a:lnB>
+                  </a:tcPr>
+                </a:tc>
+                <a:tc>
+                  <a:txBody>
+                    <a:bodyPr/>
+                    <a:lstStyle/>
+                    <a:p>
+                      <a:pPr algn="ctr" indent="0" marL="0">
+                        <a:buNone/>
+                      </a:pPr>
+                      <a:r>
+                        <a:rPr lang="en-US" sz="500" dirty="0">
+                          <a:solidFill>
+                            <a:srgbClr val="777777"/>
+                          </a:solidFill>
+                          <a:latin typeface="Calibri" pitchFamily="34" charset="0"/>
+                          <a:ea typeface="Calibri" pitchFamily="34" charset="-122"/>
+                          <a:cs typeface="Calibri" pitchFamily="34" charset="-120"/>
+                        </a:rPr>
+                        <a:t>0.53%</a:t>
+                      </a:r>
+                      <a:endParaRPr lang="en-US" sz="500" dirty="0">
+                        <a:latin typeface="Calibri" charset="0"/>
+                        <a:ea typeface="Calibri" charset="0"/>
+                        <a:cs typeface="Calibri" charset="0"/>
+                      </a:endParaRPr>
+                    </a:p>
+                  </a:txBody>
+                  <a:tcPr marL="91440" marR="91440" marT="45720" marB="45720">
+                    <a:lnL w="2540" cap="flat" cmpd="sng" algn="ctr">
+                      <a:solidFill>
+                        <a:srgbClr val="EEEEEE"/>
+                      </a:solidFill>
+                      <a:prstDash val="solid"/>
+                      <a:round/>
+                      <a:headEnd type="none" w="med" len="med"/>
+                      <a:tailEnd type="none" w="med" len="med"/>
+                    </a:lnL>
+                    <a:lnR w="2540" cap="flat" cmpd="sng" algn="ctr">
+                      <a:solidFill>
+                        <a:srgbClr val="EEEEEE"/>
+                      </a:solidFill>
+                      <a:prstDash val="solid"/>
+                      <a:round/>
+                      <a:headEnd type="none" w="med" len="med"/>
+                      <a:tailEnd type="none" w="med" len="med"/>
+                    </a:lnR>
+                    <a:lnT w="2540" cap="flat" cmpd="sng" algn="ctr">
+                      <a:solidFill>
+                        <a:srgbClr val="EEEEEE"/>
+                      </a:solidFill>
+                      <a:prstDash val="solid"/>
+                      <a:round/>
+                      <a:headEnd type="none" w="med" len="med"/>
+                      <a:tailEnd type="none" w="med" len="med"/>
+                    </a:lnT>
+                    <a:lnB w="2540" cap="flat" cmpd="sng" algn="ctr">
+                      <a:solidFill>
+                        <a:srgbClr val="EEEEEE"/>
+                      </a:solidFill>
+                      <a:prstDash val="solid"/>
+                      <a:round/>
+                      <a:headEnd type="none" w="med" len="med"/>
+                      <a:tailEnd type="none" w="med" len="med"/>
+                    </a:lnB>
+                  </a:tcPr>
+                </a:tc>
+                <a:tc>
+                  <a:txBody>
+                    <a:bodyPr/>
+                    <a:lstStyle/>
+                    <a:p>
+                      <a:pPr algn="ctr" indent="0" marL="0">
+                        <a:buNone/>
+                      </a:pPr>
+                      <a:r>
+                        <a:rPr lang="en-US" sz="500" dirty="0">
+                          <a:solidFill>
+                            <a:srgbClr val="777777"/>
+                          </a:solidFill>
+                          <a:latin typeface="Calibri" pitchFamily="34" charset="0"/>
+                          <a:ea typeface="Calibri" pitchFamily="34" charset="-122"/>
+                          <a:cs typeface="Calibri" pitchFamily="34" charset="-120"/>
+                        </a:rPr>
+                        <a:t>0.49%</a:t>
+                      </a:r>
+                      <a:endParaRPr lang="en-US" sz="500" dirty="0">
+                        <a:latin typeface="Calibri" charset="0"/>
+                        <a:ea typeface="Calibri" charset="0"/>
+                        <a:cs typeface="Calibri" charset="0"/>
+                      </a:endParaRPr>
+                    </a:p>
+                  </a:txBody>
+                  <a:tcPr marL="91440" marR="91440" marT="45720" marB="45720">
+                    <a:lnL w="2540" cap="flat" cmpd="sng" algn="ctr">
+                      <a:solidFill>
+                        <a:srgbClr val="EEEEEE"/>
+                      </a:solidFill>
+                      <a:prstDash val="solid"/>
+                      <a:round/>
+                      <a:headEnd type="none" w="med" len="med"/>
+                      <a:tailEnd type="none" w="med" len="med"/>
+                    </a:lnL>
+                    <a:lnR w="2540" cap="flat" cmpd="sng" algn="ctr">
+                      <a:solidFill>
+                        <a:srgbClr val="EEEEEE"/>
+                      </a:solidFill>
+                      <a:prstDash val="solid"/>
+                      <a:round/>
+                      <a:headEnd type="none" w="med" len="med"/>
+                      <a:tailEnd type="none" w="med" len="med"/>
+                    </a:lnR>
+                    <a:lnT w="2540" cap="flat" cmpd="sng" algn="ctr">
+                      <a:solidFill>
+                        <a:srgbClr val="EEEEEE"/>
+                      </a:solidFill>
+                      <a:prstDash val="solid"/>
+                      <a:round/>
+                      <a:headEnd type="none" w="med" len="med"/>
+                      <a:tailEnd type="none" w="med" len="med"/>
+                    </a:lnT>
+                    <a:lnB w="2540" cap="flat" cmpd="sng" algn="ctr">
+                      <a:solidFill>
+                        <a:srgbClr val="EEEEEE"/>
+                      </a:solidFill>
+                      <a:prstDash val="solid"/>
+                      <a:round/>
+                      <a:headEnd type="none" w="med" len="med"/>
+                      <a:tailEnd type="none" w="med" len="med"/>
+                    </a:lnB>
+                  </a:tcPr>
+                </a:tc>
+                <a:tc>
+                  <a:txBody>
+                    <a:bodyPr/>
+                    <a:lstStyle/>
+                    <a:p>
+                      <a:pPr algn="ctr" indent="0" marL="0">
+                        <a:buNone/>
+                      </a:pPr>
+                      <a:r>
+                        <a:rPr lang="en-US" sz="500" dirty="0">
+                          <a:solidFill>
+                            <a:srgbClr val="777777"/>
+                          </a:solidFill>
+                          <a:latin typeface="Calibri" pitchFamily="34" charset="0"/>
+                          <a:ea typeface="Calibri" pitchFamily="34" charset="-122"/>
+                          <a:cs typeface="Calibri" pitchFamily="34" charset="-120"/>
+                        </a:rPr>
+                        <a:t>0.48%</a:t>
+                      </a:r>
+                      <a:endParaRPr lang="en-US" sz="500" dirty="0">
+                        <a:latin typeface="Calibri" charset="0"/>
+                        <a:ea typeface="Calibri" charset="0"/>
+                        <a:cs typeface="Calibri" charset="0"/>
+                      </a:endParaRPr>
+                    </a:p>
+                  </a:txBody>
+                  <a:tcPr marL="91440" marR="91440" marT="45720" marB="45720">
+                    <a:lnL w="2540" cap="flat" cmpd="sng" algn="ctr">
+                      <a:solidFill>
+                        <a:srgbClr val="EEEEEE"/>
+                      </a:solidFill>
+                      <a:prstDash val="solid"/>
+                      <a:round/>
+                      <a:headEnd type="none" w="med" len="med"/>
+                      <a:tailEnd type="none" w="med" len="med"/>
+                    </a:lnL>
+                    <a:lnR w="2540" cap="flat" cmpd="sng" algn="ctr">
+                      <a:solidFill>
+                        <a:srgbClr val="EEEEEE"/>
+                      </a:solidFill>
+                      <a:prstDash val="solid"/>
+                      <a:round/>
+                      <a:headEnd type="none" w="med" len="med"/>
+                      <a:tailEnd type="none" w="med" len="med"/>
+                    </a:lnR>
+                    <a:lnT w="2540" cap="flat" cmpd="sng" algn="ctr">
+                      <a:solidFill>
+                        <a:srgbClr val="EEEEEE"/>
+                      </a:solidFill>
+                      <a:prstDash val="solid"/>
+                      <a:round/>
+                      <a:headEnd type="none" w="med" len="med"/>
+                      <a:tailEnd type="none" w="med" len="med"/>
+                    </a:lnT>
+                    <a:lnB w="2540" cap="flat" cmpd="sng" algn="ctr">
+                      <a:solidFill>
+                        <a:srgbClr val="EEEEEE"/>
+                      </a:solidFill>
+                      <a:prstDash val="solid"/>
+                      <a:round/>
+                      <a:headEnd type="none" w="med" len="med"/>
+                      <a:tailEnd type="none" w="med" len="med"/>
+                    </a:lnB>
+                  </a:tcPr>
+                </a:tc>
+                <a:tc>
+                  <a:txBody>
+                    <a:bodyPr/>
+                    <a:lstStyle/>
+                    <a:p>
+                      <a:pPr algn="ctr" indent="0" marL="0">
+                        <a:buNone/>
+                      </a:pPr>
+                      <a:r>
+                        <a:rPr lang="en-US" sz="500" dirty="0">
+                          <a:solidFill>
+                            <a:srgbClr val="777777"/>
+                          </a:solidFill>
+                          <a:latin typeface="Calibri" pitchFamily="34" charset="0"/>
+                          <a:ea typeface="Calibri" pitchFamily="34" charset="-122"/>
+                          <a:cs typeface="Calibri" pitchFamily="34" charset="-120"/>
+                        </a:rPr>
+                        <a:t>0.48%</a:t>
+                      </a:r>
+                      <a:endParaRPr lang="en-US" sz="500" dirty="0">
+                        <a:latin typeface="Calibri" charset="0"/>
+                        <a:ea typeface="Calibri" charset="0"/>
+                        <a:cs typeface="Calibri" charset="0"/>
+                      </a:endParaRPr>
+                    </a:p>
+                  </a:txBody>
+                  <a:tcPr marL="91440" marR="91440" marT="45720" marB="45720">
+                    <a:lnL w="2540" cap="flat" cmpd="sng" algn="ctr">
+                      <a:solidFill>
+                        <a:srgbClr val="EEEEEE"/>
+                      </a:solidFill>
+                      <a:prstDash val="solid"/>
+                      <a:round/>
+                      <a:headEnd type="none" w="med" len="med"/>
+                      <a:tailEnd type="none" w="med" len="med"/>
+                    </a:lnL>
+                    <a:lnR w="2540" cap="flat" cmpd="sng" algn="ctr">
+                      <a:solidFill>
+                        <a:srgbClr val="EEEEEE"/>
+                      </a:solidFill>
+                      <a:prstDash val="solid"/>
+                      <a:round/>
+                      <a:headEnd type="none" w="med" len="med"/>
+                      <a:tailEnd type="none" w="med" len="med"/>
+                    </a:lnR>
+                    <a:lnT w="2540" cap="flat" cmpd="sng" algn="ctr">
+                      <a:solidFill>
+                        <a:srgbClr val="EEEEEE"/>
+                      </a:solidFill>
+                      <a:prstDash val="solid"/>
+                      <a:round/>
+                      <a:headEnd type="none" w="med" len="med"/>
+                      <a:tailEnd type="none" w="med" len="med"/>
+                    </a:lnT>
+                    <a:lnB w="2540" cap="flat" cmpd="sng" algn="ctr">
+                      <a:solidFill>
+                        <a:srgbClr val="EEEEEE"/>
+                      </a:solidFill>
+                      <a:prstDash val="solid"/>
+                      <a:round/>
+                      <a:headEnd type="none" w="med" len="med"/>
+                      <a:tailEnd type="none" w="med" len="med"/>
+                    </a:lnB>
+                  </a:tcPr>
+                </a:tc>
+                <a:tc>
+                  <a:txBody>
+                    <a:bodyPr/>
+                    <a:lstStyle/>
+                    <a:p>
+                      <a:pPr algn="ctr" indent="0" marL="0">
+                        <a:buNone/>
+                      </a:pPr>
+                      <a:r>
+                        <a:rPr lang="en-US" sz="500" dirty="0">
+                          <a:solidFill>
+                            <a:srgbClr val="777777"/>
+                          </a:solidFill>
+                          <a:latin typeface="Calibri" pitchFamily="34" charset="0"/>
+                          <a:ea typeface="Calibri" pitchFamily="34" charset="-122"/>
+                          <a:cs typeface="Calibri" pitchFamily="34" charset="-120"/>
+                        </a:rPr>
+                        <a:t>0.46%</a:t>
+                      </a:r>
+                      <a:endParaRPr lang="en-US" sz="500" dirty="0">
+                        <a:latin typeface="Calibri" charset="0"/>
+                        <a:ea typeface="Calibri" charset="0"/>
+                        <a:cs typeface="Calibri" charset="0"/>
+                      </a:endParaRPr>
+                    </a:p>
+                  </a:txBody>
+                  <a:tcPr marL="91440" marR="91440" marT="45720" marB="45720">
+                    <a:lnL w="2540" cap="flat" cmpd="sng" algn="ctr">
+                      <a:solidFill>
+                        <a:srgbClr val="EEEEEE"/>
+                      </a:solidFill>
+                      <a:prstDash val="solid"/>
+                      <a:round/>
+                      <a:headEnd type="none" w="med" len="med"/>
+                      <a:tailEnd type="none" w="med" len="med"/>
+                    </a:lnL>
+                    <a:lnR w="2540" cap="flat" cmpd="sng" algn="ctr">
+                      <a:solidFill>
+                        <a:srgbClr val="EEEEEE"/>
+                      </a:solidFill>
+                      <a:prstDash val="solid"/>
+                      <a:round/>
+                      <a:headEnd type="none" w="med" len="med"/>
+                      <a:tailEnd type="none" w="med" len="med"/>
+                    </a:lnR>
+                    <a:lnT w="2540" cap="flat" cmpd="sng" algn="ctr">
+                      <a:solidFill>
+                        <a:srgbClr val="EEEEEE"/>
+                      </a:solidFill>
+                      <a:prstDash val="solid"/>
+                      <a:round/>
+                      <a:headEnd type="none" w="med" len="med"/>
+                      <a:tailEnd type="none" w="med" len="med"/>
+                    </a:lnT>
+                    <a:lnB w="2540" cap="flat" cmpd="sng" algn="ctr">
+                      <a:solidFill>
+                        <a:srgbClr val="EEEEEE"/>
+                      </a:solidFill>
+                      <a:prstDash val="solid"/>
+                      <a:round/>
+                      <a:headEnd type="none" w="med" len="med"/>
+                      <a:tailEnd type="none" w="med" len="med"/>
+                    </a:lnB>
+                  </a:tcPr>
+                </a:tc>
+                <a:tc>
+                  <a:txBody>
+                    <a:bodyPr/>
+                    <a:lstStyle/>
+                    <a:p>
+                      <a:pPr algn="ctr" indent="0" marL="0">
+                        <a:buNone/>
+                      </a:pPr>
+                      <a:r>
+                        <a:rPr lang="en-US" sz="500" dirty="0">
+                          <a:solidFill>
+                            <a:srgbClr val="777777"/>
+                          </a:solidFill>
+                          <a:latin typeface="Calibri" pitchFamily="34" charset="0"/>
+                          <a:ea typeface="Calibri" pitchFamily="34" charset="-122"/>
+                          <a:cs typeface="Calibri" pitchFamily="34" charset="-120"/>
+                        </a:rPr>
+                        <a:t>0.45%</a:t>
+                      </a:r>
+                      <a:endParaRPr lang="en-US" sz="500" dirty="0">
+                        <a:latin typeface="Calibri" charset="0"/>
+                        <a:ea typeface="Calibri" charset="0"/>
+                        <a:cs typeface="Calibri" charset="0"/>
+                      </a:endParaRPr>
+                    </a:p>
+                  </a:txBody>
+                  <a:tcPr marL="91440" marR="91440" marT="45720" marB="45720">
+                    <a:lnL w="2540" cap="flat" cmpd="sng" algn="ctr">
+                      <a:solidFill>
+                        <a:srgbClr val="EEEEEE"/>
+                      </a:solidFill>
+                      <a:prstDash val="solid"/>
+                      <a:round/>
+                      <a:headEnd type="none" w="med" len="med"/>
+                      <a:tailEnd type="none" w="med" len="med"/>
+                    </a:lnL>
+                    <a:lnR w="2540" cap="flat" cmpd="sng" algn="ctr">
+                      <a:solidFill>
+                        <a:srgbClr val="EEEEEE"/>
+                      </a:solidFill>
+                      <a:prstDash val="solid"/>
+                      <a:round/>
+                      <a:headEnd type="none" w="med" len="med"/>
+                      <a:tailEnd type="none" w="med" len="med"/>
+                    </a:lnR>
+                    <a:lnT w="2540" cap="flat" cmpd="sng" algn="ctr">
+                      <a:solidFill>
+                        <a:srgbClr val="EEEEEE"/>
+                      </a:solidFill>
+                      <a:prstDash val="solid"/>
+                      <a:round/>
+                      <a:headEnd type="none" w="med" len="med"/>
+                      <a:tailEnd type="none" w="med" len="med"/>
+                    </a:lnT>
+                    <a:lnB w="2540" cap="flat" cmpd="sng" algn="ctr">
+                      <a:solidFill>
+                        <a:srgbClr val="EEEEEE"/>
+                      </a:solidFill>
+                      <a:prstDash val="solid"/>
+                      <a:round/>
+                      <a:headEnd type="none" w="med" len="med"/>
+                      <a:tailEnd type="none" w="med" len="med"/>
+                    </a:lnB>
+                  </a:tcPr>
+                </a:tc>
+                <a:tc>
+                  <a:txBody>
+                    <a:bodyPr/>
+                    <a:lstStyle/>
+                    <a:p>
+                      <a:pPr algn="ctr" indent="0" marL="0">
+                        <a:buNone/>
+                      </a:pPr>
+                      <a:r>
+                        <a:rPr lang="en-US" sz="500" dirty="0">
+                          <a:solidFill>
+                            <a:srgbClr val="777777"/>
+                          </a:solidFill>
+                          <a:latin typeface="Calibri" pitchFamily="34" charset="0"/>
+                          <a:ea typeface="Calibri" pitchFamily="34" charset="-122"/>
+                          <a:cs typeface="Calibri" pitchFamily="34" charset="-120"/>
+                        </a:rPr>
+                        <a:t>0.44%</a:t>
+                      </a:r>
+                      <a:endParaRPr lang="en-US" sz="500" dirty="0">
+                        <a:latin typeface="Calibri" charset="0"/>
+                        <a:ea typeface="Calibri" charset="0"/>
+                        <a:cs typeface="Calibri" charset="0"/>
+                      </a:endParaRPr>
+                    </a:p>
+                  </a:txBody>
+                  <a:tcPr marL="91440" marR="91440" marT="45720" marB="45720">
+                    <a:lnL w="2540" cap="flat" cmpd="sng" algn="ctr">
+                      <a:solidFill>
+                        <a:srgbClr val="EEEEEE"/>
+                      </a:solidFill>
+                      <a:prstDash val="solid"/>
+                      <a:round/>
+                      <a:headEnd type="none" w="med" len="med"/>
+                      <a:tailEnd type="none" w="med" len="med"/>
+                    </a:lnL>
+                    <a:lnR w="2540" cap="flat" cmpd="sng" algn="ctr">
+                      <a:solidFill>
+                        <a:srgbClr val="EEEEEE"/>
+                      </a:solidFill>
+                      <a:prstDash val="solid"/>
+                      <a:round/>
+                      <a:headEnd type="none" w="med" len="med"/>
+                      <a:tailEnd type="none" w="med" len="med"/>
+                    </a:lnR>
+                    <a:lnT w="2540" cap="flat" cmpd="sng" algn="ctr">
+                      <a:solidFill>
+                        <a:srgbClr val="EEEEEE"/>
+                      </a:solidFill>
+                      <a:prstDash val="solid"/>
+                      <a:round/>
+                      <a:headEnd type="none" w="med" len="med"/>
+                      <a:tailEnd type="none" w="med" len="med"/>
+                    </a:lnT>
+                    <a:lnB w="2540" cap="flat" cmpd="sng" algn="ctr">
+                      <a:solidFill>
+                        <a:srgbClr val="EEEEEE"/>
+                      </a:solidFill>
+                      <a:prstDash val="solid"/>
+                      <a:round/>
+                      <a:headEnd type="none" w="med" len="med"/>
+                      <a:tailEnd type="none" w="med" len="med"/>
+                    </a:lnB>
+                  </a:tcPr>
+                </a:tc>
+                <a:tc>
+                  <a:txBody>
+                    <a:bodyPr/>
+                    <a:lstStyle/>
+                    <a:p>
+                      <a:pPr algn="ctr" indent="0" marL="0">
+                        <a:buNone/>
+                      </a:pPr>
+                      <a:r>
+                        <a:rPr lang="en-US" sz="500" dirty="0">
+                          <a:solidFill>
+                            <a:srgbClr val="777777"/>
+                          </a:solidFill>
+                          <a:latin typeface="Calibri" pitchFamily="34" charset="0"/>
+                          <a:ea typeface="Calibri" pitchFamily="34" charset="-122"/>
+                          <a:cs typeface="Calibri" pitchFamily="34" charset="-120"/>
+                        </a:rPr>
+                        <a:t>0.43%</a:t>
+                      </a:r>
+                      <a:endParaRPr lang="en-US" sz="500" dirty="0">
+                        <a:latin typeface="Calibri" charset="0"/>
+                        <a:ea typeface="Calibri" charset="0"/>
+                        <a:cs typeface="Calibri" charset="0"/>
+                      </a:endParaRPr>
+                    </a:p>
+                  </a:txBody>
+                  <a:tcPr marL="91440" marR="91440" marT="45720" marB="45720">
+                    <a:lnL w="2540" cap="flat" cmpd="sng" algn="ctr">
+                      <a:solidFill>
+                        <a:srgbClr val="EEEEEE"/>
+                      </a:solidFill>
+                      <a:prstDash val="solid"/>
+                      <a:round/>
+                      <a:headEnd type="none" w="med" len="med"/>
+                      <a:tailEnd type="none" w="med" len="med"/>
+                    </a:lnL>
+                    <a:lnR w="2540" cap="flat" cmpd="sng" algn="ctr">
+                      <a:solidFill>
+                        <a:srgbClr val="EEEEEE"/>
+                      </a:solidFill>
+                      <a:prstDash val="solid"/>
+                      <a:round/>
+                      <a:headEnd type="none" w="med" len="med"/>
+                      <a:tailEnd type="none" w="med" len="med"/>
+                    </a:lnR>
+                    <a:lnT w="2540" cap="flat" cmpd="sng" algn="ctr">
+                      <a:solidFill>
+                        <a:srgbClr val="EEEEEE"/>
+                      </a:solidFill>
+                      <a:prstDash val="solid"/>
+                      <a:round/>
+                      <a:headEnd type="none" w="med" len="med"/>
+                      <a:tailEnd type="none" w="med" len="med"/>
+                    </a:lnT>
+                    <a:lnB w="2540" cap="flat" cmpd="sng" algn="ctr">
+                      <a:solidFill>
+                        <a:srgbClr val="EEEEEE"/>
+                      </a:solidFill>
+                      <a:prstDash val="solid"/>
+                      <a:round/>
+                      <a:headEnd type="none" w="med" len="med"/>
+                      <a:tailEnd type="none" w="med" len="med"/>
+                    </a:lnB>
+                  </a:tcPr>
+                </a:tc>
+                <a:tc>
+                  <a:txBody>
+                    <a:bodyPr/>
+                    <a:lstStyle/>
+                    <a:p>
+                      <a:pPr algn="ctr" indent="0" marL="0">
+                        <a:buNone/>
+                      </a:pPr>
+                      <a:r>
+                        <a:rPr lang="en-US" sz="500" b="1" dirty="0">
+                          <a:solidFill>
+                            <a:srgbClr val="777777"/>
+                          </a:solidFill>
+                          <a:latin typeface="Calibri" pitchFamily="34" charset="0"/>
+                          <a:ea typeface="Calibri" pitchFamily="34" charset="-122"/>
+                          <a:cs typeface="Calibri" pitchFamily="34" charset="-120"/>
+                        </a:rPr>
+                        <a:t>6.38%</a:t>
+                      </a:r>
+                      <a:endParaRPr lang="en-US" sz="500" dirty="0">
+                        <a:latin typeface="Calibri" charset="0"/>
+                        <a:ea typeface="Calibri" charset="0"/>
+                        <a:cs typeface="Calibri" charset="0"/>
+                      </a:endParaRPr>
+                    </a:p>
+                  </a:txBody>
+                  <a:tcPr marL="91440" marR="91440" marT="45720" marB="45720">
+                    <a:lnL w="2540" cap="flat" cmpd="sng" algn="ctr">
+                      <a:solidFill>
+                        <a:srgbClr val="EEEEEE"/>
+                      </a:solidFill>
+                      <a:prstDash val="solid"/>
+                      <a:round/>
+                      <a:headEnd type="none" w="med" len="med"/>
+                      <a:tailEnd type="none" w="med" len="med"/>
+                    </a:lnL>
+                    <a:lnR w="2540" cap="flat" cmpd="sng" algn="ctr">
+                      <a:solidFill>
+                        <a:srgbClr val="EEEEEE"/>
+                      </a:solidFill>
+                      <a:prstDash val="solid"/>
+                      <a:round/>
+                      <a:headEnd type="none" w="med" len="med"/>
+                      <a:tailEnd type="none" w="med" len="med"/>
+                    </a:lnR>
+                    <a:lnT w="2540" cap="flat" cmpd="sng" algn="ctr">
+                      <a:solidFill>
+                        <a:srgbClr val="EEEEEE"/>
+                      </a:solidFill>
+                      <a:prstDash val="solid"/>
+                      <a:round/>
+                      <a:headEnd type="none" w="med" len="med"/>
+                      <a:tailEnd type="none" w="med" len="med"/>
+                    </a:lnT>
+                    <a:lnB w="2540" cap="flat" cmpd="sng" algn="ctr">
+                      <a:solidFill>
+                        <a:srgbClr val="EEEEEE"/>
+                      </a:solidFill>
+                      <a:prstDash val="solid"/>
+                      <a:round/>
+                      <a:headEnd type="none" w="med" len="med"/>
+                      <a:tailEnd type="none" w="med" len="med"/>
+                    </a:lnB>
+                  </a:tcPr>
+                </a:tc>
+              </a:tr>
+              <a:tr h="123444">
+                <a:tc>
+                  <a:txBody>
+                    <a:bodyPr/>
+                    <a:lstStyle/>
+                    <a:p>
+                      <a:pPr algn="l" indent="0" marL="0">
+                        <a:buNone/>
+                      </a:pPr>
+                      <a:endParaRPr lang="en-US" sz="500" dirty="0">
+                        <a:latin typeface="Calibri" charset="0"/>
+                        <a:ea typeface="Calibri" charset="0"/>
+                        <a:cs typeface="Calibri" charset="0"/>
+                      </a:endParaRPr>
+                    </a:p>
+                  </a:txBody>
+                  <a:tcPr marL="91440" marR="91440" marT="45720" marB="45720">
+                    <a:lnL w="2540" cap="flat" cmpd="sng" algn="ctr">
+                      <a:solidFill>
+                        <a:srgbClr val="EEEEEE"/>
+                      </a:solidFill>
+                      <a:prstDash val="solid"/>
+                      <a:round/>
+                      <a:headEnd type="none" w="med" len="med"/>
+                      <a:tailEnd type="none" w="med" len="med"/>
+                    </a:lnL>
+                    <a:lnR w="2540" cap="flat" cmpd="sng" algn="ctr">
+                      <a:solidFill>
+                        <a:srgbClr val="EEEEEE"/>
+                      </a:solidFill>
+                      <a:prstDash val="solid"/>
+                      <a:round/>
+                      <a:headEnd type="none" w="med" len="med"/>
+                      <a:tailEnd type="none" w="med" len="med"/>
+                    </a:lnR>
+                    <a:lnT w="2540" cap="flat" cmpd="sng" algn="ctr">
+                      <a:solidFill>
+                        <a:srgbClr val="EEEEEE"/>
+                      </a:solidFill>
+                      <a:prstDash val="solid"/>
+                      <a:round/>
+                      <a:headEnd type="none" w="med" len="med"/>
+                      <a:tailEnd type="none" w="med" len="med"/>
+                    </a:lnT>
+                    <a:lnB w="2540" cap="flat" cmpd="sng" algn="ctr">
+                      <a:solidFill>
+                        <a:srgbClr val="EEEEEE"/>
+                      </a:solidFill>
+                      <a:prstDash val="solid"/>
+                      <a:round/>
+                      <a:headEnd type="none" w="med" len="med"/>
+                      <a:tailEnd type="none" w="med" len="med"/>
+                    </a:lnB>
+                  </a:tcPr>
+                </a:tc>
+                <a:tc>
+                  <a:txBody>
+                    <a:bodyPr/>
+                    <a:lstStyle/>
+                    <a:p>
+                      <a:pPr algn="l" indent="0" marL="0">
+                        <a:buNone/>
+                      </a:pPr>
+                      <a:r>
+                        <a:rPr lang="en-US" sz="500" dirty="0">
+                          <a:solidFill>
+                            <a:srgbClr val="999999"/>
+                          </a:solidFill>
+                          <a:latin typeface="Calibri" pitchFamily="34" charset="0"/>
+                          <a:ea typeface="Calibri" pitchFamily="34" charset="-122"/>
+                          <a:cs typeface="Calibri" pitchFamily="34" charset="-120"/>
+                        </a:rPr>
+                        <a:t>Competencia</a:t>
+                      </a:r>
+                      <a:endParaRPr lang="en-US" sz="500" dirty="0">
+                        <a:latin typeface="Calibri" charset="0"/>
+                        <a:ea typeface="Calibri" charset="0"/>
+                        <a:cs typeface="Calibri" charset="0"/>
+                      </a:endParaRPr>
+                    </a:p>
+                  </a:txBody>
+                  <a:tcPr marL="91440" marR="91440" marT="45720" marB="45720">
+                    <a:lnL w="2540" cap="flat" cmpd="sng" algn="ctr">
+                      <a:solidFill>
+                        <a:srgbClr val="EEEEEE"/>
+                      </a:solidFill>
+                      <a:prstDash val="solid"/>
+                      <a:round/>
+                      <a:headEnd type="none" w="med" len="med"/>
+                      <a:tailEnd type="none" w="med" len="med"/>
+                    </a:lnL>
+                    <a:lnR w="2540" cap="flat" cmpd="sng" algn="ctr">
+                      <a:solidFill>
+                        <a:srgbClr val="EEEEEE"/>
+                      </a:solidFill>
+                      <a:prstDash val="solid"/>
+                      <a:round/>
+                      <a:headEnd type="none" w="med" len="med"/>
+                      <a:tailEnd type="none" w="med" len="med"/>
+                    </a:lnR>
+                    <a:lnT w="2540" cap="flat" cmpd="sng" algn="ctr">
+                      <a:solidFill>
+                        <a:srgbClr val="EEEEEE"/>
+                      </a:solidFill>
+                      <a:prstDash val="solid"/>
+                      <a:round/>
+                      <a:headEnd type="none" w="med" len="med"/>
+                      <a:tailEnd type="none" w="med" len="med"/>
+                    </a:lnT>
+                    <a:lnB w="2540" cap="flat" cmpd="sng" algn="ctr">
+                      <a:solidFill>
+                        <a:srgbClr val="EEEEEE"/>
+                      </a:solidFill>
+                      <a:prstDash val="solid"/>
+                      <a:round/>
+                      <a:headEnd type="none" w="med" len="med"/>
+                      <a:tailEnd type="none" w="med" len="med"/>
+                    </a:lnB>
+                  </a:tcPr>
+                </a:tc>
+                <a:tc>
+                  <a:txBody>
+                    <a:bodyPr/>
+                    <a:lstStyle/>
+                    <a:p>
+                      <a:pPr algn="ctr" indent="0" marL="0">
+                        <a:buNone/>
+                      </a:pPr>
+                      <a:r>
+                        <a:rPr lang="en-US" sz="500" dirty="0">
+                          <a:solidFill>
+                            <a:srgbClr val="999999"/>
+                          </a:solidFill>
+                          <a:latin typeface="Calibri" pitchFamily="34" charset="0"/>
+                          <a:ea typeface="Calibri" pitchFamily="34" charset="-122"/>
+                          <a:cs typeface="Calibri" pitchFamily="34" charset="-120"/>
+                        </a:rPr>
+                        <a:t>0.00%</a:t>
+                      </a:r>
+                      <a:endParaRPr lang="en-US" sz="500" dirty="0">
+                        <a:latin typeface="Calibri" charset="0"/>
+                        <a:ea typeface="Calibri" charset="0"/>
+                        <a:cs typeface="Calibri" charset="0"/>
+                      </a:endParaRPr>
+                    </a:p>
+                  </a:txBody>
+                  <a:tcPr marL="91440" marR="91440" marT="45720" marB="45720">
+                    <a:lnL w="2540" cap="flat" cmpd="sng" algn="ctr">
+                      <a:solidFill>
+                        <a:srgbClr val="EEEEEE"/>
+                      </a:solidFill>
+                      <a:prstDash val="solid"/>
+                      <a:round/>
+                      <a:headEnd type="none" w="med" len="med"/>
+                      <a:tailEnd type="none" w="med" len="med"/>
+                    </a:lnL>
+                    <a:lnR w="2540" cap="flat" cmpd="sng" algn="ctr">
+                      <a:solidFill>
+                        <a:srgbClr val="EEEEEE"/>
+                      </a:solidFill>
+                      <a:prstDash val="solid"/>
+                      <a:round/>
+                      <a:headEnd type="none" w="med" len="med"/>
+                      <a:tailEnd type="none" w="med" len="med"/>
+                    </a:lnR>
+                    <a:lnT w="2540" cap="flat" cmpd="sng" algn="ctr">
+                      <a:solidFill>
+                        <a:srgbClr val="EEEEEE"/>
+                      </a:solidFill>
+                      <a:prstDash val="solid"/>
+                      <a:round/>
+                      <a:headEnd type="none" w="med" len="med"/>
+                      <a:tailEnd type="none" w="med" len="med"/>
+                    </a:lnT>
+                    <a:lnB w="2540" cap="flat" cmpd="sng" algn="ctr">
+                      <a:solidFill>
+                        <a:srgbClr val="EEEEEE"/>
+                      </a:solidFill>
+                      <a:prstDash val="solid"/>
+                      <a:round/>
+                      <a:headEnd type="none" w="med" len="med"/>
+                      <a:tailEnd type="none" w="med" len="med"/>
+                    </a:lnB>
+                  </a:tcPr>
+                </a:tc>
+                <a:tc>
+                  <a:txBody>
+                    <a:bodyPr/>
+                    <a:lstStyle/>
+                    <a:p>
+                      <a:pPr algn="ctr" indent="0" marL="0">
+                        <a:buNone/>
+                      </a:pPr>
+                      <a:r>
+                        <a:rPr lang="en-US" sz="500" dirty="0">
+                          <a:solidFill>
+                            <a:srgbClr val="999999"/>
+                          </a:solidFill>
+                          <a:latin typeface="Calibri" pitchFamily="34" charset="0"/>
+                          <a:ea typeface="Calibri" pitchFamily="34" charset="-122"/>
+                          <a:cs typeface="Calibri" pitchFamily="34" charset="-120"/>
+                        </a:rPr>
+                        <a:t>0.01%</a:t>
+                      </a:r>
+                      <a:endParaRPr lang="en-US" sz="500" dirty="0">
+                        <a:latin typeface="Calibri" charset="0"/>
+                        <a:ea typeface="Calibri" charset="0"/>
+                        <a:cs typeface="Calibri" charset="0"/>
+                      </a:endParaRPr>
+                    </a:p>
+                  </a:txBody>
+                  <a:tcPr marL="91440" marR="91440" marT="45720" marB="45720">
+                    <a:lnL w="2540" cap="flat" cmpd="sng" algn="ctr">
+                      <a:solidFill>
+                        <a:srgbClr val="EEEEEE"/>
+                      </a:solidFill>
+                      <a:prstDash val="solid"/>
+                      <a:round/>
+                      <a:headEnd type="none" w="med" len="med"/>
+                      <a:tailEnd type="none" w="med" len="med"/>
+                    </a:lnL>
+                    <a:lnR w="2540" cap="flat" cmpd="sng" algn="ctr">
+                      <a:solidFill>
+                        <a:srgbClr val="EEEEEE"/>
+                      </a:solidFill>
+                      <a:prstDash val="solid"/>
+                      <a:round/>
+                      <a:headEnd type="none" w="med" len="med"/>
+                      <a:tailEnd type="none" w="med" len="med"/>
+                    </a:lnR>
+                    <a:lnT w="2540" cap="flat" cmpd="sng" algn="ctr">
+                      <a:solidFill>
+                        <a:srgbClr val="EEEEEE"/>
+                      </a:solidFill>
+                      <a:prstDash val="solid"/>
+                      <a:round/>
+                      <a:headEnd type="none" w="med" len="med"/>
+                      <a:tailEnd type="none" w="med" len="med"/>
+                    </a:lnT>
+                    <a:lnB w="2540" cap="flat" cmpd="sng" algn="ctr">
+                      <a:solidFill>
+                        <a:srgbClr val="EEEEEE"/>
+                      </a:solidFill>
+                      <a:prstDash val="solid"/>
+                      <a:round/>
+                      <a:headEnd type="none" w="med" len="med"/>
+                      <a:tailEnd type="none" w="med" len="med"/>
+                    </a:lnB>
+                  </a:tcPr>
+                </a:tc>
+                <a:tc>
+                  <a:txBody>
+                    <a:bodyPr/>
+                    <a:lstStyle/>
+                    <a:p>
+                      <a:pPr algn="ctr" indent="0" marL="0">
+                        <a:buNone/>
+                      </a:pPr>
+                      <a:r>
+                        <a:rPr lang="en-US" sz="500" dirty="0">
+                          <a:solidFill>
+                            <a:srgbClr val="999999"/>
+                          </a:solidFill>
+                          <a:latin typeface="Calibri" pitchFamily="34" charset="0"/>
+                          <a:ea typeface="Calibri" pitchFamily="34" charset="-122"/>
+                          <a:cs typeface="Calibri" pitchFamily="34" charset="-120"/>
+                        </a:rPr>
+                        <a:t>0.00%</a:t>
+                      </a:r>
+                      <a:endParaRPr lang="en-US" sz="500" dirty="0">
+                        <a:latin typeface="Calibri" charset="0"/>
+                        <a:ea typeface="Calibri" charset="0"/>
+                        <a:cs typeface="Calibri" charset="0"/>
+                      </a:endParaRPr>
+                    </a:p>
+                  </a:txBody>
+                  <a:tcPr marL="91440" marR="91440" marT="45720" marB="45720">
+                    <a:lnL w="2540" cap="flat" cmpd="sng" algn="ctr">
+                      <a:solidFill>
+                        <a:srgbClr val="EEEEEE"/>
+                      </a:solidFill>
+                      <a:prstDash val="solid"/>
+                      <a:round/>
+                      <a:headEnd type="none" w="med" len="med"/>
+                      <a:tailEnd type="none" w="med" len="med"/>
+                    </a:lnL>
+                    <a:lnR w="2540" cap="flat" cmpd="sng" algn="ctr">
+                      <a:solidFill>
+                        <a:srgbClr val="EEEEEE"/>
+                      </a:solidFill>
+                      <a:prstDash val="solid"/>
+                      <a:round/>
+                      <a:headEnd type="none" w="med" len="med"/>
+                      <a:tailEnd type="none" w="med" len="med"/>
+                    </a:lnR>
+                    <a:lnT w="2540" cap="flat" cmpd="sng" algn="ctr">
+                      <a:solidFill>
+                        <a:srgbClr val="EEEEEE"/>
+                      </a:solidFill>
+                      <a:prstDash val="solid"/>
+                      <a:round/>
+                      <a:headEnd type="none" w="med" len="med"/>
+                      <a:tailEnd type="none" w="med" len="med"/>
+                    </a:lnT>
+                    <a:lnB w="2540" cap="flat" cmpd="sng" algn="ctr">
+                      <a:solidFill>
+                        <a:srgbClr val="EEEEEE"/>
+                      </a:solidFill>
+                      <a:prstDash val="solid"/>
+                      <a:round/>
+                      <a:headEnd type="none" w="med" len="med"/>
+                      <a:tailEnd type="none" w="med" len="med"/>
+                    </a:lnB>
+                  </a:tcPr>
+                </a:tc>
+                <a:tc>
+                  <a:txBody>
+                    <a:bodyPr/>
+                    <a:lstStyle/>
+                    <a:p>
+                      <a:pPr algn="ctr" indent="0" marL="0">
+                        <a:buNone/>
+                      </a:pPr>
+                      <a:r>
+                        <a:rPr lang="en-US" sz="500" dirty="0">
+                          <a:solidFill>
+                            <a:srgbClr val="999999"/>
+                          </a:solidFill>
+                          <a:latin typeface="Calibri" pitchFamily="34" charset="0"/>
+                          <a:ea typeface="Calibri" pitchFamily="34" charset="-122"/>
+                          <a:cs typeface="Calibri" pitchFamily="34" charset="-120"/>
+                        </a:rPr>
+                        <a:t>0.00%</a:t>
+                      </a:r>
+                      <a:endParaRPr lang="en-US" sz="500" dirty="0">
+                        <a:latin typeface="Calibri" charset="0"/>
+                        <a:ea typeface="Calibri" charset="0"/>
+                        <a:cs typeface="Calibri" charset="0"/>
+                      </a:endParaRPr>
+                    </a:p>
+                  </a:txBody>
+                  <a:tcPr marL="91440" marR="91440" marT="45720" marB="45720">
+                    <a:lnL w="2540" cap="flat" cmpd="sng" algn="ctr">
+                      <a:solidFill>
+                        <a:srgbClr val="EEEEEE"/>
+                      </a:solidFill>
+                      <a:prstDash val="solid"/>
+                      <a:round/>
+                      <a:headEnd type="none" w="med" len="med"/>
+                      <a:tailEnd type="none" w="med" len="med"/>
+                    </a:lnL>
+                    <a:lnR w="2540" cap="flat" cmpd="sng" algn="ctr">
+                      <a:solidFill>
+                        <a:srgbClr val="EEEEEE"/>
+                      </a:solidFill>
+                      <a:prstDash val="solid"/>
+                      <a:round/>
+                      <a:headEnd type="none" w="med" len="med"/>
+                      <a:tailEnd type="none" w="med" len="med"/>
+                    </a:lnR>
+                    <a:lnT w="2540" cap="flat" cmpd="sng" algn="ctr">
+                      <a:solidFill>
+                        <a:srgbClr val="EEEEEE"/>
+                      </a:solidFill>
+                      <a:prstDash val="solid"/>
+                      <a:round/>
+                      <a:headEnd type="none" w="med" len="med"/>
+                      <a:tailEnd type="none" w="med" len="med"/>
+                    </a:lnT>
+                    <a:lnB w="2540" cap="flat" cmpd="sng" algn="ctr">
+                      <a:solidFill>
+                        <a:srgbClr val="EEEEEE"/>
+                      </a:solidFill>
+                      <a:prstDash val="solid"/>
+                      <a:round/>
+                      <a:headEnd type="none" w="med" len="med"/>
+                      <a:tailEnd type="none" w="med" len="med"/>
+                    </a:lnB>
+                  </a:tcPr>
+                </a:tc>
+                <a:tc>
+                  <a:txBody>
+                    <a:bodyPr/>
+                    <a:lstStyle/>
+                    <a:p>
+                      <a:pPr algn="ctr" indent="0" marL="0">
+                        <a:buNone/>
+                      </a:pPr>
+                      <a:r>
+                        <a:rPr lang="en-US" sz="500" dirty="0">
+                          <a:solidFill>
+                            <a:srgbClr val="999999"/>
+                          </a:solidFill>
+                          <a:latin typeface="Calibri" pitchFamily="34" charset="0"/>
+                          <a:ea typeface="Calibri" pitchFamily="34" charset="-122"/>
+                          <a:cs typeface="Calibri" pitchFamily="34" charset="-120"/>
+                        </a:rPr>
+                        <a:t>0.00%</a:t>
+                      </a:r>
+                      <a:endParaRPr lang="en-US" sz="500" dirty="0">
+                        <a:latin typeface="Calibri" charset="0"/>
+                        <a:ea typeface="Calibri" charset="0"/>
+                        <a:cs typeface="Calibri" charset="0"/>
+                      </a:endParaRPr>
+                    </a:p>
+                  </a:txBody>
+                  <a:tcPr marL="91440" marR="91440" marT="45720" marB="45720">
+                    <a:lnL w="2540" cap="flat" cmpd="sng" algn="ctr">
+                      <a:solidFill>
+                        <a:srgbClr val="EEEEEE"/>
+                      </a:solidFill>
+                      <a:prstDash val="solid"/>
+                      <a:round/>
+                      <a:headEnd type="none" w="med" len="med"/>
+                      <a:tailEnd type="none" w="med" len="med"/>
+                    </a:lnL>
+                    <a:lnR w="2540" cap="flat" cmpd="sng" algn="ctr">
+                      <a:solidFill>
+                        <a:srgbClr val="EEEEEE"/>
+                      </a:solidFill>
+                      <a:prstDash val="solid"/>
+                      <a:round/>
+                      <a:headEnd type="none" w="med" len="med"/>
+                      <a:tailEnd type="none" w="med" len="med"/>
+                    </a:lnR>
+                    <a:lnT w="2540" cap="flat" cmpd="sng" algn="ctr">
+                      <a:solidFill>
+                        <a:srgbClr val="EEEEEE"/>
+                      </a:solidFill>
+                      <a:prstDash val="solid"/>
+                      <a:round/>
+                      <a:headEnd type="none" w="med" len="med"/>
+                      <a:tailEnd type="none" w="med" len="med"/>
+                    </a:lnT>
+                    <a:lnB w="2540" cap="flat" cmpd="sng" algn="ctr">
+                      <a:solidFill>
+                        <a:srgbClr val="EEEEEE"/>
+                      </a:solidFill>
+                      <a:prstDash val="solid"/>
+                      <a:round/>
+                      <a:headEnd type="none" w="med" len="med"/>
+                      <a:tailEnd type="none" w="med" len="med"/>
+                    </a:lnB>
+                  </a:tcPr>
+                </a:tc>
+                <a:tc>
+                  <a:txBody>
+                    <a:bodyPr/>
+                    <a:lstStyle/>
+                    <a:p>
+                      <a:pPr algn="ctr" indent="0" marL="0">
+                        <a:buNone/>
+                      </a:pPr>
+                      <a:r>
+                        <a:rPr lang="en-US" sz="500" dirty="0">
+                          <a:solidFill>
+                            <a:srgbClr val="999999"/>
+                          </a:solidFill>
+                          <a:latin typeface="Calibri" pitchFamily="34" charset="0"/>
+                          <a:ea typeface="Calibri" pitchFamily="34" charset="-122"/>
+                          <a:cs typeface="Calibri" pitchFamily="34" charset="-120"/>
+                        </a:rPr>
+                        <a:t>0.00%</a:t>
+                      </a:r>
+                      <a:endParaRPr lang="en-US" sz="500" dirty="0">
+                        <a:latin typeface="Calibri" charset="0"/>
+                        <a:ea typeface="Calibri" charset="0"/>
+                        <a:cs typeface="Calibri" charset="0"/>
+                      </a:endParaRPr>
+                    </a:p>
+                  </a:txBody>
+                  <a:tcPr marL="91440" marR="91440" marT="45720" marB="45720">
+                    <a:lnL w="2540" cap="flat" cmpd="sng" algn="ctr">
+                      <a:solidFill>
+                        <a:srgbClr val="EEEEEE"/>
+                      </a:solidFill>
+                      <a:prstDash val="solid"/>
+                      <a:round/>
+                      <a:headEnd type="none" w="med" len="med"/>
+                      <a:tailEnd type="none" w="med" len="med"/>
+                    </a:lnL>
+                    <a:lnR w="2540" cap="flat" cmpd="sng" algn="ctr">
+                      <a:solidFill>
+                        <a:srgbClr val="EEEEEE"/>
+                      </a:solidFill>
+                      <a:prstDash val="solid"/>
+                      <a:round/>
+                      <a:headEnd type="none" w="med" len="med"/>
+                      <a:tailEnd type="none" w="med" len="med"/>
+                    </a:lnR>
+                    <a:lnT w="2540" cap="flat" cmpd="sng" algn="ctr">
+                      <a:solidFill>
+                        <a:srgbClr val="EEEEEE"/>
+                      </a:solidFill>
+                      <a:prstDash val="solid"/>
+                      <a:round/>
+                      <a:headEnd type="none" w="med" len="med"/>
+                      <a:tailEnd type="none" w="med" len="med"/>
+                    </a:lnT>
+                    <a:lnB w="2540" cap="flat" cmpd="sng" algn="ctr">
+                      <a:solidFill>
+                        <a:srgbClr val="EEEEEE"/>
+                      </a:solidFill>
+                      <a:prstDash val="solid"/>
+                      <a:round/>
+                      <a:headEnd type="none" w="med" len="med"/>
+                      <a:tailEnd type="none" w="med" len="med"/>
+                    </a:lnB>
+                  </a:tcPr>
+                </a:tc>
+                <a:tc>
+                  <a:txBody>
+                    <a:bodyPr/>
+                    <a:lstStyle/>
+                    <a:p>
+                      <a:pPr algn="ctr" indent="0" marL="0">
+                        <a:buNone/>
+                      </a:pPr>
+                      <a:r>
+                        <a:rPr lang="en-US" sz="500" dirty="0">
+                          <a:solidFill>
+                            <a:srgbClr val="999999"/>
+                          </a:solidFill>
+                          <a:latin typeface="Calibri" pitchFamily="34" charset="0"/>
+                          <a:ea typeface="Calibri" pitchFamily="34" charset="-122"/>
+                          <a:cs typeface="Calibri" pitchFamily="34" charset="-120"/>
+                        </a:rPr>
+                        <a:t>0.00%</a:t>
+                      </a:r>
+                      <a:endParaRPr lang="en-US" sz="500" dirty="0">
+                        <a:latin typeface="Calibri" charset="0"/>
+                        <a:ea typeface="Calibri" charset="0"/>
+                        <a:cs typeface="Calibri" charset="0"/>
+                      </a:endParaRPr>
+                    </a:p>
+                  </a:txBody>
+                  <a:tcPr marL="91440" marR="91440" marT="45720" marB="45720">
+                    <a:lnL w="2540" cap="flat" cmpd="sng" algn="ctr">
+                      <a:solidFill>
+                        <a:srgbClr val="EEEEEE"/>
+                      </a:solidFill>
+                      <a:prstDash val="solid"/>
+                      <a:round/>
+                      <a:headEnd type="none" w="med" len="med"/>
+                      <a:tailEnd type="none" w="med" len="med"/>
+                    </a:lnL>
+                    <a:lnR w="2540" cap="flat" cmpd="sng" algn="ctr">
+                      <a:solidFill>
+                        <a:srgbClr val="EEEEEE"/>
+                      </a:solidFill>
+                      <a:prstDash val="solid"/>
+                      <a:round/>
+                      <a:headEnd type="none" w="med" len="med"/>
+                      <a:tailEnd type="none" w="med" len="med"/>
+                    </a:lnR>
+                    <a:lnT w="2540" cap="flat" cmpd="sng" algn="ctr">
+                      <a:solidFill>
+                        <a:srgbClr val="EEEEEE"/>
+                      </a:solidFill>
+                      <a:prstDash val="solid"/>
+                      <a:round/>
+                      <a:headEnd type="none" w="med" len="med"/>
+                      <a:tailEnd type="none" w="med" len="med"/>
+                    </a:lnT>
+                    <a:lnB w="2540" cap="flat" cmpd="sng" algn="ctr">
+                      <a:solidFill>
+                        <a:srgbClr val="EEEEEE"/>
+                      </a:solidFill>
+                      <a:prstDash val="solid"/>
+                      <a:round/>
+                      <a:headEnd type="none" w="med" len="med"/>
+                      <a:tailEnd type="none" w="med" len="med"/>
+                    </a:lnB>
+                  </a:tcPr>
+                </a:tc>
+                <a:tc>
+                  <a:txBody>
+                    <a:bodyPr/>
+                    <a:lstStyle/>
+                    <a:p>
+                      <a:pPr algn="ctr" indent="0" marL="0">
+                        <a:buNone/>
+                      </a:pPr>
+                      <a:r>
+                        <a:rPr lang="en-US" sz="500" dirty="0">
+                          <a:solidFill>
+                            <a:srgbClr val="999999"/>
+                          </a:solidFill>
+                          <a:latin typeface="Calibri" pitchFamily="34" charset="0"/>
+                          <a:ea typeface="Calibri" pitchFamily="34" charset="-122"/>
+                          <a:cs typeface="Calibri" pitchFamily="34" charset="-120"/>
+                        </a:rPr>
+                        <a:t>0.00%</a:t>
+                      </a:r>
+                      <a:endParaRPr lang="en-US" sz="500" dirty="0">
+                        <a:latin typeface="Calibri" charset="0"/>
+                        <a:ea typeface="Calibri" charset="0"/>
+                        <a:cs typeface="Calibri" charset="0"/>
+                      </a:endParaRPr>
+                    </a:p>
+                  </a:txBody>
+                  <a:tcPr marL="91440" marR="91440" marT="45720" marB="45720">
+                    <a:lnL w="2540" cap="flat" cmpd="sng" algn="ctr">
+                      <a:solidFill>
+                        <a:srgbClr val="EEEEEE"/>
+                      </a:solidFill>
+                      <a:prstDash val="solid"/>
+                      <a:round/>
+                      <a:headEnd type="none" w="med" len="med"/>
+                      <a:tailEnd type="none" w="med" len="med"/>
+                    </a:lnL>
+                    <a:lnR w="2540" cap="flat" cmpd="sng" algn="ctr">
+                      <a:solidFill>
+                        <a:srgbClr val="EEEEEE"/>
+                      </a:solidFill>
+                      <a:prstDash val="solid"/>
+                      <a:round/>
+                      <a:headEnd type="none" w="med" len="med"/>
+                      <a:tailEnd type="none" w="med" len="med"/>
+                    </a:lnR>
+                    <a:lnT w="2540" cap="flat" cmpd="sng" algn="ctr">
+                      <a:solidFill>
+                        <a:srgbClr val="EEEEEE"/>
+                      </a:solidFill>
+                      <a:prstDash val="solid"/>
+                      <a:round/>
+                      <a:headEnd type="none" w="med" len="med"/>
+                      <a:tailEnd type="none" w="med" len="med"/>
+                    </a:lnT>
+                    <a:lnB w="2540" cap="flat" cmpd="sng" algn="ctr">
+                      <a:solidFill>
+                        <a:srgbClr val="EEEEEE"/>
+                      </a:solidFill>
+                      <a:prstDash val="solid"/>
+                      <a:round/>
+                      <a:headEnd type="none" w="med" len="med"/>
+                      <a:tailEnd type="none" w="med" len="med"/>
+                    </a:lnB>
+                  </a:tcPr>
+                </a:tc>
+                <a:tc>
+                  <a:txBody>
+                    <a:bodyPr/>
+                    <a:lstStyle/>
+                    <a:p>
+                      <a:pPr algn="ctr" indent="0" marL="0">
+                        <a:buNone/>
+                      </a:pPr>
+                      <a:r>
+                        <a:rPr lang="en-US" sz="500" dirty="0">
+                          <a:solidFill>
+                            <a:srgbClr val="999999"/>
+                          </a:solidFill>
+                          <a:latin typeface="Calibri" pitchFamily="34" charset="0"/>
+                          <a:ea typeface="Calibri" pitchFamily="34" charset="-122"/>
+                          <a:cs typeface="Calibri" pitchFamily="34" charset="-120"/>
+                        </a:rPr>
+                        <a:t>0.00%</a:t>
+                      </a:r>
+                      <a:endParaRPr lang="en-US" sz="500" dirty="0">
+                        <a:latin typeface="Calibri" charset="0"/>
+                        <a:ea typeface="Calibri" charset="0"/>
+                        <a:cs typeface="Calibri" charset="0"/>
+                      </a:endParaRPr>
+                    </a:p>
+                  </a:txBody>
+                  <a:tcPr marL="91440" marR="91440" marT="45720" marB="45720">
+                    <a:lnL w="2540" cap="flat" cmpd="sng" algn="ctr">
+                      <a:solidFill>
+                        <a:srgbClr val="EEEEEE"/>
+                      </a:solidFill>
+                      <a:prstDash val="solid"/>
+                      <a:round/>
+                      <a:headEnd type="none" w="med" len="med"/>
+                      <a:tailEnd type="none" w="med" len="med"/>
+                    </a:lnL>
+                    <a:lnR w="2540" cap="flat" cmpd="sng" algn="ctr">
+                      <a:solidFill>
+                        <a:srgbClr val="EEEEEE"/>
+                      </a:solidFill>
+                      <a:prstDash val="solid"/>
+                      <a:round/>
+                      <a:headEnd type="none" w="med" len="med"/>
+                      <a:tailEnd type="none" w="med" len="med"/>
+                    </a:lnR>
+                    <a:lnT w="2540" cap="flat" cmpd="sng" algn="ctr">
+                      <a:solidFill>
+                        <a:srgbClr val="EEEEEE"/>
+                      </a:solidFill>
+                      <a:prstDash val="solid"/>
+                      <a:round/>
+                      <a:headEnd type="none" w="med" len="med"/>
+                      <a:tailEnd type="none" w="med" len="med"/>
+                    </a:lnT>
+                    <a:lnB w="2540" cap="flat" cmpd="sng" algn="ctr">
+                      <a:solidFill>
+                        <a:srgbClr val="EEEEEE"/>
+                      </a:solidFill>
+                      <a:prstDash val="solid"/>
+                      <a:round/>
+                      <a:headEnd type="none" w="med" len="med"/>
+                      <a:tailEnd type="none" w="med" len="med"/>
+                    </a:lnB>
+                  </a:tcPr>
+                </a:tc>
+                <a:tc>
+                  <a:txBody>
+                    <a:bodyPr/>
+                    <a:lstStyle/>
+                    <a:p>
+                      <a:pPr algn="ctr" indent="0" marL="0">
+                        <a:buNone/>
+                      </a:pPr>
+                      <a:r>
+                        <a:rPr lang="en-US" sz="500" dirty="0">
+                          <a:solidFill>
+                            <a:srgbClr val="999999"/>
+                          </a:solidFill>
+                          <a:latin typeface="Calibri" pitchFamily="34" charset="0"/>
+                          <a:ea typeface="Calibri" pitchFamily="34" charset="-122"/>
+                          <a:cs typeface="Calibri" pitchFamily="34" charset="-120"/>
+                        </a:rPr>
+                        <a:t>0.00%</a:t>
+                      </a:r>
+                      <a:endParaRPr lang="en-US" sz="500" dirty="0">
+                        <a:latin typeface="Calibri" charset="0"/>
+                        <a:ea typeface="Calibri" charset="0"/>
+                        <a:cs typeface="Calibri" charset="0"/>
+                      </a:endParaRPr>
+                    </a:p>
+                  </a:txBody>
+                  <a:tcPr marL="91440" marR="91440" marT="45720" marB="45720">
+                    <a:lnL w="2540" cap="flat" cmpd="sng" algn="ctr">
+                      <a:solidFill>
+                        <a:srgbClr val="EEEEEE"/>
+                      </a:solidFill>
+                      <a:prstDash val="solid"/>
+                      <a:round/>
+                      <a:headEnd type="none" w="med" len="med"/>
+                      <a:tailEnd type="none" w="med" len="med"/>
+                    </a:lnL>
+                    <a:lnR w="2540" cap="flat" cmpd="sng" algn="ctr">
+                      <a:solidFill>
+                        <a:srgbClr val="EEEEEE"/>
+                      </a:solidFill>
+                      <a:prstDash val="solid"/>
+                      <a:round/>
+                      <a:headEnd type="none" w="med" len="med"/>
+                      <a:tailEnd type="none" w="med" len="med"/>
+                    </a:lnR>
+                    <a:lnT w="2540" cap="flat" cmpd="sng" algn="ctr">
+                      <a:solidFill>
+                        <a:srgbClr val="EEEEEE"/>
+                      </a:solidFill>
+                      <a:prstDash val="solid"/>
+                      <a:round/>
+                      <a:headEnd type="none" w="med" len="med"/>
+                      <a:tailEnd type="none" w="med" len="med"/>
+                    </a:lnT>
+                    <a:lnB w="2540" cap="flat" cmpd="sng" algn="ctr">
+                      <a:solidFill>
+                        <a:srgbClr val="EEEEEE"/>
+                      </a:solidFill>
+                      <a:prstDash val="solid"/>
+                      <a:round/>
+                      <a:headEnd type="none" w="med" len="med"/>
+                      <a:tailEnd type="none" w="med" len="med"/>
+                    </a:lnB>
+                  </a:tcPr>
+                </a:tc>
+                <a:tc>
+                  <a:txBody>
+                    <a:bodyPr/>
+                    <a:lstStyle/>
+                    <a:p>
+                      <a:pPr algn="ctr" indent="0" marL="0">
+                        <a:buNone/>
+                      </a:pPr>
+                      <a:r>
+                        <a:rPr lang="en-US" sz="500" dirty="0">
+                          <a:solidFill>
+                            <a:srgbClr val="999999"/>
+                          </a:solidFill>
+                          <a:latin typeface="Calibri" pitchFamily="34" charset="0"/>
+                          <a:ea typeface="Calibri" pitchFamily="34" charset="-122"/>
+                          <a:cs typeface="Calibri" pitchFamily="34" charset="-120"/>
+                        </a:rPr>
+                        <a:t>0.00%</a:t>
+                      </a:r>
+                      <a:endParaRPr lang="en-US" sz="500" dirty="0">
+                        <a:latin typeface="Calibri" charset="0"/>
+                        <a:ea typeface="Calibri" charset="0"/>
+                        <a:cs typeface="Calibri" charset="0"/>
+                      </a:endParaRPr>
+                    </a:p>
+                  </a:txBody>
+                  <a:tcPr marL="91440" marR="91440" marT="45720" marB="45720">
+                    <a:lnL w="2540" cap="flat" cmpd="sng" algn="ctr">
+                      <a:solidFill>
+                        <a:srgbClr val="EEEEEE"/>
+                      </a:solidFill>
+                      <a:prstDash val="solid"/>
+                      <a:round/>
+                      <a:headEnd type="none" w="med" len="med"/>
+                      <a:tailEnd type="none" w="med" len="med"/>
+                    </a:lnL>
+                    <a:lnR w="2540" cap="flat" cmpd="sng" algn="ctr">
+                      <a:solidFill>
+                        <a:srgbClr val="EEEEEE"/>
+                      </a:solidFill>
+                      <a:prstDash val="solid"/>
+                      <a:round/>
+                      <a:headEnd type="none" w="med" len="med"/>
+                      <a:tailEnd type="none" w="med" len="med"/>
+                    </a:lnR>
+                    <a:lnT w="2540" cap="flat" cmpd="sng" algn="ctr">
+                      <a:solidFill>
+                        <a:srgbClr val="EEEEEE"/>
+                      </a:solidFill>
+                      <a:prstDash val="solid"/>
+                      <a:round/>
+                      <a:headEnd type="none" w="med" len="med"/>
+                      <a:tailEnd type="none" w="med" len="med"/>
+                    </a:lnT>
+                    <a:lnB w="2540" cap="flat" cmpd="sng" algn="ctr">
+                      <a:solidFill>
+                        <a:srgbClr val="EEEEEE"/>
+                      </a:solidFill>
+                      <a:prstDash val="solid"/>
+                      <a:round/>
+                      <a:headEnd type="none" w="med" len="med"/>
+                      <a:tailEnd type="none" w="med" len="med"/>
+                    </a:lnB>
+                  </a:tcPr>
+                </a:tc>
+                <a:tc>
+                  <a:txBody>
+                    <a:bodyPr/>
+                    <a:lstStyle/>
+                    <a:p>
+                      <a:pPr algn="ctr" indent="0" marL="0">
+                        <a:buNone/>
+                      </a:pPr>
+                      <a:r>
+                        <a:rPr lang="en-US" sz="500" dirty="0">
+                          <a:solidFill>
+                            <a:srgbClr val="999999"/>
+                          </a:solidFill>
+                          <a:latin typeface="Calibri" pitchFamily="34" charset="0"/>
+                          <a:ea typeface="Calibri" pitchFamily="34" charset="-122"/>
+                          <a:cs typeface="Calibri" pitchFamily="34" charset="-120"/>
+                        </a:rPr>
+                        <a:t>-2.99%</a:t>
+                      </a:r>
+                      <a:endParaRPr lang="en-US" sz="500" dirty="0">
+                        <a:latin typeface="Calibri" charset="0"/>
+                        <a:ea typeface="Calibri" charset="0"/>
+                        <a:cs typeface="Calibri" charset="0"/>
+                      </a:endParaRPr>
+                    </a:p>
+                  </a:txBody>
+                  <a:tcPr marL="91440" marR="91440" marT="45720" marB="45720">
+                    <a:lnL w="2540" cap="flat" cmpd="sng" algn="ctr">
+                      <a:solidFill>
+                        <a:srgbClr val="EEEEEE"/>
+                      </a:solidFill>
+                      <a:prstDash val="solid"/>
+                      <a:round/>
+                      <a:headEnd type="none" w="med" len="med"/>
+                      <a:tailEnd type="none" w="med" len="med"/>
+                    </a:lnL>
+                    <a:lnR w="2540" cap="flat" cmpd="sng" algn="ctr">
+                      <a:solidFill>
+                        <a:srgbClr val="EEEEEE"/>
+                      </a:solidFill>
+                      <a:prstDash val="solid"/>
+                      <a:round/>
+                      <a:headEnd type="none" w="med" len="med"/>
+                      <a:tailEnd type="none" w="med" len="med"/>
+                    </a:lnR>
+                    <a:lnT w="2540" cap="flat" cmpd="sng" algn="ctr">
+                      <a:solidFill>
+                        <a:srgbClr val="EEEEEE"/>
+                      </a:solidFill>
+                      <a:prstDash val="solid"/>
+                      <a:round/>
+                      <a:headEnd type="none" w="med" len="med"/>
+                      <a:tailEnd type="none" w="med" len="med"/>
+                    </a:lnT>
+                    <a:lnB w="2540" cap="flat" cmpd="sng" algn="ctr">
+                      <a:solidFill>
+                        <a:srgbClr val="EEEEEE"/>
+                      </a:solidFill>
+                      <a:prstDash val="solid"/>
+                      <a:round/>
+                      <a:headEnd type="none" w="med" len="med"/>
+                      <a:tailEnd type="none" w="med" len="med"/>
+                    </a:lnB>
+                  </a:tcPr>
+                </a:tc>
+                <a:tc>
+                  <a:txBody>
+                    <a:bodyPr/>
+                    <a:lstStyle/>
+                    <a:p>
+                      <a:pPr algn="ctr" indent="0" marL="0">
+                        <a:buNone/>
+                      </a:pPr>
+                      <a:r>
+                        <a:rPr lang="en-US" sz="500" b="1" dirty="0">
+                          <a:solidFill>
+                            <a:srgbClr val="999999"/>
+                          </a:solidFill>
+                          <a:latin typeface="Calibri" pitchFamily="34" charset="0"/>
+                          <a:ea typeface="Calibri" pitchFamily="34" charset="-122"/>
+                          <a:cs typeface="Calibri" pitchFamily="34" charset="-120"/>
+                        </a:rPr>
+                        <a:t>-2.95%</a:t>
+                      </a:r>
+                      <a:endParaRPr lang="en-US" sz="500" dirty="0">
+                        <a:latin typeface="Calibri" charset="0"/>
+                        <a:ea typeface="Calibri" charset="0"/>
+                        <a:cs typeface="Calibri" charset="0"/>
+                      </a:endParaRPr>
+                    </a:p>
+                  </a:txBody>
+                  <a:tcPr marL="91440" marR="91440" marT="45720" marB="45720">
+                    <a:lnL w="2540" cap="flat" cmpd="sng" algn="ctr">
+                      <a:solidFill>
+                        <a:srgbClr val="EEEEEE"/>
+                      </a:solidFill>
+                      <a:prstDash val="solid"/>
+                      <a:round/>
+                      <a:headEnd type="none" w="med" len="med"/>
+                      <a:tailEnd type="none" w="med" len="med"/>
+                    </a:lnL>
+                    <a:lnR w="2540" cap="flat" cmpd="sng" algn="ctr">
+                      <a:solidFill>
+                        <a:srgbClr val="EEEEEE"/>
+                      </a:solidFill>
+                      <a:prstDash val="solid"/>
+                      <a:round/>
+                      <a:headEnd type="none" w="med" len="med"/>
+                      <a:tailEnd type="none" w="med" len="med"/>
+                    </a:lnR>
+                    <a:lnT w="2540" cap="flat" cmpd="sng" algn="ctr">
+                      <a:solidFill>
+                        <a:srgbClr val="EEEEEE"/>
+                      </a:solidFill>
+                      <a:prstDash val="solid"/>
+                      <a:round/>
+                      <a:headEnd type="none" w="med" len="med"/>
+                      <a:tailEnd type="none" w="med" len="med"/>
+                    </a:lnT>
+                    <a:lnB w="2540" cap="flat" cmpd="sng" algn="ctr">
+                      <a:solidFill>
+                        <a:srgbClr val="EEEEEE"/>
+                      </a:solidFill>
+                      <a:prstDash val="solid"/>
+                      <a:round/>
+                      <a:headEnd type="none" w="med" len="med"/>
+                      <a:tailEnd type="none" w="med" len="med"/>
+                    </a:lnB>
+                  </a:tcPr>
+                </a:tc>
+              </a:tr>
+              <a:tr h="123444">
+                <a:tc>
+                  <a:txBody>
+                    <a:bodyPr/>
+                    <a:lstStyle/>
+                    <a:p>
+                      <a:pPr algn="l" indent="0" marL="0">
+                        <a:buNone/>
+                      </a:pPr>
+                      <a:endParaRPr lang="en-US" sz="500" dirty="0">
+                        <a:latin typeface="Calibri" charset="0"/>
+                        <a:ea typeface="Calibri" charset="0"/>
+                        <a:cs typeface="Calibri" charset="0"/>
+                      </a:endParaRPr>
+                    </a:p>
+                  </a:txBody>
+                  <a:tcPr marL="91440" marR="91440" marT="45720" marB="45720">
+                    <a:lnL w="2540" cap="flat" cmpd="sng" algn="ctr">
+                      <a:solidFill>
+                        <a:srgbClr val="EEEEEE"/>
+                      </a:solidFill>
+                      <a:prstDash val="solid"/>
+                      <a:round/>
+                      <a:headEnd type="none" w="med" len="med"/>
+                      <a:tailEnd type="none" w="med" len="med"/>
+                    </a:lnL>
+                    <a:lnR w="2540" cap="flat" cmpd="sng" algn="ctr">
+                      <a:solidFill>
+                        <a:srgbClr val="EEEEEE"/>
+                      </a:solidFill>
+                      <a:prstDash val="solid"/>
+                      <a:round/>
+                      <a:headEnd type="none" w="med" len="med"/>
+                      <a:tailEnd type="none" w="med" len="med"/>
+                    </a:lnR>
+                    <a:lnT w="2540" cap="flat" cmpd="sng" algn="ctr">
+                      <a:solidFill>
+                        <a:srgbClr val="EEEEEE"/>
+                      </a:solidFill>
+                      <a:prstDash val="solid"/>
+                      <a:round/>
+                      <a:headEnd type="none" w="med" len="med"/>
+                      <a:tailEnd type="none" w="med" len="med"/>
+                    </a:lnT>
+                    <a:lnB w="2540" cap="flat" cmpd="sng" algn="ctr">
+                      <a:solidFill>
+                        <a:srgbClr val="EEEEEE"/>
+                      </a:solidFill>
+                      <a:prstDash val="solid"/>
+                      <a:round/>
+                      <a:headEnd type="none" w="med" len="med"/>
+                      <a:tailEnd type="none" w="med" len="med"/>
+                    </a:lnB>
+                  </a:tcPr>
+                </a:tc>
+                <a:tc>
+                  <a:txBody>
+                    <a:bodyPr/>
+                    <a:lstStyle/>
+                    <a:p>
+                      <a:pPr algn="l" indent="0" marL="0">
+                        <a:buNone/>
+                      </a:pPr>
+                      <a:r>
+                        <a:rPr lang="en-US" sz="500" dirty="0">
+                          <a:solidFill>
+                            <a:srgbClr val="000000"/>
+                          </a:solidFill>
+                          <a:latin typeface="Calibri" pitchFamily="34" charset="0"/>
+                          <a:ea typeface="Calibri" pitchFamily="34" charset="-122"/>
+                          <a:cs typeface="Calibri" pitchFamily="34" charset="-120"/>
+                        </a:rPr>
+                        <a:t>FIP LIQUIDEZ Permanente</a:t>
+                      </a:r>
+                      <a:endParaRPr lang="en-US" sz="500" dirty="0">
+                        <a:latin typeface="Calibri" charset="0"/>
+                        <a:ea typeface="Calibri" charset="0"/>
+                        <a:cs typeface="Calibri" charset="0"/>
+                      </a:endParaRPr>
+                    </a:p>
+                  </a:txBody>
+                  <a:tcPr marL="91440" marR="91440" marT="45720" marB="45720">
+                    <a:lnL w="2540" cap="flat" cmpd="sng" algn="ctr">
+                      <a:solidFill>
+                        <a:srgbClr val="EEEEEE"/>
+                      </a:solidFill>
+                      <a:prstDash val="solid"/>
+                      <a:round/>
+                      <a:headEnd type="none" w="med" len="med"/>
+                      <a:tailEnd type="none" w="med" len="med"/>
+                    </a:lnL>
+                    <a:lnR w="2540" cap="flat" cmpd="sng" algn="ctr">
+                      <a:solidFill>
+                        <a:srgbClr val="EEEEEE"/>
+                      </a:solidFill>
+                      <a:prstDash val="solid"/>
+                      <a:round/>
+                      <a:headEnd type="none" w="med" len="med"/>
+                      <a:tailEnd type="none" w="med" len="med"/>
+                    </a:lnR>
+                    <a:lnT w="2540" cap="flat" cmpd="sng" algn="ctr">
+                      <a:solidFill>
+                        <a:srgbClr val="EEEEEE"/>
+                      </a:solidFill>
+                      <a:prstDash val="solid"/>
+                      <a:round/>
+                      <a:headEnd type="none" w="med" len="med"/>
+                      <a:tailEnd type="none" w="med" len="med"/>
+                    </a:lnT>
+                    <a:lnB w="2540" cap="flat" cmpd="sng" algn="ctr">
+                      <a:solidFill>
+                        <a:srgbClr val="EEEEEE"/>
+                      </a:solidFill>
+                      <a:prstDash val="solid"/>
+                      <a:round/>
+                      <a:headEnd type="none" w="med" len="med"/>
+                      <a:tailEnd type="none" w="med" len="med"/>
+                    </a:lnB>
+                  </a:tcPr>
+                </a:tc>
+                <a:tc>
+                  <a:txBody>
+                    <a:bodyPr/>
+                    <a:lstStyle/>
+                    <a:p>
+                      <a:pPr algn="ctr" indent="0" marL="0">
+                        <a:buNone/>
+                      </a:pPr>
+                      <a:r>
+                        <a:rPr lang="en-US" sz="500" dirty="0">
+                          <a:solidFill>
+                            <a:srgbClr val="000000"/>
+                          </a:solidFill>
+                          <a:latin typeface="Calibri" pitchFamily="34" charset="0"/>
+                          <a:ea typeface="Calibri" pitchFamily="34" charset="-122"/>
+                          <a:cs typeface="Calibri" pitchFamily="34" charset="-120"/>
+                        </a:rPr>
+                        <a:t>0.01%</a:t>
+                      </a:r>
+                      <a:endParaRPr lang="en-US" sz="500" dirty="0">
+                        <a:latin typeface="Calibri" charset="0"/>
+                        <a:ea typeface="Calibri" charset="0"/>
+                        <a:cs typeface="Calibri" charset="0"/>
+                      </a:endParaRPr>
+                    </a:p>
+                  </a:txBody>
+                  <a:tcPr marL="91440" marR="91440" marT="45720" marB="45720">
+                    <a:lnL w="2540" cap="flat" cmpd="sng" algn="ctr">
+                      <a:solidFill>
+                        <a:srgbClr val="EEEEEE"/>
+                      </a:solidFill>
+                      <a:prstDash val="solid"/>
+                      <a:round/>
+                      <a:headEnd type="none" w="med" len="med"/>
+                      <a:tailEnd type="none" w="med" len="med"/>
+                    </a:lnL>
+                    <a:lnR w="2540" cap="flat" cmpd="sng" algn="ctr">
+                      <a:solidFill>
+                        <a:srgbClr val="EEEEEE"/>
+                      </a:solidFill>
+                      <a:prstDash val="solid"/>
+                      <a:round/>
+                      <a:headEnd type="none" w="med" len="med"/>
+                      <a:tailEnd type="none" w="med" len="med"/>
+                    </a:lnR>
+                    <a:lnT w="2540" cap="flat" cmpd="sng" algn="ctr">
+                      <a:solidFill>
+                        <a:srgbClr val="EEEEEE"/>
+                      </a:solidFill>
+                      <a:prstDash val="solid"/>
+                      <a:round/>
+                      <a:headEnd type="none" w="med" len="med"/>
+                      <a:tailEnd type="none" w="med" len="med"/>
+                    </a:lnT>
+                    <a:lnB w="2540" cap="flat" cmpd="sng" algn="ctr">
+                      <a:solidFill>
+                        <a:srgbClr val="EEEEEE"/>
+                      </a:solidFill>
+                      <a:prstDash val="solid"/>
+                      <a:round/>
+                      <a:headEnd type="none" w="med" len="med"/>
+                      <a:tailEnd type="none" w="med" len="med"/>
+                    </a:lnB>
+                  </a:tcPr>
+                </a:tc>
+                <a:tc>
+                  <a:txBody>
+                    <a:bodyPr/>
+                    <a:lstStyle/>
+                    <a:p>
+                      <a:pPr algn="ctr" indent="0" marL="0">
+                        <a:buNone/>
+                      </a:pPr>
+                      <a:r>
+                        <a:rPr lang="en-US" sz="500" dirty="0">
+                          <a:solidFill>
+                            <a:srgbClr val="000000"/>
+                          </a:solidFill>
+                          <a:latin typeface="Calibri" pitchFamily="34" charset="0"/>
+                          <a:ea typeface="Calibri" pitchFamily="34" charset="-122"/>
+                          <a:cs typeface="Calibri" pitchFamily="34" charset="-120"/>
+                        </a:rPr>
+                        <a:t>0.01%</a:t>
+                      </a:r>
+                      <a:endParaRPr lang="en-US" sz="500" dirty="0">
+                        <a:latin typeface="Calibri" charset="0"/>
+                        <a:ea typeface="Calibri" charset="0"/>
+                        <a:cs typeface="Calibri" charset="0"/>
+                      </a:endParaRPr>
+                    </a:p>
+                  </a:txBody>
+                  <a:tcPr marL="91440" marR="91440" marT="45720" marB="45720">
+                    <a:lnL w="2540" cap="flat" cmpd="sng" algn="ctr">
+                      <a:solidFill>
+                        <a:srgbClr val="EEEEEE"/>
+                      </a:solidFill>
+                      <a:prstDash val="solid"/>
+                      <a:round/>
+                      <a:headEnd type="none" w="med" len="med"/>
+                      <a:tailEnd type="none" w="med" len="med"/>
+                    </a:lnL>
+                    <a:lnR w="2540" cap="flat" cmpd="sng" algn="ctr">
+                      <a:solidFill>
+                        <a:srgbClr val="EEEEEE"/>
+                      </a:solidFill>
+                      <a:prstDash val="solid"/>
+                      <a:round/>
+                      <a:headEnd type="none" w="med" len="med"/>
+                      <a:tailEnd type="none" w="med" len="med"/>
+                    </a:lnR>
+                    <a:lnT w="2540" cap="flat" cmpd="sng" algn="ctr">
+                      <a:solidFill>
+                        <a:srgbClr val="EEEEEE"/>
+                      </a:solidFill>
+                      <a:prstDash val="solid"/>
+                      <a:round/>
+                      <a:headEnd type="none" w="med" len="med"/>
+                      <a:tailEnd type="none" w="med" len="med"/>
+                    </a:lnT>
+                    <a:lnB w="2540" cap="flat" cmpd="sng" algn="ctr">
+                      <a:solidFill>
+                        <a:srgbClr val="EEEEEE"/>
+                      </a:solidFill>
+                      <a:prstDash val="solid"/>
+                      <a:round/>
+                      <a:headEnd type="none" w="med" len="med"/>
+                      <a:tailEnd type="none" w="med" len="med"/>
+                    </a:lnB>
+                  </a:tcPr>
+                </a:tc>
+                <a:tc>
+                  <a:txBody>
+                    <a:bodyPr/>
+                    <a:lstStyle/>
+                    <a:p>
+                      <a:pPr algn="ctr" indent="0" marL="0">
+                        <a:buNone/>
+                      </a:pPr>
+                      <a:r>
+                        <a:rPr lang="en-US" sz="500" dirty="0">
+                          <a:solidFill>
+                            <a:srgbClr val="000000"/>
+                          </a:solidFill>
+                          <a:latin typeface="Calibri" pitchFamily="34" charset="0"/>
+                          <a:ea typeface="Calibri" pitchFamily="34" charset="-122"/>
+                          <a:cs typeface="Calibri" pitchFamily="34" charset="-120"/>
+                        </a:rPr>
+                        <a:t>0.01%</a:t>
+                      </a:r>
+                      <a:endParaRPr lang="en-US" sz="500" dirty="0">
+                        <a:latin typeface="Calibri" charset="0"/>
+                        <a:ea typeface="Calibri" charset="0"/>
+                        <a:cs typeface="Calibri" charset="0"/>
+                      </a:endParaRPr>
+                    </a:p>
+                  </a:txBody>
+                  <a:tcPr marL="91440" marR="91440" marT="45720" marB="45720">
+                    <a:lnL w="2540" cap="flat" cmpd="sng" algn="ctr">
+                      <a:solidFill>
+                        <a:srgbClr val="EEEEEE"/>
+                      </a:solidFill>
+                      <a:prstDash val="solid"/>
+                      <a:round/>
+                      <a:headEnd type="none" w="med" len="med"/>
+                      <a:tailEnd type="none" w="med" len="med"/>
+                    </a:lnL>
+                    <a:lnR w="2540" cap="flat" cmpd="sng" algn="ctr">
+                      <a:solidFill>
+                        <a:srgbClr val="EEEEEE"/>
+                      </a:solidFill>
+                      <a:prstDash val="solid"/>
+                      <a:round/>
+                      <a:headEnd type="none" w="med" len="med"/>
+                      <a:tailEnd type="none" w="med" len="med"/>
+                    </a:lnR>
+                    <a:lnT w="2540" cap="flat" cmpd="sng" algn="ctr">
+                      <a:solidFill>
+                        <a:srgbClr val="EEEEEE"/>
+                      </a:solidFill>
+                      <a:prstDash val="solid"/>
+                      <a:round/>
+                      <a:headEnd type="none" w="med" len="med"/>
+                      <a:tailEnd type="none" w="med" len="med"/>
+                    </a:lnT>
+                    <a:lnB w="2540" cap="flat" cmpd="sng" algn="ctr">
+                      <a:solidFill>
+                        <a:srgbClr val="EEEEEE"/>
+                      </a:solidFill>
+                      <a:prstDash val="solid"/>
+                      <a:round/>
+                      <a:headEnd type="none" w="med" len="med"/>
+                      <a:tailEnd type="none" w="med" len="med"/>
+                    </a:lnB>
+                  </a:tcPr>
+                </a:tc>
+                <a:tc>
+                  <a:txBody>
+                    <a:bodyPr/>
+                    <a:lstStyle/>
+                    <a:p>
+                      <a:pPr algn="ctr" indent="0" marL="0">
+                        <a:buNone/>
+                      </a:pPr>
+                      <a:r>
+                        <a:rPr lang="en-US" sz="500" dirty="0">
+                          <a:solidFill>
+                            <a:srgbClr val="000000"/>
+                          </a:solidFill>
+                          <a:latin typeface="Calibri" pitchFamily="34" charset="0"/>
+                          <a:ea typeface="Calibri" pitchFamily="34" charset="-122"/>
+                          <a:cs typeface="Calibri" pitchFamily="34" charset="-120"/>
+                        </a:rPr>
+                        <a:t>0.01%</a:t>
+                      </a:r>
+                      <a:endParaRPr lang="en-US" sz="500" dirty="0">
+                        <a:latin typeface="Calibri" charset="0"/>
+                        <a:ea typeface="Calibri" charset="0"/>
+                        <a:cs typeface="Calibri" charset="0"/>
+                      </a:endParaRPr>
+                    </a:p>
+                  </a:txBody>
+                  <a:tcPr marL="91440" marR="91440" marT="45720" marB="45720">
+                    <a:lnL w="2540" cap="flat" cmpd="sng" algn="ctr">
+                      <a:solidFill>
+                        <a:srgbClr val="EEEEEE"/>
+                      </a:solidFill>
+                      <a:prstDash val="solid"/>
+                      <a:round/>
+                      <a:headEnd type="none" w="med" len="med"/>
+                      <a:tailEnd type="none" w="med" len="med"/>
+                    </a:lnL>
+                    <a:lnR w="2540" cap="flat" cmpd="sng" algn="ctr">
+                      <a:solidFill>
+                        <a:srgbClr val="EEEEEE"/>
+                      </a:solidFill>
+                      <a:prstDash val="solid"/>
+                      <a:round/>
+                      <a:headEnd type="none" w="med" len="med"/>
+                      <a:tailEnd type="none" w="med" len="med"/>
+                    </a:lnR>
+                    <a:lnT w="2540" cap="flat" cmpd="sng" algn="ctr">
+                      <a:solidFill>
+                        <a:srgbClr val="EEEEEE"/>
+                      </a:solidFill>
+                      <a:prstDash val="solid"/>
+                      <a:round/>
+                      <a:headEnd type="none" w="med" len="med"/>
+                      <a:tailEnd type="none" w="med" len="med"/>
+                    </a:lnT>
+                    <a:lnB w="2540" cap="flat" cmpd="sng" algn="ctr">
+                      <a:solidFill>
+                        <a:srgbClr val="EEEEEE"/>
+                      </a:solidFill>
+                      <a:prstDash val="solid"/>
+                      <a:round/>
+                      <a:headEnd type="none" w="med" len="med"/>
+                      <a:tailEnd type="none" w="med" len="med"/>
+                    </a:lnB>
+                  </a:tcPr>
+                </a:tc>
+                <a:tc>
+                  <a:txBody>
+                    <a:bodyPr/>
+                    <a:lstStyle/>
+                    <a:p>
+                      <a:pPr algn="ctr" indent="0" marL="0">
+                        <a:buNone/>
+                      </a:pPr>
+                      <a:r>
+                        <a:rPr lang="en-US" sz="500" dirty="0">
+                          <a:solidFill>
+                            <a:srgbClr val="000000"/>
+                          </a:solidFill>
+                          <a:latin typeface="Calibri" pitchFamily="34" charset="0"/>
+                          <a:ea typeface="Calibri" pitchFamily="34" charset="-122"/>
+                          <a:cs typeface="Calibri" pitchFamily="34" charset="-120"/>
+                        </a:rPr>
+                        <a:t>0.01%</a:t>
+                      </a:r>
+                      <a:endParaRPr lang="en-US" sz="500" dirty="0">
+                        <a:latin typeface="Calibri" charset="0"/>
+                        <a:ea typeface="Calibri" charset="0"/>
+                        <a:cs typeface="Calibri" charset="0"/>
+                      </a:endParaRPr>
+                    </a:p>
+                  </a:txBody>
+                  <a:tcPr marL="91440" marR="91440" marT="45720" marB="45720">
+                    <a:lnL w="2540" cap="flat" cmpd="sng" algn="ctr">
+                      <a:solidFill>
+                        <a:srgbClr val="EEEEEE"/>
+                      </a:solidFill>
+                      <a:prstDash val="solid"/>
+                      <a:round/>
+                      <a:headEnd type="none" w="med" len="med"/>
+                      <a:tailEnd type="none" w="med" len="med"/>
+                    </a:lnL>
+                    <a:lnR w="2540" cap="flat" cmpd="sng" algn="ctr">
+                      <a:solidFill>
+                        <a:srgbClr val="EEEEEE"/>
+                      </a:solidFill>
+                      <a:prstDash val="solid"/>
+                      <a:round/>
+                      <a:headEnd type="none" w="med" len="med"/>
+                      <a:tailEnd type="none" w="med" len="med"/>
+                    </a:lnR>
+                    <a:lnT w="2540" cap="flat" cmpd="sng" algn="ctr">
+                      <a:solidFill>
+                        <a:srgbClr val="EEEEEE"/>
+                      </a:solidFill>
+                      <a:prstDash val="solid"/>
+                      <a:round/>
+                      <a:headEnd type="none" w="med" len="med"/>
+                      <a:tailEnd type="none" w="med" len="med"/>
+                    </a:lnT>
+                    <a:lnB w="2540" cap="flat" cmpd="sng" algn="ctr">
+                      <a:solidFill>
+                        <a:srgbClr val="EEEEEE"/>
+                      </a:solidFill>
+                      <a:prstDash val="solid"/>
+                      <a:round/>
+                      <a:headEnd type="none" w="med" len="med"/>
+                      <a:tailEnd type="none" w="med" len="med"/>
+                    </a:lnB>
+                  </a:tcPr>
+                </a:tc>
+                <a:tc>
+                  <a:txBody>
+                    <a:bodyPr/>
+                    <a:lstStyle/>
+                    <a:p>
+                      <a:pPr algn="ctr" indent="0" marL="0">
+                        <a:buNone/>
+                      </a:pPr>
+                      <a:r>
+                        <a:rPr lang="en-US" sz="500" dirty="0">
+                          <a:solidFill>
+                            <a:srgbClr val="000000"/>
+                          </a:solidFill>
+                          <a:latin typeface="Calibri" pitchFamily="34" charset="0"/>
+                          <a:ea typeface="Calibri" pitchFamily="34" charset="-122"/>
+                          <a:cs typeface="Calibri" pitchFamily="34" charset="-120"/>
+                        </a:rPr>
+                        <a:t>0.00%</a:t>
+                      </a:r>
+                      <a:endParaRPr lang="en-US" sz="500" dirty="0">
+                        <a:latin typeface="Calibri" charset="0"/>
+                        <a:ea typeface="Calibri" charset="0"/>
+                        <a:cs typeface="Calibri" charset="0"/>
+                      </a:endParaRPr>
+                    </a:p>
+                  </a:txBody>
+                  <a:tcPr marL="91440" marR="91440" marT="45720" marB="45720">
+                    <a:lnL w="2540" cap="flat" cmpd="sng" algn="ctr">
+                      <a:solidFill>
+                        <a:srgbClr val="EEEEEE"/>
+                      </a:solidFill>
+                      <a:prstDash val="solid"/>
+                      <a:round/>
+                      <a:headEnd type="none" w="med" len="med"/>
+                      <a:tailEnd type="none" w="med" len="med"/>
+                    </a:lnL>
+                    <a:lnR w="2540" cap="flat" cmpd="sng" algn="ctr">
+                      <a:solidFill>
+                        <a:srgbClr val="EEEEEE"/>
+                      </a:solidFill>
+                      <a:prstDash val="solid"/>
+                      <a:round/>
+                      <a:headEnd type="none" w="med" len="med"/>
+                      <a:tailEnd type="none" w="med" len="med"/>
+                    </a:lnR>
+                    <a:lnT w="2540" cap="flat" cmpd="sng" algn="ctr">
+                      <a:solidFill>
+                        <a:srgbClr val="EEEEEE"/>
+                      </a:solidFill>
+                      <a:prstDash val="solid"/>
+                      <a:round/>
+                      <a:headEnd type="none" w="med" len="med"/>
+                      <a:tailEnd type="none" w="med" len="med"/>
+                    </a:lnT>
+                    <a:lnB w="2540" cap="flat" cmpd="sng" algn="ctr">
+                      <a:solidFill>
+                        <a:srgbClr val="EEEEEE"/>
+                      </a:solidFill>
+                      <a:prstDash val="solid"/>
+                      <a:round/>
+                      <a:headEnd type="none" w="med" len="med"/>
+                      <a:tailEnd type="none" w="med" len="med"/>
+                    </a:lnB>
+                  </a:tcPr>
+                </a:tc>
+                <a:tc>
+                  <a:txBody>
+                    <a:bodyPr/>
+                    <a:lstStyle/>
+                    <a:p>
+                      <a:pPr algn="ctr" indent="0" marL="0">
+                        <a:buNone/>
+                      </a:pPr>
+                      <a:r>
+                        <a:rPr lang="en-US" sz="500" dirty="0">
+                          <a:solidFill>
+                            <a:srgbClr val="000000"/>
+                          </a:solidFill>
+                          <a:latin typeface="Calibri" pitchFamily="34" charset="0"/>
+                          <a:ea typeface="Calibri" pitchFamily="34" charset="-122"/>
+                          <a:cs typeface="Calibri" pitchFamily="34" charset="-120"/>
+                        </a:rPr>
+                        <a:t>0.00%</a:t>
+                      </a:r>
+                      <a:endParaRPr lang="en-US" sz="500" dirty="0">
+                        <a:latin typeface="Calibri" charset="0"/>
+                        <a:ea typeface="Calibri" charset="0"/>
+                        <a:cs typeface="Calibri" charset="0"/>
+                      </a:endParaRPr>
+                    </a:p>
+                  </a:txBody>
+                  <a:tcPr marL="91440" marR="91440" marT="45720" marB="45720">
+                    <a:lnL w="2540" cap="flat" cmpd="sng" algn="ctr">
+                      <a:solidFill>
+                        <a:srgbClr val="EEEEEE"/>
+                      </a:solidFill>
+                      <a:prstDash val="solid"/>
+                      <a:round/>
+                      <a:headEnd type="none" w="med" len="med"/>
+                      <a:tailEnd type="none" w="med" len="med"/>
+                    </a:lnL>
+                    <a:lnR w="2540" cap="flat" cmpd="sng" algn="ctr">
+                      <a:solidFill>
+                        <a:srgbClr val="EEEEEE"/>
+                      </a:solidFill>
+                      <a:prstDash val="solid"/>
+                      <a:round/>
+                      <a:headEnd type="none" w="med" len="med"/>
+                      <a:tailEnd type="none" w="med" len="med"/>
+                    </a:lnR>
+                    <a:lnT w="2540" cap="flat" cmpd="sng" algn="ctr">
+                      <a:solidFill>
+                        <a:srgbClr val="EEEEEE"/>
+                      </a:solidFill>
+                      <a:prstDash val="solid"/>
+                      <a:round/>
+                      <a:headEnd type="none" w="med" len="med"/>
+                      <a:tailEnd type="none" w="med" len="med"/>
+                    </a:lnT>
+                    <a:lnB w="2540" cap="flat" cmpd="sng" algn="ctr">
+                      <a:solidFill>
+                        <a:srgbClr val="EEEEEE"/>
+                      </a:solidFill>
+                      <a:prstDash val="solid"/>
+                      <a:round/>
+                      <a:headEnd type="none" w="med" len="med"/>
+                      <a:tailEnd type="none" w="med" len="med"/>
+                    </a:lnB>
+                  </a:tcPr>
+                </a:tc>
+                <a:tc>
+                  <a:txBody>
+                    <a:bodyPr/>
+                    <a:lstStyle/>
+                    <a:p>
+                      <a:pPr algn="ctr" indent="0" marL="0">
+                        <a:buNone/>
+                      </a:pPr>
+                      <a:r>
+                        <a:rPr lang="en-US" sz="500" dirty="0">
+                          <a:solidFill>
+                            <a:srgbClr val="000000"/>
+                          </a:solidFill>
+                          <a:latin typeface="Calibri" pitchFamily="34" charset="0"/>
+                          <a:ea typeface="Calibri" pitchFamily="34" charset="-122"/>
+                          <a:cs typeface="Calibri" pitchFamily="34" charset="-120"/>
+                        </a:rPr>
+                        <a:t>0.00%</a:t>
+                      </a:r>
+                      <a:endParaRPr lang="en-US" sz="500" dirty="0">
+                        <a:latin typeface="Calibri" charset="0"/>
+                        <a:ea typeface="Calibri" charset="0"/>
+                        <a:cs typeface="Calibri" charset="0"/>
+                      </a:endParaRPr>
+                    </a:p>
+                  </a:txBody>
+                  <a:tcPr marL="91440" marR="91440" marT="45720" marB="45720">
+                    <a:lnL w="2540" cap="flat" cmpd="sng" algn="ctr">
+                      <a:solidFill>
+                        <a:srgbClr val="EEEEEE"/>
+                      </a:solidFill>
+                      <a:prstDash val="solid"/>
+                      <a:round/>
+                      <a:headEnd type="none" w="med" len="med"/>
+                      <a:tailEnd type="none" w="med" len="med"/>
+                    </a:lnL>
+                    <a:lnR w="2540" cap="flat" cmpd="sng" algn="ctr">
+                      <a:solidFill>
+                        <a:srgbClr val="EEEEEE"/>
+                      </a:solidFill>
+                      <a:prstDash val="solid"/>
+                      <a:round/>
+                      <a:headEnd type="none" w="med" len="med"/>
+                      <a:tailEnd type="none" w="med" len="med"/>
+                    </a:lnR>
+                    <a:lnT w="2540" cap="flat" cmpd="sng" algn="ctr">
+                      <a:solidFill>
+                        <a:srgbClr val="EEEEEE"/>
+                      </a:solidFill>
+                      <a:prstDash val="solid"/>
+                      <a:round/>
+                      <a:headEnd type="none" w="med" len="med"/>
+                      <a:tailEnd type="none" w="med" len="med"/>
+                    </a:lnT>
+                    <a:lnB w="2540" cap="flat" cmpd="sng" algn="ctr">
+                      <a:solidFill>
+                        <a:srgbClr val="EEEEEE"/>
+                      </a:solidFill>
+                      <a:prstDash val="solid"/>
+                      <a:round/>
+                      <a:headEnd type="none" w="med" len="med"/>
+                      <a:tailEnd type="none" w="med" len="med"/>
+                    </a:lnB>
+                  </a:tcPr>
+                </a:tc>
+                <a:tc>
+                  <a:txBody>
+                    <a:bodyPr/>
+                    <a:lstStyle/>
+                    <a:p>
+                      <a:pPr algn="ctr" indent="0" marL="0">
+                        <a:buNone/>
+                      </a:pPr>
+                      <a:r>
+                        <a:rPr lang="en-US" sz="500" dirty="0">
+                          <a:solidFill>
+                            <a:srgbClr val="000000"/>
+                          </a:solidFill>
+                          <a:latin typeface="Calibri" pitchFamily="34" charset="0"/>
+                          <a:ea typeface="Calibri" pitchFamily="34" charset="-122"/>
+                          <a:cs typeface="Calibri" pitchFamily="34" charset="-120"/>
+                        </a:rPr>
+                        <a:t>0.01%</a:t>
+                      </a:r>
+                      <a:endParaRPr lang="en-US" sz="500" dirty="0">
+                        <a:latin typeface="Calibri" charset="0"/>
+                        <a:ea typeface="Calibri" charset="0"/>
+                        <a:cs typeface="Calibri" charset="0"/>
+                      </a:endParaRPr>
+                    </a:p>
+                  </a:txBody>
+                  <a:tcPr marL="91440" marR="91440" marT="45720" marB="45720">
+                    <a:lnL w="2540" cap="flat" cmpd="sng" algn="ctr">
+                      <a:solidFill>
+                        <a:srgbClr val="EEEEEE"/>
+                      </a:solidFill>
+                      <a:prstDash val="solid"/>
+                      <a:round/>
+                      <a:headEnd type="none" w="med" len="med"/>
+                      <a:tailEnd type="none" w="med" len="med"/>
+                    </a:lnL>
+                    <a:lnR w="2540" cap="flat" cmpd="sng" algn="ctr">
+                      <a:solidFill>
+                        <a:srgbClr val="EEEEEE"/>
+                      </a:solidFill>
+                      <a:prstDash val="solid"/>
+                      <a:round/>
+                      <a:headEnd type="none" w="med" len="med"/>
+                      <a:tailEnd type="none" w="med" len="med"/>
+                    </a:lnR>
+                    <a:lnT w="2540" cap="flat" cmpd="sng" algn="ctr">
+                      <a:solidFill>
+                        <a:srgbClr val="EEEEEE"/>
+                      </a:solidFill>
+                      <a:prstDash val="solid"/>
+                      <a:round/>
+                      <a:headEnd type="none" w="med" len="med"/>
+                      <a:tailEnd type="none" w="med" len="med"/>
+                    </a:lnT>
+                    <a:lnB w="2540" cap="flat" cmpd="sng" algn="ctr">
+                      <a:solidFill>
+                        <a:srgbClr val="EEEEEE"/>
+                      </a:solidFill>
+                      <a:prstDash val="solid"/>
+                      <a:round/>
+                      <a:headEnd type="none" w="med" len="med"/>
+                      <a:tailEnd type="none" w="med" len="med"/>
+                    </a:lnB>
+                  </a:tcPr>
+                </a:tc>
+                <a:tc>
+                  <a:txBody>
+                    <a:bodyPr/>
+                    <a:lstStyle/>
+                    <a:p>
+                      <a:pPr algn="ctr" indent="0" marL="0">
+                        <a:buNone/>
+                      </a:pPr>
+                      <a:r>
+                        <a:rPr lang="en-US" sz="500" dirty="0">
+                          <a:solidFill>
+                            <a:srgbClr val="000000"/>
+                          </a:solidFill>
+                          <a:latin typeface="Calibri" pitchFamily="34" charset="0"/>
+                          <a:ea typeface="Calibri" pitchFamily="34" charset="-122"/>
+                          <a:cs typeface="Calibri" pitchFamily="34" charset="-120"/>
+                        </a:rPr>
+                        <a:t>0.00%</a:t>
+                      </a:r>
+                      <a:endParaRPr lang="en-US" sz="500" dirty="0">
+                        <a:latin typeface="Calibri" charset="0"/>
+                        <a:ea typeface="Calibri" charset="0"/>
+                        <a:cs typeface="Calibri" charset="0"/>
+                      </a:endParaRPr>
+                    </a:p>
+                  </a:txBody>
+                  <a:tcPr marL="91440" marR="91440" marT="45720" marB="45720">
+                    <a:lnL w="2540" cap="flat" cmpd="sng" algn="ctr">
+                      <a:solidFill>
+                        <a:srgbClr val="EEEEEE"/>
+                      </a:solidFill>
+                      <a:prstDash val="solid"/>
+                      <a:round/>
+                      <a:headEnd type="none" w="med" len="med"/>
+                      <a:tailEnd type="none" w="med" len="med"/>
+                    </a:lnL>
+                    <a:lnR w="2540" cap="flat" cmpd="sng" algn="ctr">
+                      <a:solidFill>
+                        <a:srgbClr val="EEEEEE"/>
+                      </a:solidFill>
+                      <a:prstDash val="solid"/>
+                      <a:round/>
+                      <a:headEnd type="none" w="med" len="med"/>
+                      <a:tailEnd type="none" w="med" len="med"/>
+                    </a:lnR>
+                    <a:lnT w="2540" cap="flat" cmpd="sng" algn="ctr">
+                      <a:solidFill>
+                        <a:srgbClr val="EEEEEE"/>
+                      </a:solidFill>
+                      <a:prstDash val="solid"/>
+                      <a:round/>
+                      <a:headEnd type="none" w="med" len="med"/>
+                      <a:tailEnd type="none" w="med" len="med"/>
+                    </a:lnT>
+                    <a:lnB w="2540" cap="flat" cmpd="sng" algn="ctr">
+                      <a:solidFill>
+                        <a:srgbClr val="EEEEEE"/>
+                      </a:solidFill>
+                      <a:prstDash val="solid"/>
+                      <a:round/>
+                      <a:headEnd type="none" w="med" len="med"/>
+                      <a:tailEnd type="none" w="med" len="med"/>
+                    </a:lnB>
+                  </a:tcPr>
+                </a:tc>
+                <a:tc>
+                  <a:txBody>
+                    <a:bodyPr/>
+                    <a:lstStyle/>
+                    <a:p>
+                      <a:pPr algn="ctr" indent="0" marL="0">
+                        <a:buNone/>
+                      </a:pPr>
+                      <a:r>
+                        <a:rPr lang="en-US" sz="500" dirty="0">
+                          <a:solidFill>
+                            <a:srgbClr val="000000"/>
+                          </a:solidFill>
+                          <a:latin typeface="Calibri" pitchFamily="34" charset="0"/>
+                          <a:ea typeface="Calibri" pitchFamily="34" charset="-122"/>
+                          <a:cs typeface="Calibri" pitchFamily="34" charset="-120"/>
+                        </a:rPr>
+                        <a:t>0.00%</a:t>
+                      </a:r>
+                      <a:endParaRPr lang="en-US" sz="500" dirty="0">
+                        <a:latin typeface="Calibri" charset="0"/>
+                        <a:ea typeface="Calibri" charset="0"/>
+                        <a:cs typeface="Calibri" charset="0"/>
+                      </a:endParaRPr>
+                    </a:p>
+                  </a:txBody>
+                  <a:tcPr marL="91440" marR="91440" marT="45720" marB="45720">
+                    <a:lnL w="2540" cap="flat" cmpd="sng" algn="ctr">
+                      <a:solidFill>
+                        <a:srgbClr val="EEEEEE"/>
+                      </a:solidFill>
+                      <a:prstDash val="solid"/>
+                      <a:round/>
+                      <a:headEnd type="none" w="med" len="med"/>
+                      <a:tailEnd type="none" w="med" len="med"/>
+                    </a:lnL>
+                    <a:lnR w="2540" cap="flat" cmpd="sng" algn="ctr">
+                      <a:solidFill>
+                        <a:srgbClr val="EEEEEE"/>
+                      </a:solidFill>
+                      <a:prstDash val="solid"/>
+                      <a:round/>
+                      <a:headEnd type="none" w="med" len="med"/>
+                      <a:tailEnd type="none" w="med" len="med"/>
+                    </a:lnR>
+                    <a:lnT w="2540" cap="flat" cmpd="sng" algn="ctr">
+                      <a:solidFill>
+                        <a:srgbClr val="EEEEEE"/>
+                      </a:solidFill>
+                      <a:prstDash val="solid"/>
+                      <a:round/>
+                      <a:headEnd type="none" w="med" len="med"/>
+                      <a:tailEnd type="none" w="med" len="med"/>
+                    </a:lnT>
+                    <a:lnB w="2540" cap="flat" cmpd="sng" algn="ctr">
+                      <a:solidFill>
+                        <a:srgbClr val="EEEEEE"/>
+                      </a:solidFill>
+                      <a:prstDash val="solid"/>
+                      <a:round/>
+                      <a:headEnd type="none" w="med" len="med"/>
+                      <a:tailEnd type="none" w="med" len="med"/>
+                    </a:lnB>
+                  </a:tcPr>
+                </a:tc>
+                <a:tc>
+                  <a:txBody>
+                    <a:bodyPr/>
+                    <a:lstStyle/>
+                    <a:p>
+                      <a:pPr algn="ctr" indent="0" marL="0">
+                        <a:buNone/>
+                      </a:pPr>
+                      <a:r>
+                        <a:rPr lang="en-US" sz="500" dirty="0">
+                          <a:solidFill>
+                            <a:srgbClr val="000000"/>
+                          </a:solidFill>
+                          <a:latin typeface="Calibri" pitchFamily="34" charset="0"/>
+                          <a:ea typeface="Calibri" pitchFamily="34" charset="-122"/>
+                          <a:cs typeface="Calibri" pitchFamily="34" charset="-120"/>
+                        </a:rPr>
+                        <a:t>0.00%</a:t>
+                      </a:r>
+                      <a:endParaRPr lang="en-US" sz="500" dirty="0">
+                        <a:latin typeface="Calibri" charset="0"/>
+                        <a:ea typeface="Calibri" charset="0"/>
+                        <a:cs typeface="Calibri" charset="0"/>
+                      </a:endParaRPr>
+                    </a:p>
+                  </a:txBody>
+                  <a:tcPr marL="91440" marR="91440" marT="45720" marB="45720">
+                    <a:lnL w="2540" cap="flat" cmpd="sng" algn="ctr">
+                      <a:solidFill>
+                        <a:srgbClr val="EEEEEE"/>
+                      </a:solidFill>
+                      <a:prstDash val="solid"/>
+                      <a:round/>
+                      <a:headEnd type="none" w="med" len="med"/>
+                      <a:tailEnd type="none" w="med" len="med"/>
+                    </a:lnL>
+                    <a:lnR w="2540" cap="flat" cmpd="sng" algn="ctr">
+                      <a:solidFill>
+                        <a:srgbClr val="EEEEEE"/>
+                      </a:solidFill>
+                      <a:prstDash val="solid"/>
+                      <a:round/>
+                      <a:headEnd type="none" w="med" len="med"/>
+                      <a:tailEnd type="none" w="med" len="med"/>
+                    </a:lnR>
+                    <a:lnT w="2540" cap="flat" cmpd="sng" algn="ctr">
+                      <a:solidFill>
+                        <a:srgbClr val="EEEEEE"/>
+                      </a:solidFill>
+                      <a:prstDash val="solid"/>
+                      <a:round/>
+                      <a:headEnd type="none" w="med" len="med"/>
+                      <a:tailEnd type="none" w="med" len="med"/>
+                    </a:lnT>
+                    <a:lnB w="2540" cap="flat" cmpd="sng" algn="ctr">
+                      <a:solidFill>
+                        <a:srgbClr val="EEEEEE"/>
+                      </a:solidFill>
+                      <a:prstDash val="solid"/>
+                      <a:round/>
+                      <a:headEnd type="none" w="med" len="med"/>
+                      <a:tailEnd type="none" w="med" len="med"/>
+                    </a:lnB>
+                  </a:tcPr>
+                </a:tc>
+                <a:tc>
+                  <a:txBody>
+                    <a:bodyPr/>
+                    <a:lstStyle/>
+                    <a:p>
+                      <a:pPr algn="ctr" indent="0" marL="0">
+                        <a:buNone/>
+                      </a:pPr>
+                      <a:r>
+                        <a:rPr lang="en-US" sz="500" b="1" dirty="0">
+                          <a:solidFill>
+                            <a:srgbClr val="000000"/>
+                          </a:solidFill>
+                          <a:latin typeface="Calibri" pitchFamily="34" charset="0"/>
+                          <a:ea typeface="Calibri" pitchFamily="34" charset="-122"/>
+                          <a:cs typeface="Calibri" pitchFamily="34" charset="-120"/>
+                        </a:rPr>
+                        <a:t>0.06%</a:t>
+                      </a:r>
+                      <a:endParaRPr lang="en-US" sz="500" dirty="0">
+                        <a:latin typeface="Calibri" charset="0"/>
+                        <a:ea typeface="Calibri" charset="0"/>
+                        <a:cs typeface="Calibri" charset="0"/>
+                      </a:endParaRPr>
+                    </a:p>
+                  </a:txBody>
+                  <a:tcPr marL="91440" marR="91440" marT="45720" marB="45720">
+                    <a:lnL w="2540" cap="flat" cmpd="sng" algn="ctr">
+                      <a:solidFill>
+                        <a:srgbClr val="EEEEEE"/>
+                      </a:solidFill>
+                      <a:prstDash val="solid"/>
+                      <a:round/>
+                      <a:headEnd type="none" w="med" len="med"/>
+                      <a:tailEnd type="none" w="med" len="med"/>
+                    </a:lnL>
+                    <a:lnR w="2540" cap="flat" cmpd="sng" algn="ctr">
+                      <a:solidFill>
+                        <a:srgbClr val="EEEEEE"/>
+                      </a:solidFill>
+                      <a:prstDash val="solid"/>
+                      <a:round/>
+                      <a:headEnd type="none" w="med" len="med"/>
+                      <a:tailEnd type="none" w="med" len="med"/>
+                    </a:lnR>
+                    <a:lnT w="2540" cap="flat" cmpd="sng" algn="ctr">
+                      <a:solidFill>
+                        <a:srgbClr val="EEEEEE"/>
+                      </a:solidFill>
+                      <a:prstDash val="solid"/>
+                      <a:round/>
+                      <a:headEnd type="none" w="med" len="med"/>
+                      <a:tailEnd type="none" w="med" len="med"/>
+                    </a:lnT>
+                    <a:lnB w="2540" cap="flat" cmpd="sng" algn="ctr">
+                      <a:solidFill>
+                        <a:srgbClr val="EEEEEE"/>
+                      </a:solidFill>
+                      <a:prstDash val="solid"/>
+                      <a:round/>
+                      <a:headEnd type="none" w="med" len="med"/>
+                      <a:tailEnd type="none" w="med" len="med"/>
+                    </a:lnB>
+                  </a:tcPr>
+                </a:tc>
+              </a:tr>
+              <a:tr h="123444">
                 <a:tc>
                   <a:txBody>
                     <a:bodyPr/>
@@ -7025,7 +12639,7 @@
                   </a:tcPr>
                 </a:tc>
               </a:tr>
-              <a:tr h="118872">
+              <a:tr h="123444">
                 <a:tc>
                   <a:txBody>
                     <a:bodyPr/>
@@ -7162,7 +12776,7 @@
                           <a:ea typeface="Calibri" pitchFamily="34" charset="-122"/>
                           <a:cs typeface="Calibri" pitchFamily="34" charset="-120"/>
                         </a:rPr>
-                        <a:t>-11.28%</a:t>
+                        <a:t>0.00%</a:t>
                       </a:r>
                       <a:endParaRPr lang="en-US" sz="500" dirty="0">
                         <a:latin typeface="Calibri" charset="0"/>
@@ -7877,7 +13491,7 @@
                           <a:ea typeface="Calibri" pitchFamily="34" charset="-122"/>
                           <a:cs typeface="Calibri" pitchFamily="34" charset="-120"/>
                         </a:rPr>
-                        <a:t>0.28%</a:t>
+                        <a:t>0.56%</a:t>
                       </a:r>
                       <a:endParaRPr lang="en-US" sz="500" dirty="0">
                         <a:latin typeface="Calibri" charset="0"/>
@@ -7942,7 +13556,7 @@
                           <a:ea typeface="Calibri" pitchFamily="34" charset="-122"/>
                           <a:cs typeface="Calibri" pitchFamily="34" charset="-120"/>
                         </a:rPr>
-                        <a:t>-8.39%</a:t>
+                        <a:t>3.54%</a:t>
                       </a:r>
                       <a:endParaRPr lang="en-US" sz="500" dirty="0">
                         <a:latin typeface="Calibri" charset="0"/>
@@ -7991,7 +13605,7 @@
                   </a:tcPr>
                 </a:tc>
               </a:tr>
-              <a:tr h="118872">
+              <a:tr h="123444">
                 <a:tc>
                   <a:txBody>
                     <a:bodyPr/>
@@ -8063,7 +13677,7 @@
                           <a:ea typeface="Calibri" pitchFamily="34" charset="-122"/>
                           <a:cs typeface="Calibri" pitchFamily="34" charset="-120"/>
                         </a:rPr>
-                        <a:t>FIP LIQUIDEZ PERMANENTE</a:t>
+                        <a:t>FIP LIQUIDEZ Permanente</a:t>
                       </a:r>
                       <a:endParaRPr lang="en-US" sz="500" dirty="0">
                         <a:latin typeface="Calibri" charset="0"/>
@@ -8119,6 +13733,17 @@
                       <a:pPr algn="ctr" indent="0" marL="0">
                         <a:buNone/>
                       </a:pPr>
+                      <a:r>
+                        <a:rPr lang="en-US" sz="500" dirty="0">
+                          <a:solidFill>
+                            <a:srgbClr val="000000"/>
+                          </a:solidFill>
+                          <a:latin typeface="Calibri" pitchFamily="34" charset="0"/>
+                          <a:ea typeface="Calibri" pitchFamily="34" charset="-122"/>
+                          <a:cs typeface="Calibri" pitchFamily="34" charset="-120"/>
+                        </a:rPr>
+                        <a:t>0.00%</a:t>
+                      </a:r>
                       <a:endParaRPr lang="en-US" sz="500" dirty="0">
                         <a:latin typeface="Calibri" charset="0"/>
                         <a:ea typeface="Calibri" charset="0"/>
@@ -8173,6 +13798,17 @@
                       <a:pPr algn="ctr" indent="0" marL="0">
                         <a:buNone/>
                       </a:pPr>
+                      <a:r>
+                        <a:rPr lang="en-US" sz="500" dirty="0">
+                          <a:solidFill>
+                            <a:srgbClr val="000000"/>
+                          </a:solidFill>
+                          <a:latin typeface="Calibri" pitchFamily="34" charset="0"/>
+                          <a:ea typeface="Calibri" pitchFamily="34" charset="-122"/>
+                          <a:cs typeface="Calibri" pitchFamily="34" charset="-120"/>
+                        </a:rPr>
+                        <a:t>0.00%</a:t>
+                      </a:r>
                       <a:endParaRPr lang="en-US" sz="500" dirty="0">
                         <a:latin typeface="Calibri" charset="0"/>
                         <a:ea typeface="Calibri" charset="0"/>
@@ -8227,6 +13863,17 @@
                       <a:pPr algn="ctr" indent="0" marL="0">
                         <a:buNone/>
                       </a:pPr>
+                      <a:r>
+                        <a:rPr lang="en-US" sz="500" dirty="0">
+                          <a:solidFill>
+                            <a:srgbClr val="000000"/>
+                          </a:solidFill>
+                          <a:latin typeface="Calibri" pitchFamily="34" charset="0"/>
+                          <a:ea typeface="Calibri" pitchFamily="34" charset="-122"/>
+                          <a:cs typeface="Calibri" pitchFamily="34" charset="-120"/>
+                        </a:rPr>
+                        <a:t>0.01%</a:t>
+                      </a:r>
                       <a:endParaRPr lang="en-US" sz="500" dirty="0">
                         <a:latin typeface="Calibri" charset="0"/>
                         <a:ea typeface="Calibri" charset="0"/>
@@ -8281,6 +13928,17 @@
                       <a:pPr algn="ctr" indent="0" marL="0">
                         <a:buNone/>
                       </a:pPr>
+                      <a:r>
+                        <a:rPr lang="en-US" sz="500" dirty="0">
+                          <a:solidFill>
+                            <a:srgbClr val="000000"/>
+                          </a:solidFill>
+                          <a:latin typeface="Calibri" pitchFamily="34" charset="0"/>
+                          <a:ea typeface="Calibri" pitchFamily="34" charset="-122"/>
+                          <a:cs typeface="Calibri" pitchFamily="34" charset="-120"/>
+                        </a:rPr>
+                        <a:t>0.01%</a:t>
+                      </a:r>
                       <a:endParaRPr lang="en-US" sz="500" dirty="0">
                         <a:latin typeface="Calibri" charset="0"/>
                         <a:ea typeface="Calibri" charset="0"/>
@@ -8335,6 +13993,17 @@
                       <a:pPr algn="ctr" indent="0" marL="0">
                         <a:buNone/>
                       </a:pPr>
+                      <a:r>
+                        <a:rPr lang="en-US" sz="500" dirty="0">
+                          <a:solidFill>
+                            <a:srgbClr val="000000"/>
+                          </a:solidFill>
+                          <a:latin typeface="Calibri" pitchFamily="34" charset="0"/>
+                          <a:ea typeface="Calibri" pitchFamily="34" charset="-122"/>
+                          <a:cs typeface="Calibri" pitchFamily="34" charset="-120"/>
+                        </a:rPr>
+                        <a:t>0.01%</a:t>
+                      </a:r>
                       <a:endParaRPr lang="en-US" sz="500" dirty="0">
                         <a:latin typeface="Calibri" charset="0"/>
                         <a:ea typeface="Calibri" charset="0"/>
@@ -8389,6 +14058,17 @@
                       <a:pPr algn="ctr" indent="0" marL="0">
                         <a:buNone/>
                       </a:pPr>
+                      <a:r>
+                        <a:rPr lang="en-US" sz="500" dirty="0">
+                          <a:solidFill>
+                            <a:srgbClr val="000000"/>
+                          </a:solidFill>
+                          <a:latin typeface="Calibri" pitchFamily="34" charset="0"/>
+                          <a:ea typeface="Calibri" pitchFamily="34" charset="-122"/>
+                          <a:cs typeface="Calibri" pitchFamily="34" charset="-120"/>
+                        </a:rPr>
+                        <a:t>0.01%</a:t>
+                      </a:r>
                       <a:endParaRPr lang="en-US" sz="500" dirty="0">
                         <a:latin typeface="Calibri" charset="0"/>
                         <a:ea typeface="Calibri" charset="0"/>
@@ -8443,6 +14123,17 @@
                       <a:pPr algn="ctr" indent="0" marL="0">
                         <a:buNone/>
                       </a:pPr>
+                      <a:r>
+                        <a:rPr lang="en-US" sz="500" dirty="0">
+                          <a:solidFill>
+                            <a:srgbClr val="000000"/>
+                          </a:solidFill>
+                          <a:latin typeface="Calibri" pitchFamily="34" charset="0"/>
+                          <a:ea typeface="Calibri" pitchFamily="34" charset="-122"/>
+                          <a:cs typeface="Calibri" pitchFamily="34" charset="-120"/>
+                        </a:rPr>
+                        <a:t>0.01%</a:t>
+                      </a:r>
                       <a:endParaRPr lang="en-US" sz="500" dirty="0">
                         <a:latin typeface="Calibri" charset="0"/>
                         <a:ea typeface="Calibri" charset="0"/>
@@ -8831,7 +14522,7 @@
                           <a:ea typeface="Calibri" pitchFamily="34" charset="-122"/>
                           <a:cs typeface="Calibri" pitchFamily="34" charset="-120"/>
                         </a:rPr>
-                        <a:t>6.82%</a:t>
+                        <a:t>6.86%</a:t>
                       </a:r>
                       <a:endParaRPr lang="en-US" sz="500" dirty="0">
                         <a:latin typeface="Calibri" charset="0"/>
@@ -8880,7 +14571,7 @@
                   </a:tcPr>
                 </a:tc>
               </a:tr>
-              <a:tr h="118872">
+              <a:tr h="123444">
                 <a:tc>
                   <a:txBody>
                     <a:bodyPr/>
@@ -9720,7 +15411,7 @@
                           <a:ea typeface="Calibri" pitchFamily="34" charset="-122"/>
                           <a:cs typeface="Calibri" pitchFamily="34" charset="-120"/>
                         </a:rPr>
-                        <a:t>1.51%</a:t>
+                        <a:t>3.39%</a:t>
                       </a:r>
                       <a:endParaRPr lang="en-US" sz="500" dirty="0">
                         <a:latin typeface="Calibri" charset="0"/>
@@ -9769,7 +15460,7 @@
                   </a:tcPr>
                 </a:tc>
               </a:tr>
-              <a:tr h="118872">
+              <a:tr h="123444">
                 <a:tc>
                   <a:txBody>
                     <a:bodyPr/>
@@ -9906,7 +15597,7 @@
                           <a:ea typeface="Calibri" pitchFamily="34" charset="-122"/>
                           <a:cs typeface="Calibri" pitchFamily="34" charset="-120"/>
                         </a:rPr>
-                        <a:t>0.27%</a:t>
+                        <a:t>0.00%</a:t>
                       </a:r>
                       <a:endParaRPr lang="en-US" sz="500" dirty="0">
                         <a:latin typeface="Calibri" charset="0"/>
@@ -10598,7 +16289,7 @@
                           <a:ea typeface="Calibri" pitchFamily="34" charset="-122"/>
                           <a:cs typeface="Calibri" pitchFamily="34" charset="-120"/>
                         </a:rPr>
-                        <a:t>1.05%</a:t>
+                        <a:t>2.32%</a:t>
                       </a:r>
                       <a:endParaRPr lang="en-US" sz="500" dirty="0">
                         <a:latin typeface="Calibri" charset="0"/>
@@ -10647,7 +16338,7 @@
                   </a:tcPr>
                 </a:tc>
               </a:tr>
-              <a:tr h="118872">
+              <a:tr h="123444">
                 <a:tc>
                   <a:txBody>
                     <a:bodyPr/>
@@ -10719,7 +16410,7 @@
                           <a:ea typeface="Calibri" pitchFamily="34" charset="-122"/>
                           <a:cs typeface="Calibri" pitchFamily="34" charset="-120"/>
                         </a:rPr>
-                        <a:t>FIP LIQUIDEZ PERMANENTE</a:t>
+                        <a:t>FIP LIQUIDEZ Permanente</a:t>
                       </a:r>
                       <a:endParaRPr lang="en-US" sz="500" dirty="0">
                         <a:latin typeface="Calibri" charset="0"/>
@@ -11476,7 +17167,7 @@
                           <a:ea typeface="Calibri" pitchFamily="34" charset="-122"/>
                           <a:cs typeface="Calibri" pitchFamily="34" charset="-120"/>
                         </a:rPr>
-                        <a:t>-0.88%</a:t>
+                        <a:t>5.12%</a:t>
                       </a:r>
                       <a:endParaRPr lang="en-US" sz="500" dirty="0">
                         <a:latin typeface="Calibri" charset="0"/>

--- a/folletos/2026-04/pptx/FIP_VANTRUST_LIQUIDEZ_PERMANENTE.pptx
+++ b/folletos/2026-04/pptx/FIP_VANTRUST_LIQUIDEZ_PERMANENTE.pptx
@@ -3113,7 +3113,7 @@
                 <a:ea typeface="Calibri" pitchFamily="34" charset="-122"/>
                 <a:cs typeface="Calibri" pitchFamily="34" charset="-120"/>
               </a:rPr>
-              <a:t>prueba CLP</a:t>
+              <a:t>prueba 12 CLP</a:t>
             </a:r>
             <a:endParaRPr lang="en-US" sz="800" dirty="0"/>
           </a:p>

--- a/folletos/2026-04/pptx/FIP_VANTRUST_LIQUIDEZ_PERMANENTE.pptx
+++ b/folletos/2026-04/pptx/FIP_VANTRUST_LIQUIDEZ_PERMANENTE.pptx
@@ -3113,7 +3113,7 @@
                 <a:ea typeface="Calibri" pitchFamily="34" charset="-122"/>
                 <a:cs typeface="Calibri" pitchFamily="34" charset="-120"/>
               </a:rPr>
-              <a:t>prueba 12 CLP</a:t>
+              <a:t>prueba CLP</a:t>
             </a:r>
             <a:endParaRPr lang="en-US" sz="800" dirty="0"/>
           </a:p>
@@ -7566,7 +7566,7 @@
                           <a:ea typeface="Calibri" pitchFamily="34" charset="-122"/>
                           <a:cs typeface="Calibri" pitchFamily="34" charset="-120"/>
                         </a:rPr>
-                        <a:t>0.01%</a:t>
+                        <a:t>0.68%</a:t>
                       </a:r>
                       <a:endParaRPr lang="en-US" sz="500" dirty="0">
                         <a:latin typeface="Calibri" charset="0"/>
@@ -7631,7 +7631,7 @@
                           <a:ea typeface="Calibri" pitchFamily="34" charset="-122"/>
                           <a:cs typeface="Calibri" pitchFamily="34" charset="-120"/>
                         </a:rPr>
-                        <a:t>0.01%</a:t>
+                        <a:t>0.67%</a:t>
                       </a:r>
                       <a:endParaRPr lang="en-US" sz="500" dirty="0">
                         <a:latin typeface="Calibri" charset="0"/>
@@ -7696,7 +7696,7 @@
                           <a:ea typeface="Calibri" pitchFamily="34" charset="-122"/>
                           <a:cs typeface="Calibri" pitchFamily="34" charset="-120"/>
                         </a:rPr>
-                        <a:t>0.01%</a:t>
+                        <a:t>0.62%</a:t>
                       </a:r>
                       <a:endParaRPr lang="en-US" sz="500" dirty="0">
                         <a:latin typeface="Calibri" charset="0"/>
@@ -7826,7 +7826,7 @@
                           <a:ea typeface="Calibri" pitchFamily="34" charset="-122"/>
                           <a:cs typeface="Calibri" pitchFamily="34" charset="-120"/>
                         </a:rPr>
-                        <a:t>7.51%</a:t>
+                        <a:t>9.61%</a:t>
                       </a:r>
                       <a:endParaRPr lang="en-US" sz="500" dirty="0">
                         <a:latin typeface="Calibri" charset="0"/>
@@ -8444,7 +8444,7 @@
                           <a:ea typeface="Calibri" pitchFamily="34" charset="-122"/>
                           <a:cs typeface="Calibri" pitchFamily="34" charset="-120"/>
                         </a:rPr>
-                        <a:t>0.01%</a:t>
+                        <a:t>0.68%</a:t>
                       </a:r>
                       <a:endParaRPr lang="en-US" sz="500" dirty="0">
                         <a:latin typeface="Calibri" charset="0"/>
@@ -8509,7 +8509,7 @@
                           <a:ea typeface="Calibri" pitchFamily="34" charset="-122"/>
                           <a:cs typeface="Calibri" pitchFamily="34" charset="-120"/>
                         </a:rPr>
-                        <a:t>0.01%</a:t>
+                        <a:t>0.90%</a:t>
                       </a:r>
                       <a:endParaRPr lang="en-US" sz="500" dirty="0">
                         <a:latin typeface="Calibri" charset="0"/>
@@ -8574,7 +8574,7 @@
                           <a:ea typeface="Calibri" pitchFamily="34" charset="-122"/>
                           <a:cs typeface="Calibri" pitchFamily="34" charset="-120"/>
                         </a:rPr>
-                        <a:t>0.01%</a:t>
+                        <a:t>0.72%</a:t>
                       </a:r>
                       <a:endParaRPr lang="en-US" sz="500" dirty="0">
                         <a:latin typeface="Calibri" charset="0"/>
@@ -8639,7 +8639,7 @@
                           <a:ea typeface="Calibri" pitchFamily="34" charset="-122"/>
                           <a:cs typeface="Calibri" pitchFamily="34" charset="-120"/>
                         </a:rPr>
-                        <a:t>0.01%</a:t>
+                        <a:t>0.71%</a:t>
                       </a:r>
                       <a:endParaRPr lang="en-US" sz="500" dirty="0">
                         <a:latin typeface="Calibri" charset="0"/>
@@ -8704,7 +8704,7 @@
                           <a:ea typeface="Calibri" pitchFamily="34" charset="-122"/>
                           <a:cs typeface="Calibri" pitchFamily="34" charset="-120"/>
                         </a:rPr>
-                        <a:t>0.03%</a:t>
+                        <a:t>3.03%</a:t>
                       </a:r>
                       <a:endParaRPr lang="en-US" sz="500" dirty="0">
                         <a:latin typeface="Calibri" charset="0"/>
@@ -9932,7 +9932,2786 @@
                           <a:ea typeface="Calibri" pitchFamily="34" charset="-122"/>
                           <a:cs typeface="Calibri" pitchFamily="34" charset="-120"/>
                         </a:rPr>
-                        <a:t>0.01%</a:t>
+                        <a:t>0.51%</a:t>
+                      </a:r>
+                      <a:endParaRPr lang="en-US" sz="500" dirty="0">
+                        <a:latin typeface="Calibri" charset="0"/>
+                        <a:ea typeface="Calibri" charset="0"/>
+                        <a:cs typeface="Calibri" charset="0"/>
+                      </a:endParaRPr>
+                    </a:p>
+                  </a:txBody>
+                  <a:tcPr marL="91440" marR="91440" marT="45720" marB="45720">
+                    <a:lnL w="2540" cap="flat" cmpd="sng" algn="ctr">
+                      <a:solidFill>
+                        <a:srgbClr val="EEEEEE"/>
+                      </a:solidFill>
+                      <a:prstDash val="solid"/>
+                      <a:round/>
+                      <a:headEnd type="none" w="med" len="med"/>
+                      <a:tailEnd type="none" w="med" len="med"/>
+                    </a:lnL>
+                    <a:lnR w="2540" cap="flat" cmpd="sng" algn="ctr">
+                      <a:solidFill>
+                        <a:srgbClr val="EEEEEE"/>
+                      </a:solidFill>
+                      <a:prstDash val="solid"/>
+                      <a:round/>
+                      <a:headEnd type="none" w="med" len="med"/>
+                      <a:tailEnd type="none" w="med" len="med"/>
+                    </a:lnR>
+                    <a:lnT w="2540" cap="flat" cmpd="sng" algn="ctr">
+                      <a:solidFill>
+                        <a:srgbClr val="EEEEEE"/>
+                      </a:solidFill>
+                      <a:prstDash val="solid"/>
+                      <a:round/>
+                      <a:headEnd type="none" w="med" len="med"/>
+                      <a:tailEnd type="none" w="med" len="med"/>
+                    </a:lnT>
+                    <a:lnB w="2540" cap="flat" cmpd="sng" algn="ctr">
+                      <a:solidFill>
+                        <a:srgbClr val="EEEEEE"/>
+                      </a:solidFill>
+                      <a:prstDash val="solid"/>
+                      <a:round/>
+                      <a:headEnd type="none" w="med" len="med"/>
+                      <a:tailEnd type="none" w="med" len="med"/>
+                    </a:lnB>
+                  </a:tcPr>
+                </a:tc>
+                <a:tc>
+                  <a:txBody>
+                    <a:bodyPr/>
+                    <a:lstStyle/>
+                    <a:p>
+                      <a:pPr algn="ctr" indent="0" marL="0">
+                        <a:buNone/>
+                      </a:pPr>
+                      <a:r>
+                        <a:rPr lang="en-US" sz="500" dirty="0">
+                          <a:solidFill>
+                            <a:srgbClr val="999999"/>
+                          </a:solidFill>
+                          <a:latin typeface="Calibri" pitchFamily="34" charset="0"/>
+                          <a:ea typeface="Calibri" pitchFamily="34" charset="-122"/>
+                          <a:cs typeface="Calibri" pitchFamily="34" charset="-120"/>
+                        </a:rPr>
+                        <a:t>0.45%</a:t>
+                      </a:r>
+                      <a:endParaRPr lang="en-US" sz="500" dirty="0">
+                        <a:latin typeface="Calibri" charset="0"/>
+                        <a:ea typeface="Calibri" charset="0"/>
+                        <a:cs typeface="Calibri" charset="0"/>
+                      </a:endParaRPr>
+                    </a:p>
+                  </a:txBody>
+                  <a:tcPr marL="91440" marR="91440" marT="45720" marB="45720">
+                    <a:lnL w="2540" cap="flat" cmpd="sng" algn="ctr">
+                      <a:solidFill>
+                        <a:srgbClr val="EEEEEE"/>
+                      </a:solidFill>
+                      <a:prstDash val="solid"/>
+                      <a:round/>
+                      <a:headEnd type="none" w="med" len="med"/>
+                      <a:tailEnd type="none" w="med" len="med"/>
+                    </a:lnL>
+                    <a:lnR w="2540" cap="flat" cmpd="sng" algn="ctr">
+                      <a:solidFill>
+                        <a:srgbClr val="EEEEEE"/>
+                      </a:solidFill>
+                      <a:prstDash val="solid"/>
+                      <a:round/>
+                      <a:headEnd type="none" w="med" len="med"/>
+                      <a:tailEnd type="none" w="med" len="med"/>
+                    </a:lnR>
+                    <a:lnT w="2540" cap="flat" cmpd="sng" algn="ctr">
+                      <a:solidFill>
+                        <a:srgbClr val="EEEEEE"/>
+                      </a:solidFill>
+                      <a:prstDash val="solid"/>
+                      <a:round/>
+                      <a:headEnd type="none" w="med" len="med"/>
+                      <a:tailEnd type="none" w="med" len="med"/>
+                    </a:lnT>
+                    <a:lnB w="2540" cap="flat" cmpd="sng" algn="ctr">
+                      <a:solidFill>
+                        <a:srgbClr val="EEEEEE"/>
+                      </a:solidFill>
+                      <a:prstDash val="solid"/>
+                      <a:round/>
+                      <a:headEnd type="none" w="med" len="med"/>
+                      <a:tailEnd type="none" w="med" len="med"/>
+                    </a:lnB>
+                  </a:tcPr>
+                </a:tc>
+                <a:tc>
+                  <a:txBody>
+                    <a:bodyPr/>
+                    <a:lstStyle/>
+                    <a:p>
+                      <a:pPr algn="ctr" indent="0" marL="0">
+                        <a:buNone/>
+                      </a:pPr>
+                      <a:r>
+                        <a:rPr lang="en-US" sz="500" dirty="0">
+                          <a:solidFill>
+                            <a:srgbClr val="999999"/>
+                          </a:solidFill>
+                          <a:latin typeface="Calibri" pitchFamily="34" charset="0"/>
+                          <a:ea typeface="Calibri" pitchFamily="34" charset="-122"/>
+                          <a:cs typeface="Calibri" pitchFamily="34" charset="-120"/>
+                        </a:rPr>
+                        <a:t>0.47%</a:t>
+                      </a:r>
+                      <a:endParaRPr lang="en-US" sz="500" dirty="0">
+                        <a:latin typeface="Calibri" charset="0"/>
+                        <a:ea typeface="Calibri" charset="0"/>
+                        <a:cs typeface="Calibri" charset="0"/>
+                      </a:endParaRPr>
+                    </a:p>
+                  </a:txBody>
+                  <a:tcPr marL="91440" marR="91440" marT="45720" marB="45720">
+                    <a:lnL w="2540" cap="flat" cmpd="sng" algn="ctr">
+                      <a:solidFill>
+                        <a:srgbClr val="EEEEEE"/>
+                      </a:solidFill>
+                      <a:prstDash val="solid"/>
+                      <a:round/>
+                      <a:headEnd type="none" w="med" len="med"/>
+                      <a:tailEnd type="none" w="med" len="med"/>
+                    </a:lnL>
+                    <a:lnR w="2540" cap="flat" cmpd="sng" algn="ctr">
+                      <a:solidFill>
+                        <a:srgbClr val="EEEEEE"/>
+                      </a:solidFill>
+                      <a:prstDash val="solid"/>
+                      <a:round/>
+                      <a:headEnd type="none" w="med" len="med"/>
+                      <a:tailEnd type="none" w="med" len="med"/>
+                    </a:lnR>
+                    <a:lnT w="2540" cap="flat" cmpd="sng" algn="ctr">
+                      <a:solidFill>
+                        <a:srgbClr val="EEEEEE"/>
+                      </a:solidFill>
+                      <a:prstDash val="solid"/>
+                      <a:round/>
+                      <a:headEnd type="none" w="med" len="med"/>
+                      <a:tailEnd type="none" w="med" len="med"/>
+                    </a:lnT>
+                    <a:lnB w="2540" cap="flat" cmpd="sng" algn="ctr">
+                      <a:solidFill>
+                        <a:srgbClr val="EEEEEE"/>
+                      </a:solidFill>
+                      <a:prstDash val="solid"/>
+                      <a:round/>
+                      <a:headEnd type="none" w="med" len="med"/>
+                      <a:tailEnd type="none" w="med" len="med"/>
+                    </a:lnB>
+                  </a:tcPr>
+                </a:tc>
+                <a:tc>
+                  <a:txBody>
+                    <a:bodyPr/>
+                    <a:lstStyle/>
+                    <a:p>
+                      <a:pPr algn="ctr" indent="0" marL="0">
+                        <a:buNone/>
+                      </a:pPr>
+                      <a:r>
+                        <a:rPr lang="en-US" sz="500" dirty="0">
+                          <a:solidFill>
+                            <a:srgbClr val="999999"/>
+                          </a:solidFill>
+                          <a:latin typeface="Calibri" pitchFamily="34" charset="0"/>
+                          <a:ea typeface="Calibri" pitchFamily="34" charset="-122"/>
+                          <a:cs typeface="Calibri" pitchFamily="34" charset="-120"/>
+                        </a:rPr>
+                        <a:t>0.42%</a:t>
+                      </a:r>
+                      <a:endParaRPr lang="en-US" sz="500" dirty="0">
+                        <a:latin typeface="Calibri" charset="0"/>
+                        <a:ea typeface="Calibri" charset="0"/>
+                        <a:cs typeface="Calibri" charset="0"/>
+                      </a:endParaRPr>
+                    </a:p>
+                  </a:txBody>
+                  <a:tcPr marL="91440" marR="91440" marT="45720" marB="45720">
+                    <a:lnL w="2540" cap="flat" cmpd="sng" algn="ctr">
+                      <a:solidFill>
+                        <a:srgbClr val="EEEEEE"/>
+                      </a:solidFill>
+                      <a:prstDash val="solid"/>
+                      <a:round/>
+                      <a:headEnd type="none" w="med" len="med"/>
+                      <a:tailEnd type="none" w="med" len="med"/>
+                    </a:lnL>
+                    <a:lnR w="2540" cap="flat" cmpd="sng" algn="ctr">
+                      <a:solidFill>
+                        <a:srgbClr val="EEEEEE"/>
+                      </a:solidFill>
+                      <a:prstDash val="solid"/>
+                      <a:round/>
+                      <a:headEnd type="none" w="med" len="med"/>
+                      <a:tailEnd type="none" w="med" len="med"/>
+                    </a:lnR>
+                    <a:lnT w="2540" cap="flat" cmpd="sng" algn="ctr">
+                      <a:solidFill>
+                        <a:srgbClr val="EEEEEE"/>
+                      </a:solidFill>
+                      <a:prstDash val="solid"/>
+                      <a:round/>
+                      <a:headEnd type="none" w="med" len="med"/>
+                      <a:tailEnd type="none" w="med" len="med"/>
+                    </a:lnT>
+                    <a:lnB w="2540" cap="flat" cmpd="sng" algn="ctr">
+                      <a:solidFill>
+                        <a:srgbClr val="EEEEEE"/>
+                      </a:solidFill>
+                      <a:prstDash val="solid"/>
+                      <a:round/>
+                      <a:headEnd type="none" w="med" len="med"/>
+                      <a:tailEnd type="none" w="med" len="med"/>
+                    </a:lnB>
+                  </a:tcPr>
+                </a:tc>
+                <a:tc>
+                  <a:txBody>
+                    <a:bodyPr/>
+                    <a:lstStyle/>
+                    <a:p>
+                      <a:pPr algn="ctr" indent="0" marL="0">
+                        <a:buNone/>
+                      </a:pPr>
+                      <a:r>
+                        <a:rPr lang="en-US" sz="500" dirty="0">
+                          <a:solidFill>
+                            <a:srgbClr val="999999"/>
+                          </a:solidFill>
+                          <a:latin typeface="Calibri" pitchFamily="34" charset="0"/>
+                          <a:ea typeface="Calibri" pitchFamily="34" charset="-122"/>
+                          <a:cs typeface="Calibri" pitchFamily="34" charset="-120"/>
+                        </a:rPr>
+                        <a:t>0.37%</a:t>
+                      </a:r>
+                      <a:endParaRPr lang="en-US" sz="500" dirty="0">
+                        <a:latin typeface="Calibri" charset="0"/>
+                        <a:ea typeface="Calibri" charset="0"/>
+                        <a:cs typeface="Calibri" charset="0"/>
+                      </a:endParaRPr>
+                    </a:p>
+                  </a:txBody>
+                  <a:tcPr marL="91440" marR="91440" marT="45720" marB="45720">
+                    <a:lnL w="2540" cap="flat" cmpd="sng" algn="ctr">
+                      <a:solidFill>
+                        <a:srgbClr val="EEEEEE"/>
+                      </a:solidFill>
+                      <a:prstDash val="solid"/>
+                      <a:round/>
+                      <a:headEnd type="none" w="med" len="med"/>
+                      <a:tailEnd type="none" w="med" len="med"/>
+                    </a:lnL>
+                    <a:lnR w="2540" cap="flat" cmpd="sng" algn="ctr">
+                      <a:solidFill>
+                        <a:srgbClr val="EEEEEE"/>
+                      </a:solidFill>
+                      <a:prstDash val="solid"/>
+                      <a:round/>
+                      <a:headEnd type="none" w="med" len="med"/>
+                      <a:tailEnd type="none" w="med" len="med"/>
+                    </a:lnR>
+                    <a:lnT w="2540" cap="flat" cmpd="sng" algn="ctr">
+                      <a:solidFill>
+                        <a:srgbClr val="EEEEEE"/>
+                      </a:solidFill>
+                      <a:prstDash val="solid"/>
+                      <a:round/>
+                      <a:headEnd type="none" w="med" len="med"/>
+                      <a:tailEnd type="none" w="med" len="med"/>
+                    </a:lnT>
+                    <a:lnB w="2540" cap="flat" cmpd="sng" algn="ctr">
+                      <a:solidFill>
+                        <a:srgbClr val="EEEEEE"/>
+                      </a:solidFill>
+                      <a:prstDash val="solid"/>
+                      <a:round/>
+                      <a:headEnd type="none" w="med" len="med"/>
+                      <a:tailEnd type="none" w="med" len="med"/>
+                    </a:lnB>
+                  </a:tcPr>
+                </a:tc>
+                <a:tc>
+                  <a:txBody>
+                    <a:bodyPr/>
+                    <a:lstStyle/>
+                    <a:p>
+                      <a:pPr algn="ctr" indent="0" marL="0">
+                        <a:buNone/>
+                      </a:pPr>
+                      <a:r>
+                        <a:rPr lang="en-US" sz="500" dirty="0">
+                          <a:solidFill>
+                            <a:srgbClr val="999999"/>
+                          </a:solidFill>
+                          <a:latin typeface="Calibri" pitchFamily="34" charset="0"/>
+                          <a:ea typeface="Calibri" pitchFamily="34" charset="-122"/>
+                          <a:cs typeface="Calibri" pitchFamily="34" charset="-120"/>
+                        </a:rPr>
+                        <a:t>0.36%</a:t>
+                      </a:r>
+                      <a:endParaRPr lang="en-US" sz="500" dirty="0">
+                        <a:latin typeface="Calibri" charset="0"/>
+                        <a:ea typeface="Calibri" charset="0"/>
+                        <a:cs typeface="Calibri" charset="0"/>
+                      </a:endParaRPr>
+                    </a:p>
+                  </a:txBody>
+                  <a:tcPr marL="91440" marR="91440" marT="45720" marB="45720">
+                    <a:lnL w="2540" cap="flat" cmpd="sng" algn="ctr">
+                      <a:solidFill>
+                        <a:srgbClr val="EEEEEE"/>
+                      </a:solidFill>
+                      <a:prstDash val="solid"/>
+                      <a:round/>
+                      <a:headEnd type="none" w="med" len="med"/>
+                      <a:tailEnd type="none" w="med" len="med"/>
+                    </a:lnL>
+                    <a:lnR w="2540" cap="flat" cmpd="sng" algn="ctr">
+                      <a:solidFill>
+                        <a:srgbClr val="EEEEEE"/>
+                      </a:solidFill>
+                      <a:prstDash val="solid"/>
+                      <a:round/>
+                      <a:headEnd type="none" w="med" len="med"/>
+                      <a:tailEnd type="none" w="med" len="med"/>
+                    </a:lnR>
+                    <a:lnT w="2540" cap="flat" cmpd="sng" algn="ctr">
+                      <a:solidFill>
+                        <a:srgbClr val="EEEEEE"/>
+                      </a:solidFill>
+                      <a:prstDash val="solid"/>
+                      <a:round/>
+                      <a:headEnd type="none" w="med" len="med"/>
+                      <a:tailEnd type="none" w="med" len="med"/>
+                    </a:lnT>
+                    <a:lnB w="2540" cap="flat" cmpd="sng" algn="ctr">
+                      <a:solidFill>
+                        <a:srgbClr val="EEEEEE"/>
+                      </a:solidFill>
+                      <a:prstDash val="solid"/>
+                      <a:round/>
+                      <a:headEnd type="none" w="med" len="med"/>
+                      <a:tailEnd type="none" w="med" len="med"/>
+                    </a:lnB>
+                  </a:tcPr>
+                </a:tc>
+                <a:tc>
+                  <a:txBody>
+                    <a:bodyPr/>
+                    <a:lstStyle/>
+                    <a:p>
+                      <a:pPr algn="ctr" indent="0" marL="0">
+                        <a:buNone/>
+                      </a:pPr>
+                      <a:r>
+                        <a:rPr lang="en-US" sz="500" dirty="0">
+                          <a:solidFill>
+                            <a:srgbClr val="999999"/>
+                          </a:solidFill>
+                          <a:latin typeface="Calibri" pitchFamily="34" charset="0"/>
+                          <a:ea typeface="Calibri" pitchFamily="34" charset="-122"/>
+                          <a:cs typeface="Calibri" pitchFamily="34" charset="-120"/>
+                        </a:rPr>
+                        <a:t>0.36%</a:t>
+                      </a:r>
+                      <a:endParaRPr lang="en-US" sz="500" dirty="0">
+                        <a:latin typeface="Calibri" charset="0"/>
+                        <a:ea typeface="Calibri" charset="0"/>
+                        <a:cs typeface="Calibri" charset="0"/>
+                      </a:endParaRPr>
+                    </a:p>
+                  </a:txBody>
+                  <a:tcPr marL="91440" marR="91440" marT="45720" marB="45720">
+                    <a:lnL w="2540" cap="flat" cmpd="sng" algn="ctr">
+                      <a:solidFill>
+                        <a:srgbClr val="EEEEEE"/>
+                      </a:solidFill>
+                      <a:prstDash val="solid"/>
+                      <a:round/>
+                      <a:headEnd type="none" w="med" len="med"/>
+                      <a:tailEnd type="none" w="med" len="med"/>
+                    </a:lnL>
+                    <a:lnR w="2540" cap="flat" cmpd="sng" algn="ctr">
+                      <a:solidFill>
+                        <a:srgbClr val="EEEEEE"/>
+                      </a:solidFill>
+                      <a:prstDash val="solid"/>
+                      <a:round/>
+                      <a:headEnd type="none" w="med" len="med"/>
+                      <a:tailEnd type="none" w="med" len="med"/>
+                    </a:lnR>
+                    <a:lnT w="2540" cap="flat" cmpd="sng" algn="ctr">
+                      <a:solidFill>
+                        <a:srgbClr val="EEEEEE"/>
+                      </a:solidFill>
+                      <a:prstDash val="solid"/>
+                      <a:round/>
+                      <a:headEnd type="none" w="med" len="med"/>
+                      <a:tailEnd type="none" w="med" len="med"/>
+                    </a:lnT>
+                    <a:lnB w="2540" cap="flat" cmpd="sng" algn="ctr">
+                      <a:solidFill>
+                        <a:srgbClr val="EEEEEE"/>
+                      </a:solidFill>
+                      <a:prstDash val="solid"/>
+                      <a:round/>
+                      <a:headEnd type="none" w="med" len="med"/>
+                      <a:tailEnd type="none" w="med" len="med"/>
+                    </a:lnB>
+                  </a:tcPr>
+                </a:tc>
+                <a:tc>
+                  <a:txBody>
+                    <a:bodyPr/>
+                    <a:lstStyle/>
+                    <a:p>
+                      <a:pPr algn="ctr" indent="0" marL="0">
+                        <a:buNone/>
+                      </a:pPr>
+                      <a:r>
+                        <a:rPr lang="en-US" sz="500" dirty="0">
+                          <a:solidFill>
+                            <a:srgbClr val="999999"/>
+                          </a:solidFill>
+                          <a:latin typeface="Calibri" pitchFamily="34" charset="0"/>
+                          <a:ea typeface="Calibri" pitchFamily="34" charset="-122"/>
+                          <a:cs typeface="Calibri" pitchFamily="34" charset="-120"/>
+                        </a:rPr>
+                        <a:t>0.34%</a:t>
+                      </a:r>
+                      <a:endParaRPr lang="en-US" sz="500" dirty="0">
+                        <a:latin typeface="Calibri" charset="0"/>
+                        <a:ea typeface="Calibri" charset="0"/>
+                        <a:cs typeface="Calibri" charset="0"/>
+                      </a:endParaRPr>
+                    </a:p>
+                  </a:txBody>
+                  <a:tcPr marL="91440" marR="91440" marT="45720" marB="45720">
+                    <a:lnL w="2540" cap="flat" cmpd="sng" algn="ctr">
+                      <a:solidFill>
+                        <a:srgbClr val="EEEEEE"/>
+                      </a:solidFill>
+                      <a:prstDash val="solid"/>
+                      <a:round/>
+                      <a:headEnd type="none" w="med" len="med"/>
+                      <a:tailEnd type="none" w="med" len="med"/>
+                    </a:lnL>
+                    <a:lnR w="2540" cap="flat" cmpd="sng" algn="ctr">
+                      <a:solidFill>
+                        <a:srgbClr val="EEEEEE"/>
+                      </a:solidFill>
+                      <a:prstDash val="solid"/>
+                      <a:round/>
+                      <a:headEnd type="none" w="med" len="med"/>
+                      <a:tailEnd type="none" w="med" len="med"/>
+                    </a:lnR>
+                    <a:lnT w="2540" cap="flat" cmpd="sng" algn="ctr">
+                      <a:solidFill>
+                        <a:srgbClr val="EEEEEE"/>
+                      </a:solidFill>
+                      <a:prstDash val="solid"/>
+                      <a:round/>
+                      <a:headEnd type="none" w="med" len="med"/>
+                      <a:tailEnd type="none" w="med" len="med"/>
+                    </a:lnT>
+                    <a:lnB w="2540" cap="flat" cmpd="sng" algn="ctr">
+                      <a:solidFill>
+                        <a:srgbClr val="EEEEEE"/>
+                      </a:solidFill>
+                      <a:prstDash val="solid"/>
+                      <a:round/>
+                      <a:headEnd type="none" w="med" len="med"/>
+                      <a:tailEnd type="none" w="med" len="med"/>
+                    </a:lnB>
+                  </a:tcPr>
+                </a:tc>
+                <a:tc>
+                  <a:txBody>
+                    <a:bodyPr/>
+                    <a:lstStyle/>
+                    <a:p>
+                      <a:pPr algn="ctr" indent="0" marL="0">
+                        <a:buNone/>
+                      </a:pPr>
+                      <a:r>
+                        <a:rPr lang="en-US" sz="500" dirty="0">
+                          <a:solidFill>
+                            <a:srgbClr val="999999"/>
+                          </a:solidFill>
+                          <a:latin typeface="Calibri" pitchFamily="34" charset="0"/>
+                          <a:ea typeface="Calibri" pitchFamily="34" charset="-122"/>
+                          <a:cs typeface="Calibri" pitchFamily="34" charset="-120"/>
+                        </a:rPr>
+                        <a:t>0.34%</a:t>
+                      </a:r>
+                      <a:endParaRPr lang="en-US" sz="500" dirty="0">
+                        <a:latin typeface="Calibri" charset="0"/>
+                        <a:ea typeface="Calibri" charset="0"/>
+                        <a:cs typeface="Calibri" charset="0"/>
+                      </a:endParaRPr>
+                    </a:p>
+                  </a:txBody>
+                  <a:tcPr marL="91440" marR="91440" marT="45720" marB="45720">
+                    <a:lnL w="2540" cap="flat" cmpd="sng" algn="ctr">
+                      <a:solidFill>
+                        <a:srgbClr val="EEEEEE"/>
+                      </a:solidFill>
+                      <a:prstDash val="solid"/>
+                      <a:round/>
+                      <a:headEnd type="none" w="med" len="med"/>
+                      <a:tailEnd type="none" w="med" len="med"/>
+                    </a:lnL>
+                    <a:lnR w="2540" cap="flat" cmpd="sng" algn="ctr">
+                      <a:solidFill>
+                        <a:srgbClr val="EEEEEE"/>
+                      </a:solidFill>
+                      <a:prstDash val="solid"/>
+                      <a:round/>
+                      <a:headEnd type="none" w="med" len="med"/>
+                      <a:tailEnd type="none" w="med" len="med"/>
+                    </a:lnR>
+                    <a:lnT w="2540" cap="flat" cmpd="sng" algn="ctr">
+                      <a:solidFill>
+                        <a:srgbClr val="EEEEEE"/>
+                      </a:solidFill>
+                      <a:prstDash val="solid"/>
+                      <a:round/>
+                      <a:headEnd type="none" w="med" len="med"/>
+                      <a:tailEnd type="none" w="med" len="med"/>
+                    </a:lnT>
+                    <a:lnB w="2540" cap="flat" cmpd="sng" algn="ctr">
+                      <a:solidFill>
+                        <a:srgbClr val="EEEEEE"/>
+                      </a:solidFill>
+                      <a:prstDash val="solid"/>
+                      <a:round/>
+                      <a:headEnd type="none" w="med" len="med"/>
+                      <a:tailEnd type="none" w="med" len="med"/>
+                    </a:lnB>
+                  </a:tcPr>
+                </a:tc>
+                <a:tc>
+                  <a:txBody>
+                    <a:bodyPr/>
+                    <a:lstStyle/>
+                    <a:p>
+                      <a:pPr algn="ctr" indent="0" marL="0">
+                        <a:buNone/>
+                      </a:pPr>
+                      <a:r>
+                        <a:rPr lang="en-US" sz="500" dirty="0">
+                          <a:solidFill>
+                            <a:srgbClr val="999999"/>
+                          </a:solidFill>
+                          <a:latin typeface="Calibri" pitchFamily="34" charset="0"/>
+                          <a:ea typeface="Calibri" pitchFamily="34" charset="-122"/>
+                          <a:cs typeface="Calibri" pitchFamily="34" charset="-120"/>
+                        </a:rPr>
+                        <a:t>0.32%</a:t>
+                      </a:r>
+                      <a:endParaRPr lang="en-US" sz="500" dirty="0">
+                        <a:latin typeface="Calibri" charset="0"/>
+                        <a:ea typeface="Calibri" charset="0"/>
+                        <a:cs typeface="Calibri" charset="0"/>
+                      </a:endParaRPr>
+                    </a:p>
+                  </a:txBody>
+                  <a:tcPr marL="91440" marR="91440" marT="45720" marB="45720">
+                    <a:lnL w="2540" cap="flat" cmpd="sng" algn="ctr">
+                      <a:solidFill>
+                        <a:srgbClr val="EEEEEE"/>
+                      </a:solidFill>
+                      <a:prstDash val="solid"/>
+                      <a:round/>
+                      <a:headEnd type="none" w="med" len="med"/>
+                      <a:tailEnd type="none" w="med" len="med"/>
+                    </a:lnL>
+                    <a:lnR w="2540" cap="flat" cmpd="sng" algn="ctr">
+                      <a:solidFill>
+                        <a:srgbClr val="EEEEEE"/>
+                      </a:solidFill>
+                      <a:prstDash val="solid"/>
+                      <a:round/>
+                      <a:headEnd type="none" w="med" len="med"/>
+                      <a:tailEnd type="none" w="med" len="med"/>
+                    </a:lnR>
+                    <a:lnT w="2540" cap="flat" cmpd="sng" algn="ctr">
+                      <a:solidFill>
+                        <a:srgbClr val="EEEEEE"/>
+                      </a:solidFill>
+                      <a:prstDash val="solid"/>
+                      <a:round/>
+                      <a:headEnd type="none" w="med" len="med"/>
+                      <a:tailEnd type="none" w="med" len="med"/>
+                    </a:lnT>
+                    <a:lnB w="2540" cap="flat" cmpd="sng" algn="ctr">
+                      <a:solidFill>
+                        <a:srgbClr val="EEEEEE"/>
+                      </a:solidFill>
+                      <a:prstDash val="solid"/>
+                      <a:round/>
+                      <a:headEnd type="none" w="med" len="med"/>
+                      <a:tailEnd type="none" w="med" len="med"/>
+                    </a:lnB>
+                  </a:tcPr>
+                </a:tc>
+                <a:tc>
+                  <a:txBody>
+                    <a:bodyPr/>
+                    <a:lstStyle/>
+                    <a:p>
+                      <a:pPr algn="ctr" indent="0" marL="0">
+                        <a:buNone/>
+                      </a:pPr>
+                      <a:r>
+                        <a:rPr lang="en-US" sz="500" dirty="0">
+                          <a:solidFill>
+                            <a:srgbClr val="999999"/>
+                          </a:solidFill>
+                          <a:latin typeface="Calibri" pitchFamily="34" charset="0"/>
+                          <a:ea typeface="Calibri" pitchFamily="34" charset="-122"/>
+                          <a:cs typeface="Calibri" pitchFamily="34" charset="-120"/>
+                        </a:rPr>
+                        <a:t>-2.99%</a:t>
+                      </a:r>
+                      <a:endParaRPr lang="en-US" sz="500" dirty="0">
+                        <a:latin typeface="Calibri" charset="0"/>
+                        <a:ea typeface="Calibri" charset="0"/>
+                        <a:cs typeface="Calibri" charset="0"/>
+                      </a:endParaRPr>
+                    </a:p>
+                  </a:txBody>
+                  <a:tcPr marL="91440" marR="91440" marT="45720" marB="45720">
+                    <a:lnL w="2540" cap="flat" cmpd="sng" algn="ctr">
+                      <a:solidFill>
+                        <a:srgbClr val="EEEEEE"/>
+                      </a:solidFill>
+                      <a:prstDash val="solid"/>
+                      <a:round/>
+                      <a:headEnd type="none" w="med" len="med"/>
+                      <a:tailEnd type="none" w="med" len="med"/>
+                    </a:lnL>
+                    <a:lnR w="2540" cap="flat" cmpd="sng" algn="ctr">
+                      <a:solidFill>
+                        <a:srgbClr val="EEEEEE"/>
+                      </a:solidFill>
+                      <a:prstDash val="solid"/>
+                      <a:round/>
+                      <a:headEnd type="none" w="med" len="med"/>
+                      <a:tailEnd type="none" w="med" len="med"/>
+                    </a:lnR>
+                    <a:lnT w="2540" cap="flat" cmpd="sng" algn="ctr">
+                      <a:solidFill>
+                        <a:srgbClr val="EEEEEE"/>
+                      </a:solidFill>
+                      <a:prstDash val="solid"/>
+                      <a:round/>
+                      <a:headEnd type="none" w="med" len="med"/>
+                      <a:tailEnd type="none" w="med" len="med"/>
+                    </a:lnT>
+                    <a:lnB w="2540" cap="flat" cmpd="sng" algn="ctr">
+                      <a:solidFill>
+                        <a:srgbClr val="EEEEEE"/>
+                      </a:solidFill>
+                      <a:prstDash val="solid"/>
+                      <a:round/>
+                      <a:headEnd type="none" w="med" len="med"/>
+                      <a:tailEnd type="none" w="med" len="med"/>
+                    </a:lnB>
+                  </a:tcPr>
+                </a:tc>
+                <a:tc>
+                  <a:txBody>
+                    <a:bodyPr/>
+                    <a:lstStyle/>
+                    <a:p>
+                      <a:pPr algn="ctr" indent="0" marL="0">
+                        <a:buNone/>
+                      </a:pPr>
+                      <a:r>
+                        <a:rPr lang="en-US" sz="500" b="1" dirty="0">
+                          <a:solidFill>
+                            <a:srgbClr val="999999"/>
+                          </a:solidFill>
+                          <a:latin typeface="Calibri" pitchFamily="34" charset="0"/>
+                          <a:ea typeface="Calibri" pitchFamily="34" charset="-122"/>
+                          <a:cs typeface="Calibri" pitchFamily="34" charset="-120"/>
+                        </a:rPr>
+                        <a:t>0.90%</a:t>
+                      </a:r>
+                      <a:endParaRPr lang="en-US" sz="500" dirty="0">
+                        <a:latin typeface="Calibri" charset="0"/>
+                        <a:ea typeface="Calibri" charset="0"/>
+                        <a:cs typeface="Calibri" charset="0"/>
+                      </a:endParaRPr>
+                    </a:p>
+                  </a:txBody>
+                  <a:tcPr marL="91440" marR="91440" marT="45720" marB="45720">
+                    <a:lnL w="2540" cap="flat" cmpd="sng" algn="ctr">
+                      <a:solidFill>
+                        <a:srgbClr val="EEEEEE"/>
+                      </a:solidFill>
+                      <a:prstDash val="solid"/>
+                      <a:round/>
+                      <a:headEnd type="none" w="med" len="med"/>
+                      <a:tailEnd type="none" w="med" len="med"/>
+                    </a:lnL>
+                    <a:lnR w="2540" cap="flat" cmpd="sng" algn="ctr">
+                      <a:solidFill>
+                        <a:srgbClr val="EEEEEE"/>
+                      </a:solidFill>
+                      <a:prstDash val="solid"/>
+                      <a:round/>
+                      <a:headEnd type="none" w="med" len="med"/>
+                      <a:tailEnd type="none" w="med" len="med"/>
+                    </a:lnR>
+                    <a:lnT w="2540" cap="flat" cmpd="sng" algn="ctr">
+                      <a:solidFill>
+                        <a:srgbClr val="EEEEEE"/>
+                      </a:solidFill>
+                      <a:prstDash val="solid"/>
+                      <a:round/>
+                      <a:headEnd type="none" w="med" len="med"/>
+                      <a:tailEnd type="none" w="med" len="med"/>
+                    </a:lnT>
+                    <a:lnB w="2540" cap="flat" cmpd="sng" algn="ctr">
+                      <a:solidFill>
+                        <a:srgbClr val="EEEEEE"/>
+                      </a:solidFill>
+                      <a:prstDash val="solid"/>
+                      <a:round/>
+                      <a:headEnd type="none" w="med" len="med"/>
+                      <a:tailEnd type="none" w="med" len="med"/>
+                    </a:lnB>
+                  </a:tcPr>
+                </a:tc>
+              </a:tr>
+              <a:tr h="123444">
+                <a:tc>
+                  <a:txBody>
+                    <a:bodyPr/>
+                    <a:lstStyle/>
+                    <a:p>
+                      <a:pPr algn="l" indent="0" marL="0">
+                        <a:buNone/>
+                      </a:pPr>
+                      <a:endParaRPr lang="en-US" sz="500" dirty="0">
+                        <a:latin typeface="Calibri" charset="0"/>
+                        <a:ea typeface="Calibri" charset="0"/>
+                        <a:cs typeface="Calibri" charset="0"/>
+                      </a:endParaRPr>
+                    </a:p>
+                  </a:txBody>
+                  <a:tcPr marL="91440" marR="91440" marT="45720" marB="45720">
+                    <a:lnL w="2540" cap="flat" cmpd="sng" algn="ctr">
+                      <a:solidFill>
+                        <a:srgbClr val="EEEEEE"/>
+                      </a:solidFill>
+                      <a:prstDash val="solid"/>
+                      <a:round/>
+                      <a:headEnd type="none" w="med" len="med"/>
+                      <a:tailEnd type="none" w="med" len="med"/>
+                    </a:lnL>
+                    <a:lnR w="2540" cap="flat" cmpd="sng" algn="ctr">
+                      <a:solidFill>
+                        <a:srgbClr val="EEEEEE"/>
+                      </a:solidFill>
+                      <a:prstDash val="solid"/>
+                      <a:round/>
+                      <a:headEnd type="none" w="med" len="med"/>
+                      <a:tailEnd type="none" w="med" len="med"/>
+                    </a:lnR>
+                    <a:lnT w="2540" cap="flat" cmpd="sng" algn="ctr">
+                      <a:solidFill>
+                        <a:srgbClr val="EEEEEE"/>
+                      </a:solidFill>
+                      <a:prstDash val="solid"/>
+                      <a:round/>
+                      <a:headEnd type="none" w="med" len="med"/>
+                      <a:tailEnd type="none" w="med" len="med"/>
+                    </a:lnT>
+                    <a:lnB w="2540" cap="flat" cmpd="sng" algn="ctr">
+                      <a:solidFill>
+                        <a:srgbClr val="EEEEEE"/>
+                      </a:solidFill>
+                      <a:prstDash val="solid"/>
+                      <a:round/>
+                      <a:headEnd type="none" w="med" len="med"/>
+                      <a:tailEnd type="none" w="med" len="med"/>
+                    </a:lnB>
+                  </a:tcPr>
+                </a:tc>
+                <a:tc>
+                  <a:txBody>
+                    <a:bodyPr/>
+                    <a:lstStyle/>
+                    <a:p>
+                      <a:pPr algn="l" indent="0" marL="0">
+                        <a:buNone/>
+                      </a:pPr>
+                      <a:r>
+                        <a:rPr lang="en-US" sz="500" dirty="0">
+                          <a:solidFill>
+                            <a:srgbClr val="000000"/>
+                          </a:solidFill>
+                          <a:latin typeface="Calibri" pitchFamily="34" charset="0"/>
+                          <a:ea typeface="Calibri" pitchFamily="34" charset="-122"/>
+                          <a:cs typeface="Calibri" pitchFamily="34" charset="-120"/>
+                        </a:rPr>
+                        <a:t>FIP LIQUIDEZ Permanente</a:t>
+                      </a:r>
+                      <a:endParaRPr lang="en-US" sz="500" dirty="0">
+                        <a:latin typeface="Calibri" charset="0"/>
+                        <a:ea typeface="Calibri" charset="0"/>
+                        <a:cs typeface="Calibri" charset="0"/>
+                      </a:endParaRPr>
+                    </a:p>
+                  </a:txBody>
+                  <a:tcPr marL="91440" marR="91440" marT="45720" marB="45720">
+                    <a:lnL w="2540" cap="flat" cmpd="sng" algn="ctr">
+                      <a:solidFill>
+                        <a:srgbClr val="EEEEEE"/>
+                      </a:solidFill>
+                      <a:prstDash val="solid"/>
+                      <a:round/>
+                      <a:headEnd type="none" w="med" len="med"/>
+                      <a:tailEnd type="none" w="med" len="med"/>
+                    </a:lnL>
+                    <a:lnR w="2540" cap="flat" cmpd="sng" algn="ctr">
+                      <a:solidFill>
+                        <a:srgbClr val="EEEEEE"/>
+                      </a:solidFill>
+                      <a:prstDash val="solid"/>
+                      <a:round/>
+                      <a:headEnd type="none" w="med" len="med"/>
+                      <a:tailEnd type="none" w="med" len="med"/>
+                    </a:lnR>
+                    <a:lnT w="2540" cap="flat" cmpd="sng" algn="ctr">
+                      <a:solidFill>
+                        <a:srgbClr val="EEEEEE"/>
+                      </a:solidFill>
+                      <a:prstDash val="solid"/>
+                      <a:round/>
+                      <a:headEnd type="none" w="med" len="med"/>
+                      <a:tailEnd type="none" w="med" len="med"/>
+                    </a:lnT>
+                    <a:lnB w="2540" cap="flat" cmpd="sng" algn="ctr">
+                      <a:solidFill>
+                        <a:srgbClr val="EEEEEE"/>
+                      </a:solidFill>
+                      <a:prstDash val="solid"/>
+                      <a:round/>
+                      <a:headEnd type="none" w="med" len="med"/>
+                      <a:tailEnd type="none" w="med" len="med"/>
+                    </a:lnB>
+                  </a:tcPr>
+                </a:tc>
+                <a:tc>
+                  <a:txBody>
+                    <a:bodyPr/>
+                    <a:lstStyle/>
+                    <a:p>
+                      <a:pPr algn="ctr" indent="0" marL="0">
+                        <a:buNone/>
+                      </a:pPr>
+                      <a:r>
+                        <a:rPr lang="en-US" sz="500" dirty="0">
+                          <a:solidFill>
+                            <a:srgbClr val="000000"/>
+                          </a:solidFill>
+                          <a:latin typeface="Calibri" pitchFamily="34" charset="0"/>
+                          <a:ea typeface="Calibri" pitchFamily="34" charset="-122"/>
+                          <a:cs typeface="Calibri" pitchFamily="34" charset="-120"/>
+                        </a:rPr>
+                        <a:t>0.73%</a:t>
+                      </a:r>
+                      <a:endParaRPr lang="en-US" sz="500" dirty="0">
+                        <a:latin typeface="Calibri" charset="0"/>
+                        <a:ea typeface="Calibri" charset="0"/>
+                        <a:cs typeface="Calibri" charset="0"/>
+                      </a:endParaRPr>
+                    </a:p>
+                  </a:txBody>
+                  <a:tcPr marL="91440" marR="91440" marT="45720" marB="45720">
+                    <a:lnL w="2540" cap="flat" cmpd="sng" algn="ctr">
+                      <a:solidFill>
+                        <a:srgbClr val="EEEEEE"/>
+                      </a:solidFill>
+                      <a:prstDash val="solid"/>
+                      <a:round/>
+                      <a:headEnd type="none" w="med" len="med"/>
+                      <a:tailEnd type="none" w="med" len="med"/>
+                    </a:lnL>
+                    <a:lnR w="2540" cap="flat" cmpd="sng" algn="ctr">
+                      <a:solidFill>
+                        <a:srgbClr val="EEEEEE"/>
+                      </a:solidFill>
+                      <a:prstDash val="solid"/>
+                      <a:round/>
+                      <a:headEnd type="none" w="med" len="med"/>
+                      <a:tailEnd type="none" w="med" len="med"/>
+                    </a:lnR>
+                    <a:lnT w="2540" cap="flat" cmpd="sng" algn="ctr">
+                      <a:solidFill>
+                        <a:srgbClr val="EEEEEE"/>
+                      </a:solidFill>
+                      <a:prstDash val="solid"/>
+                      <a:round/>
+                      <a:headEnd type="none" w="med" len="med"/>
+                      <a:tailEnd type="none" w="med" len="med"/>
+                    </a:lnT>
+                    <a:lnB w="2540" cap="flat" cmpd="sng" algn="ctr">
+                      <a:solidFill>
+                        <a:srgbClr val="EEEEEE"/>
+                      </a:solidFill>
+                      <a:prstDash val="solid"/>
+                      <a:round/>
+                      <a:headEnd type="none" w="med" len="med"/>
+                      <a:tailEnd type="none" w="med" len="med"/>
+                    </a:lnB>
+                  </a:tcPr>
+                </a:tc>
+                <a:tc>
+                  <a:txBody>
+                    <a:bodyPr/>
+                    <a:lstStyle/>
+                    <a:p>
+                      <a:pPr algn="ctr" indent="0" marL="0">
+                        <a:buNone/>
+                      </a:pPr>
+                      <a:r>
+                        <a:rPr lang="en-US" sz="500" dirty="0">
+                          <a:solidFill>
+                            <a:srgbClr val="000000"/>
+                          </a:solidFill>
+                          <a:latin typeface="Calibri" pitchFamily="34" charset="0"/>
+                          <a:ea typeface="Calibri" pitchFamily="34" charset="-122"/>
+                          <a:cs typeface="Calibri" pitchFamily="34" charset="-120"/>
+                        </a:rPr>
+                        <a:t>0.53%</a:t>
+                      </a:r>
+                      <a:endParaRPr lang="en-US" sz="500" dirty="0">
+                        <a:latin typeface="Calibri" charset="0"/>
+                        <a:ea typeface="Calibri" charset="0"/>
+                        <a:cs typeface="Calibri" charset="0"/>
+                      </a:endParaRPr>
+                    </a:p>
+                  </a:txBody>
+                  <a:tcPr marL="91440" marR="91440" marT="45720" marB="45720">
+                    <a:lnL w="2540" cap="flat" cmpd="sng" algn="ctr">
+                      <a:solidFill>
+                        <a:srgbClr val="EEEEEE"/>
+                      </a:solidFill>
+                      <a:prstDash val="solid"/>
+                      <a:round/>
+                      <a:headEnd type="none" w="med" len="med"/>
+                      <a:tailEnd type="none" w="med" len="med"/>
+                    </a:lnL>
+                    <a:lnR w="2540" cap="flat" cmpd="sng" algn="ctr">
+                      <a:solidFill>
+                        <a:srgbClr val="EEEEEE"/>
+                      </a:solidFill>
+                      <a:prstDash val="solid"/>
+                      <a:round/>
+                      <a:headEnd type="none" w="med" len="med"/>
+                      <a:tailEnd type="none" w="med" len="med"/>
+                    </a:lnR>
+                    <a:lnT w="2540" cap="flat" cmpd="sng" algn="ctr">
+                      <a:solidFill>
+                        <a:srgbClr val="EEEEEE"/>
+                      </a:solidFill>
+                      <a:prstDash val="solid"/>
+                      <a:round/>
+                      <a:headEnd type="none" w="med" len="med"/>
+                      <a:tailEnd type="none" w="med" len="med"/>
+                    </a:lnT>
+                    <a:lnB w="2540" cap="flat" cmpd="sng" algn="ctr">
+                      <a:solidFill>
+                        <a:srgbClr val="EEEEEE"/>
+                      </a:solidFill>
+                      <a:prstDash val="solid"/>
+                      <a:round/>
+                      <a:headEnd type="none" w="med" len="med"/>
+                      <a:tailEnd type="none" w="med" len="med"/>
+                    </a:lnB>
+                  </a:tcPr>
+                </a:tc>
+                <a:tc>
+                  <a:txBody>
+                    <a:bodyPr/>
+                    <a:lstStyle/>
+                    <a:p>
+                      <a:pPr algn="ctr" indent="0" marL="0">
+                        <a:buNone/>
+                      </a:pPr>
+                      <a:r>
+                        <a:rPr lang="en-US" sz="500" dirty="0">
+                          <a:solidFill>
+                            <a:srgbClr val="000000"/>
+                          </a:solidFill>
+                          <a:latin typeface="Calibri" pitchFamily="34" charset="0"/>
+                          <a:ea typeface="Calibri" pitchFamily="34" charset="-122"/>
+                          <a:cs typeface="Calibri" pitchFamily="34" charset="-120"/>
+                        </a:rPr>
+                        <a:t>0.63%</a:t>
+                      </a:r>
+                      <a:endParaRPr lang="en-US" sz="500" dirty="0">
+                        <a:latin typeface="Calibri" charset="0"/>
+                        <a:ea typeface="Calibri" charset="0"/>
+                        <a:cs typeface="Calibri" charset="0"/>
+                      </a:endParaRPr>
+                    </a:p>
+                  </a:txBody>
+                  <a:tcPr marL="91440" marR="91440" marT="45720" marB="45720">
+                    <a:lnL w="2540" cap="flat" cmpd="sng" algn="ctr">
+                      <a:solidFill>
+                        <a:srgbClr val="EEEEEE"/>
+                      </a:solidFill>
+                      <a:prstDash val="solid"/>
+                      <a:round/>
+                      <a:headEnd type="none" w="med" len="med"/>
+                      <a:tailEnd type="none" w="med" len="med"/>
+                    </a:lnL>
+                    <a:lnR w="2540" cap="flat" cmpd="sng" algn="ctr">
+                      <a:solidFill>
+                        <a:srgbClr val="EEEEEE"/>
+                      </a:solidFill>
+                      <a:prstDash val="solid"/>
+                      <a:round/>
+                      <a:headEnd type="none" w="med" len="med"/>
+                      <a:tailEnd type="none" w="med" len="med"/>
+                    </a:lnR>
+                    <a:lnT w="2540" cap="flat" cmpd="sng" algn="ctr">
+                      <a:solidFill>
+                        <a:srgbClr val="EEEEEE"/>
+                      </a:solidFill>
+                      <a:prstDash val="solid"/>
+                      <a:round/>
+                      <a:headEnd type="none" w="med" len="med"/>
+                      <a:tailEnd type="none" w="med" len="med"/>
+                    </a:lnT>
+                    <a:lnB w="2540" cap="flat" cmpd="sng" algn="ctr">
+                      <a:solidFill>
+                        <a:srgbClr val="EEEEEE"/>
+                      </a:solidFill>
+                      <a:prstDash val="solid"/>
+                      <a:round/>
+                      <a:headEnd type="none" w="med" len="med"/>
+                      <a:tailEnd type="none" w="med" len="med"/>
+                    </a:lnB>
+                  </a:tcPr>
+                </a:tc>
+                <a:tc>
+                  <a:txBody>
+                    <a:bodyPr/>
+                    <a:lstStyle/>
+                    <a:p>
+                      <a:pPr algn="ctr" indent="0" marL="0">
+                        <a:buNone/>
+                      </a:pPr>
+                      <a:r>
+                        <a:rPr lang="en-US" sz="500" dirty="0">
+                          <a:solidFill>
+                            <a:srgbClr val="000000"/>
+                          </a:solidFill>
+                          <a:latin typeface="Calibri" pitchFamily="34" charset="0"/>
+                          <a:ea typeface="Calibri" pitchFamily="34" charset="-122"/>
+                          <a:cs typeface="Calibri" pitchFamily="34" charset="-120"/>
+                        </a:rPr>
+                        <a:t>0.66%</a:t>
+                      </a:r>
+                      <a:endParaRPr lang="en-US" sz="500" dirty="0">
+                        <a:latin typeface="Calibri" charset="0"/>
+                        <a:ea typeface="Calibri" charset="0"/>
+                        <a:cs typeface="Calibri" charset="0"/>
+                      </a:endParaRPr>
+                    </a:p>
+                  </a:txBody>
+                  <a:tcPr marL="91440" marR="91440" marT="45720" marB="45720">
+                    <a:lnL w="2540" cap="flat" cmpd="sng" algn="ctr">
+                      <a:solidFill>
+                        <a:srgbClr val="EEEEEE"/>
+                      </a:solidFill>
+                      <a:prstDash val="solid"/>
+                      <a:round/>
+                      <a:headEnd type="none" w="med" len="med"/>
+                      <a:tailEnd type="none" w="med" len="med"/>
+                    </a:lnL>
+                    <a:lnR w="2540" cap="flat" cmpd="sng" algn="ctr">
+                      <a:solidFill>
+                        <a:srgbClr val="EEEEEE"/>
+                      </a:solidFill>
+                      <a:prstDash val="solid"/>
+                      <a:round/>
+                      <a:headEnd type="none" w="med" len="med"/>
+                      <a:tailEnd type="none" w="med" len="med"/>
+                    </a:lnR>
+                    <a:lnT w="2540" cap="flat" cmpd="sng" algn="ctr">
+                      <a:solidFill>
+                        <a:srgbClr val="EEEEEE"/>
+                      </a:solidFill>
+                      <a:prstDash val="solid"/>
+                      <a:round/>
+                      <a:headEnd type="none" w="med" len="med"/>
+                      <a:tailEnd type="none" w="med" len="med"/>
+                    </a:lnT>
+                    <a:lnB w="2540" cap="flat" cmpd="sng" algn="ctr">
+                      <a:solidFill>
+                        <a:srgbClr val="EEEEEE"/>
+                      </a:solidFill>
+                      <a:prstDash val="solid"/>
+                      <a:round/>
+                      <a:headEnd type="none" w="med" len="med"/>
+                      <a:tailEnd type="none" w="med" len="med"/>
+                    </a:lnB>
+                  </a:tcPr>
+                </a:tc>
+                <a:tc>
+                  <a:txBody>
+                    <a:bodyPr/>
+                    <a:lstStyle/>
+                    <a:p>
+                      <a:pPr algn="ctr" indent="0" marL="0">
+                        <a:buNone/>
+                      </a:pPr>
+                      <a:r>
+                        <a:rPr lang="en-US" sz="500" dirty="0">
+                          <a:solidFill>
+                            <a:srgbClr val="000000"/>
+                          </a:solidFill>
+                          <a:latin typeface="Calibri" pitchFamily="34" charset="0"/>
+                          <a:ea typeface="Calibri" pitchFamily="34" charset="-122"/>
+                          <a:cs typeface="Calibri" pitchFamily="34" charset="-120"/>
+                        </a:rPr>
+                        <a:t>0.55%</a:t>
+                      </a:r>
+                      <a:endParaRPr lang="en-US" sz="500" dirty="0">
+                        <a:latin typeface="Calibri" charset="0"/>
+                        <a:ea typeface="Calibri" charset="0"/>
+                        <a:cs typeface="Calibri" charset="0"/>
+                      </a:endParaRPr>
+                    </a:p>
+                  </a:txBody>
+                  <a:tcPr marL="91440" marR="91440" marT="45720" marB="45720">
+                    <a:lnL w="2540" cap="flat" cmpd="sng" algn="ctr">
+                      <a:solidFill>
+                        <a:srgbClr val="EEEEEE"/>
+                      </a:solidFill>
+                      <a:prstDash val="solid"/>
+                      <a:round/>
+                      <a:headEnd type="none" w="med" len="med"/>
+                      <a:tailEnd type="none" w="med" len="med"/>
+                    </a:lnL>
+                    <a:lnR w="2540" cap="flat" cmpd="sng" algn="ctr">
+                      <a:solidFill>
+                        <a:srgbClr val="EEEEEE"/>
+                      </a:solidFill>
+                      <a:prstDash val="solid"/>
+                      <a:round/>
+                      <a:headEnd type="none" w="med" len="med"/>
+                      <a:tailEnd type="none" w="med" len="med"/>
+                    </a:lnR>
+                    <a:lnT w="2540" cap="flat" cmpd="sng" algn="ctr">
+                      <a:solidFill>
+                        <a:srgbClr val="EEEEEE"/>
+                      </a:solidFill>
+                      <a:prstDash val="solid"/>
+                      <a:round/>
+                      <a:headEnd type="none" w="med" len="med"/>
+                      <a:tailEnd type="none" w="med" len="med"/>
+                    </a:lnT>
+                    <a:lnB w="2540" cap="flat" cmpd="sng" algn="ctr">
+                      <a:solidFill>
+                        <a:srgbClr val="EEEEEE"/>
+                      </a:solidFill>
+                      <a:prstDash val="solid"/>
+                      <a:round/>
+                      <a:headEnd type="none" w="med" len="med"/>
+                      <a:tailEnd type="none" w="med" len="med"/>
+                    </a:lnB>
+                  </a:tcPr>
+                </a:tc>
+                <a:tc>
+                  <a:txBody>
+                    <a:bodyPr/>
+                    <a:lstStyle/>
+                    <a:p>
+                      <a:pPr algn="ctr" indent="0" marL="0">
+                        <a:buNone/>
+                      </a:pPr>
+                      <a:r>
+                        <a:rPr lang="en-US" sz="500" dirty="0">
+                          <a:solidFill>
+                            <a:srgbClr val="000000"/>
+                          </a:solidFill>
+                          <a:latin typeface="Calibri" pitchFamily="34" charset="0"/>
+                          <a:ea typeface="Calibri" pitchFamily="34" charset="-122"/>
+                          <a:cs typeface="Calibri" pitchFamily="34" charset="-120"/>
+                        </a:rPr>
+                        <a:t>0.47%</a:t>
+                      </a:r>
+                      <a:endParaRPr lang="en-US" sz="500" dirty="0">
+                        <a:latin typeface="Calibri" charset="0"/>
+                        <a:ea typeface="Calibri" charset="0"/>
+                        <a:cs typeface="Calibri" charset="0"/>
+                      </a:endParaRPr>
+                    </a:p>
+                  </a:txBody>
+                  <a:tcPr marL="91440" marR="91440" marT="45720" marB="45720">
+                    <a:lnL w="2540" cap="flat" cmpd="sng" algn="ctr">
+                      <a:solidFill>
+                        <a:srgbClr val="EEEEEE"/>
+                      </a:solidFill>
+                      <a:prstDash val="solid"/>
+                      <a:round/>
+                      <a:headEnd type="none" w="med" len="med"/>
+                      <a:tailEnd type="none" w="med" len="med"/>
+                    </a:lnL>
+                    <a:lnR w="2540" cap="flat" cmpd="sng" algn="ctr">
+                      <a:solidFill>
+                        <a:srgbClr val="EEEEEE"/>
+                      </a:solidFill>
+                      <a:prstDash val="solid"/>
+                      <a:round/>
+                      <a:headEnd type="none" w="med" len="med"/>
+                      <a:tailEnd type="none" w="med" len="med"/>
+                    </a:lnR>
+                    <a:lnT w="2540" cap="flat" cmpd="sng" algn="ctr">
+                      <a:solidFill>
+                        <a:srgbClr val="EEEEEE"/>
+                      </a:solidFill>
+                      <a:prstDash val="solid"/>
+                      <a:round/>
+                      <a:headEnd type="none" w="med" len="med"/>
+                      <a:tailEnd type="none" w="med" len="med"/>
+                    </a:lnT>
+                    <a:lnB w="2540" cap="flat" cmpd="sng" algn="ctr">
+                      <a:solidFill>
+                        <a:srgbClr val="EEEEEE"/>
+                      </a:solidFill>
+                      <a:prstDash val="solid"/>
+                      <a:round/>
+                      <a:headEnd type="none" w="med" len="med"/>
+                      <a:tailEnd type="none" w="med" len="med"/>
+                    </a:lnB>
+                  </a:tcPr>
+                </a:tc>
+                <a:tc>
+                  <a:txBody>
+                    <a:bodyPr/>
+                    <a:lstStyle/>
+                    <a:p>
+                      <a:pPr algn="ctr" indent="0" marL="0">
+                        <a:buNone/>
+                      </a:pPr>
+                      <a:r>
+                        <a:rPr lang="en-US" sz="500" dirty="0">
+                          <a:solidFill>
+                            <a:srgbClr val="000000"/>
+                          </a:solidFill>
+                          <a:latin typeface="Calibri" pitchFamily="34" charset="0"/>
+                          <a:ea typeface="Calibri" pitchFamily="34" charset="-122"/>
+                          <a:cs typeface="Calibri" pitchFamily="34" charset="-120"/>
+                        </a:rPr>
+                        <a:t>0.40%</a:t>
+                      </a:r>
+                      <a:endParaRPr lang="en-US" sz="500" dirty="0">
+                        <a:latin typeface="Calibri" charset="0"/>
+                        <a:ea typeface="Calibri" charset="0"/>
+                        <a:cs typeface="Calibri" charset="0"/>
+                      </a:endParaRPr>
+                    </a:p>
+                  </a:txBody>
+                  <a:tcPr marL="91440" marR="91440" marT="45720" marB="45720">
+                    <a:lnL w="2540" cap="flat" cmpd="sng" algn="ctr">
+                      <a:solidFill>
+                        <a:srgbClr val="EEEEEE"/>
+                      </a:solidFill>
+                      <a:prstDash val="solid"/>
+                      <a:round/>
+                      <a:headEnd type="none" w="med" len="med"/>
+                      <a:tailEnd type="none" w="med" len="med"/>
+                    </a:lnL>
+                    <a:lnR w="2540" cap="flat" cmpd="sng" algn="ctr">
+                      <a:solidFill>
+                        <a:srgbClr val="EEEEEE"/>
+                      </a:solidFill>
+                      <a:prstDash val="solid"/>
+                      <a:round/>
+                      <a:headEnd type="none" w="med" len="med"/>
+                      <a:tailEnd type="none" w="med" len="med"/>
+                    </a:lnR>
+                    <a:lnT w="2540" cap="flat" cmpd="sng" algn="ctr">
+                      <a:solidFill>
+                        <a:srgbClr val="EEEEEE"/>
+                      </a:solidFill>
+                      <a:prstDash val="solid"/>
+                      <a:round/>
+                      <a:headEnd type="none" w="med" len="med"/>
+                      <a:tailEnd type="none" w="med" len="med"/>
+                    </a:lnT>
+                    <a:lnB w="2540" cap="flat" cmpd="sng" algn="ctr">
+                      <a:solidFill>
+                        <a:srgbClr val="EEEEEE"/>
+                      </a:solidFill>
+                      <a:prstDash val="solid"/>
+                      <a:round/>
+                      <a:headEnd type="none" w="med" len="med"/>
+                      <a:tailEnd type="none" w="med" len="med"/>
+                    </a:lnB>
+                  </a:tcPr>
+                </a:tc>
+                <a:tc>
+                  <a:txBody>
+                    <a:bodyPr/>
+                    <a:lstStyle/>
+                    <a:p>
+                      <a:pPr algn="ctr" indent="0" marL="0">
+                        <a:buNone/>
+                      </a:pPr>
+                      <a:r>
+                        <a:rPr lang="en-US" sz="500" dirty="0">
+                          <a:solidFill>
+                            <a:srgbClr val="000000"/>
+                          </a:solidFill>
+                          <a:latin typeface="Calibri" pitchFamily="34" charset="0"/>
+                          <a:ea typeface="Calibri" pitchFamily="34" charset="-122"/>
+                          <a:cs typeface="Calibri" pitchFamily="34" charset="-120"/>
+                        </a:rPr>
+                        <a:t>0.47%</a:t>
+                      </a:r>
+                      <a:endParaRPr lang="en-US" sz="500" dirty="0">
+                        <a:latin typeface="Calibri" charset="0"/>
+                        <a:ea typeface="Calibri" charset="0"/>
+                        <a:cs typeface="Calibri" charset="0"/>
+                      </a:endParaRPr>
+                    </a:p>
+                  </a:txBody>
+                  <a:tcPr marL="91440" marR="91440" marT="45720" marB="45720">
+                    <a:lnL w="2540" cap="flat" cmpd="sng" algn="ctr">
+                      <a:solidFill>
+                        <a:srgbClr val="EEEEEE"/>
+                      </a:solidFill>
+                      <a:prstDash val="solid"/>
+                      <a:round/>
+                      <a:headEnd type="none" w="med" len="med"/>
+                      <a:tailEnd type="none" w="med" len="med"/>
+                    </a:lnL>
+                    <a:lnR w="2540" cap="flat" cmpd="sng" algn="ctr">
+                      <a:solidFill>
+                        <a:srgbClr val="EEEEEE"/>
+                      </a:solidFill>
+                      <a:prstDash val="solid"/>
+                      <a:round/>
+                      <a:headEnd type="none" w="med" len="med"/>
+                      <a:tailEnd type="none" w="med" len="med"/>
+                    </a:lnR>
+                    <a:lnT w="2540" cap="flat" cmpd="sng" algn="ctr">
+                      <a:solidFill>
+                        <a:srgbClr val="EEEEEE"/>
+                      </a:solidFill>
+                      <a:prstDash val="solid"/>
+                      <a:round/>
+                      <a:headEnd type="none" w="med" len="med"/>
+                      <a:tailEnd type="none" w="med" len="med"/>
+                    </a:lnT>
+                    <a:lnB w="2540" cap="flat" cmpd="sng" algn="ctr">
+                      <a:solidFill>
+                        <a:srgbClr val="EEEEEE"/>
+                      </a:solidFill>
+                      <a:prstDash val="solid"/>
+                      <a:round/>
+                      <a:headEnd type="none" w="med" len="med"/>
+                      <a:tailEnd type="none" w="med" len="med"/>
+                    </a:lnB>
+                  </a:tcPr>
+                </a:tc>
+                <a:tc>
+                  <a:txBody>
+                    <a:bodyPr/>
+                    <a:lstStyle/>
+                    <a:p>
+                      <a:pPr algn="ctr" indent="0" marL="0">
+                        <a:buNone/>
+                      </a:pPr>
+                      <a:r>
+                        <a:rPr lang="en-US" sz="500" dirty="0">
+                          <a:solidFill>
+                            <a:srgbClr val="000000"/>
+                          </a:solidFill>
+                          <a:latin typeface="Calibri" pitchFamily="34" charset="0"/>
+                          <a:ea typeface="Calibri" pitchFamily="34" charset="-122"/>
+                          <a:cs typeface="Calibri" pitchFamily="34" charset="-120"/>
+                        </a:rPr>
+                        <a:t>0.55%</a:t>
+                      </a:r>
+                      <a:endParaRPr lang="en-US" sz="500" dirty="0">
+                        <a:latin typeface="Calibri" charset="0"/>
+                        <a:ea typeface="Calibri" charset="0"/>
+                        <a:cs typeface="Calibri" charset="0"/>
+                      </a:endParaRPr>
+                    </a:p>
+                  </a:txBody>
+                  <a:tcPr marL="91440" marR="91440" marT="45720" marB="45720">
+                    <a:lnL w="2540" cap="flat" cmpd="sng" algn="ctr">
+                      <a:solidFill>
+                        <a:srgbClr val="EEEEEE"/>
+                      </a:solidFill>
+                      <a:prstDash val="solid"/>
+                      <a:round/>
+                      <a:headEnd type="none" w="med" len="med"/>
+                      <a:tailEnd type="none" w="med" len="med"/>
+                    </a:lnL>
+                    <a:lnR w="2540" cap="flat" cmpd="sng" algn="ctr">
+                      <a:solidFill>
+                        <a:srgbClr val="EEEEEE"/>
+                      </a:solidFill>
+                      <a:prstDash val="solid"/>
+                      <a:round/>
+                      <a:headEnd type="none" w="med" len="med"/>
+                      <a:tailEnd type="none" w="med" len="med"/>
+                    </a:lnR>
+                    <a:lnT w="2540" cap="flat" cmpd="sng" algn="ctr">
+                      <a:solidFill>
+                        <a:srgbClr val="EEEEEE"/>
+                      </a:solidFill>
+                      <a:prstDash val="solid"/>
+                      <a:round/>
+                      <a:headEnd type="none" w="med" len="med"/>
+                      <a:tailEnd type="none" w="med" len="med"/>
+                    </a:lnT>
+                    <a:lnB w="2540" cap="flat" cmpd="sng" algn="ctr">
+                      <a:solidFill>
+                        <a:srgbClr val="EEEEEE"/>
+                      </a:solidFill>
+                      <a:prstDash val="solid"/>
+                      <a:round/>
+                      <a:headEnd type="none" w="med" len="med"/>
+                      <a:tailEnd type="none" w="med" len="med"/>
+                    </a:lnB>
+                  </a:tcPr>
+                </a:tc>
+                <a:tc>
+                  <a:txBody>
+                    <a:bodyPr/>
+                    <a:lstStyle/>
+                    <a:p>
+                      <a:pPr algn="ctr" indent="0" marL="0">
+                        <a:buNone/>
+                      </a:pPr>
+                      <a:r>
+                        <a:rPr lang="en-US" sz="500" dirty="0">
+                          <a:solidFill>
+                            <a:srgbClr val="000000"/>
+                          </a:solidFill>
+                          <a:latin typeface="Calibri" pitchFamily="34" charset="0"/>
+                          <a:ea typeface="Calibri" pitchFamily="34" charset="-122"/>
+                          <a:cs typeface="Calibri" pitchFamily="34" charset="-120"/>
+                        </a:rPr>
+                        <a:t>0.45%</a:t>
+                      </a:r>
+                      <a:endParaRPr lang="en-US" sz="500" dirty="0">
+                        <a:latin typeface="Calibri" charset="0"/>
+                        <a:ea typeface="Calibri" charset="0"/>
+                        <a:cs typeface="Calibri" charset="0"/>
+                      </a:endParaRPr>
+                    </a:p>
+                  </a:txBody>
+                  <a:tcPr marL="91440" marR="91440" marT="45720" marB="45720">
+                    <a:lnL w="2540" cap="flat" cmpd="sng" algn="ctr">
+                      <a:solidFill>
+                        <a:srgbClr val="EEEEEE"/>
+                      </a:solidFill>
+                      <a:prstDash val="solid"/>
+                      <a:round/>
+                      <a:headEnd type="none" w="med" len="med"/>
+                      <a:tailEnd type="none" w="med" len="med"/>
+                    </a:lnL>
+                    <a:lnR w="2540" cap="flat" cmpd="sng" algn="ctr">
+                      <a:solidFill>
+                        <a:srgbClr val="EEEEEE"/>
+                      </a:solidFill>
+                      <a:prstDash val="solid"/>
+                      <a:round/>
+                      <a:headEnd type="none" w="med" len="med"/>
+                      <a:tailEnd type="none" w="med" len="med"/>
+                    </a:lnR>
+                    <a:lnT w="2540" cap="flat" cmpd="sng" algn="ctr">
+                      <a:solidFill>
+                        <a:srgbClr val="EEEEEE"/>
+                      </a:solidFill>
+                      <a:prstDash val="solid"/>
+                      <a:round/>
+                      <a:headEnd type="none" w="med" len="med"/>
+                      <a:tailEnd type="none" w="med" len="med"/>
+                    </a:lnT>
+                    <a:lnB w="2540" cap="flat" cmpd="sng" algn="ctr">
+                      <a:solidFill>
+                        <a:srgbClr val="EEEEEE"/>
+                      </a:solidFill>
+                      <a:prstDash val="solid"/>
+                      <a:round/>
+                      <a:headEnd type="none" w="med" len="med"/>
+                      <a:tailEnd type="none" w="med" len="med"/>
+                    </a:lnB>
+                  </a:tcPr>
+                </a:tc>
+                <a:tc>
+                  <a:txBody>
+                    <a:bodyPr/>
+                    <a:lstStyle/>
+                    <a:p>
+                      <a:pPr algn="ctr" indent="0" marL="0">
+                        <a:buNone/>
+                      </a:pPr>
+                      <a:r>
+                        <a:rPr lang="en-US" sz="500" dirty="0">
+                          <a:solidFill>
+                            <a:srgbClr val="000000"/>
+                          </a:solidFill>
+                          <a:latin typeface="Calibri" pitchFamily="34" charset="0"/>
+                          <a:ea typeface="Calibri" pitchFamily="34" charset="-122"/>
+                          <a:cs typeface="Calibri" pitchFamily="34" charset="-120"/>
+                        </a:rPr>
+                        <a:t>0.28%</a:t>
+                      </a:r>
+                      <a:endParaRPr lang="en-US" sz="500" dirty="0">
+                        <a:latin typeface="Calibri" charset="0"/>
+                        <a:ea typeface="Calibri" charset="0"/>
+                        <a:cs typeface="Calibri" charset="0"/>
+                      </a:endParaRPr>
+                    </a:p>
+                  </a:txBody>
+                  <a:tcPr marL="91440" marR="91440" marT="45720" marB="45720">
+                    <a:lnL w="2540" cap="flat" cmpd="sng" algn="ctr">
+                      <a:solidFill>
+                        <a:srgbClr val="EEEEEE"/>
+                      </a:solidFill>
+                      <a:prstDash val="solid"/>
+                      <a:round/>
+                      <a:headEnd type="none" w="med" len="med"/>
+                      <a:tailEnd type="none" w="med" len="med"/>
+                    </a:lnL>
+                    <a:lnR w="2540" cap="flat" cmpd="sng" algn="ctr">
+                      <a:solidFill>
+                        <a:srgbClr val="EEEEEE"/>
+                      </a:solidFill>
+                      <a:prstDash val="solid"/>
+                      <a:round/>
+                      <a:headEnd type="none" w="med" len="med"/>
+                      <a:tailEnd type="none" w="med" len="med"/>
+                    </a:lnR>
+                    <a:lnT w="2540" cap="flat" cmpd="sng" algn="ctr">
+                      <a:solidFill>
+                        <a:srgbClr val="EEEEEE"/>
+                      </a:solidFill>
+                      <a:prstDash val="solid"/>
+                      <a:round/>
+                      <a:headEnd type="none" w="med" len="med"/>
+                      <a:tailEnd type="none" w="med" len="med"/>
+                    </a:lnT>
+                    <a:lnB w="2540" cap="flat" cmpd="sng" algn="ctr">
+                      <a:solidFill>
+                        <a:srgbClr val="EEEEEE"/>
+                      </a:solidFill>
+                      <a:prstDash val="solid"/>
+                      <a:round/>
+                      <a:headEnd type="none" w="med" len="med"/>
+                      <a:tailEnd type="none" w="med" len="med"/>
+                    </a:lnB>
+                  </a:tcPr>
+                </a:tc>
+                <a:tc>
+                  <a:txBody>
+                    <a:bodyPr/>
+                    <a:lstStyle/>
+                    <a:p>
+                      <a:pPr algn="ctr" indent="0" marL="0">
+                        <a:buNone/>
+                      </a:pPr>
+                      <a:r>
+                        <a:rPr lang="en-US" sz="500" dirty="0">
+                          <a:solidFill>
+                            <a:srgbClr val="000000"/>
+                          </a:solidFill>
+                          <a:latin typeface="Calibri" pitchFamily="34" charset="0"/>
+                          <a:ea typeface="Calibri" pitchFamily="34" charset="-122"/>
+                          <a:cs typeface="Calibri" pitchFamily="34" charset="-120"/>
+                        </a:rPr>
+                        <a:t>0.42%</a:t>
+                      </a:r>
+                      <a:endParaRPr lang="en-US" sz="500" dirty="0">
+                        <a:latin typeface="Calibri" charset="0"/>
+                        <a:ea typeface="Calibri" charset="0"/>
+                        <a:cs typeface="Calibri" charset="0"/>
+                      </a:endParaRPr>
+                    </a:p>
+                  </a:txBody>
+                  <a:tcPr marL="91440" marR="91440" marT="45720" marB="45720">
+                    <a:lnL w="2540" cap="flat" cmpd="sng" algn="ctr">
+                      <a:solidFill>
+                        <a:srgbClr val="EEEEEE"/>
+                      </a:solidFill>
+                      <a:prstDash val="solid"/>
+                      <a:round/>
+                      <a:headEnd type="none" w="med" len="med"/>
+                      <a:tailEnd type="none" w="med" len="med"/>
+                    </a:lnL>
+                    <a:lnR w="2540" cap="flat" cmpd="sng" algn="ctr">
+                      <a:solidFill>
+                        <a:srgbClr val="EEEEEE"/>
+                      </a:solidFill>
+                      <a:prstDash val="solid"/>
+                      <a:round/>
+                      <a:headEnd type="none" w="med" len="med"/>
+                      <a:tailEnd type="none" w="med" len="med"/>
+                    </a:lnR>
+                    <a:lnT w="2540" cap="flat" cmpd="sng" algn="ctr">
+                      <a:solidFill>
+                        <a:srgbClr val="EEEEEE"/>
+                      </a:solidFill>
+                      <a:prstDash val="solid"/>
+                      <a:round/>
+                      <a:headEnd type="none" w="med" len="med"/>
+                      <a:tailEnd type="none" w="med" len="med"/>
+                    </a:lnT>
+                    <a:lnB w="2540" cap="flat" cmpd="sng" algn="ctr">
+                      <a:solidFill>
+                        <a:srgbClr val="EEEEEE"/>
+                      </a:solidFill>
+                      <a:prstDash val="solid"/>
+                      <a:round/>
+                      <a:headEnd type="none" w="med" len="med"/>
+                      <a:tailEnd type="none" w="med" len="med"/>
+                    </a:lnB>
+                  </a:tcPr>
+                </a:tc>
+                <a:tc>
+                  <a:txBody>
+                    <a:bodyPr/>
+                    <a:lstStyle/>
+                    <a:p>
+                      <a:pPr algn="ctr" indent="0" marL="0">
+                        <a:buNone/>
+                      </a:pPr>
+                      <a:r>
+                        <a:rPr lang="en-US" sz="500" b="1" dirty="0">
+                          <a:solidFill>
+                            <a:srgbClr val="000000"/>
+                          </a:solidFill>
+                          <a:latin typeface="Calibri" pitchFamily="34" charset="0"/>
+                          <a:ea typeface="Calibri" pitchFamily="34" charset="-122"/>
+                          <a:cs typeface="Calibri" pitchFamily="34" charset="-120"/>
+                        </a:rPr>
+                        <a:t>6.32%</a:t>
+                      </a:r>
+                      <a:endParaRPr lang="en-US" sz="500" dirty="0">
+                        <a:latin typeface="Calibri" charset="0"/>
+                        <a:ea typeface="Calibri" charset="0"/>
+                        <a:cs typeface="Calibri" charset="0"/>
+                      </a:endParaRPr>
+                    </a:p>
+                  </a:txBody>
+                  <a:tcPr marL="91440" marR="91440" marT="45720" marB="45720">
+                    <a:lnL w="2540" cap="flat" cmpd="sng" algn="ctr">
+                      <a:solidFill>
+                        <a:srgbClr val="EEEEEE"/>
+                      </a:solidFill>
+                      <a:prstDash val="solid"/>
+                      <a:round/>
+                      <a:headEnd type="none" w="med" len="med"/>
+                      <a:tailEnd type="none" w="med" len="med"/>
+                    </a:lnL>
+                    <a:lnR w="2540" cap="flat" cmpd="sng" algn="ctr">
+                      <a:solidFill>
+                        <a:srgbClr val="EEEEEE"/>
+                      </a:solidFill>
+                      <a:prstDash val="solid"/>
+                      <a:round/>
+                      <a:headEnd type="none" w="med" len="med"/>
+                      <a:tailEnd type="none" w="med" len="med"/>
+                    </a:lnR>
+                    <a:lnT w="2540" cap="flat" cmpd="sng" algn="ctr">
+                      <a:solidFill>
+                        <a:srgbClr val="EEEEEE"/>
+                      </a:solidFill>
+                      <a:prstDash val="solid"/>
+                      <a:round/>
+                      <a:headEnd type="none" w="med" len="med"/>
+                      <a:tailEnd type="none" w="med" len="med"/>
+                    </a:lnT>
+                    <a:lnB w="2540" cap="flat" cmpd="sng" algn="ctr">
+                      <a:solidFill>
+                        <a:srgbClr val="EEEEEE"/>
+                      </a:solidFill>
+                      <a:prstDash val="solid"/>
+                      <a:round/>
+                      <a:headEnd type="none" w="med" len="med"/>
+                      <a:tailEnd type="none" w="med" len="med"/>
+                    </a:lnB>
+                  </a:tcPr>
+                </a:tc>
+              </a:tr>
+              <a:tr h="123444">
+                <a:tc>
+                  <a:txBody>
+                    <a:bodyPr/>
+                    <a:lstStyle/>
+                    <a:p>
+                      <a:pPr algn="l" indent="0" marL="0">
+                        <a:buNone/>
+                      </a:pPr>
+                      <a:r>
+                        <a:rPr lang="en-US" sz="500" b="1" dirty="0">
+                          <a:solidFill>
+                            <a:srgbClr val="000000"/>
+                          </a:solidFill>
+                          <a:latin typeface="Calibri" pitchFamily="34" charset="0"/>
+                          <a:ea typeface="Calibri" pitchFamily="34" charset="-122"/>
+                          <a:cs typeface="Calibri" pitchFamily="34" charset="-120"/>
+                        </a:rPr>
+                        <a:t>2025</a:t>
+                      </a:r>
+                      <a:endParaRPr lang="en-US" sz="500" dirty="0">
+                        <a:latin typeface="Calibri" charset="0"/>
+                        <a:ea typeface="Calibri" charset="0"/>
+                        <a:cs typeface="Calibri" charset="0"/>
+                      </a:endParaRPr>
+                    </a:p>
+                  </a:txBody>
+                  <a:tcPr marL="91440" marR="91440" marT="45720" marB="45720">
+                    <a:lnL w="2540" cap="flat" cmpd="sng" algn="ctr">
+                      <a:solidFill>
+                        <a:srgbClr val="EEEEEE"/>
+                      </a:solidFill>
+                      <a:prstDash val="solid"/>
+                      <a:round/>
+                      <a:headEnd type="none" w="med" len="med"/>
+                      <a:tailEnd type="none" w="med" len="med"/>
+                    </a:lnL>
+                    <a:lnR w="2540" cap="flat" cmpd="sng" algn="ctr">
+                      <a:solidFill>
+                        <a:srgbClr val="EEEEEE"/>
+                      </a:solidFill>
+                      <a:prstDash val="solid"/>
+                      <a:round/>
+                      <a:headEnd type="none" w="med" len="med"/>
+                      <a:tailEnd type="none" w="med" len="med"/>
+                    </a:lnR>
+                    <a:lnT w="2540" cap="flat" cmpd="sng" algn="ctr">
+                      <a:solidFill>
+                        <a:srgbClr val="EEEEEE"/>
+                      </a:solidFill>
+                      <a:prstDash val="solid"/>
+                      <a:round/>
+                      <a:headEnd type="none" w="med" len="med"/>
+                      <a:tailEnd type="none" w="med" len="med"/>
+                    </a:lnT>
+                    <a:lnB w="2540" cap="flat" cmpd="sng" algn="ctr">
+                      <a:solidFill>
+                        <a:srgbClr val="EEEEEE"/>
+                      </a:solidFill>
+                      <a:prstDash val="solid"/>
+                      <a:round/>
+                      <a:headEnd type="none" w="med" len="med"/>
+                      <a:tailEnd type="none" w="med" len="med"/>
+                    </a:lnB>
+                  </a:tcPr>
+                </a:tc>
+                <a:tc>
+                  <a:txBody>
+                    <a:bodyPr/>
+                    <a:lstStyle/>
+                    <a:p>
+                      <a:pPr algn="l" indent="0" marL="0">
+                        <a:buNone/>
+                      </a:pPr>
+                      <a:r>
+                        <a:rPr lang="en-US" sz="500" dirty="0">
+                          <a:solidFill>
+                            <a:srgbClr val="777777"/>
+                          </a:solidFill>
+                          <a:latin typeface="Calibri" pitchFamily="34" charset="0"/>
+                          <a:ea typeface="Calibri" pitchFamily="34" charset="-122"/>
+                          <a:cs typeface="Calibri" pitchFamily="34" charset="-120"/>
+                        </a:rPr>
+                        <a:t>ICP</a:t>
+                      </a:r>
+                      <a:endParaRPr lang="en-US" sz="500" dirty="0">
+                        <a:latin typeface="Calibri" charset="0"/>
+                        <a:ea typeface="Calibri" charset="0"/>
+                        <a:cs typeface="Calibri" charset="0"/>
+                      </a:endParaRPr>
+                    </a:p>
+                  </a:txBody>
+                  <a:tcPr marL="91440" marR="91440" marT="45720" marB="45720">
+                    <a:lnL w="2540" cap="flat" cmpd="sng" algn="ctr">
+                      <a:solidFill>
+                        <a:srgbClr val="EEEEEE"/>
+                      </a:solidFill>
+                      <a:prstDash val="solid"/>
+                      <a:round/>
+                      <a:headEnd type="none" w="med" len="med"/>
+                      <a:tailEnd type="none" w="med" len="med"/>
+                    </a:lnL>
+                    <a:lnR w="2540" cap="flat" cmpd="sng" algn="ctr">
+                      <a:solidFill>
+                        <a:srgbClr val="EEEEEE"/>
+                      </a:solidFill>
+                      <a:prstDash val="solid"/>
+                      <a:round/>
+                      <a:headEnd type="none" w="med" len="med"/>
+                      <a:tailEnd type="none" w="med" len="med"/>
+                    </a:lnR>
+                    <a:lnT w="2540" cap="flat" cmpd="sng" algn="ctr">
+                      <a:solidFill>
+                        <a:srgbClr val="EEEEEE"/>
+                      </a:solidFill>
+                      <a:prstDash val="solid"/>
+                      <a:round/>
+                      <a:headEnd type="none" w="med" len="med"/>
+                      <a:tailEnd type="none" w="med" len="med"/>
+                    </a:lnT>
+                    <a:lnB w="2540" cap="flat" cmpd="sng" algn="ctr">
+                      <a:solidFill>
+                        <a:srgbClr val="EEEEEE"/>
+                      </a:solidFill>
+                      <a:prstDash val="solid"/>
+                      <a:round/>
+                      <a:headEnd type="none" w="med" len="med"/>
+                      <a:tailEnd type="none" w="med" len="med"/>
+                    </a:lnB>
+                  </a:tcPr>
+                </a:tc>
+                <a:tc>
+                  <a:txBody>
+                    <a:bodyPr/>
+                    <a:lstStyle/>
+                    <a:p>
+                      <a:pPr algn="ctr" indent="0" marL="0">
+                        <a:buNone/>
+                      </a:pPr>
+                      <a:r>
+                        <a:rPr lang="en-US" sz="500" dirty="0">
+                          <a:solidFill>
+                            <a:srgbClr val="777777"/>
+                          </a:solidFill>
+                          <a:latin typeface="Calibri" pitchFamily="34" charset="0"/>
+                          <a:ea typeface="Calibri" pitchFamily="34" charset="-122"/>
+                          <a:cs typeface="Calibri" pitchFamily="34" charset="-120"/>
+                        </a:rPr>
+                        <a:t>0.42%</a:t>
+                      </a:r>
+                      <a:endParaRPr lang="en-US" sz="500" dirty="0">
+                        <a:latin typeface="Calibri" charset="0"/>
+                        <a:ea typeface="Calibri" charset="0"/>
+                        <a:cs typeface="Calibri" charset="0"/>
+                      </a:endParaRPr>
+                    </a:p>
+                  </a:txBody>
+                  <a:tcPr marL="91440" marR="91440" marT="45720" marB="45720">
+                    <a:lnL w="2540" cap="flat" cmpd="sng" algn="ctr">
+                      <a:solidFill>
+                        <a:srgbClr val="EEEEEE"/>
+                      </a:solidFill>
+                      <a:prstDash val="solid"/>
+                      <a:round/>
+                      <a:headEnd type="none" w="med" len="med"/>
+                      <a:tailEnd type="none" w="med" len="med"/>
+                    </a:lnL>
+                    <a:lnR w="2540" cap="flat" cmpd="sng" algn="ctr">
+                      <a:solidFill>
+                        <a:srgbClr val="EEEEEE"/>
+                      </a:solidFill>
+                      <a:prstDash val="solid"/>
+                      <a:round/>
+                      <a:headEnd type="none" w="med" len="med"/>
+                      <a:tailEnd type="none" w="med" len="med"/>
+                    </a:lnR>
+                    <a:lnT w="2540" cap="flat" cmpd="sng" algn="ctr">
+                      <a:solidFill>
+                        <a:srgbClr val="EEEEEE"/>
+                      </a:solidFill>
+                      <a:prstDash val="solid"/>
+                      <a:round/>
+                      <a:headEnd type="none" w="med" len="med"/>
+                      <a:tailEnd type="none" w="med" len="med"/>
+                    </a:lnT>
+                    <a:lnB w="2540" cap="flat" cmpd="sng" algn="ctr">
+                      <a:solidFill>
+                        <a:srgbClr val="EEEEEE"/>
+                      </a:solidFill>
+                      <a:prstDash val="solid"/>
+                      <a:round/>
+                      <a:headEnd type="none" w="med" len="med"/>
+                      <a:tailEnd type="none" w="med" len="med"/>
+                    </a:lnB>
+                  </a:tcPr>
+                </a:tc>
+                <a:tc>
+                  <a:txBody>
+                    <a:bodyPr/>
+                    <a:lstStyle/>
+                    <a:p>
+                      <a:pPr algn="ctr" indent="0" marL="0">
+                        <a:buNone/>
+                      </a:pPr>
+                      <a:r>
+                        <a:rPr lang="en-US" sz="500" dirty="0">
+                          <a:solidFill>
+                            <a:srgbClr val="777777"/>
+                          </a:solidFill>
+                          <a:latin typeface="Calibri" pitchFamily="34" charset="0"/>
+                          <a:ea typeface="Calibri" pitchFamily="34" charset="-122"/>
+                          <a:cs typeface="Calibri" pitchFamily="34" charset="-120"/>
+                        </a:rPr>
+                        <a:t>0.42%</a:t>
+                      </a:r>
+                      <a:endParaRPr lang="en-US" sz="500" dirty="0">
+                        <a:latin typeface="Calibri" charset="0"/>
+                        <a:ea typeface="Calibri" charset="0"/>
+                        <a:cs typeface="Calibri" charset="0"/>
+                      </a:endParaRPr>
+                    </a:p>
+                  </a:txBody>
+                  <a:tcPr marL="91440" marR="91440" marT="45720" marB="45720">
+                    <a:lnL w="2540" cap="flat" cmpd="sng" algn="ctr">
+                      <a:solidFill>
+                        <a:srgbClr val="EEEEEE"/>
+                      </a:solidFill>
+                      <a:prstDash val="solid"/>
+                      <a:round/>
+                      <a:headEnd type="none" w="med" len="med"/>
+                      <a:tailEnd type="none" w="med" len="med"/>
+                    </a:lnL>
+                    <a:lnR w="2540" cap="flat" cmpd="sng" algn="ctr">
+                      <a:solidFill>
+                        <a:srgbClr val="EEEEEE"/>
+                      </a:solidFill>
+                      <a:prstDash val="solid"/>
+                      <a:round/>
+                      <a:headEnd type="none" w="med" len="med"/>
+                      <a:tailEnd type="none" w="med" len="med"/>
+                    </a:lnR>
+                    <a:lnT w="2540" cap="flat" cmpd="sng" algn="ctr">
+                      <a:solidFill>
+                        <a:srgbClr val="EEEEEE"/>
+                      </a:solidFill>
+                      <a:prstDash val="solid"/>
+                      <a:round/>
+                      <a:headEnd type="none" w="med" len="med"/>
+                      <a:tailEnd type="none" w="med" len="med"/>
+                    </a:lnT>
+                    <a:lnB w="2540" cap="flat" cmpd="sng" algn="ctr">
+                      <a:solidFill>
+                        <a:srgbClr val="EEEEEE"/>
+                      </a:solidFill>
+                      <a:prstDash val="solid"/>
+                      <a:round/>
+                      <a:headEnd type="none" w="med" len="med"/>
+                      <a:tailEnd type="none" w="med" len="med"/>
+                    </a:lnB>
+                  </a:tcPr>
+                </a:tc>
+                <a:tc>
+                  <a:txBody>
+                    <a:bodyPr/>
+                    <a:lstStyle/>
+                    <a:p>
+                      <a:pPr algn="ctr" indent="0" marL="0">
+                        <a:buNone/>
+                      </a:pPr>
+                      <a:r>
+                        <a:rPr lang="en-US" sz="500" dirty="0">
+                          <a:solidFill>
+                            <a:srgbClr val="777777"/>
+                          </a:solidFill>
+                          <a:latin typeface="Calibri" pitchFamily="34" charset="0"/>
+                          <a:ea typeface="Calibri" pitchFamily="34" charset="-122"/>
+                          <a:cs typeface="Calibri" pitchFamily="34" charset="-120"/>
+                        </a:rPr>
+                        <a:t>0.42%</a:t>
+                      </a:r>
+                      <a:endParaRPr lang="en-US" sz="500" dirty="0">
+                        <a:latin typeface="Calibri" charset="0"/>
+                        <a:ea typeface="Calibri" charset="0"/>
+                        <a:cs typeface="Calibri" charset="0"/>
+                      </a:endParaRPr>
+                    </a:p>
+                  </a:txBody>
+                  <a:tcPr marL="91440" marR="91440" marT="45720" marB="45720">
+                    <a:lnL w="2540" cap="flat" cmpd="sng" algn="ctr">
+                      <a:solidFill>
+                        <a:srgbClr val="EEEEEE"/>
+                      </a:solidFill>
+                      <a:prstDash val="solid"/>
+                      <a:round/>
+                      <a:headEnd type="none" w="med" len="med"/>
+                      <a:tailEnd type="none" w="med" len="med"/>
+                    </a:lnL>
+                    <a:lnR w="2540" cap="flat" cmpd="sng" algn="ctr">
+                      <a:solidFill>
+                        <a:srgbClr val="EEEEEE"/>
+                      </a:solidFill>
+                      <a:prstDash val="solid"/>
+                      <a:round/>
+                      <a:headEnd type="none" w="med" len="med"/>
+                      <a:tailEnd type="none" w="med" len="med"/>
+                    </a:lnR>
+                    <a:lnT w="2540" cap="flat" cmpd="sng" algn="ctr">
+                      <a:solidFill>
+                        <a:srgbClr val="EEEEEE"/>
+                      </a:solidFill>
+                      <a:prstDash val="solid"/>
+                      <a:round/>
+                      <a:headEnd type="none" w="med" len="med"/>
+                      <a:tailEnd type="none" w="med" len="med"/>
+                    </a:lnT>
+                    <a:lnB w="2540" cap="flat" cmpd="sng" algn="ctr">
+                      <a:solidFill>
+                        <a:srgbClr val="EEEEEE"/>
+                      </a:solidFill>
+                      <a:prstDash val="solid"/>
+                      <a:round/>
+                      <a:headEnd type="none" w="med" len="med"/>
+                      <a:tailEnd type="none" w="med" len="med"/>
+                    </a:lnB>
+                  </a:tcPr>
+                </a:tc>
+                <a:tc>
+                  <a:txBody>
+                    <a:bodyPr/>
+                    <a:lstStyle/>
+                    <a:p>
+                      <a:pPr algn="ctr" indent="0" marL="0">
+                        <a:buNone/>
+                      </a:pPr>
+                      <a:r>
+                        <a:rPr lang="en-US" sz="500" dirty="0">
+                          <a:solidFill>
+                            <a:srgbClr val="777777"/>
+                          </a:solidFill>
+                          <a:latin typeface="Calibri" pitchFamily="34" charset="0"/>
+                          <a:ea typeface="Calibri" pitchFamily="34" charset="-122"/>
+                          <a:cs typeface="Calibri" pitchFamily="34" charset="-120"/>
+                        </a:rPr>
+                        <a:t>0.42%</a:t>
+                      </a:r>
+                      <a:endParaRPr lang="en-US" sz="500" dirty="0">
+                        <a:latin typeface="Calibri" charset="0"/>
+                        <a:ea typeface="Calibri" charset="0"/>
+                        <a:cs typeface="Calibri" charset="0"/>
+                      </a:endParaRPr>
+                    </a:p>
+                  </a:txBody>
+                  <a:tcPr marL="91440" marR="91440" marT="45720" marB="45720">
+                    <a:lnL w="2540" cap="flat" cmpd="sng" algn="ctr">
+                      <a:solidFill>
+                        <a:srgbClr val="EEEEEE"/>
+                      </a:solidFill>
+                      <a:prstDash val="solid"/>
+                      <a:round/>
+                      <a:headEnd type="none" w="med" len="med"/>
+                      <a:tailEnd type="none" w="med" len="med"/>
+                    </a:lnL>
+                    <a:lnR w="2540" cap="flat" cmpd="sng" algn="ctr">
+                      <a:solidFill>
+                        <a:srgbClr val="EEEEEE"/>
+                      </a:solidFill>
+                      <a:prstDash val="solid"/>
+                      <a:round/>
+                      <a:headEnd type="none" w="med" len="med"/>
+                      <a:tailEnd type="none" w="med" len="med"/>
+                    </a:lnR>
+                    <a:lnT w="2540" cap="flat" cmpd="sng" algn="ctr">
+                      <a:solidFill>
+                        <a:srgbClr val="EEEEEE"/>
+                      </a:solidFill>
+                      <a:prstDash val="solid"/>
+                      <a:round/>
+                      <a:headEnd type="none" w="med" len="med"/>
+                      <a:tailEnd type="none" w="med" len="med"/>
+                    </a:lnT>
+                    <a:lnB w="2540" cap="flat" cmpd="sng" algn="ctr">
+                      <a:solidFill>
+                        <a:srgbClr val="EEEEEE"/>
+                      </a:solidFill>
+                      <a:prstDash val="solid"/>
+                      <a:round/>
+                      <a:headEnd type="none" w="med" len="med"/>
+                      <a:tailEnd type="none" w="med" len="med"/>
+                    </a:lnB>
+                  </a:tcPr>
+                </a:tc>
+                <a:tc>
+                  <a:txBody>
+                    <a:bodyPr/>
+                    <a:lstStyle/>
+                    <a:p>
+                      <a:pPr algn="ctr" indent="0" marL="0">
+                        <a:buNone/>
+                      </a:pPr>
+                      <a:r>
+                        <a:rPr lang="en-US" sz="500" dirty="0">
+                          <a:solidFill>
+                            <a:srgbClr val="777777"/>
+                          </a:solidFill>
+                          <a:latin typeface="Calibri" pitchFamily="34" charset="0"/>
+                          <a:ea typeface="Calibri" pitchFamily="34" charset="-122"/>
+                          <a:cs typeface="Calibri" pitchFamily="34" charset="-120"/>
+                        </a:rPr>
+                        <a:t>0.42%</a:t>
+                      </a:r>
+                      <a:endParaRPr lang="en-US" sz="500" dirty="0">
+                        <a:latin typeface="Calibri" charset="0"/>
+                        <a:ea typeface="Calibri" charset="0"/>
+                        <a:cs typeface="Calibri" charset="0"/>
+                      </a:endParaRPr>
+                    </a:p>
+                  </a:txBody>
+                  <a:tcPr marL="91440" marR="91440" marT="45720" marB="45720">
+                    <a:lnL w="2540" cap="flat" cmpd="sng" algn="ctr">
+                      <a:solidFill>
+                        <a:srgbClr val="EEEEEE"/>
+                      </a:solidFill>
+                      <a:prstDash val="solid"/>
+                      <a:round/>
+                      <a:headEnd type="none" w="med" len="med"/>
+                      <a:tailEnd type="none" w="med" len="med"/>
+                    </a:lnL>
+                    <a:lnR w="2540" cap="flat" cmpd="sng" algn="ctr">
+                      <a:solidFill>
+                        <a:srgbClr val="EEEEEE"/>
+                      </a:solidFill>
+                      <a:prstDash val="solid"/>
+                      <a:round/>
+                      <a:headEnd type="none" w="med" len="med"/>
+                      <a:tailEnd type="none" w="med" len="med"/>
+                    </a:lnR>
+                    <a:lnT w="2540" cap="flat" cmpd="sng" algn="ctr">
+                      <a:solidFill>
+                        <a:srgbClr val="EEEEEE"/>
+                      </a:solidFill>
+                      <a:prstDash val="solid"/>
+                      <a:round/>
+                      <a:headEnd type="none" w="med" len="med"/>
+                      <a:tailEnd type="none" w="med" len="med"/>
+                    </a:lnT>
+                    <a:lnB w="2540" cap="flat" cmpd="sng" algn="ctr">
+                      <a:solidFill>
+                        <a:srgbClr val="EEEEEE"/>
+                      </a:solidFill>
+                      <a:prstDash val="solid"/>
+                      <a:round/>
+                      <a:headEnd type="none" w="med" len="med"/>
+                      <a:tailEnd type="none" w="med" len="med"/>
+                    </a:lnB>
+                  </a:tcPr>
+                </a:tc>
+                <a:tc>
+                  <a:txBody>
+                    <a:bodyPr/>
+                    <a:lstStyle/>
+                    <a:p>
+                      <a:pPr algn="ctr" indent="0" marL="0">
+                        <a:buNone/>
+                      </a:pPr>
+                      <a:r>
+                        <a:rPr lang="en-US" sz="500" dirty="0">
+                          <a:solidFill>
+                            <a:srgbClr val="777777"/>
+                          </a:solidFill>
+                          <a:latin typeface="Calibri" pitchFamily="34" charset="0"/>
+                          <a:ea typeface="Calibri" pitchFamily="34" charset="-122"/>
+                          <a:cs typeface="Calibri" pitchFamily="34" charset="-120"/>
+                        </a:rPr>
+                        <a:t>0.42%</a:t>
+                      </a:r>
+                      <a:endParaRPr lang="en-US" sz="500" dirty="0">
+                        <a:latin typeface="Calibri" charset="0"/>
+                        <a:ea typeface="Calibri" charset="0"/>
+                        <a:cs typeface="Calibri" charset="0"/>
+                      </a:endParaRPr>
+                    </a:p>
+                  </a:txBody>
+                  <a:tcPr marL="91440" marR="91440" marT="45720" marB="45720">
+                    <a:lnL w="2540" cap="flat" cmpd="sng" algn="ctr">
+                      <a:solidFill>
+                        <a:srgbClr val="EEEEEE"/>
+                      </a:solidFill>
+                      <a:prstDash val="solid"/>
+                      <a:round/>
+                      <a:headEnd type="none" w="med" len="med"/>
+                      <a:tailEnd type="none" w="med" len="med"/>
+                    </a:lnL>
+                    <a:lnR w="2540" cap="flat" cmpd="sng" algn="ctr">
+                      <a:solidFill>
+                        <a:srgbClr val="EEEEEE"/>
+                      </a:solidFill>
+                      <a:prstDash val="solid"/>
+                      <a:round/>
+                      <a:headEnd type="none" w="med" len="med"/>
+                      <a:tailEnd type="none" w="med" len="med"/>
+                    </a:lnR>
+                    <a:lnT w="2540" cap="flat" cmpd="sng" algn="ctr">
+                      <a:solidFill>
+                        <a:srgbClr val="EEEEEE"/>
+                      </a:solidFill>
+                      <a:prstDash val="solid"/>
+                      <a:round/>
+                      <a:headEnd type="none" w="med" len="med"/>
+                      <a:tailEnd type="none" w="med" len="med"/>
+                    </a:lnT>
+                    <a:lnB w="2540" cap="flat" cmpd="sng" algn="ctr">
+                      <a:solidFill>
+                        <a:srgbClr val="EEEEEE"/>
+                      </a:solidFill>
+                      <a:prstDash val="solid"/>
+                      <a:round/>
+                      <a:headEnd type="none" w="med" len="med"/>
+                      <a:tailEnd type="none" w="med" len="med"/>
+                    </a:lnB>
+                  </a:tcPr>
+                </a:tc>
+                <a:tc>
+                  <a:txBody>
+                    <a:bodyPr/>
+                    <a:lstStyle/>
+                    <a:p>
+                      <a:pPr algn="ctr" indent="0" marL="0">
+                        <a:buNone/>
+                      </a:pPr>
+                      <a:r>
+                        <a:rPr lang="en-US" sz="500" dirty="0">
+                          <a:solidFill>
+                            <a:srgbClr val="777777"/>
+                          </a:solidFill>
+                          <a:latin typeface="Calibri" pitchFamily="34" charset="0"/>
+                          <a:ea typeface="Calibri" pitchFamily="34" charset="-122"/>
+                          <a:cs typeface="Calibri" pitchFamily="34" charset="-120"/>
+                        </a:rPr>
+                        <a:t>0.41%</a:t>
+                      </a:r>
+                      <a:endParaRPr lang="en-US" sz="500" dirty="0">
+                        <a:latin typeface="Calibri" charset="0"/>
+                        <a:ea typeface="Calibri" charset="0"/>
+                        <a:cs typeface="Calibri" charset="0"/>
+                      </a:endParaRPr>
+                    </a:p>
+                  </a:txBody>
+                  <a:tcPr marL="91440" marR="91440" marT="45720" marB="45720">
+                    <a:lnL w="2540" cap="flat" cmpd="sng" algn="ctr">
+                      <a:solidFill>
+                        <a:srgbClr val="EEEEEE"/>
+                      </a:solidFill>
+                      <a:prstDash val="solid"/>
+                      <a:round/>
+                      <a:headEnd type="none" w="med" len="med"/>
+                      <a:tailEnd type="none" w="med" len="med"/>
+                    </a:lnL>
+                    <a:lnR w="2540" cap="flat" cmpd="sng" algn="ctr">
+                      <a:solidFill>
+                        <a:srgbClr val="EEEEEE"/>
+                      </a:solidFill>
+                      <a:prstDash val="solid"/>
+                      <a:round/>
+                      <a:headEnd type="none" w="med" len="med"/>
+                      <a:tailEnd type="none" w="med" len="med"/>
+                    </a:lnR>
+                    <a:lnT w="2540" cap="flat" cmpd="sng" algn="ctr">
+                      <a:solidFill>
+                        <a:srgbClr val="EEEEEE"/>
+                      </a:solidFill>
+                      <a:prstDash val="solid"/>
+                      <a:round/>
+                      <a:headEnd type="none" w="med" len="med"/>
+                      <a:tailEnd type="none" w="med" len="med"/>
+                    </a:lnT>
+                    <a:lnB w="2540" cap="flat" cmpd="sng" algn="ctr">
+                      <a:solidFill>
+                        <a:srgbClr val="EEEEEE"/>
+                      </a:solidFill>
+                      <a:prstDash val="solid"/>
+                      <a:round/>
+                      <a:headEnd type="none" w="med" len="med"/>
+                      <a:tailEnd type="none" w="med" len="med"/>
+                    </a:lnB>
+                  </a:tcPr>
+                </a:tc>
+                <a:tc>
+                  <a:txBody>
+                    <a:bodyPr/>
+                    <a:lstStyle/>
+                    <a:p>
+                      <a:pPr algn="ctr" indent="0" marL="0">
+                        <a:buNone/>
+                      </a:pPr>
+                      <a:r>
+                        <a:rPr lang="en-US" sz="500" dirty="0">
+                          <a:solidFill>
+                            <a:srgbClr val="777777"/>
+                          </a:solidFill>
+                          <a:latin typeface="Calibri" pitchFamily="34" charset="0"/>
+                          <a:ea typeface="Calibri" pitchFamily="34" charset="-122"/>
+                          <a:cs typeface="Calibri" pitchFamily="34" charset="-120"/>
+                        </a:rPr>
+                        <a:t>0.40%</a:t>
+                      </a:r>
+                      <a:endParaRPr lang="en-US" sz="500" dirty="0">
+                        <a:latin typeface="Calibri" charset="0"/>
+                        <a:ea typeface="Calibri" charset="0"/>
+                        <a:cs typeface="Calibri" charset="0"/>
+                      </a:endParaRPr>
+                    </a:p>
+                  </a:txBody>
+                  <a:tcPr marL="91440" marR="91440" marT="45720" marB="45720">
+                    <a:lnL w="2540" cap="flat" cmpd="sng" algn="ctr">
+                      <a:solidFill>
+                        <a:srgbClr val="EEEEEE"/>
+                      </a:solidFill>
+                      <a:prstDash val="solid"/>
+                      <a:round/>
+                      <a:headEnd type="none" w="med" len="med"/>
+                      <a:tailEnd type="none" w="med" len="med"/>
+                    </a:lnL>
+                    <a:lnR w="2540" cap="flat" cmpd="sng" algn="ctr">
+                      <a:solidFill>
+                        <a:srgbClr val="EEEEEE"/>
+                      </a:solidFill>
+                      <a:prstDash val="solid"/>
+                      <a:round/>
+                      <a:headEnd type="none" w="med" len="med"/>
+                      <a:tailEnd type="none" w="med" len="med"/>
+                    </a:lnR>
+                    <a:lnT w="2540" cap="flat" cmpd="sng" algn="ctr">
+                      <a:solidFill>
+                        <a:srgbClr val="EEEEEE"/>
+                      </a:solidFill>
+                      <a:prstDash val="solid"/>
+                      <a:round/>
+                      <a:headEnd type="none" w="med" len="med"/>
+                      <a:tailEnd type="none" w="med" len="med"/>
+                    </a:lnT>
+                    <a:lnB w="2540" cap="flat" cmpd="sng" algn="ctr">
+                      <a:solidFill>
+                        <a:srgbClr val="EEEEEE"/>
+                      </a:solidFill>
+                      <a:prstDash val="solid"/>
+                      <a:round/>
+                      <a:headEnd type="none" w="med" len="med"/>
+                      <a:tailEnd type="none" w="med" len="med"/>
+                    </a:lnB>
+                  </a:tcPr>
+                </a:tc>
+                <a:tc>
+                  <a:txBody>
+                    <a:bodyPr/>
+                    <a:lstStyle/>
+                    <a:p>
+                      <a:pPr algn="ctr" indent="0" marL="0">
+                        <a:buNone/>
+                      </a:pPr>
+                      <a:r>
+                        <a:rPr lang="en-US" sz="500" dirty="0">
+                          <a:solidFill>
+                            <a:srgbClr val="777777"/>
+                          </a:solidFill>
+                          <a:latin typeface="Calibri" pitchFamily="34" charset="0"/>
+                          <a:ea typeface="Calibri" pitchFamily="34" charset="-122"/>
+                          <a:cs typeface="Calibri" pitchFamily="34" charset="-120"/>
+                        </a:rPr>
+                        <a:t>0.40%</a:t>
+                      </a:r>
+                      <a:endParaRPr lang="en-US" sz="500" dirty="0">
+                        <a:latin typeface="Calibri" charset="0"/>
+                        <a:ea typeface="Calibri" charset="0"/>
+                        <a:cs typeface="Calibri" charset="0"/>
+                      </a:endParaRPr>
+                    </a:p>
+                  </a:txBody>
+                  <a:tcPr marL="91440" marR="91440" marT="45720" marB="45720">
+                    <a:lnL w="2540" cap="flat" cmpd="sng" algn="ctr">
+                      <a:solidFill>
+                        <a:srgbClr val="EEEEEE"/>
+                      </a:solidFill>
+                      <a:prstDash val="solid"/>
+                      <a:round/>
+                      <a:headEnd type="none" w="med" len="med"/>
+                      <a:tailEnd type="none" w="med" len="med"/>
+                    </a:lnL>
+                    <a:lnR w="2540" cap="flat" cmpd="sng" algn="ctr">
+                      <a:solidFill>
+                        <a:srgbClr val="EEEEEE"/>
+                      </a:solidFill>
+                      <a:prstDash val="solid"/>
+                      <a:round/>
+                      <a:headEnd type="none" w="med" len="med"/>
+                      <a:tailEnd type="none" w="med" len="med"/>
+                    </a:lnR>
+                    <a:lnT w="2540" cap="flat" cmpd="sng" algn="ctr">
+                      <a:solidFill>
+                        <a:srgbClr val="EEEEEE"/>
+                      </a:solidFill>
+                      <a:prstDash val="solid"/>
+                      <a:round/>
+                      <a:headEnd type="none" w="med" len="med"/>
+                      <a:tailEnd type="none" w="med" len="med"/>
+                    </a:lnT>
+                    <a:lnB w="2540" cap="flat" cmpd="sng" algn="ctr">
+                      <a:solidFill>
+                        <a:srgbClr val="EEEEEE"/>
+                      </a:solidFill>
+                      <a:prstDash val="solid"/>
+                      <a:round/>
+                      <a:headEnd type="none" w="med" len="med"/>
+                      <a:tailEnd type="none" w="med" len="med"/>
+                    </a:lnB>
+                  </a:tcPr>
+                </a:tc>
+                <a:tc>
+                  <a:txBody>
+                    <a:bodyPr/>
+                    <a:lstStyle/>
+                    <a:p>
+                      <a:pPr algn="ctr" indent="0" marL="0">
+                        <a:buNone/>
+                      </a:pPr>
+                      <a:r>
+                        <a:rPr lang="en-US" sz="500" dirty="0">
+                          <a:solidFill>
+                            <a:srgbClr val="777777"/>
+                          </a:solidFill>
+                          <a:latin typeface="Calibri" pitchFamily="34" charset="0"/>
+                          <a:ea typeface="Calibri" pitchFamily="34" charset="-122"/>
+                          <a:cs typeface="Calibri" pitchFamily="34" charset="-120"/>
+                        </a:rPr>
+                        <a:t>0.40%</a:t>
+                      </a:r>
+                      <a:endParaRPr lang="en-US" sz="500" dirty="0">
+                        <a:latin typeface="Calibri" charset="0"/>
+                        <a:ea typeface="Calibri" charset="0"/>
+                        <a:cs typeface="Calibri" charset="0"/>
+                      </a:endParaRPr>
+                    </a:p>
+                  </a:txBody>
+                  <a:tcPr marL="91440" marR="91440" marT="45720" marB="45720">
+                    <a:lnL w="2540" cap="flat" cmpd="sng" algn="ctr">
+                      <a:solidFill>
+                        <a:srgbClr val="EEEEEE"/>
+                      </a:solidFill>
+                      <a:prstDash val="solid"/>
+                      <a:round/>
+                      <a:headEnd type="none" w="med" len="med"/>
+                      <a:tailEnd type="none" w="med" len="med"/>
+                    </a:lnL>
+                    <a:lnR w="2540" cap="flat" cmpd="sng" algn="ctr">
+                      <a:solidFill>
+                        <a:srgbClr val="EEEEEE"/>
+                      </a:solidFill>
+                      <a:prstDash val="solid"/>
+                      <a:round/>
+                      <a:headEnd type="none" w="med" len="med"/>
+                      <a:tailEnd type="none" w="med" len="med"/>
+                    </a:lnR>
+                    <a:lnT w="2540" cap="flat" cmpd="sng" algn="ctr">
+                      <a:solidFill>
+                        <a:srgbClr val="EEEEEE"/>
+                      </a:solidFill>
+                      <a:prstDash val="solid"/>
+                      <a:round/>
+                      <a:headEnd type="none" w="med" len="med"/>
+                      <a:tailEnd type="none" w="med" len="med"/>
+                    </a:lnT>
+                    <a:lnB w="2540" cap="flat" cmpd="sng" algn="ctr">
+                      <a:solidFill>
+                        <a:srgbClr val="EEEEEE"/>
+                      </a:solidFill>
+                      <a:prstDash val="solid"/>
+                      <a:round/>
+                      <a:headEnd type="none" w="med" len="med"/>
+                      <a:tailEnd type="none" w="med" len="med"/>
+                    </a:lnB>
+                  </a:tcPr>
+                </a:tc>
+                <a:tc>
+                  <a:txBody>
+                    <a:bodyPr/>
+                    <a:lstStyle/>
+                    <a:p>
+                      <a:pPr algn="ctr" indent="0" marL="0">
+                        <a:buNone/>
+                      </a:pPr>
+                      <a:r>
+                        <a:rPr lang="en-US" sz="500" dirty="0">
+                          <a:solidFill>
+                            <a:srgbClr val="777777"/>
+                          </a:solidFill>
+                          <a:latin typeface="Calibri" pitchFamily="34" charset="0"/>
+                          <a:ea typeface="Calibri" pitchFamily="34" charset="-122"/>
+                          <a:cs typeface="Calibri" pitchFamily="34" charset="-120"/>
+                        </a:rPr>
+                        <a:t>0.40%</a:t>
+                      </a:r>
+                      <a:endParaRPr lang="en-US" sz="500" dirty="0">
+                        <a:latin typeface="Calibri" charset="0"/>
+                        <a:ea typeface="Calibri" charset="0"/>
+                        <a:cs typeface="Calibri" charset="0"/>
+                      </a:endParaRPr>
+                    </a:p>
+                  </a:txBody>
+                  <a:tcPr marL="91440" marR="91440" marT="45720" marB="45720">
+                    <a:lnL w="2540" cap="flat" cmpd="sng" algn="ctr">
+                      <a:solidFill>
+                        <a:srgbClr val="EEEEEE"/>
+                      </a:solidFill>
+                      <a:prstDash val="solid"/>
+                      <a:round/>
+                      <a:headEnd type="none" w="med" len="med"/>
+                      <a:tailEnd type="none" w="med" len="med"/>
+                    </a:lnL>
+                    <a:lnR w="2540" cap="flat" cmpd="sng" algn="ctr">
+                      <a:solidFill>
+                        <a:srgbClr val="EEEEEE"/>
+                      </a:solidFill>
+                      <a:prstDash val="solid"/>
+                      <a:round/>
+                      <a:headEnd type="none" w="med" len="med"/>
+                      <a:tailEnd type="none" w="med" len="med"/>
+                    </a:lnR>
+                    <a:lnT w="2540" cap="flat" cmpd="sng" algn="ctr">
+                      <a:solidFill>
+                        <a:srgbClr val="EEEEEE"/>
+                      </a:solidFill>
+                      <a:prstDash val="solid"/>
+                      <a:round/>
+                      <a:headEnd type="none" w="med" len="med"/>
+                      <a:tailEnd type="none" w="med" len="med"/>
+                    </a:lnT>
+                    <a:lnB w="2540" cap="flat" cmpd="sng" algn="ctr">
+                      <a:solidFill>
+                        <a:srgbClr val="EEEEEE"/>
+                      </a:solidFill>
+                      <a:prstDash val="solid"/>
+                      <a:round/>
+                      <a:headEnd type="none" w="med" len="med"/>
+                      <a:tailEnd type="none" w="med" len="med"/>
+                    </a:lnB>
+                  </a:tcPr>
+                </a:tc>
+                <a:tc>
+                  <a:txBody>
+                    <a:bodyPr/>
+                    <a:lstStyle/>
+                    <a:p>
+                      <a:pPr algn="ctr" indent="0" marL="0">
+                        <a:buNone/>
+                      </a:pPr>
+                      <a:r>
+                        <a:rPr lang="en-US" sz="500" dirty="0">
+                          <a:solidFill>
+                            <a:srgbClr val="777777"/>
+                          </a:solidFill>
+                          <a:latin typeface="Calibri" pitchFamily="34" charset="0"/>
+                          <a:ea typeface="Calibri" pitchFamily="34" charset="-122"/>
+                          <a:cs typeface="Calibri" pitchFamily="34" charset="-120"/>
+                        </a:rPr>
+                        <a:t>0.39%</a:t>
+                      </a:r>
+                      <a:endParaRPr lang="en-US" sz="500" dirty="0">
+                        <a:latin typeface="Calibri" charset="0"/>
+                        <a:ea typeface="Calibri" charset="0"/>
+                        <a:cs typeface="Calibri" charset="0"/>
+                      </a:endParaRPr>
+                    </a:p>
+                  </a:txBody>
+                  <a:tcPr marL="91440" marR="91440" marT="45720" marB="45720">
+                    <a:lnL w="2540" cap="flat" cmpd="sng" algn="ctr">
+                      <a:solidFill>
+                        <a:srgbClr val="EEEEEE"/>
+                      </a:solidFill>
+                      <a:prstDash val="solid"/>
+                      <a:round/>
+                      <a:headEnd type="none" w="med" len="med"/>
+                      <a:tailEnd type="none" w="med" len="med"/>
+                    </a:lnL>
+                    <a:lnR w="2540" cap="flat" cmpd="sng" algn="ctr">
+                      <a:solidFill>
+                        <a:srgbClr val="EEEEEE"/>
+                      </a:solidFill>
+                      <a:prstDash val="solid"/>
+                      <a:round/>
+                      <a:headEnd type="none" w="med" len="med"/>
+                      <a:tailEnd type="none" w="med" len="med"/>
+                    </a:lnR>
+                    <a:lnT w="2540" cap="flat" cmpd="sng" algn="ctr">
+                      <a:solidFill>
+                        <a:srgbClr val="EEEEEE"/>
+                      </a:solidFill>
+                      <a:prstDash val="solid"/>
+                      <a:round/>
+                      <a:headEnd type="none" w="med" len="med"/>
+                      <a:tailEnd type="none" w="med" len="med"/>
+                    </a:lnT>
+                    <a:lnB w="2540" cap="flat" cmpd="sng" algn="ctr">
+                      <a:solidFill>
+                        <a:srgbClr val="EEEEEE"/>
+                      </a:solidFill>
+                      <a:prstDash val="solid"/>
+                      <a:round/>
+                      <a:headEnd type="none" w="med" len="med"/>
+                      <a:tailEnd type="none" w="med" len="med"/>
+                    </a:lnB>
+                  </a:tcPr>
+                </a:tc>
+                <a:tc>
+                  <a:txBody>
+                    <a:bodyPr/>
+                    <a:lstStyle/>
+                    <a:p>
+                      <a:pPr algn="ctr" indent="0" marL="0">
+                        <a:buNone/>
+                      </a:pPr>
+                      <a:r>
+                        <a:rPr lang="en-US" sz="500" b="1" dirty="0">
+                          <a:solidFill>
+                            <a:srgbClr val="777777"/>
+                          </a:solidFill>
+                          <a:latin typeface="Calibri" pitchFamily="34" charset="0"/>
+                          <a:ea typeface="Calibri" pitchFamily="34" charset="-122"/>
+                          <a:cs typeface="Calibri" pitchFamily="34" charset="-120"/>
+                        </a:rPr>
+                        <a:t>4.99%</a:t>
+                      </a:r>
+                      <a:endParaRPr lang="en-US" sz="500" dirty="0">
+                        <a:latin typeface="Calibri" charset="0"/>
+                        <a:ea typeface="Calibri" charset="0"/>
+                        <a:cs typeface="Calibri" charset="0"/>
+                      </a:endParaRPr>
+                    </a:p>
+                  </a:txBody>
+                  <a:tcPr marL="91440" marR="91440" marT="45720" marB="45720">
+                    <a:lnL w="2540" cap="flat" cmpd="sng" algn="ctr">
+                      <a:solidFill>
+                        <a:srgbClr val="EEEEEE"/>
+                      </a:solidFill>
+                      <a:prstDash val="solid"/>
+                      <a:round/>
+                      <a:headEnd type="none" w="med" len="med"/>
+                      <a:tailEnd type="none" w="med" len="med"/>
+                    </a:lnL>
+                    <a:lnR w="2540" cap="flat" cmpd="sng" algn="ctr">
+                      <a:solidFill>
+                        <a:srgbClr val="EEEEEE"/>
+                      </a:solidFill>
+                      <a:prstDash val="solid"/>
+                      <a:round/>
+                      <a:headEnd type="none" w="med" len="med"/>
+                      <a:tailEnd type="none" w="med" len="med"/>
+                    </a:lnR>
+                    <a:lnT w="2540" cap="flat" cmpd="sng" algn="ctr">
+                      <a:solidFill>
+                        <a:srgbClr val="EEEEEE"/>
+                      </a:solidFill>
+                      <a:prstDash val="solid"/>
+                      <a:round/>
+                      <a:headEnd type="none" w="med" len="med"/>
+                      <a:tailEnd type="none" w="med" len="med"/>
+                    </a:lnT>
+                    <a:lnB w="2540" cap="flat" cmpd="sng" algn="ctr">
+                      <a:solidFill>
+                        <a:srgbClr val="EEEEEE"/>
+                      </a:solidFill>
+                      <a:prstDash val="solid"/>
+                      <a:round/>
+                      <a:headEnd type="none" w="med" len="med"/>
+                      <a:tailEnd type="none" w="med" len="med"/>
+                    </a:lnB>
+                  </a:tcPr>
+                </a:tc>
+              </a:tr>
+              <a:tr h="123444">
+                <a:tc>
+                  <a:txBody>
+                    <a:bodyPr/>
+                    <a:lstStyle/>
+                    <a:p>
+                      <a:pPr algn="l" indent="0" marL="0">
+                        <a:buNone/>
+                      </a:pPr>
+                      <a:endParaRPr lang="en-US" sz="500" dirty="0">
+                        <a:latin typeface="Calibri" charset="0"/>
+                        <a:ea typeface="Calibri" charset="0"/>
+                        <a:cs typeface="Calibri" charset="0"/>
+                      </a:endParaRPr>
+                    </a:p>
+                  </a:txBody>
+                  <a:tcPr marL="91440" marR="91440" marT="45720" marB="45720">
+                    <a:lnL w="2540" cap="flat" cmpd="sng" algn="ctr">
+                      <a:solidFill>
+                        <a:srgbClr val="EEEEEE"/>
+                      </a:solidFill>
+                      <a:prstDash val="solid"/>
+                      <a:round/>
+                      <a:headEnd type="none" w="med" len="med"/>
+                      <a:tailEnd type="none" w="med" len="med"/>
+                    </a:lnL>
+                    <a:lnR w="2540" cap="flat" cmpd="sng" algn="ctr">
+                      <a:solidFill>
+                        <a:srgbClr val="EEEEEE"/>
+                      </a:solidFill>
+                      <a:prstDash val="solid"/>
+                      <a:round/>
+                      <a:headEnd type="none" w="med" len="med"/>
+                      <a:tailEnd type="none" w="med" len="med"/>
+                    </a:lnR>
+                    <a:lnT w="2540" cap="flat" cmpd="sng" algn="ctr">
+                      <a:solidFill>
+                        <a:srgbClr val="EEEEEE"/>
+                      </a:solidFill>
+                      <a:prstDash val="solid"/>
+                      <a:round/>
+                      <a:headEnd type="none" w="med" len="med"/>
+                      <a:tailEnd type="none" w="med" len="med"/>
+                    </a:lnT>
+                    <a:lnB w="2540" cap="flat" cmpd="sng" algn="ctr">
+                      <a:solidFill>
+                        <a:srgbClr val="EEEEEE"/>
+                      </a:solidFill>
+                      <a:prstDash val="solid"/>
+                      <a:round/>
+                      <a:headEnd type="none" w="med" len="med"/>
+                      <a:tailEnd type="none" w="med" len="med"/>
+                    </a:lnB>
+                  </a:tcPr>
+                </a:tc>
+                <a:tc>
+                  <a:txBody>
+                    <a:bodyPr/>
+                    <a:lstStyle/>
+                    <a:p>
+                      <a:pPr algn="l" indent="0" marL="0">
+                        <a:buNone/>
+                      </a:pPr>
+                      <a:r>
+                        <a:rPr lang="en-US" sz="500" dirty="0">
+                          <a:solidFill>
+                            <a:srgbClr val="999999"/>
+                          </a:solidFill>
+                          <a:latin typeface="Calibri" pitchFamily="34" charset="0"/>
+                          <a:ea typeface="Calibri" pitchFamily="34" charset="-122"/>
+                          <a:cs typeface="Calibri" pitchFamily="34" charset="-120"/>
+                        </a:rPr>
+                        <a:t>Competencia</a:t>
                       </a:r>
                       <a:endParaRPr lang="en-US" sz="500" dirty="0">
                         <a:latin typeface="Calibri" charset="0"/>
@@ -10062,7 +12841,7 @@
                           <a:ea typeface="Calibri" pitchFamily="34" charset="-122"/>
                           <a:cs typeface="Calibri" pitchFamily="34" charset="-120"/>
                         </a:rPr>
-                        <a:t>0.00%</a:t>
+                        <a:t>0.28%</a:t>
                       </a:r>
                       <a:endParaRPr lang="en-US" sz="500" dirty="0">
                         <a:latin typeface="Calibri" charset="0"/>
@@ -10127,7 +12906,7 @@
                           <a:ea typeface="Calibri" pitchFamily="34" charset="-122"/>
                           <a:cs typeface="Calibri" pitchFamily="34" charset="-120"/>
                         </a:rPr>
-                        <a:t>0.00%</a:t>
+                        <a:t>0.31%</a:t>
                       </a:r>
                       <a:endParaRPr lang="en-US" sz="500" dirty="0">
                         <a:latin typeface="Calibri" charset="0"/>
@@ -10192,7 +12971,7 @@
                           <a:ea typeface="Calibri" pitchFamily="34" charset="-122"/>
                           <a:cs typeface="Calibri" pitchFamily="34" charset="-120"/>
                         </a:rPr>
-                        <a:t>0.00%</a:t>
+                        <a:t>0.30%</a:t>
                       </a:r>
                       <a:endParaRPr lang="en-US" sz="500" dirty="0">
                         <a:latin typeface="Calibri" charset="0"/>
@@ -10257,7 +13036,7 @@
                           <a:ea typeface="Calibri" pitchFamily="34" charset="-122"/>
                           <a:cs typeface="Calibri" pitchFamily="34" charset="-120"/>
                         </a:rPr>
-                        <a:t>0.00%</a:t>
+                        <a:t>0.31%</a:t>
                       </a:r>
                       <a:endParaRPr lang="en-US" sz="500" dirty="0">
                         <a:latin typeface="Calibri" charset="0"/>
@@ -10322,7 +13101,7 @@
                           <a:ea typeface="Calibri" pitchFamily="34" charset="-122"/>
                           <a:cs typeface="Calibri" pitchFamily="34" charset="-120"/>
                         </a:rPr>
-                        <a:t>0.00%</a:t>
+                        <a:t>0.30%</a:t>
                       </a:r>
                       <a:endParaRPr lang="en-US" sz="500" dirty="0">
                         <a:latin typeface="Calibri" charset="0"/>
@@ -10387,7 +13166,7 @@
                           <a:ea typeface="Calibri" pitchFamily="34" charset="-122"/>
                           <a:cs typeface="Calibri" pitchFamily="34" charset="-120"/>
                         </a:rPr>
-                        <a:t>0.00%</a:t>
+                        <a:t>0.30%</a:t>
                       </a:r>
                       <a:endParaRPr lang="en-US" sz="500" dirty="0">
                         <a:latin typeface="Calibri" charset="0"/>
@@ -10452,7 +13231,7 @@
                           <a:ea typeface="Calibri" pitchFamily="34" charset="-122"/>
                           <a:cs typeface="Calibri" pitchFamily="34" charset="-120"/>
                         </a:rPr>
-                        <a:t>0.00%</a:t>
+                        <a:t>0.30%</a:t>
                       </a:r>
                       <a:endParaRPr lang="en-US" sz="500" dirty="0">
                         <a:latin typeface="Calibri" charset="0"/>
@@ -10517,7 +13296,7 @@
                           <a:ea typeface="Calibri" pitchFamily="34" charset="-122"/>
                           <a:cs typeface="Calibri" pitchFamily="34" charset="-120"/>
                         </a:rPr>
-                        <a:t>0.00%</a:t>
+                        <a:t>0.28%</a:t>
                       </a:r>
                       <a:endParaRPr lang="en-US" sz="500" dirty="0">
                         <a:latin typeface="Calibri" charset="0"/>
@@ -10582,7 +13361,137 @@
                           <a:ea typeface="Calibri" pitchFamily="34" charset="-122"/>
                           <a:cs typeface="Calibri" pitchFamily="34" charset="-120"/>
                         </a:rPr>
-                        <a:t>-2.99%</a:t>
+                        <a:t>0.29%</a:t>
+                      </a:r>
+                      <a:endParaRPr lang="en-US" sz="500" dirty="0">
+                        <a:latin typeface="Calibri" charset="0"/>
+                        <a:ea typeface="Calibri" charset="0"/>
+                        <a:cs typeface="Calibri" charset="0"/>
+                      </a:endParaRPr>
+                    </a:p>
+                  </a:txBody>
+                  <a:tcPr marL="91440" marR="91440" marT="45720" marB="45720">
+                    <a:lnL w="2540" cap="flat" cmpd="sng" algn="ctr">
+                      <a:solidFill>
+                        <a:srgbClr val="EEEEEE"/>
+                      </a:solidFill>
+                      <a:prstDash val="solid"/>
+                      <a:round/>
+                      <a:headEnd type="none" w="med" len="med"/>
+                      <a:tailEnd type="none" w="med" len="med"/>
+                    </a:lnL>
+                    <a:lnR w="2540" cap="flat" cmpd="sng" algn="ctr">
+                      <a:solidFill>
+                        <a:srgbClr val="EEEEEE"/>
+                      </a:solidFill>
+                      <a:prstDash val="solid"/>
+                      <a:round/>
+                      <a:headEnd type="none" w="med" len="med"/>
+                      <a:tailEnd type="none" w="med" len="med"/>
+                    </a:lnR>
+                    <a:lnT w="2540" cap="flat" cmpd="sng" algn="ctr">
+                      <a:solidFill>
+                        <a:srgbClr val="EEEEEE"/>
+                      </a:solidFill>
+                      <a:prstDash val="solid"/>
+                      <a:round/>
+                      <a:headEnd type="none" w="med" len="med"/>
+                      <a:tailEnd type="none" w="med" len="med"/>
+                    </a:lnT>
+                    <a:lnB w="2540" cap="flat" cmpd="sng" algn="ctr">
+                      <a:solidFill>
+                        <a:srgbClr val="EEEEEE"/>
+                      </a:solidFill>
+                      <a:prstDash val="solid"/>
+                      <a:round/>
+                      <a:headEnd type="none" w="med" len="med"/>
+                      <a:tailEnd type="none" w="med" len="med"/>
+                    </a:lnB>
+                  </a:tcPr>
+                </a:tc>
+                <a:tc>
+                  <a:txBody>
+                    <a:bodyPr/>
+                    <a:lstStyle/>
+                    <a:p>
+                      <a:pPr algn="ctr" indent="0" marL="0">
+                        <a:buNone/>
+                      </a:pPr>
+                      <a:r>
+                        <a:rPr lang="en-US" sz="500" dirty="0">
+                          <a:solidFill>
+                            <a:srgbClr val="999999"/>
+                          </a:solidFill>
+                          <a:latin typeface="Calibri" pitchFamily="34" charset="0"/>
+                          <a:ea typeface="Calibri" pitchFamily="34" charset="-122"/>
+                          <a:cs typeface="Calibri" pitchFamily="34" charset="-120"/>
+                        </a:rPr>
+                        <a:t>0.28%</a:t>
+                      </a:r>
+                      <a:endParaRPr lang="en-US" sz="500" dirty="0">
+                        <a:latin typeface="Calibri" charset="0"/>
+                        <a:ea typeface="Calibri" charset="0"/>
+                        <a:cs typeface="Calibri" charset="0"/>
+                      </a:endParaRPr>
+                    </a:p>
+                  </a:txBody>
+                  <a:tcPr marL="91440" marR="91440" marT="45720" marB="45720">
+                    <a:lnL w="2540" cap="flat" cmpd="sng" algn="ctr">
+                      <a:solidFill>
+                        <a:srgbClr val="EEEEEE"/>
+                      </a:solidFill>
+                      <a:prstDash val="solid"/>
+                      <a:round/>
+                      <a:headEnd type="none" w="med" len="med"/>
+                      <a:tailEnd type="none" w="med" len="med"/>
+                    </a:lnL>
+                    <a:lnR w="2540" cap="flat" cmpd="sng" algn="ctr">
+                      <a:solidFill>
+                        <a:srgbClr val="EEEEEE"/>
+                      </a:solidFill>
+                      <a:prstDash val="solid"/>
+                      <a:round/>
+                      <a:headEnd type="none" w="med" len="med"/>
+                      <a:tailEnd type="none" w="med" len="med"/>
+                    </a:lnR>
+                    <a:lnT w="2540" cap="flat" cmpd="sng" algn="ctr">
+                      <a:solidFill>
+                        <a:srgbClr val="EEEEEE"/>
+                      </a:solidFill>
+                      <a:prstDash val="solid"/>
+                      <a:round/>
+                      <a:headEnd type="none" w="med" len="med"/>
+                      <a:tailEnd type="none" w="med" len="med"/>
+                    </a:lnT>
+                    <a:lnB w="2540" cap="flat" cmpd="sng" algn="ctr">
+                      <a:solidFill>
+                        <a:srgbClr val="EEEEEE"/>
+                      </a:solidFill>
+                      <a:prstDash val="solid"/>
+                      <a:round/>
+                      <a:headEnd type="none" w="med" len="med"/>
+                      <a:tailEnd type="none" w="med" len="med"/>
+                    </a:lnB>
+                  </a:tcPr>
+                </a:tc>
+                <a:tc>
+                  <a:txBody>
+                    <a:bodyPr/>
+                    <a:lstStyle/>
+                    <a:p>
+                      <a:pPr algn="ctr" indent="0" marL="0">
+                        <a:buNone/>
+                      </a:pPr>
+                      <a:r>
+                        <a:rPr lang="en-US" sz="500" dirty="0">
+                          <a:solidFill>
+                            <a:srgbClr val="999999"/>
+                          </a:solidFill>
+                          <a:latin typeface="Calibri" pitchFamily="34" charset="0"/>
+                          <a:ea typeface="Calibri" pitchFamily="34" charset="-122"/>
+                          <a:cs typeface="Calibri" pitchFamily="34" charset="-120"/>
+                        </a:rPr>
+                        <a:t>0.56%</a:t>
                       </a:r>
                       <a:endParaRPr lang="en-US" sz="500" dirty="0">
                         <a:latin typeface="Calibri" charset="0"/>
@@ -10647,7 +13556,7 @@
                           <a:ea typeface="Calibri" pitchFamily="34" charset="-122"/>
                           <a:cs typeface="Calibri" pitchFamily="34" charset="-120"/>
                         </a:rPr>
-                        <a:t>-2.95%</a:t>
+                        <a:t>3.54%</a:t>
                       </a:r>
                       <a:endParaRPr lang="en-US" sz="500" dirty="0">
                         <a:latin typeface="Calibri" charset="0"/>
@@ -10833,7 +13742,7 @@
                           <a:ea typeface="Calibri" pitchFamily="34" charset="-122"/>
                           <a:cs typeface="Calibri" pitchFamily="34" charset="-120"/>
                         </a:rPr>
-                        <a:t>0.01%</a:t>
+                        <a:t>0.34%</a:t>
                       </a:r>
                       <a:endParaRPr lang="en-US" sz="500" dirty="0">
                         <a:latin typeface="Calibri" charset="0"/>
@@ -10898,7 +13807,7 @@
                           <a:ea typeface="Calibri" pitchFamily="34" charset="-122"/>
                           <a:cs typeface="Calibri" pitchFamily="34" charset="-120"/>
                         </a:rPr>
-                        <a:t>0.01%</a:t>
+                        <a:t>0.39%</a:t>
                       </a:r>
                       <a:endParaRPr lang="en-US" sz="500" dirty="0">
                         <a:latin typeface="Calibri" charset="0"/>
@@ -10963,7 +13872,7 @@
                           <a:ea typeface="Calibri" pitchFamily="34" charset="-122"/>
                           <a:cs typeface="Calibri" pitchFamily="34" charset="-120"/>
                         </a:rPr>
-                        <a:t>0.01%</a:t>
+                        <a:t>0.51%</a:t>
                       </a:r>
                       <a:endParaRPr lang="en-US" sz="500" dirty="0">
                         <a:latin typeface="Calibri" charset="0"/>
@@ -11028,7 +13937,7 @@
                           <a:ea typeface="Calibri" pitchFamily="34" charset="-122"/>
                           <a:cs typeface="Calibri" pitchFamily="34" charset="-120"/>
                         </a:rPr>
-                        <a:t>0.01%</a:t>
+                        <a:t>0.50%</a:t>
                       </a:r>
                       <a:endParaRPr lang="en-US" sz="500" dirty="0">
                         <a:latin typeface="Calibri" charset="0"/>
@@ -11093,7 +14002,7 @@
                           <a:ea typeface="Calibri" pitchFamily="34" charset="-122"/>
                           <a:cs typeface="Calibri" pitchFamily="34" charset="-120"/>
                         </a:rPr>
-                        <a:t>0.01%</a:t>
+                        <a:t>0.59%</a:t>
                       </a:r>
                       <a:endParaRPr lang="en-US" sz="500" dirty="0">
                         <a:latin typeface="Calibri" charset="0"/>
@@ -11158,7 +14067,7 @@
                           <a:ea typeface="Calibri" pitchFamily="34" charset="-122"/>
                           <a:cs typeface="Calibri" pitchFamily="34" charset="-120"/>
                         </a:rPr>
-                        <a:t>0.00%</a:t>
+                        <a:t>0.58%</a:t>
                       </a:r>
                       <a:endParaRPr lang="en-US" sz="500" dirty="0">
                         <a:latin typeface="Calibri" charset="0"/>
@@ -11223,2916 +14132,7 @@
                           <a:ea typeface="Calibri" pitchFamily="34" charset="-122"/>
                           <a:cs typeface="Calibri" pitchFamily="34" charset="-120"/>
                         </a:rPr>
-                        <a:t>0.00%</a:t>
-                      </a:r>
-                      <a:endParaRPr lang="en-US" sz="500" dirty="0">
-                        <a:latin typeface="Calibri" charset="0"/>
-                        <a:ea typeface="Calibri" charset="0"/>
-                        <a:cs typeface="Calibri" charset="0"/>
-                      </a:endParaRPr>
-                    </a:p>
-                  </a:txBody>
-                  <a:tcPr marL="91440" marR="91440" marT="45720" marB="45720">
-                    <a:lnL w="2540" cap="flat" cmpd="sng" algn="ctr">
-                      <a:solidFill>
-                        <a:srgbClr val="EEEEEE"/>
-                      </a:solidFill>
-                      <a:prstDash val="solid"/>
-                      <a:round/>
-                      <a:headEnd type="none" w="med" len="med"/>
-                      <a:tailEnd type="none" w="med" len="med"/>
-                    </a:lnL>
-                    <a:lnR w="2540" cap="flat" cmpd="sng" algn="ctr">
-                      <a:solidFill>
-                        <a:srgbClr val="EEEEEE"/>
-                      </a:solidFill>
-                      <a:prstDash val="solid"/>
-                      <a:round/>
-                      <a:headEnd type="none" w="med" len="med"/>
-                      <a:tailEnd type="none" w="med" len="med"/>
-                    </a:lnR>
-                    <a:lnT w="2540" cap="flat" cmpd="sng" algn="ctr">
-                      <a:solidFill>
-                        <a:srgbClr val="EEEEEE"/>
-                      </a:solidFill>
-                      <a:prstDash val="solid"/>
-                      <a:round/>
-                      <a:headEnd type="none" w="med" len="med"/>
-                      <a:tailEnd type="none" w="med" len="med"/>
-                    </a:lnT>
-                    <a:lnB w="2540" cap="flat" cmpd="sng" algn="ctr">
-                      <a:solidFill>
-                        <a:srgbClr val="EEEEEE"/>
-                      </a:solidFill>
-                      <a:prstDash val="solid"/>
-                      <a:round/>
-                      <a:headEnd type="none" w="med" len="med"/>
-                      <a:tailEnd type="none" w="med" len="med"/>
-                    </a:lnB>
-                  </a:tcPr>
-                </a:tc>
-                <a:tc>
-                  <a:txBody>
-                    <a:bodyPr/>
-                    <a:lstStyle/>
-                    <a:p>
-                      <a:pPr algn="ctr" indent="0" marL="0">
-                        <a:buNone/>
-                      </a:pPr>
-                      <a:r>
-                        <a:rPr lang="en-US" sz="500" dirty="0">
-                          <a:solidFill>
-                            <a:srgbClr val="000000"/>
-                          </a:solidFill>
-                          <a:latin typeface="Calibri" pitchFamily="34" charset="0"/>
-                          <a:ea typeface="Calibri" pitchFamily="34" charset="-122"/>
-                          <a:cs typeface="Calibri" pitchFamily="34" charset="-120"/>
-                        </a:rPr>
-                        <a:t>0.00%</a:t>
-                      </a:r>
-                      <a:endParaRPr lang="en-US" sz="500" dirty="0">
-                        <a:latin typeface="Calibri" charset="0"/>
-                        <a:ea typeface="Calibri" charset="0"/>
-                        <a:cs typeface="Calibri" charset="0"/>
-                      </a:endParaRPr>
-                    </a:p>
-                  </a:txBody>
-                  <a:tcPr marL="91440" marR="91440" marT="45720" marB="45720">
-                    <a:lnL w="2540" cap="flat" cmpd="sng" algn="ctr">
-                      <a:solidFill>
-                        <a:srgbClr val="EEEEEE"/>
-                      </a:solidFill>
-                      <a:prstDash val="solid"/>
-                      <a:round/>
-                      <a:headEnd type="none" w="med" len="med"/>
-                      <a:tailEnd type="none" w="med" len="med"/>
-                    </a:lnL>
-                    <a:lnR w="2540" cap="flat" cmpd="sng" algn="ctr">
-                      <a:solidFill>
-                        <a:srgbClr val="EEEEEE"/>
-                      </a:solidFill>
-                      <a:prstDash val="solid"/>
-                      <a:round/>
-                      <a:headEnd type="none" w="med" len="med"/>
-                      <a:tailEnd type="none" w="med" len="med"/>
-                    </a:lnR>
-                    <a:lnT w="2540" cap="flat" cmpd="sng" algn="ctr">
-                      <a:solidFill>
-                        <a:srgbClr val="EEEEEE"/>
-                      </a:solidFill>
-                      <a:prstDash val="solid"/>
-                      <a:round/>
-                      <a:headEnd type="none" w="med" len="med"/>
-                      <a:tailEnd type="none" w="med" len="med"/>
-                    </a:lnT>
-                    <a:lnB w="2540" cap="flat" cmpd="sng" algn="ctr">
-                      <a:solidFill>
-                        <a:srgbClr val="EEEEEE"/>
-                      </a:solidFill>
-                      <a:prstDash val="solid"/>
-                      <a:round/>
-                      <a:headEnd type="none" w="med" len="med"/>
-                      <a:tailEnd type="none" w="med" len="med"/>
-                    </a:lnB>
-                  </a:tcPr>
-                </a:tc>
-                <a:tc>
-                  <a:txBody>
-                    <a:bodyPr/>
-                    <a:lstStyle/>
-                    <a:p>
-                      <a:pPr algn="ctr" indent="0" marL="0">
-                        <a:buNone/>
-                      </a:pPr>
-                      <a:r>
-                        <a:rPr lang="en-US" sz="500" dirty="0">
-                          <a:solidFill>
-                            <a:srgbClr val="000000"/>
-                          </a:solidFill>
-                          <a:latin typeface="Calibri" pitchFamily="34" charset="0"/>
-                          <a:ea typeface="Calibri" pitchFamily="34" charset="-122"/>
-                          <a:cs typeface="Calibri" pitchFamily="34" charset="-120"/>
-                        </a:rPr>
-                        <a:t>0.01%</a:t>
-                      </a:r>
-                      <a:endParaRPr lang="en-US" sz="500" dirty="0">
-                        <a:latin typeface="Calibri" charset="0"/>
-                        <a:ea typeface="Calibri" charset="0"/>
-                        <a:cs typeface="Calibri" charset="0"/>
-                      </a:endParaRPr>
-                    </a:p>
-                  </a:txBody>
-                  <a:tcPr marL="91440" marR="91440" marT="45720" marB="45720">
-                    <a:lnL w="2540" cap="flat" cmpd="sng" algn="ctr">
-                      <a:solidFill>
-                        <a:srgbClr val="EEEEEE"/>
-                      </a:solidFill>
-                      <a:prstDash val="solid"/>
-                      <a:round/>
-                      <a:headEnd type="none" w="med" len="med"/>
-                      <a:tailEnd type="none" w="med" len="med"/>
-                    </a:lnL>
-                    <a:lnR w="2540" cap="flat" cmpd="sng" algn="ctr">
-                      <a:solidFill>
-                        <a:srgbClr val="EEEEEE"/>
-                      </a:solidFill>
-                      <a:prstDash val="solid"/>
-                      <a:round/>
-                      <a:headEnd type="none" w="med" len="med"/>
-                      <a:tailEnd type="none" w="med" len="med"/>
-                    </a:lnR>
-                    <a:lnT w="2540" cap="flat" cmpd="sng" algn="ctr">
-                      <a:solidFill>
-                        <a:srgbClr val="EEEEEE"/>
-                      </a:solidFill>
-                      <a:prstDash val="solid"/>
-                      <a:round/>
-                      <a:headEnd type="none" w="med" len="med"/>
-                      <a:tailEnd type="none" w="med" len="med"/>
-                    </a:lnT>
-                    <a:lnB w="2540" cap="flat" cmpd="sng" algn="ctr">
-                      <a:solidFill>
-                        <a:srgbClr val="EEEEEE"/>
-                      </a:solidFill>
-                      <a:prstDash val="solid"/>
-                      <a:round/>
-                      <a:headEnd type="none" w="med" len="med"/>
-                      <a:tailEnd type="none" w="med" len="med"/>
-                    </a:lnB>
-                  </a:tcPr>
-                </a:tc>
-                <a:tc>
-                  <a:txBody>
-                    <a:bodyPr/>
-                    <a:lstStyle/>
-                    <a:p>
-                      <a:pPr algn="ctr" indent="0" marL="0">
-                        <a:buNone/>
-                      </a:pPr>
-                      <a:r>
-                        <a:rPr lang="en-US" sz="500" dirty="0">
-                          <a:solidFill>
-                            <a:srgbClr val="000000"/>
-                          </a:solidFill>
-                          <a:latin typeface="Calibri" pitchFamily="34" charset="0"/>
-                          <a:ea typeface="Calibri" pitchFamily="34" charset="-122"/>
-                          <a:cs typeface="Calibri" pitchFamily="34" charset="-120"/>
-                        </a:rPr>
-                        <a:t>0.00%</a:t>
-                      </a:r>
-                      <a:endParaRPr lang="en-US" sz="500" dirty="0">
-                        <a:latin typeface="Calibri" charset="0"/>
-                        <a:ea typeface="Calibri" charset="0"/>
-                        <a:cs typeface="Calibri" charset="0"/>
-                      </a:endParaRPr>
-                    </a:p>
-                  </a:txBody>
-                  <a:tcPr marL="91440" marR="91440" marT="45720" marB="45720">
-                    <a:lnL w="2540" cap="flat" cmpd="sng" algn="ctr">
-                      <a:solidFill>
-                        <a:srgbClr val="EEEEEE"/>
-                      </a:solidFill>
-                      <a:prstDash val="solid"/>
-                      <a:round/>
-                      <a:headEnd type="none" w="med" len="med"/>
-                      <a:tailEnd type="none" w="med" len="med"/>
-                    </a:lnL>
-                    <a:lnR w="2540" cap="flat" cmpd="sng" algn="ctr">
-                      <a:solidFill>
-                        <a:srgbClr val="EEEEEE"/>
-                      </a:solidFill>
-                      <a:prstDash val="solid"/>
-                      <a:round/>
-                      <a:headEnd type="none" w="med" len="med"/>
-                      <a:tailEnd type="none" w="med" len="med"/>
-                    </a:lnR>
-                    <a:lnT w="2540" cap="flat" cmpd="sng" algn="ctr">
-                      <a:solidFill>
-                        <a:srgbClr val="EEEEEE"/>
-                      </a:solidFill>
-                      <a:prstDash val="solid"/>
-                      <a:round/>
-                      <a:headEnd type="none" w="med" len="med"/>
-                      <a:tailEnd type="none" w="med" len="med"/>
-                    </a:lnT>
-                    <a:lnB w="2540" cap="flat" cmpd="sng" algn="ctr">
-                      <a:solidFill>
-                        <a:srgbClr val="EEEEEE"/>
-                      </a:solidFill>
-                      <a:prstDash val="solid"/>
-                      <a:round/>
-                      <a:headEnd type="none" w="med" len="med"/>
-                      <a:tailEnd type="none" w="med" len="med"/>
-                    </a:lnB>
-                  </a:tcPr>
-                </a:tc>
-                <a:tc>
-                  <a:txBody>
-                    <a:bodyPr/>
-                    <a:lstStyle/>
-                    <a:p>
-                      <a:pPr algn="ctr" indent="0" marL="0">
-                        <a:buNone/>
-                      </a:pPr>
-                      <a:r>
-                        <a:rPr lang="en-US" sz="500" dirty="0">
-                          <a:solidFill>
-                            <a:srgbClr val="000000"/>
-                          </a:solidFill>
-                          <a:latin typeface="Calibri" pitchFamily="34" charset="0"/>
-                          <a:ea typeface="Calibri" pitchFamily="34" charset="-122"/>
-                          <a:cs typeface="Calibri" pitchFamily="34" charset="-120"/>
-                        </a:rPr>
-                        <a:t>0.00%</a:t>
-                      </a:r>
-                      <a:endParaRPr lang="en-US" sz="500" dirty="0">
-                        <a:latin typeface="Calibri" charset="0"/>
-                        <a:ea typeface="Calibri" charset="0"/>
-                        <a:cs typeface="Calibri" charset="0"/>
-                      </a:endParaRPr>
-                    </a:p>
-                  </a:txBody>
-                  <a:tcPr marL="91440" marR="91440" marT="45720" marB="45720">
-                    <a:lnL w="2540" cap="flat" cmpd="sng" algn="ctr">
-                      <a:solidFill>
-                        <a:srgbClr val="EEEEEE"/>
-                      </a:solidFill>
-                      <a:prstDash val="solid"/>
-                      <a:round/>
-                      <a:headEnd type="none" w="med" len="med"/>
-                      <a:tailEnd type="none" w="med" len="med"/>
-                    </a:lnL>
-                    <a:lnR w="2540" cap="flat" cmpd="sng" algn="ctr">
-                      <a:solidFill>
-                        <a:srgbClr val="EEEEEE"/>
-                      </a:solidFill>
-                      <a:prstDash val="solid"/>
-                      <a:round/>
-                      <a:headEnd type="none" w="med" len="med"/>
-                      <a:tailEnd type="none" w="med" len="med"/>
-                    </a:lnR>
-                    <a:lnT w="2540" cap="flat" cmpd="sng" algn="ctr">
-                      <a:solidFill>
-                        <a:srgbClr val="EEEEEE"/>
-                      </a:solidFill>
-                      <a:prstDash val="solid"/>
-                      <a:round/>
-                      <a:headEnd type="none" w="med" len="med"/>
-                      <a:tailEnd type="none" w="med" len="med"/>
-                    </a:lnT>
-                    <a:lnB w="2540" cap="flat" cmpd="sng" algn="ctr">
-                      <a:solidFill>
-                        <a:srgbClr val="EEEEEE"/>
-                      </a:solidFill>
-                      <a:prstDash val="solid"/>
-                      <a:round/>
-                      <a:headEnd type="none" w="med" len="med"/>
-                      <a:tailEnd type="none" w="med" len="med"/>
-                    </a:lnB>
-                  </a:tcPr>
-                </a:tc>
-                <a:tc>
-                  <a:txBody>
-                    <a:bodyPr/>
-                    <a:lstStyle/>
-                    <a:p>
-                      <a:pPr algn="ctr" indent="0" marL="0">
-                        <a:buNone/>
-                      </a:pPr>
-                      <a:r>
-                        <a:rPr lang="en-US" sz="500" dirty="0">
-                          <a:solidFill>
-                            <a:srgbClr val="000000"/>
-                          </a:solidFill>
-                          <a:latin typeface="Calibri" pitchFamily="34" charset="0"/>
-                          <a:ea typeface="Calibri" pitchFamily="34" charset="-122"/>
-                          <a:cs typeface="Calibri" pitchFamily="34" charset="-120"/>
-                        </a:rPr>
-                        <a:t>0.00%</a:t>
-                      </a:r>
-                      <a:endParaRPr lang="en-US" sz="500" dirty="0">
-                        <a:latin typeface="Calibri" charset="0"/>
-                        <a:ea typeface="Calibri" charset="0"/>
-                        <a:cs typeface="Calibri" charset="0"/>
-                      </a:endParaRPr>
-                    </a:p>
-                  </a:txBody>
-                  <a:tcPr marL="91440" marR="91440" marT="45720" marB="45720">
-                    <a:lnL w="2540" cap="flat" cmpd="sng" algn="ctr">
-                      <a:solidFill>
-                        <a:srgbClr val="EEEEEE"/>
-                      </a:solidFill>
-                      <a:prstDash val="solid"/>
-                      <a:round/>
-                      <a:headEnd type="none" w="med" len="med"/>
-                      <a:tailEnd type="none" w="med" len="med"/>
-                    </a:lnL>
-                    <a:lnR w="2540" cap="flat" cmpd="sng" algn="ctr">
-                      <a:solidFill>
-                        <a:srgbClr val="EEEEEE"/>
-                      </a:solidFill>
-                      <a:prstDash val="solid"/>
-                      <a:round/>
-                      <a:headEnd type="none" w="med" len="med"/>
-                      <a:tailEnd type="none" w="med" len="med"/>
-                    </a:lnR>
-                    <a:lnT w="2540" cap="flat" cmpd="sng" algn="ctr">
-                      <a:solidFill>
-                        <a:srgbClr val="EEEEEE"/>
-                      </a:solidFill>
-                      <a:prstDash val="solid"/>
-                      <a:round/>
-                      <a:headEnd type="none" w="med" len="med"/>
-                      <a:tailEnd type="none" w="med" len="med"/>
-                    </a:lnT>
-                    <a:lnB w="2540" cap="flat" cmpd="sng" algn="ctr">
-                      <a:solidFill>
-                        <a:srgbClr val="EEEEEE"/>
-                      </a:solidFill>
-                      <a:prstDash val="solid"/>
-                      <a:round/>
-                      <a:headEnd type="none" w="med" len="med"/>
-                      <a:tailEnd type="none" w="med" len="med"/>
-                    </a:lnB>
-                  </a:tcPr>
-                </a:tc>
-                <a:tc>
-                  <a:txBody>
-                    <a:bodyPr/>
-                    <a:lstStyle/>
-                    <a:p>
-                      <a:pPr algn="ctr" indent="0" marL="0">
-                        <a:buNone/>
-                      </a:pPr>
-                      <a:r>
-                        <a:rPr lang="en-US" sz="500" b="1" dirty="0">
-                          <a:solidFill>
-                            <a:srgbClr val="000000"/>
-                          </a:solidFill>
-                          <a:latin typeface="Calibri" pitchFamily="34" charset="0"/>
-                          <a:ea typeface="Calibri" pitchFamily="34" charset="-122"/>
-                          <a:cs typeface="Calibri" pitchFamily="34" charset="-120"/>
-                        </a:rPr>
-                        <a:t>0.06%</a:t>
-                      </a:r>
-                      <a:endParaRPr lang="en-US" sz="500" dirty="0">
-                        <a:latin typeface="Calibri" charset="0"/>
-                        <a:ea typeface="Calibri" charset="0"/>
-                        <a:cs typeface="Calibri" charset="0"/>
-                      </a:endParaRPr>
-                    </a:p>
-                  </a:txBody>
-                  <a:tcPr marL="91440" marR="91440" marT="45720" marB="45720">
-                    <a:lnL w="2540" cap="flat" cmpd="sng" algn="ctr">
-                      <a:solidFill>
-                        <a:srgbClr val="EEEEEE"/>
-                      </a:solidFill>
-                      <a:prstDash val="solid"/>
-                      <a:round/>
-                      <a:headEnd type="none" w="med" len="med"/>
-                      <a:tailEnd type="none" w="med" len="med"/>
-                    </a:lnL>
-                    <a:lnR w="2540" cap="flat" cmpd="sng" algn="ctr">
-                      <a:solidFill>
-                        <a:srgbClr val="EEEEEE"/>
-                      </a:solidFill>
-                      <a:prstDash val="solid"/>
-                      <a:round/>
-                      <a:headEnd type="none" w="med" len="med"/>
-                      <a:tailEnd type="none" w="med" len="med"/>
-                    </a:lnR>
-                    <a:lnT w="2540" cap="flat" cmpd="sng" algn="ctr">
-                      <a:solidFill>
-                        <a:srgbClr val="EEEEEE"/>
-                      </a:solidFill>
-                      <a:prstDash val="solid"/>
-                      <a:round/>
-                      <a:headEnd type="none" w="med" len="med"/>
-                      <a:tailEnd type="none" w="med" len="med"/>
-                    </a:lnT>
-                    <a:lnB w="2540" cap="flat" cmpd="sng" algn="ctr">
-                      <a:solidFill>
-                        <a:srgbClr val="EEEEEE"/>
-                      </a:solidFill>
-                      <a:prstDash val="solid"/>
-                      <a:round/>
-                      <a:headEnd type="none" w="med" len="med"/>
-                      <a:tailEnd type="none" w="med" len="med"/>
-                    </a:lnB>
-                  </a:tcPr>
-                </a:tc>
-              </a:tr>
-              <a:tr h="123444">
-                <a:tc>
-                  <a:txBody>
-                    <a:bodyPr/>
-                    <a:lstStyle/>
-                    <a:p>
-                      <a:pPr algn="l" indent="0" marL="0">
-                        <a:buNone/>
-                      </a:pPr>
-                      <a:r>
-                        <a:rPr lang="en-US" sz="500" b="1" dirty="0">
-                          <a:solidFill>
-                            <a:srgbClr val="000000"/>
-                          </a:solidFill>
-                          <a:latin typeface="Calibri" pitchFamily="34" charset="0"/>
-                          <a:ea typeface="Calibri" pitchFamily="34" charset="-122"/>
-                          <a:cs typeface="Calibri" pitchFamily="34" charset="-120"/>
-                        </a:rPr>
-                        <a:t>2025</a:t>
-                      </a:r>
-                      <a:endParaRPr lang="en-US" sz="500" dirty="0">
-                        <a:latin typeface="Calibri" charset="0"/>
-                        <a:ea typeface="Calibri" charset="0"/>
-                        <a:cs typeface="Calibri" charset="0"/>
-                      </a:endParaRPr>
-                    </a:p>
-                  </a:txBody>
-                  <a:tcPr marL="91440" marR="91440" marT="45720" marB="45720">
-                    <a:lnL w="2540" cap="flat" cmpd="sng" algn="ctr">
-                      <a:solidFill>
-                        <a:srgbClr val="EEEEEE"/>
-                      </a:solidFill>
-                      <a:prstDash val="solid"/>
-                      <a:round/>
-                      <a:headEnd type="none" w="med" len="med"/>
-                      <a:tailEnd type="none" w="med" len="med"/>
-                    </a:lnL>
-                    <a:lnR w="2540" cap="flat" cmpd="sng" algn="ctr">
-                      <a:solidFill>
-                        <a:srgbClr val="EEEEEE"/>
-                      </a:solidFill>
-                      <a:prstDash val="solid"/>
-                      <a:round/>
-                      <a:headEnd type="none" w="med" len="med"/>
-                      <a:tailEnd type="none" w="med" len="med"/>
-                    </a:lnR>
-                    <a:lnT w="2540" cap="flat" cmpd="sng" algn="ctr">
-                      <a:solidFill>
-                        <a:srgbClr val="EEEEEE"/>
-                      </a:solidFill>
-                      <a:prstDash val="solid"/>
-                      <a:round/>
-                      <a:headEnd type="none" w="med" len="med"/>
-                      <a:tailEnd type="none" w="med" len="med"/>
-                    </a:lnT>
-                    <a:lnB w="2540" cap="flat" cmpd="sng" algn="ctr">
-                      <a:solidFill>
-                        <a:srgbClr val="EEEEEE"/>
-                      </a:solidFill>
-                      <a:prstDash val="solid"/>
-                      <a:round/>
-                      <a:headEnd type="none" w="med" len="med"/>
-                      <a:tailEnd type="none" w="med" len="med"/>
-                    </a:lnB>
-                  </a:tcPr>
-                </a:tc>
-                <a:tc>
-                  <a:txBody>
-                    <a:bodyPr/>
-                    <a:lstStyle/>
-                    <a:p>
-                      <a:pPr algn="l" indent="0" marL="0">
-                        <a:buNone/>
-                      </a:pPr>
-                      <a:r>
-                        <a:rPr lang="en-US" sz="500" dirty="0">
-                          <a:solidFill>
-                            <a:srgbClr val="777777"/>
-                          </a:solidFill>
-                          <a:latin typeface="Calibri" pitchFamily="34" charset="0"/>
-                          <a:ea typeface="Calibri" pitchFamily="34" charset="-122"/>
-                          <a:cs typeface="Calibri" pitchFamily="34" charset="-120"/>
-                        </a:rPr>
-                        <a:t>ICP</a:t>
-                      </a:r>
-                      <a:endParaRPr lang="en-US" sz="500" dirty="0">
-                        <a:latin typeface="Calibri" charset="0"/>
-                        <a:ea typeface="Calibri" charset="0"/>
-                        <a:cs typeface="Calibri" charset="0"/>
-                      </a:endParaRPr>
-                    </a:p>
-                  </a:txBody>
-                  <a:tcPr marL="91440" marR="91440" marT="45720" marB="45720">
-                    <a:lnL w="2540" cap="flat" cmpd="sng" algn="ctr">
-                      <a:solidFill>
-                        <a:srgbClr val="EEEEEE"/>
-                      </a:solidFill>
-                      <a:prstDash val="solid"/>
-                      <a:round/>
-                      <a:headEnd type="none" w="med" len="med"/>
-                      <a:tailEnd type="none" w="med" len="med"/>
-                    </a:lnL>
-                    <a:lnR w="2540" cap="flat" cmpd="sng" algn="ctr">
-                      <a:solidFill>
-                        <a:srgbClr val="EEEEEE"/>
-                      </a:solidFill>
-                      <a:prstDash val="solid"/>
-                      <a:round/>
-                      <a:headEnd type="none" w="med" len="med"/>
-                      <a:tailEnd type="none" w="med" len="med"/>
-                    </a:lnR>
-                    <a:lnT w="2540" cap="flat" cmpd="sng" algn="ctr">
-                      <a:solidFill>
-                        <a:srgbClr val="EEEEEE"/>
-                      </a:solidFill>
-                      <a:prstDash val="solid"/>
-                      <a:round/>
-                      <a:headEnd type="none" w="med" len="med"/>
-                      <a:tailEnd type="none" w="med" len="med"/>
-                    </a:lnT>
-                    <a:lnB w="2540" cap="flat" cmpd="sng" algn="ctr">
-                      <a:solidFill>
-                        <a:srgbClr val="EEEEEE"/>
-                      </a:solidFill>
-                      <a:prstDash val="solid"/>
-                      <a:round/>
-                      <a:headEnd type="none" w="med" len="med"/>
-                      <a:tailEnd type="none" w="med" len="med"/>
-                    </a:lnB>
-                  </a:tcPr>
-                </a:tc>
-                <a:tc>
-                  <a:txBody>
-                    <a:bodyPr/>
-                    <a:lstStyle/>
-                    <a:p>
-                      <a:pPr algn="ctr" indent="0" marL="0">
-                        <a:buNone/>
-                      </a:pPr>
-                      <a:r>
-                        <a:rPr lang="en-US" sz="500" dirty="0">
-                          <a:solidFill>
-                            <a:srgbClr val="777777"/>
-                          </a:solidFill>
-                          <a:latin typeface="Calibri" pitchFamily="34" charset="0"/>
-                          <a:ea typeface="Calibri" pitchFamily="34" charset="-122"/>
-                          <a:cs typeface="Calibri" pitchFamily="34" charset="-120"/>
-                        </a:rPr>
-                        <a:t>0.42%</a:t>
-                      </a:r>
-                      <a:endParaRPr lang="en-US" sz="500" dirty="0">
-                        <a:latin typeface="Calibri" charset="0"/>
-                        <a:ea typeface="Calibri" charset="0"/>
-                        <a:cs typeface="Calibri" charset="0"/>
-                      </a:endParaRPr>
-                    </a:p>
-                  </a:txBody>
-                  <a:tcPr marL="91440" marR="91440" marT="45720" marB="45720">
-                    <a:lnL w="2540" cap="flat" cmpd="sng" algn="ctr">
-                      <a:solidFill>
-                        <a:srgbClr val="EEEEEE"/>
-                      </a:solidFill>
-                      <a:prstDash val="solid"/>
-                      <a:round/>
-                      <a:headEnd type="none" w="med" len="med"/>
-                      <a:tailEnd type="none" w="med" len="med"/>
-                    </a:lnL>
-                    <a:lnR w="2540" cap="flat" cmpd="sng" algn="ctr">
-                      <a:solidFill>
-                        <a:srgbClr val="EEEEEE"/>
-                      </a:solidFill>
-                      <a:prstDash val="solid"/>
-                      <a:round/>
-                      <a:headEnd type="none" w="med" len="med"/>
-                      <a:tailEnd type="none" w="med" len="med"/>
-                    </a:lnR>
-                    <a:lnT w="2540" cap="flat" cmpd="sng" algn="ctr">
-                      <a:solidFill>
-                        <a:srgbClr val="EEEEEE"/>
-                      </a:solidFill>
-                      <a:prstDash val="solid"/>
-                      <a:round/>
-                      <a:headEnd type="none" w="med" len="med"/>
-                      <a:tailEnd type="none" w="med" len="med"/>
-                    </a:lnT>
-                    <a:lnB w="2540" cap="flat" cmpd="sng" algn="ctr">
-                      <a:solidFill>
-                        <a:srgbClr val="EEEEEE"/>
-                      </a:solidFill>
-                      <a:prstDash val="solid"/>
-                      <a:round/>
-                      <a:headEnd type="none" w="med" len="med"/>
-                      <a:tailEnd type="none" w="med" len="med"/>
-                    </a:lnB>
-                  </a:tcPr>
-                </a:tc>
-                <a:tc>
-                  <a:txBody>
-                    <a:bodyPr/>
-                    <a:lstStyle/>
-                    <a:p>
-                      <a:pPr algn="ctr" indent="0" marL="0">
-                        <a:buNone/>
-                      </a:pPr>
-                      <a:r>
-                        <a:rPr lang="en-US" sz="500" dirty="0">
-                          <a:solidFill>
-                            <a:srgbClr val="777777"/>
-                          </a:solidFill>
-                          <a:latin typeface="Calibri" pitchFamily="34" charset="0"/>
-                          <a:ea typeface="Calibri" pitchFamily="34" charset="-122"/>
-                          <a:cs typeface="Calibri" pitchFamily="34" charset="-120"/>
-                        </a:rPr>
-                        <a:t>0.42%</a:t>
-                      </a:r>
-                      <a:endParaRPr lang="en-US" sz="500" dirty="0">
-                        <a:latin typeface="Calibri" charset="0"/>
-                        <a:ea typeface="Calibri" charset="0"/>
-                        <a:cs typeface="Calibri" charset="0"/>
-                      </a:endParaRPr>
-                    </a:p>
-                  </a:txBody>
-                  <a:tcPr marL="91440" marR="91440" marT="45720" marB="45720">
-                    <a:lnL w="2540" cap="flat" cmpd="sng" algn="ctr">
-                      <a:solidFill>
-                        <a:srgbClr val="EEEEEE"/>
-                      </a:solidFill>
-                      <a:prstDash val="solid"/>
-                      <a:round/>
-                      <a:headEnd type="none" w="med" len="med"/>
-                      <a:tailEnd type="none" w="med" len="med"/>
-                    </a:lnL>
-                    <a:lnR w="2540" cap="flat" cmpd="sng" algn="ctr">
-                      <a:solidFill>
-                        <a:srgbClr val="EEEEEE"/>
-                      </a:solidFill>
-                      <a:prstDash val="solid"/>
-                      <a:round/>
-                      <a:headEnd type="none" w="med" len="med"/>
-                      <a:tailEnd type="none" w="med" len="med"/>
-                    </a:lnR>
-                    <a:lnT w="2540" cap="flat" cmpd="sng" algn="ctr">
-                      <a:solidFill>
-                        <a:srgbClr val="EEEEEE"/>
-                      </a:solidFill>
-                      <a:prstDash val="solid"/>
-                      <a:round/>
-                      <a:headEnd type="none" w="med" len="med"/>
-                      <a:tailEnd type="none" w="med" len="med"/>
-                    </a:lnT>
-                    <a:lnB w="2540" cap="flat" cmpd="sng" algn="ctr">
-                      <a:solidFill>
-                        <a:srgbClr val="EEEEEE"/>
-                      </a:solidFill>
-                      <a:prstDash val="solid"/>
-                      <a:round/>
-                      <a:headEnd type="none" w="med" len="med"/>
-                      <a:tailEnd type="none" w="med" len="med"/>
-                    </a:lnB>
-                  </a:tcPr>
-                </a:tc>
-                <a:tc>
-                  <a:txBody>
-                    <a:bodyPr/>
-                    <a:lstStyle/>
-                    <a:p>
-                      <a:pPr algn="ctr" indent="0" marL="0">
-                        <a:buNone/>
-                      </a:pPr>
-                      <a:r>
-                        <a:rPr lang="en-US" sz="500" dirty="0">
-                          <a:solidFill>
-                            <a:srgbClr val="777777"/>
-                          </a:solidFill>
-                          <a:latin typeface="Calibri" pitchFamily="34" charset="0"/>
-                          <a:ea typeface="Calibri" pitchFamily="34" charset="-122"/>
-                          <a:cs typeface="Calibri" pitchFamily="34" charset="-120"/>
-                        </a:rPr>
-                        <a:t>0.42%</a:t>
-                      </a:r>
-                      <a:endParaRPr lang="en-US" sz="500" dirty="0">
-                        <a:latin typeface="Calibri" charset="0"/>
-                        <a:ea typeface="Calibri" charset="0"/>
-                        <a:cs typeface="Calibri" charset="0"/>
-                      </a:endParaRPr>
-                    </a:p>
-                  </a:txBody>
-                  <a:tcPr marL="91440" marR="91440" marT="45720" marB="45720">
-                    <a:lnL w="2540" cap="flat" cmpd="sng" algn="ctr">
-                      <a:solidFill>
-                        <a:srgbClr val="EEEEEE"/>
-                      </a:solidFill>
-                      <a:prstDash val="solid"/>
-                      <a:round/>
-                      <a:headEnd type="none" w="med" len="med"/>
-                      <a:tailEnd type="none" w="med" len="med"/>
-                    </a:lnL>
-                    <a:lnR w="2540" cap="flat" cmpd="sng" algn="ctr">
-                      <a:solidFill>
-                        <a:srgbClr val="EEEEEE"/>
-                      </a:solidFill>
-                      <a:prstDash val="solid"/>
-                      <a:round/>
-                      <a:headEnd type="none" w="med" len="med"/>
-                      <a:tailEnd type="none" w="med" len="med"/>
-                    </a:lnR>
-                    <a:lnT w="2540" cap="flat" cmpd="sng" algn="ctr">
-                      <a:solidFill>
-                        <a:srgbClr val="EEEEEE"/>
-                      </a:solidFill>
-                      <a:prstDash val="solid"/>
-                      <a:round/>
-                      <a:headEnd type="none" w="med" len="med"/>
-                      <a:tailEnd type="none" w="med" len="med"/>
-                    </a:lnT>
-                    <a:lnB w="2540" cap="flat" cmpd="sng" algn="ctr">
-                      <a:solidFill>
-                        <a:srgbClr val="EEEEEE"/>
-                      </a:solidFill>
-                      <a:prstDash val="solid"/>
-                      <a:round/>
-                      <a:headEnd type="none" w="med" len="med"/>
-                      <a:tailEnd type="none" w="med" len="med"/>
-                    </a:lnB>
-                  </a:tcPr>
-                </a:tc>
-                <a:tc>
-                  <a:txBody>
-                    <a:bodyPr/>
-                    <a:lstStyle/>
-                    <a:p>
-                      <a:pPr algn="ctr" indent="0" marL="0">
-                        <a:buNone/>
-                      </a:pPr>
-                      <a:r>
-                        <a:rPr lang="en-US" sz="500" dirty="0">
-                          <a:solidFill>
-                            <a:srgbClr val="777777"/>
-                          </a:solidFill>
-                          <a:latin typeface="Calibri" pitchFamily="34" charset="0"/>
-                          <a:ea typeface="Calibri" pitchFamily="34" charset="-122"/>
-                          <a:cs typeface="Calibri" pitchFamily="34" charset="-120"/>
-                        </a:rPr>
-                        <a:t>0.42%</a:t>
-                      </a:r>
-                      <a:endParaRPr lang="en-US" sz="500" dirty="0">
-                        <a:latin typeface="Calibri" charset="0"/>
-                        <a:ea typeface="Calibri" charset="0"/>
-                        <a:cs typeface="Calibri" charset="0"/>
-                      </a:endParaRPr>
-                    </a:p>
-                  </a:txBody>
-                  <a:tcPr marL="91440" marR="91440" marT="45720" marB="45720">
-                    <a:lnL w="2540" cap="flat" cmpd="sng" algn="ctr">
-                      <a:solidFill>
-                        <a:srgbClr val="EEEEEE"/>
-                      </a:solidFill>
-                      <a:prstDash val="solid"/>
-                      <a:round/>
-                      <a:headEnd type="none" w="med" len="med"/>
-                      <a:tailEnd type="none" w="med" len="med"/>
-                    </a:lnL>
-                    <a:lnR w="2540" cap="flat" cmpd="sng" algn="ctr">
-                      <a:solidFill>
-                        <a:srgbClr val="EEEEEE"/>
-                      </a:solidFill>
-                      <a:prstDash val="solid"/>
-                      <a:round/>
-                      <a:headEnd type="none" w="med" len="med"/>
-                      <a:tailEnd type="none" w="med" len="med"/>
-                    </a:lnR>
-                    <a:lnT w="2540" cap="flat" cmpd="sng" algn="ctr">
-                      <a:solidFill>
-                        <a:srgbClr val="EEEEEE"/>
-                      </a:solidFill>
-                      <a:prstDash val="solid"/>
-                      <a:round/>
-                      <a:headEnd type="none" w="med" len="med"/>
-                      <a:tailEnd type="none" w="med" len="med"/>
-                    </a:lnT>
-                    <a:lnB w="2540" cap="flat" cmpd="sng" algn="ctr">
-                      <a:solidFill>
-                        <a:srgbClr val="EEEEEE"/>
-                      </a:solidFill>
-                      <a:prstDash val="solid"/>
-                      <a:round/>
-                      <a:headEnd type="none" w="med" len="med"/>
-                      <a:tailEnd type="none" w="med" len="med"/>
-                    </a:lnB>
-                  </a:tcPr>
-                </a:tc>
-                <a:tc>
-                  <a:txBody>
-                    <a:bodyPr/>
-                    <a:lstStyle/>
-                    <a:p>
-                      <a:pPr algn="ctr" indent="0" marL="0">
-                        <a:buNone/>
-                      </a:pPr>
-                      <a:r>
-                        <a:rPr lang="en-US" sz="500" dirty="0">
-                          <a:solidFill>
-                            <a:srgbClr val="777777"/>
-                          </a:solidFill>
-                          <a:latin typeface="Calibri" pitchFamily="34" charset="0"/>
-                          <a:ea typeface="Calibri" pitchFamily="34" charset="-122"/>
-                          <a:cs typeface="Calibri" pitchFamily="34" charset="-120"/>
-                        </a:rPr>
-                        <a:t>0.42%</a:t>
-                      </a:r>
-                      <a:endParaRPr lang="en-US" sz="500" dirty="0">
-                        <a:latin typeface="Calibri" charset="0"/>
-                        <a:ea typeface="Calibri" charset="0"/>
-                        <a:cs typeface="Calibri" charset="0"/>
-                      </a:endParaRPr>
-                    </a:p>
-                  </a:txBody>
-                  <a:tcPr marL="91440" marR="91440" marT="45720" marB="45720">
-                    <a:lnL w="2540" cap="flat" cmpd="sng" algn="ctr">
-                      <a:solidFill>
-                        <a:srgbClr val="EEEEEE"/>
-                      </a:solidFill>
-                      <a:prstDash val="solid"/>
-                      <a:round/>
-                      <a:headEnd type="none" w="med" len="med"/>
-                      <a:tailEnd type="none" w="med" len="med"/>
-                    </a:lnL>
-                    <a:lnR w="2540" cap="flat" cmpd="sng" algn="ctr">
-                      <a:solidFill>
-                        <a:srgbClr val="EEEEEE"/>
-                      </a:solidFill>
-                      <a:prstDash val="solid"/>
-                      <a:round/>
-                      <a:headEnd type="none" w="med" len="med"/>
-                      <a:tailEnd type="none" w="med" len="med"/>
-                    </a:lnR>
-                    <a:lnT w="2540" cap="flat" cmpd="sng" algn="ctr">
-                      <a:solidFill>
-                        <a:srgbClr val="EEEEEE"/>
-                      </a:solidFill>
-                      <a:prstDash val="solid"/>
-                      <a:round/>
-                      <a:headEnd type="none" w="med" len="med"/>
-                      <a:tailEnd type="none" w="med" len="med"/>
-                    </a:lnT>
-                    <a:lnB w="2540" cap="flat" cmpd="sng" algn="ctr">
-                      <a:solidFill>
-                        <a:srgbClr val="EEEEEE"/>
-                      </a:solidFill>
-                      <a:prstDash val="solid"/>
-                      <a:round/>
-                      <a:headEnd type="none" w="med" len="med"/>
-                      <a:tailEnd type="none" w="med" len="med"/>
-                    </a:lnB>
-                  </a:tcPr>
-                </a:tc>
-                <a:tc>
-                  <a:txBody>
-                    <a:bodyPr/>
-                    <a:lstStyle/>
-                    <a:p>
-                      <a:pPr algn="ctr" indent="0" marL="0">
-                        <a:buNone/>
-                      </a:pPr>
-                      <a:r>
-                        <a:rPr lang="en-US" sz="500" dirty="0">
-                          <a:solidFill>
-                            <a:srgbClr val="777777"/>
-                          </a:solidFill>
-                          <a:latin typeface="Calibri" pitchFamily="34" charset="0"/>
-                          <a:ea typeface="Calibri" pitchFamily="34" charset="-122"/>
-                          <a:cs typeface="Calibri" pitchFamily="34" charset="-120"/>
-                        </a:rPr>
-                        <a:t>0.42%</a:t>
-                      </a:r>
-                      <a:endParaRPr lang="en-US" sz="500" dirty="0">
-                        <a:latin typeface="Calibri" charset="0"/>
-                        <a:ea typeface="Calibri" charset="0"/>
-                        <a:cs typeface="Calibri" charset="0"/>
-                      </a:endParaRPr>
-                    </a:p>
-                  </a:txBody>
-                  <a:tcPr marL="91440" marR="91440" marT="45720" marB="45720">
-                    <a:lnL w="2540" cap="flat" cmpd="sng" algn="ctr">
-                      <a:solidFill>
-                        <a:srgbClr val="EEEEEE"/>
-                      </a:solidFill>
-                      <a:prstDash val="solid"/>
-                      <a:round/>
-                      <a:headEnd type="none" w="med" len="med"/>
-                      <a:tailEnd type="none" w="med" len="med"/>
-                    </a:lnL>
-                    <a:lnR w="2540" cap="flat" cmpd="sng" algn="ctr">
-                      <a:solidFill>
-                        <a:srgbClr val="EEEEEE"/>
-                      </a:solidFill>
-                      <a:prstDash val="solid"/>
-                      <a:round/>
-                      <a:headEnd type="none" w="med" len="med"/>
-                      <a:tailEnd type="none" w="med" len="med"/>
-                    </a:lnR>
-                    <a:lnT w="2540" cap="flat" cmpd="sng" algn="ctr">
-                      <a:solidFill>
-                        <a:srgbClr val="EEEEEE"/>
-                      </a:solidFill>
-                      <a:prstDash val="solid"/>
-                      <a:round/>
-                      <a:headEnd type="none" w="med" len="med"/>
-                      <a:tailEnd type="none" w="med" len="med"/>
-                    </a:lnT>
-                    <a:lnB w="2540" cap="flat" cmpd="sng" algn="ctr">
-                      <a:solidFill>
-                        <a:srgbClr val="EEEEEE"/>
-                      </a:solidFill>
-                      <a:prstDash val="solid"/>
-                      <a:round/>
-                      <a:headEnd type="none" w="med" len="med"/>
-                      <a:tailEnd type="none" w="med" len="med"/>
-                    </a:lnB>
-                  </a:tcPr>
-                </a:tc>
-                <a:tc>
-                  <a:txBody>
-                    <a:bodyPr/>
-                    <a:lstStyle/>
-                    <a:p>
-                      <a:pPr algn="ctr" indent="0" marL="0">
-                        <a:buNone/>
-                      </a:pPr>
-                      <a:r>
-                        <a:rPr lang="en-US" sz="500" dirty="0">
-                          <a:solidFill>
-                            <a:srgbClr val="777777"/>
-                          </a:solidFill>
-                          <a:latin typeface="Calibri" pitchFamily="34" charset="0"/>
-                          <a:ea typeface="Calibri" pitchFamily="34" charset="-122"/>
-                          <a:cs typeface="Calibri" pitchFamily="34" charset="-120"/>
-                        </a:rPr>
-                        <a:t>0.41%</a:t>
-                      </a:r>
-                      <a:endParaRPr lang="en-US" sz="500" dirty="0">
-                        <a:latin typeface="Calibri" charset="0"/>
-                        <a:ea typeface="Calibri" charset="0"/>
-                        <a:cs typeface="Calibri" charset="0"/>
-                      </a:endParaRPr>
-                    </a:p>
-                  </a:txBody>
-                  <a:tcPr marL="91440" marR="91440" marT="45720" marB="45720">
-                    <a:lnL w="2540" cap="flat" cmpd="sng" algn="ctr">
-                      <a:solidFill>
-                        <a:srgbClr val="EEEEEE"/>
-                      </a:solidFill>
-                      <a:prstDash val="solid"/>
-                      <a:round/>
-                      <a:headEnd type="none" w="med" len="med"/>
-                      <a:tailEnd type="none" w="med" len="med"/>
-                    </a:lnL>
-                    <a:lnR w="2540" cap="flat" cmpd="sng" algn="ctr">
-                      <a:solidFill>
-                        <a:srgbClr val="EEEEEE"/>
-                      </a:solidFill>
-                      <a:prstDash val="solid"/>
-                      <a:round/>
-                      <a:headEnd type="none" w="med" len="med"/>
-                      <a:tailEnd type="none" w="med" len="med"/>
-                    </a:lnR>
-                    <a:lnT w="2540" cap="flat" cmpd="sng" algn="ctr">
-                      <a:solidFill>
-                        <a:srgbClr val="EEEEEE"/>
-                      </a:solidFill>
-                      <a:prstDash val="solid"/>
-                      <a:round/>
-                      <a:headEnd type="none" w="med" len="med"/>
-                      <a:tailEnd type="none" w="med" len="med"/>
-                    </a:lnT>
-                    <a:lnB w="2540" cap="flat" cmpd="sng" algn="ctr">
-                      <a:solidFill>
-                        <a:srgbClr val="EEEEEE"/>
-                      </a:solidFill>
-                      <a:prstDash val="solid"/>
-                      <a:round/>
-                      <a:headEnd type="none" w="med" len="med"/>
-                      <a:tailEnd type="none" w="med" len="med"/>
-                    </a:lnB>
-                  </a:tcPr>
-                </a:tc>
-                <a:tc>
-                  <a:txBody>
-                    <a:bodyPr/>
-                    <a:lstStyle/>
-                    <a:p>
-                      <a:pPr algn="ctr" indent="0" marL="0">
-                        <a:buNone/>
-                      </a:pPr>
-                      <a:r>
-                        <a:rPr lang="en-US" sz="500" dirty="0">
-                          <a:solidFill>
-                            <a:srgbClr val="777777"/>
-                          </a:solidFill>
-                          <a:latin typeface="Calibri" pitchFamily="34" charset="0"/>
-                          <a:ea typeface="Calibri" pitchFamily="34" charset="-122"/>
-                          <a:cs typeface="Calibri" pitchFamily="34" charset="-120"/>
-                        </a:rPr>
-                        <a:t>0.40%</a:t>
-                      </a:r>
-                      <a:endParaRPr lang="en-US" sz="500" dirty="0">
-                        <a:latin typeface="Calibri" charset="0"/>
-                        <a:ea typeface="Calibri" charset="0"/>
-                        <a:cs typeface="Calibri" charset="0"/>
-                      </a:endParaRPr>
-                    </a:p>
-                  </a:txBody>
-                  <a:tcPr marL="91440" marR="91440" marT="45720" marB="45720">
-                    <a:lnL w="2540" cap="flat" cmpd="sng" algn="ctr">
-                      <a:solidFill>
-                        <a:srgbClr val="EEEEEE"/>
-                      </a:solidFill>
-                      <a:prstDash val="solid"/>
-                      <a:round/>
-                      <a:headEnd type="none" w="med" len="med"/>
-                      <a:tailEnd type="none" w="med" len="med"/>
-                    </a:lnL>
-                    <a:lnR w="2540" cap="flat" cmpd="sng" algn="ctr">
-                      <a:solidFill>
-                        <a:srgbClr val="EEEEEE"/>
-                      </a:solidFill>
-                      <a:prstDash val="solid"/>
-                      <a:round/>
-                      <a:headEnd type="none" w="med" len="med"/>
-                      <a:tailEnd type="none" w="med" len="med"/>
-                    </a:lnR>
-                    <a:lnT w="2540" cap="flat" cmpd="sng" algn="ctr">
-                      <a:solidFill>
-                        <a:srgbClr val="EEEEEE"/>
-                      </a:solidFill>
-                      <a:prstDash val="solid"/>
-                      <a:round/>
-                      <a:headEnd type="none" w="med" len="med"/>
-                      <a:tailEnd type="none" w="med" len="med"/>
-                    </a:lnT>
-                    <a:lnB w="2540" cap="flat" cmpd="sng" algn="ctr">
-                      <a:solidFill>
-                        <a:srgbClr val="EEEEEE"/>
-                      </a:solidFill>
-                      <a:prstDash val="solid"/>
-                      <a:round/>
-                      <a:headEnd type="none" w="med" len="med"/>
-                      <a:tailEnd type="none" w="med" len="med"/>
-                    </a:lnB>
-                  </a:tcPr>
-                </a:tc>
-                <a:tc>
-                  <a:txBody>
-                    <a:bodyPr/>
-                    <a:lstStyle/>
-                    <a:p>
-                      <a:pPr algn="ctr" indent="0" marL="0">
-                        <a:buNone/>
-                      </a:pPr>
-                      <a:r>
-                        <a:rPr lang="en-US" sz="500" dirty="0">
-                          <a:solidFill>
-                            <a:srgbClr val="777777"/>
-                          </a:solidFill>
-                          <a:latin typeface="Calibri" pitchFamily="34" charset="0"/>
-                          <a:ea typeface="Calibri" pitchFamily="34" charset="-122"/>
-                          <a:cs typeface="Calibri" pitchFamily="34" charset="-120"/>
-                        </a:rPr>
-                        <a:t>0.40%</a:t>
-                      </a:r>
-                      <a:endParaRPr lang="en-US" sz="500" dirty="0">
-                        <a:latin typeface="Calibri" charset="0"/>
-                        <a:ea typeface="Calibri" charset="0"/>
-                        <a:cs typeface="Calibri" charset="0"/>
-                      </a:endParaRPr>
-                    </a:p>
-                  </a:txBody>
-                  <a:tcPr marL="91440" marR="91440" marT="45720" marB="45720">
-                    <a:lnL w="2540" cap="flat" cmpd="sng" algn="ctr">
-                      <a:solidFill>
-                        <a:srgbClr val="EEEEEE"/>
-                      </a:solidFill>
-                      <a:prstDash val="solid"/>
-                      <a:round/>
-                      <a:headEnd type="none" w="med" len="med"/>
-                      <a:tailEnd type="none" w="med" len="med"/>
-                    </a:lnL>
-                    <a:lnR w="2540" cap="flat" cmpd="sng" algn="ctr">
-                      <a:solidFill>
-                        <a:srgbClr val="EEEEEE"/>
-                      </a:solidFill>
-                      <a:prstDash val="solid"/>
-                      <a:round/>
-                      <a:headEnd type="none" w="med" len="med"/>
-                      <a:tailEnd type="none" w="med" len="med"/>
-                    </a:lnR>
-                    <a:lnT w="2540" cap="flat" cmpd="sng" algn="ctr">
-                      <a:solidFill>
-                        <a:srgbClr val="EEEEEE"/>
-                      </a:solidFill>
-                      <a:prstDash val="solid"/>
-                      <a:round/>
-                      <a:headEnd type="none" w="med" len="med"/>
-                      <a:tailEnd type="none" w="med" len="med"/>
-                    </a:lnT>
-                    <a:lnB w="2540" cap="flat" cmpd="sng" algn="ctr">
-                      <a:solidFill>
-                        <a:srgbClr val="EEEEEE"/>
-                      </a:solidFill>
-                      <a:prstDash val="solid"/>
-                      <a:round/>
-                      <a:headEnd type="none" w="med" len="med"/>
-                      <a:tailEnd type="none" w="med" len="med"/>
-                    </a:lnB>
-                  </a:tcPr>
-                </a:tc>
-                <a:tc>
-                  <a:txBody>
-                    <a:bodyPr/>
-                    <a:lstStyle/>
-                    <a:p>
-                      <a:pPr algn="ctr" indent="0" marL="0">
-                        <a:buNone/>
-                      </a:pPr>
-                      <a:r>
-                        <a:rPr lang="en-US" sz="500" dirty="0">
-                          <a:solidFill>
-                            <a:srgbClr val="777777"/>
-                          </a:solidFill>
-                          <a:latin typeface="Calibri" pitchFamily="34" charset="0"/>
-                          <a:ea typeface="Calibri" pitchFamily="34" charset="-122"/>
-                          <a:cs typeface="Calibri" pitchFamily="34" charset="-120"/>
-                        </a:rPr>
-                        <a:t>0.40%</a:t>
-                      </a:r>
-                      <a:endParaRPr lang="en-US" sz="500" dirty="0">
-                        <a:latin typeface="Calibri" charset="0"/>
-                        <a:ea typeface="Calibri" charset="0"/>
-                        <a:cs typeface="Calibri" charset="0"/>
-                      </a:endParaRPr>
-                    </a:p>
-                  </a:txBody>
-                  <a:tcPr marL="91440" marR="91440" marT="45720" marB="45720">
-                    <a:lnL w="2540" cap="flat" cmpd="sng" algn="ctr">
-                      <a:solidFill>
-                        <a:srgbClr val="EEEEEE"/>
-                      </a:solidFill>
-                      <a:prstDash val="solid"/>
-                      <a:round/>
-                      <a:headEnd type="none" w="med" len="med"/>
-                      <a:tailEnd type="none" w="med" len="med"/>
-                    </a:lnL>
-                    <a:lnR w="2540" cap="flat" cmpd="sng" algn="ctr">
-                      <a:solidFill>
-                        <a:srgbClr val="EEEEEE"/>
-                      </a:solidFill>
-                      <a:prstDash val="solid"/>
-                      <a:round/>
-                      <a:headEnd type="none" w="med" len="med"/>
-                      <a:tailEnd type="none" w="med" len="med"/>
-                    </a:lnR>
-                    <a:lnT w="2540" cap="flat" cmpd="sng" algn="ctr">
-                      <a:solidFill>
-                        <a:srgbClr val="EEEEEE"/>
-                      </a:solidFill>
-                      <a:prstDash val="solid"/>
-                      <a:round/>
-                      <a:headEnd type="none" w="med" len="med"/>
-                      <a:tailEnd type="none" w="med" len="med"/>
-                    </a:lnT>
-                    <a:lnB w="2540" cap="flat" cmpd="sng" algn="ctr">
-                      <a:solidFill>
-                        <a:srgbClr val="EEEEEE"/>
-                      </a:solidFill>
-                      <a:prstDash val="solid"/>
-                      <a:round/>
-                      <a:headEnd type="none" w="med" len="med"/>
-                      <a:tailEnd type="none" w="med" len="med"/>
-                    </a:lnB>
-                  </a:tcPr>
-                </a:tc>
-                <a:tc>
-                  <a:txBody>
-                    <a:bodyPr/>
-                    <a:lstStyle/>
-                    <a:p>
-                      <a:pPr algn="ctr" indent="0" marL="0">
-                        <a:buNone/>
-                      </a:pPr>
-                      <a:r>
-                        <a:rPr lang="en-US" sz="500" dirty="0">
-                          <a:solidFill>
-                            <a:srgbClr val="777777"/>
-                          </a:solidFill>
-                          <a:latin typeface="Calibri" pitchFamily="34" charset="0"/>
-                          <a:ea typeface="Calibri" pitchFamily="34" charset="-122"/>
-                          <a:cs typeface="Calibri" pitchFamily="34" charset="-120"/>
-                        </a:rPr>
-                        <a:t>0.40%</a:t>
-                      </a:r>
-                      <a:endParaRPr lang="en-US" sz="500" dirty="0">
-                        <a:latin typeface="Calibri" charset="0"/>
-                        <a:ea typeface="Calibri" charset="0"/>
-                        <a:cs typeface="Calibri" charset="0"/>
-                      </a:endParaRPr>
-                    </a:p>
-                  </a:txBody>
-                  <a:tcPr marL="91440" marR="91440" marT="45720" marB="45720">
-                    <a:lnL w="2540" cap="flat" cmpd="sng" algn="ctr">
-                      <a:solidFill>
-                        <a:srgbClr val="EEEEEE"/>
-                      </a:solidFill>
-                      <a:prstDash val="solid"/>
-                      <a:round/>
-                      <a:headEnd type="none" w="med" len="med"/>
-                      <a:tailEnd type="none" w="med" len="med"/>
-                    </a:lnL>
-                    <a:lnR w="2540" cap="flat" cmpd="sng" algn="ctr">
-                      <a:solidFill>
-                        <a:srgbClr val="EEEEEE"/>
-                      </a:solidFill>
-                      <a:prstDash val="solid"/>
-                      <a:round/>
-                      <a:headEnd type="none" w="med" len="med"/>
-                      <a:tailEnd type="none" w="med" len="med"/>
-                    </a:lnR>
-                    <a:lnT w="2540" cap="flat" cmpd="sng" algn="ctr">
-                      <a:solidFill>
-                        <a:srgbClr val="EEEEEE"/>
-                      </a:solidFill>
-                      <a:prstDash val="solid"/>
-                      <a:round/>
-                      <a:headEnd type="none" w="med" len="med"/>
-                      <a:tailEnd type="none" w="med" len="med"/>
-                    </a:lnT>
-                    <a:lnB w="2540" cap="flat" cmpd="sng" algn="ctr">
-                      <a:solidFill>
-                        <a:srgbClr val="EEEEEE"/>
-                      </a:solidFill>
-                      <a:prstDash val="solid"/>
-                      <a:round/>
-                      <a:headEnd type="none" w="med" len="med"/>
-                      <a:tailEnd type="none" w="med" len="med"/>
-                    </a:lnB>
-                  </a:tcPr>
-                </a:tc>
-                <a:tc>
-                  <a:txBody>
-                    <a:bodyPr/>
-                    <a:lstStyle/>
-                    <a:p>
-                      <a:pPr algn="ctr" indent="0" marL="0">
-                        <a:buNone/>
-                      </a:pPr>
-                      <a:r>
-                        <a:rPr lang="en-US" sz="500" dirty="0">
-                          <a:solidFill>
-                            <a:srgbClr val="777777"/>
-                          </a:solidFill>
-                          <a:latin typeface="Calibri" pitchFamily="34" charset="0"/>
-                          <a:ea typeface="Calibri" pitchFamily="34" charset="-122"/>
-                          <a:cs typeface="Calibri" pitchFamily="34" charset="-120"/>
-                        </a:rPr>
-                        <a:t>0.39%</a:t>
-                      </a:r>
-                      <a:endParaRPr lang="en-US" sz="500" dirty="0">
-                        <a:latin typeface="Calibri" charset="0"/>
-                        <a:ea typeface="Calibri" charset="0"/>
-                        <a:cs typeface="Calibri" charset="0"/>
-                      </a:endParaRPr>
-                    </a:p>
-                  </a:txBody>
-                  <a:tcPr marL="91440" marR="91440" marT="45720" marB="45720">
-                    <a:lnL w="2540" cap="flat" cmpd="sng" algn="ctr">
-                      <a:solidFill>
-                        <a:srgbClr val="EEEEEE"/>
-                      </a:solidFill>
-                      <a:prstDash val="solid"/>
-                      <a:round/>
-                      <a:headEnd type="none" w="med" len="med"/>
-                      <a:tailEnd type="none" w="med" len="med"/>
-                    </a:lnL>
-                    <a:lnR w="2540" cap="flat" cmpd="sng" algn="ctr">
-                      <a:solidFill>
-                        <a:srgbClr val="EEEEEE"/>
-                      </a:solidFill>
-                      <a:prstDash val="solid"/>
-                      <a:round/>
-                      <a:headEnd type="none" w="med" len="med"/>
-                      <a:tailEnd type="none" w="med" len="med"/>
-                    </a:lnR>
-                    <a:lnT w="2540" cap="flat" cmpd="sng" algn="ctr">
-                      <a:solidFill>
-                        <a:srgbClr val="EEEEEE"/>
-                      </a:solidFill>
-                      <a:prstDash val="solid"/>
-                      <a:round/>
-                      <a:headEnd type="none" w="med" len="med"/>
-                      <a:tailEnd type="none" w="med" len="med"/>
-                    </a:lnT>
-                    <a:lnB w="2540" cap="flat" cmpd="sng" algn="ctr">
-                      <a:solidFill>
-                        <a:srgbClr val="EEEEEE"/>
-                      </a:solidFill>
-                      <a:prstDash val="solid"/>
-                      <a:round/>
-                      <a:headEnd type="none" w="med" len="med"/>
-                      <a:tailEnd type="none" w="med" len="med"/>
-                    </a:lnB>
-                  </a:tcPr>
-                </a:tc>
-                <a:tc>
-                  <a:txBody>
-                    <a:bodyPr/>
-                    <a:lstStyle/>
-                    <a:p>
-                      <a:pPr algn="ctr" indent="0" marL="0">
-                        <a:buNone/>
-                      </a:pPr>
-                      <a:r>
-                        <a:rPr lang="en-US" sz="500" b="1" dirty="0">
-                          <a:solidFill>
-                            <a:srgbClr val="777777"/>
-                          </a:solidFill>
-                          <a:latin typeface="Calibri" pitchFamily="34" charset="0"/>
-                          <a:ea typeface="Calibri" pitchFamily="34" charset="-122"/>
-                          <a:cs typeface="Calibri" pitchFamily="34" charset="-120"/>
-                        </a:rPr>
-                        <a:t>4.99%</a:t>
-                      </a:r>
-                      <a:endParaRPr lang="en-US" sz="500" dirty="0">
-                        <a:latin typeface="Calibri" charset="0"/>
-                        <a:ea typeface="Calibri" charset="0"/>
-                        <a:cs typeface="Calibri" charset="0"/>
-                      </a:endParaRPr>
-                    </a:p>
-                  </a:txBody>
-                  <a:tcPr marL="91440" marR="91440" marT="45720" marB="45720">
-                    <a:lnL w="2540" cap="flat" cmpd="sng" algn="ctr">
-                      <a:solidFill>
-                        <a:srgbClr val="EEEEEE"/>
-                      </a:solidFill>
-                      <a:prstDash val="solid"/>
-                      <a:round/>
-                      <a:headEnd type="none" w="med" len="med"/>
-                      <a:tailEnd type="none" w="med" len="med"/>
-                    </a:lnL>
-                    <a:lnR w="2540" cap="flat" cmpd="sng" algn="ctr">
-                      <a:solidFill>
-                        <a:srgbClr val="EEEEEE"/>
-                      </a:solidFill>
-                      <a:prstDash val="solid"/>
-                      <a:round/>
-                      <a:headEnd type="none" w="med" len="med"/>
-                      <a:tailEnd type="none" w="med" len="med"/>
-                    </a:lnR>
-                    <a:lnT w="2540" cap="flat" cmpd="sng" algn="ctr">
-                      <a:solidFill>
-                        <a:srgbClr val="EEEEEE"/>
-                      </a:solidFill>
-                      <a:prstDash val="solid"/>
-                      <a:round/>
-                      <a:headEnd type="none" w="med" len="med"/>
-                      <a:tailEnd type="none" w="med" len="med"/>
-                    </a:lnT>
-                    <a:lnB w="2540" cap="flat" cmpd="sng" algn="ctr">
-                      <a:solidFill>
-                        <a:srgbClr val="EEEEEE"/>
-                      </a:solidFill>
-                      <a:prstDash val="solid"/>
-                      <a:round/>
-                      <a:headEnd type="none" w="med" len="med"/>
-                      <a:tailEnd type="none" w="med" len="med"/>
-                    </a:lnB>
-                  </a:tcPr>
-                </a:tc>
-              </a:tr>
-              <a:tr h="123444">
-                <a:tc>
-                  <a:txBody>
-                    <a:bodyPr/>
-                    <a:lstStyle/>
-                    <a:p>
-                      <a:pPr algn="l" indent="0" marL="0">
-                        <a:buNone/>
-                      </a:pPr>
-                      <a:endParaRPr lang="en-US" sz="500" dirty="0">
-                        <a:latin typeface="Calibri" charset="0"/>
-                        <a:ea typeface="Calibri" charset="0"/>
-                        <a:cs typeface="Calibri" charset="0"/>
-                      </a:endParaRPr>
-                    </a:p>
-                  </a:txBody>
-                  <a:tcPr marL="91440" marR="91440" marT="45720" marB="45720">
-                    <a:lnL w="2540" cap="flat" cmpd="sng" algn="ctr">
-                      <a:solidFill>
-                        <a:srgbClr val="EEEEEE"/>
-                      </a:solidFill>
-                      <a:prstDash val="solid"/>
-                      <a:round/>
-                      <a:headEnd type="none" w="med" len="med"/>
-                      <a:tailEnd type="none" w="med" len="med"/>
-                    </a:lnL>
-                    <a:lnR w="2540" cap="flat" cmpd="sng" algn="ctr">
-                      <a:solidFill>
-                        <a:srgbClr val="EEEEEE"/>
-                      </a:solidFill>
-                      <a:prstDash val="solid"/>
-                      <a:round/>
-                      <a:headEnd type="none" w="med" len="med"/>
-                      <a:tailEnd type="none" w="med" len="med"/>
-                    </a:lnR>
-                    <a:lnT w="2540" cap="flat" cmpd="sng" algn="ctr">
-                      <a:solidFill>
-                        <a:srgbClr val="EEEEEE"/>
-                      </a:solidFill>
-                      <a:prstDash val="solid"/>
-                      <a:round/>
-                      <a:headEnd type="none" w="med" len="med"/>
-                      <a:tailEnd type="none" w="med" len="med"/>
-                    </a:lnT>
-                    <a:lnB w="2540" cap="flat" cmpd="sng" algn="ctr">
-                      <a:solidFill>
-                        <a:srgbClr val="EEEEEE"/>
-                      </a:solidFill>
-                      <a:prstDash val="solid"/>
-                      <a:round/>
-                      <a:headEnd type="none" w="med" len="med"/>
-                      <a:tailEnd type="none" w="med" len="med"/>
-                    </a:lnB>
-                  </a:tcPr>
-                </a:tc>
-                <a:tc>
-                  <a:txBody>
-                    <a:bodyPr/>
-                    <a:lstStyle/>
-                    <a:p>
-                      <a:pPr algn="l" indent="0" marL="0">
-                        <a:buNone/>
-                      </a:pPr>
-                      <a:r>
-                        <a:rPr lang="en-US" sz="500" dirty="0">
-                          <a:solidFill>
-                            <a:srgbClr val="999999"/>
-                          </a:solidFill>
-                          <a:latin typeface="Calibri" pitchFamily="34" charset="0"/>
-                          <a:ea typeface="Calibri" pitchFamily="34" charset="-122"/>
-                          <a:cs typeface="Calibri" pitchFamily="34" charset="-120"/>
-                        </a:rPr>
-                        <a:t>Competencia</a:t>
-                      </a:r>
-                      <a:endParaRPr lang="en-US" sz="500" dirty="0">
-                        <a:latin typeface="Calibri" charset="0"/>
-                        <a:ea typeface="Calibri" charset="0"/>
-                        <a:cs typeface="Calibri" charset="0"/>
-                      </a:endParaRPr>
-                    </a:p>
-                  </a:txBody>
-                  <a:tcPr marL="91440" marR="91440" marT="45720" marB="45720">
-                    <a:lnL w="2540" cap="flat" cmpd="sng" algn="ctr">
-                      <a:solidFill>
-                        <a:srgbClr val="EEEEEE"/>
-                      </a:solidFill>
-                      <a:prstDash val="solid"/>
-                      <a:round/>
-                      <a:headEnd type="none" w="med" len="med"/>
-                      <a:tailEnd type="none" w="med" len="med"/>
-                    </a:lnL>
-                    <a:lnR w="2540" cap="flat" cmpd="sng" algn="ctr">
-                      <a:solidFill>
-                        <a:srgbClr val="EEEEEE"/>
-                      </a:solidFill>
-                      <a:prstDash val="solid"/>
-                      <a:round/>
-                      <a:headEnd type="none" w="med" len="med"/>
-                      <a:tailEnd type="none" w="med" len="med"/>
-                    </a:lnR>
-                    <a:lnT w="2540" cap="flat" cmpd="sng" algn="ctr">
-                      <a:solidFill>
-                        <a:srgbClr val="EEEEEE"/>
-                      </a:solidFill>
-                      <a:prstDash val="solid"/>
-                      <a:round/>
-                      <a:headEnd type="none" w="med" len="med"/>
-                      <a:tailEnd type="none" w="med" len="med"/>
-                    </a:lnT>
-                    <a:lnB w="2540" cap="flat" cmpd="sng" algn="ctr">
-                      <a:solidFill>
-                        <a:srgbClr val="EEEEEE"/>
-                      </a:solidFill>
-                      <a:prstDash val="solid"/>
-                      <a:round/>
-                      <a:headEnd type="none" w="med" len="med"/>
-                      <a:tailEnd type="none" w="med" len="med"/>
-                    </a:lnB>
-                  </a:tcPr>
-                </a:tc>
-                <a:tc>
-                  <a:txBody>
-                    <a:bodyPr/>
-                    <a:lstStyle/>
-                    <a:p>
-                      <a:pPr algn="ctr" indent="0" marL="0">
-                        <a:buNone/>
-                      </a:pPr>
-                      <a:r>
-                        <a:rPr lang="en-US" sz="500" dirty="0">
-                          <a:solidFill>
-                            <a:srgbClr val="999999"/>
-                          </a:solidFill>
-                          <a:latin typeface="Calibri" pitchFamily="34" charset="0"/>
-                          <a:ea typeface="Calibri" pitchFamily="34" charset="-122"/>
-                          <a:cs typeface="Calibri" pitchFamily="34" charset="-120"/>
-                        </a:rPr>
-                        <a:t>0.00%</a:t>
-                      </a:r>
-                      <a:endParaRPr lang="en-US" sz="500" dirty="0">
-                        <a:latin typeface="Calibri" charset="0"/>
-                        <a:ea typeface="Calibri" charset="0"/>
-                        <a:cs typeface="Calibri" charset="0"/>
-                      </a:endParaRPr>
-                    </a:p>
-                  </a:txBody>
-                  <a:tcPr marL="91440" marR="91440" marT="45720" marB="45720">
-                    <a:lnL w="2540" cap="flat" cmpd="sng" algn="ctr">
-                      <a:solidFill>
-                        <a:srgbClr val="EEEEEE"/>
-                      </a:solidFill>
-                      <a:prstDash val="solid"/>
-                      <a:round/>
-                      <a:headEnd type="none" w="med" len="med"/>
-                      <a:tailEnd type="none" w="med" len="med"/>
-                    </a:lnL>
-                    <a:lnR w="2540" cap="flat" cmpd="sng" algn="ctr">
-                      <a:solidFill>
-                        <a:srgbClr val="EEEEEE"/>
-                      </a:solidFill>
-                      <a:prstDash val="solid"/>
-                      <a:round/>
-                      <a:headEnd type="none" w="med" len="med"/>
-                      <a:tailEnd type="none" w="med" len="med"/>
-                    </a:lnR>
-                    <a:lnT w="2540" cap="flat" cmpd="sng" algn="ctr">
-                      <a:solidFill>
-                        <a:srgbClr val="EEEEEE"/>
-                      </a:solidFill>
-                      <a:prstDash val="solid"/>
-                      <a:round/>
-                      <a:headEnd type="none" w="med" len="med"/>
-                      <a:tailEnd type="none" w="med" len="med"/>
-                    </a:lnT>
-                    <a:lnB w="2540" cap="flat" cmpd="sng" algn="ctr">
-                      <a:solidFill>
-                        <a:srgbClr val="EEEEEE"/>
-                      </a:solidFill>
-                      <a:prstDash val="solid"/>
-                      <a:round/>
-                      <a:headEnd type="none" w="med" len="med"/>
-                      <a:tailEnd type="none" w="med" len="med"/>
-                    </a:lnB>
-                  </a:tcPr>
-                </a:tc>
-                <a:tc>
-                  <a:txBody>
-                    <a:bodyPr/>
-                    <a:lstStyle/>
-                    <a:p>
-                      <a:pPr algn="ctr" indent="0" marL="0">
-                        <a:buNone/>
-                      </a:pPr>
-                      <a:r>
-                        <a:rPr lang="en-US" sz="500" dirty="0">
-                          <a:solidFill>
-                            <a:srgbClr val="999999"/>
-                          </a:solidFill>
-                          <a:latin typeface="Calibri" pitchFamily="34" charset="0"/>
-                          <a:ea typeface="Calibri" pitchFamily="34" charset="-122"/>
-                          <a:cs typeface="Calibri" pitchFamily="34" charset="-120"/>
-                        </a:rPr>
-                        <a:t>0.28%</a:t>
-                      </a:r>
-                      <a:endParaRPr lang="en-US" sz="500" dirty="0">
-                        <a:latin typeface="Calibri" charset="0"/>
-                        <a:ea typeface="Calibri" charset="0"/>
-                        <a:cs typeface="Calibri" charset="0"/>
-                      </a:endParaRPr>
-                    </a:p>
-                  </a:txBody>
-                  <a:tcPr marL="91440" marR="91440" marT="45720" marB="45720">
-                    <a:lnL w="2540" cap="flat" cmpd="sng" algn="ctr">
-                      <a:solidFill>
-                        <a:srgbClr val="EEEEEE"/>
-                      </a:solidFill>
-                      <a:prstDash val="solid"/>
-                      <a:round/>
-                      <a:headEnd type="none" w="med" len="med"/>
-                      <a:tailEnd type="none" w="med" len="med"/>
-                    </a:lnL>
-                    <a:lnR w="2540" cap="flat" cmpd="sng" algn="ctr">
-                      <a:solidFill>
-                        <a:srgbClr val="EEEEEE"/>
-                      </a:solidFill>
-                      <a:prstDash val="solid"/>
-                      <a:round/>
-                      <a:headEnd type="none" w="med" len="med"/>
-                      <a:tailEnd type="none" w="med" len="med"/>
-                    </a:lnR>
-                    <a:lnT w="2540" cap="flat" cmpd="sng" algn="ctr">
-                      <a:solidFill>
-                        <a:srgbClr val="EEEEEE"/>
-                      </a:solidFill>
-                      <a:prstDash val="solid"/>
-                      <a:round/>
-                      <a:headEnd type="none" w="med" len="med"/>
-                      <a:tailEnd type="none" w="med" len="med"/>
-                    </a:lnT>
-                    <a:lnB w="2540" cap="flat" cmpd="sng" algn="ctr">
-                      <a:solidFill>
-                        <a:srgbClr val="EEEEEE"/>
-                      </a:solidFill>
-                      <a:prstDash val="solid"/>
-                      <a:round/>
-                      <a:headEnd type="none" w="med" len="med"/>
-                      <a:tailEnd type="none" w="med" len="med"/>
-                    </a:lnB>
-                  </a:tcPr>
-                </a:tc>
-                <a:tc>
-                  <a:txBody>
-                    <a:bodyPr/>
-                    <a:lstStyle/>
-                    <a:p>
-                      <a:pPr algn="ctr" indent="0" marL="0">
-                        <a:buNone/>
-                      </a:pPr>
-                      <a:r>
-                        <a:rPr lang="en-US" sz="500" dirty="0">
-                          <a:solidFill>
-                            <a:srgbClr val="999999"/>
-                          </a:solidFill>
-                          <a:latin typeface="Calibri" pitchFamily="34" charset="0"/>
-                          <a:ea typeface="Calibri" pitchFamily="34" charset="-122"/>
-                          <a:cs typeface="Calibri" pitchFamily="34" charset="-120"/>
-                        </a:rPr>
-                        <a:t>0.31%</a:t>
-                      </a:r>
-                      <a:endParaRPr lang="en-US" sz="500" dirty="0">
-                        <a:latin typeface="Calibri" charset="0"/>
-                        <a:ea typeface="Calibri" charset="0"/>
-                        <a:cs typeface="Calibri" charset="0"/>
-                      </a:endParaRPr>
-                    </a:p>
-                  </a:txBody>
-                  <a:tcPr marL="91440" marR="91440" marT="45720" marB="45720">
-                    <a:lnL w="2540" cap="flat" cmpd="sng" algn="ctr">
-                      <a:solidFill>
-                        <a:srgbClr val="EEEEEE"/>
-                      </a:solidFill>
-                      <a:prstDash val="solid"/>
-                      <a:round/>
-                      <a:headEnd type="none" w="med" len="med"/>
-                      <a:tailEnd type="none" w="med" len="med"/>
-                    </a:lnL>
-                    <a:lnR w="2540" cap="flat" cmpd="sng" algn="ctr">
-                      <a:solidFill>
-                        <a:srgbClr val="EEEEEE"/>
-                      </a:solidFill>
-                      <a:prstDash val="solid"/>
-                      <a:round/>
-                      <a:headEnd type="none" w="med" len="med"/>
-                      <a:tailEnd type="none" w="med" len="med"/>
-                    </a:lnR>
-                    <a:lnT w="2540" cap="flat" cmpd="sng" algn="ctr">
-                      <a:solidFill>
-                        <a:srgbClr val="EEEEEE"/>
-                      </a:solidFill>
-                      <a:prstDash val="solid"/>
-                      <a:round/>
-                      <a:headEnd type="none" w="med" len="med"/>
-                      <a:tailEnd type="none" w="med" len="med"/>
-                    </a:lnT>
-                    <a:lnB w="2540" cap="flat" cmpd="sng" algn="ctr">
-                      <a:solidFill>
-                        <a:srgbClr val="EEEEEE"/>
-                      </a:solidFill>
-                      <a:prstDash val="solid"/>
-                      <a:round/>
-                      <a:headEnd type="none" w="med" len="med"/>
-                      <a:tailEnd type="none" w="med" len="med"/>
-                    </a:lnB>
-                  </a:tcPr>
-                </a:tc>
-                <a:tc>
-                  <a:txBody>
-                    <a:bodyPr/>
-                    <a:lstStyle/>
-                    <a:p>
-                      <a:pPr algn="ctr" indent="0" marL="0">
-                        <a:buNone/>
-                      </a:pPr>
-                      <a:r>
-                        <a:rPr lang="en-US" sz="500" dirty="0">
-                          <a:solidFill>
-                            <a:srgbClr val="999999"/>
-                          </a:solidFill>
-                          <a:latin typeface="Calibri" pitchFamily="34" charset="0"/>
-                          <a:ea typeface="Calibri" pitchFamily="34" charset="-122"/>
-                          <a:cs typeface="Calibri" pitchFamily="34" charset="-120"/>
-                        </a:rPr>
-                        <a:t>0.30%</a:t>
-                      </a:r>
-                      <a:endParaRPr lang="en-US" sz="500" dirty="0">
-                        <a:latin typeface="Calibri" charset="0"/>
-                        <a:ea typeface="Calibri" charset="0"/>
-                        <a:cs typeface="Calibri" charset="0"/>
-                      </a:endParaRPr>
-                    </a:p>
-                  </a:txBody>
-                  <a:tcPr marL="91440" marR="91440" marT="45720" marB="45720">
-                    <a:lnL w="2540" cap="flat" cmpd="sng" algn="ctr">
-                      <a:solidFill>
-                        <a:srgbClr val="EEEEEE"/>
-                      </a:solidFill>
-                      <a:prstDash val="solid"/>
-                      <a:round/>
-                      <a:headEnd type="none" w="med" len="med"/>
-                      <a:tailEnd type="none" w="med" len="med"/>
-                    </a:lnL>
-                    <a:lnR w="2540" cap="flat" cmpd="sng" algn="ctr">
-                      <a:solidFill>
-                        <a:srgbClr val="EEEEEE"/>
-                      </a:solidFill>
-                      <a:prstDash val="solid"/>
-                      <a:round/>
-                      <a:headEnd type="none" w="med" len="med"/>
-                      <a:tailEnd type="none" w="med" len="med"/>
-                    </a:lnR>
-                    <a:lnT w="2540" cap="flat" cmpd="sng" algn="ctr">
-                      <a:solidFill>
-                        <a:srgbClr val="EEEEEE"/>
-                      </a:solidFill>
-                      <a:prstDash val="solid"/>
-                      <a:round/>
-                      <a:headEnd type="none" w="med" len="med"/>
-                      <a:tailEnd type="none" w="med" len="med"/>
-                    </a:lnT>
-                    <a:lnB w="2540" cap="flat" cmpd="sng" algn="ctr">
-                      <a:solidFill>
-                        <a:srgbClr val="EEEEEE"/>
-                      </a:solidFill>
-                      <a:prstDash val="solid"/>
-                      <a:round/>
-                      <a:headEnd type="none" w="med" len="med"/>
-                      <a:tailEnd type="none" w="med" len="med"/>
-                    </a:lnB>
-                  </a:tcPr>
-                </a:tc>
-                <a:tc>
-                  <a:txBody>
-                    <a:bodyPr/>
-                    <a:lstStyle/>
-                    <a:p>
-                      <a:pPr algn="ctr" indent="0" marL="0">
-                        <a:buNone/>
-                      </a:pPr>
-                      <a:r>
-                        <a:rPr lang="en-US" sz="500" dirty="0">
-                          <a:solidFill>
-                            <a:srgbClr val="999999"/>
-                          </a:solidFill>
-                          <a:latin typeface="Calibri" pitchFamily="34" charset="0"/>
-                          <a:ea typeface="Calibri" pitchFamily="34" charset="-122"/>
-                          <a:cs typeface="Calibri" pitchFamily="34" charset="-120"/>
-                        </a:rPr>
-                        <a:t>0.31%</a:t>
-                      </a:r>
-                      <a:endParaRPr lang="en-US" sz="500" dirty="0">
-                        <a:latin typeface="Calibri" charset="0"/>
-                        <a:ea typeface="Calibri" charset="0"/>
-                        <a:cs typeface="Calibri" charset="0"/>
-                      </a:endParaRPr>
-                    </a:p>
-                  </a:txBody>
-                  <a:tcPr marL="91440" marR="91440" marT="45720" marB="45720">
-                    <a:lnL w="2540" cap="flat" cmpd="sng" algn="ctr">
-                      <a:solidFill>
-                        <a:srgbClr val="EEEEEE"/>
-                      </a:solidFill>
-                      <a:prstDash val="solid"/>
-                      <a:round/>
-                      <a:headEnd type="none" w="med" len="med"/>
-                      <a:tailEnd type="none" w="med" len="med"/>
-                    </a:lnL>
-                    <a:lnR w="2540" cap="flat" cmpd="sng" algn="ctr">
-                      <a:solidFill>
-                        <a:srgbClr val="EEEEEE"/>
-                      </a:solidFill>
-                      <a:prstDash val="solid"/>
-                      <a:round/>
-                      <a:headEnd type="none" w="med" len="med"/>
-                      <a:tailEnd type="none" w="med" len="med"/>
-                    </a:lnR>
-                    <a:lnT w="2540" cap="flat" cmpd="sng" algn="ctr">
-                      <a:solidFill>
-                        <a:srgbClr val="EEEEEE"/>
-                      </a:solidFill>
-                      <a:prstDash val="solid"/>
-                      <a:round/>
-                      <a:headEnd type="none" w="med" len="med"/>
-                      <a:tailEnd type="none" w="med" len="med"/>
-                    </a:lnT>
-                    <a:lnB w="2540" cap="flat" cmpd="sng" algn="ctr">
-                      <a:solidFill>
-                        <a:srgbClr val="EEEEEE"/>
-                      </a:solidFill>
-                      <a:prstDash val="solid"/>
-                      <a:round/>
-                      <a:headEnd type="none" w="med" len="med"/>
-                      <a:tailEnd type="none" w="med" len="med"/>
-                    </a:lnB>
-                  </a:tcPr>
-                </a:tc>
-                <a:tc>
-                  <a:txBody>
-                    <a:bodyPr/>
-                    <a:lstStyle/>
-                    <a:p>
-                      <a:pPr algn="ctr" indent="0" marL="0">
-                        <a:buNone/>
-                      </a:pPr>
-                      <a:r>
-                        <a:rPr lang="en-US" sz="500" dirty="0">
-                          <a:solidFill>
-                            <a:srgbClr val="999999"/>
-                          </a:solidFill>
-                          <a:latin typeface="Calibri" pitchFamily="34" charset="0"/>
-                          <a:ea typeface="Calibri" pitchFamily="34" charset="-122"/>
-                          <a:cs typeface="Calibri" pitchFamily="34" charset="-120"/>
-                        </a:rPr>
-                        <a:t>0.30%</a:t>
-                      </a:r>
-                      <a:endParaRPr lang="en-US" sz="500" dirty="0">
-                        <a:latin typeface="Calibri" charset="0"/>
-                        <a:ea typeface="Calibri" charset="0"/>
-                        <a:cs typeface="Calibri" charset="0"/>
-                      </a:endParaRPr>
-                    </a:p>
-                  </a:txBody>
-                  <a:tcPr marL="91440" marR="91440" marT="45720" marB="45720">
-                    <a:lnL w="2540" cap="flat" cmpd="sng" algn="ctr">
-                      <a:solidFill>
-                        <a:srgbClr val="EEEEEE"/>
-                      </a:solidFill>
-                      <a:prstDash val="solid"/>
-                      <a:round/>
-                      <a:headEnd type="none" w="med" len="med"/>
-                      <a:tailEnd type="none" w="med" len="med"/>
-                    </a:lnL>
-                    <a:lnR w="2540" cap="flat" cmpd="sng" algn="ctr">
-                      <a:solidFill>
-                        <a:srgbClr val="EEEEEE"/>
-                      </a:solidFill>
-                      <a:prstDash val="solid"/>
-                      <a:round/>
-                      <a:headEnd type="none" w="med" len="med"/>
-                      <a:tailEnd type="none" w="med" len="med"/>
-                    </a:lnR>
-                    <a:lnT w="2540" cap="flat" cmpd="sng" algn="ctr">
-                      <a:solidFill>
-                        <a:srgbClr val="EEEEEE"/>
-                      </a:solidFill>
-                      <a:prstDash val="solid"/>
-                      <a:round/>
-                      <a:headEnd type="none" w="med" len="med"/>
-                      <a:tailEnd type="none" w="med" len="med"/>
-                    </a:lnT>
-                    <a:lnB w="2540" cap="flat" cmpd="sng" algn="ctr">
-                      <a:solidFill>
-                        <a:srgbClr val="EEEEEE"/>
-                      </a:solidFill>
-                      <a:prstDash val="solid"/>
-                      <a:round/>
-                      <a:headEnd type="none" w="med" len="med"/>
-                      <a:tailEnd type="none" w="med" len="med"/>
-                    </a:lnB>
-                  </a:tcPr>
-                </a:tc>
-                <a:tc>
-                  <a:txBody>
-                    <a:bodyPr/>
-                    <a:lstStyle/>
-                    <a:p>
-                      <a:pPr algn="ctr" indent="0" marL="0">
-                        <a:buNone/>
-                      </a:pPr>
-                      <a:r>
-                        <a:rPr lang="en-US" sz="500" dirty="0">
-                          <a:solidFill>
-                            <a:srgbClr val="999999"/>
-                          </a:solidFill>
-                          <a:latin typeface="Calibri" pitchFamily="34" charset="0"/>
-                          <a:ea typeface="Calibri" pitchFamily="34" charset="-122"/>
-                          <a:cs typeface="Calibri" pitchFamily="34" charset="-120"/>
-                        </a:rPr>
-                        <a:t>0.30%</a:t>
-                      </a:r>
-                      <a:endParaRPr lang="en-US" sz="500" dirty="0">
-                        <a:latin typeface="Calibri" charset="0"/>
-                        <a:ea typeface="Calibri" charset="0"/>
-                        <a:cs typeface="Calibri" charset="0"/>
-                      </a:endParaRPr>
-                    </a:p>
-                  </a:txBody>
-                  <a:tcPr marL="91440" marR="91440" marT="45720" marB="45720">
-                    <a:lnL w="2540" cap="flat" cmpd="sng" algn="ctr">
-                      <a:solidFill>
-                        <a:srgbClr val="EEEEEE"/>
-                      </a:solidFill>
-                      <a:prstDash val="solid"/>
-                      <a:round/>
-                      <a:headEnd type="none" w="med" len="med"/>
-                      <a:tailEnd type="none" w="med" len="med"/>
-                    </a:lnL>
-                    <a:lnR w="2540" cap="flat" cmpd="sng" algn="ctr">
-                      <a:solidFill>
-                        <a:srgbClr val="EEEEEE"/>
-                      </a:solidFill>
-                      <a:prstDash val="solid"/>
-                      <a:round/>
-                      <a:headEnd type="none" w="med" len="med"/>
-                      <a:tailEnd type="none" w="med" len="med"/>
-                    </a:lnR>
-                    <a:lnT w="2540" cap="flat" cmpd="sng" algn="ctr">
-                      <a:solidFill>
-                        <a:srgbClr val="EEEEEE"/>
-                      </a:solidFill>
-                      <a:prstDash val="solid"/>
-                      <a:round/>
-                      <a:headEnd type="none" w="med" len="med"/>
-                      <a:tailEnd type="none" w="med" len="med"/>
-                    </a:lnT>
-                    <a:lnB w="2540" cap="flat" cmpd="sng" algn="ctr">
-                      <a:solidFill>
-                        <a:srgbClr val="EEEEEE"/>
-                      </a:solidFill>
-                      <a:prstDash val="solid"/>
-                      <a:round/>
-                      <a:headEnd type="none" w="med" len="med"/>
-                      <a:tailEnd type="none" w="med" len="med"/>
-                    </a:lnB>
-                  </a:tcPr>
-                </a:tc>
-                <a:tc>
-                  <a:txBody>
-                    <a:bodyPr/>
-                    <a:lstStyle/>
-                    <a:p>
-                      <a:pPr algn="ctr" indent="0" marL="0">
-                        <a:buNone/>
-                      </a:pPr>
-                      <a:r>
-                        <a:rPr lang="en-US" sz="500" dirty="0">
-                          <a:solidFill>
-                            <a:srgbClr val="999999"/>
-                          </a:solidFill>
-                          <a:latin typeface="Calibri" pitchFamily="34" charset="0"/>
-                          <a:ea typeface="Calibri" pitchFamily="34" charset="-122"/>
-                          <a:cs typeface="Calibri" pitchFamily="34" charset="-120"/>
-                        </a:rPr>
-                        <a:t>0.30%</a:t>
-                      </a:r>
-                      <a:endParaRPr lang="en-US" sz="500" dirty="0">
-                        <a:latin typeface="Calibri" charset="0"/>
-                        <a:ea typeface="Calibri" charset="0"/>
-                        <a:cs typeface="Calibri" charset="0"/>
-                      </a:endParaRPr>
-                    </a:p>
-                  </a:txBody>
-                  <a:tcPr marL="91440" marR="91440" marT="45720" marB="45720">
-                    <a:lnL w="2540" cap="flat" cmpd="sng" algn="ctr">
-                      <a:solidFill>
-                        <a:srgbClr val="EEEEEE"/>
-                      </a:solidFill>
-                      <a:prstDash val="solid"/>
-                      <a:round/>
-                      <a:headEnd type="none" w="med" len="med"/>
-                      <a:tailEnd type="none" w="med" len="med"/>
-                    </a:lnL>
-                    <a:lnR w="2540" cap="flat" cmpd="sng" algn="ctr">
-                      <a:solidFill>
-                        <a:srgbClr val="EEEEEE"/>
-                      </a:solidFill>
-                      <a:prstDash val="solid"/>
-                      <a:round/>
-                      <a:headEnd type="none" w="med" len="med"/>
-                      <a:tailEnd type="none" w="med" len="med"/>
-                    </a:lnR>
-                    <a:lnT w="2540" cap="flat" cmpd="sng" algn="ctr">
-                      <a:solidFill>
-                        <a:srgbClr val="EEEEEE"/>
-                      </a:solidFill>
-                      <a:prstDash val="solid"/>
-                      <a:round/>
-                      <a:headEnd type="none" w="med" len="med"/>
-                      <a:tailEnd type="none" w="med" len="med"/>
-                    </a:lnT>
-                    <a:lnB w="2540" cap="flat" cmpd="sng" algn="ctr">
-                      <a:solidFill>
-                        <a:srgbClr val="EEEEEE"/>
-                      </a:solidFill>
-                      <a:prstDash val="solid"/>
-                      <a:round/>
-                      <a:headEnd type="none" w="med" len="med"/>
-                      <a:tailEnd type="none" w="med" len="med"/>
-                    </a:lnB>
-                  </a:tcPr>
-                </a:tc>
-                <a:tc>
-                  <a:txBody>
-                    <a:bodyPr/>
-                    <a:lstStyle/>
-                    <a:p>
-                      <a:pPr algn="ctr" indent="0" marL="0">
-                        <a:buNone/>
-                      </a:pPr>
-                      <a:r>
-                        <a:rPr lang="en-US" sz="500" dirty="0">
-                          <a:solidFill>
-                            <a:srgbClr val="999999"/>
-                          </a:solidFill>
-                          <a:latin typeface="Calibri" pitchFamily="34" charset="0"/>
-                          <a:ea typeface="Calibri" pitchFamily="34" charset="-122"/>
-                          <a:cs typeface="Calibri" pitchFamily="34" charset="-120"/>
-                        </a:rPr>
-                        <a:t>0.28%</a:t>
-                      </a:r>
-                      <a:endParaRPr lang="en-US" sz="500" dirty="0">
-                        <a:latin typeface="Calibri" charset="0"/>
-                        <a:ea typeface="Calibri" charset="0"/>
-                        <a:cs typeface="Calibri" charset="0"/>
-                      </a:endParaRPr>
-                    </a:p>
-                  </a:txBody>
-                  <a:tcPr marL="91440" marR="91440" marT="45720" marB="45720">
-                    <a:lnL w="2540" cap="flat" cmpd="sng" algn="ctr">
-                      <a:solidFill>
-                        <a:srgbClr val="EEEEEE"/>
-                      </a:solidFill>
-                      <a:prstDash val="solid"/>
-                      <a:round/>
-                      <a:headEnd type="none" w="med" len="med"/>
-                      <a:tailEnd type="none" w="med" len="med"/>
-                    </a:lnL>
-                    <a:lnR w="2540" cap="flat" cmpd="sng" algn="ctr">
-                      <a:solidFill>
-                        <a:srgbClr val="EEEEEE"/>
-                      </a:solidFill>
-                      <a:prstDash val="solid"/>
-                      <a:round/>
-                      <a:headEnd type="none" w="med" len="med"/>
-                      <a:tailEnd type="none" w="med" len="med"/>
-                    </a:lnR>
-                    <a:lnT w="2540" cap="flat" cmpd="sng" algn="ctr">
-                      <a:solidFill>
-                        <a:srgbClr val="EEEEEE"/>
-                      </a:solidFill>
-                      <a:prstDash val="solid"/>
-                      <a:round/>
-                      <a:headEnd type="none" w="med" len="med"/>
-                      <a:tailEnd type="none" w="med" len="med"/>
-                    </a:lnT>
-                    <a:lnB w="2540" cap="flat" cmpd="sng" algn="ctr">
-                      <a:solidFill>
-                        <a:srgbClr val="EEEEEE"/>
-                      </a:solidFill>
-                      <a:prstDash val="solid"/>
-                      <a:round/>
-                      <a:headEnd type="none" w="med" len="med"/>
-                      <a:tailEnd type="none" w="med" len="med"/>
-                    </a:lnB>
-                  </a:tcPr>
-                </a:tc>
-                <a:tc>
-                  <a:txBody>
-                    <a:bodyPr/>
-                    <a:lstStyle/>
-                    <a:p>
-                      <a:pPr algn="ctr" indent="0" marL="0">
-                        <a:buNone/>
-                      </a:pPr>
-                      <a:r>
-                        <a:rPr lang="en-US" sz="500" dirty="0">
-                          <a:solidFill>
-                            <a:srgbClr val="999999"/>
-                          </a:solidFill>
-                          <a:latin typeface="Calibri" pitchFamily="34" charset="0"/>
-                          <a:ea typeface="Calibri" pitchFamily="34" charset="-122"/>
-                          <a:cs typeface="Calibri" pitchFamily="34" charset="-120"/>
-                        </a:rPr>
-                        <a:t>0.29%</a:t>
-                      </a:r>
-                      <a:endParaRPr lang="en-US" sz="500" dirty="0">
-                        <a:latin typeface="Calibri" charset="0"/>
-                        <a:ea typeface="Calibri" charset="0"/>
-                        <a:cs typeface="Calibri" charset="0"/>
-                      </a:endParaRPr>
-                    </a:p>
-                  </a:txBody>
-                  <a:tcPr marL="91440" marR="91440" marT="45720" marB="45720">
-                    <a:lnL w="2540" cap="flat" cmpd="sng" algn="ctr">
-                      <a:solidFill>
-                        <a:srgbClr val="EEEEEE"/>
-                      </a:solidFill>
-                      <a:prstDash val="solid"/>
-                      <a:round/>
-                      <a:headEnd type="none" w="med" len="med"/>
-                      <a:tailEnd type="none" w="med" len="med"/>
-                    </a:lnL>
-                    <a:lnR w="2540" cap="flat" cmpd="sng" algn="ctr">
-                      <a:solidFill>
-                        <a:srgbClr val="EEEEEE"/>
-                      </a:solidFill>
-                      <a:prstDash val="solid"/>
-                      <a:round/>
-                      <a:headEnd type="none" w="med" len="med"/>
-                      <a:tailEnd type="none" w="med" len="med"/>
-                    </a:lnR>
-                    <a:lnT w="2540" cap="flat" cmpd="sng" algn="ctr">
-                      <a:solidFill>
-                        <a:srgbClr val="EEEEEE"/>
-                      </a:solidFill>
-                      <a:prstDash val="solid"/>
-                      <a:round/>
-                      <a:headEnd type="none" w="med" len="med"/>
-                      <a:tailEnd type="none" w="med" len="med"/>
-                    </a:lnT>
-                    <a:lnB w="2540" cap="flat" cmpd="sng" algn="ctr">
-                      <a:solidFill>
-                        <a:srgbClr val="EEEEEE"/>
-                      </a:solidFill>
-                      <a:prstDash val="solid"/>
-                      <a:round/>
-                      <a:headEnd type="none" w="med" len="med"/>
-                      <a:tailEnd type="none" w="med" len="med"/>
-                    </a:lnB>
-                  </a:tcPr>
-                </a:tc>
-                <a:tc>
-                  <a:txBody>
-                    <a:bodyPr/>
-                    <a:lstStyle/>
-                    <a:p>
-                      <a:pPr algn="ctr" indent="0" marL="0">
-                        <a:buNone/>
-                      </a:pPr>
-                      <a:r>
-                        <a:rPr lang="en-US" sz="500" dirty="0">
-                          <a:solidFill>
-                            <a:srgbClr val="999999"/>
-                          </a:solidFill>
-                          <a:latin typeface="Calibri" pitchFamily="34" charset="0"/>
-                          <a:ea typeface="Calibri" pitchFamily="34" charset="-122"/>
-                          <a:cs typeface="Calibri" pitchFamily="34" charset="-120"/>
-                        </a:rPr>
-                        <a:t>0.28%</a:t>
-                      </a:r>
-                      <a:endParaRPr lang="en-US" sz="500" dirty="0">
-                        <a:latin typeface="Calibri" charset="0"/>
-                        <a:ea typeface="Calibri" charset="0"/>
-                        <a:cs typeface="Calibri" charset="0"/>
-                      </a:endParaRPr>
-                    </a:p>
-                  </a:txBody>
-                  <a:tcPr marL="91440" marR="91440" marT="45720" marB="45720">
-                    <a:lnL w="2540" cap="flat" cmpd="sng" algn="ctr">
-                      <a:solidFill>
-                        <a:srgbClr val="EEEEEE"/>
-                      </a:solidFill>
-                      <a:prstDash val="solid"/>
-                      <a:round/>
-                      <a:headEnd type="none" w="med" len="med"/>
-                      <a:tailEnd type="none" w="med" len="med"/>
-                    </a:lnL>
-                    <a:lnR w="2540" cap="flat" cmpd="sng" algn="ctr">
-                      <a:solidFill>
-                        <a:srgbClr val="EEEEEE"/>
-                      </a:solidFill>
-                      <a:prstDash val="solid"/>
-                      <a:round/>
-                      <a:headEnd type="none" w="med" len="med"/>
-                      <a:tailEnd type="none" w="med" len="med"/>
-                    </a:lnR>
-                    <a:lnT w="2540" cap="flat" cmpd="sng" algn="ctr">
-                      <a:solidFill>
-                        <a:srgbClr val="EEEEEE"/>
-                      </a:solidFill>
-                      <a:prstDash val="solid"/>
-                      <a:round/>
-                      <a:headEnd type="none" w="med" len="med"/>
-                      <a:tailEnd type="none" w="med" len="med"/>
-                    </a:lnT>
-                    <a:lnB w="2540" cap="flat" cmpd="sng" algn="ctr">
-                      <a:solidFill>
-                        <a:srgbClr val="EEEEEE"/>
-                      </a:solidFill>
-                      <a:prstDash val="solid"/>
-                      <a:round/>
-                      <a:headEnd type="none" w="med" len="med"/>
-                      <a:tailEnd type="none" w="med" len="med"/>
-                    </a:lnB>
-                  </a:tcPr>
-                </a:tc>
-                <a:tc>
-                  <a:txBody>
-                    <a:bodyPr/>
-                    <a:lstStyle/>
-                    <a:p>
-                      <a:pPr algn="ctr" indent="0" marL="0">
-                        <a:buNone/>
-                      </a:pPr>
-                      <a:r>
-                        <a:rPr lang="en-US" sz="500" dirty="0">
-                          <a:solidFill>
-                            <a:srgbClr val="999999"/>
-                          </a:solidFill>
-                          <a:latin typeface="Calibri" pitchFamily="34" charset="0"/>
-                          <a:ea typeface="Calibri" pitchFamily="34" charset="-122"/>
-                          <a:cs typeface="Calibri" pitchFamily="34" charset="-120"/>
-                        </a:rPr>
-                        <a:t>0.56%</a:t>
-                      </a:r>
-                      <a:endParaRPr lang="en-US" sz="500" dirty="0">
-                        <a:latin typeface="Calibri" charset="0"/>
-                        <a:ea typeface="Calibri" charset="0"/>
-                        <a:cs typeface="Calibri" charset="0"/>
-                      </a:endParaRPr>
-                    </a:p>
-                  </a:txBody>
-                  <a:tcPr marL="91440" marR="91440" marT="45720" marB="45720">
-                    <a:lnL w="2540" cap="flat" cmpd="sng" algn="ctr">
-                      <a:solidFill>
-                        <a:srgbClr val="EEEEEE"/>
-                      </a:solidFill>
-                      <a:prstDash val="solid"/>
-                      <a:round/>
-                      <a:headEnd type="none" w="med" len="med"/>
-                      <a:tailEnd type="none" w="med" len="med"/>
-                    </a:lnL>
-                    <a:lnR w="2540" cap="flat" cmpd="sng" algn="ctr">
-                      <a:solidFill>
-                        <a:srgbClr val="EEEEEE"/>
-                      </a:solidFill>
-                      <a:prstDash val="solid"/>
-                      <a:round/>
-                      <a:headEnd type="none" w="med" len="med"/>
-                      <a:tailEnd type="none" w="med" len="med"/>
-                    </a:lnR>
-                    <a:lnT w="2540" cap="flat" cmpd="sng" algn="ctr">
-                      <a:solidFill>
-                        <a:srgbClr val="EEEEEE"/>
-                      </a:solidFill>
-                      <a:prstDash val="solid"/>
-                      <a:round/>
-                      <a:headEnd type="none" w="med" len="med"/>
-                      <a:tailEnd type="none" w="med" len="med"/>
-                    </a:lnT>
-                    <a:lnB w="2540" cap="flat" cmpd="sng" algn="ctr">
-                      <a:solidFill>
-                        <a:srgbClr val="EEEEEE"/>
-                      </a:solidFill>
-                      <a:prstDash val="solid"/>
-                      <a:round/>
-                      <a:headEnd type="none" w="med" len="med"/>
-                      <a:tailEnd type="none" w="med" len="med"/>
-                    </a:lnB>
-                  </a:tcPr>
-                </a:tc>
-                <a:tc>
-                  <a:txBody>
-                    <a:bodyPr/>
-                    <a:lstStyle/>
-                    <a:p>
-                      <a:pPr algn="ctr" indent="0" marL="0">
-                        <a:buNone/>
-                      </a:pPr>
-                      <a:r>
-                        <a:rPr lang="en-US" sz="500" b="1" dirty="0">
-                          <a:solidFill>
-                            <a:srgbClr val="999999"/>
-                          </a:solidFill>
-                          <a:latin typeface="Calibri" pitchFamily="34" charset="0"/>
-                          <a:ea typeface="Calibri" pitchFamily="34" charset="-122"/>
-                          <a:cs typeface="Calibri" pitchFamily="34" charset="-120"/>
-                        </a:rPr>
-                        <a:t>3.54%</a:t>
-                      </a:r>
-                      <a:endParaRPr lang="en-US" sz="500" dirty="0">
-                        <a:latin typeface="Calibri" charset="0"/>
-                        <a:ea typeface="Calibri" charset="0"/>
-                        <a:cs typeface="Calibri" charset="0"/>
-                      </a:endParaRPr>
-                    </a:p>
-                  </a:txBody>
-                  <a:tcPr marL="91440" marR="91440" marT="45720" marB="45720">
-                    <a:lnL w="2540" cap="flat" cmpd="sng" algn="ctr">
-                      <a:solidFill>
-                        <a:srgbClr val="EEEEEE"/>
-                      </a:solidFill>
-                      <a:prstDash val="solid"/>
-                      <a:round/>
-                      <a:headEnd type="none" w="med" len="med"/>
-                      <a:tailEnd type="none" w="med" len="med"/>
-                    </a:lnL>
-                    <a:lnR w="2540" cap="flat" cmpd="sng" algn="ctr">
-                      <a:solidFill>
-                        <a:srgbClr val="EEEEEE"/>
-                      </a:solidFill>
-                      <a:prstDash val="solid"/>
-                      <a:round/>
-                      <a:headEnd type="none" w="med" len="med"/>
-                      <a:tailEnd type="none" w="med" len="med"/>
-                    </a:lnR>
-                    <a:lnT w="2540" cap="flat" cmpd="sng" algn="ctr">
-                      <a:solidFill>
-                        <a:srgbClr val="EEEEEE"/>
-                      </a:solidFill>
-                      <a:prstDash val="solid"/>
-                      <a:round/>
-                      <a:headEnd type="none" w="med" len="med"/>
-                      <a:tailEnd type="none" w="med" len="med"/>
-                    </a:lnT>
-                    <a:lnB w="2540" cap="flat" cmpd="sng" algn="ctr">
-                      <a:solidFill>
-                        <a:srgbClr val="EEEEEE"/>
-                      </a:solidFill>
-                      <a:prstDash val="solid"/>
-                      <a:round/>
-                      <a:headEnd type="none" w="med" len="med"/>
-                      <a:tailEnd type="none" w="med" len="med"/>
-                    </a:lnB>
-                  </a:tcPr>
-                </a:tc>
-              </a:tr>
-              <a:tr h="123444">
-                <a:tc>
-                  <a:txBody>
-                    <a:bodyPr/>
-                    <a:lstStyle/>
-                    <a:p>
-                      <a:pPr algn="l" indent="0" marL="0">
-                        <a:buNone/>
-                      </a:pPr>
-                      <a:endParaRPr lang="en-US" sz="500" dirty="0">
-                        <a:latin typeface="Calibri" charset="0"/>
-                        <a:ea typeface="Calibri" charset="0"/>
-                        <a:cs typeface="Calibri" charset="0"/>
-                      </a:endParaRPr>
-                    </a:p>
-                  </a:txBody>
-                  <a:tcPr marL="91440" marR="91440" marT="45720" marB="45720">
-                    <a:lnL w="2540" cap="flat" cmpd="sng" algn="ctr">
-                      <a:solidFill>
-                        <a:srgbClr val="EEEEEE"/>
-                      </a:solidFill>
-                      <a:prstDash val="solid"/>
-                      <a:round/>
-                      <a:headEnd type="none" w="med" len="med"/>
-                      <a:tailEnd type="none" w="med" len="med"/>
-                    </a:lnL>
-                    <a:lnR w="2540" cap="flat" cmpd="sng" algn="ctr">
-                      <a:solidFill>
-                        <a:srgbClr val="EEEEEE"/>
-                      </a:solidFill>
-                      <a:prstDash val="solid"/>
-                      <a:round/>
-                      <a:headEnd type="none" w="med" len="med"/>
-                      <a:tailEnd type="none" w="med" len="med"/>
-                    </a:lnR>
-                    <a:lnT w="2540" cap="flat" cmpd="sng" algn="ctr">
-                      <a:solidFill>
-                        <a:srgbClr val="EEEEEE"/>
-                      </a:solidFill>
-                      <a:prstDash val="solid"/>
-                      <a:round/>
-                      <a:headEnd type="none" w="med" len="med"/>
-                      <a:tailEnd type="none" w="med" len="med"/>
-                    </a:lnT>
-                    <a:lnB w="2540" cap="flat" cmpd="sng" algn="ctr">
-                      <a:solidFill>
-                        <a:srgbClr val="EEEEEE"/>
-                      </a:solidFill>
-                      <a:prstDash val="solid"/>
-                      <a:round/>
-                      <a:headEnd type="none" w="med" len="med"/>
-                      <a:tailEnd type="none" w="med" len="med"/>
-                    </a:lnB>
-                  </a:tcPr>
-                </a:tc>
-                <a:tc>
-                  <a:txBody>
-                    <a:bodyPr/>
-                    <a:lstStyle/>
-                    <a:p>
-                      <a:pPr algn="l" indent="0" marL="0">
-                        <a:buNone/>
-                      </a:pPr>
-                      <a:r>
-                        <a:rPr lang="en-US" sz="500" dirty="0">
-                          <a:solidFill>
-                            <a:srgbClr val="000000"/>
-                          </a:solidFill>
-                          <a:latin typeface="Calibri" pitchFamily="34" charset="0"/>
-                          <a:ea typeface="Calibri" pitchFamily="34" charset="-122"/>
-                          <a:cs typeface="Calibri" pitchFamily="34" charset="-120"/>
-                        </a:rPr>
-                        <a:t>FIP LIQUIDEZ Permanente</a:t>
-                      </a:r>
-                      <a:endParaRPr lang="en-US" sz="500" dirty="0">
-                        <a:latin typeface="Calibri" charset="0"/>
-                        <a:ea typeface="Calibri" charset="0"/>
-                        <a:cs typeface="Calibri" charset="0"/>
-                      </a:endParaRPr>
-                    </a:p>
-                  </a:txBody>
-                  <a:tcPr marL="91440" marR="91440" marT="45720" marB="45720">
-                    <a:lnL w="2540" cap="flat" cmpd="sng" algn="ctr">
-                      <a:solidFill>
-                        <a:srgbClr val="EEEEEE"/>
-                      </a:solidFill>
-                      <a:prstDash val="solid"/>
-                      <a:round/>
-                      <a:headEnd type="none" w="med" len="med"/>
-                      <a:tailEnd type="none" w="med" len="med"/>
-                    </a:lnL>
-                    <a:lnR w="2540" cap="flat" cmpd="sng" algn="ctr">
-                      <a:solidFill>
-                        <a:srgbClr val="EEEEEE"/>
-                      </a:solidFill>
-                      <a:prstDash val="solid"/>
-                      <a:round/>
-                      <a:headEnd type="none" w="med" len="med"/>
-                      <a:tailEnd type="none" w="med" len="med"/>
-                    </a:lnR>
-                    <a:lnT w="2540" cap="flat" cmpd="sng" algn="ctr">
-                      <a:solidFill>
-                        <a:srgbClr val="EEEEEE"/>
-                      </a:solidFill>
-                      <a:prstDash val="solid"/>
-                      <a:round/>
-                      <a:headEnd type="none" w="med" len="med"/>
-                      <a:tailEnd type="none" w="med" len="med"/>
-                    </a:lnT>
-                    <a:lnB w="2540" cap="flat" cmpd="sng" algn="ctr">
-                      <a:solidFill>
-                        <a:srgbClr val="EEEEEE"/>
-                      </a:solidFill>
-                      <a:prstDash val="solid"/>
-                      <a:round/>
-                      <a:headEnd type="none" w="med" len="med"/>
-                      <a:tailEnd type="none" w="med" len="med"/>
-                    </a:lnB>
-                  </a:tcPr>
-                </a:tc>
-                <a:tc>
-                  <a:txBody>
-                    <a:bodyPr/>
-                    <a:lstStyle/>
-                    <a:p>
-                      <a:pPr algn="ctr" indent="0" marL="0">
-                        <a:buNone/>
-                      </a:pPr>
-                      <a:r>
-                        <a:rPr lang="en-US" sz="500" dirty="0">
-                          <a:solidFill>
-                            <a:srgbClr val="000000"/>
-                          </a:solidFill>
-                          <a:latin typeface="Calibri" pitchFamily="34" charset="0"/>
-                          <a:ea typeface="Calibri" pitchFamily="34" charset="-122"/>
-                          <a:cs typeface="Calibri" pitchFamily="34" charset="-120"/>
-                        </a:rPr>
-                        <a:t>0.00%</a:t>
-                      </a:r>
-                      <a:endParaRPr lang="en-US" sz="500" dirty="0">
-                        <a:latin typeface="Calibri" charset="0"/>
-                        <a:ea typeface="Calibri" charset="0"/>
-                        <a:cs typeface="Calibri" charset="0"/>
-                      </a:endParaRPr>
-                    </a:p>
-                  </a:txBody>
-                  <a:tcPr marL="91440" marR="91440" marT="45720" marB="45720">
-                    <a:lnL w="2540" cap="flat" cmpd="sng" algn="ctr">
-                      <a:solidFill>
-                        <a:srgbClr val="EEEEEE"/>
-                      </a:solidFill>
-                      <a:prstDash val="solid"/>
-                      <a:round/>
-                      <a:headEnd type="none" w="med" len="med"/>
-                      <a:tailEnd type="none" w="med" len="med"/>
-                    </a:lnL>
-                    <a:lnR w="2540" cap="flat" cmpd="sng" algn="ctr">
-                      <a:solidFill>
-                        <a:srgbClr val="EEEEEE"/>
-                      </a:solidFill>
-                      <a:prstDash val="solid"/>
-                      <a:round/>
-                      <a:headEnd type="none" w="med" len="med"/>
-                      <a:tailEnd type="none" w="med" len="med"/>
-                    </a:lnR>
-                    <a:lnT w="2540" cap="flat" cmpd="sng" algn="ctr">
-                      <a:solidFill>
-                        <a:srgbClr val="EEEEEE"/>
-                      </a:solidFill>
-                      <a:prstDash val="solid"/>
-                      <a:round/>
-                      <a:headEnd type="none" w="med" len="med"/>
-                      <a:tailEnd type="none" w="med" len="med"/>
-                    </a:lnT>
-                    <a:lnB w="2540" cap="flat" cmpd="sng" algn="ctr">
-                      <a:solidFill>
-                        <a:srgbClr val="EEEEEE"/>
-                      </a:solidFill>
-                      <a:prstDash val="solid"/>
-                      <a:round/>
-                      <a:headEnd type="none" w="med" len="med"/>
-                      <a:tailEnd type="none" w="med" len="med"/>
-                    </a:lnB>
-                  </a:tcPr>
-                </a:tc>
-                <a:tc>
-                  <a:txBody>
-                    <a:bodyPr/>
-                    <a:lstStyle/>
-                    <a:p>
-                      <a:pPr algn="ctr" indent="0" marL="0">
-                        <a:buNone/>
-                      </a:pPr>
-                      <a:r>
-                        <a:rPr lang="en-US" sz="500" dirty="0">
-                          <a:solidFill>
-                            <a:srgbClr val="000000"/>
-                          </a:solidFill>
-                          <a:latin typeface="Calibri" pitchFamily="34" charset="0"/>
-                          <a:ea typeface="Calibri" pitchFamily="34" charset="-122"/>
-                          <a:cs typeface="Calibri" pitchFamily="34" charset="-120"/>
-                        </a:rPr>
-                        <a:t>0.00%</a:t>
-                      </a:r>
-                      <a:endParaRPr lang="en-US" sz="500" dirty="0">
-                        <a:latin typeface="Calibri" charset="0"/>
-                        <a:ea typeface="Calibri" charset="0"/>
-                        <a:cs typeface="Calibri" charset="0"/>
-                      </a:endParaRPr>
-                    </a:p>
-                  </a:txBody>
-                  <a:tcPr marL="91440" marR="91440" marT="45720" marB="45720">
-                    <a:lnL w="2540" cap="flat" cmpd="sng" algn="ctr">
-                      <a:solidFill>
-                        <a:srgbClr val="EEEEEE"/>
-                      </a:solidFill>
-                      <a:prstDash val="solid"/>
-                      <a:round/>
-                      <a:headEnd type="none" w="med" len="med"/>
-                      <a:tailEnd type="none" w="med" len="med"/>
-                    </a:lnL>
-                    <a:lnR w="2540" cap="flat" cmpd="sng" algn="ctr">
-                      <a:solidFill>
-                        <a:srgbClr val="EEEEEE"/>
-                      </a:solidFill>
-                      <a:prstDash val="solid"/>
-                      <a:round/>
-                      <a:headEnd type="none" w="med" len="med"/>
-                      <a:tailEnd type="none" w="med" len="med"/>
-                    </a:lnR>
-                    <a:lnT w="2540" cap="flat" cmpd="sng" algn="ctr">
-                      <a:solidFill>
-                        <a:srgbClr val="EEEEEE"/>
-                      </a:solidFill>
-                      <a:prstDash val="solid"/>
-                      <a:round/>
-                      <a:headEnd type="none" w="med" len="med"/>
-                      <a:tailEnd type="none" w="med" len="med"/>
-                    </a:lnT>
-                    <a:lnB w="2540" cap="flat" cmpd="sng" algn="ctr">
-                      <a:solidFill>
-                        <a:srgbClr val="EEEEEE"/>
-                      </a:solidFill>
-                      <a:prstDash val="solid"/>
-                      <a:round/>
-                      <a:headEnd type="none" w="med" len="med"/>
-                      <a:tailEnd type="none" w="med" len="med"/>
-                    </a:lnB>
-                  </a:tcPr>
-                </a:tc>
-                <a:tc>
-                  <a:txBody>
-                    <a:bodyPr/>
-                    <a:lstStyle/>
-                    <a:p>
-                      <a:pPr algn="ctr" indent="0" marL="0">
-                        <a:buNone/>
-                      </a:pPr>
-                      <a:r>
-                        <a:rPr lang="en-US" sz="500" dirty="0">
-                          <a:solidFill>
-                            <a:srgbClr val="000000"/>
-                          </a:solidFill>
-                          <a:latin typeface="Calibri" pitchFamily="34" charset="0"/>
-                          <a:ea typeface="Calibri" pitchFamily="34" charset="-122"/>
-                          <a:cs typeface="Calibri" pitchFamily="34" charset="-120"/>
-                        </a:rPr>
-                        <a:t>0.01%</a:t>
-                      </a:r>
-                      <a:endParaRPr lang="en-US" sz="500" dirty="0">
-                        <a:latin typeface="Calibri" charset="0"/>
-                        <a:ea typeface="Calibri" charset="0"/>
-                        <a:cs typeface="Calibri" charset="0"/>
-                      </a:endParaRPr>
-                    </a:p>
-                  </a:txBody>
-                  <a:tcPr marL="91440" marR="91440" marT="45720" marB="45720">
-                    <a:lnL w="2540" cap="flat" cmpd="sng" algn="ctr">
-                      <a:solidFill>
-                        <a:srgbClr val="EEEEEE"/>
-                      </a:solidFill>
-                      <a:prstDash val="solid"/>
-                      <a:round/>
-                      <a:headEnd type="none" w="med" len="med"/>
-                      <a:tailEnd type="none" w="med" len="med"/>
-                    </a:lnL>
-                    <a:lnR w="2540" cap="flat" cmpd="sng" algn="ctr">
-                      <a:solidFill>
-                        <a:srgbClr val="EEEEEE"/>
-                      </a:solidFill>
-                      <a:prstDash val="solid"/>
-                      <a:round/>
-                      <a:headEnd type="none" w="med" len="med"/>
-                      <a:tailEnd type="none" w="med" len="med"/>
-                    </a:lnR>
-                    <a:lnT w="2540" cap="flat" cmpd="sng" algn="ctr">
-                      <a:solidFill>
-                        <a:srgbClr val="EEEEEE"/>
-                      </a:solidFill>
-                      <a:prstDash val="solid"/>
-                      <a:round/>
-                      <a:headEnd type="none" w="med" len="med"/>
-                      <a:tailEnd type="none" w="med" len="med"/>
-                    </a:lnT>
-                    <a:lnB w="2540" cap="flat" cmpd="sng" algn="ctr">
-                      <a:solidFill>
-                        <a:srgbClr val="EEEEEE"/>
-                      </a:solidFill>
-                      <a:prstDash val="solid"/>
-                      <a:round/>
-                      <a:headEnd type="none" w="med" len="med"/>
-                      <a:tailEnd type="none" w="med" len="med"/>
-                    </a:lnB>
-                  </a:tcPr>
-                </a:tc>
-                <a:tc>
-                  <a:txBody>
-                    <a:bodyPr/>
-                    <a:lstStyle/>
-                    <a:p>
-                      <a:pPr algn="ctr" indent="0" marL="0">
-                        <a:buNone/>
-                      </a:pPr>
-                      <a:r>
-                        <a:rPr lang="en-US" sz="500" dirty="0">
-                          <a:solidFill>
-                            <a:srgbClr val="000000"/>
-                          </a:solidFill>
-                          <a:latin typeface="Calibri" pitchFamily="34" charset="0"/>
-                          <a:ea typeface="Calibri" pitchFamily="34" charset="-122"/>
-                          <a:cs typeface="Calibri" pitchFamily="34" charset="-120"/>
-                        </a:rPr>
-                        <a:t>0.01%</a:t>
-                      </a:r>
-                      <a:endParaRPr lang="en-US" sz="500" dirty="0">
-                        <a:latin typeface="Calibri" charset="0"/>
-                        <a:ea typeface="Calibri" charset="0"/>
-                        <a:cs typeface="Calibri" charset="0"/>
-                      </a:endParaRPr>
-                    </a:p>
-                  </a:txBody>
-                  <a:tcPr marL="91440" marR="91440" marT="45720" marB="45720">
-                    <a:lnL w="2540" cap="flat" cmpd="sng" algn="ctr">
-                      <a:solidFill>
-                        <a:srgbClr val="EEEEEE"/>
-                      </a:solidFill>
-                      <a:prstDash val="solid"/>
-                      <a:round/>
-                      <a:headEnd type="none" w="med" len="med"/>
-                      <a:tailEnd type="none" w="med" len="med"/>
-                    </a:lnL>
-                    <a:lnR w="2540" cap="flat" cmpd="sng" algn="ctr">
-                      <a:solidFill>
-                        <a:srgbClr val="EEEEEE"/>
-                      </a:solidFill>
-                      <a:prstDash val="solid"/>
-                      <a:round/>
-                      <a:headEnd type="none" w="med" len="med"/>
-                      <a:tailEnd type="none" w="med" len="med"/>
-                    </a:lnR>
-                    <a:lnT w="2540" cap="flat" cmpd="sng" algn="ctr">
-                      <a:solidFill>
-                        <a:srgbClr val="EEEEEE"/>
-                      </a:solidFill>
-                      <a:prstDash val="solid"/>
-                      <a:round/>
-                      <a:headEnd type="none" w="med" len="med"/>
-                      <a:tailEnd type="none" w="med" len="med"/>
-                    </a:lnT>
-                    <a:lnB w="2540" cap="flat" cmpd="sng" algn="ctr">
-                      <a:solidFill>
-                        <a:srgbClr val="EEEEEE"/>
-                      </a:solidFill>
-                      <a:prstDash val="solid"/>
-                      <a:round/>
-                      <a:headEnd type="none" w="med" len="med"/>
-                      <a:tailEnd type="none" w="med" len="med"/>
-                    </a:lnB>
-                  </a:tcPr>
-                </a:tc>
-                <a:tc>
-                  <a:txBody>
-                    <a:bodyPr/>
-                    <a:lstStyle/>
-                    <a:p>
-                      <a:pPr algn="ctr" indent="0" marL="0">
-                        <a:buNone/>
-                      </a:pPr>
-                      <a:r>
-                        <a:rPr lang="en-US" sz="500" dirty="0">
-                          <a:solidFill>
-                            <a:srgbClr val="000000"/>
-                          </a:solidFill>
-                          <a:latin typeface="Calibri" pitchFamily="34" charset="0"/>
-                          <a:ea typeface="Calibri" pitchFamily="34" charset="-122"/>
-                          <a:cs typeface="Calibri" pitchFamily="34" charset="-120"/>
-                        </a:rPr>
-                        <a:t>0.01%</a:t>
-                      </a:r>
-                      <a:endParaRPr lang="en-US" sz="500" dirty="0">
-                        <a:latin typeface="Calibri" charset="0"/>
-                        <a:ea typeface="Calibri" charset="0"/>
-                        <a:cs typeface="Calibri" charset="0"/>
-                      </a:endParaRPr>
-                    </a:p>
-                  </a:txBody>
-                  <a:tcPr marL="91440" marR="91440" marT="45720" marB="45720">
-                    <a:lnL w="2540" cap="flat" cmpd="sng" algn="ctr">
-                      <a:solidFill>
-                        <a:srgbClr val="EEEEEE"/>
-                      </a:solidFill>
-                      <a:prstDash val="solid"/>
-                      <a:round/>
-                      <a:headEnd type="none" w="med" len="med"/>
-                      <a:tailEnd type="none" w="med" len="med"/>
-                    </a:lnL>
-                    <a:lnR w="2540" cap="flat" cmpd="sng" algn="ctr">
-                      <a:solidFill>
-                        <a:srgbClr val="EEEEEE"/>
-                      </a:solidFill>
-                      <a:prstDash val="solid"/>
-                      <a:round/>
-                      <a:headEnd type="none" w="med" len="med"/>
-                      <a:tailEnd type="none" w="med" len="med"/>
-                    </a:lnR>
-                    <a:lnT w="2540" cap="flat" cmpd="sng" algn="ctr">
-                      <a:solidFill>
-                        <a:srgbClr val="EEEEEE"/>
-                      </a:solidFill>
-                      <a:prstDash val="solid"/>
-                      <a:round/>
-                      <a:headEnd type="none" w="med" len="med"/>
-                      <a:tailEnd type="none" w="med" len="med"/>
-                    </a:lnT>
-                    <a:lnB w="2540" cap="flat" cmpd="sng" algn="ctr">
-                      <a:solidFill>
-                        <a:srgbClr val="EEEEEE"/>
-                      </a:solidFill>
-                      <a:prstDash val="solid"/>
-                      <a:round/>
-                      <a:headEnd type="none" w="med" len="med"/>
-                      <a:tailEnd type="none" w="med" len="med"/>
-                    </a:lnB>
-                  </a:tcPr>
-                </a:tc>
-                <a:tc>
-                  <a:txBody>
-                    <a:bodyPr/>
-                    <a:lstStyle/>
-                    <a:p>
-                      <a:pPr algn="ctr" indent="0" marL="0">
-                        <a:buNone/>
-                      </a:pPr>
-                      <a:r>
-                        <a:rPr lang="en-US" sz="500" dirty="0">
-                          <a:solidFill>
-                            <a:srgbClr val="000000"/>
-                          </a:solidFill>
-                          <a:latin typeface="Calibri" pitchFamily="34" charset="0"/>
-                          <a:ea typeface="Calibri" pitchFamily="34" charset="-122"/>
-                          <a:cs typeface="Calibri" pitchFamily="34" charset="-120"/>
-                        </a:rPr>
-                        <a:t>0.01%</a:t>
-                      </a:r>
-                      <a:endParaRPr lang="en-US" sz="500" dirty="0">
-                        <a:latin typeface="Calibri" charset="0"/>
-                        <a:ea typeface="Calibri" charset="0"/>
-                        <a:cs typeface="Calibri" charset="0"/>
-                      </a:endParaRPr>
-                    </a:p>
-                  </a:txBody>
-                  <a:tcPr marL="91440" marR="91440" marT="45720" marB="45720">
-                    <a:lnL w="2540" cap="flat" cmpd="sng" algn="ctr">
-                      <a:solidFill>
-                        <a:srgbClr val="EEEEEE"/>
-                      </a:solidFill>
-                      <a:prstDash val="solid"/>
-                      <a:round/>
-                      <a:headEnd type="none" w="med" len="med"/>
-                      <a:tailEnd type="none" w="med" len="med"/>
-                    </a:lnL>
-                    <a:lnR w="2540" cap="flat" cmpd="sng" algn="ctr">
-                      <a:solidFill>
-                        <a:srgbClr val="EEEEEE"/>
-                      </a:solidFill>
-                      <a:prstDash val="solid"/>
-                      <a:round/>
-                      <a:headEnd type="none" w="med" len="med"/>
-                      <a:tailEnd type="none" w="med" len="med"/>
-                    </a:lnR>
-                    <a:lnT w="2540" cap="flat" cmpd="sng" algn="ctr">
-                      <a:solidFill>
-                        <a:srgbClr val="EEEEEE"/>
-                      </a:solidFill>
-                      <a:prstDash val="solid"/>
-                      <a:round/>
-                      <a:headEnd type="none" w="med" len="med"/>
-                      <a:tailEnd type="none" w="med" len="med"/>
-                    </a:lnT>
-                    <a:lnB w="2540" cap="flat" cmpd="sng" algn="ctr">
-                      <a:solidFill>
-                        <a:srgbClr val="EEEEEE"/>
-                      </a:solidFill>
-                      <a:prstDash val="solid"/>
-                      <a:round/>
-                      <a:headEnd type="none" w="med" len="med"/>
-                      <a:tailEnd type="none" w="med" len="med"/>
-                    </a:lnB>
-                  </a:tcPr>
-                </a:tc>
-                <a:tc>
-                  <a:txBody>
-                    <a:bodyPr/>
-                    <a:lstStyle/>
-                    <a:p>
-                      <a:pPr algn="ctr" indent="0" marL="0">
-                        <a:buNone/>
-                      </a:pPr>
-                      <a:r>
-                        <a:rPr lang="en-US" sz="500" dirty="0">
-                          <a:solidFill>
-                            <a:srgbClr val="000000"/>
-                          </a:solidFill>
-                          <a:latin typeface="Calibri" pitchFamily="34" charset="0"/>
-                          <a:ea typeface="Calibri" pitchFamily="34" charset="-122"/>
-                          <a:cs typeface="Calibri" pitchFamily="34" charset="-120"/>
-                        </a:rPr>
-                        <a:t>0.01%</a:t>
+                        <a:t>0.71%</a:t>
                       </a:r>
                       <a:endParaRPr lang="en-US" sz="500" dirty="0">
                         <a:latin typeface="Calibri" charset="0"/>
@@ -14522,7 +14522,7 @@
                           <a:ea typeface="Calibri" pitchFamily="34" charset="-122"/>
                           <a:cs typeface="Calibri" pitchFamily="34" charset="-120"/>
                         </a:rPr>
-                        <a:t>6.86%</a:t>
+                        <a:t>10.74%</a:t>
                       </a:r>
                       <a:endParaRPr lang="en-US" sz="500" dirty="0">
                         <a:latin typeface="Calibri" charset="0"/>

--- a/folletos/2026-04/pptx/FIP_VANTRUST_LIQUIDEZ_PERMANENTE.pptx
+++ b/folletos/2026-04/pptx/FIP_VANTRUST_LIQUIDEZ_PERMANENTE.pptx
@@ -3113,7 +3113,7 @@
                 <a:ea typeface="Calibri" pitchFamily="34" charset="-122"/>
                 <a:cs typeface="Calibri" pitchFamily="34" charset="-120"/>
               </a:rPr>
-              <a:t>prueba CLP</a:t>
+              <a:t>prueba 13 CLP</a:t>
             </a:r>
             <a:endParaRPr lang="en-US" sz="800" dirty="0"/>
           </a:p>

--- a/folletos/2026-04/pptx/FIP_VANTRUST_LIQUIDEZ_PERMANENTE.pptx
+++ b/folletos/2026-04/pptx/FIP_VANTRUST_LIQUIDEZ_PERMANENTE.pptx
@@ -189,38 +189,107 @@
           </c:marker>
           <c:cat>
             <c:multiLvlStrRef>
-              <c:f>Sheet1!$A$2:$A$11</c:f>
+              <c:f>Sheet1!$A$2:$A$34</c:f>
               <c:multiLvlStrCache>
-                <c:ptCount val="10"/>
+                <c:ptCount val="33"/>
                 <c:lvl>
                   <c:pt idx="0">
+                    <c:v>Aug 2023</c:v>
+                  </c:pt>
+                  <c:pt idx="1">
+                    <c:v>Sep 2023</c:v>
+                  </c:pt>
+                  <c:pt idx="2">
+                    <c:v>Oct 2023</c:v>
+                  </c:pt>
+                  <c:pt idx="3">
+                    <c:v>Nov 2023</c:v>
+                  </c:pt>
+                  <c:pt idx="4">
+                    <c:v>Dec 2023</c:v>
+                  </c:pt>
+                  <c:pt idx="5">
+                    <c:v>Jan 2024</c:v>
+                  </c:pt>
+                  <c:pt idx="6">
+                    <c:v>Feb 2024</c:v>
+                  </c:pt>
+                  <c:pt idx="7">
+                    <c:v>Mar 2024</c:v>
+                  </c:pt>
+                  <c:pt idx="8">
+                    <c:v>Apr 2024</c:v>
+                  </c:pt>
+                  <c:pt idx="9">
+                    <c:v>May 2024</c:v>
+                  </c:pt>
+                  <c:pt idx="10">
+                    <c:v>Jun 2024</c:v>
+                  </c:pt>
+                  <c:pt idx="11">
+                    <c:v>Jul 2024</c:v>
+                  </c:pt>
+                  <c:pt idx="12">
+                    <c:v>Aug 2024</c:v>
+                  </c:pt>
+                  <c:pt idx="13">
+                    <c:v>Sep 2024</c:v>
+                  </c:pt>
+                  <c:pt idx="14">
+                    <c:v>Oct 2024</c:v>
+                  </c:pt>
+                  <c:pt idx="15">
+                    <c:v>Nov 2024</c:v>
+                  </c:pt>
+                  <c:pt idx="16">
+                    <c:v>Dec 2024</c:v>
+                  </c:pt>
+                  <c:pt idx="17">
+                    <c:v>Jan 2025</c:v>
+                  </c:pt>
+                  <c:pt idx="18">
+                    <c:v>Feb 2025</c:v>
+                  </c:pt>
+                  <c:pt idx="19">
+                    <c:v>Mar 2025</c:v>
+                  </c:pt>
+                  <c:pt idx="20">
+                    <c:v>Apr 2025</c:v>
+                  </c:pt>
+                  <c:pt idx="21">
+                    <c:v>May 2025</c:v>
+                  </c:pt>
+                  <c:pt idx="22">
+                    <c:v>Jun 2025</c:v>
+                  </c:pt>
+                  <c:pt idx="23">
                     <c:v>Jul 2025</c:v>
                   </c:pt>
-                  <c:pt idx="1">
+                  <c:pt idx="24">
                     <c:v>Aug 2025</c:v>
                   </c:pt>
-                  <c:pt idx="2">
+                  <c:pt idx="25">
                     <c:v>Sep 2025</c:v>
                   </c:pt>
-                  <c:pt idx="3">
+                  <c:pt idx="26">
                     <c:v>Oct 2025</c:v>
                   </c:pt>
-                  <c:pt idx="4">
+                  <c:pt idx="27">
                     <c:v>Nov 2025</c:v>
                   </c:pt>
-                  <c:pt idx="5">
+                  <c:pt idx="28">
                     <c:v>Dec 2025</c:v>
                   </c:pt>
-                  <c:pt idx="6">
+                  <c:pt idx="29">
                     <c:v>Jan 2026</c:v>
                   </c:pt>
-                  <c:pt idx="7">
+                  <c:pt idx="30">
                     <c:v>Feb 2026</c:v>
                   </c:pt>
-                  <c:pt idx="8">
+                  <c:pt idx="31">
                     <c:v>Mar 2026</c:v>
                   </c:pt>
-                  <c:pt idx="9">
+                  <c:pt idx="32">
                     <c:v>Apr 2026</c:v>
                   </c:pt>
                 </c:lvl>
@@ -229,39 +298,108 @@
           </c:cat>
           <c:val>
             <c:numRef>
-              <c:f>Sheet1!$B$2:$B$11</c:f>
+              <c:f>Sheet1!$B$2:$B$34</c:f>
               <c:numCache>
                 <c:formatCode>General</c:formatCode>
-                <c:ptCount val="10"/>
+                <c:ptCount val="33"/>
                 <c:pt idx="0">
                   <c:v>100</c:v>
                 </c:pt>
                 <c:pt idx="1">
-                  <c:v>100.4</c:v>
+                  <c:v>100.78</c:v>
                 </c:pt>
                 <c:pt idx="2">
-                  <c:v>100.79</c:v>
+                  <c:v>101.63</c:v>
                 </c:pt>
                 <c:pt idx="3">
-                  <c:v>101.19</c:v>
+                  <c:v>102.4</c:v>
                 </c:pt>
                 <c:pt idx="4">
-                  <c:v>101.59</c:v>
+                  <c:v>103.12</c:v>
                 </c:pt>
                 <c:pt idx="5">
-                  <c:v>101.98</c:v>
+                  <c:v>103.88</c:v>
                 </c:pt>
                 <c:pt idx="6">
-                  <c:v>102.37</c:v>
+                  <c:v>104.52</c:v>
                 </c:pt>
                 <c:pt idx="7">
-                  <c:v>102.75</c:v>
+                  <c:v>105.11</c:v>
                 </c:pt>
                 <c:pt idx="8">
-                  <c:v>103.14</c:v>
+                  <c:v>105.75</c:v>
                 </c:pt>
                 <c:pt idx="9">
-                  <c:v>103.52</c:v>
+                  <c:v>106.33</c:v>
+                </c:pt>
+                <c:pt idx="10">
+                  <c:v>106.82</c:v>
+                </c:pt>
+                <c:pt idx="11">
+                  <c:v>107.38</c:v>
+                </c:pt>
+                <c:pt idx="12">
+                  <c:v>107.9</c:v>
+                </c:pt>
+                <c:pt idx="13">
+                  <c:v>108.42</c:v>
+                </c:pt>
+                <c:pt idx="14">
+                  <c:v>108.91</c:v>
+                </c:pt>
+                <c:pt idx="15">
+                  <c:v>109.38</c:v>
+                </c:pt>
+                <c:pt idx="16">
+                  <c:v>109.87</c:v>
+                </c:pt>
+                <c:pt idx="17">
+                  <c:v>110.36</c:v>
+                </c:pt>
+                <c:pt idx="18">
+                  <c:v>110.79</c:v>
+                </c:pt>
+                <c:pt idx="19">
+                  <c:v>111.27</c:v>
+                </c:pt>
+                <c:pt idx="20">
+                  <c:v>111.73</c:v>
+                </c:pt>
+                <c:pt idx="21">
+                  <c:v>112.2</c:v>
+                </c:pt>
+                <c:pt idx="22">
+                  <c:v>112.68</c:v>
+                </c:pt>
+                <c:pt idx="23">
+                  <c:v>113.17</c:v>
+                </c:pt>
+                <c:pt idx="24">
+                  <c:v>113.6</c:v>
+                </c:pt>
+                <c:pt idx="25">
+                  <c:v>114.08</c:v>
+                </c:pt>
+                <c:pt idx="26">
+                  <c:v>114.53</c:v>
+                </c:pt>
+                <c:pt idx="27">
+                  <c:v>114.97</c:v>
+                </c:pt>
+                <c:pt idx="28">
+                  <c:v>115.45</c:v>
+                </c:pt>
+                <c:pt idx="29">
+                  <c:v>115.9</c:v>
+                </c:pt>
+                <c:pt idx="30">
+                  <c:v>116.32</c:v>
+                </c:pt>
+                <c:pt idx="31">
+                  <c:v>116.77</c:v>
+                </c:pt>
+                <c:pt idx="32">
+                  <c:v>117.21</c:v>
                 </c:pt>
               </c:numCache>
             </c:numRef>
@@ -339,38 +477,107 @@
           </c:marker>
           <c:cat>
             <c:multiLvlStrRef>
-              <c:f>Sheet1!$A$2:$A$11</c:f>
+              <c:f>Sheet1!$A$2:$A$34</c:f>
               <c:multiLvlStrCache>
-                <c:ptCount val="10"/>
+                <c:ptCount val="33"/>
                 <c:lvl>
                   <c:pt idx="0">
+                    <c:v>Aug 2023</c:v>
+                  </c:pt>
+                  <c:pt idx="1">
+                    <c:v>Sep 2023</c:v>
+                  </c:pt>
+                  <c:pt idx="2">
+                    <c:v>Oct 2023</c:v>
+                  </c:pt>
+                  <c:pt idx="3">
+                    <c:v>Nov 2023</c:v>
+                  </c:pt>
+                  <c:pt idx="4">
+                    <c:v>Dec 2023</c:v>
+                  </c:pt>
+                  <c:pt idx="5">
+                    <c:v>Jan 2024</c:v>
+                  </c:pt>
+                  <c:pt idx="6">
+                    <c:v>Feb 2024</c:v>
+                  </c:pt>
+                  <c:pt idx="7">
+                    <c:v>Mar 2024</c:v>
+                  </c:pt>
+                  <c:pt idx="8">
+                    <c:v>Apr 2024</c:v>
+                  </c:pt>
+                  <c:pt idx="9">
+                    <c:v>May 2024</c:v>
+                  </c:pt>
+                  <c:pt idx="10">
+                    <c:v>Jun 2024</c:v>
+                  </c:pt>
+                  <c:pt idx="11">
+                    <c:v>Jul 2024</c:v>
+                  </c:pt>
+                  <c:pt idx="12">
+                    <c:v>Aug 2024</c:v>
+                  </c:pt>
+                  <c:pt idx="13">
+                    <c:v>Sep 2024</c:v>
+                  </c:pt>
+                  <c:pt idx="14">
+                    <c:v>Oct 2024</c:v>
+                  </c:pt>
+                  <c:pt idx="15">
+                    <c:v>Nov 2024</c:v>
+                  </c:pt>
+                  <c:pt idx="16">
+                    <c:v>Dec 2024</c:v>
+                  </c:pt>
+                  <c:pt idx="17">
+                    <c:v>Jan 2025</c:v>
+                  </c:pt>
+                  <c:pt idx="18">
+                    <c:v>Feb 2025</c:v>
+                  </c:pt>
+                  <c:pt idx="19">
+                    <c:v>Mar 2025</c:v>
+                  </c:pt>
+                  <c:pt idx="20">
+                    <c:v>Apr 2025</c:v>
+                  </c:pt>
+                  <c:pt idx="21">
+                    <c:v>May 2025</c:v>
+                  </c:pt>
+                  <c:pt idx="22">
+                    <c:v>Jun 2025</c:v>
+                  </c:pt>
+                  <c:pt idx="23">
                     <c:v>Jul 2025</c:v>
                   </c:pt>
-                  <c:pt idx="1">
+                  <c:pt idx="24">
                     <c:v>Aug 2025</c:v>
                   </c:pt>
-                  <c:pt idx="2">
+                  <c:pt idx="25">
                     <c:v>Sep 2025</c:v>
                   </c:pt>
-                  <c:pt idx="3">
+                  <c:pt idx="26">
                     <c:v>Oct 2025</c:v>
                   </c:pt>
-                  <c:pt idx="4">
+                  <c:pt idx="27">
                     <c:v>Nov 2025</c:v>
                   </c:pt>
-                  <c:pt idx="5">
+                  <c:pt idx="28">
                     <c:v>Dec 2025</c:v>
                   </c:pt>
-                  <c:pt idx="6">
+                  <c:pt idx="29">
                     <c:v>Jan 2026</c:v>
                   </c:pt>
-                  <c:pt idx="7">
+                  <c:pt idx="30">
                     <c:v>Feb 2026</c:v>
                   </c:pt>
-                  <c:pt idx="8">
+                  <c:pt idx="31">
                     <c:v>Mar 2026</c:v>
                   </c:pt>
-                  <c:pt idx="9">
+                  <c:pt idx="32">
                     <c:v>Apr 2026</c:v>
                   </c:pt>
                 </c:lvl>
@@ -379,39 +586,108 @@
           </c:cat>
           <c:val>
             <c:numRef>
-              <c:f>Sheet1!$C$2:$C$11</c:f>
+              <c:f>Sheet1!$C$2:$C$34</c:f>
               <c:numCache>
                 <c:formatCode>General</c:formatCode>
-                <c:ptCount val="10"/>
+                <c:ptCount val="33"/>
                 <c:pt idx="0">
                   <c:v>100</c:v>
                 </c:pt>
                 <c:pt idx="1">
-                  <c:v>100.67</c:v>
+                  <c:v>100.68</c:v>
                 </c:pt>
                 <c:pt idx="2">
-                  <c:v>101.27</c:v>
+                  <c:v>101.58</c:v>
                 </c:pt>
                 <c:pt idx="3">
-                  <c:v>101.86</c:v>
+                  <c:v>102.31</c:v>
                 </c:pt>
                 <c:pt idx="4">
-                  <c:v>102.67</c:v>
+                  <c:v>103.03</c:v>
                 </c:pt>
                 <c:pt idx="5">
-                  <c:v>106.82</c:v>
+                  <c:v>103.79</c:v>
                 </c:pt>
                 <c:pt idx="6">
-                  <c:v>104.12</c:v>
+                  <c:v>104.34</c:v>
                 </c:pt>
                 <c:pt idx="7">
-                  <c:v>104.68</c:v>
+                  <c:v>105</c:v>
                 </c:pt>
                 <c:pt idx="8">
-                  <c:v>105.28</c:v>
+                  <c:v>105.7</c:v>
                 </c:pt>
                 <c:pt idx="9">
-                  <c:v>105.88</c:v>
+                  <c:v>106.28</c:v>
+                </c:pt>
+                <c:pt idx="10">
+                  <c:v>106.78</c:v>
+                </c:pt>
+                <c:pt idx="11">
+                  <c:v>107.21</c:v>
+                </c:pt>
+                <c:pt idx="12">
+                  <c:v>107.71</c:v>
+                </c:pt>
+                <c:pt idx="13">
+                  <c:v>108.3</c:v>
+                </c:pt>
+                <c:pt idx="14">
+                  <c:v>108.79</c:v>
+                </c:pt>
+                <c:pt idx="15">
+                  <c:v>109.09</c:v>
+                </c:pt>
+                <c:pt idx="16">
+                  <c:v>109.55</c:v>
+                </c:pt>
+                <c:pt idx="17">
+                  <c:v>109.92</c:v>
+                </c:pt>
+                <c:pt idx="18">
+                  <c:v>110.35</c:v>
+                </c:pt>
+                <c:pt idx="19">
+                  <c:v>110.91</c:v>
+                </c:pt>
+                <c:pt idx="20">
+                  <c:v>111.47</c:v>
+                </c:pt>
+                <c:pt idx="21">
+                  <c:v>112.13</c:v>
+                </c:pt>
+                <c:pt idx="22">
+                  <c:v>112.78</c:v>
+                </c:pt>
+                <c:pt idx="23">
+                  <c:v>113.57</c:v>
+                </c:pt>
+                <c:pt idx="24">
+                  <c:v>114.33</c:v>
+                </c:pt>
+                <c:pt idx="25">
+                  <c:v>115.02</c:v>
+                </c:pt>
+                <c:pt idx="26">
+                  <c:v>115.69</c:v>
+                </c:pt>
+                <c:pt idx="27">
+                  <c:v>116.6</c:v>
+                </c:pt>
+                <c:pt idx="28">
+                  <c:v>117.38</c:v>
+                </c:pt>
+                <c:pt idx="29">
+                  <c:v>118.22</c:v>
+                </c:pt>
+                <c:pt idx="30">
+                  <c:v>118.89</c:v>
+                </c:pt>
+                <c:pt idx="31">
+                  <c:v>119.56</c:v>
+                </c:pt>
+                <c:pt idx="32">
+                  <c:v>120.24</c:v>
                 </c:pt>
               </c:numCache>
             </c:numRef>
@@ -489,38 +765,107 @@
           </c:marker>
           <c:cat>
             <c:multiLvlStrRef>
-              <c:f>Sheet1!$A$2:$A$11</c:f>
+              <c:f>Sheet1!$A$2:$A$34</c:f>
               <c:multiLvlStrCache>
-                <c:ptCount val="10"/>
+                <c:ptCount val="33"/>
                 <c:lvl>
                   <c:pt idx="0">
+                    <c:v>Aug 2023</c:v>
+                  </c:pt>
+                  <c:pt idx="1">
+                    <c:v>Sep 2023</c:v>
+                  </c:pt>
+                  <c:pt idx="2">
+                    <c:v>Oct 2023</c:v>
+                  </c:pt>
+                  <c:pt idx="3">
+                    <c:v>Nov 2023</c:v>
+                  </c:pt>
+                  <c:pt idx="4">
+                    <c:v>Dec 2023</c:v>
+                  </c:pt>
+                  <c:pt idx="5">
+                    <c:v>Jan 2024</c:v>
+                  </c:pt>
+                  <c:pt idx="6">
+                    <c:v>Feb 2024</c:v>
+                  </c:pt>
+                  <c:pt idx="7">
+                    <c:v>Mar 2024</c:v>
+                  </c:pt>
+                  <c:pt idx="8">
+                    <c:v>Apr 2024</c:v>
+                  </c:pt>
+                  <c:pt idx="9">
+                    <c:v>May 2024</c:v>
+                  </c:pt>
+                  <c:pt idx="10">
+                    <c:v>Jun 2024</c:v>
+                  </c:pt>
+                  <c:pt idx="11">
+                    <c:v>Jul 2024</c:v>
+                  </c:pt>
+                  <c:pt idx="12">
+                    <c:v>Aug 2024</c:v>
+                  </c:pt>
+                  <c:pt idx="13">
+                    <c:v>Sep 2024</c:v>
+                  </c:pt>
+                  <c:pt idx="14">
+                    <c:v>Oct 2024</c:v>
+                  </c:pt>
+                  <c:pt idx="15">
+                    <c:v>Nov 2024</c:v>
+                  </c:pt>
+                  <c:pt idx="16">
+                    <c:v>Dec 2024</c:v>
+                  </c:pt>
+                  <c:pt idx="17">
+                    <c:v>Jan 2025</c:v>
+                  </c:pt>
+                  <c:pt idx="18">
+                    <c:v>Feb 2025</c:v>
+                  </c:pt>
+                  <c:pt idx="19">
+                    <c:v>Mar 2025</c:v>
+                  </c:pt>
+                  <c:pt idx="20">
+                    <c:v>Apr 2025</c:v>
+                  </c:pt>
+                  <c:pt idx="21">
+                    <c:v>May 2025</c:v>
+                  </c:pt>
+                  <c:pt idx="22">
+                    <c:v>Jun 2025</c:v>
+                  </c:pt>
+                  <c:pt idx="23">
                     <c:v>Jul 2025</c:v>
                   </c:pt>
-                  <c:pt idx="1">
+                  <c:pt idx="24">
                     <c:v>Aug 2025</c:v>
                   </c:pt>
-                  <c:pt idx="2">
+                  <c:pt idx="25">
                     <c:v>Sep 2025</c:v>
                   </c:pt>
-                  <c:pt idx="3">
+                  <c:pt idx="26">
                     <c:v>Oct 2025</c:v>
                   </c:pt>
-                  <c:pt idx="4">
+                  <c:pt idx="27">
                     <c:v>Nov 2025</c:v>
                   </c:pt>
-                  <c:pt idx="5">
+                  <c:pt idx="28">
                     <c:v>Dec 2025</c:v>
                   </c:pt>
-                  <c:pt idx="6">
+                  <c:pt idx="29">
                     <c:v>Jan 2026</c:v>
                   </c:pt>
-                  <c:pt idx="7">
+                  <c:pt idx="30">
                     <c:v>Feb 2026</c:v>
                   </c:pt>
-                  <c:pt idx="8">
+                  <c:pt idx="31">
                     <c:v>Mar 2026</c:v>
                   </c:pt>
-                  <c:pt idx="9">
+                  <c:pt idx="32">
                     <c:v>Apr 2026</c:v>
                   </c:pt>
                 </c:lvl>
@@ -529,39 +874,108 @@
           </c:cat>
           <c:val>
             <c:numRef>
-              <c:f>Sheet1!$D$2:$D$11</c:f>
+              <c:f>Sheet1!$D$2:$D$34</c:f>
               <c:numCache>
                 <c:formatCode>General</c:formatCode>
-                <c:ptCount val="10"/>
+                <c:ptCount val="33"/>
                 <c:pt idx="0">
                   <c:v>100</c:v>
                 </c:pt>
                 <c:pt idx="1">
-                  <c:v>100.3</c:v>
+                  <c:v>100.68</c:v>
                 </c:pt>
                 <c:pt idx="2">
-                  <c:v>100.58</c:v>
+                  <c:v>101.35</c:v>
                 </c:pt>
                 <c:pt idx="3">
-                  <c:v>100.87</c:v>
+                  <c:v>101.98</c:v>
                 </c:pt>
                 <c:pt idx="4">
-                  <c:v>101.15</c:v>
+                  <c:v>102.6</c:v>
                 </c:pt>
                 <c:pt idx="5">
-                  <c:v>101.71</c:v>
+                  <c:v>103.2</c:v>
                 </c:pt>
                 <c:pt idx="6">
-                  <c:v>101.71</c:v>
+                  <c:v>103.73</c:v>
                 </c:pt>
                 <c:pt idx="7">
-                  <c:v>101.96</c:v>
+                  <c:v>104.19</c:v>
                 </c:pt>
                 <c:pt idx="8">
-                  <c:v>102.23</c:v>
+                  <c:v>104.68</c:v>
                 </c:pt>
                 <c:pt idx="9">
-                  <c:v>102.5</c:v>
+                  <c:v>105.11</c:v>
+                </c:pt>
+                <c:pt idx="10">
+                  <c:v>105.5</c:v>
+                </c:pt>
+                <c:pt idx="11">
+                  <c:v>105.88</c:v>
+                </c:pt>
+                <c:pt idx="12">
+                  <c:v>106.27</c:v>
+                </c:pt>
+                <c:pt idx="13">
+                  <c:v>106.62</c:v>
+                </c:pt>
+                <c:pt idx="14">
+                  <c:v>106.99</c:v>
+                </c:pt>
+                <c:pt idx="15">
+                  <c:v>107.33</c:v>
+                </c:pt>
+                <c:pt idx="16">
+                  <c:v>107.68</c:v>
+                </c:pt>
+                <c:pt idx="17">
+                  <c:v>108</c:v>
+                </c:pt>
+                <c:pt idx="18">
+                  <c:v>108.3</c:v>
+                </c:pt>
+                <c:pt idx="19">
+                  <c:v>108.64</c:v>
+                </c:pt>
+                <c:pt idx="20">
+                  <c:v>108.96</c:v>
+                </c:pt>
+                <c:pt idx="21">
+                  <c:v>109.29</c:v>
+                </c:pt>
+                <c:pt idx="22">
+                  <c:v>109.62</c:v>
+                </c:pt>
+                <c:pt idx="23">
+                  <c:v>109.95</c:v>
+                </c:pt>
+                <c:pt idx="24">
+                  <c:v>110.28</c:v>
+                </c:pt>
+                <c:pt idx="25">
+                  <c:v>110.58</c:v>
+                </c:pt>
+                <c:pt idx="26">
+                  <c:v>110.9</c:v>
+                </c:pt>
+                <c:pt idx="27">
+                  <c:v>111.21</c:v>
+                </c:pt>
+                <c:pt idx="28">
+                  <c:v>111.52</c:v>
+                </c:pt>
+                <c:pt idx="29">
+                  <c:v>111.83</c:v>
+                </c:pt>
+                <c:pt idx="30">
+                  <c:v>112.1</c:v>
+                </c:pt>
+                <c:pt idx="31">
+                  <c:v>112.4</c:v>
+                </c:pt>
+                <c:pt idx="32">
+                  <c:v>112.69</c:v>
                 </c:pt>
               </c:numCache>
             </c:numRef>
@@ -637,7 +1051,7 @@
         <c:auto val="1"/>
         <c:lblAlgn val="ctr"/>
         <c:noMultiLvlLbl val="1"/>
-        <c:tickLblSkip val="1"/>
+        <c:tickLblSkip val="3"/>
       </c:catAx>
       <c:valAx>
         <c:axId val="2094734552"/>
@@ -3113,7 +3527,7 @@
                 <a:ea typeface="Calibri" pitchFamily="34" charset="-122"/>
                 <a:cs typeface="Calibri" pitchFamily="34" charset="-120"/>
               </a:rPr>
-              <a:t>prueba 13 CLP</a:t>
+              <a:t>prueba CLP</a:t>
             </a:r>
             <a:endParaRPr lang="en-US" sz="800" dirty="0"/>
           </a:p>
@@ -3762,7 +4176,7 @@
                           <a:ea typeface="Calibri" pitchFamily="34" charset="-122"/>
                           <a:cs typeface="Calibri" pitchFamily="34" charset="-120"/>
                         </a:rPr>
-                        <a:t>0.37%</a:t>
+                        <a:t>0.38%</a:t>
                       </a:r>
                       <a:endParaRPr lang="en-US" sz="750" dirty="0">
                         <a:latin typeface="Calibri" charset="0"/>
@@ -3898,7 +4312,7 @@
                           <a:ea typeface="Calibri" pitchFamily="34" charset="-122"/>
                           <a:cs typeface="Calibri" pitchFamily="34" charset="-120"/>
                         </a:rPr>
-                        <a:t>2.30%</a:t>
+                        <a:t>2.33%</a:t>
                       </a:r>
                       <a:endParaRPr lang="en-US" sz="750" dirty="0">
                         <a:latin typeface="Calibri" charset="0"/>
@@ -3966,7 +4380,7 @@
                           <a:ea typeface="Calibri" pitchFamily="34" charset="-122"/>
                           <a:cs typeface="Calibri" pitchFamily="34" charset="-120"/>
                         </a:rPr>
-                        <a:t>4.82%</a:t>
+                        <a:t>6.54%</a:t>
                       </a:r>
                       <a:endParaRPr lang="en-US" sz="750" dirty="0">
                         <a:latin typeface="Calibri" charset="0"/>
@@ -4376,7 +4790,7 @@
                           <a:ea typeface="Calibri" pitchFamily="34" charset="-122"/>
                           <a:cs typeface="Calibri" pitchFamily="34" charset="-120"/>
                         </a:rPr>
-                        <a:t>3.43%</a:t>
+                        <a:t>4.95%</a:t>
                       </a:r>
                       <a:endParaRPr lang="en-US" sz="750" dirty="0">
                         <a:latin typeface="Calibri" charset="0"/>
@@ -4650,7 +5064,7 @@
                           <a:ea typeface="Calibri" pitchFamily="34" charset="-122"/>
                           <a:cs typeface="Calibri" pitchFamily="34" charset="-120"/>
                         </a:rPr>
-                        <a:t>1.69%</a:t>
+                        <a:t>1.71%</a:t>
                       </a:r>
                       <a:endParaRPr lang="en-US" sz="750" dirty="0">
                         <a:latin typeface="Calibri" charset="0"/>
@@ -4718,7 +5132,7 @@
                           <a:ea typeface="Calibri" pitchFamily="34" charset="-122"/>
                           <a:cs typeface="Calibri" pitchFamily="34" charset="-120"/>
                         </a:rPr>
-                        <a:t>3.94%</a:t>
+                        <a:t>3.93%</a:t>
                       </a:r>
                       <a:endParaRPr lang="en-US" sz="750" dirty="0">
                         <a:latin typeface="Calibri" charset="0"/>
@@ -4786,7 +5200,7 @@
                           <a:ea typeface="Calibri" pitchFamily="34" charset="-122"/>
                           <a:cs typeface="Calibri" pitchFamily="34" charset="-120"/>
                         </a:rPr>
-                        <a:t>—</a:t>
+                        <a:t>6.32%</a:t>
                       </a:r>
                       <a:endParaRPr lang="en-US" sz="750" dirty="0">
                         <a:latin typeface="Calibri" charset="0"/>
@@ -4854,7 +5268,7 @@
                           <a:ea typeface="Calibri" pitchFamily="34" charset="-122"/>
                           <a:cs typeface="Calibri" pitchFamily="34" charset="-120"/>
                         </a:rPr>
-                        <a:t>5.06%</a:t>
+                        <a:t>5.12%</a:t>
                       </a:r>
                       <a:endParaRPr lang="en-US" sz="750" dirty="0">
                         <a:latin typeface="Calibri" charset="0"/>
@@ -4996,20 +5410,20 @@
               <a:tblPr/>
               <a:tblGrid>
                 <a:gridCol w="201168"/>
-                <a:gridCol w="822960"/>
-                <a:gridCol w="246888"/>
-                <a:gridCol w="246888"/>
-                <a:gridCol w="246888"/>
-                <a:gridCol w="246888"/>
-                <a:gridCol w="246888"/>
-                <a:gridCol w="246888"/>
-                <a:gridCol w="246888"/>
-                <a:gridCol w="246888"/>
-                <a:gridCol w="246888"/>
-                <a:gridCol w="246888"/>
-                <a:gridCol w="246888"/>
-                <a:gridCol w="246888"/>
-                <a:gridCol w="283464"/>
+                <a:gridCol w="804672"/>
+                <a:gridCol w="292608"/>
+                <a:gridCol w="292608"/>
+                <a:gridCol w="292608"/>
+                <a:gridCol w="292608"/>
+                <a:gridCol w="292608"/>
+                <a:gridCol w="292608"/>
+                <a:gridCol w="292608"/>
+                <a:gridCol w="292608"/>
+                <a:gridCol w="292608"/>
+                <a:gridCol w="292608"/>
+                <a:gridCol w="292608"/>
+                <a:gridCol w="292608"/>
+                <a:gridCol w="301752"/>
               </a:tblGrid>
               <a:tr h="123444">
                 <a:tc>
@@ -6148,6 +6562,438 @@
                       <a:pPr algn="ctr" indent="0" marL="0">
                         <a:buNone/>
                       </a:pPr>
+                      <a:endParaRPr lang="en-US" sz="500" dirty="0">
+                        <a:latin typeface="Calibri" charset="0"/>
+                        <a:ea typeface="Calibri" charset="0"/>
+                        <a:cs typeface="Calibri" charset="0"/>
+                      </a:endParaRPr>
+                    </a:p>
+                  </a:txBody>
+                  <a:tcPr marL="91440" marR="91440" marT="45720" marB="45720">
+                    <a:lnL w="2540" cap="flat" cmpd="sng" algn="ctr">
+                      <a:solidFill>
+                        <a:srgbClr val="EEEEEE"/>
+                      </a:solidFill>
+                      <a:prstDash val="solid"/>
+                      <a:round/>
+                      <a:headEnd type="none" w="med" len="med"/>
+                      <a:tailEnd type="none" w="med" len="med"/>
+                    </a:lnL>
+                    <a:lnR w="2540" cap="flat" cmpd="sng" algn="ctr">
+                      <a:solidFill>
+                        <a:srgbClr val="EEEEEE"/>
+                      </a:solidFill>
+                      <a:prstDash val="solid"/>
+                      <a:round/>
+                      <a:headEnd type="none" w="med" len="med"/>
+                      <a:tailEnd type="none" w="med" len="med"/>
+                    </a:lnR>
+                    <a:lnT w="2540" cap="flat" cmpd="sng" algn="ctr">
+                      <a:solidFill>
+                        <a:srgbClr val="EEEEEE"/>
+                      </a:solidFill>
+                      <a:prstDash val="solid"/>
+                      <a:round/>
+                      <a:headEnd type="none" w="med" len="med"/>
+                      <a:tailEnd type="none" w="med" len="med"/>
+                    </a:lnT>
+                    <a:lnB w="2540" cap="flat" cmpd="sng" algn="ctr">
+                      <a:solidFill>
+                        <a:srgbClr val="EEEEEE"/>
+                      </a:solidFill>
+                      <a:prstDash val="solid"/>
+                      <a:round/>
+                      <a:headEnd type="none" w="med" len="med"/>
+                      <a:tailEnd type="none" w="med" len="med"/>
+                    </a:lnB>
+                  </a:tcPr>
+                </a:tc>
+                <a:tc>
+                  <a:txBody>
+                    <a:bodyPr/>
+                    <a:lstStyle/>
+                    <a:p>
+                      <a:pPr algn="ctr" indent="0" marL="0">
+                        <a:buNone/>
+                      </a:pPr>
+                      <a:endParaRPr lang="en-US" sz="500" dirty="0">
+                        <a:latin typeface="Calibri" charset="0"/>
+                        <a:ea typeface="Calibri" charset="0"/>
+                        <a:cs typeface="Calibri" charset="0"/>
+                      </a:endParaRPr>
+                    </a:p>
+                  </a:txBody>
+                  <a:tcPr marL="91440" marR="91440" marT="45720" marB="45720">
+                    <a:lnL w="2540" cap="flat" cmpd="sng" algn="ctr">
+                      <a:solidFill>
+                        <a:srgbClr val="EEEEEE"/>
+                      </a:solidFill>
+                      <a:prstDash val="solid"/>
+                      <a:round/>
+                      <a:headEnd type="none" w="med" len="med"/>
+                      <a:tailEnd type="none" w="med" len="med"/>
+                    </a:lnL>
+                    <a:lnR w="2540" cap="flat" cmpd="sng" algn="ctr">
+                      <a:solidFill>
+                        <a:srgbClr val="EEEEEE"/>
+                      </a:solidFill>
+                      <a:prstDash val="solid"/>
+                      <a:round/>
+                      <a:headEnd type="none" w="med" len="med"/>
+                      <a:tailEnd type="none" w="med" len="med"/>
+                    </a:lnR>
+                    <a:lnT w="2540" cap="flat" cmpd="sng" algn="ctr">
+                      <a:solidFill>
+                        <a:srgbClr val="EEEEEE"/>
+                      </a:solidFill>
+                      <a:prstDash val="solid"/>
+                      <a:round/>
+                      <a:headEnd type="none" w="med" len="med"/>
+                      <a:tailEnd type="none" w="med" len="med"/>
+                    </a:lnT>
+                    <a:lnB w="2540" cap="flat" cmpd="sng" algn="ctr">
+                      <a:solidFill>
+                        <a:srgbClr val="EEEEEE"/>
+                      </a:solidFill>
+                      <a:prstDash val="solid"/>
+                      <a:round/>
+                      <a:headEnd type="none" w="med" len="med"/>
+                      <a:tailEnd type="none" w="med" len="med"/>
+                    </a:lnB>
+                  </a:tcPr>
+                </a:tc>
+                <a:tc>
+                  <a:txBody>
+                    <a:bodyPr/>
+                    <a:lstStyle/>
+                    <a:p>
+                      <a:pPr algn="ctr" indent="0" marL="0">
+                        <a:buNone/>
+                      </a:pPr>
+                      <a:endParaRPr lang="en-US" sz="500" dirty="0">
+                        <a:latin typeface="Calibri" charset="0"/>
+                        <a:ea typeface="Calibri" charset="0"/>
+                        <a:cs typeface="Calibri" charset="0"/>
+                      </a:endParaRPr>
+                    </a:p>
+                  </a:txBody>
+                  <a:tcPr marL="91440" marR="91440" marT="45720" marB="45720">
+                    <a:lnL w="2540" cap="flat" cmpd="sng" algn="ctr">
+                      <a:solidFill>
+                        <a:srgbClr val="EEEEEE"/>
+                      </a:solidFill>
+                      <a:prstDash val="solid"/>
+                      <a:round/>
+                      <a:headEnd type="none" w="med" len="med"/>
+                      <a:tailEnd type="none" w="med" len="med"/>
+                    </a:lnL>
+                    <a:lnR w="2540" cap="flat" cmpd="sng" algn="ctr">
+                      <a:solidFill>
+                        <a:srgbClr val="EEEEEE"/>
+                      </a:solidFill>
+                      <a:prstDash val="solid"/>
+                      <a:round/>
+                      <a:headEnd type="none" w="med" len="med"/>
+                      <a:tailEnd type="none" w="med" len="med"/>
+                    </a:lnR>
+                    <a:lnT w="2540" cap="flat" cmpd="sng" algn="ctr">
+                      <a:solidFill>
+                        <a:srgbClr val="EEEEEE"/>
+                      </a:solidFill>
+                      <a:prstDash val="solid"/>
+                      <a:round/>
+                      <a:headEnd type="none" w="med" len="med"/>
+                      <a:tailEnd type="none" w="med" len="med"/>
+                    </a:lnT>
+                    <a:lnB w="2540" cap="flat" cmpd="sng" algn="ctr">
+                      <a:solidFill>
+                        <a:srgbClr val="EEEEEE"/>
+                      </a:solidFill>
+                      <a:prstDash val="solid"/>
+                      <a:round/>
+                      <a:headEnd type="none" w="med" len="med"/>
+                      <a:tailEnd type="none" w="med" len="med"/>
+                    </a:lnB>
+                  </a:tcPr>
+                </a:tc>
+                <a:tc>
+                  <a:txBody>
+                    <a:bodyPr/>
+                    <a:lstStyle/>
+                    <a:p>
+                      <a:pPr algn="ctr" indent="0" marL="0">
+                        <a:buNone/>
+                      </a:pPr>
+                      <a:endParaRPr lang="en-US" sz="500" dirty="0">
+                        <a:latin typeface="Calibri" charset="0"/>
+                        <a:ea typeface="Calibri" charset="0"/>
+                        <a:cs typeface="Calibri" charset="0"/>
+                      </a:endParaRPr>
+                    </a:p>
+                  </a:txBody>
+                  <a:tcPr marL="91440" marR="91440" marT="45720" marB="45720">
+                    <a:lnL w="2540" cap="flat" cmpd="sng" algn="ctr">
+                      <a:solidFill>
+                        <a:srgbClr val="EEEEEE"/>
+                      </a:solidFill>
+                      <a:prstDash val="solid"/>
+                      <a:round/>
+                      <a:headEnd type="none" w="med" len="med"/>
+                      <a:tailEnd type="none" w="med" len="med"/>
+                    </a:lnL>
+                    <a:lnR w="2540" cap="flat" cmpd="sng" algn="ctr">
+                      <a:solidFill>
+                        <a:srgbClr val="EEEEEE"/>
+                      </a:solidFill>
+                      <a:prstDash val="solid"/>
+                      <a:round/>
+                      <a:headEnd type="none" w="med" len="med"/>
+                      <a:tailEnd type="none" w="med" len="med"/>
+                    </a:lnR>
+                    <a:lnT w="2540" cap="flat" cmpd="sng" algn="ctr">
+                      <a:solidFill>
+                        <a:srgbClr val="EEEEEE"/>
+                      </a:solidFill>
+                      <a:prstDash val="solid"/>
+                      <a:round/>
+                      <a:headEnd type="none" w="med" len="med"/>
+                      <a:tailEnd type="none" w="med" len="med"/>
+                    </a:lnT>
+                    <a:lnB w="2540" cap="flat" cmpd="sng" algn="ctr">
+                      <a:solidFill>
+                        <a:srgbClr val="EEEEEE"/>
+                      </a:solidFill>
+                      <a:prstDash val="solid"/>
+                      <a:round/>
+                      <a:headEnd type="none" w="med" len="med"/>
+                      <a:tailEnd type="none" w="med" len="med"/>
+                    </a:lnB>
+                  </a:tcPr>
+                </a:tc>
+                <a:tc>
+                  <a:txBody>
+                    <a:bodyPr/>
+                    <a:lstStyle/>
+                    <a:p>
+                      <a:pPr algn="ctr" indent="0" marL="0">
+                        <a:buNone/>
+                      </a:pPr>
+                      <a:endParaRPr lang="en-US" sz="500" dirty="0">
+                        <a:latin typeface="Calibri" charset="0"/>
+                        <a:ea typeface="Calibri" charset="0"/>
+                        <a:cs typeface="Calibri" charset="0"/>
+                      </a:endParaRPr>
+                    </a:p>
+                  </a:txBody>
+                  <a:tcPr marL="91440" marR="91440" marT="45720" marB="45720">
+                    <a:lnL w="2540" cap="flat" cmpd="sng" algn="ctr">
+                      <a:solidFill>
+                        <a:srgbClr val="EEEEEE"/>
+                      </a:solidFill>
+                      <a:prstDash val="solid"/>
+                      <a:round/>
+                      <a:headEnd type="none" w="med" len="med"/>
+                      <a:tailEnd type="none" w="med" len="med"/>
+                    </a:lnL>
+                    <a:lnR w="2540" cap="flat" cmpd="sng" algn="ctr">
+                      <a:solidFill>
+                        <a:srgbClr val="EEEEEE"/>
+                      </a:solidFill>
+                      <a:prstDash val="solid"/>
+                      <a:round/>
+                      <a:headEnd type="none" w="med" len="med"/>
+                      <a:tailEnd type="none" w="med" len="med"/>
+                    </a:lnR>
+                    <a:lnT w="2540" cap="flat" cmpd="sng" algn="ctr">
+                      <a:solidFill>
+                        <a:srgbClr val="EEEEEE"/>
+                      </a:solidFill>
+                      <a:prstDash val="solid"/>
+                      <a:round/>
+                      <a:headEnd type="none" w="med" len="med"/>
+                      <a:tailEnd type="none" w="med" len="med"/>
+                    </a:lnT>
+                    <a:lnB w="2540" cap="flat" cmpd="sng" algn="ctr">
+                      <a:solidFill>
+                        <a:srgbClr val="EEEEEE"/>
+                      </a:solidFill>
+                      <a:prstDash val="solid"/>
+                      <a:round/>
+                      <a:headEnd type="none" w="med" len="med"/>
+                      <a:tailEnd type="none" w="med" len="med"/>
+                    </a:lnB>
+                  </a:tcPr>
+                </a:tc>
+                <a:tc>
+                  <a:txBody>
+                    <a:bodyPr/>
+                    <a:lstStyle/>
+                    <a:p>
+                      <a:pPr algn="ctr" indent="0" marL="0">
+                        <a:buNone/>
+                      </a:pPr>
+                      <a:endParaRPr lang="en-US" sz="500" dirty="0">
+                        <a:latin typeface="Calibri" charset="0"/>
+                        <a:ea typeface="Calibri" charset="0"/>
+                        <a:cs typeface="Calibri" charset="0"/>
+                      </a:endParaRPr>
+                    </a:p>
+                  </a:txBody>
+                  <a:tcPr marL="91440" marR="91440" marT="45720" marB="45720">
+                    <a:lnL w="2540" cap="flat" cmpd="sng" algn="ctr">
+                      <a:solidFill>
+                        <a:srgbClr val="EEEEEE"/>
+                      </a:solidFill>
+                      <a:prstDash val="solid"/>
+                      <a:round/>
+                      <a:headEnd type="none" w="med" len="med"/>
+                      <a:tailEnd type="none" w="med" len="med"/>
+                    </a:lnL>
+                    <a:lnR w="2540" cap="flat" cmpd="sng" algn="ctr">
+                      <a:solidFill>
+                        <a:srgbClr val="EEEEEE"/>
+                      </a:solidFill>
+                      <a:prstDash val="solid"/>
+                      <a:round/>
+                      <a:headEnd type="none" w="med" len="med"/>
+                      <a:tailEnd type="none" w="med" len="med"/>
+                    </a:lnR>
+                    <a:lnT w="2540" cap="flat" cmpd="sng" algn="ctr">
+                      <a:solidFill>
+                        <a:srgbClr val="EEEEEE"/>
+                      </a:solidFill>
+                      <a:prstDash val="solid"/>
+                      <a:round/>
+                      <a:headEnd type="none" w="med" len="med"/>
+                      <a:tailEnd type="none" w="med" len="med"/>
+                    </a:lnT>
+                    <a:lnB w="2540" cap="flat" cmpd="sng" algn="ctr">
+                      <a:solidFill>
+                        <a:srgbClr val="EEEEEE"/>
+                      </a:solidFill>
+                      <a:prstDash val="solid"/>
+                      <a:round/>
+                      <a:headEnd type="none" w="med" len="med"/>
+                      <a:tailEnd type="none" w="med" len="med"/>
+                    </a:lnB>
+                  </a:tcPr>
+                </a:tc>
+                <a:tc>
+                  <a:txBody>
+                    <a:bodyPr/>
+                    <a:lstStyle/>
+                    <a:p>
+                      <a:pPr algn="ctr" indent="0" marL="0">
+                        <a:buNone/>
+                      </a:pPr>
+                      <a:endParaRPr lang="en-US" sz="500" dirty="0">
+                        <a:latin typeface="Calibri" charset="0"/>
+                        <a:ea typeface="Calibri" charset="0"/>
+                        <a:cs typeface="Calibri" charset="0"/>
+                      </a:endParaRPr>
+                    </a:p>
+                  </a:txBody>
+                  <a:tcPr marL="91440" marR="91440" marT="45720" marB="45720">
+                    <a:lnL w="2540" cap="flat" cmpd="sng" algn="ctr">
+                      <a:solidFill>
+                        <a:srgbClr val="EEEEEE"/>
+                      </a:solidFill>
+                      <a:prstDash val="solid"/>
+                      <a:round/>
+                      <a:headEnd type="none" w="med" len="med"/>
+                      <a:tailEnd type="none" w="med" len="med"/>
+                    </a:lnL>
+                    <a:lnR w="2540" cap="flat" cmpd="sng" algn="ctr">
+                      <a:solidFill>
+                        <a:srgbClr val="EEEEEE"/>
+                      </a:solidFill>
+                      <a:prstDash val="solid"/>
+                      <a:round/>
+                      <a:headEnd type="none" w="med" len="med"/>
+                      <a:tailEnd type="none" w="med" len="med"/>
+                    </a:lnR>
+                    <a:lnT w="2540" cap="flat" cmpd="sng" algn="ctr">
+                      <a:solidFill>
+                        <a:srgbClr val="EEEEEE"/>
+                      </a:solidFill>
+                      <a:prstDash val="solid"/>
+                      <a:round/>
+                      <a:headEnd type="none" w="med" len="med"/>
+                      <a:tailEnd type="none" w="med" len="med"/>
+                    </a:lnT>
+                    <a:lnB w="2540" cap="flat" cmpd="sng" algn="ctr">
+                      <a:solidFill>
+                        <a:srgbClr val="EEEEEE"/>
+                      </a:solidFill>
+                      <a:prstDash val="solid"/>
+                      <a:round/>
+                      <a:headEnd type="none" w="med" len="med"/>
+                      <a:tailEnd type="none" w="med" len="med"/>
+                    </a:lnB>
+                  </a:tcPr>
+                </a:tc>
+                <a:tc>
+                  <a:txBody>
+                    <a:bodyPr/>
+                    <a:lstStyle/>
+                    <a:p>
+                      <a:pPr algn="ctr" indent="0" marL="0">
+                        <a:buNone/>
+                      </a:pPr>
+                      <a:endParaRPr lang="en-US" sz="500" dirty="0">
+                        <a:latin typeface="Calibri" charset="0"/>
+                        <a:ea typeface="Calibri" charset="0"/>
+                        <a:cs typeface="Calibri" charset="0"/>
+                      </a:endParaRPr>
+                    </a:p>
+                  </a:txBody>
+                  <a:tcPr marL="91440" marR="91440" marT="45720" marB="45720">
+                    <a:lnL w="2540" cap="flat" cmpd="sng" algn="ctr">
+                      <a:solidFill>
+                        <a:srgbClr val="EEEEEE"/>
+                      </a:solidFill>
+                      <a:prstDash val="solid"/>
+                      <a:round/>
+                      <a:headEnd type="none" w="med" len="med"/>
+                      <a:tailEnd type="none" w="med" len="med"/>
+                    </a:lnL>
+                    <a:lnR w="2540" cap="flat" cmpd="sng" algn="ctr">
+                      <a:solidFill>
+                        <a:srgbClr val="EEEEEE"/>
+                      </a:solidFill>
+                      <a:prstDash val="solid"/>
+                      <a:round/>
+                      <a:headEnd type="none" w="med" len="med"/>
+                      <a:tailEnd type="none" w="med" len="med"/>
+                    </a:lnR>
+                    <a:lnT w="2540" cap="flat" cmpd="sng" algn="ctr">
+                      <a:solidFill>
+                        <a:srgbClr val="EEEEEE"/>
+                      </a:solidFill>
+                      <a:prstDash val="solid"/>
+                      <a:round/>
+                      <a:headEnd type="none" w="med" len="med"/>
+                      <a:tailEnd type="none" w="med" len="med"/>
+                    </a:lnT>
+                    <a:lnB w="2540" cap="flat" cmpd="sng" algn="ctr">
+                      <a:solidFill>
+                        <a:srgbClr val="EEEEEE"/>
+                      </a:solidFill>
+                      <a:prstDash val="solid"/>
+                      <a:round/>
+                      <a:headEnd type="none" w="med" len="med"/>
+                      <a:tailEnd type="none" w="med" len="med"/>
+                    </a:lnB>
+                  </a:tcPr>
+                </a:tc>
+                <a:tc>
+                  <a:txBody>
+                    <a:bodyPr/>
+                    <a:lstStyle/>
+                    <a:p>
+                      <a:pPr algn="ctr" indent="0" marL="0">
+                        <a:buNone/>
+                      </a:pPr>
                       <a:r>
                         <a:rPr lang="en-US" sz="500" dirty="0">
                           <a:solidFill>
@@ -6157,397 +7003,7 @@
                           <a:ea typeface="Calibri" pitchFamily="34" charset="-122"/>
                           <a:cs typeface="Calibri" pitchFamily="34" charset="-120"/>
                         </a:rPr>
-                        <a:t>0.94%</a:t>
-                      </a:r>
-                      <a:endParaRPr lang="en-US" sz="500" dirty="0">
-                        <a:latin typeface="Calibri" charset="0"/>
-                        <a:ea typeface="Calibri" charset="0"/>
-                        <a:cs typeface="Calibri" charset="0"/>
-                      </a:endParaRPr>
-                    </a:p>
-                  </a:txBody>
-                  <a:tcPr marL="91440" marR="91440" marT="45720" marB="45720">
-                    <a:lnL w="2540" cap="flat" cmpd="sng" algn="ctr">
-                      <a:solidFill>
-                        <a:srgbClr val="EEEEEE"/>
-                      </a:solidFill>
-                      <a:prstDash val="solid"/>
-                      <a:round/>
-                      <a:headEnd type="none" w="med" len="med"/>
-                      <a:tailEnd type="none" w="med" len="med"/>
-                    </a:lnL>
-                    <a:lnR w="2540" cap="flat" cmpd="sng" algn="ctr">
-                      <a:solidFill>
-                        <a:srgbClr val="EEEEEE"/>
-                      </a:solidFill>
-                      <a:prstDash val="solid"/>
-                      <a:round/>
-                      <a:headEnd type="none" w="med" len="med"/>
-                      <a:tailEnd type="none" w="med" len="med"/>
-                    </a:lnR>
-                    <a:lnT w="2540" cap="flat" cmpd="sng" algn="ctr">
-                      <a:solidFill>
-                        <a:srgbClr val="EEEEEE"/>
-                      </a:solidFill>
-                      <a:prstDash val="solid"/>
-                      <a:round/>
-                      <a:headEnd type="none" w="med" len="med"/>
-                      <a:tailEnd type="none" w="med" len="med"/>
-                    </a:lnT>
-                    <a:lnB w="2540" cap="flat" cmpd="sng" algn="ctr">
-                      <a:solidFill>
-                        <a:srgbClr val="EEEEEE"/>
-                      </a:solidFill>
-                      <a:prstDash val="solid"/>
-                      <a:round/>
-                      <a:headEnd type="none" w="med" len="med"/>
-                      <a:tailEnd type="none" w="med" len="med"/>
-                    </a:lnB>
-                  </a:tcPr>
-                </a:tc>
-                <a:tc>
-                  <a:txBody>
-                    <a:bodyPr/>
-                    <a:lstStyle/>
-                    <a:p>
-                      <a:pPr algn="ctr" indent="0" marL="0">
-                        <a:buNone/>
-                      </a:pPr>
-                      <a:r>
-                        <a:rPr lang="en-US" sz="500" dirty="0">
-                          <a:solidFill>
-                            <a:srgbClr val="777777"/>
-                          </a:solidFill>
-                          <a:latin typeface="Calibri" pitchFamily="34" charset="0"/>
-                          <a:ea typeface="Calibri" pitchFamily="34" charset="-122"/>
-                          <a:cs typeface="Calibri" pitchFamily="34" charset="-120"/>
-                        </a:rPr>
-                        <a:t>0.94%</a:t>
-                      </a:r>
-                      <a:endParaRPr lang="en-US" sz="500" dirty="0">
-                        <a:latin typeface="Calibri" charset="0"/>
-                        <a:ea typeface="Calibri" charset="0"/>
-                        <a:cs typeface="Calibri" charset="0"/>
-                      </a:endParaRPr>
-                    </a:p>
-                  </a:txBody>
-                  <a:tcPr marL="91440" marR="91440" marT="45720" marB="45720">
-                    <a:lnL w="2540" cap="flat" cmpd="sng" algn="ctr">
-                      <a:solidFill>
-                        <a:srgbClr val="EEEEEE"/>
-                      </a:solidFill>
-                      <a:prstDash val="solid"/>
-                      <a:round/>
-                      <a:headEnd type="none" w="med" len="med"/>
-                      <a:tailEnd type="none" w="med" len="med"/>
-                    </a:lnL>
-                    <a:lnR w="2540" cap="flat" cmpd="sng" algn="ctr">
-                      <a:solidFill>
-                        <a:srgbClr val="EEEEEE"/>
-                      </a:solidFill>
-                      <a:prstDash val="solid"/>
-                      <a:round/>
-                      <a:headEnd type="none" w="med" len="med"/>
-                      <a:tailEnd type="none" w="med" len="med"/>
-                    </a:lnR>
-                    <a:lnT w="2540" cap="flat" cmpd="sng" algn="ctr">
-                      <a:solidFill>
-                        <a:srgbClr val="EEEEEE"/>
-                      </a:solidFill>
-                      <a:prstDash val="solid"/>
-                      <a:round/>
-                      <a:headEnd type="none" w="med" len="med"/>
-                      <a:tailEnd type="none" w="med" len="med"/>
-                    </a:lnT>
-                    <a:lnB w="2540" cap="flat" cmpd="sng" algn="ctr">
-                      <a:solidFill>
-                        <a:srgbClr val="EEEEEE"/>
-                      </a:solidFill>
-                      <a:prstDash val="solid"/>
-                      <a:round/>
-                      <a:headEnd type="none" w="med" len="med"/>
-                      <a:tailEnd type="none" w="med" len="med"/>
-                    </a:lnB>
-                  </a:tcPr>
-                </a:tc>
-                <a:tc>
-                  <a:txBody>
-                    <a:bodyPr/>
-                    <a:lstStyle/>
-                    <a:p>
-                      <a:pPr algn="ctr" indent="0" marL="0">
-                        <a:buNone/>
-                      </a:pPr>
-                      <a:r>
-                        <a:rPr lang="en-US" sz="500" dirty="0">
-                          <a:solidFill>
-                            <a:srgbClr val="777777"/>
-                          </a:solidFill>
-                          <a:latin typeface="Calibri" pitchFamily="34" charset="0"/>
-                          <a:ea typeface="Calibri" pitchFamily="34" charset="-122"/>
-                          <a:cs typeface="Calibri" pitchFamily="34" charset="-120"/>
-                        </a:rPr>
-                        <a:t>0.94%</a:t>
-                      </a:r>
-                      <a:endParaRPr lang="en-US" sz="500" dirty="0">
-                        <a:latin typeface="Calibri" charset="0"/>
-                        <a:ea typeface="Calibri" charset="0"/>
-                        <a:cs typeface="Calibri" charset="0"/>
-                      </a:endParaRPr>
-                    </a:p>
-                  </a:txBody>
-                  <a:tcPr marL="91440" marR="91440" marT="45720" marB="45720">
-                    <a:lnL w="2540" cap="flat" cmpd="sng" algn="ctr">
-                      <a:solidFill>
-                        <a:srgbClr val="EEEEEE"/>
-                      </a:solidFill>
-                      <a:prstDash val="solid"/>
-                      <a:round/>
-                      <a:headEnd type="none" w="med" len="med"/>
-                      <a:tailEnd type="none" w="med" len="med"/>
-                    </a:lnL>
-                    <a:lnR w="2540" cap="flat" cmpd="sng" algn="ctr">
-                      <a:solidFill>
-                        <a:srgbClr val="EEEEEE"/>
-                      </a:solidFill>
-                      <a:prstDash val="solid"/>
-                      <a:round/>
-                      <a:headEnd type="none" w="med" len="med"/>
-                      <a:tailEnd type="none" w="med" len="med"/>
-                    </a:lnR>
-                    <a:lnT w="2540" cap="flat" cmpd="sng" algn="ctr">
-                      <a:solidFill>
-                        <a:srgbClr val="EEEEEE"/>
-                      </a:solidFill>
-                      <a:prstDash val="solid"/>
-                      <a:round/>
-                      <a:headEnd type="none" w="med" len="med"/>
-                      <a:tailEnd type="none" w="med" len="med"/>
-                    </a:lnT>
-                    <a:lnB w="2540" cap="flat" cmpd="sng" algn="ctr">
-                      <a:solidFill>
-                        <a:srgbClr val="EEEEEE"/>
-                      </a:solidFill>
-                      <a:prstDash val="solid"/>
-                      <a:round/>
-                      <a:headEnd type="none" w="med" len="med"/>
-                      <a:tailEnd type="none" w="med" len="med"/>
-                    </a:lnB>
-                  </a:tcPr>
-                </a:tc>
-                <a:tc>
-                  <a:txBody>
-                    <a:bodyPr/>
-                    <a:lstStyle/>
-                    <a:p>
-                      <a:pPr algn="ctr" indent="0" marL="0">
-                        <a:buNone/>
-                      </a:pPr>
-                      <a:r>
-                        <a:rPr lang="en-US" sz="500" dirty="0">
-                          <a:solidFill>
-                            <a:srgbClr val="777777"/>
-                          </a:solidFill>
-                          <a:latin typeface="Calibri" pitchFamily="34" charset="0"/>
-                          <a:ea typeface="Calibri" pitchFamily="34" charset="-122"/>
-                          <a:cs typeface="Calibri" pitchFamily="34" charset="-120"/>
-                        </a:rPr>
-                        <a:t>0.94%</a:t>
-                      </a:r>
-                      <a:endParaRPr lang="en-US" sz="500" dirty="0">
-                        <a:latin typeface="Calibri" charset="0"/>
-                        <a:ea typeface="Calibri" charset="0"/>
-                        <a:cs typeface="Calibri" charset="0"/>
-                      </a:endParaRPr>
-                    </a:p>
-                  </a:txBody>
-                  <a:tcPr marL="91440" marR="91440" marT="45720" marB="45720">
-                    <a:lnL w="2540" cap="flat" cmpd="sng" algn="ctr">
-                      <a:solidFill>
-                        <a:srgbClr val="EEEEEE"/>
-                      </a:solidFill>
-                      <a:prstDash val="solid"/>
-                      <a:round/>
-                      <a:headEnd type="none" w="med" len="med"/>
-                      <a:tailEnd type="none" w="med" len="med"/>
-                    </a:lnL>
-                    <a:lnR w="2540" cap="flat" cmpd="sng" algn="ctr">
-                      <a:solidFill>
-                        <a:srgbClr val="EEEEEE"/>
-                      </a:solidFill>
-                      <a:prstDash val="solid"/>
-                      <a:round/>
-                      <a:headEnd type="none" w="med" len="med"/>
-                      <a:tailEnd type="none" w="med" len="med"/>
-                    </a:lnR>
-                    <a:lnT w="2540" cap="flat" cmpd="sng" algn="ctr">
-                      <a:solidFill>
-                        <a:srgbClr val="EEEEEE"/>
-                      </a:solidFill>
-                      <a:prstDash val="solid"/>
-                      <a:round/>
-                      <a:headEnd type="none" w="med" len="med"/>
-                      <a:tailEnd type="none" w="med" len="med"/>
-                    </a:lnT>
-                    <a:lnB w="2540" cap="flat" cmpd="sng" algn="ctr">
-                      <a:solidFill>
-                        <a:srgbClr val="EEEEEE"/>
-                      </a:solidFill>
-                      <a:prstDash val="solid"/>
-                      <a:round/>
-                      <a:headEnd type="none" w="med" len="med"/>
-                      <a:tailEnd type="none" w="med" len="med"/>
-                    </a:lnB>
-                  </a:tcPr>
-                </a:tc>
-                <a:tc>
-                  <a:txBody>
-                    <a:bodyPr/>
-                    <a:lstStyle/>
-                    <a:p>
-                      <a:pPr algn="ctr" indent="0" marL="0">
-                        <a:buNone/>
-                      </a:pPr>
-                      <a:r>
-                        <a:rPr lang="en-US" sz="500" dirty="0">
-                          <a:solidFill>
-                            <a:srgbClr val="777777"/>
-                          </a:solidFill>
-                          <a:latin typeface="Calibri" pitchFamily="34" charset="0"/>
-                          <a:ea typeface="Calibri" pitchFamily="34" charset="-122"/>
-                          <a:cs typeface="Calibri" pitchFamily="34" charset="-120"/>
-                        </a:rPr>
-                        <a:t>0.94%</a:t>
-                      </a:r>
-                      <a:endParaRPr lang="en-US" sz="500" dirty="0">
-                        <a:latin typeface="Calibri" charset="0"/>
-                        <a:ea typeface="Calibri" charset="0"/>
-                        <a:cs typeface="Calibri" charset="0"/>
-                      </a:endParaRPr>
-                    </a:p>
-                  </a:txBody>
-                  <a:tcPr marL="91440" marR="91440" marT="45720" marB="45720">
-                    <a:lnL w="2540" cap="flat" cmpd="sng" algn="ctr">
-                      <a:solidFill>
-                        <a:srgbClr val="EEEEEE"/>
-                      </a:solidFill>
-                      <a:prstDash val="solid"/>
-                      <a:round/>
-                      <a:headEnd type="none" w="med" len="med"/>
-                      <a:tailEnd type="none" w="med" len="med"/>
-                    </a:lnL>
-                    <a:lnR w="2540" cap="flat" cmpd="sng" algn="ctr">
-                      <a:solidFill>
-                        <a:srgbClr val="EEEEEE"/>
-                      </a:solidFill>
-                      <a:prstDash val="solid"/>
-                      <a:round/>
-                      <a:headEnd type="none" w="med" len="med"/>
-                      <a:tailEnd type="none" w="med" len="med"/>
-                    </a:lnR>
-                    <a:lnT w="2540" cap="flat" cmpd="sng" algn="ctr">
-                      <a:solidFill>
-                        <a:srgbClr val="EEEEEE"/>
-                      </a:solidFill>
-                      <a:prstDash val="solid"/>
-                      <a:round/>
-                      <a:headEnd type="none" w="med" len="med"/>
-                      <a:tailEnd type="none" w="med" len="med"/>
-                    </a:lnT>
-                    <a:lnB w="2540" cap="flat" cmpd="sng" algn="ctr">
-                      <a:solidFill>
-                        <a:srgbClr val="EEEEEE"/>
-                      </a:solidFill>
-                      <a:prstDash val="solid"/>
-                      <a:round/>
-                      <a:headEnd type="none" w="med" len="med"/>
-                      <a:tailEnd type="none" w="med" len="med"/>
-                    </a:lnB>
-                  </a:tcPr>
-                </a:tc>
-                <a:tc>
-                  <a:txBody>
-                    <a:bodyPr/>
-                    <a:lstStyle/>
-                    <a:p>
-                      <a:pPr algn="ctr" indent="0" marL="0">
-                        <a:buNone/>
-                      </a:pPr>
-                      <a:r>
-                        <a:rPr lang="en-US" sz="500" dirty="0">
-                          <a:solidFill>
-                            <a:srgbClr val="777777"/>
-                          </a:solidFill>
-                          <a:latin typeface="Calibri" pitchFamily="34" charset="0"/>
-                          <a:ea typeface="Calibri" pitchFamily="34" charset="-122"/>
-                          <a:cs typeface="Calibri" pitchFamily="34" charset="-120"/>
-                        </a:rPr>
-                        <a:t>0.94%</a:t>
-                      </a:r>
-                      <a:endParaRPr lang="en-US" sz="500" dirty="0">
-                        <a:latin typeface="Calibri" charset="0"/>
-                        <a:ea typeface="Calibri" charset="0"/>
-                        <a:cs typeface="Calibri" charset="0"/>
-                      </a:endParaRPr>
-                    </a:p>
-                  </a:txBody>
-                  <a:tcPr marL="91440" marR="91440" marT="45720" marB="45720">
-                    <a:lnL w="2540" cap="flat" cmpd="sng" algn="ctr">
-                      <a:solidFill>
-                        <a:srgbClr val="EEEEEE"/>
-                      </a:solidFill>
-                      <a:prstDash val="solid"/>
-                      <a:round/>
-                      <a:headEnd type="none" w="med" len="med"/>
-                      <a:tailEnd type="none" w="med" len="med"/>
-                    </a:lnL>
-                    <a:lnR w="2540" cap="flat" cmpd="sng" algn="ctr">
-                      <a:solidFill>
-                        <a:srgbClr val="EEEEEE"/>
-                      </a:solidFill>
-                      <a:prstDash val="solid"/>
-                      <a:round/>
-                      <a:headEnd type="none" w="med" len="med"/>
-                      <a:tailEnd type="none" w="med" len="med"/>
-                    </a:lnR>
-                    <a:lnT w="2540" cap="flat" cmpd="sng" algn="ctr">
-                      <a:solidFill>
-                        <a:srgbClr val="EEEEEE"/>
-                      </a:solidFill>
-                      <a:prstDash val="solid"/>
-                      <a:round/>
-                      <a:headEnd type="none" w="med" len="med"/>
-                      <a:tailEnd type="none" w="med" len="med"/>
-                    </a:lnT>
-                    <a:lnB w="2540" cap="flat" cmpd="sng" algn="ctr">
-                      <a:solidFill>
-                        <a:srgbClr val="EEEEEE"/>
-                      </a:solidFill>
-                      <a:prstDash val="solid"/>
-                      <a:round/>
-                      <a:headEnd type="none" w="med" len="med"/>
-                      <a:tailEnd type="none" w="med" len="med"/>
-                    </a:lnB>
-                  </a:tcPr>
-                </a:tc>
-                <a:tc>
-                  <a:txBody>
-                    <a:bodyPr/>
-                    <a:lstStyle/>
-                    <a:p>
-                      <a:pPr algn="ctr" indent="0" marL="0">
-                        <a:buNone/>
-                      </a:pPr>
-                      <a:r>
-                        <a:rPr lang="en-US" sz="500" dirty="0">
-                          <a:solidFill>
-                            <a:srgbClr val="777777"/>
-                          </a:solidFill>
-                          <a:latin typeface="Calibri" pitchFamily="34" charset="0"/>
-                          <a:ea typeface="Calibri" pitchFamily="34" charset="-122"/>
-                          <a:cs typeface="Calibri" pitchFamily="34" charset="-120"/>
-                        </a:rPr>
-                        <a:t>0.93%</a:t>
+                        <a:t>0.78%</a:t>
                       </a:r>
                       <a:endParaRPr lang="en-US" sz="500" dirty="0">
                         <a:latin typeface="Calibri" charset="0"/>
@@ -6677,7 +7133,7 @@
                           <a:ea typeface="Calibri" pitchFamily="34" charset="-122"/>
                           <a:cs typeface="Calibri" pitchFamily="34" charset="-120"/>
                         </a:rPr>
-                        <a:t>0.80%</a:t>
+                        <a:t>0.75%</a:t>
                       </a:r>
                       <a:endParaRPr lang="en-US" sz="500" dirty="0">
                         <a:latin typeface="Calibri" charset="0"/>
@@ -6742,137 +7198,7 @@
                           <a:ea typeface="Calibri" pitchFamily="34" charset="-122"/>
                           <a:cs typeface="Calibri" pitchFamily="34" charset="-120"/>
                         </a:rPr>
-                        <a:t>0.79%</a:t>
-                      </a:r>
-                      <a:endParaRPr lang="en-US" sz="500" dirty="0">
-                        <a:latin typeface="Calibri" charset="0"/>
-                        <a:ea typeface="Calibri" charset="0"/>
-                        <a:cs typeface="Calibri" charset="0"/>
-                      </a:endParaRPr>
-                    </a:p>
-                  </a:txBody>
-                  <a:tcPr marL="91440" marR="91440" marT="45720" marB="45720">
-                    <a:lnL w="2540" cap="flat" cmpd="sng" algn="ctr">
-                      <a:solidFill>
-                        <a:srgbClr val="EEEEEE"/>
-                      </a:solidFill>
-                      <a:prstDash val="solid"/>
-                      <a:round/>
-                      <a:headEnd type="none" w="med" len="med"/>
-                      <a:tailEnd type="none" w="med" len="med"/>
-                    </a:lnL>
-                    <a:lnR w="2540" cap="flat" cmpd="sng" algn="ctr">
-                      <a:solidFill>
-                        <a:srgbClr val="EEEEEE"/>
-                      </a:solidFill>
-                      <a:prstDash val="solid"/>
-                      <a:round/>
-                      <a:headEnd type="none" w="med" len="med"/>
-                      <a:tailEnd type="none" w="med" len="med"/>
-                    </a:lnR>
-                    <a:lnT w="2540" cap="flat" cmpd="sng" algn="ctr">
-                      <a:solidFill>
-                        <a:srgbClr val="EEEEEE"/>
-                      </a:solidFill>
-                      <a:prstDash val="solid"/>
-                      <a:round/>
-                      <a:headEnd type="none" w="med" len="med"/>
-                      <a:tailEnd type="none" w="med" len="med"/>
-                    </a:lnT>
-                    <a:lnB w="2540" cap="flat" cmpd="sng" algn="ctr">
-                      <a:solidFill>
-                        <a:srgbClr val="EEEEEE"/>
-                      </a:solidFill>
-                      <a:prstDash val="solid"/>
-                      <a:round/>
-                      <a:headEnd type="none" w="med" len="med"/>
-                      <a:tailEnd type="none" w="med" len="med"/>
-                    </a:lnB>
-                  </a:tcPr>
-                </a:tc>
-                <a:tc>
-                  <a:txBody>
-                    <a:bodyPr/>
-                    <a:lstStyle/>
-                    <a:p>
-                      <a:pPr algn="ctr" indent="0" marL="0">
-                        <a:buNone/>
-                      </a:pPr>
-                      <a:r>
-                        <a:rPr lang="en-US" sz="500" dirty="0">
-                          <a:solidFill>
-                            <a:srgbClr val="777777"/>
-                          </a:solidFill>
-                          <a:latin typeface="Calibri" pitchFamily="34" charset="0"/>
-                          <a:ea typeface="Calibri" pitchFamily="34" charset="-122"/>
-                          <a:cs typeface="Calibri" pitchFamily="34" charset="-120"/>
-                        </a:rPr>
-                        <a:t>0.75%</a:t>
-                      </a:r>
-                      <a:endParaRPr lang="en-US" sz="500" dirty="0">
-                        <a:latin typeface="Calibri" charset="0"/>
-                        <a:ea typeface="Calibri" charset="0"/>
-                        <a:cs typeface="Calibri" charset="0"/>
-                      </a:endParaRPr>
-                    </a:p>
-                  </a:txBody>
-                  <a:tcPr marL="91440" marR="91440" marT="45720" marB="45720">
-                    <a:lnL w="2540" cap="flat" cmpd="sng" algn="ctr">
-                      <a:solidFill>
-                        <a:srgbClr val="EEEEEE"/>
-                      </a:solidFill>
-                      <a:prstDash val="solid"/>
-                      <a:round/>
-                      <a:headEnd type="none" w="med" len="med"/>
-                      <a:tailEnd type="none" w="med" len="med"/>
-                    </a:lnL>
-                    <a:lnR w="2540" cap="flat" cmpd="sng" algn="ctr">
-                      <a:solidFill>
-                        <a:srgbClr val="EEEEEE"/>
-                      </a:solidFill>
-                      <a:prstDash val="solid"/>
-                      <a:round/>
-                      <a:headEnd type="none" w="med" len="med"/>
-                      <a:tailEnd type="none" w="med" len="med"/>
-                    </a:lnR>
-                    <a:lnT w="2540" cap="flat" cmpd="sng" algn="ctr">
-                      <a:solidFill>
-                        <a:srgbClr val="EEEEEE"/>
-                      </a:solidFill>
-                      <a:prstDash val="solid"/>
-                      <a:round/>
-                      <a:headEnd type="none" w="med" len="med"/>
-                      <a:tailEnd type="none" w="med" len="med"/>
-                    </a:lnT>
-                    <a:lnB w="2540" cap="flat" cmpd="sng" algn="ctr">
-                      <a:solidFill>
-                        <a:srgbClr val="EEEEEE"/>
-                      </a:solidFill>
-                      <a:prstDash val="solid"/>
-                      <a:round/>
-                      <a:headEnd type="none" w="med" len="med"/>
-                      <a:tailEnd type="none" w="med" len="med"/>
-                    </a:lnB>
-                  </a:tcPr>
-                </a:tc>
-                <a:tc>
-                  <a:txBody>
-                    <a:bodyPr/>
-                    <a:lstStyle/>
-                    <a:p>
-                      <a:pPr algn="ctr" indent="0" marL="0">
-                        <a:buNone/>
-                      </a:pPr>
-                      <a:r>
-                        <a:rPr lang="en-US" sz="500" dirty="0">
-                          <a:solidFill>
-                            <a:srgbClr val="777777"/>
-                          </a:solidFill>
-                          <a:latin typeface="Calibri" pitchFamily="34" charset="0"/>
-                          <a:ea typeface="Calibri" pitchFamily="34" charset="-122"/>
-                          <a:cs typeface="Calibri" pitchFamily="34" charset="-120"/>
-                        </a:rPr>
-                        <a:t>0.73%</a:t>
+                        <a:t>0.71%</a:t>
                       </a:r>
                       <a:endParaRPr lang="en-US" sz="500" dirty="0">
                         <a:latin typeface="Calibri" charset="0"/>
@@ -6937,7 +7263,7 @@
                           <a:ea typeface="Calibri" pitchFamily="34" charset="-122"/>
                           <a:cs typeface="Calibri" pitchFamily="34" charset="-120"/>
                         </a:rPr>
-                        <a:t>11.00%</a:t>
+                        <a:t>10.09%</a:t>
                       </a:r>
                       <a:endParaRPr lang="en-US" sz="500" dirty="0">
                         <a:latin typeface="Calibri" charset="0"/>
@@ -7114,17 +7440,6 @@
                       <a:pPr algn="ctr" indent="0" marL="0">
                         <a:buNone/>
                       </a:pPr>
-                      <a:r>
-                        <a:rPr lang="en-US" sz="500" dirty="0">
-                          <a:solidFill>
-                            <a:srgbClr val="999999"/>
-                          </a:solidFill>
-                          <a:latin typeface="Calibri" pitchFamily="34" charset="0"/>
-                          <a:ea typeface="Calibri" pitchFamily="34" charset="-122"/>
-                          <a:cs typeface="Calibri" pitchFamily="34" charset="-120"/>
-                        </a:rPr>
-                        <a:t>0.00%</a:t>
-                      </a:r>
                       <a:endParaRPr lang="en-US" sz="500" dirty="0">
                         <a:latin typeface="Calibri" charset="0"/>
                         <a:ea typeface="Calibri" charset="0"/>
@@ -7761,7 +8076,7 @@
                           <a:ea typeface="Calibri" pitchFamily="34" charset="-122"/>
                           <a:cs typeface="Calibri" pitchFamily="34" charset="-120"/>
                         </a:rPr>
-                        <a:t>7.49%</a:t>
+                        <a:t>0.61%</a:t>
                       </a:r>
                       <a:endParaRPr lang="en-US" sz="500" dirty="0">
                         <a:latin typeface="Calibri" charset="0"/>
@@ -7826,7 +8141,7 @@
                           <a:ea typeface="Calibri" pitchFamily="34" charset="-122"/>
                           <a:cs typeface="Calibri" pitchFamily="34" charset="-120"/>
                         </a:rPr>
-                        <a:t>9.61%</a:t>
+                        <a:t>8.45%</a:t>
                       </a:r>
                       <a:endParaRPr lang="en-US" sz="500" dirty="0">
                         <a:latin typeface="Calibri" charset="0"/>
@@ -7939,7 +8254,7 @@
                         <a:buNone/>
                       </a:pPr>
                       <a:r>
-                        <a:rPr lang="en-US" sz="500" dirty="0">
+                        <a:rPr lang="en-US" sz="400" dirty="0">
                           <a:solidFill>
                             <a:srgbClr val="000000"/>
                           </a:solidFill>
@@ -7949,7 +8264,7 @@
                         </a:rPr>
                         <a:t>FIP LIQUIDEZ Permanente</a:t>
                       </a:r>
-                      <a:endParaRPr lang="en-US" sz="500" dirty="0">
+                      <a:endParaRPr lang="en-US" sz="400" dirty="0">
                         <a:latin typeface="Calibri" charset="0"/>
                         <a:ea typeface="Calibri" charset="0"/>
                         <a:cs typeface="Calibri" charset="0"/>
@@ -8704,7 +9019,7 @@
                           <a:ea typeface="Calibri" pitchFamily="34" charset="-122"/>
                           <a:cs typeface="Calibri" pitchFamily="34" charset="-120"/>
                         </a:rPr>
-                        <a:t>3.03%</a:t>
+                        <a:t>9.10%</a:t>
                       </a:r>
                       <a:endParaRPr lang="en-US" sz="500" dirty="0">
                         <a:latin typeface="Calibri" charset="0"/>
@@ -8901,7 +9216,7 @@
                           <a:ea typeface="Calibri" pitchFamily="34" charset="-122"/>
                           <a:cs typeface="Calibri" pitchFamily="34" charset="-120"/>
                         </a:rPr>
-                        <a:t>0.69%</a:t>
+                        <a:t>0.74%</a:t>
                       </a:r>
                       <a:endParaRPr lang="en-US" sz="500" dirty="0">
                         <a:latin typeface="Calibri" charset="0"/>
@@ -8966,7 +9281,7 @@
                           <a:ea typeface="Calibri" pitchFamily="34" charset="-122"/>
                           <a:cs typeface="Calibri" pitchFamily="34" charset="-120"/>
                         </a:rPr>
-                        <a:t>0.60%</a:t>
+                        <a:t>0.61%</a:t>
                       </a:r>
                       <a:endParaRPr lang="en-US" sz="500" dirty="0">
                         <a:latin typeface="Calibri" charset="0"/>
@@ -9031,7 +9346,72 @@
                           <a:ea typeface="Calibri" pitchFamily="34" charset="-122"/>
                           <a:cs typeface="Calibri" pitchFamily="34" charset="-120"/>
                         </a:rPr>
-                        <a:t>0.60%</a:t>
+                        <a:t>0.56%</a:t>
+                      </a:r>
+                      <a:endParaRPr lang="en-US" sz="500" dirty="0">
+                        <a:latin typeface="Calibri" charset="0"/>
+                        <a:ea typeface="Calibri" charset="0"/>
+                        <a:cs typeface="Calibri" charset="0"/>
+                      </a:endParaRPr>
+                    </a:p>
+                  </a:txBody>
+                  <a:tcPr marL="91440" marR="91440" marT="45720" marB="45720">
+                    <a:lnL w="2540" cap="flat" cmpd="sng" algn="ctr">
+                      <a:solidFill>
+                        <a:srgbClr val="EEEEEE"/>
+                      </a:solidFill>
+                      <a:prstDash val="solid"/>
+                      <a:round/>
+                      <a:headEnd type="none" w="med" len="med"/>
+                      <a:tailEnd type="none" w="med" len="med"/>
+                    </a:lnL>
+                    <a:lnR w="2540" cap="flat" cmpd="sng" algn="ctr">
+                      <a:solidFill>
+                        <a:srgbClr val="EEEEEE"/>
+                      </a:solidFill>
+                      <a:prstDash val="solid"/>
+                      <a:round/>
+                      <a:headEnd type="none" w="med" len="med"/>
+                      <a:tailEnd type="none" w="med" len="med"/>
+                    </a:lnR>
+                    <a:lnT w="2540" cap="flat" cmpd="sng" algn="ctr">
+                      <a:solidFill>
+                        <a:srgbClr val="EEEEEE"/>
+                      </a:solidFill>
+                      <a:prstDash val="solid"/>
+                      <a:round/>
+                      <a:headEnd type="none" w="med" len="med"/>
+                      <a:tailEnd type="none" w="med" len="med"/>
+                    </a:lnT>
+                    <a:lnB w="2540" cap="flat" cmpd="sng" algn="ctr">
+                      <a:solidFill>
+                        <a:srgbClr val="EEEEEE"/>
+                      </a:solidFill>
+                      <a:prstDash val="solid"/>
+                      <a:round/>
+                      <a:headEnd type="none" w="med" len="med"/>
+                      <a:tailEnd type="none" w="med" len="med"/>
+                    </a:lnB>
+                  </a:tcPr>
+                </a:tc>
+                <a:tc>
+                  <a:txBody>
+                    <a:bodyPr/>
+                    <a:lstStyle/>
+                    <a:p>
+                      <a:pPr algn="ctr" indent="0" marL="0">
+                        <a:buNone/>
+                      </a:pPr>
+                      <a:r>
+                        <a:rPr lang="en-US" sz="500" dirty="0">
+                          <a:solidFill>
+                            <a:srgbClr val="777777"/>
+                          </a:solidFill>
+                          <a:latin typeface="Calibri" pitchFamily="34" charset="0"/>
+                          <a:ea typeface="Calibri" pitchFamily="34" charset="-122"/>
+                          <a:cs typeface="Calibri" pitchFamily="34" charset="-120"/>
+                        </a:rPr>
+                        <a:t>0.61%</a:t>
                       </a:r>
                       <a:endParaRPr lang="en-US" sz="500" dirty="0">
                         <a:latin typeface="Calibri" charset="0"/>
@@ -9161,7 +9541,7 @@
                           <a:ea typeface="Calibri" pitchFamily="34" charset="-122"/>
                           <a:cs typeface="Calibri" pitchFamily="34" charset="-120"/>
                         </a:rPr>
-                        <a:t>0.53%</a:t>
+                        <a:t>0.46%</a:t>
                       </a:r>
                       <a:endParaRPr lang="en-US" sz="500" dirty="0">
                         <a:latin typeface="Calibri" charset="0"/>
@@ -9226,7 +9606,7 @@
                           <a:ea typeface="Calibri" pitchFamily="34" charset="-122"/>
                           <a:cs typeface="Calibri" pitchFamily="34" charset="-120"/>
                         </a:rPr>
-                        <a:t>0.49%</a:t>
+                        <a:t>0.53%</a:t>
                       </a:r>
                       <a:endParaRPr lang="en-US" sz="500" dirty="0">
                         <a:latin typeface="Calibri" charset="0"/>
@@ -9421,7 +9801,2266 @@
                           <a:ea typeface="Calibri" pitchFamily="34" charset="-122"/>
                           <a:cs typeface="Calibri" pitchFamily="34" charset="-120"/>
                         </a:rPr>
-                        <a:t>0.46%</a:t>
+                        <a:t>0.45%</a:t>
+                      </a:r>
+                      <a:endParaRPr lang="en-US" sz="500" dirty="0">
+                        <a:latin typeface="Calibri" charset="0"/>
+                        <a:ea typeface="Calibri" charset="0"/>
+                        <a:cs typeface="Calibri" charset="0"/>
+                      </a:endParaRPr>
+                    </a:p>
+                  </a:txBody>
+                  <a:tcPr marL="91440" marR="91440" marT="45720" marB="45720">
+                    <a:lnL w="2540" cap="flat" cmpd="sng" algn="ctr">
+                      <a:solidFill>
+                        <a:srgbClr val="EEEEEE"/>
+                      </a:solidFill>
+                      <a:prstDash val="solid"/>
+                      <a:round/>
+                      <a:headEnd type="none" w="med" len="med"/>
+                      <a:tailEnd type="none" w="med" len="med"/>
+                    </a:lnL>
+                    <a:lnR w="2540" cap="flat" cmpd="sng" algn="ctr">
+                      <a:solidFill>
+                        <a:srgbClr val="EEEEEE"/>
+                      </a:solidFill>
+                      <a:prstDash val="solid"/>
+                      <a:round/>
+                      <a:headEnd type="none" w="med" len="med"/>
+                      <a:tailEnd type="none" w="med" len="med"/>
+                    </a:lnR>
+                    <a:lnT w="2540" cap="flat" cmpd="sng" algn="ctr">
+                      <a:solidFill>
+                        <a:srgbClr val="EEEEEE"/>
+                      </a:solidFill>
+                      <a:prstDash val="solid"/>
+                      <a:round/>
+                      <a:headEnd type="none" w="med" len="med"/>
+                      <a:tailEnd type="none" w="med" len="med"/>
+                    </a:lnT>
+                    <a:lnB w="2540" cap="flat" cmpd="sng" algn="ctr">
+                      <a:solidFill>
+                        <a:srgbClr val="EEEEEE"/>
+                      </a:solidFill>
+                      <a:prstDash val="solid"/>
+                      <a:round/>
+                      <a:headEnd type="none" w="med" len="med"/>
+                      <a:tailEnd type="none" w="med" len="med"/>
+                    </a:lnB>
+                  </a:tcPr>
+                </a:tc>
+                <a:tc>
+                  <a:txBody>
+                    <a:bodyPr/>
+                    <a:lstStyle/>
+                    <a:p>
+                      <a:pPr algn="ctr" indent="0" marL="0">
+                        <a:buNone/>
+                      </a:pPr>
+                      <a:r>
+                        <a:rPr lang="en-US" sz="500" dirty="0">
+                          <a:solidFill>
+                            <a:srgbClr val="777777"/>
+                          </a:solidFill>
+                          <a:latin typeface="Calibri" pitchFamily="34" charset="0"/>
+                          <a:ea typeface="Calibri" pitchFamily="34" charset="-122"/>
+                          <a:cs typeface="Calibri" pitchFamily="34" charset="-120"/>
+                        </a:rPr>
+                        <a:t>0.44%</a:t>
+                      </a:r>
+                      <a:endParaRPr lang="en-US" sz="500" dirty="0">
+                        <a:latin typeface="Calibri" charset="0"/>
+                        <a:ea typeface="Calibri" charset="0"/>
+                        <a:cs typeface="Calibri" charset="0"/>
+                      </a:endParaRPr>
+                    </a:p>
+                  </a:txBody>
+                  <a:tcPr marL="91440" marR="91440" marT="45720" marB="45720">
+                    <a:lnL w="2540" cap="flat" cmpd="sng" algn="ctr">
+                      <a:solidFill>
+                        <a:srgbClr val="EEEEEE"/>
+                      </a:solidFill>
+                      <a:prstDash val="solid"/>
+                      <a:round/>
+                      <a:headEnd type="none" w="med" len="med"/>
+                      <a:tailEnd type="none" w="med" len="med"/>
+                    </a:lnL>
+                    <a:lnR w="2540" cap="flat" cmpd="sng" algn="ctr">
+                      <a:solidFill>
+                        <a:srgbClr val="EEEEEE"/>
+                      </a:solidFill>
+                      <a:prstDash val="solid"/>
+                      <a:round/>
+                      <a:headEnd type="none" w="med" len="med"/>
+                      <a:tailEnd type="none" w="med" len="med"/>
+                    </a:lnR>
+                    <a:lnT w="2540" cap="flat" cmpd="sng" algn="ctr">
+                      <a:solidFill>
+                        <a:srgbClr val="EEEEEE"/>
+                      </a:solidFill>
+                      <a:prstDash val="solid"/>
+                      <a:round/>
+                      <a:headEnd type="none" w="med" len="med"/>
+                      <a:tailEnd type="none" w="med" len="med"/>
+                    </a:lnT>
+                    <a:lnB w="2540" cap="flat" cmpd="sng" algn="ctr">
+                      <a:solidFill>
+                        <a:srgbClr val="EEEEEE"/>
+                      </a:solidFill>
+                      <a:prstDash val="solid"/>
+                      <a:round/>
+                      <a:headEnd type="none" w="med" len="med"/>
+                      <a:tailEnd type="none" w="med" len="med"/>
+                    </a:lnB>
+                  </a:tcPr>
+                </a:tc>
+                <a:tc>
+                  <a:txBody>
+                    <a:bodyPr/>
+                    <a:lstStyle/>
+                    <a:p>
+                      <a:pPr algn="ctr" indent="0" marL="0">
+                        <a:buNone/>
+                      </a:pPr>
+                      <a:r>
+                        <a:rPr lang="en-US" sz="500" dirty="0">
+                          <a:solidFill>
+                            <a:srgbClr val="777777"/>
+                          </a:solidFill>
+                          <a:latin typeface="Calibri" pitchFamily="34" charset="0"/>
+                          <a:ea typeface="Calibri" pitchFamily="34" charset="-122"/>
+                          <a:cs typeface="Calibri" pitchFamily="34" charset="-120"/>
+                        </a:rPr>
+                        <a:t>0.44%</a:t>
+                      </a:r>
+                      <a:endParaRPr lang="en-US" sz="500" dirty="0">
+                        <a:latin typeface="Calibri" charset="0"/>
+                        <a:ea typeface="Calibri" charset="0"/>
+                        <a:cs typeface="Calibri" charset="0"/>
+                      </a:endParaRPr>
+                    </a:p>
+                  </a:txBody>
+                  <a:tcPr marL="91440" marR="91440" marT="45720" marB="45720">
+                    <a:lnL w="2540" cap="flat" cmpd="sng" algn="ctr">
+                      <a:solidFill>
+                        <a:srgbClr val="EEEEEE"/>
+                      </a:solidFill>
+                      <a:prstDash val="solid"/>
+                      <a:round/>
+                      <a:headEnd type="none" w="med" len="med"/>
+                      <a:tailEnd type="none" w="med" len="med"/>
+                    </a:lnL>
+                    <a:lnR w="2540" cap="flat" cmpd="sng" algn="ctr">
+                      <a:solidFill>
+                        <a:srgbClr val="EEEEEE"/>
+                      </a:solidFill>
+                      <a:prstDash val="solid"/>
+                      <a:round/>
+                      <a:headEnd type="none" w="med" len="med"/>
+                      <a:tailEnd type="none" w="med" len="med"/>
+                    </a:lnR>
+                    <a:lnT w="2540" cap="flat" cmpd="sng" algn="ctr">
+                      <a:solidFill>
+                        <a:srgbClr val="EEEEEE"/>
+                      </a:solidFill>
+                      <a:prstDash val="solid"/>
+                      <a:round/>
+                      <a:headEnd type="none" w="med" len="med"/>
+                      <a:tailEnd type="none" w="med" len="med"/>
+                    </a:lnT>
+                    <a:lnB w="2540" cap="flat" cmpd="sng" algn="ctr">
+                      <a:solidFill>
+                        <a:srgbClr val="EEEEEE"/>
+                      </a:solidFill>
+                      <a:prstDash val="solid"/>
+                      <a:round/>
+                      <a:headEnd type="none" w="med" len="med"/>
+                      <a:tailEnd type="none" w="med" len="med"/>
+                    </a:lnB>
+                  </a:tcPr>
+                </a:tc>
+                <a:tc>
+                  <a:txBody>
+                    <a:bodyPr/>
+                    <a:lstStyle/>
+                    <a:p>
+                      <a:pPr algn="ctr" indent="0" marL="0">
+                        <a:buNone/>
+                      </a:pPr>
+                      <a:r>
+                        <a:rPr lang="en-US" sz="500" b="1" dirty="0">
+                          <a:solidFill>
+                            <a:srgbClr val="777777"/>
+                          </a:solidFill>
+                          <a:latin typeface="Calibri" pitchFamily="34" charset="0"/>
+                          <a:ea typeface="Calibri" pitchFamily="34" charset="-122"/>
+                          <a:cs typeface="Calibri" pitchFamily="34" charset="-120"/>
+                        </a:rPr>
+                        <a:t>6.54%</a:t>
+                      </a:r>
+                      <a:endParaRPr lang="en-US" sz="500" dirty="0">
+                        <a:latin typeface="Calibri" charset="0"/>
+                        <a:ea typeface="Calibri" charset="0"/>
+                        <a:cs typeface="Calibri" charset="0"/>
+                      </a:endParaRPr>
+                    </a:p>
+                  </a:txBody>
+                  <a:tcPr marL="91440" marR="91440" marT="45720" marB="45720">
+                    <a:lnL w="2540" cap="flat" cmpd="sng" algn="ctr">
+                      <a:solidFill>
+                        <a:srgbClr val="EEEEEE"/>
+                      </a:solidFill>
+                      <a:prstDash val="solid"/>
+                      <a:round/>
+                      <a:headEnd type="none" w="med" len="med"/>
+                      <a:tailEnd type="none" w="med" len="med"/>
+                    </a:lnL>
+                    <a:lnR w="2540" cap="flat" cmpd="sng" algn="ctr">
+                      <a:solidFill>
+                        <a:srgbClr val="EEEEEE"/>
+                      </a:solidFill>
+                      <a:prstDash val="solid"/>
+                      <a:round/>
+                      <a:headEnd type="none" w="med" len="med"/>
+                      <a:tailEnd type="none" w="med" len="med"/>
+                    </a:lnR>
+                    <a:lnT w="2540" cap="flat" cmpd="sng" algn="ctr">
+                      <a:solidFill>
+                        <a:srgbClr val="EEEEEE"/>
+                      </a:solidFill>
+                      <a:prstDash val="solid"/>
+                      <a:round/>
+                      <a:headEnd type="none" w="med" len="med"/>
+                      <a:tailEnd type="none" w="med" len="med"/>
+                    </a:lnT>
+                    <a:lnB w="2540" cap="flat" cmpd="sng" algn="ctr">
+                      <a:solidFill>
+                        <a:srgbClr val="EEEEEE"/>
+                      </a:solidFill>
+                      <a:prstDash val="solid"/>
+                      <a:round/>
+                      <a:headEnd type="none" w="med" len="med"/>
+                      <a:tailEnd type="none" w="med" len="med"/>
+                    </a:lnB>
+                  </a:tcPr>
+                </a:tc>
+              </a:tr>
+              <a:tr h="123444">
+                <a:tc>
+                  <a:txBody>
+                    <a:bodyPr/>
+                    <a:lstStyle/>
+                    <a:p>
+                      <a:pPr algn="l" indent="0" marL="0">
+                        <a:buNone/>
+                      </a:pPr>
+                      <a:endParaRPr lang="en-US" sz="500" dirty="0">
+                        <a:latin typeface="Calibri" charset="0"/>
+                        <a:ea typeface="Calibri" charset="0"/>
+                        <a:cs typeface="Calibri" charset="0"/>
+                      </a:endParaRPr>
+                    </a:p>
+                  </a:txBody>
+                  <a:tcPr marL="91440" marR="91440" marT="45720" marB="45720">
+                    <a:lnL w="2540" cap="flat" cmpd="sng" algn="ctr">
+                      <a:solidFill>
+                        <a:srgbClr val="EEEEEE"/>
+                      </a:solidFill>
+                      <a:prstDash val="solid"/>
+                      <a:round/>
+                      <a:headEnd type="none" w="med" len="med"/>
+                      <a:tailEnd type="none" w="med" len="med"/>
+                    </a:lnL>
+                    <a:lnR w="2540" cap="flat" cmpd="sng" algn="ctr">
+                      <a:solidFill>
+                        <a:srgbClr val="EEEEEE"/>
+                      </a:solidFill>
+                      <a:prstDash val="solid"/>
+                      <a:round/>
+                      <a:headEnd type="none" w="med" len="med"/>
+                      <a:tailEnd type="none" w="med" len="med"/>
+                    </a:lnR>
+                    <a:lnT w="2540" cap="flat" cmpd="sng" algn="ctr">
+                      <a:solidFill>
+                        <a:srgbClr val="EEEEEE"/>
+                      </a:solidFill>
+                      <a:prstDash val="solid"/>
+                      <a:round/>
+                      <a:headEnd type="none" w="med" len="med"/>
+                      <a:tailEnd type="none" w="med" len="med"/>
+                    </a:lnT>
+                    <a:lnB w="2540" cap="flat" cmpd="sng" algn="ctr">
+                      <a:solidFill>
+                        <a:srgbClr val="EEEEEE"/>
+                      </a:solidFill>
+                      <a:prstDash val="solid"/>
+                      <a:round/>
+                      <a:headEnd type="none" w="med" len="med"/>
+                      <a:tailEnd type="none" w="med" len="med"/>
+                    </a:lnB>
+                  </a:tcPr>
+                </a:tc>
+                <a:tc>
+                  <a:txBody>
+                    <a:bodyPr/>
+                    <a:lstStyle/>
+                    <a:p>
+                      <a:pPr algn="l" indent="0" marL="0">
+                        <a:buNone/>
+                      </a:pPr>
+                      <a:r>
+                        <a:rPr lang="en-US" sz="500" dirty="0">
+                          <a:solidFill>
+                            <a:srgbClr val="999999"/>
+                          </a:solidFill>
+                          <a:latin typeface="Calibri" pitchFamily="34" charset="0"/>
+                          <a:ea typeface="Calibri" pitchFamily="34" charset="-122"/>
+                          <a:cs typeface="Calibri" pitchFamily="34" charset="-120"/>
+                        </a:rPr>
+                        <a:t>Competencia</a:t>
+                      </a:r>
+                      <a:endParaRPr lang="en-US" sz="500" dirty="0">
+                        <a:latin typeface="Calibri" charset="0"/>
+                        <a:ea typeface="Calibri" charset="0"/>
+                        <a:cs typeface="Calibri" charset="0"/>
+                      </a:endParaRPr>
+                    </a:p>
+                  </a:txBody>
+                  <a:tcPr marL="91440" marR="91440" marT="45720" marB="45720">
+                    <a:lnL w="2540" cap="flat" cmpd="sng" algn="ctr">
+                      <a:solidFill>
+                        <a:srgbClr val="EEEEEE"/>
+                      </a:solidFill>
+                      <a:prstDash val="solid"/>
+                      <a:round/>
+                      <a:headEnd type="none" w="med" len="med"/>
+                      <a:tailEnd type="none" w="med" len="med"/>
+                    </a:lnL>
+                    <a:lnR w="2540" cap="flat" cmpd="sng" algn="ctr">
+                      <a:solidFill>
+                        <a:srgbClr val="EEEEEE"/>
+                      </a:solidFill>
+                      <a:prstDash val="solid"/>
+                      <a:round/>
+                      <a:headEnd type="none" w="med" len="med"/>
+                      <a:tailEnd type="none" w="med" len="med"/>
+                    </a:lnR>
+                    <a:lnT w="2540" cap="flat" cmpd="sng" algn="ctr">
+                      <a:solidFill>
+                        <a:srgbClr val="EEEEEE"/>
+                      </a:solidFill>
+                      <a:prstDash val="solid"/>
+                      <a:round/>
+                      <a:headEnd type="none" w="med" len="med"/>
+                      <a:tailEnd type="none" w="med" len="med"/>
+                    </a:lnT>
+                    <a:lnB w="2540" cap="flat" cmpd="sng" algn="ctr">
+                      <a:solidFill>
+                        <a:srgbClr val="EEEEEE"/>
+                      </a:solidFill>
+                      <a:prstDash val="solid"/>
+                      <a:round/>
+                      <a:headEnd type="none" w="med" len="med"/>
+                      <a:tailEnd type="none" w="med" len="med"/>
+                    </a:lnB>
+                  </a:tcPr>
+                </a:tc>
+                <a:tc>
+                  <a:txBody>
+                    <a:bodyPr/>
+                    <a:lstStyle/>
+                    <a:p>
+                      <a:pPr algn="ctr" indent="0" marL="0">
+                        <a:buNone/>
+                      </a:pPr>
+                      <a:r>
+                        <a:rPr lang="en-US" sz="500" dirty="0">
+                          <a:solidFill>
+                            <a:srgbClr val="999999"/>
+                          </a:solidFill>
+                          <a:latin typeface="Calibri" pitchFamily="34" charset="0"/>
+                          <a:ea typeface="Calibri" pitchFamily="34" charset="-122"/>
+                          <a:cs typeface="Calibri" pitchFamily="34" charset="-120"/>
+                        </a:rPr>
+                        <a:t>0.59%</a:t>
+                      </a:r>
+                      <a:endParaRPr lang="en-US" sz="500" dirty="0">
+                        <a:latin typeface="Calibri" charset="0"/>
+                        <a:ea typeface="Calibri" charset="0"/>
+                        <a:cs typeface="Calibri" charset="0"/>
+                      </a:endParaRPr>
+                    </a:p>
+                  </a:txBody>
+                  <a:tcPr marL="91440" marR="91440" marT="45720" marB="45720">
+                    <a:lnL w="2540" cap="flat" cmpd="sng" algn="ctr">
+                      <a:solidFill>
+                        <a:srgbClr val="EEEEEE"/>
+                      </a:solidFill>
+                      <a:prstDash val="solid"/>
+                      <a:round/>
+                      <a:headEnd type="none" w="med" len="med"/>
+                      <a:tailEnd type="none" w="med" len="med"/>
+                    </a:lnL>
+                    <a:lnR w="2540" cap="flat" cmpd="sng" algn="ctr">
+                      <a:solidFill>
+                        <a:srgbClr val="EEEEEE"/>
+                      </a:solidFill>
+                      <a:prstDash val="solid"/>
+                      <a:round/>
+                      <a:headEnd type="none" w="med" len="med"/>
+                      <a:tailEnd type="none" w="med" len="med"/>
+                    </a:lnR>
+                    <a:lnT w="2540" cap="flat" cmpd="sng" algn="ctr">
+                      <a:solidFill>
+                        <a:srgbClr val="EEEEEE"/>
+                      </a:solidFill>
+                      <a:prstDash val="solid"/>
+                      <a:round/>
+                      <a:headEnd type="none" w="med" len="med"/>
+                      <a:tailEnd type="none" w="med" len="med"/>
+                    </a:lnT>
+                    <a:lnB w="2540" cap="flat" cmpd="sng" algn="ctr">
+                      <a:solidFill>
+                        <a:srgbClr val="EEEEEE"/>
+                      </a:solidFill>
+                      <a:prstDash val="solid"/>
+                      <a:round/>
+                      <a:headEnd type="none" w="med" len="med"/>
+                      <a:tailEnd type="none" w="med" len="med"/>
+                    </a:lnB>
+                  </a:tcPr>
+                </a:tc>
+                <a:tc>
+                  <a:txBody>
+                    <a:bodyPr/>
+                    <a:lstStyle/>
+                    <a:p>
+                      <a:pPr algn="ctr" indent="0" marL="0">
+                        <a:buNone/>
+                      </a:pPr>
+                      <a:r>
+                        <a:rPr lang="en-US" sz="500" dirty="0">
+                          <a:solidFill>
+                            <a:srgbClr val="999999"/>
+                          </a:solidFill>
+                          <a:latin typeface="Calibri" pitchFamily="34" charset="0"/>
+                          <a:ea typeface="Calibri" pitchFamily="34" charset="-122"/>
+                          <a:cs typeface="Calibri" pitchFamily="34" charset="-120"/>
+                        </a:rPr>
+                        <a:t>0.51%</a:t>
+                      </a:r>
+                      <a:endParaRPr lang="en-US" sz="500" dirty="0">
+                        <a:latin typeface="Calibri" charset="0"/>
+                        <a:ea typeface="Calibri" charset="0"/>
+                        <a:cs typeface="Calibri" charset="0"/>
+                      </a:endParaRPr>
+                    </a:p>
+                  </a:txBody>
+                  <a:tcPr marL="91440" marR="91440" marT="45720" marB="45720">
+                    <a:lnL w="2540" cap="flat" cmpd="sng" algn="ctr">
+                      <a:solidFill>
+                        <a:srgbClr val="EEEEEE"/>
+                      </a:solidFill>
+                      <a:prstDash val="solid"/>
+                      <a:round/>
+                      <a:headEnd type="none" w="med" len="med"/>
+                      <a:tailEnd type="none" w="med" len="med"/>
+                    </a:lnL>
+                    <a:lnR w="2540" cap="flat" cmpd="sng" algn="ctr">
+                      <a:solidFill>
+                        <a:srgbClr val="EEEEEE"/>
+                      </a:solidFill>
+                      <a:prstDash val="solid"/>
+                      <a:round/>
+                      <a:headEnd type="none" w="med" len="med"/>
+                      <a:tailEnd type="none" w="med" len="med"/>
+                    </a:lnR>
+                    <a:lnT w="2540" cap="flat" cmpd="sng" algn="ctr">
+                      <a:solidFill>
+                        <a:srgbClr val="EEEEEE"/>
+                      </a:solidFill>
+                      <a:prstDash val="solid"/>
+                      <a:round/>
+                      <a:headEnd type="none" w="med" len="med"/>
+                      <a:tailEnd type="none" w="med" len="med"/>
+                    </a:lnT>
+                    <a:lnB w="2540" cap="flat" cmpd="sng" algn="ctr">
+                      <a:solidFill>
+                        <a:srgbClr val="EEEEEE"/>
+                      </a:solidFill>
+                      <a:prstDash val="solid"/>
+                      <a:round/>
+                      <a:headEnd type="none" w="med" len="med"/>
+                      <a:tailEnd type="none" w="med" len="med"/>
+                    </a:lnB>
+                  </a:tcPr>
+                </a:tc>
+                <a:tc>
+                  <a:txBody>
+                    <a:bodyPr/>
+                    <a:lstStyle/>
+                    <a:p>
+                      <a:pPr algn="ctr" indent="0" marL="0">
+                        <a:buNone/>
+                      </a:pPr>
+                      <a:r>
+                        <a:rPr lang="en-US" sz="500" dirty="0">
+                          <a:solidFill>
+                            <a:srgbClr val="999999"/>
+                          </a:solidFill>
+                          <a:latin typeface="Calibri" pitchFamily="34" charset="0"/>
+                          <a:ea typeface="Calibri" pitchFamily="34" charset="-122"/>
+                          <a:cs typeface="Calibri" pitchFamily="34" charset="-120"/>
+                        </a:rPr>
+                        <a:t>0.45%</a:t>
+                      </a:r>
+                      <a:endParaRPr lang="en-US" sz="500" dirty="0">
+                        <a:latin typeface="Calibri" charset="0"/>
+                        <a:ea typeface="Calibri" charset="0"/>
+                        <a:cs typeface="Calibri" charset="0"/>
+                      </a:endParaRPr>
+                    </a:p>
+                  </a:txBody>
+                  <a:tcPr marL="91440" marR="91440" marT="45720" marB="45720">
+                    <a:lnL w="2540" cap="flat" cmpd="sng" algn="ctr">
+                      <a:solidFill>
+                        <a:srgbClr val="EEEEEE"/>
+                      </a:solidFill>
+                      <a:prstDash val="solid"/>
+                      <a:round/>
+                      <a:headEnd type="none" w="med" len="med"/>
+                      <a:tailEnd type="none" w="med" len="med"/>
+                    </a:lnL>
+                    <a:lnR w="2540" cap="flat" cmpd="sng" algn="ctr">
+                      <a:solidFill>
+                        <a:srgbClr val="EEEEEE"/>
+                      </a:solidFill>
+                      <a:prstDash val="solid"/>
+                      <a:round/>
+                      <a:headEnd type="none" w="med" len="med"/>
+                      <a:tailEnd type="none" w="med" len="med"/>
+                    </a:lnR>
+                    <a:lnT w="2540" cap="flat" cmpd="sng" algn="ctr">
+                      <a:solidFill>
+                        <a:srgbClr val="EEEEEE"/>
+                      </a:solidFill>
+                      <a:prstDash val="solid"/>
+                      <a:round/>
+                      <a:headEnd type="none" w="med" len="med"/>
+                      <a:tailEnd type="none" w="med" len="med"/>
+                    </a:lnT>
+                    <a:lnB w="2540" cap="flat" cmpd="sng" algn="ctr">
+                      <a:solidFill>
+                        <a:srgbClr val="EEEEEE"/>
+                      </a:solidFill>
+                      <a:prstDash val="solid"/>
+                      <a:round/>
+                      <a:headEnd type="none" w="med" len="med"/>
+                      <a:tailEnd type="none" w="med" len="med"/>
+                    </a:lnB>
+                  </a:tcPr>
+                </a:tc>
+                <a:tc>
+                  <a:txBody>
+                    <a:bodyPr/>
+                    <a:lstStyle/>
+                    <a:p>
+                      <a:pPr algn="ctr" indent="0" marL="0">
+                        <a:buNone/>
+                      </a:pPr>
+                      <a:r>
+                        <a:rPr lang="en-US" sz="500" dirty="0">
+                          <a:solidFill>
+                            <a:srgbClr val="999999"/>
+                          </a:solidFill>
+                          <a:latin typeface="Calibri" pitchFamily="34" charset="0"/>
+                          <a:ea typeface="Calibri" pitchFamily="34" charset="-122"/>
+                          <a:cs typeface="Calibri" pitchFamily="34" charset="-120"/>
+                        </a:rPr>
+                        <a:t>0.47%</a:t>
+                      </a:r>
+                      <a:endParaRPr lang="en-US" sz="500" dirty="0">
+                        <a:latin typeface="Calibri" charset="0"/>
+                        <a:ea typeface="Calibri" charset="0"/>
+                        <a:cs typeface="Calibri" charset="0"/>
+                      </a:endParaRPr>
+                    </a:p>
+                  </a:txBody>
+                  <a:tcPr marL="91440" marR="91440" marT="45720" marB="45720">
+                    <a:lnL w="2540" cap="flat" cmpd="sng" algn="ctr">
+                      <a:solidFill>
+                        <a:srgbClr val="EEEEEE"/>
+                      </a:solidFill>
+                      <a:prstDash val="solid"/>
+                      <a:round/>
+                      <a:headEnd type="none" w="med" len="med"/>
+                      <a:tailEnd type="none" w="med" len="med"/>
+                    </a:lnL>
+                    <a:lnR w="2540" cap="flat" cmpd="sng" algn="ctr">
+                      <a:solidFill>
+                        <a:srgbClr val="EEEEEE"/>
+                      </a:solidFill>
+                      <a:prstDash val="solid"/>
+                      <a:round/>
+                      <a:headEnd type="none" w="med" len="med"/>
+                      <a:tailEnd type="none" w="med" len="med"/>
+                    </a:lnR>
+                    <a:lnT w="2540" cap="flat" cmpd="sng" algn="ctr">
+                      <a:solidFill>
+                        <a:srgbClr val="EEEEEE"/>
+                      </a:solidFill>
+                      <a:prstDash val="solid"/>
+                      <a:round/>
+                      <a:headEnd type="none" w="med" len="med"/>
+                      <a:tailEnd type="none" w="med" len="med"/>
+                    </a:lnT>
+                    <a:lnB w="2540" cap="flat" cmpd="sng" algn="ctr">
+                      <a:solidFill>
+                        <a:srgbClr val="EEEEEE"/>
+                      </a:solidFill>
+                      <a:prstDash val="solid"/>
+                      <a:round/>
+                      <a:headEnd type="none" w="med" len="med"/>
+                      <a:tailEnd type="none" w="med" len="med"/>
+                    </a:lnB>
+                  </a:tcPr>
+                </a:tc>
+                <a:tc>
+                  <a:txBody>
+                    <a:bodyPr/>
+                    <a:lstStyle/>
+                    <a:p>
+                      <a:pPr algn="ctr" indent="0" marL="0">
+                        <a:buNone/>
+                      </a:pPr>
+                      <a:r>
+                        <a:rPr lang="en-US" sz="500" dirty="0">
+                          <a:solidFill>
+                            <a:srgbClr val="999999"/>
+                          </a:solidFill>
+                          <a:latin typeface="Calibri" pitchFamily="34" charset="0"/>
+                          <a:ea typeface="Calibri" pitchFamily="34" charset="-122"/>
+                          <a:cs typeface="Calibri" pitchFamily="34" charset="-120"/>
+                        </a:rPr>
+                        <a:t>0.42%</a:t>
+                      </a:r>
+                      <a:endParaRPr lang="en-US" sz="500" dirty="0">
+                        <a:latin typeface="Calibri" charset="0"/>
+                        <a:ea typeface="Calibri" charset="0"/>
+                        <a:cs typeface="Calibri" charset="0"/>
+                      </a:endParaRPr>
+                    </a:p>
+                  </a:txBody>
+                  <a:tcPr marL="91440" marR="91440" marT="45720" marB="45720">
+                    <a:lnL w="2540" cap="flat" cmpd="sng" algn="ctr">
+                      <a:solidFill>
+                        <a:srgbClr val="EEEEEE"/>
+                      </a:solidFill>
+                      <a:prstDash val="solid"/>
+                      <a:round/>
+                      <a:headEnd type="none" w="med" len="med"/>
+                      <a:tailEnd type="none" w="med" len="med"/>
+                    </a:lnL>
+                    <a:lnR w="2540" cap="flat" cmpd="sng" algn="ctr">
+                      <a:solidFill>
+                        <a:srgbClr val="EEEEEE"/>
+                      </a:solidFill>
+                      <a:prstDash val="solid"/>
+                      <a:round/>
+                      <a:headEnd type="none" w="med" len="med"/>
+                      <a:tailEnd type="none" w="med" len="med"/>
+                    </a:lnR>
+                    <a:lnT w="2540" cap="flat" cmpd="sng" algn="ctr">
+                      <a:solidFill>
+                        <a:srgbClr val="EEEEEE"/>
+                      </a:solidFill>
+                      <a:prstDash val="solid"/>
+                      <a:round/>
+                      <a:headEnd type="none" w="med" len="med"/>
+                      <a:tailEnd type="none" w="med" len="med"/>
+                    </a:lnT>
+                    <a:lnB w="2540" cap="flat" cmpd="sng" algn="ctr">
+                      <a:solidFill>
+                        <a:srgbClr val="EEEEEE"/>
+                      </a:solidFill>
+                      <a:prstDash val="solid"/>
+                      <a:round/>
+                      <a:headEnd type="none" w="med" len="med"/>
+                      <a:tailEnd type="none" w="med" len="med"/>
+                    </a:lnB>
+                  </a:tcPr>
+                </a:tc>
+                <a:tc>
+                  <a:txBody>
+                    <a:bodyPr/>
+                    <a:lstStyle/>
+                    <a:p>
+                      <a:pPr algn="ctr" indent="0" marL="0">
+                        <a:buNone/>
+                      </a:pPr>
+                      <a:r>
+                        <a:rPr lang="en-US" sz="500" dirty="0">
+                          <a:solidFill>
+                            <a:srgbClr val="999999"/>
+                          </a:solidFill>
+                          <a:latin typeface="Calibri" pitchFamily="34" charset="0"/>
+                          <a:ea typeface="Calibri" pitchFamily="34" charset="-122"/>
+                          <a:cs typeface="Calibri" pitchFamily="34" charset="-120"/>
+                        </a:rPr>
+                        <a:t>0.37%</a:t>
+                      </a:r>
+                      <a:endParaRPr lang="en-US" sz="500" dirty="0">
+                        <a:latin typeface="Calibri" charset="0"/>
+                        <a:ea typeface="Calibri" charset="0"/>
+                        <a:cs typeface="Calibri" charset="0"/>
+                      </a:endParaRPr>
+                    </a:p>
+                  </a:txBody>
+                  <a:tcPr marL="91440" marR="91440" marT="45720" marB="45720">
+                    <a:lnL w="2540" cap="flat" cmpd="sng" algn="ctr">
+                      <a:solidFill>
+                        <a:srgbClr val="EEEEEE"/>
+                      </a:solidFill>
+                      <a:prstDash val="solid"/>
+                      <a:round/>
+                      <a:headEnd type="none" w="med" len="med"/>
+                      <a:tailEnd type="none" w="med" len="med"/>
+                    </a:lnL>
+                    <a:lnR w="2540" cap="flat" cmpd="sng" algn="ctr">
+                      <a:solidFill>
+                        <a:srgbClr val="EEEEEE"/>
+                      </a:solidFill>
+                      <a:prstDash val="solid"/>
+                      <a:round/>
+                      <a:headEnd type="none" w="med" len="med"/>
+                      <a:tailEnd type="none" w="med" len="med"/>
+                    </a:lnR>
+                    <a:lnT w="2540" cap="flat" cmpd="sng" algn="ctr">
+                      <a:solidFill>
+                        <a:srgbClr val="EEEEEE"/>
+                      </a:solidFill>
+                      <a:prstDash val="solid"/>
+                      <a:round/>
+                      <a:headEnd type="none" w="med" len="med"/>
+                      <a:tailEnd type="none" w="med" len="med"/>
+                    </a:lnT>
+                    <a:lnB w="2540" cap="flat" cmpd="sng" algn="ctr">
+                      <a:solidFill>
+                        <a:srgbClr val="EEEEEE"/>
+                      </a:solidFill>
+                      <a:prstDash val="solid"/>
+                      <a:round/>
+                      <a:headEnd type="none" w="med" len="med"/>
+                      <a:tailEnd type="none" w="med" len="med"/>
+                    </a:lnB>
+                  </a:tcPr>
+                </a:tc>
+                <a:tc>
+                  <a:txBody>
+                    <a:bodyPr/>
+                    <a:lstStyle/>
+                    <a:p>
+                      <a:pPr algn="ctr" indent="0" marL="0">
+                        <a:buNone/>
+                      </a:pPr>
+                      <a:r>
+                        <a:rPr lang="en-US" sz="500" dirty="0">
+                          <a:solidFill>
+                            <a:srgbClr val="999999"/>
+                          </a:solidFill>
+                          <a:latin typeface="Calibri" pitchFamily="34" charset="0"/>
+                          <a:ea typeface="Calibri" pitchFamily="34" charset="-122"/>
+                          <a:cs typeface="Calibri" pitchFamily="34" charset="-120"/>
+                        </a:rPr>
+                        <a:t>0.36%</a:t>
+                      </a:r>
+                      <a:endParaRPr lang="en-US" sz="500" dirty="0">
+                        <a:latin typeface="Calibri" charset="0"/>
+                        <a:ea typeface="Calibri" charset="0"/>
+                        <a:cs typeface="Calibri" charset="0"/>
+                      </a:endParaRPr>
+                    </a:p>
+                  </a:txBody>
+                  <a:tcPr marL="91440" marR="91440" marT="45720" marB="45720">
+                    <a:lnL w="2540" cap="flat" cmpd="sng" algn="ctr">
+                      <a:solidFill>
+                        <a:srgbClr val="EEEEEE"/>
+                      </a:solidFill>
+                      <a:prstDash val="solid"/>
+                      <a:round/>
+                      <a:headEnd type="none" w="med" len="med"/>
+                      <a:tailEnd type="none" w="med" len="med"/>
+                    </a:lnL>
+                    <a:lnR w="2540" cap="flat" cmpd="sng" algn="ctr">
+                      <a:solidFill>
+                        <a:srgbClr val="EEEEEE"/>
+                      </a:solidFill>
+                      <a:prstDash val="solid"/>
+                      <a:round/>
+                      <a:headEnd type="none" w="med" len="med"/>
+                      <a:tailEnd type="none" w="med" len="med"/>
+                    </a:lnR>
+                    <a:lnT w="2540" cap="flat" cmpd="sng" algn="ctr">
+                      <a:solidFill>
+                        <a:srgbClr val="EEEEEE"/>
+                      </a:solidFill>
+                      <a:prstDash val="solid"/>
+                      <a:round/>
+                      <a:headEnd type="none" w="med" len="med"/>
+                      <a:tailEnd type="none" w="med" len="med"/>
+                    </a:lnT>
+                    <a:lnB w="2540" cap="flat" cmpd="sng" algn="ctr">
+                      <a:solidFill>
+                        <a:srgbClr val="EEEEEE"/>
+                      </a:solidFill>
+                      <a:prstDash val="solid"/>
+                      <a:round/>
+                      <a:headEnd type="none" w="med" len="med"/>
+                      <a:tailEnd type="none" w="med" len="med"/>
+                    </a:lnB>
+                  </a:tcPr>
+                </a:tc>
+                <a:tc>
+                  <a:txBody>
+                    <a:bodyPr/>
+                    <a:lstStyle/>
+                    <a:p>
+                      <a:pPr algn="ctr" indent="0" marL="0">
+                        <a:buNone/>
+                      </a:pPr>
+                      <a:r>
+                        <a:rPr lang="en-US" sz="500" dirty="0">
+                          <a:solidFill>
+                            <a:srgbClr val="999999"/>
+                          </a:solidFill>
+                          <a:latin typeface="Calibri" pitchFamily="34" charset="0"/>
+                          <a:ea typeface="Calibri" pitchFamily="34" charset="-122"/>
+                          <a:cs typeface="Calibri" pitchFamily="34" charset="-120"/>
+                        </a:rPr>
+                        <a:t>0.36%</a:t>
+                      </a:r>
+                      <a:endParaRPr lang="en-US" sz="500" dirty="0">
+                        <a:latin typeface="Calibri" charset="0"/>
+                        <a:ea typeface="Calibri" charset="0"/>
+                        <a:cs typeface="Calibri" charset="0"/>
+                      </a:endParaRPr>
+                    </a:p>
+                  </a:txBody>
+                  <a:tcPr marL="91440" marR="91440" marT="45720" marB="45720">
+                    <a:lnL w="2540" cap="flat" cmpd="sng" algn="ctr">
+                      <a:solidFill>
+                        <a:srgbClr val="EEEEEE"/>
+                      </a:solidFill>
+                      <a:prstDash val="solid"/>
+                      <a:round/>
+                      <a:headEnd type="none" w="med" len="med"/>
+                      <a:tailEnd type="none" w="med" len="med"/>
+                    </a:lnL>
+                    <a:lnR w="2540" cap="flat" cmpd="sng" algn="ctr">
+                      <a:solidFill>
+                        <a:srgbClr val="EEEEEE"/>
+                      </a:solidFill>
+                      <a:prstDash val="solid"/>
+                      <a:round/>
+                      <a:headEnd type="none" w="med" len="med"/>
+                      <a:tailEnd type="none" w="med" len="med"/>
+                    </a:lnR>
+                    <a:lnT w="2540" cap="flat" cmpd="sng" algn="ctr">
+                      <a:solidFill>
+                        <a:srgbClr val="EEEEEE"/>
+                      </a:solidFill>
+                      <a:prstDash val="solid"/>
+                      <a:round/>
+                      <a:headEnd type="none" w="med" len="med"/>
+                      <a:tailEnd type="none" w="med" len="med"/>
+                    </a:lnT>
+                    <a:lnB w="2540" cap="flat" cmpd="sng" algn="ctr">
+                      <a:solidFill>
+                        <a:srgbClr val="EEEEEE"/>
+                      </a:solidFill>
+                      <a:prstDash val="solid"/>
+                      <a:round/>
+                      <a:headEnd type="none" w="med" len="med"/>
+                      <a:tailEnd type="none" w="med" len="med"/>
+                    </a:lnB>
+                  </a:tcPr>
+                </a:tc>
+                <a:tc>
+                  <a:txBody>
+                    <a:bodyPr/>
+                    <a:lstStyle/>
+                    <a:p>
+                      <a:pPr algn="ctr" indent="0" marL="0">
+                        <a:buNone/>
+                      </a:pPr>
+                      <a:r>
+                        <a:rPr lang="en-US" sz="500" dirty="0">
+                          <a:solidFill>
+                            <a:srgbClr val="999999"/>
+                          </a:solidFill>
+                          <a:latin typeface="Calibri" pitchFamily="34" charset="0"/>
+                          <a:ea typeface="Calibri" pitchFamily="34" charset="-122"/>
+                          <a:cs typeface="Calibri" pitchFamily="34" charset="-120"/>
+                        </a:rPr>
+                        <a:t>0.34%</a:t>
+                      </a:r>
+                      <a:endParaRPr lang="en-US" sz="500" dirty="0">
+                        <a:latin typeface="Calibri" charset="0"/>
+                        <a:ea typeface="Calibri" charset="0"/>
+                        <a:cs typeface="Calibri" charset="0"/>
+                      </a:endParaRPr>
+                    </a:p>
+                  </a:txBody>
+                  <a:tcPr marL="91440" marR="91440" marT="45720" marB="45720">
+                    <a:lnL w="2540" cap="flat" cmpd="sng" algn="ctr">
+                      <a:solidFill>
+                        <a:srgbClr val="EEEEEE"/>
+                      </a:solidFill>
+                      <a:prstDash val="solid"/>
+                      <a:round/>
+                      <a:headEnd type="none" w="med" len="med"/>
+                      <a:tailEnd type="none" w="med" len="med"/>
+                    </a:lnL>
+                    <a:lnR w="2540" cap="flat" cmpd="sng" algn="ctr">
+                      <a:solidFill>
+                        <a:srgbClr val="EEEEEE"/>
+                      </a:solidFill>
+                      <a:prstDash val="solid"/>
+                      <a:round/>
+                      <a:headEnd type="none" w="med" len="med"/>
+                      <a:tailEnd type="none" w="med" len="med"/>
+                    </a:lnR>
+                    <a:lnT w="2540" cap="flat" cmpd="sng" algn="ctr">
+                      <a:solidFill>
+                        <a:srgbClr val="EEEEEE"/>
+                      </a:solidFill>
+                      <a:prstDash val="solid"/>
+                      <a:round/>
+                      <a:headEnd type="none" w="med" len="med"/>
+                      <a:tailEnd type="none" w="med" len="med"/>
+                    </a:lnT>
+                    <a:lnB w="2540" cap="flat" cmpd="sng" algn="ctr">
+                      <a:solidFill>
+                        <a:srgbClr val="EEEEEE"/>
+                      </a:solidFill>
+                      <a:prstDash val="solid"/>
+                      <a:round/>
+                      <a:headEnd type="none" w="med" len="med"/>
+                      <a:tailEnd type="none" w="med" len="med"/>
+                    </a:lnB>
+                  </a:tcPr>
+                </a:tc>
+                <a:tc>
+                  <a:txBody>
+                    <a:bodyPr/>
+                    <a:lstStyle/>
+                    <a:p>
+                      <a:pPr algn="ctr" indent="0" marL="0">
+                        <a:buNone/>
+                      </a:pPr>
+                      <a:r>
+                        <a:rPr lang="en-US" sz="500" dirty="0">
+                          <a:solidFill>
+                            <a:srgbClr val="999999"/>
+                          </a:solidFill>
+                          <a:latin typeface="Calibri" pitchFamily="34" charset="0"/>
+                          <a:ea typeface="Calibri" pitchFamily="34" charset="-122"/>
+                          <a:cs typeface="Calibri" pitchFamily="34" charset="-120"/>
+                        </a:rPr>
+                        <a:t>0.34%</a:t>
+                      </a:r>
+                      <a:endParaRPr lang="en-US" sz="500" dirty="0">
+                        <a:latin typeface="Calibri" charset="0"/>
+                        <a:ea typeface="Calibri" charset="0"/>
+                        <a:cs typeface="Calibri" charset="0"/>
+                      </a:endParaRPr>
+                    </a:p>
+                  </a:txBody>
+                  <a:tcPr marL="91440" marR="91440" marT="45720" marB="45720">
+                    <a:lnL w="2540" cap="flat" cmpd="sng" algn="ctr">
+                      <a:solidFill>
+                        <a:srgbClr val="EEEEEE"/>
+                      </a:solidFill>
+                      <a:prstDash val="solid"/>
+                      <a:round/>
+                      <a:headEnd type="none" w="med" len="med"/>
+                      <a:tailEnd type="none" w="med" len="med"/>
+                    </a:lnL>
+                    <a:lnR w="2540" cap="flat" cmpd="sng" algn="ctr">
+                      <a:solidFill>
+                        <a:srgbClr val="EEEEEE"/>
+                      </a:solidFill>
+                      <a:prstDash val="solid"/>
+                      <a:round/>
+                      <a:headEnd type="none" w="med" len="med"/>
+                      <a:tailEnd type="none" w="med" len="med"/>
+                    </a:lnR>
+                    <a:lnT w="2540" cap="flat" cmpd="sng" algn="ctr">
+                      <a:solidFill>
+                        <a:srgbClr val="EEEEEE"/>
+                      </a:solidFill>
+                      <a:prstDash val="solid"/>
+                      <a:round/>
+                      <a:headEnd type="none" w="med" len="med"/>
+                      <a:tailEnd type="none" w="med" len="med"/>
+                    </a:lnT>
+                    <a:lnB w="2540" cap="flat" cmpd="sng" algn="ctr">
+                      <a:solidFill>
+                        <a:srgbClr val="EEEEEE"/>
+                      </a:solidFill>
+                      <a:prstDash val="solid"/>
+                      <a:round/>
+                      <a:headEnd type="none" w="med" len="med"/>
+                      <a:tailEnd type="none" w="med" len="med"/>
+                    </a:lnB>
+                  </a:tcPr>
+                </a:tc>
+                <a:tc>
+                  <a:txBody>
+                    <a:bodyPr/>
+                    <a:lstStyle/>
+                    <a:p>
+                      <a:pPr algn="ctr" indent="0" marL="0">
+                        <a:buNone/>
+                      </a:pPr>
+                      <a:r>
+                        <a:rPr lang="en-US" sz="500" dirty="0">
+                          <a:solidFill>
+                            <a:srgbClr val="999999"/>
+                          </a:solidFill>
+                          <a:latin typeface="Calibri" pitchFamily="34" charset="0"/>
+                          <a:ea typeface="Calibri" pitchFamily="34" charset="-122"/>
+                          <a:cs typeface="Calibri" pitchFamily="34" charset="-120"/>
+                        </a:rPr>
+                        <a:t>0.32%</a:t>
+                      </a:r>
+                      <a:endParaRPr lang="en-US" sz="500" dirty="0">
+                        <a:latin typeface="Calibri" charset="0"/>
+                        <a:ea typeface="Calibri" charset="0"/>
+                        <a:cs typeface="Calibri" charset="0"/>
+                      </a:endParaRPr>
+                    </a:p>
+                  </a:txBody>
+                  <a:tcPr marL="91440" marR="91440" marT="45720" marB="45720">
+                    <a:lnL w="2540" cap="flat" cmpd="sng" algn="ctr">
+                      <a:solidFill>
+                        <a:srgbClr val="EEEEEE"/>
+                      </a:solidFill>
+                      <a:prstDash val="solid"/>
+                      <a:round/>
+                      <a:headEnd type="none" w="med" len="med"/>
+                      <a:tailEnd type="none" w="med" len="med"/>
+                    </a:lnL>
+                    <a:lnR w="2540" cap="flat" cmpd="sng" algn="ctr">
+                      <a:solidFill>
+                        <a:srgbClr val="EEEEEE"/>
+                      </a:solidFill>
+                      <a:prstDash val="solid"/>
+                      <a:round/>
+                      <a:headEnd type="none" w="med" len="med"/>
+                      <a:tailEnd type="none" w="med" len="med"/>
+                    </a:lnR>
+                    <a:lnT w="2540" cap="flat" cmpd="sng" algn="ctr">
+                      <a:solidFill>
+                        <a:srgbClr val="EEEEEE"/>
+                      </a:solidFill>
+                      <a:prstDash val="solid"/>
+                      <a:round/>
+                      <a:headEnd type="none" w="med" len="med"/>
+                      <a:tailEnd type="none" w="med" len="med"/>
+                    </a:lnT>
+                    <a:lnB w="2540" cap="flat" cmpd="sng" algn="ctr">
+                      <a:solidFill>
+                        <a:srgbClr val="EEEEEE"/>
+                      </a:solidFill>
+                      <a:prstDash val="solid"/>
+                      <a:round/>
+                      <a:headEnd type="none" w="med" len="med"/>
+                      <a:tailEnd type="none" w="med" len="med"/>
+                    </a:lnB>
+                  </a:tcPr>
+                </a:tc>
+                <a:tc>
+                  <a:txBody>
+                    <a:bodyPr/>
+                    <a:lstStyle/>
+                    <a:p>
+                      <a:pPr algn="ctr" indent="0" marL="0">
+                        <a:buNone/>
+                      </a:pPr>
+                      <a:r>
+                        <a:rPr lang="en-US" sz="500" dirty="0">
+                          <a:solidFill>
+                            <a:srgbClr val="999999"/>
+                          </a:solidFill>
+                          <a:latin typeface="Calibri" pitchFamily="34" charset="0"/>
+                          <a:ea typeface="Calibri" pitchFamily="34" charset="-122"/>
+                          <a:cs typeface="Calibri" pitchFamily="34" charset="-120"/>
+                        </a:rPr>
+                        <a:t>0.32%</a:t>
+                      </a:r>
+                      <a:endParaRPr lang="en-US" sz="500" dirty="0">
+                        <a:latin typeface="Calibri" charset="0"/>
+                        <a:ea typeface="Calibri" charset="0"/>
+                        <a:cs typeface="Calibri" charset="0"/>
+                      </a:endParaRPr>
+                    </a:p>
+                  </a:txBody>
+                  <a:tcPr marL="91440" marR="91440" marT="45720" marB="45720">
+                    <a:lnL w="2540" cap="flat" cmpd="sng" algn="ctr">
+                      <a:solidFill>
+                        <a:srgbClr val="EEEEEE"/>
+                      </a:solidFill>
+                      <a:prstDash val="solid"/>
+                      <a:round/>
+                      <a:headEnd type="none" w="med" len="med"/>
+                      <a:tailEnd type="none" w="med" len="med"/>
+                    </a:lnL>
+                    <a:lnR w="2540" cap="flat" cmpd="sng" algn="ctr">
+                      <a:solidFill>
+                        <a:srgbClr val="EEEEEE"/>
+                      </a:solidFill>
+                      <a:prstDash val="solid"/>
+                      <a:round/>
+                      <a:headEnd type="none" w="med" len="med"/>
+                      <a:tailEnd type="none" w="med" len="med"/>
+                    </a:lnR>
+                    <a:lnT w="2540" cap="flat" cmpd="sng" algn="ctr">
+                      <a:solidFill>
+                        <a:srgbClr val="EEEEEE"/>
+                      </a:solidFill>
+                      <a:prstDash val="solid"/>
+                      <a:round/>
+                      <a:headEnd type="none" w="med" len="med"/>
+                      <a:tailEnd type="none" w="med" len="med"/>
+                    </a:lnT>
+                    <a:lnB w="2540" cap="flat" cmpd="sng" algn="ctr">
+                      <a:solidFill>
+                        <a:srgbClr val="EEEEEE"/>
+                      </a:solidFill>
+                      <a:prstDash val="solid"/>
+                      <a:round/>
+                      <a:headEnd type="none" w="med" len="med"/>
+                      <a:tailEnd type="none" w="med" len="med"/>
+                    </a:lnB>
+                  </a:tcPr>
+                </a:tc>
+                <a:tc>
+                  <a:txBody>
+                    <a:bodyPr/>
+                    <a:lstStyle/>
+                    <a:p>
+                      <a:pPr algn="ctr" indent="0" marL="0">
+                        <a:buNone/>
+                      </a:pPr>
+                      <a:r>
+                        <a:rPr lang="en-US" sz="500" b="1" dirty="0">
+                          <a:solidFill>
+                            <a:srgbClr val="999999"/>
+                          </a:solidFill>
+                          <a:latin typeface="Calibri" pitchFamily="34" charset="0"/>
+                          <a:ea typeface="Calibri" pitchFamily="34" charset="-122"/>
+                          <a:cs typeface="Calibri" pitchFamily="34" charset="-120"/>
+                        </a:rPr>
+                        <a:t>4.95%</a:t>
+                      </a:r>
+                      <a:endParaRPr lang="en-US" sz="500" dirty="0">
+                        <a:latin typeface="Calibri" charset="0"/>
+                        <a:ea typeface="Calibri" charset="0"/>
+                        <a:cs typeface="Calibri" charset="0"/>
+                      </a:endParaRPr>
+                    </a:p>
+                  </a:txBody>
+                  <a:tcPr marL="91440" marR="91440" marT="45720" marB="45720">
+                    <a:lnL w="2540" cap="flat" cmpd="sng" algn="ctr">
+                      <a:solidFill>
+                        <a:srgbClr val="EEEEEE"/>
+                      </a:solidFill>
+                      <a:prstDash val="solid"/>
+                      <a:round/>
+                      <a:headEnd type="none" w="med" len="med"/>
+                      <a:tailEnd type="none" w="med" len="med"/>
+                    </a:lnL>
+                    <a:lnR w="2540" cap="flat" cmpd="sng" algn="ctr">
+                      <a:solidFill>
+                        <a:srgbClr val="EEEEEE"/>
+                      </a:solidFill>
+                      <a:prstDash val="solid"/>
+                      <a:round/>
+                      <a:headEnd type="none" w="med" len="med"/>
+                      <a:tailEnd type="none" w="med" len="med"/>
+                    </a:lnR>
+                    <a:lnT w="2540" cap="flat" cmpd="sng" algn="ctr">
+                      <a:solidFill>
+                        <a:srgbClr val="EEEEEE"/>
+                      </a:solidFill>
+                      <a:prstDash val="solid"/>
+                      <a:round/>
+                      <a:headEnd type="none" w="med" len="med"/>
+                      <a:tailEnd type="none" w="med" len="med"/>
+                    </a:lnT>
+                    <a:lnB w="2540" cap="flat" cmpd="sng" algn="ctr">
+                      <a:solidFill>
+                        <a:srgbClr val="EEEEEE"/>
+                      </a:solidFill>
+                      <a:prstDash val="solid"/>
+                      <a:round/>
+                      <a:headEnd type="none" w="med" len="med"/>
+                      <a:tailEnd type="none" w="med" len="med"/>
+                    </a:lnB>
+                  </a:tcPr>
+                </a:tc>
+              </a:tr>
+              <a:tr h="123444">
+                <a:tc>
+                  <a:txBody>
+                    <a:bodyPr/>
+                    <a:lstStyle/>
+                    <a:p>
+                      <a:pPr algn="l" indent="0" marL="0">
+                        <a:buNone/>
+                      </a:pPr>
+                      <a:endParaRPr lang="en-US" sz="500" dirty="0">
+                        <a:latin typeface="Calibri" charset="0"/>
+                        <a:ea typeface="Calibri" charset="0"/>
+                        <a:cs typeface="Calibri" charset="0"/>
+                      </a:endParaRPr>
+                    </a:p>
+                  </a:txBody>
+                  <a:tcPr marL="91440" marR="91440" marT="45720" marB="45720">
+                    <a:lnL w="2540" cap="flat" cmpd="sng" algn="ctr">
+                      <a:solidFill>
+                        <a:srgbClr val="EEEEEE"/>
+                      </a:solidFill>
+                      <a:prstDash val="solid"/>
+                      <a:round/>
+                      <a:headEnd type="none" w="med" len="med"/>
+                      <a:tailEnd type="none" w="med" len="med"/>
+                    </a:lnL>
+                    <a:lnR w="2540" cap="flat" cmpd="sng" algn="ctr">
+                      <a:solidFill>
+                        <a:srgbClr val="EEEEEE"/>
+                      </a:solidFill>
+                      <a:prstDash val="solid"/>
+                      <a:round/>
+                      <a:headEnd type="none" w="med" len="med"/>
+                      <a:tailEnd type="none" w="med" len="med"/>
+                    </a:lnR>
+                    <a:lnT w="2540" cap="flat" cmpd="sng" algn="ctr">
+                      <a:solidFill>
+                        <a:srgbClr val="EEEEEE"/>
+                      </a:solidFill>
+                      <a:prstDash val="solid"/>
+                      <a:round/>
+                      <a:headEnd type="none" w="med" len="med"/>
+                      <a:tailEnd type="none" w="med" len="med"/>
+                    </a:lnT>
+                    <a:lnB w="2540" cap="flat" cmpd="sng" algn="ctr">
+                      <a:solidFill>
+                        <a:srgbClr val="EEEEEE"/>
+                      </a:solidFill>
+                      <a:prstDash val="solid"/>
+                      <a:round/>
+                      <a:headEnd type="none" w="med" len="med"/>
+                      <a:tailEnd type="none" w="med" len="med"/>
+                    </a:lnB>
+                  </a:tcPr>
+                </a:tc>
+                <a:tc>
+                  <a:txBody>
+                    <a:bodyPr/>
+                    <a:lstStyle/>
+                    <a:p>
+                      <a:pPr algn="l" indent="0" marL="0">
+                        <a:buNone/>
+                      </a:pPr>
+                      <a:r>
+                        <a:rPr lang="en-US" sz="400" dirty="0">
+                          <a:solidFill>
+                            <a:srgbClr val="000000"/>
+                          </a:solidFill>
+                          <a:latin typeface="Calibri" pitchFamily="34" charset="0"/>
+                          <a:ea typeface="Calibri" pitchFamily="34" charset="-122"/>
+                          <a:cs typeface="Calibri" pitchFamily="34" charset="-120"/>
+                        </a:rPr>
+                        <a:t>FIP LIQUIDEZ Permanente</a:t>
+                      </a:r>
+                      <a:endParaRPr lang="en-US" sz="400" dirty="0">
+                        <a:latin typeface="Calibri" charset="0"/>
+                        <a:ea typeface="Calibri" charset="0"/>
+                        <a:cs typeface="Calibri" charset="0"/>
+                      </a:endParaRPr>
+                    </a:p>
+                  </a:txBody>
+                  <a:tcPr marL="91440" marR="91440" marT="45720" marB="45720">
+                    <a:lnL w="2540" cap="flat" cmpd="sng" algn="ctr">
+                      <a:solidFill>
+                        <a:srgbClr val="EEEEEE"/>
+                      </a:solidFill>
+                      <a:prstDash val="solid"/>
+                      <a:round/>
+                      <a:headEnd type="none" w="med" len="med"/>
+                      <a:tailEnd type="none" w="med" len="med"/>
+                    </a:lnL>
+                    <a:lnR w="2540" cap="flat" cmpd="sng" algn="ctr">
+                      <a:solidFill>
+                        <a:srgbClr val="EEEEEE"/>
+                      </a:solidFill>
+                      <a:prstDash val="solid"/>
+                      <a:round/>
+                      <a:headEnd type="none" w="med" len="med"/>
+                      <a:tailEnd type="none" w="med" len="med"/>
+                    </a:lnR>
+                    <a:lnT w="2540" cap="flat" cmpd="sng" algn="ctr">
+                      <a:solidFill>
+                        <a:srgbClr val="EEEEEE"/>
+                      </a:solidFill>
+                      <a:prstDash val="solid"/>
+                      <a:round/>
+                      <a:headEnd type="none" w="med" len="med"/>
+                      <a:tailEnd type="none" w="med" len="med"/>
+                    </a:lnT>
+                    <a:lnB w="2540" cap="flat" cmpd="sng" algn="ctr">
+                      <a:solidFill>
+                        <a:srgbClr val="EEEEEE"/>
+                      </a:solidFill>
+                      <a:prstDash val="solid"/>
+                      <a:round/>
+                      <a:headEnd type="none" w="med" len="med"/>
+                      <a:tailEnd type="none" w="med" len="med"/>
+                    </a:lnB>
+                  </a:tcPr>
+                </a:tc>
+                <a:tc>
+                  <a:txBody>
+                    <a:bodyPr/>
+                    <a:lstStyle/>
+                    <a:p>
+                      <a:pPr algn="ctr" indent="0" marL="0">
+                        <a:buNone/>
+                      </a:pPr>
+                      <a:r>
+                        <a:rPr lang="en-US" sz="500" dirty="0">
+                          <a:solidFill>
+                            <a:srgbClr val="000000"/>
+                          </a:solidFill>
+                          <a:latin typeface="Calibri" pitchFamily="34" charset="0"/>
+                          <a:ea typeface="Calibri" pitchFamily="34" charset="-122"/>
+                          <a:cs typeface="Calibri" pitchFamily="34" charset="-120"/>
+                        </a:rPr>
+                        <a:t>0.73%</a:t>
+                      </a:r>
+                      <a:endParaRPr lang="en-US" sz="500" dirty="0">
+                        <a:latin typeface="Calibri" charset="0"/>
+                        <a:ea typeface="Calibri" charset="0"/>
+                        <a:cs typeface="Calibri" charset="0"/>
+                      </a:endParaRPr>
+                    </a:p>
+                  </a:txBody>
+                  <a:tcPr marL="91440" marR="91440" marT="45720" marB="45720">
+                    <a:lnL w="2540" cap="flat" cmpd="sng" algn="ctr">
+                      <a:solidFill>
+                        <a:srgbClr val="EEEEEE"/>
+                      </a:solidFill>
+                      <a:prstDash val="solid"/>
+                      <a:round/>
+                      <a:headEnd type="none" w="med" len="med"/>
+                      <a:tailEnd type="none" w="med" len="med"/>
+                    </a:lnL>
+                    <a:lnR w="2540" cap="flat" cmpd="sng" algn="ctr">
+                      <a:solidFill>
+                        <a:srgbClr val="EEEEEE"/>
+                      </a:solidFill>
+                      <a:prstDash val="solid"/>
+                      <a:round/>
+                      <a:headEnd type="none" w="med" len="med"/>
+                      <a:tailEnd type="none" w="med" len="med"/>
+                    </a:lnR>
+                    <a:lnT w="2540" cap="flat" cmpd="sng" algn="ctr">
+                      <a:solidFill>
+                        <a:srgbClr val="EEEEEE"/>
+                      </a:solidFill>
+                      <a:prstDash val="solid"/>
+                      <a:round/>
+                      <a:headEnd type="none" w="med" len="med"/>
+                      <a:tailEnd type="none" w="med" len="med"/>
+                    </a:lnT>
+                    <a:lnB w="2540" cap="flat" cmpd="sng" algn="ctr">
+                      <a:solidFill>
+                        <a:srgbClr val="EEEEEE"/>
+                      </a:solidFill>
+                      <a:prstDash val="solid"/>
+                      <a:round/>
+                      <a:headEnd type="none" w="med" len="med"/>
+                      <a:tailEnd type="none" w="med" len="med"/>
+                    </a:lnB>
+                  </a:tcPr>
+                </a:tc>
+                <a:tc>
+                  <a:txBody>
+                    <a:bodyPr/>
+                    <a:lstStyle/>
+                    <a:p>
+                      <a:pPr algn="ctr" indent="0" marL="0">
+                        <a:buNone/>
+                      </a:pPr>
+                      <a:r>
+                        <a:rPr lang="en-US" sz="500" dirty="0">
+                          <a:solidFill>
+                            <a:srgbClr val="000000"/>
+                          </a:solidFill>
+                          <a:latin typeface="Calibri" pitchFamily="34" charset="0"/>
+                          <a:ea typeface="Calibri" pitchFamily="34" charset="-122"/>
+                          <a:cs typeface="Calibri" pitchFamily="34" charset="-120"/>
+                        </a:rPr>
+                        <a:t>0.53%</a:t>
+                      </a:r>
+                      <a:endParaRPr lang="en-US" sz="500" dirty="0">
+                        <a:latin typeface="Calibri" charset="0"/>
+                        <a:ea typeface="Calibri" charset="0"/>
+                        <a:cs typeface="Calibri" charset="0"/>
+                      </a:endParaRPr>
+                    </a:p>
+                  </a:txBody>
+                  <a:tcPr marL="91440" marR="91440" marT="45720" marB="45720">
+                    <a:lnL w="2540" cap="flat" cmpd="sng" algn="ctr">
+                      <a:solidFill>
+                        <a:srgbClr val="EEEEEE"/>
+                      </a:solidFill>
+                      <a:prstDash val="solid"/>
+                      <a:round/>
+                      <a:headEnd type="none" w="med" len="med"/>
+                      <a:tailEnd type="none" w="med" len="med"/>
+                    </a:lnL>
+                    <a:lnR w="2540" cap="flat" cmpd="sng" algn="ctr">
+                      <a:solidFill>
+                        <a:srgbClr val="EEEEEE"/>
+                      </a:solidFill>
+                      <a:prstDash val="solid"/>
+                      <a:round/>
+                      <a:headEnd type="none" w="med" len="med"/>
+                      <a:tailEnd type="none" w="med" len="med"/>
+                    </a:lnR>
+                    <a:lnT w="2540" cap="flat" cmpd="sng" algn="ctr">
+                      <a:solidFill>
+                        <a:srgbClr val="EEEEEE"/>
+                      </a:solidFill>
+                      <a:prstDash val="solid"/>
+                      <a:round/>
+                      <a:headEnd type="none" w="med" len="med"/>
+                      <a:tailEnd type="none" w="med" len="med"/>
+                    </a:lnT>
+                    <a:lnB w="2540" cap="flat" cmpd="sng" algn="ctr">
+                      <a:solidFill>
+                        <a:srgbClr val="EEEEEE"/>
+                      </a:solidFill>
+                      <a:prstDash val="solid"/>
+                      <a:round/>
+                      <a:headEnd type="none" w="med" len="med"/>
+                      <a:tailEnd type="none" w="med" len="med"/>
+                    </a:lnB>
+                  </a:tcPr>
+                </a:tc>
+                <a:tc>
+                  <a:txBody>
+                    <a:bodyPr/>
+                    <a:lstStyle/>
+                    <a:p>
+                      <a:pPr algn="ctr" indent="0" marL="0">
+                        <a:buNone/>
+                      </a:pPr>
+                      <a:r>
+                        <a:rPr lang="en-US" sz="500" dirty="0">
+                          <a:solidFill>
+                            <a:srgbClr val="000000"/>
+                          </a:solidFill>
+                          <a:latin typeface="Calibri" pitchFamily="34" charset="0"/>
+                          <a:ea typeface="Calibri" pitchFamily="34" charset="-122"/>
+                          <a:cs typeface="Calibri" pitchFamily="34" charset="-120"/>
+                        </a:rPr>
+                        <a:t>0.63%</a:t>
+                      </a:r>
+                      <a:endParaRPr lang="en-US" sz="500" dirty="0">
+                        <a:latin typeface="Calibri" charset="0"/>
+                        <a:ea typeface="Calibri" charset="0"/>
+                        <a:cs typeface="Calibri" charset="0"/>
+                      </a:endParaRPr>
+                    </a:p>
+                  </a:txBody>
+                  <a:tcPr marL="91440" marR="91440" marT="45720" marB="45720">
+                    <a:lnL w="2540" cap="flat" cmpd="sng" algn="ctr">
+                      <a:solidFill>
+                        <a:srgbClr val="EEEEEE"/>
+                      </a:solidFill>
+                      <a:prstDash val="solid"/>
+                      <a:round/>
+                      <a:headEnd type="none" w="med" len="med"/>
+                      <a:tailEnd type="none" w="med" len="med"/>
+                    </a:lnL>
+                    <a:lnR w="2540" cap="flat" cmpd="sng" algn="ctr">
+                      <a:solidFill>
+                        <a:srgbClr val="EEEEEE"/>
+                      </a:solidFill>
+                      <a:prstDash val="solid"/>
+                      <a:round/>
+                      <a:headEnd type="none" w="med" len="med"/>
+                      <a:tailEnd type="none" w="med" len="med"/>
+                    </a:lnR>
+                    <a:lnT w="2540" cap="flat" cmpd="sng" algn="ctr">
+                      <a:solidFill>
+                        <a:srgbClr val="EEEEEE"/>
+                      </a:solidFill>
+                      <a:prstDash val="solid"/>
+                      <a:round/>
+                      <a:headEnd type="none" w="med" len="med"/>
+                      <a:tailEnd type="none" w="med" len="med"/>
+                    </a:lnT>
+                    <a:lnB w="2540" cap="flat" cmpd="sng" algn="ctr">
+                      <a:solidFill>
+                        <a:srgbClr val="EEEEEE"/>
+                      </a:solidFill>
+                      <a:prstDash val="solid"/>
+                      <a:round/>
+                      <a:headEnd type="none" w="med" len="med"/>
+                      <a:tailEnd type="none" w="med" len="med"/>
+                    </a:lnB>
+                  </a:tcPr>
+                </a:tc>
+                <a:tc>
+                  <a:txBody>
+                    <a:bodyPr/>
+                    <a:lstStyle/>
+                    <a:p>
+                      <a:pPr algn="ctr" indent="0" marL="0">
+                        <a:buNone/>
+                      </a:pPr>
+                      <a:r>
+                        <a:rPr lang="en-US" sz="500" dirty="0">
+                          <a:solidFill>
+                            <a:srgbClr val="000000"/>
+                          </a:solidFill>
+                          <a:latin typeface="Calibri" pitchFamily="34" charset="0"/>
+                          <a:ea typeface="Calibri" pitchFamily="34" charset="-122"/>
+                          <a:cs typeface="Calibri" pitchFamily="34" charset="-120"/>
+                        </a:rPr>
+                        <a:t>0.66%</a:t>
+                      </a:r>
+                      <a:endParaRPr lang="en-US" sz="500" dirty="0">
+                        <a:latin typeface="Calibri" charset="0"/>
+                        <a:ea typeface="Calibri" charset="0"/>
+                        <a:cs typeface="Calibri" charset="0"/>
+                      </a:endParaRPr>
+                    </a:p>
+                  </a:txBody>
+                  <a:tcPr marL="91440" marR="91440" marT="45720" marB="45720">
+                    <a:lnL w="2540" cap="flat" cmpd="sng" algn="ctr">
+                      <a:solidFill>
+                        <a:srgbClr val="EEEEEE"/>
+                      </a:solidFill>
+                      <a:prstDash val="solid"/>
+                      <a:round/>
+                      <a:headEnd type="none" w="med" len="med"/>
+                      <a:tailEnd type="none" w="med" len="med"/>
+                    </a:lnL>
+                    <a:lnR w="2540" cap="flat" cmpd="sng" algn="ctr">
+                      <a:solidFill>
+                        <a:srgbClr val="EEEEEE"/>
+                      </a:solidFill>
+                      <a:prstDash val="solid"/>
+                      <a:round/>
+                      <a:headEnd type="none" w="med" len="med"/>
+                      <a:tailEnd type="none" w="med" len="med"/>
+                    </a:lnR>
+                    <a:lnT w="2540" cap="flat" cmpd="sng" algn="ctr">
+                      <a:solidFill>
+                        <a:srgbClr val="EEEEEE"/>
+                      </a:solidFill>
+                      <a:prstDash val="solid"/>
+                      <a:round/>
+                      <a:headEnd type="none" w="med" len="med"/>
+                      <a:tailEnd type="none" w="med" len="med"/>
+                    </a:lnT>
+                    <a:lnB w="2540" cap="flat" cmpd="sng" algn="ctr">
+                      <a:solidFill>
+                        <a:srgbClr val="EEEEEE"/>
+                      </a:solidFill>
+                      <a:prstDash val="solid"/>
+                      <a:round/>
+                      <a:headEnd type="none" w="med" len="med"/>
+                      <a:tailEnd type="none" w="med" len="med"/>
+                    </a:lnB>
+                  </a:tcPr>
+                </a:tc>
+                <a:tc>
+                  <a:txBody>
+                    <a:bodyPr/>
+                    <a:lstStyle/>
+                    <a:p>
+                      <a:pPr algn="ctr" indent="0" marL="0">
+                        <a:buNone/>
+                      </a:pPr>
+                      <a:r>
+                        <a:rPr lang="en-US" sz="500" dirty="0">
+                          <a:solidFill>
+                            <a:srgbClr val="000000"/>
+                          </a:solidFill>
+                          <a:latin typeface="Calibri" pitchFamily="34" charset="0"/>
+                          <a:ea typeface="Calibri" pitchFamily="34" charset="-122"/>
+                          <a:cs typeface="Calibri" pitchFamily="34" charset="-120"/>
+                        </a:rPr>
+                        <a:t>0.55%</a:t>
+                      </a:r>
+                      <a:endParaRPr lang="en-US" sz="500" dirty="0">
+                        <a:latin typeface="Calibri" charset="0"/>
+                        <a:ea typeface="Calibri" charset="0"/>
+                        <a:cs typeface="Calibri" charset="0"/>
+                      </a:endParaRPr>
+                    </a:p>
+                  </a:txBody>
+                  <a:tcPr marL="91440" marR="91440" marT="45720" marB="45720">
+                    <a:lnL w="2540" cap="flat" cmpd="sng" algn="ctr">
+                      <a:solidFill>
+                        <a:srgbClr val="EEEEEE"/>
+                      </a:solidFill>
+                      <a:prstDash val="solid"/>
+                      <a:round/>
+                      <a:headEnd type="none" w="med" len="med"/>
+                      <a:tailEnd type="none" w="med" len="med"/>
+                    </a:lnL>
+                    <a:lnR w="2540" cap="flat" cmpd="sng" algn="ctr">
+                      <a:solidFill>
+                        <a:srgbClr val="EEEEEE"/>
+                      </a:solidFill>
+                      <a:prstDash val="solid"/>
+                      <a:round/>
+                      <a:headEnd type="none" w="med" len="med"/>
+                      <a:tailEnd type="none" w="med" len="med"/>
+                    </a:lnR>
+                    <a:lnT w="2540" cap="flat" cmpd="sng" algn="ctr">
+                      <a:solidFill>
+                        <a:srgbClr val="EEEEEE"/>
+                      </a:solidFill>
+                      <a:prstDash val="solid"/>
+                      <a:round/>
+                      <a:headEnd type="none" w="med" len="med"/>
+                      <a:tailEnd type="none" w="med" len="med"/>
+                    </a:lnT>
+                    <a:lnB w="2540" cap="flat" cmpd="sng" algn="ctr">
+                      <a:solidFill>
+                        <a:srgbClr val="EEEEEE"/>
+                      </a:solidFill>
+                      <a:prstDash val="solid"/>
+                      <a:round/>
+                      <a:headEnd type="none" w="med" len="med"/>
+                      <a:tailEnd type="none" w="med" len="med"/>
+                    </a:lnB>
+                  </a:tcPr>
+                </a:tc>
+                <a:tc>
+                  <a:txBody>
+                    <a:bodyPr/>
+                    <a:lstStyle/>
+                    <a:p>
+                      <a:pPr algn="ctr" indent="0" marL="0">
+                        <a:buNone/>
+                      </a:pPr>
+                      <a:r>
+                        <a:rPr lang="en-US" sz="500" dirty="0">
+                          <a:solidFill>
+                            <a:srgbClr val="000000"/>
+                          </a:solidFill>
+                          <a:latin typeface="Calibri" pitchFamily="34" charset="0"/>
+                          <a:ea typeface="Calibri" pitchFamily="34" charset="-122"/>
+                          <a:cs typeface="Calibri" pitchFamily="34" charset="-120"/>
+                        </a:rPr>
+                        <a:t>0.47%</a:t>
+                      </a:r>
+                      <a:endParaRPr lang="en-US" sz="500" dirty="0">
+                        <a:latin typeface="Calibri" charset="0"/>
+                        <a:ea typeface="Calibri" charset="0"/>
+                        <a:cs typeface="Calibri" charset="0"/>
+                      </a:endParaRPr>
+                    </a:p>
+                  </a:txBody>
+                  <a:tcPr marL="91440" marR="91440" marT="45720" marB="45720">
+                    <a:lnL w="2540" cap="flat" cmpd="sng" algn="ctr">
+                      <a:solidFill>
+                        <a:srgbClr val="EEEEEE"/>
+                      </a:solidFill>
+                      <a:prstDash val="solid"/>
+                      <a:round/>
+                      <a:headEnd type="none" w="med" len="med"/>
+                      <a:tailEnd type="none" w="med" len="med"/>
+                    </a:lnL>
+                    <a:lnR w="2540" cap="flat" cmpd="sng" algn="ctr">
+                      <a:solidFill>
+                        <a:srgbClr val="EEEEEE"/>
+                      </a:solidFill>
+                      <a:prstDash val="solid"/>
+                      <a:round/>
+                      <a:headEnd type="none" w="med" len="med"/>
+                      <a:tailEnd type="none" w="med" len="med"/>
+                    </a:lnR>
+                    <a:lnT w="2540" cap="flat" cmpd="sng" algn="ctr">
+                      <a:solidFill>
+                        <a:srgbClr val="EEEEEE"/>
+                      </a:solidFill>
+                      <a:prstDash val="solid"/>
+                      <a:round/>
+                      <a:headEnd type="none" w="med" len="med"/>
+                      <a:tailEnd type="none" w="med" len="med"/>
+                    </a:lnT>
+                    <a:lnB w="2540" cap="flat" cmpd="sng" algn="ctr">
+                      <a:solidFill>
+                        <a:srgbClr val="EEEEEE"/>
+                      </a:solidFill>
+                      <a:prstDash val="solid"/>
+                      <a:round/>
+                      <a:headEnd type="none" w="med" len="med"/>
+                      <a:tailEnd type="none" w="med" len="med"/>
+                    </a:lnB>
+                  </a:tcPr>
+                </a:tc>
+                <a:tc>
+                  <a:txBody>
+                    <a:bodyPr/>
+                    <a:lstStyle/>
+                    <a:p>
+                      <a:pPr algn="ctr" indent="0" marL="0">
+                        <a:buNone/>
+                      </a:pPr>
+                      <a:r>
+                        <a:rPr lang="en-US" sz="500" dirty="0">
+                          <a:solidFill>
+                            <a:srgbClr val="000000"/>
+                          </a:solidFill>
+                          <a:latin typeface="Calibri" pitchFamily="34" charset="0"/>
+                          <a:ea typeface="Calibri" pitchFamily="34" charset="-122"/>
+                          <a:cs typeface="Calibri" pitchFamily="34" charset="-120"/>
+                        </a:rPr>
+                        <a:t>0.40%</a:t>
+                      </a:r>
+                      <a:endParaRPr lang="en-US" sz="500" dirty="0">
+                        <a:latin typeface="Calibri" charset="0"/>
+                        <a:ea typeface="Calibri" charset="0"/>
+                        <a:cs typeface="Calibri" charset="0"/>
+                      </a:endParaRPr>
+                    </a:p>
+                  </a:txBody>
+                  <a:tcPr marL="91440" marR="91440" marT="45720" marB="45720">
+                    <a:lnL w="2540" cap="flat" cmpd="sng" algn="ctr">
+                      <a:solidFill>
+                        <a:srgbClr val="EEEEEE"/>
+                      </a:solidFill>
+                      <a:prstDash val="solid"/>
+                      <a:round/>
+                      <a:headEnd type="none" w="med" len="med"/>
+                      <a:tailEnd type="none" w="med" len="med"/>
+                    </a:lnL>
+                    <a:lnR w="2540" cap="flat" cmpd="sng" algn="ctr">
+                      <a:solidFill>
+                        <a:srgbClr val="EEEEEE"/>
+                      </a:solidFill>
+                      <a:prstDash val="solid"/>
+                      <a:round/>
+                      <a:headEnd type="none" w="med" len="med"/>
+                      <a:tailEnd type="none" w="med" len="med"/>
+                    </a:lnR>
+                    <a:lnT w="2540" cap="flat" cmpd="sng" algn="ctr">
+                      <a:solidFill>
+                        <a:srgbClr val="EEEEEE"/>
+                      </a:solidFill>
+                      <a:prstDash val="solid"/>
+                      <a:round/>
+                      <a:headEnd type="none" w="med" len="med"/>
+                      <a:tailEnd type="none" w="med" len="med"/>
+                    </a:lnT>
+                    <a:lnB w="2540" cap="flat" cmpd="sng" algn="ctr">
+                      <a:solidFill>
+                        <a:srgbClr val="EEEEEE"/>
+                      </a:solidFill>
+                      <a:prstDash val="solid"/>
+                      <a:round/>
+                      <a:headEnd type="none" w="med" len="med"/>
+                      <a:tailEnd type="none" w="med" len="med"/>
+                    </a:lnB>
+                  </a:tcPr>
+                </a:tc>
+                <a:tc>
+                  <a:txBody>
+                    <a:bodyPr/>
+                    <a:lstStyle/>
+                    <a:p>
+                      <a:pPr algn="ctr" indent="0" marL="0">
+                        <a:buNone/>
+                      </a:pPr>
+                      <a:r>
+                        <a:rPr lang="en-US" sz="500" dirty="0">
+                          <a:solidFill>
+                            <a:srgbClr val="000000"/>
+                          </a:solidFill>
+                          <a:latin typeface="Calibri" pitchFamily="34" charset="0"/>
+                          <a:ea typeface="Calibri" pitchFamily="34" charset="-122"/>
+                          <a:cs typeface="Calibri" pitchFamily="34" charset="-120"/>
+                        </a:rPr>
+                        <a:t>0.47%</a:t>
+                      </a:r>
+                      <a:endParaRPr lang="en-US" sz="500" dirty="0">
+                        <a:latin typeface="Calibri" charset="0"/>
+                        <a:ea typeface="Calibri" charset="0"/>
+                        <a:cs typeface="Calibri" charset="0"/>
+                      </a:endParaRPr>
+                    </a:p>
+                  </a:txBody>
+                  <a:tcPr marL="91440" marR="91440" marT="45720" marB="45720">
+                    <a:lnL w="2540" cap="flat" cmpd="sng" algn="ctr">
+                      <a:solidFill>
+                        <a:srgbClr val="EEEEEE"/>
+                      </a:solidFill>
+                      <a:prstDash val="solid"/>
+                      <a:round/>
+                      <a:headEnd type="none" w="med" len="med"/>
+                      <a:tailEnd type="none" w="med" len="med"/>
+                    </a:lnL>
+                    <a:lnR w="2540" cap="flat" cmpd="sng" algn="ctr">
+                      <a:solidFill>
+                        <a:srgbClr val="EEEEEE"/>
+                      </a:solidFill>
+                      <a:prstDash val="solid"/>
+                      <a:round/>
+                      <a:headEnd type="none" w="med" len="med"/>
+                      <a:tailEnd type="none" w="med" len="med"/>
+                    </a:lnR>
+                    <a:lnT w="2540" cap="flat" cmpd="sng" algn="ctr">
+                      <a:solidFill>
+                        <a:srgbClr val="EEEEEE"/>
+                      </a:solidFill>
+                      <a:prstDash val="solid"/>
+                      <a:round/>
+                      <a:headEnd type="none" w="med" len="med"/>
+                      <a:tailEnd type="none" w="med" len="med"/>
+                    </a:lnT>
+                    <a:lnB w="2540" cap="flat" cmpd="sng" algn="ctr">
+                      <a:solidFill>
+                        <a:srgbClr val="EEEEEE"/>
+                      </a:solidFill>
+                      <a:prstDash val="solid"/>
+                      <a:round/>
+                      <a:headEnd type="none" w="med" len="med"/>
+                      <a:tailEnd type="none" w="med" len="med"/>
+                    </a:lnB>
+                  </a:tcPr>
+                </a:tc>
+                <a:tc>
+                  <a:txBody>
+                    <a:bodyPr/>
+                    <a:lstStyle/>
+                    <a:p>
+                      <a:pPr algn="ctr" indent="0" marL="0">
+                        <a:buNone/>
+                      </a:pPr>
+                      <a:r>
+                        <a:rPr lang="en-US" sz="500" dirty="0">
+                          <a:solidFill>
+                            <a:srgbClr val="000000"/>
+                          </a:solidFill>
+                          <a:latin typeface="Calibri" pitchFamily="34" charset="0"/>
+                          <a:ea typeface="Calibri" pitchFamily="34" charset="-122"/>
+                          <a:cs typeface="Calibri" pitchFamily="34" charset="-120"/>
+                        </a:rPr>
+                        <a:t>0.55%</a:t>
+                      </a:r>
+                      <a:endParaRPr lang="en-US" sz="500" dirty="0">
+                        <a:latin typeface="Calibri" charset="0"/>
+                        <a:ea typeface="Calibri" charset="0"/>
+                        <a:cs typeface="Calibri" charset="0"/>
+                      </a:endParaRPr>
+                    </a:p>
+                  </a:txBody>
+                  <a:tcPr marL="91440" marR="91440" marT="45720" marB="45720">
+                    <a:lnL w="2540" cap="flat" cmpd="sng" algn="ctr">
+                      <a:solidFill>
+                        <a:srgbClr val="EEEEEE"/>
+                      </a:solidFill>
+                      <a:prstDash val="solid"/>
+                      <a:round/>
+                      <a:headEnd type="none" w="med" len="med"/>
+                      <a:tailEnd type="none" w="med" len="med"/>
+                    </a:lnL>
+                    <a:lnR w="2540" cap="flat" cmpd="sng" algn="ctr">
+                      <a:solidFill>
+                        <a:srgbClr val="EEEEEE"/>
+                      </a:solidFill>
+                      <a:prstDash val="solid"/>
+                      <a:round/>
+                      <a:headEnd type="none" w="med" len="med"/>
+                      <a:tailEnd type="none" w="med" len="med"/>
+                    </a:lnR>
+                    <a:lnT w="2540" cap="flat" cmpd="sng" algn="ctr">
+                      <a:solidFill>
+                        <a:srgbClr val="EEEEEE"/>
+                      </a:solidFill>
+                      <a:prstDash val="solid"/>
+                      <a:round/>
+                      <a:headEnd type="none" w="med" len="med"/>
+                      <a:tailEnd type="none" w="med" len="med"/>
+                    </a:lnT>
+                    <a:lnB w="2540" cap="flat" cmpd="sng" algn="ctr">
+                      <a:solidFill>
+                        <a:srgbClr val="EEEEEE"/>
+                      </a:solidFill>
+                      <a:prstDash val="solid"/>
+                      <a:round/>
+                      <a:headEnd type="none" w="med" len="med"/>
+                      <a:tailEnd type="none" w="med" len="med"/>
+                    </a:lnB>
+                  </a:tcPr>
+                </a:tc>
+                <a:tc>
+                  <a:txBody>
+                    <a:bodyPr/>
+                    <a:lstStyle/>
+                    <a:p>
+                      <a:pPr algn="ctr" indent="0" marL="0">
+                        <a:buNone/>
+                      </a:pPr>
+                      <a:r>
+                        <a:rPr lang="en-US" sz="500" dirty="0">
+                          <a:solidFill>
+                            <a:srgbClr val="000000"/>
+                          </a:solidFill>
+                          <a:latin typeface="Calibri" pitchFamily="34" charset="0"/>
+                          <a:ea typeface="Calibri" pitchFamily="34" charset="-122"/>
+                          <a:cs typeface="Calibri" pitchFamily="34" charset="-120"/>
+                        </a:rPr>
+                        <a:t>0.45%</a:t>
+                      </a:r>
+                      <a:endParaRPr lang="en-US" sz="500" dirty="0">
+                        <a:latin typeface="Calibri" charset="0"/>
+                        <a:ea typeface="Calibri" charset="0"/>
+                        <a:cs typeface="Calibri" charset="0"/>
+                      </a:endParaRPr>
+                    </a:p>
+                  </a:txBody>
+                  <a:tcPr marL="91440" marR="91440" marT="45720" marB="45720">
+                    <a:lnL w="2540" cap="flat" cmpd="sng" algn="ctr">
+                      <a:solidFill>
+                        <a:srgbClr val="EEEEEE"/>
+                      </a:solidFill>
+                      <a:prstDash val="solid"/>
+                      <a:round/>
+                      <a:headEnd type="none" w="med" len="med"/>
+                      <a:tailEnd type="none" w="med" len="med"/>
+                    </a:lnL>
+                    <a:lnR w="2540" cap="flat" cmpd="sng" algn="ctr">
+                      <a:solidFill>
+                        <a:srgbClr val="EEEEEE"/>
+                      </a:solidFill>
+                      <a:prstDash val="solid"/>
+                      <a:round/>
+                      <a:headEnd type="none" w="med" len="med"/>
+                      <a:tailEnd type="none" w="med" len="med"/>
+                    </a:lnR>
+                    <a:lnT w="2540" cap="flat" cmpd="sng" algn="ctr">
+                      <a:solidFill>
+                        <a:srgbClr val="EEEEEE"/>
+                      </a:solidFill>
+                      <a:prstDash val="solid"/>
+                      <a:round/>
+                      <a:headEnd type="none" w="med" len="med"/>
+                      <a:tailEnd type="none" w="med" len="med"/>
+                    </a:lnT>
+                    <a:lnB w="2540" cap="flat" cmpd="sng" algn="ctr">
+                      <a:solidFill>
+                        <a:srgbClr val="EEEEEE"/>
+                      </a:solidFill>
+                      <a:prstDash val="solid"/>
+                      <a:round/>
+                      <a:headEnd type="none" w="med" len="med"/>
+                      <a:tailEnd type="none" w="med" len="med"/>
+                    </a:lnB>
+                  </a:tcPr>
+                </a:tc>
+                <a:tc>
+                  <a:txBody>
+                    <a:bodyPr/>
+                    <a:lstStyle/>
+                    <a:p>
+                      <a:pPr algn="ctr" indent="0" marL="0">
+                        <a:buNone/>
+                      </a:pPr>
+                      <a:r>
+                        <a:rPr lang="en-US" sz="500" dirty="0">
+                          <a:solidFill>
+                            <a:srgbClr val="000000"/>
+                          </a:solidFill>
+                          <a:latin typeface="Calibri" pitchFamily="34" charset="0"/>
+                          <a:ea typeface="Calibri" pitchFamily="34" charset="-122"/>
+                          <a:cs typeface="Calibri" pitchFamily="34" charset="-120"/>
+                        </a:rPr>
+                        <a:t>0.28%</a:t>
+                      </a:r>
+                      <a:endParaRPr lang="en-US" sz="500" dirty="0">
+                        <a:latin typeface="Calibri" charset="0"/>
+                        <a:ea typeface="Calibri" charset="0"/>
+                        <a:cs typeface="Calibri" charset="0"/>
+                      </a:endParaRPr>
+                    </a:p>
+                  </a:txBody>
+                  <a:tcPr marL="91440" marR="91440" marT="45720" marB="45720">
+                    <a:lnL w="2540" cap="flat" cmpd="sng" algn="ctr">
+                      <a:solidFill>
+                        <a:srgbClr val="EEEEEE"/>
+                      </a:solidFill>
+                      <a:prstDash val="solid"/>
+                      <a:round/>
+                      <a:headEnd type="none" w="med" len="med"/>
+                      <a:tailEnd type="none" w="med" len="med"/>
+                    </a:lnL>
+                    <a:lnR w="2540" cap="flat" cmpd="sng" algn="ctr">
+                      <a:solidFill>
+                        <a:srgbClr val="EEEEEE"/>
+                      </a:solidFill>
+                      <a:prstDash val="solid"/>
+                      <a:round/>
+                      <a:headEnd type="none" w="med" len="med"/>
+                      <a:tailEnd type="none" w="med" len="med"/>
+                    </a:lnR>
+                    <a:lnT w="2540" cap="flat" cmpd="sng" algn="ctr">
+                      <a:solidFill>
+                        <a:srgbClr val="EEEEEE"/>
+                      </a:solidFill>
+                      <a:prstDash val="solid"/>
+                      <a:round/>
+                      <a:headEnd type="none" w="med" len="med"/>
+                      <a:tailEnd type="none" w="med" len="med"/>
+                    </a:lnT>
+                    <a:lnB w="2540" cap="flat" cmpd="sng" algn="ctr">
+                      <a:solidFill>
+                        <a:srgbClr val="EEEEEE"/>
+                      </a:solidFill>
+                      <a:prstDash val="solid"/>
+                      <a:round/>
+                      <a:headEnd type="none" w="med" len="med"/>
+                      <a:tailEnd type="none" w="med" len="med"/>
+                    </a:lnB>
+                  </a:tcPr>
+                </a:tc>
+                <a:tc>
+                  <a:txBody>
+                    <a:bodyPr/>
+                    <a:lstStyle/>
+                    <a:p>
+                      <a:pPr algn="ctr" indent="0" marL="0">
+                        <a:buNone/>
+                      </a:pPr>
+                      <a:r>
+                        <a:rPr lang="en-US" sz="500" dirty="0">
+                          <a:solidFill>
+                            <a:srgbClr val="000000"/>
+                          </a:solidFill>
+                          <a:latin typeface="Calibri" pitchFamily="34" charset="0"/>
+                          <a:ea typeface="Calibri" pitchFamily="34" charset="-122"/>
+                          <a:cs typeface="Calibri" pitchFamily="34" charset="-120"/>
+                        </a:rPr>
+                        <a:t>0.42%</a:t>
+                      </a:r>
+                      <a:endParaRPr lang="en-US" sz="500" dirty="0">
+                        <a:latin typeface="Calibri" charset="0"/>
+                        <a:ea typeface="Calibri" charset="0"/>
+                        <a:cs typeface="Calibri" charset="0"/>
+                      </a:endParaRPr>
+                    </a:p>
+                  </a:txBody>
+                  <a:tcPr marL="91440" marR="91440" marT="45720" marB="45720">
+                    <a:lnL w="2540" cap="flat" cmpd="sng" algn="ctr">
+                      <a:solidFill>
+                        <a:srgbClr val="EEEEEE"/>
+                      </a:solidFill>
+                      <a:prstDash val="solid"/>
+                      <a:round/>
+                      <a:headEnd type="none" w="med" len="med"/>
+                      <a:tailEnd type="none" w="med" len="med"/>
+                    </a:lnL>
+                    <a:lnR w="2540" cap="flat" cmpd="sng" algn="ctr">
+                      <a:solidFill>
+                        <a:srgbClr val="EEEEEE"/>
+                      </a:solidFill>
+                      <a:prstDash val="solid"/>
+                      <a:round/>
+                      <a:headEnd type="none" w="med" len="med"/>
+                      <a:tailEnd type="none" w="med" len="med"/>
+                    </a:lnR>
+                    <a:lnT w="2540" cap="flat" cmpd="sng" algn="ctr">
+                      <a:solidFill>
+                        <a:srgbClr val="EEEEEE"/>
+                      </a:solidFill>
+                      <a:prstDash val="solid"/>
+                      <a:round/>
+                      <a:headEnd type="none" w="med" len="med"/>
+                      <a:tailEnd type="none" w="med" len="med"/>
+                    </a:lnT>
+                    <a:lnB w="2540" cap="flat" cmpd="sng" algn="ctr">
+                      <a:solidFill>
+                        <a:srgbClr val="EEEEEE"/>
+                      </a:solidFill>
+                      <a:prstDash val="solid"/>
+                      <a:round/>
+                      <a:headEnd type="none" w="med" len="med"/>
+                      <a:tailEnd type="none" w="med" len="med"/>
+                    </a:lnB>
+                  </a:tcPr>
+                </a:tc>
+                <a:tc>
+                  <a:txBody>
+                    <a:bodyPr/>
+                    <a:lstStyle/>
+                    <a:p>
+                      <a:pPr algn="ctr" indent="0" marL="0">
+                        <a:buNone/>
+                      </a:pPr>
+                      <a:r>
+                        <a:rPr lang="en-US" sz="500" b="1" dirty="0">
+                          <a:solidFill>
+                            <a:srgbClr val="000000"/>
+                          </a:solidFill>
+                          <a:latin typeface="Calibri" pitchFamily="34" charset="0"/>
+                          <a:ea typeface="Calibri" pitchFamily="34" charset="-122"/>
+                          <a:cs typeface="Calibri" pitchFamily="34" charset="-120"/>
+                        </a:rPr>
+                        <a:t>6.32%</a:t>
+                      </a:r>
+                      <a:endParaRPr lang="en-US" sz="500" dirty="0">
+                        <a:latin typeface="Calibri" charset="0"/>
+                        <a:ea typeface="Calibri" charset="0"/>
+                        <a:cs typeface="Calibri" charset="0"/>
+                      </a:endParaRPr>
+                    </a:p>
+                  </a:txBody>
+                  <a:tcPr marL="91440" marR="91440" marT="45720" marB="45720">
+                    <a:lnL w="2540" cap="flat" cmpd="sng" algn="ctr">
+                      <a:solidFill>
+                        <a:srgbClr val="EEEEEE"/>
+                      </a:solidFill>
+                      <a:prstDash val="solid"/>
+                      <a:round/>
+                      <a:headEnd type="none" w="med" len="med"/>
+                      <a:tailEnd type="none" w="med" len="med"/>
+                    </a:lnL>
+                    <a:lnR w="2540" cap="flat" cmpd="sng" algn="ctr">
+                      <a:solidFill>
+                        <a:srgbClr val="EEEEEE"/>
+                      </a:solidFill>
+                      <a:prstDash val="solid"/>
+                      <a:round/>
+                      <a:headEnd type="none" w="med" len="med"/>
+                      <a:tailEnd type="none" w="med" len="med"/>
+                    </a:lnR>
+                    <a:lnT w="2540" cap="flat" cmpd="sng" algn="ctr">
+                      <a:solidFill>
+                        <a:srgbClr val="EEEEEE"/>
+                      </a:solidFill>
+                      <a:prstDash val="solid"/>
+                      <a:round/>
+                      <a:headEnd type="none" w="med" len="med"/>
+                      <a:tailEnd type="none" w="med" len="med"/>
+                    </a:lnT>
+                    <a:lnB w="2540" cap="flat" cmpd="sng" algn="ctr">
+                      <a:solidFill>
+                        <a:srgbClr val="EEEEEE"/>
+                      </a:solidFill>
+                      <a:prstDash val="solid"/>
+                      <a:round/>
+                      <a:headEnd type="none" w="med" len="med"/>
+                      <a:tailEnd type="none" w="med" len="med"/>
+                    </a:lnB>
+                  </a:tcPr>
+                </a:tc>
+              </a:tr>
+              <a:tr h="123444">
+                <a:tc>
+                  <a:txBody>
+                    <a:bodyPr/>
+                    <a:lstStyle/>
+                    <a:p>
+                      <a:pPr algn="l" indent="0" marL="0">
+                        <a:buNone/>
+                      </a:pPr>
+                      <a:r>
+                        <a:rPr lang="en-US" sz="500" b="1" dirty="0">
+                          <a:solidFill>
+                            <a:srgbClr val="000000"/>
+                          </a:solidFill>
+                          <a:latin typeface="Calibri" pitchFamily="34" charset="0"/>
+                          <a:ea typeface="Calibri" pitchFamily="34" charset="-122"/>
+                          <a:cs typeface="Calibri" pitchFamily="34" charset="-120"/>
+                        </a:rPr>
+                        <a:t>2025</a:t>
+                      </a:r>
+                      <a:endParaRPr lang="en-US" sz="500" dirty="0">
+                        <a:latin typeface="Calibri" charset="0"/>
+                        <a:ea typeface="Calibri" charset="0"/>
+                        <a:cs typeface="Calibri" charset="0"/>
+                      </a:endParaRPr>
+                    </a:p>
+                  </a:txBody>
+                  <a:tcPr marL="91440" marR="91440" marT="45720" marB="45720">
+                    <a:lnL w="2540" cap="flat" cmpd="sng" algn="ctr">
+                      <a:solidFill>
+                        <a:srgbClr val="EEEEEE"/>
+                      </a:solidFill>
+                      <a:prstDash val="solid"/>
+                      <a:round/>
+                      <a:headEnd type="none" w="med" len="med"/>
+                      <a:tailEnd type="none" w="med" len="med"/>
+                    </a:lnL>
+                    <a:lnR w="2540" cap="flat" cmpd="sng" algn="ctr">
+                      <a:solidFill>
+                        <a:srgbClr val="EEEEEE"/>
+                      </a:solidFill>
+                      <a:prstDash val="solid"/>
+                      <a:round/>
+                      <a:headEnd type="none" w="med" len="med"/>
+                      <a:tailEnd type="none" w="med" len="med"/>
+                    </a:lnR>
+                    <a:lnT w="2540" cap="flat" cmpd="sng" algn="ctr">
+                      <a:solidFill>
+                        <a:srgbClr val="EEEEEE"/>
+                      </a:solidFill>
+                      <a:prstDash val="solid"/>
+                      <a:round/>
+                      <a:headEnd type="none" w="med" len="med"/>
+                      <a:tailEnd type="none" w="med" len="med"/>
+                    </a:lnT>
+                    <a:lnB w="2540" cap="flat" cmpd="sng" algn="ctr">
+                      <a:solidFill>
+                        <a:srgbClr val="EEEEEE"/>
+                      </a:solidFill>
+                      <a:prstDash val="solid"/>
+                      <a:round/>
+                      <a:headEnd type="none" w="med" len="med"/>
+                      <a:tailEnd type="none" w="med" len="med"/>
+                    </a:lnB>
+                  </a:tcPr>
+                </a:tc>
+                <a:tc>
+                  <a:txBody>
+                    <a:bodyPr/>
+                    <a:lstStyle/>
+                    <a:p>
+                      <a:pPr algn="l" indent="0" marL="0">
+                        <a:buNone/>
+                      </a:pPr>
+                      <a:r>
+                        <a:rPr lang="en-US" sz="500" dirty="0">
+                          <a:solidFill>
+                            <a:srgbClr val="777777"/>
+                          </a:solidFill>
+                          <a:latin typeface="Calibri" pitchFamily="34" charset="0"/>
+                          <a:ea typeface="Calibri" pitchFamily="34" charset="-122"/>
+                          <a:cs typeface="Calibri" pitchFamily="34" charset="-120"/>
+                        </a:rPr>
+                        <a:t>ICP</a:t>
                       </a:r>
                       <a:endParaRPr lang="en-US" sz="500" dirty="0">
                         <a:latin typeface="Calibri" charset="0"/>
@@ -9551,7 +12190,7 @@
                           <a:ea typeface="Calibri" pitchFamily="34" charset="-122"/>
                           <a:cs typeface="Calibri" pitchFamily="34" charset="-120"/>
                         </a:rPr>
-                        <a:t>0.44%</a:t>
+                        <a:t>0.39%</a:t>
                       </a:r>
                       <a:endParaRPr lang="en-US" sz="500" dirty="0">
                         <a:latin typeface="Calibri" charset="0"/>
@@ -9673,6 +12312,591 @@
                         <a:buNone/>
                       </a:pPr>
                       <a:r>
+                        <a:rPr lang="en-US" sz="500" dirty="0">
+                          <a:solidFill>
+                            <a:srgbClr val="777777"/>
+                          </a:solidFill>
+                          <a:latin typeface="Calibri" pitchFamily="34" charset="0"/>
+                          <a:ea typeface="Calibri" pitchFamily="34" charset="-122"/>
+                          <a:cs typeface="Calibri" pitchFamily="34" charset="-120"/>
+                        </a:rPr>
+                        <a:t>0.42%</a:t>
+                      </a:r>
+                      <a:endParaRPr lang="en-US" sz="500" dirty="0">
+                        <a:latin typeface="Calibri" charset="0"/>
+                        <a:ea typeface="Calibri" charset="0"/>
+                        <a:cs typeface="Calibri" charset="0"/>
+                      </a:endParaRPr>
+                    </a:p>
+                  </a:txBody>
+                  <a:tcPr marL="91440" marR="91440" marT="45720" marB="45720">
+                    <a:lnL w="2540" cap="flat" cmpd="sng" algn="ctr">
+                      <a:solidFill>
+                        <a:srgbClr val="EEEEEE"/>
+                      </a:solidFill>
+                      <a:prstDash val="solid"/>
+                      <a:round/>
+                      <a:headEnd type="none" w="med" len="med"/>
+                      <a:tailEnd type="none" w="med" len="med"/>
+                    </a:lnL>
+                    <a:lnR w="2540" cap="flat" cmpd="sng" algn="ctr">
+                      <a:solidFill>
+                        <a:srgbClr val="EEEEEE"/>
+                      </a:solidFill>
+                      <a:prstDash val="solid"/>
+                      <a:round/>
+                      <a:headEnd type="none" w="med" len="med"/>
+                      <a:tailEnd type="none" w="med" len="med"/>
+                    </a:lnR>
+                    <a:lnT w="2540" cap="flat" cmpd="sng" algn="ctr">
+                      <a:solidFill>
+                        <a:srgbClr val="EEEEEE"/>
+                      </a:solidFill>
+                      <a:prstDash val="solid"/>
+                      <a:round/>
+                      <a:headEnd type="none" w="med" len="med"/>
+                      <a:tailEnd type="none" w="med" len="med"/>
+                    </a:lnT>
+                    <a:lnB w="2540" cap="flat" cmpd="sng" algn="ctr">
+                      <a:solidFill>
+                        <a:srgbClr val="EEEEEE"/>
+                      </a:solidFill>
+                      <a:prstDash val="solid"/>
+                      <a:round/>
+                      <a:headEnd type="none" w="med" len="med"/>
+                      <a:tailEnd type="none" w="med" len="med"/>
+                    </a:lnB>
+                  </a:tcPr>
+                </a:tc>
+                <a:tc>
+                  <a:txBody>
+                    <a:bodyPr/>
+                    <a:lstStyle/>
+                    <a:p>
+                      <a:pPr algn="ctr" indent="0" marL="0">
+                        <a:buNone/>
+                      </a:pPr>
+                      <a:r>
+                        <a:rPr lang="en-US" sz="500" dirty="0">
+                          <a:solidFill>
+                            <a:srgbClr val="777777"/>
+                          </a:solidFill>
+                          <a:latin typeface="Calibri" pitchFamily="34" charset="0"/>
+                          <a:ea typeface="Calibri" pitchFamily="34" charset="-122"/>
+                          <a:cs typeface="Calibri" pitchFamily="34" charset="-120"/>
+                        </a:rPr>
+                        <a:t>0.42%</a:t>
+                      </a:r>
+                      <a:endParaRPr lang="en-US" sz="500" dirty="0">
+                        <a:latin typeface="Calibri" charset="0"/>
+                        <a:ea typeface="Calibri" charset="0"/>
+                        <a:cs typeface="Calibri" charset="0"/>
+                      </a:endParaRPr>
+                    </a:p>
+                  </a:txBody>
+                  <a:tcPr marL="91440" marR="91440" marT="45720" marB="45720">
+                    <a:lnL w="2540" cap="flat" cmpd="sng" algn="ctr">
+                      <a:solidFill>
+                        <a:srgbClr val="EEEEEE"/>
+                      </a:solidFill>
+                      <a:prstDash val="solid"/>
+                      <a:round/>
+                      <a:headEnd type="none" w="med" len="med"/>
+                      <a:tailEnd type="none" w="med" len="med"/>
+                    </a:lnL>
+                    <a:lnR w="2540" cap="flat" cmpd="sng" algn="ctr">
+                      <a:solidFill>
+                        <a:srgbClr val="EEEEEE"/>
+                      </a:solidFill>
+                      <a:prstDash val="solid"/>
+                      <a:round/>
+                      <a:headEnd type="none" w="med" len="med"/>
+                      <a:tailEnd type="none" w="med" len="med"/>
+                    </a:lnR>
+                    <a:lnT w="2540" cap="flat" cmpd="sng" algn="ctr">
+                      <a:solidFill>
+                        <a:srgbClr val="EEEEEE"/>
+                      </a:solidFill>
+                      <a:prstDash val="solid"/>
+                      <a:round/>
+                      <a:headEnd type="none" w="med" len="med"/>
+                      <a:tailEnd type="none" w="med" len="med"/>
+                    </a:lnT>
+                    <a:lnB w="2540" cap="flat" cmpd="sng" algn="ctr">
+                      <a:solidFill>
+                        <a:srgbClr val="EEEEEE"/>
+                      </a:solidFill>
+                      <a:prstDash val="solid"/>
+                      <a:round/>
+                      <a:headEnd type="none" w="med" len="med"/>
+                      <a:tailEnd type="none" w="med" len="med"/>
+                    </a:lnB>
+                  </a:tcPr>
+                </a:tc>
+                <a:tc>
+                  <a:txBody>
+                    <a:bodyPr/>
+                    <a:lstStyle/>
+                    <a:p>
+                      <a:pPr algn="ctr" indent="0" marL="0">
+                        <a:buNone/>
+                      </a:pPr>
+                      <a:r>
+                        <a:rPr lang="en-US" sz="500" dirty="0">
+                          <a:solidFill>
+                            <a:srgbClr val="777777"/>
+                          </a:solidFill>
+                          <a:latin typeface="Calibri" pitchFamily="34" charset="0"/>
+                          <a:ea typeface="Calibri" pitchFamily="34" charset="-122"/>
+                          <a:cs typeface="Calibri" pitchFamily="34" charset="-120"/>
+                        </a:rPr>
+                        <a:t>0.43%</a:t>
+                      </a:r>
+                      <a:endParaRPr lang="en-US" sz="500" dirty="0">
+                        <a:latin typeface="Calibri" charset="0"/>
+                        <a:ea typeface="Calibri" charset="0"/>
+                        <a:cs typeface="Calibri" charset="0"/>
+                      </a:endParaRPr>
+                    </a:p>
+                  </a:txBody>
+                  <a:tcPr marL="91440" marR="91440" marT="45720" marB="45720">
+                    <a:lnL w="2540" cap="flat" cmpd="sng" algn="ctr">
+                      <a:solidFill>
+                        <a:srgbClr val="EEEEEE"/>
+                      </a:solidFill>
+                      <a:prstDash val="solid"/>
+                      <a:round/>
+                      <a:headEnd type="none" w="med" len="med"/>
+                      <a:tailEnd type="none" w="med" len="med"/>
+                    </a:lnL>
+                    <a:lnR w="2540" cap="flat" cmpd="sng" algn="ctr">
+                      <a:solidFill>
+                        <a:srgbClr val="EEEEEE"/>
+                      </a:solidFill>
+                      <a:prstDash val="solid"/>
+                      <a:round/>
+                      <a:headEnd type="none" w="med" len="med"/>
+                      <a:tailEnd type="none" w="med" len="med"/>
+                    </a:lnR>
+                    <a:lnT w="2540" cap="flat" cmpd="sng" algn="ctr">
+                      <a:solidFill>
+                        <a:srgbClr val="EEEEEE"/>
+                      </a:solidFill>
+                      <a:prstDash val="solid"/>
+                      <a:round/>
+                      <a:headEnd type="none" w="med" len="med"/>
+                      <a:tailEnd type="none" w="med" len="med"/>
+                    </a:lnT>
+                    <a:lnB w="2540" cap="flat" cmpd="sng" algn="ctr">
+                      <a:solidFill>
+                        <a:srgbClr val="EEEEEE"/>
+                      </a:solidFill>
+                      <a:prstDash val="solid"/>
+                      <a:round/>
+                      <a:headEnd type="none" w="med" len="med"/>
+                      <a:tailEnd type="none" w="med" len="med"/>
+                    </a:lnB>
+                  </a:tcPr>
+                </a:tc>
+                <a:tc>
+                  <a:txBody>
+                    <a:bodyPr/>
+                    <a:lstStyle/>
+                    <a:p>
+                      <a:pPr algn="ctr" indent="0" marL="0">
+                        <a:buNone/>
+                      </a:pPr>
+                      <a:r>
+                        <a:rPr lang="en-US" sz="500" dirty="0">
+                          <a:solidFill>
+                            <a:srgbClr val="777777"/>
+                          </a:solidFill>
+                          <a:latin typeface="Calibri" pitchFamily="34" charset="0"/>
+                          <a:ea typeface="Calibri" pitchFamily="34" charset="-122"/>
+                          <a:cs typeface="Calibri" pitchFamily="34" charset="-120"/>
+                        </a:rPr>
+                        <a:t>0.43%</a:t>
+                      </a:r>
+                      <a:endParaRPr lang="en-US" sz="500" dirty="0">
+                        <a:latin typeface="Calibri" charset="0"/>
+                        <a:ea typeface="Calibri" charset="0"/>
+                        <a:cs typeface="Calibri" charset="0"/>
+                      </a:endParaRPr>
+                    </a:p>
+                  </a:txBody>
+                  <a:tcPr marL="91440" marR="91440" marT="45720" marB="45720">
+                    <a:lnL w="2540" cap="flat" cmpd="sng" algn="ctr">
+                      <a:solidFill>
+                        <a:srgbClr val="EEEEEE"/>
+                      </a:solidFill>
+                      <a:prstDash val="solid"/>
+                      <a:round/>
+                      <a:headEnd type="none" w="med" len="med"/>
+                      <a:tailEnd type="none" w="med" len="med"/>
+                    </a:lnL>
+                    <a:lnR w="2540" cap="flat" cmpd="sng" algn="ctr">
+                      <a:solidFill>
+                        <a:srgbClr val="EEEEEE"/>
+                      </a:solidFill>
+                      <a:prstDash val="solid"/>
+                      <a:round/>
+                      <a:headEnd type="none" w="med" len="med"/>
+                      <a:tailEnd type="none" w="med" len="med"/>
+                    </a:lnR>
+                    <a:lnT w="2540" cap="flat" cmpd="sng" algn="ctr">
+                      <a:solidFill>
+                        <a:srgbClr val="EEEEEE"/>
+                      </a:solidFill>
+                      <a:prstDash val="solid"/>
+                      <a:round/>
+                      <a:headEnd type="none" w="med" len="med"/>
+                      <a:tailEnd type="none" w="med" len="med"/>
+                    </a:lnT>
+                    <a:lnB w="2540" cap="flat" cmpd="sng" algn="ctr">
+                      <a:solidFill>
+                        <a:srgbClr val="EEEEEE"/>
+                      </a:solidFill>
+                      <a:prstDash val="solid"/>
+                      <a:round/>
+                      <a:headEnd type="none" w="med" len="med"/>
+                      <a:tailEnd type="none" w="med" len="med"/>
+                    </a:lnB>
+                  </a:tcPr>
+                </a:tc>
+                <a:tc>
+                  <a:txBody>
+                    <a:bodyPr/>
+                    <a:lstStyle/>
+                    <a:p>
+                      <a:pPr algn="ctr" indent="0" marL="0">
+                        <a:buNone/>
+                      </a:pPr>
+                      <a:r>
+                        <a:rPr lang="en-US" sz="500" dirty="0">
+                          <a:solidFill>
+                            <a:srgbClr val="777777"/>
+                          </a:solidFill>
+                          <a:latin typeface="Calibri" pitchFamily="34" charset="0"/>
+                          <a:ea typeface="Calibri" pitchFamily="34" charset="-122"/>
+                          <a:cs typeface="Calibri" pitchFamily="34" charset="-120"/>
+                        </a:rPr>
+                        <a:t>0.38%</a:t>
+                      </a:r>
+                      <a:endParaRPr lang="en-US" sz="500" dirty="0">
+                        <a:latin typeface="Calibri" charset="0"/>
+                        <a:ea typeface="Calibri" charset="0"/>
+                        <a:cs typeface="Calibri" charset="0"/>
+                      </a:endParaRPr>
+                    </a:p>
+                  </a:txBody>
+                  <a:tcPr marL="91440" marR="91440" marT="45720" marB="45720">
+                    <a:lnL w="2540" cap="flat" cmpd="sng" algn="ctr">
+                      <a:solidFill>
+                        <a:srgbClr val="EEEEEE"/>
+                      </a:solidFill>
+                      <a:prstDash val="solid"/>
+                      <a:round/>
+                      <a:headEnd type="none" w="med" len="med"/>
+                      <a:tailEnd type="none" w="med" len="med"/>
+                    </a:lnL>
+                    <a:lnR w="2540" cap="flat" cmpd="sng" algn="ctr">
+                      <a:solidFill>
+                        <a:srgbClr val="EEEEEE"/>
+                      </a:solidFill>
+                      <a:prstDash val="solid"/>
+                      <a:round/>
+                      <a:headEnd type="none" w="med" len="med"/>
+                      <a:tailEnd type="none" w="med" len="med"/>
+                    </a:lnR>
+                    <a:lnT w="2540" cap="flat" cmpd="sng" algn="ctr">
+                      <a:solidFill>
+                        <a:srgbClr val="EEEEEE"/>
+                      </a:solidFill>
+                      <a:prstDash val="solid"/>
+                      <a:round/>
+                      <a:headEnd type="none" w="med" len="med"/>
+                      <a:tailEnd type="none" w="med" len="med"/>
+                    </a:lnT>
+                    <a:lnB w="2540" cap="flat" cmpd="sng" algn="ctr">
+                      <a:solidFill>
+                        <a:srgbClr val="EEEEEE"/>
+                      </a:solidFill>
+                      <a:prstDash val="solid"/>
+                      <a:round/>
+                      <a:headEnd type="none" w="med" len="med"/>
+                      <a:tailEnd type="none" w="med" len="med"/>
+                    </a:lnB>
+                  </a:tcPr>
+                </a:tc>
+                <a:tc>
+                  <a:txBody>
+                    <a:bodyPr/>
+                    <a:lstStyle/>
+                    <a:p>
+                      <a:pPr algn="ctr" indent="0" marL="0">
+                        <a:buNone/>
+                      </a:pPr>
+                      <a:r>
+                        <a:rPr lang="en-US" sz="500" dirty="0">
+                          <a:solidFill>
+                            <a:srgbClr val="777777"/>
+                          </a:solidFill>
+                          <a:latin typeface="Calibri" pitchFamily="34" charset="0"/>
+                          <a:ea typeface="Calibri" pitchFamily="34" charset="-122"/>
+                          <a:cs typeface="Calibri" pitchFamily="34" charset="-120"/>
+                        </a:rPr>
+                        <a:t>0.42%</a:t>
+                      </a:r>
+                      <a:endParaRPr lang="en-US" sz="500" dirty="0">
+                        <a:latin typeface="Calibri" charset="0"/>
+                        <a:ea typeface="Calibri" charset="0"/>
+                        <a:cs typeface="Calibri" charset="0"/>
+                      </a:endParaRPr>
+                    </a:p>
+                  </a:txBody>
+                  <a:tcPr marL="91440" marR="91440" marT="45720" marB="45720">
+                    <a:lnL w="2540" cap="flat" cmpd="sng" algn="ctr">
+                      <a:solidFill>
+                        <a:srgbClr val="EEEEEE"/>
+                      </a:solidFill>
+                      <a:prstDash val="solid"/>
+                      <a:round/>
+                      <a:headEnd type="none" w="med" len="med"/>
+                      <a:tailEnd type="none" w="med" len="med"/>
+                    </a:lnL>
+                    <a:lnR w="2540" cap="flat" cmpd="sng" algn="ctr">
+                      <a:solidFill>
+                        <a:srgbClr val="EEEEEE"/>
+                      </a:solidFill>
+                      <a:prstDash val="solid"/>
+                      <a:round/>
+                      <a:headEnd type="none" w="med" len="med"/>
+                      <a:tailEnd type="none" w="med" len="med"/>
+                    </a:lnR>
+                    <a:lnT w="2540" cap="flat" cmpd="sng" algn="ctr">
+                      <a:solidFill>
+                        <a:srgbClr val="EEEEEE"/>
+                      </a:solidFill>
+                      <a:prstDash val="solid"/>
+                      <a:round/>
+                      <a:headEnd type="none" w="med" len="med"/>
+                      <a:tailEnd type="none" w="med" len="med"/>
+                    </a:lnT>
+                    <a:lnB w="2540" cap="flat" cmpd="sng" algn="ctr">
+                      <a:solidFill>
+                        <a:srgbClr val="EEEEEE"/>
+                      </a:solidFill>
+                      <a:prstDash val="solid"/>
+                      <a:round/>
+                      <a:headEnd type="none" w="med" len="med"/>
+                      <a:tailEnd type="none" w="med" len="med"/>
+                    </a:lnB>
+                  </a:tcPr>
+                </a:tc>
+                <a:tc>
+                  <a:txBody>
+                    <a:bodyPr/>
+                    <a:lstStyle/>
+                    <a:p>
+                      <a:pPr algn="ctr" indent="0" marL="0">
+                        <a:buNone/>
+                      </a:pPr>
+                      <a:r>
+                        <a:rPr lang="en-US" sz="500" dirty="0">
+                          <a:solidFill>
+                            <a:srgbClr val="777777"/>
+                          </a:solidFill>
+                          <a:latin typeface="Calibri" pitchFamily="34" charset="0"/>
+                          <a:ea typeface="Calibri" pitchFamily="34" charset="-122"/>
+                          <a:cs typeface="Calibri" pitchFamily="34" charset="-120"/>
+                        </a:rPr>
+                        <a:t>0.40%</a:t>
+                      </a:r>
+                      <a:endParaRPr lang="en-US" sz="500" dirty="0">
+                        <a:latin typeface="Calibri" charset="0"/>
+                        <a:ea typeface="Calibri" charset="0"/>
+                        <a:cs typeface="Calibri" charset="0"/>
+                      </a:endParaRPr>
+                    </a:p>
+                  </a:txBody>
+                  <a:tcPr marL="91440" marR="91440" marT="45720" marB="45720">
+                    <a:lnL w="2540" cap="flat" cmpd="sng" algn="ctr">
+                      <a:solidFill>
+                        <a:srgbClr val="EEEEEE"/>
+                      </a:solidFill>
+                      <a:prstDash val="solid"/>
+                      <a:round/>
+                      <a:headEnd type="none" w="med" len="med"/>
+                      <a:tailEnd type="none" w="med" len="med"/>
+                    </a:lnL>
+                    <a:lnR w="2540" cap="flat" cmpd="sng" algn="ctr">
+                      <a:solidFill>
+                        <a:srgbClr val="EEEEEE"/>
+                      </a:solidFill>
+                      <a:prstDash val="solid"/>
+                      <a:round/>
+                      <a:headEnd type="none" w="med" len="med"/>
+                      <a:tailEnd type="none" w="med" len="med"/>
+                    </a:lnR>
+                    <a:lnT w="2540" cap="flat" cmpd="sng" algn="ctr">
+                      <a:solidFill>
+                        <a:srgbClr val="EEEEEE"/>
+                      </a:solidFill>
+                      <a:prstDash val="solid"/>
+                      <a:round/>
+                      <a:headEnd type="none" w="med" len="med"/>
+                      <a:tailEnd type="none" w="med" len="med"/>
+                    </a:lnT>
+                    <a:lnB w="2540" cap="flat" cmpd="sng" algn="ctr">
+                      <a:solidFill>
+                        <a:srgbClr val="EEEEEE"/>
+                      </a:solidFill>
+                      <a:prstDash val="solid"/>
+                      <a:round/>
+                      <a:headEnd type="none" w="med" len="med"/>
+                      <a:tailEnd type="none" w="med" len="med"/>
+                    </a:lnB>
+                  </a:tcPr>
+                </a:tc>
+                <a:tc>
+                  <a:txBody>
+                    <a:bodyPr/>
+                    <a:lstStyle/>
+                    <a:p>
+                      <a:pPr algn="ctr" indent="0" marL="0">
+                        <a:buNone/>
+                      </a:pPr>
+                      <a:r>
+                        <a:rPr lang="en-US" sz="500" dirty="0">
+                          <a:solidFill>
+                            <a:srgbClr val="777777"/>
+                          </a:solidFill>
+                          <a:latin typeface="Calibri" pitchFamily="34" charset="0"/>
+                          <a:ea typeface="Calibri" pitchFamily="34" charset="-122"/>
+                          <a:cs typeface="Calibri" pitchFamily="34" charset="-120"/>
+                        </a:rPr>
+                        <a:t>0.38%</a:t>
+                      </a:r>
+                      <a:endParaRPr lang="en-US" sz="500" dirty="0">
+                        <a:latin typeface="Calibri" charset="0"/>
+                        <a:ea typeface="Calibri" charset="0"/>
+                        <a:cs typeface="Calibri" charset="0"/>
+                      </a:endParaRPr>
+                    </a:p>
+                  </a:txBody>
+                  <a:tcPr marL="91440" marR="91440" marT="45720" marB="45720">
+                    <a:lnL w="2540" cap="flat" cmpd="sng" algn="ctr">
+                      <a:solidFill>
+                        <a:srgbClr val="EEEEEE"/>
+                      </a:solidFill>
+                      <a:prstDash val="solid"/>
+                      <a:round/>
+                      <a:headEnd type="none" w="med" len="med"/>
+                      <a:tailEnd type="none" w="med" len="med"/>
+                    </a:lnL>
+                    <a:lnR w="2540" cap="flat" cmpd="sng" algn="ctr">
+                      <a:solidFill>
+                        <a:srgbClr val="EEEEEE"/>
+                      </a:solidFill>
+                      <a:prstDash val="solid"/>
+                      <a:round/>
+                      <a:headEnd type="none" w="med" len="med"/>
+                      <a:tailEnd type="none" w="med" len="med"/>
+                    </a:lnR>
+                    <a:lnT w="2540" cap="flat" cmpd="sng" algn="ctr">
+                      <a:solidFill>
+                        <a:srgbClr val="EEEEEE"/>
+                      </a:solidFill>
+                      <a:prstDash val="solid"/>
+                      <a:round/>
+                      <a:headEnd type="none" w="med" len="med"/>
+                      <a:tailEnd type="none" w="med" len="med"/>
+                    </a:lnT>
+                    <a:lnB w="2540" cap="flat" cmpd="sng" algn="ctr">
+                      <a:solidFill>
+                        <a:srgbClr val="EEEEEE"/>
+                      </a:solidFill>
+                      <a:prstDash val="solid"/>
+                      <a:round/>
+                      <a:headEnd type="none" w="med" len="med"/>
+                      <a:tailEnd type="none" w="med" len="med"/>
+                    </a:lnB>
+                  </a:tcPr>
+                </a:tc>
+                <a:tc>
+                  <a:txBody>
+                    <a:bodyPr/>
+                    <a:lstStyle/>
+                    <a:p>
+                      <a:pPr algn="ctr" indent="0" marL="0">
+                        <a:buNone/>
+                      </a:pPr>
+                      <a:r>
+                        <a:rPr lang="en-US" sz="500" dirty="0">
+                          <a:solidFill>
+                            <a:srgbClr val="777777"/>
+                          </a:solidFill>
+                          <a:latin typeface="Calibri" pitchFamily="34" charset="0"/>
+                          <a:ea typeface="Calibri" pitchFamily="34" charset="-122"/>
+                          <a:cs typeface="Calibri" pitchFamily="34" charset="-120"/>
+                        </a:rPr>
+                        <a:t>0.41%</a:t>
+                      </a:r>
+                      <a:endParaRPr lang="en-US" sz="500" dirty="0">
+                        <a:latin typeface="Calibri" charset="0"/>
+                        <a:ea typeface="Calibri" charset="0"/>
+                        <a:cs typeface="Calibri" charset="0"/>
+                      </a:endParaRPr>
+                    </a:p>
+                  </a:txBody>
+                  <a:tcPr marL="91440" marR="91440" marT="45720" marB="45720">
+                    <a:lnL w="2540" cap="flat" cmpd="sng" algn="ctr">
+                      <a:solidFill>
+                        <a:srgbClr val="EEEEEE"/>
+                      </a:solidFill>
+                      <a:prstDash val="solid"/>
+                      <a:round/>
+                      <a:headEnd type="none" w="med" len="med"/>
+                      <a:tailEnd type="none" w="med" len="med"/>
+                    </a:lnL>
+                    <a:lnR w="2540" cap="flat" cmpd="sng" algn="ctr">
+                      <a:solidFill>
+                        <a:srgbClr val="EEEEEE"/>
+                      </a:solidFill>
+                      <a:prstDash val="solid"/>
+                      <a:round/>
+                      <a:headEnd type="none" w="med" len="med"/>
+                      <a:tailEnd type="none" w="med" len="med"/>
+                    </a:lnR>
+                    <a:lnT w="2540" cap="flat" cmpd="sng" algn="ctr">
+                      <a:solidFill>
+                        <a:srgbClr val="EEEEEE"/>
+                      </a:solidFill>
+                      <a:prstDash val="solid"/>
+                      <a:round/>
+                      <a:headEnd type="none" w="med" len="med"/>
+                      <a:tailEnd type="none" w="med" len="med"/>
+                    </a:lnT>
+                    <a:lnB w="2540" cap="flat" cmpd="sng" algn="ctr">
+                      <a:solidFill>
+                        <a:srgbClr val="EEEEEE"/>
+                      </a:solidFill>
+                      <a:prstDash val="solid"/>
+                      <a:round/>
+                      <a:headEnd type="none" w="med" len="med"/>
+                      <a:tailEnd type="none" w="med" len="med"/>
+                    </a:lnB>
+                  </a:tcPr>
+                </a:tc>
+                <a:tc>
+                  <a:txBody>
+                    <a:bodyPr/>
+                    <a:lstStyle/>
+                    <a:p>
+                      <a:pPr algn="ctr" indent="0" marL="0">
+                        <a:buNone/>
+                      </a:pPr>
+                      <a:r>
                         <a:rPr lang="en-US" sz="500" b="1" dirty="0">
                           <a:solidFill>
                             <a:srgbClr val="777777"/>
@@ -9681,7 +12905,7 @@
                           <a:ea typeface="Calibri" pitchFamily="34" charset="-122"/>
                           <a:cs typeface="Calibri" pitchFamily="34" charset="-120"/>
                         </a:rPr>
-                        <a:t>6.38%</a:t>
+                        <a:t>4.61%</a:t>
                       </a:r>
                       <a:endParaRPr lang="en-US" sz="500" dirty="0">
                         <a:latin typeface="Calibri" charset="0"/>
@@ -9867,7 +13091,7 @@
                           <a:ea typeface="Calibri" pitchFamily="34" charset="-122"/>
                           <a:cs typeface="Calibri" pitchFamily="34" charset="-120"/>
                         </a:rPr>
-                        <a:t>0.00%</a:t>
+                        <a:t>0.30%</a:t>
                       </a:r>
                       <a:endParaRPr lang="en-US" sz="500" dirty="0">
                         <a:latin typeface="Calibri" charset="0"/>
@@ -9932,7 +13156,7 @@
                           <a:ea typeface="Calibri" pitchFamily="34" charset="-122"/>
                           <a:cs typeface="Calibri" pitchFamily="34" charset="-120"/>
                         </a:rPr>
-                        <a:t>0.51%</a:t>
+                        <a:t>0.28%</a:t>
                       </a:r>
                       <a:endParaRPr lang="en-US" sz="500" dirty="0">
                         <a:latin typeface="Calibri" charset="0"/>
@@ -9997,7 +13221,7 @@
                           <a:ea typeface="Calibri" pitchFamily="34" charset="-122"/>
                           <a:cs typeface="Calibri" pitchFamily="34" charset="-120"/>
                         </a:rPr>
-                        <a:t>0.45%</a:t>
+                        <a:t>0.31%</a:t>
                       </a:r>
                       <a:endParaRPr lang="en-US" sz="500" dirty="0">
                         <a:latin typeface="Calibri" charset="0"/>
@@ -10062,7 +13286,7 @@
                           <a:ea typeface="Calibri" pitchFamily="34" charset="-122"/>
                           <a:cs typeface="Calibri" pitchFamily="34" charset="-120"/>
                         </a:rPr>
-                        <a:t>0.47%</a:t>
+                        <a:t>0.30%</a:t>
                       </a:r>
                       <a:endParaRPr lang="en-US" sz="500" dirty="0">
                         <a:latin typeface="Calibri" charset="0"/>
@@ -10127,7 +13351,7 @@
                           <a:ea typeface="Calibri" pitchFamily="34" charset="-122"/>
                           <a:cs typeface="Calibri" pitchFamily="34" charset="-120"/>
                         </a:rPr>
-                        <a:t>0.42%</a:t>
+                        <a:t>0.31%</a:t>
                       </a:r>
                       <a:endParaRPr lang="en-US" sz="500" dirty="0">
                         <a:latin typeface="Calibri" charset="0"/>
@@ -10192,7 +13416,7 @@
                           <a:ea typeface="Calibri" pitchFamily="34" charset="-122"/>
                           <a:cs typeface="Calibri" pitchFamily="34" charset="-120"/>
                         </a:rPr>
-                        <a:t>0.37%</a:t>
+                        <a:t>0.30%</a:t>
                       </a:r>
                       <a:endParaRPr lang="en-US" sz="500" dirty="0">
                         <a:latin typeface="Calibri" charset="0"/>
@@ -10257,7 +13481,7 @@
                           <a:ea typeface="Calibri" pitchFamily="34" charset="-122"/>
                           <a:cs typeface="Calibri" pitchFamily="34" charset="-120"/>
                         </a:rPr>
-                        <a:t>0.36%</a:t>
+                        <a:t>0.30%</a:t>
                       </a:r>
                       <a:endParaRPr lang="en-US" sz="500" dirty="0">
                         <a:latin typeface="Calibri" charset="0"/>
@@ -10322,7 +13546,7 @@
                           <a:ea typeface="Calibri" pitchFamily="34" charset="-122"/>
                           <a:cs typeface="Calibri" pitchFamily="34" charset="-120"/>
                         </a:rPr>
-                        <a:t>0.36%</a:t>
+                        <a:t>0.30%</a:t>
                       </a:r>
                       <a:endParaRPr lang="en-US" sz="500" dirty="0">
                         <a:latin typeface="Calibri" charset="0"/>
@@ -10387,7 +13611,7 @@
                           <a:ea typeface="Calibri" pitchFamily="34" charset="-122"/>
                           <a:cs typeface="Calibri" pitchFamily="34" charset="-120"/>
                         </a:rPr>
-                        <a:t>0.34%</a:t>
+                        <a:t>0.28%</a:t>
                       </a:r>
                       <a:endParaRPr lang="en-US" sz="500" dirty="0">
                         <a:latin typeface="Calibri" charset="0"/>
@@ -10452,7 +13676,7 @@
                           <a:ea typeface="Calibri" pitchFamily="34" charset="-122"/>
                           <a:cs typeface="Calibri" pitchFamily="34" charset="-120"/>
                         </a:rPr>
-                        <a:t>0.34%</a:t>
+                        <a:t>0.29%</a:t>
                       </a:r>
                       <a:endParaRPr lang="en-US" sz="500" dirty="0">
                         <a:latin typeface="Calibri" charset="0"/>
@@ -10517,7 +13741,7 @@
                           <a:ea typeface="Calibri" pitchFamily="34" charset="-122"/>
                           <a:cs typeface="Calibri" pitchFamily="34" charset="-120"/>
                         </a:rPr>
-                        <a:t>0.32%</a:t>
+                        <a:t>0.28%</a:t>
                       </a:r>
                       <a:endParaRPr lang="en-US" sz="500" dirty="0">
                         <a:latin typeface="Calibri" charset="0"/>
@@ -10582,7 +13806,7 @@
                           <a:ea typeface="Calibri" pitchFamily="34" charset="-122"/>
                           <a:cs typeface="Calibri" pitchFamily="34" charset="-120"/>
                         </a:rPr>
-                        <a:t>-2.99%</a:t>
+                        <a:t>0.28%</a:t>
                       </a:r>
                       <a:endParaRPr lang="en-US" sz="500" dirty="0">
                         <a:latin typeface="Calibri" charset="0"/>
@@ -10647,7 +13871,7 @@
                           <a:ea typeface="Calibri" pitchFamily="34" charset="-122"/>
                           <a:cs typeface="Calibri" pitchFamily="34" charset="-120"/>
                         </a:rPr>
-                        <a:t>0.90%</a:t>
+                        <a:t>3.26%</a:t>
                       </a:r>
                       <a:endParaRPr lang="en-US" sz="500" dirty="0">
                         <a:latin typeface="Calibri" charset="0"/>
@@ -10757,6 +13981,71 @@
                     <a:lstStyle/>
                     <a:p>
                       <a:pPr algn="l" indent="0" marL="0">
+                        <a:buNone/>
+                      </a:pPr>
+                      <a:r>
+                        <a:rPr lang="en-US" sz="400" dirty="0">
+                          <a:solidFill>
+                            <a:srgbClr val="000000"/>
+                          </a:solidFill>
+                          <a:latin typeface="Calibri" pitchFamily="34" charset="0"/>
+                          <a:ea typeface="Calibri" pitchFamily="34" charset="-122"/>
+                          <a:cs typeface="Calibri" pitchFamily="34" charset="-120"/>
+                        </a:rPr>
+                        <a:t>FIP LIQUIDEZ Permanente</a:t>
+                      </a:r>
+                      <a:endParaRPr lang="en-US" sz="400" dirty="0">
+                        <a:latin typeface="Calibri" charset="0"/>
+                        <a:ea typeface="Calibri" charset="0"/>
+                        <a:cs typeface="Calibri" charset="0"/>
+                      </a:endParaRPr>
+                    </a:p>
+                  </a:txBody>
+                  <a:tcPr marL="91440" marR="91440" marT="45720" marB="45720">
+                    <a:lnL w="2540" cap="flat" cmpd="sng" algn="ctr">
+                      <a:solidFill>
+                        <a:srgbClr val="EEEEEE"/>
+                      </a:solidFill>
+                      <a:prstDash val="solid"/>
+                      <a:round/>
+                      <a:headEnd type="none" w="med" len="med"/>
+                      <a:tailEnd type="none" w="med" len="med"/>
+                    </a:lnL>
+                    <a:lnR w="2540" cap="flat" cmpd="sng" algn="ctr">
+                      <a:solidFill>
+                        <a:srgbClr val="EEEEEE"/>
+                      </a:solidFill>
+                      <a:prstDash val="solid"/>
+                      <a:round/>
+                      <a:headEnd type="none" w="med" len="med"/>
+                      <a:tailEnd type="none" w="med" len="med"/>
+                    </a:lnR>
+                    <a:lnT w="2540" cap="flat" cmpd="sng" algn="ctr">
+                      <a:solidFill>
+                        <a:srgbClr val="EEEEEE"/>
+                      </a:solidFill>
+                      <a:prstDash val="solid"/>
+                      <a:round/>
+                      <a:headEnd type="none" w="med" len="med"/>
+                      <a:tailEnd type="none" w="med" len="med"/>
+                    </a:lnT>
+                    <a:lnB w="2540" cap="flat" cmpd="sng" algn="ctr">
+                      <a:solidFill>
+                        <a:srgbClr val="EEEEEE"/>
+                      </a:solidFill>
+                      <a:prstDash val="solid"/>
+                      <a:round/>
+                      <a:headEnd type="none" w="med" len="med"/>
+                      <a:tailEnd type="none" w="med" len="med"/>
+                    </a:lnB>
+                  </a:tcPr>
+                </a:tc>
+                <a:tc>
+                  <a:txBody>
+                    <a:bodyPr/>
+                    <a:lstStyle/>
+                    <a:p>
+                      <a:pPr algn="ctr" indent="0" marL="0">
                         <a:buNone/>
                       </a:pPr>
                       <a:r>
@@ -10768,7 +14057,7 @@
                           <a:ea typeface="Calibri" pitchFamily="34" charset="-122"/>
                           <a:cs typeface="Calibri" pitchFamily="34" charset="-120"/>
                         </a:rPr>
-                        <a:t>FIP LIQUIDEZ Permanente</a:t>
+                        <a:t>0.34%</a:t>
                       </a:r>
                       <a:endParaRPr lang="en-US" sz="500" dirty="0">
                         <a:latin typeface="Calibri" charset="0"/>
@@ -10833,7 +14122,7 @@
                           <a:ea typeface="Calibri" pitchFamily="34" charset="-122"/>
                           <a:cs typeface="Calibri" pitchFamily="34" charset="-120"/>
                         </a:rPr>
-                        <a:t>0.73%</a:t>
+                        <a:t>0.39%</a:t>
                       </a:r>
                       <a:endParaRPr lang="en-US" sz="500" dirty="0">
                         <a:latin typeface="Calibri" charset="0"/>
@@ -10898,7 +14187,7 @@
                           <a:ea typeface="Calibri" pitchFamily="34" charset="-122"/>
                           <a:cs typeface="Calibri" pitchFamily="34" charset="-120"/>
                         </a:rPr>
-                        <a:t>0.53%</a:t>
+                        <a:t>0.51%</a:t>
                       </a:r>
                       <a:endParaRPr lang="en-US" sz="500" dirty="0">
                         <a:latin typeface="Calibri" charset="0"/>
@@ -10963,7 +14252,202 @@
                           <a:ea typeface="Calibri" pitchFamily="34" charset="-122"/>
                           <a:cs typeface="Calibri" pitchFamily="34" charset="-120"/>
                         </a:rPr>
-                        <a:t>0.63%</a:t>
+                        <a:t>0.50%</a:t>
+                      </a:r>
+                      <a:endParaRPr lang="en-US" sz="500" dirty="0">
+                        <a:latin typeface="Calibri" charset="0"/>
+                        <a:ea typeface="Calibri" charset="0"/>
+                        <a:cs typeface="Calibri" charset="0"/>
+                      </a:endParaRPr>
+                    </a:p>
+                  </a:txBody>
+                  <a:tcPr marL="91440" marR="91440" marT="45720" marB="45720">
+                    <a:lnL w="2540" cap="flat" cmpd="sng" algn="ctr">
+                      <a:solidFill>
+                        <a:srgbClr val="EEEEEE"/>
+                      </a:solidFill>
+                      <a:prstDash val="solid"/>
+                      <a:round/>
+                      <a:headEnd type="none" w="med" len="med"/>
+                      <a:tailEnd type="none" w="med" len="med"/>
+                    </a:lnL>
+                    <a:lnR w="2540" cap="flat" cmpd="sng" algn="ctr">
+                      <a:solidFill>
+                        <a:srgbClr val="EEEEEE"/>
+                      </a:solidFill>
+                      <a:prstDash val="solid"/>
+                      <a:round/>
+                      <a:headEnd type="none" w="med" len="med"/>
+                      <a:tailEnd type="none" w="med" len="med"/>
+                    </a:lnR>
+                    <a:lnT w="2540" cap="flat" cmpd="sng" algn="ctr">
+                      <a:solidFill>
+                        <a:srgbClr val="EEEEEE"/>
+                      </a:solidFill>
+                      <a:prstDash val="solid"/>
+                      <a:round/>
+                      <a:headEnd type="none" w="med" len="med"/>
+                      <a:tailEnd type="none" w="med" len="med"/>
+                    </a:lnT>
+                    <a:lnB w="2540" cap="flat" cmpd="sng" algn="ctr">
+                      <a:solidFill>
+                        <a:srgbClr val="EEEEEE"/>
+                      </a:solidFill>
+                      <a:prstDash val="solid"/>
+                      <a:round/>
+                      <a:headEnd type="none" w="med" len="med"/>
+                      <a:tailEnd type="none" w="med" len="med"/>
+                    </a:lnB>
+                  </a:tcPr>
+                </a:tc>
+                <a:tc>
+                  <a:txBody>
+                    <a:bodyPr/>
+                    <a:lstStyle/>
+                    <a:p>
+                      <a:pPr algn="ctr" indent="0" marL="0">
+                        <a:buNone/>
+                      </a:pPr>
+                      <a:r>
+                        <a:rPr lang="en-US" sz="500" dirty="0">
+                          <a:solidFill>
+                            <a:srgbClr val="000000"/>
+                          </a:solidFill>
+                          <a:latin typeface="Calibri" pitchFamily="34" charset="0"/>
+                          <a:ea typeface="Calibri" pitchFamily="34" charset="-122"/>
+                          <a:cs typeface="Calibri" pitchFamily="34" charset="-120"/>
+                        </a:rPr>
+                        <a:t>0.59%</a:t>
+                      </a:r>
+                      <a:endParaRPr lang="en-US" sz="500" dirty="0">
+                        <a:latin typeface="Calibri" charset="0"/>
+                        <a:ea typeface="Calibri" charset="0"/>
+                        <a:cs typeface="Calibri" charset="0"/>
+                      </a:endParaRPr>
+                    </a:p>
+                  </a:txBody>
+                  <a:tcPr marL="91440" marR="91440" marT="45720" marB="45720">
+                    <a:lnL w="2540" cap="flat" cmpd="sng" algn="ctr">
+                      <a:solidFill>
+                        <a:srgbClr val="EEEEEE"/>
+                      </a:solidFill>
+                      <a:prstDash val="solid"/>
+                      <a:round/>
+                      <a:headEnd type="none" w="med" len="med"/>
+                      <a:tailEnd type="none" w="med" len="med"/>
+                    </a:lnL>
+                    <a:lnR w="2540" cap="flat" cmpd="sng" algn="ctr">
+                      <a:solidFill>
+                        <a:srgbClr val="EEEEEE"/>
+                      </a:solidFill>
+                      <a:prstDash val="solid"/>
+                      <a:round/>
+                      <a:headEnd type="none" w="med" len="med"/>
+                      <a:tailEnd type="none" w="med" len="med"/>
+                    </a:lnR>
+                    <a:lnT w="2540" cap="flat" cmpd="sng" algn="ctr">
+                      <a:solidFill>
+                        <a:srgbClr val="EEEEEE"/>
+                      </a:solidFill>
+                      <a:prstDash val="solid"/>
+                      <a:round/>
+                      <a:headEnd type="none" w="med" len="med"/>
+                      <a:tailEnd type="none" w="med" len="med"/>
+                    </a:lnT>
+                    <a:lnB w="2540" cap="flat" cmpd="sng" algn="ctr">
+                      <a:solidFill>
+                        <a:srgbClr val="EEEEEE"/>
+                      </a:solidFill>
+                      <a:prstDash val="solid"/>
+                      <a:round/>
+                      <a:headEnd type="none" w="med" len="med"/>
+                      <a:tailEnd type="none" w="med" len="med"/>
+                    </a:lnB>
+                  </a:tcPr>
+                </a:tc>
+                <a:tc>
+                  <a:txBody>
+                    <a:bodyPr/>
+                    <a:lstStyle/>
+                    <a:p>
+                      <a:pPr algn="ctr" indent="0" marL="0">
+                        <a:buNone/>
+                      </a:pPr>
+                      <a:r>
+                        <a:rPr lang="en-US" sz="500" dirty="0">
+                          <a:solidFill>
+                            <a:srgbClr val="000000"/>
+                          </a:solidFill>
+                          <a:latin typeface="Calibri" pitchFamily="34" charset="0"/>
+                          <a:ea typeface="Calibri" pitchFamily="34" charset="-122"/>
+                          <a:cs typeface="Calibri" pitchFamily="34" charset="-120"/>
+                        </a:rPr>
+                        <a:t>0.58%</a:t>
+                      </a:r>
+                      <a:endParaRPr lang="en-US" sz="500" dirty="0">
+                        <a:latin typeface="Calibri" charset="0"/>
+                        <a:ea typeface="Calibri" charset="0"/>
+                        <a:cs typeface="Calibri" charset="0"/>
+                      </a:endParaRPr>
+                    </a:p>
+                  </a:txBody>
+                  <a:tcPr marL="91440" marR="91440" marT="45720" marB="45720">
+                    <a:lnL w="2540" cap="flat" cmpd="sng" algn="ctr">
+                      <a:solidFill>
+                        <a:srgbClr val="EEEEEE"/>
+                      </a:solidFill>
+                      <a:prstDash val="solid"/>
+                      <a:round/>
+                      <a:headEnd type="none" w="med" len="med"/>
+                      <a:tailEnd type="none" w="med" len="med"/>
+                    </a:lnL>
+                    <a:lnR w="2540" cap="flat" cmpd="sng" algn="ctr">
+                      <a:solidFill>
+                        <a:srgbClr val="EEEEEE"/>
+                      </a:solidFill>
+                      <a:prstDash val="solid"/>
+                      <a:round/>
+                      <a:headEnd type="none" w="med" len="med"/>
+                      <a:tailEnd type="none" w="med" len="med"/>
+                    </a:lnR>
+                    <a:lnT w="2540" cap="flat" cmpd="sng" algn="ctr">
+                      <a:solidFill>
+                        <a:srgbClr val="EEEEEE"/>
+                      </a:solidFill>
+                      <a:prstDash val="solid"/>
+                      <a:round/>
+                      <a:headEnd type="none" w="med" len="med"/>
+                      <a:tailEnd type="none" w="med" len="med"/>
+                    </a:lnT>
+                    <a:lnB w="2540" cap="flat" cmpd="sng" algn="ctr">
+                      <a:solidFill>
+                        <a:srgbClr val="EEEEEE"/>
+                      </a:solidFill>
+                      <a:prstDash val="solid"/>
+                      <a:round/>
+                      <a:headEnd type="none" w="med" len="med"/>
+                      <a:tailEnd type="none" w="med" len="med"/>
+                    </a:lnB>
+                  </a:tcPr>
+                </a:tc>
+                <a:tc>
+                  <a:txBody>
+                    <a:bodyPr/>
+                    <a:lstStyle/>
+                    <a:p>
+                      <a:pPr algn="ctr" indent="0" marL="0">
+                        <a:buNone/>
+                      </a:pPr>
+                      <a:r>
+                        <a:rPr lang="en-US" sz="500" dirty="0">
+                          <a:solidFill>
+                            <a:srgbClr val="000000"/>
+                          </a:solidFill>
+                          <a:latin typeface="Calibri" pitchFamily="34" charset="0"/>
+                          <a:ea typeface="Calibri" pitchFamily="34" charset="-122"/>
+                          <a:cs typeface="Calibri" pitchFamily="34" charset="-120"/>
+                        </a:rPr>
+                        <a:t>0.71%</a:t>
                       </a:r>
                       <a:endParaRPr lang="en-US" sz="500" dirty="0">
                         <a:latin typeface="Calibri" charset="0"/>
@@ -11093,7 +14577,7 @@
                           <a:ea typeface="Calibri" pitchFamily="34" charset="-122"/>
                           <a:cs typeface="Calibri" pitchFamily="34" charset="-120"/>
                         </a:rPr>
-                        <a:t>0.55%</a:t>
+                        <a:t>0.60%</a:t>
                       </a:r>
                       <a:endParaRPr lang="en-US" sz="500" dirty="0">
                         <a:latin typeface="Calibri" charset="0"/>
@@ -11158,7 +14642,7 @@
                           <a:ea typeface="Calibri" pitchFamily="34" charset="-122"/>
                           <a:cs typeface="Calibri" pitchFamily="34" charset="-120"/>
                         </a:rPr>
-                        <a:t>0.47%</a:t>
+                        <a:t>0.58%</a:t>
                       </a:r>
                       <a:endParaRPr lang="en-US" sz="500" dirty="0">
                         <a:latin typeface="Calibri" charset="0"/>
@@ -11223,7 +14707,7 @@
                           <a:ea typeface="Calibri" pitchFamily="34" charset="-122"/>
                           <a:cs typeface="Calibri" pitchFamily="34" charset="-120"/>
                         </a:rPr>
-                        <a:t>0.40%</a:t>
+                        <a:t>0.79%</a:t>
                       </a:r>
                       <a:endParaRPr lang="en-US" sz="500" dirty="0">
                         <a:latin typeface="Calibri" charset="0"/>
@@ -11288,267 +14772,7 @@
                           <a:ea typeface="Calibri" pitchFamily="34" charset="-122"/>
                           <a:cs typeface="Calibri" pitchFamily="34" charset="-120"/>
                         </a:rPr>
-                        <a:t>0.47%</a:t>
-                      </a:r>
-                      <a:endParaRPr lang="en-US" sz="500" dirty="0">
-                        <a:latin typeface="Calibri" charset="0"/>
-                        <a:ea typeface="Calibri" charset="0"/>
-                        <a:cs typeface="Calibri" charset="0"/>
-                      </a:endParaRPr>
-                    </a:p>
-                  </a:txBody>
-                  <a:tcPr marL="91440" marR="91440" marT="45720" marB="45720">
-                    <a:lnL w="2540" cap="flat" cmpd="sng" algn="ctr">
-                      <a:solidFill>
-                        <a:srgbClr val="EEEEEE"/>
-                      </a:solidFill>
-                      <a:prstDash val="solid"/>
-                      <a:round/>
-                      <a:headEnd type="none" w="med" len="med"/>
-                      <a:tailEnd type="none" w="med" len="med"/>
-                    </a:lnL>
-                    <a:lnR w="2540" cap="flat" cmpd="sng" algn="ctr">
-                      <a:solidFill>
-                        <a:srgbClr val="EEEEEE"/>
-                      </a:solidFill>
-                      <a:prstDash val="solid"/>
-                      <a:round/>
-                      <a:headEnd type="none" w="med" len="med"/>
-                      <a:tailEnd type="none" w="med" len="med"/>
-                    </a:lnR>
-                    <a:lnT w="2540" cap="flat" cmpd="sng" algn="ctr">
-                      <a:solidFill>
-                        <a:srgbClr val="EEEEEE"/>
-                      </a:solidFill>
-                      <a:prstDash val="solid"/>
-                      <a:round/>
-                      <a:headEnd type="none" w="med" len="med"/>
-                      <a:tailEnd type="none" w="med" len="med"/>
-                    </a:lnT>
-                    <a:lnB w="2540" cap="flat" cmpd="sng" algn="ctr">
-                      <a:solidFill>
-                        <a:srgbClr val="EEEEEE"/>
-                      </a:solidFill>
-                      <a:prstDash val="solid"/>
-                      <a:round/>
-                      <a:headEnd type="none" w="med" len="med"/>
-                      <a:tailEnd type="none" w="med" len="med"/>
-                    </a:lnB>
-                  </a:tcPr>
-                </a:tc>
-                <a:tc>
-                  <a:txBody>
-                    <a:bodyPr/>
-                    <a:lstStyle/>
-                    <a:p>
-                      <a:pPr algn="ctr" indent="0" marL="0">
-                        <a:buNone/>
-                      </a:pPr>
-                      <a:r>
-                        <a:rPr lang="en-US" sz="500" dirty="0">
-                          <a:solidFill>
-                            <a:srgbClr val="000000"/>
-                          </a:solidFill>
-                          <a:latin typeface="Calibri" pitchFamily="34" charset="0"/>
-                          <a:ea typeface="Calibri" pitchFamily="34" charset="-122"/>
-                          <a:cs typeface="Calibri" pitchFamily="34" charset="-120"/>
-                        </a:rPr>
-                        <a:t>0.55%</a:t>
-                      </a:r>
-                      <a:endParaRPr lang="en-US" sz="500" dirty="0">
-                        <a:latin typeface="Calibri" charset="0"/>
-                        <a:ea typeface="Calibri" charset="0"/>
-                        <a:cs typeface="Calibri" charset="0"/>
-                      </a:endParaRPr>
-                    </a:p>
-                  </a:txBody>
-                  <a:tcPr marL="91440" marR="91440" marT="45720" marB="45720">
-                    <a:lnL w="2540" cap="flat" cmpd="sng" algn="ctr">
-                      <a:solidFill>
-                        <a:srgbClr val="EEEEEE"/>
-                      </a:solidFill>
-                      <a:prstDash val="solid"/>
-                      <a:round/>
-                      <a:headEnd type="none" w="med" len="med"/>
-                      <a:tailEnd type="none" w="med" len="med"/>
-                    </a:lnL>
-                    <a:lnR w="2540" cap="flat" cmpd="sng" algn="ctr">
-                      <a:solidFill>
-                        <a:srgbClr val="EEEEEE"/>
-                      </a:solidFill>
-                      <a:prstDash val="solid"/>
-                      <a:round/>
-                      <a:headEnd type="none" w="med" len="med"/>
-                      <a:tailEnd type="none" w="med" len="med"/>
-                    </a:lnR>
-                    <a:lnT w="2540" cap="flat" cmpd="sng" algn="ctr">
-                      <a:solidFill>
-                        <a:srgbClr val="EEEEEE"/>
-                      </a:solidFill>
-                      <a:prstDash val="solid"/>
-                      <a:round/>
-                      <a:headEnd type="none" w="med" len="med"/>
-                      <a:tailEnd type="none" w="med" len="med"/>
-                    </a:lnT>
-                    <a:lnB w="2540" cap="flat" cmpd="sng" algn="ctr">
-                      <a:solidFill>
-                        <a:srgbClr val="EEEEEE"/>
-                      </a:solidFill>
-                      <a:prstDash val="solid"/>
-                      <a:round/>
-                      <a:headEnd type="none" w="med" len="med"/>
-                      <a:tailEnd type="none" w="med" len="med"/>
-                    </a:lnB>
-                  </a:tcPr>
-                </a:tc>
-                <a:tc>
-                  <a:txBody>
-                    <a:bodyPr/>
-                    <a:lstStyle/>
-                    <a:p>
-                      <a:pPr algn="ctr" indent="0" marL="0">
-                        <a:buNone/>
-                      </a:pPr>
-                      <a:r>
-                        <a:rPr lang="en-US" sz="500" dirty="0">
-                          <a:solidFill>
-                            <a:srgbClr val="000000"/>
-                          </a:solidFill>
-                          <a:latin typeface="Calibri" pitchFamily="34" charset="0"/>
-                          <a:ea typeface="Calibri" pitchFamily="34" charset="-122"/>
-                          <a:cs typeface="Calibri" pitchFamily="34" charset="-120"/>
-                        </a:rPr>
-                        <a:t>0.45%</a:t>
-                      </a:r>
-                      <a:endParaRPr lang="en-US" sz="500" dirty="0">
-                        <a:latin typeface="Calibri" charset="0"/>
-                        <a:ea typeface="Calibri" charset="0"/>
-                        <a:cs typeface="Calibri" charset="0"/>
-                      </a:endParaRPr>
-                    </a:p>
-                  </a:txBody>
-                  <a:tcPr marL="91440" marR="91440" marT="45720" marB="45720">
-                    <a:lnL w="2540" cap="flat" cmpd="sng" algn="ctr">
-                      <a:solidFill>
-                        <a:srgbClr val="EEEEEE"/>
-                      </a:solidFill>
-                      <a:prstDash val="solid"/>
-                      <a:round/>
-                      <a:headEnd type="none" w="med" len="med"/>
-                      <a:tailEnd type="none" w="med" len="med"/>
-                    </a:lnL>
-                    <a:lnR w="2540" cap="flat" cmpd="sng" algn="ctr">
-                      <a:solidFill>
-                        <a:srgbClr val="EEEEEE"/>
-                      </a:solidFill>
-                      <a:prstDash val="solid"/>
-                      <a:round/>
-                      <a:headEnd type="none" w="med" len="med"/>
-                      <a:tailEnd type="none" w="med" len="med"/>
-                    </a:lnR>
-                    <a:lnT w="2540" cap="flat" cmpd="sng" algn="ctr">
-                      <a:solidFill>
-                        <a:srgbClr val="EEEEEE"/>
-                      </a:solidFill>
-                      <a:prstDash val="solid"/>
-                      <a:round/>
-                      <a:headEnd type="none" w="med" len="med"/>
-                      <a:tailEnd type="none" w="med" len="med"/>
-                    </a:lnT>
-                    <a:lnB w="2540" cap="flat" cmpd="sng" algn="ctr">
-                      <a:solidFill>
-                        <a:srgbClr val="EEEEEE"/>
-                      </a:solidFill>
-                      <a:prstDash val="solid"/>
-                      <a:round/>
-                      <a:headEnd type="none" w="med" len="med"/>
-                      <a:tailEnd type="none" w="med" len="med"/>
-                    </a:lnB>
-                  </a:tcPr>
-                </a:tc>
-                <a:tc>
-                  <a:txBody>
-                    <a:bodyPr/>
-                    <a:lstStyle/>
-                    <a:p>
-                      <a:pPr algn="ctr" indent="0" marL="0">
-                        <a:buNone/>
-                      </a:pPr>
-                      <a:r>
-                        <a:rPr lang="en-US" sz="500" dirty="0">
-                          <a:solidFill>
-                            <a:srgbClr val="000000"/>
-                          </a:solidFill>
-                          <a:latin typeface="Calibri" pitchFamily="34" charset="0"/>
-                          <a:ea typeface="Calibri" pitchFamily="34" charset="-122"/>
-                          <a:cs typeface="Calibri" pitchFamily="34" charset="-120"/>
-                        </a:rPr>
-                        <a:t>0.28%</a:t>
-                      </a:r>
-                      <a:endParaRPr lang="en-US" sz="500" dirty="0">
-                        <a:latin typeface="Calibri" charset="0"/>
-                        <a:ea typeface="Calibri" charset="0"/>
-                        <a:cs typeface="Calibri" charset="0"/>
-                      </a:endParaRPr>
-                    </a:p>
-                  </a:txBody>
-                  <a:tcPr marL="91440" marR="91440" marT="45720" marB="45720">
-                    <a:lnL w="2540" cap="flat" cmpd="sng" algn="ctr">
-                      <a:solidFill>
-                        <a:srgbClr val="EEEEEE"/>
-                      </a:solidFill>
-                      <a:prstDash val="solid"/>
-                      <a:round/>
-                      <a:headEnd type="none" w="med" len="med"/>
-                      <a:tailEnd type="none" w="med" len="med"/>
-                    </a:lnL>
-                    <a:lnR w="2540" cap="flat" cmpd="sng" algn="ctr">
-                      <a:solidFill>
-                        <a:srgbClr val="EEEEEE"/>
-                      </a:solidFill>
-                      <a:prstDash val="solid"/>
-                      <a:round/>
-                      <a:headEnd type="none" w="med" len="med"/>
-                      <a:tailEnd type="none" w="med" len="med"/>
-                    </a:lnR>
-                    <a:lnT w="2540" cap="flat" cmpd="sng" algn="ctr">
-                      <a:solidFill>
-                        <a:srgbClr val="EEEEEE"/>
-                      </a:solidFill>
-                      <a:prstDash val="solid"/>
-                      <a:round/>
-                      <a:headEnd type="none" w="med" len="med"/>
-                      <a:tailEnd type="none" w="med" len="med"/>
-                    </a:lnT>
-                    <a:lnB w="2540" cap="flat" cmpd="sng" algn="ctr">
-                      <a:solidFill>
-                        <a:srgbClr val="EEEEEE"/>
-                      </a:solidFill>
-                      <a:prstDash val="solid"/>
-                      <a:round/>
-                      <a:headEnd type="none" w="med" len="med"/>
-                      <a:tailEnd type="none" w="med" len="med"/>
-                    </a:lnB>
-                  </a:tcPr>
-                </a:tc>
-                <a:tc>
-                  <a:txBody>
-                    <a:bodyPr/>
-                    <a:lstStyle/>
-                    <a:p>
-                      <a:pPr algn="ctr" indent="0" marL="0">
-                        <a:buNone/>
-                      </a:pPr>
-                      <a:r>
-                        <a:rPr lang="en-US" sz="500" dirty="0">
-                          <a:solidFill>
-                            <a:srgbClr val="000000"/>
-                          </a:solidFill>
-                          <a:latin typeface="Calibri" pitchFamily="34" charset="0"/>
-                          <a:ea typeface="Calibri" pitchFamily="34" charset="-122"/>
-                          <a:cs typeface="Calibri" pitchFamily="34" charset="-120"/>
-                        </a:rPr>
-                        <a:t>0.42%</a:t>
+                        <a:t>0.66%</a:t>
                       </a:r>
                       <a:endParaRPr lang="en-US" sz="500" dirty="0">
                         <a:latin typeface="Calibri" charset="0"/>
@@ -11613,7 +14837,7 @@
                           <a:ea typeface="Calibri" pitchFamily="34" charset="-122"/>
                           <a:cs typeface="Calibri" pitchFamily="34" charset="-120"/>
                         </a:rPr>
-                        <a:t>6.32%</a:t>
+                        <a:t>6.78%</a:t>
                       </a:r>
                       <a:endParaRPr lang="en-US" sz="500" dirty="0">
                         <a:latin typeface="Calibri" charset="0"/>
@@ -11680,7 +14904,7 @@
                           <a:ea typeface="Calibri" pitchFamily="34" charset="-122"/>
                           <a:cs typeface="Calibri" pitchFamily="34" charset="-120"/>
                         </a:rPr>
-                        <a:t>2025</a:t>
+                        <a:t>2026</a:t>
                       </a:r>
                       <a:endParaRPr lang="en-US" sz="500" dirty="0">
                         <a:latin typeface="Calibri" charset="0"/>
@@ -11810,7 +15034,7 @@
                           <a:ea typeface="Calibri" pitchFamily="34" charset="-122"/>
                           <a:cs typeface="Calibri" pitchFamily="34" charset="-120"/>
                         </a:rPr>
-                        <a:t>0.42%</a:t>
+                        <a:t>0.39%</a:t>
                       </a:r>
                       <a:endParaRPr lang="en-US" sz="500" dirty="0">
                         <a:latin typeface="Calibri" charset="0"/>
@@ -11875,592 +15099,7 @@
                           <a:ea typeface="Calibri" pitchFamily="34" charset="-122"/>
                           <a:cs typeface="Calibri" pitchFamily="34" charset="-120"/>
                         </a:rPr>
-                        <a:t>0.42%</a:t>
-                      </a:r>
-                      <a:endParaRPr lang="en-US" sz="500" dirty="0">
-                        <a:latin typeface="Calibri" charset="0"/>
-                        <a:ea typeface="Calibri" charset="0"/>
-                        <a:cs typeface="Calibri" charset="0"/>
-                      </a:endParaRPr>
-                    </a:p>
-                  </a:txBody>
-                  <a:tcPr marL="91440" marR="91440" marT="45720" marB="45720">
-                    <a:lnL w="2540" cap="flat" cmpd="sng" algn="ctr">
-                      <a:solidFill>
-                        <a:srgbClr val="EEEEEE"/>
-                      </a:solidFill>
-                      <a:prstDash val="solid"/>
-                      <a:round/>
-                      <a:headEnd type="none" w="med" len="med"/>
-                      <a:tailEnd type="none" w="med" len="med"/>
-                    </a:lnL>
-                    <a:lnR w="2540" cap="flat" cmpd="sng" algn="ctr">
-                      <a:solidFill>
-                        <a:srgbClr val="EEEEEE"/>
-                      </a:solidFill>
-                      <a:prstDash val="solid"/>
-                      <a:round/>
-                      <a:headEnd type="none" w="med" len="med"/>
-                      <a:tailEnd type="none" w="med" len="med"/>
-                    </a:lnR>
-                    <a:lnT w="2540" cap="flat" cmpd="sng" algn="ctr">
-                      <a:solidFill>
-                        <a:srgbClr val="EEEEEE"/>
-                      </a:solidFill>
-                      <a:prstDash val="solid"/>
-                      <a:round/>
-                      <a:headEnd type="none" w="med" len="med"/>
-                      <a:tailEnd type="none" w="med" len="med"/>
-                    </a:lnT>
-                    <a:lnB w="2540" cap="flat" cmpd="sng" algn="ctr">
-                      <a:solidFill>
-                        <a:srgbClr val="EEEEEE"/>
-                      </a:solidFill>
-                      <a:prstDash val="solid"/>
-                      <a:round/>
-                      <a:headEnd type="none" w="med" len="med"/>
-                      <a:tailEnd type="none" w="med" len="med"/>
-                    </a:lnB>
-                  </a:tcPr>
-                </a:tc>
-                <a:tc>
-                  <a:txBody>
-                    <a:bodyPr/>
-                    <a:lstStyle/>
-                    <a:p>
-                      <a:pPr algn="ctr" indent="0" marL="0">
-                        <a:buNone/>
-                      </a:pPr>
-                      <a:r>
-                        <a:rPr lang="en-US" sz="500" dirty="0">
-                          <a:solidFill>
-                            <a:srgbClr val="777777"/>
-                          </a:solidFill>
-                          <a:latin typeface="Calibri" pitchFamily="34" charset="0"/>
-                          <a:ea typeface="Calibri" pitchFamily="34" charset="-122"/>
-                          <a:cs typeface="Calibri" pitchFamily="34" charset="-120"/>
-                        </a:rPr>
-                        <a:t>0.42%</a:t>
-                      </a:r>
-                      <a:endParaRPr lang="en-US" sz="500" dirty="0">
-                        <a:latin typeface="Calibri" charset="0"/>
-                        <a:ea typeface="Calibri" charset="0"/>
-                        <a:cs typeface="Calibri" charset="0"/>
-                      </a:endParaRPr>
-                    </a:p>
-                  </a:txBody>
-                  <a:tcPr marL="91440" marR="91440" marT="45720" marB="45720">
-                    <a:lnL w="2540" cap="flat" cmpd="sng" algn="ctr">
-                      <a:solidFill>
-                        <a:srgbClr val="EEEEEE"/>
-                      </a:solidFill>
-                      <a:prstDash val="solid"/>
-                      <a:round/>
-                      <a:headEnd type="none" w="med" len="med"/>
-                      <a:tailEnd type="none" w="med" len="med"/>
-                    </a:lnL>
-                    <a:lnR w="2540" cap="flat" cmpd="sng" algn="ctr">
-                      <a:solidFill>
-                        <a:srgbClr val="EEEEEE"/>
-                      </a:solidFill>
-                      <a:prstDash val="solid"/>
-                      <a:round/>
-                      <a:headEnd type="none" w="med" len="med"/>
-                      <a:tailEnd type="none" w="med" len="med"/>
-                    </a:lnR>
-                    <a:lnT w="2540" cap="flat" cmpd="sng" algn="ctr">
-                      <a:solidFill>
-                        <a:srgbClr val="EEEEEE"/>
-                      </a:solidFill>
-                      <a:prstDash val="solid"/>
-                      <a:round/>
-                      <a:headEnd type="none" w="med" len="med"/>
-                      <a:tailEnd type="none" w="med" len="med"/>
-                    </a:lnT>
-                    <a:lnB w="2540" cap="flat" cmpd="sng" algn="ctr">
-                      <a:solidFill>
-                        <a:srgbClr val="EEEEEE"/>
-                      </a:solidFill>
-                      <a:prstDash val="solid"/>
-                      <a:round/>
-                      <a:headEnd type="none" w="med" len="med"/>
-                      <a:tailEnd type="none" w="med" len="med"/>
-                    </a:lnB>
-                  </a:tcPr>
-                </a:tc>
-                <a:tc>
-                  <a:txBody>
-                    <a:bodyPr/>
-                    <a:lstStyle/>
-                    <a:p>
-                      <a:pPr algn="ctr" indent="0" marL="0">
-                        <a:buNone/>
-                      </a:pPr>
-                      <a:r>
-                        <a:rPr lang="en-US" sz="500" dirty="0">
-                          <a:solidFill>
-                            <a:srgbClr val="777777"/>
-                          </a:solidFill>
-                          <a:latin typeface="Calibri" pitchFamily="34" charset="0"/>
-                          <a:ea typeface="Calibri" pitchFamily="34" charset="-122"/>
-                          <a:cs typeface="Calibri" pitchFamily="34" charset="-120"/>
-                        </a:rPr>
-                        <a:t>0.42%</a:t>
-                      </a:r>
-                      <a:endParaRPr lang="en-US" sz="500" dirty="0">
-                        <a:latin typeface="Calibri" charset="0"/>
-                        <a:ea typeface="Calibri" charset="0"/>
-                        <a:cs typeface="Calibri" charset="0"/>
-                      </a:endParaRPr>
-                    </a:p>
-                  </a:txBody>
-                  <a:tcPr marL="91440" marR="91440" marT="45720" marB="45720">
-                    <a:lnL w="2540" cap="flat" cmpd="sng" algn="ctr">
-                      <a:solidFill>
-                        <a:srgbClr val="EEEEEE"/>
-                      </a:solidFill>
-                      <a:prstDash val="solid"/>
-                      <a:round/>
-                      <a:headEnd type="none" w="med" len="med"/>
-                      <a:tailEnd type="none" w="med" len="med"/>
-                    </a:lnL>
-                    <a:lnR w="2540" cap="flat" cmpd="sng" algn="ctr">
-                      <a:solidFill>
-                        <a:srgbClr val="EEEEEE"/>
-                      </a:solidFill>
-                      <a:prstDash val="solid"/>
-                      <a:round/>
-                      <a:headEnd type="none" w="med" len="med"/>
-                      <a:tailEnd type="none" w="med" len="med"/>
-                    </a:lnR>
-                    <a:lnT w="2540" cap="flat" cmpd="sng" algn="ctr">
-                      <a:solidFill>
-                        <a:srgbClr val="EEEEEE"/>
-                      </a:solidFill>
-                      <a:prstDash val="solid"/>
-                      <a:round/>
-                      <a:headEnd type="none" w="med" len="med"/>
-                      <a:tailEnd type="none" w="med" len="med"/>
-                    </a:lnT>
-                    <a:lnB w="2540" cap="flat" cmpd="sng" algn="ctr">
-                      <a:solidFill>
-                        <a:srgbClr val="EEEEEE"/>
-                      </a:solidFill>
-                      <a:prstDash val="solid"/>
-                      <a:round/>
-                      <a:headEnd type="none" w="med" len="med"/>
-                      <a:tailEnd type="none" w="med" len="med"/>
-                    </a:lnB>
-                  </a:tcPr>
-                </a:tc>
-                <a:tc>
-                  <a:txBody>
-                    <a:bodyPr/>
-                    <a:lstStyle/>
-                    <a:p>
-                      <a:pPr algn="ctr" indent="0" marL="0">
-                        <a:buNone/>
-                      </a:pPr>
-                      <a:r>
-                        <a:rPr lang="en-US" sz="500" dirty="0">
-                          <a:solidFill>
-                            <a:srgbClr val="777777"/>
-                          </a:solidFill>
-                          <a:latin typeface="Calibri" pitchFamily="34" charset="0"/>
-                          <a:ea typeface="Calibri" pitchFamily="34" charset="-122"/>
-                          <a:cs typeface="Calibri" pitchFamily="34" charset="-120"/>
-                        </a:rPr>
-                        <a:t>0.42%</a:t>
-                      </a:r>
-                      <a:endParaRPr lang="en-US" sz="500" dirty="0">
-                        <a:latin typeface="Calibri" charset="0"/>
-                        <a:ea typeface="Calibri" charset="0"/>
-                        <a:cs typeface="Calibri" charset="0"/>
-                      </a:endParaRPr>
-                    </a:p>
-                  </a:txBody>
-                  <a:tcPr marL="91440" marR="91440" marT="45720" marB="45720">
-                    <a:lnL w="2540" cap="flat" cmpd="sng" algn="ctr">
-                      <a:solidFill>
-                        <a:srgbClr val="EEEEEE"/>
-                      </a:solidFill>
-                      <a:prstDash val="solid"/>
-                      <a:round/>
-                      <a:headEnd type="none" w="med" len="med"/>
-                      <a:tailEnd type="none" w="med" len="med"/>
-                    </a:lnL>
-                    <a:lnR w="2540" cap="flat" cmpd="sng" algn="ctr">
-                      <a:solidFill>
-                        <a:srgbClr val="EEEEEE"/>
-                      </a:solidFill>
-                      <a:prstDash val="solid"/>
-                      <a:round/>
-                      <a:headEnd type="none" w="med" len="med"/>
-                      <a:tailEnd type="none" w="med" len="med"/>
-                    </a:lnR>
-                    <a:lnT w="2540" cap="flat" cmpd="sng" algn="ctr">
-                      <a:solidFill>
-                        <a:srgbClr val="EEEEEE"/>
-                      </a:solidFill>
-                      <a:prstDash val="solid"/>
-                      <a:round/>
-                      <a:headEnd type="none" w="med" len="med"/>
-                      <a:tailEnd type="none" w="med" len="med"/>
-                    </a:lnT>
-                    <a:lnB w="2540" cap="flat" cmpd="sng" algn="ctr">
-                      <a:solidFill>
-                        <a:srgbClr val="EEEEEE"/>
-                      </a:solidFill>
-                      <a:prstDash val="solid"/>
-                      <a:round/>
-                      <a:headEnd type="none" w="med" len="med"/>
-                      <a:tailEnd type="none" w="med" len="med"/>
-                    </a:lnB>
-                  </a:tcPr>
-                </a:tc>
-                <a:tc>
-                  <a:txBody>
-                    <a:bodyPr/>
-                    <a:lstStyle/>
-                    <a:p>
-                      <a:pPr algn="ctr" indent="0" marL="0">
-                        <a:buNone/>
-                      </a:pPr>
-                      <a:r>
-                        <a:rPr lang="en-US" sz="500" dirty="0">
-                          <a:solidFill>
-                            <a:srgbClr val="777777"/>
-                          </a:solidFill>
-                          <a:latin typeface="Calibri" pitchFamily="34" charset="0"/>
-                          <a:ea typeface="Calibri" pitchFamily="34" charset="-122"/>
-                          <a:cs typeface="Calibri" pitchFamily="34" charset="-120"/>
-                        </a:rPr>
-                        <a:t>0.42%</a:t>
-                      </a:r>
-                      <a:endParaRPr lang="en-US" sz="500" dirty="0">
-                        <a:latin typeface="Calibri" charset="0"/>
-                        <a:ea typeface="Calibri" charset="0"/>
-                        <a:cs typeface="Calibri" charset="0"/>
-                      </a:endParaRPr>
-                    </a:p>
-                  </a:txBody>
-                  <a:tcPr marL="91440" marR="91440" marT="45720" marB="45720">
-                    <a:lnL w="2540" cap="flat" cmpd="sng" algn="ctr">
-                      <a:solidFill>
-                        <a:srgbClr val="EEEEEE"/>
-                      </a:solidFill>
-                      <a:prstDash val="solid"/>
-                      <a:round/>
-                      <a:headEnd type="none" w="med" len="med"/>
-                      <a:tailEnd type="none" w="med" len="med"/>
-                    </a:lnL>
-                    <a:lnR w="2540" cap="flat" cmpd="sng" algn="ctr">
-                      <a:solidFill>
-                        <a:srgbClr val="EEEEEE"/>
-                      </a:solidFill>
-                      <a:prstDash val="solid"/>
-                      <a:round/>
-                      <a:headEnd type="none" w="med" len="med"/>
-                      <a:tailEnd type="none" w="med" len="med"/>
-                    </a:lnR>
-                    <a:lnT w="2540" cap="flat" cmpd="sng" algn="ctr">
-                      <a:solidFill>
-                        <a:srgbClr val="EEEEEE"/>
-                      </a:solidFill>
-                      <a:prstDash val="solid"/>
-                      <a:round/>
-                      <a:headEnd type="none" w="med" len="med"/>
-                      <a:tailEnd type="none" w="med" len="med"/>
-                    </a:lnT>
-                    <a:lnB w="2540" cap="flat" cmpd="sng" algn="ctr">
-                      <a:solidFill>
-                        <a:srgbClr val="EEEEEE"/>
-                      </a:solidFill>
-                      <a:prstDash val="solid"/>
-                      <a:round/>
-                      <a:headEnd type="none" w="med" len="med"/>
-                      <a:tailEnd type="none" w="med" len="med"/>
-                    </a:lnB>
-                  </a:tcPr>
-                </a:tc>
-                <a:tc>
-                  <a:txBody>
-                    <a:bodyPr/>
-                    <a:lstStyle/>
-                    <a:p>
-                      <a:pPr algn="ctr" indent="0" marL="0">
-                        <a:buNone/>
-                      </a:pPr>
-                      <a:r>
-                        <a:rPr lang="en-US" sz="500" dirty="0">
-                          <a:solidFill>
-                            <a:srgbClr val="777777"/>
-                          </a:solidFill>
-                          <a:latin typeface="Calibri" pitchFamily="34" charset="0"/>
-                          <a:ea typeface="Calibri" pitchFamily="34" charset="-122"/>
-                          <a:cs typeface="Calibri" pitchFamily="34" charset="-120"/>
-                        </a:rPr>
-                        <a:t>0.41%</a:t>
-                      </a:r>
-                      <a:endParaRPr lang="en-US" sz="500" dirty="0">
-                        <a:latin typeface="Calibri" charset="0"/>
-                        <a:ea typeface="Calibri" charset="0"/>
-                        <a:cs typeface="Calibri" charset="0"/>
-                      </a:endParaRPr>
-                    </a:p>
-                  </a:txBody>
-                  <a:tcPr marL="91440" marR="91440" marT="45720" marB="45720">
-                    <a:lnL w="2540" cap="flat" cmpd="sng" algn="ctr">
-                      <a:solidFill>
-                        <a:srgbClr val="EEEEEE"/>
-                      </a:solidFill>
-                      <a:prstDash val="solid"/>
-                      <a:round/>
-                      <a:headEnd type="none" w="med" len="med"/>
-                      <a:tailEnd type="none" w="med" len="med"/>
-                    </a:lnL>
-                    <a:lnR w="2540" cap="flat" cmpd="sng" algn="ctr">
-                      <a:solidFill>
-                        <a:srgbClr val="EEEEEE"/>
-                      </a:solidFill>
-                      <a:prstDash val="solid"/>
-                      <a:round/>
-                      <a:headEnd type="none" w="med" len="med"/>
-                      <a:tailEnd type="none" w="med" len="med"/>
-                    </a:lnR>
-                    <a:lnT w="2540" cap="flat" cmpd="sng" algn="ctr">
-                      <a:solidFill>
-                        <a:srgbClr val="EEEEEE"/>
-                      </a:solidFill>
-                      <a:prstDash val="solid"/>
-                      <a:round/>
-                      <a:headEnd type="none" w="med" len="med"/>
-                      <a:tailEnd type="none" w="med" len="med"/>
-                    </a:lnT>
-                    <a:lnB w="2540" cap="flat" cmpd="sng" algn="ctr">
-                      <a:solidFill>
-                        <a:srgbClr val="EEEEEE"/>
-                      </a:solidFill>
-                      <a:prstDash val="solid"/>
-                      <a:round/>
-                      <a:headEnd type="none" w="med" len="med"/>
-                      <a:tailEnd type="none" w="med" len="med"/>
-                    </a:lnB>
-                  </a:tcPr>
-                </a:tc>
-                <a:tc>
-                  <a:txBody>
-                    <a:bodyPr/>
-                    <a:lstStyle/>
-                    <a:p>
-                      <a:pPr algn="ctr" indent="0" marL="0">
-                        <a:buNone/>
-                      </a:pPr>
-                      <a:r>
-                        <a:rPr lang="en-US" sz="500" dirty="0">
-                          <a:solidFill>
-                            <a:srgbClr val="777777"/>
-                          </a:solidFill>
-                          <a:latin typeface="Calibri" pitchFamily="34" charset="0"/>
-                          <a:ea typeface="Calibri" pitchFamily="34" charset="-122"/>
-                          <a:cs typeface="Calibri" pitchFamily="34" charset="-120"/>
-                        </a:rPr>
-                        <a:t>0.40%</a:t>
-                      </a:r>
-                      <a:endParaRPr lang="en-US" sz="500" dirty="0">
-                        <a:latin typeface="Calibri" charset="0"/>
-                        <a:ea typeface="Calibri" charset="0"/>
-                        <a:cs typeface="Calibri" charset="0"/>
-                      </a:endParaRPr>
-                    </a:p>
-                  </a:txBody>
-                  <a:tcPr marL="91440" marR="91440" marT="45720" marB="45720">
-                    <a:lnL w="2540" cap="flat" cmpd="sng" algn="ctr">
-                      <a:solidFill>
-                        <a:srgbClr val="EEEEEE"/>
-                      </a:solidFill>
-                      <a:prstDash val="solid"/>
-                      <a:round/>
-                      <a:headEnd type="none" w="med" len="med"/>
-                      <a:tailEnd type="none" w="med" len="med"/>
-                    </a:lnL>
-                    <a:lnR w="2540" cap="flat" cmpd="sng" algn="ctr">
-                      <a:solidFill>
-                        <a:srgbClr val="EEEEEE"/>
-                      </a:solidFill>
-                      <a:prstDash val="solid"/>
-                      <a:round/>
-                      <a:headEnd type="none" w="med" len="med"/>
-                      <a:tailEnd type="none" w="med" len="med"/>
-                    </a:lnR>
-                    <a:lnT w="2540" cap="flat" cmpd="sng" algn="ctr">
-                      <a:solidFill>
-                        <a:srgbClr val="EEEEEE"/>
-                      </a:solidFill>
-                      <a:prstDash val="solid"/>
-                      <a:round/>
-                      <a:headEnd type="none" w="med" len="med"/>
-                      <a:tailEnd type="none" w="med" len="med"/>
-                    </a:lnT>
-                    <a:lnB w="2540" cap="flat" cmpd="sng" algn="ctr">
-                      <a:solidFill>
-                        <a:srgbClr val="EEEEEE"/>
-                      </a:solidFill>
-                      <a:prstDash val="solid"/>
-                      <a:round/>
-                      <a:headEnd type="none" w="med" len="med"/>
-                      <a:tailEnd type="none" w="med" len="med"/>
-                    </a:lnB>
-                  </a:tcPr>
-                </a:tc>
-                <a:tc>
-                  <a:txBody>
-                    <a:bodyPr/>
-                    <a:lstStyle/>
-                    <a:p>
-                      <a:pPr algn="ctr" indent="0" marL="0">
-                        <a:buNone/>
-                      </a:pPr>
-                      <a:r>
-                        <a:rPr lang="en-US" sz="500" dirty="0">
-                          <a:solidFill>
-                            <a:srgbClr val="777777"/>
-                          </a:solidFill>
-                          <a:latin typeface="Calibri" pitchFamily="34" charset="0"/>
-                          <a:ea typeface="Calibri" pitchFamily="34" charset="-122"/>
-                          <a:cs typeface="Calibri" pitchFamily="34" charset="-120"/>
-                        </a:rPr>
-                        <a:t>0.40%</a:t>
-                      </a:r>
-                      <a:endParaRPr lang="en-US" sz="500" dirty="0">
-                        <a:latin typeface="Calibri" charset="0"/>
-                        <a:ea typeface="Calibri" charset="0"/>
-                        <a:cs typeface="Calibri" charset="0"/>
-                      </a:endParaRPr>
-                    </a:p>
-                  </a:txBody>
-                  <a:tcPr marL="91440" marR="91440" marT="45720" marB="45720">
-                    <a:lnL w="2540" cap="flat" cmpd="sng" algn="ctr">
-                      <a:solidFill>
-                        <a:srgbClr val="EEEEEE"/>
-                      </a:solidFill>
-                      <a:prstDash val="solid"/>
-                      <a:round/>
-                      <a:headEnd type="none" w="med" len="med"/>
-                      <a:tailEnd type="none" w="med" len="med"/>
-                    </a:lnL>
-                    <a:lnR w="2540" cap="flat" cmpd="sng" algn="ctr">
-                      <a:solidFill>
-                        <a:srgbClr val="EEEEEE"/>
-                      </a:solidFill>
-                      <a:prstDash val="solid"/>
-                      <a:round/>
-                      <a:headEnd type="none" w="med" len="med"/>
-                      <a:tailEnd type="none" w="med" len="med"/>
-                    </a:lnR>
-                    <a:lnT w="2540" cap="flat" cmpd="sng" algn="ctr">
-                      <a:solidFill>
-                        <a:srgbClr val="EEEEEE"/>
-                      </a:solidFill>
-                      <a:prstDash val="solid"/>
-                      <a:round/>
-                      <a:headEnd type="none" w="med" len="med"/>
-                      <a:tailEnd type="none" w="med" len="med"/>
-                    </a:lnT>
-                    <a:lnB w="2540" cap="flat" cmpd="sng" algn="ctr">
-                      <a:solidFill>
-                        <a:srgbClr val="EEEEEE"/>
-                      </a:solidFill>
-                      <a:prstDash val="solid"/>
-                      <a:round/>
-                      <a:headEnd type="none" w="med" len="med"/>
-                      <a:tailEnd type="none" w="med" len="med"/>
-                    </a:lnB>
-                  </a:tcPr>
-                </a:tc>
-                <a:tc>
-                  <a:txBody>
-                    <a:bodyPr/>
-                    <a:lstStyle/>
-                    <a:p>
-                      <a:pPr algn="ctr" indent="0" marL="0">
-                        <a:buNone/>
-                      </a:pPr>
-                      <a:r>
-                        <a:rPr lang="en-US" sz="500" dirty="0">
-                          <a:solidFill>
-                            <a:srgbClr val="777777"/>
-                          </a:solidFill>
-                          <a:latin typeface="Calibri" pitchFamily="34" charset="0"/>
-                          <a:ea typeface="Calibri" pitchFamily="34" charset="-122"/>
-                          <a:cs typeface="Calibri" pitchFamily="34" charset="-120"/>
-                        </a:rPr>
-                        <a:t>0.40%</a:t>
-                      </a:r>
-                      <a:endParaRPr lang="en-US" sz="500" dirty="0">
-                        <a:latin typeface="Calibri" charset="0"/>
-                        <a:ea typeface="Calibri" charset="0"/>
-                        <a:cs typeface="Calibri" charset="0"/>
-                      </a:endParaRPr>
-                    </a:p>
-                  </a:txBody>
-                  <a:tcPr marL="91440" marR="91440" marT="45720" marB="45720">
-                    <a:lnL w="2540" cap="flat" cmpd="sng" algn="ctr">
-                      <a:solidFill>
-                        <a:srgbClr val="EEEEEE"/>
-                      </a:solidFill>
-                      <a:prstDash val="solid"/>
-                      <a:round/>
-                      <a:headEnd type="none" w="med" len="med"/>
-                      <a:tailEnd type="none" w="med" len="med"/>
-                    </a:lnL>
-                    <a:lnR w="2540" cap="flat" cmpd="sng" algn="ctr">
-                      <a:solidFill>
-                        <a:srgbClr val="EEEEEE"/>
-                      </a:solidFill>
-                      <a:prstDash val="solid"/>
-                      <a:round/>
-                      <a:headEnd type="none" w="med" len="med"/>
-                      <a:tailEnd type="none" w="med" len="med"/>
-                    </a:lnR>
-                    <a:lnT w="2540" cap="flat" cmpd="sng" algn="ctr">
-                      <a:solidFill>
-                        <a:srgbClr val="EEEEEE"/>
-                      </a:solidFill>
-                      <a:prstDash val="solid"/>
-                      <a:round/>
-                      <a:headEnd type="none" w="med" len="med"/>
-                      <a:tailEnd type="none" w="med" len="med"/>
-                    </a:lnT>
-                    <a:lnB w="2540" cap="flat" cmpd="sng" algn="ctr">
-                      <a:solidFill>
-                        <a:srgbClr val="EEEEEE"/>
-                      </a:solidFill>
-                      <a:prstDash val="solid"/>
-                      <a:round/>
-                      <a:headEnd type="none" w="med" len="med"/>
-                      <a:tailEnd type="none" w="med" len="med"/>
-                    </a:lnB>
-                  </a:tcPr>
-                </a:tc>
-                <a:tc>
-                  <a:txBody>
-                    <a:bodyPr/>
-                    <a:lstStyle/>
-                    <a:p>
-                      <a:pPr algn="ctr" indent="0" marL="0">
-                        <a:buNone/>
-                      </a:pPr>
-                      <a:r>
-                        <a:rPr lang="en-US" sz="500" dirty="0">
-                          <a:solidFill>
-                            <a:srgbClr val="777777"/>
-                          </a:solidFill>
-                          <a:latin typeface="Calibri" pitchFamily="34" charset="0"/>
-                          <a:ea typeface="Calibri" pitchFamily="34" charset="-122"/>
-                          <a:cs typeface="Calibri" pitchFamily="34" charset="-120"/>
-                        </a:rPr>
-                        <a:t>0.40%</a:t>
+                        <a:t>0.36%</a:t>
                       </a:r>
                       <a:endParaRPr lang="en-US" sz="500" dirty="0">
                         <a:latin typeface="Calibri" charset="0"/>
@@ -12582,6 +15221,503 @@
                         <a:buNone/>
                       </a:pPr>
                       <a:r>
+                        <a:rPr lang="en-US" sz="500" dirty="0">
+                          <a:solidFill>
+                            <a:srgbClr val="777777"/>
+                          </a:solidFill>
+                          <a:latin typeface="Calibri" pitchFamily="34" charset="0"/>
+                          <a:ea typeface="Calibri" pitchFamily="34" charset="-122"/>
+                          <a:cs typeface="Calibri" pitchFamily="34" charset="-120"/>
+                        </a:rPr>
+                        <a:t>0.38%</a:t>
+                      </a:r>
+                      <a:endParaRPr lang="en-US" sz="500" dirty="0">
+                        <a:latin typeface="Calibri" charset="0"/>
+                        <a:ea typeface="Calibri" charset="0"/>
+                        <a:cs typeface="Calibri" charset="0"/>
+                      </a:endParaRPr>
+                    </a:p>
+                  </a:txBody>
+                  <a:tcPr marL="91440" marR="91440" marT="45720" marB="45720">
+                    <a:lnL w="2540" cap="flat" cmpd="sng" algn="ctr">
+                      <a:solidFill>
+                        <a:srgbClr val="EEEEEE"/>
+                      </a:solidFill>
+                      <a:prstDash val="solid"/>
+                      <a:round/>
+                      <a:headEnd type="none" w="med" len="med"/>
+                      <a:tailEnd type="none" w="med" len="med"/>
+                    </a:lnL>
+                    <a:lnR w="2540" cap="flat" cmpd="sng" algn="ctr">
+                      <a:solidFill>
+                        <a:srgbClr val="EEEEEE"/>
+                      </a:solidFill>
+                      <a:prstDash val="solid"/>
+                      <a:round/>
+                      <a:headEnd type="none" w="med" len="med"/>
+                      <a:tailEnd type="none" w="med" len="med"/>
+                    </a:lnR>
+                    <a:lnT w="2540" cap="flat" cmpd="sng" algn="ctr">
+                      <a:solidFill>
+                        <a:srgbClr val="EEEEEE"/>
+                      </a:solidFill>
+                      <a:prstDash val="solid"/>
+                      <a:round/>
+                      <a:headEnd type="none" w="med" len="med"/>
+                      <a:tailEnd type="none" w="med" len="med"/>
+                    </a:lnT>
+                    <a:lnB w="2540" cap="flat" cmpd="sng" algn="ctr">
+                      <a:solidFill>
+                        <a:srgbClr val="EEEEEE"/>
+                      </a:solidFill>
+                      <a:prstDash val="solid"/>
+                      <a:round/>
+                      <a:headEnd type="none" w="med" len="med"/>
+                      <a:tailEnd type="none" w="med" len="med"/>
+                    </a:lnB>
+                  </a:tcPr>
+                </a:tc>
+                <a:tc>
+                  <a:txBody>
+                    <a:bodyPr/>
+                    <a:lstStyle/>
+                    <a:p>
+                      <a:pPr algn="ctr" indent="0" marL="0">
+                        <a:buNone/>
+                      </a:pPr>
+                      <a:endParaRPr lang="en-US" sz="500" dirty="0">
+                        <a:latin typeface="Calibri" charset="0"/>
+                        <a:ea typeface="Calibri" charset="0"/>
+                        <a:cs typeface="Calibri" charset="0"/>
+                      </a:endParaRPr>
+                    </a:p>
+                  </a:txBody>
+                  <a:tcPr marL="91440" marR="91440" marT="45720" marB="45720">
+                    <a:lnL w="2540" cap="flat" cmpd="sng" algn="ctr">
+                      <a:solidFill>
+                        <a:srgbClr val="EEEEEE"/>
+                      </a:solidFill>
+                      <a:prstDash val="solid"/>
+                      <a:round/>
+                      <a:headEnd type="none" w="med" len="med"/>
+                      <a:tailEnd type="none" w="med" len="med"/>
+                    </a:lnL>
+                    <a:lnR w="2540" cap="flat" cmpd="sng" algn="ctr">
+                      <a:solidFill>
+                        <a:srgbClr val="EEEEEE"/>
+                      </a:solidFill>
+                      <a:prstDash val="solid"/>
+                      <a:round/>
+                      <a:headEnd type="none" w="med" len="med"/>
+                      <a:tailEnd type="none" w="med" len="med"/>
+                    </a:lnR>
+                    <a:lnT w="2540" cap="flat" cmpd="sng" algn="ctr">
+                      <a:solidFill>
+                        <a:srgbClr val="EEEEEE"/>
+                      </a:solidFill>
+                      <a:prstDash val="solid"/>
+                      <a:round/>
+                      <a:headEnd type="none" w="med" len="med"/>
+                      <a:tailEnd type="none" w="med" len="med"/>
+                    </a:lnT>
+                    <a:lnB w="2540" cap="flat" cmpd="sng" algn="ctr">
+                      <a:solidFill>
+                        <a:srgbClr val="EEEEEE"/>
+                      </a:solidFill>
+                      <a:prstDash val="solid"/>
+                      <a:round/>
+                      <a:headEnd type="none" w="med" len="med"/>
+                      <a:tailEnd type="none" w="med" len="med"/>
+                    </a:lnB>
+                  </a:tcPr>
+                </a:tc>
+                <a:tc>
+                  <a:txBody>
+                    <a:bodyPr/>
+                    <a:lstStyle/>
+                    <a:p>
+                      <a:pPr algn="ctr" indent="0" marL="0">
+                        <a:buNone/>
+                      </a:pPr>
+                      <a:endParaRPr lang="en-US" sz="500" dirty="0">
+                        <a:latin typeface="Calibri" charset="0"/>
+                        <a:ea typeface="Calibri" charset="0"/>
+                        <a:cs typeface="Calibri" charset="0"/>
+                      </a:endParaRPr>
+                    </a:p>
+                  </a:txBody>
+                  <a:tcPr marL="91440" marR="91440" marT="45720" marB="45720">
+                    <a:lnL w="2540" cap="flat" cmpd="sng" algn="ctr">
+                      <a:solidFill>
+                        <a:srgbClr val="EEEEEE"/>
+                      </a:solidFill>
+                      <a:prstDash val="solid"/>
+                      <a:round/>
+                      <a:headEnd type="none" w="med" len="med"/>
+                      <a:tailEnd type="none" w="med" len="med"/>
+                    </a:lnL>
+                    <a:lnR w="2540" cap="flat" cmpd="sng" algn="ctr">
+                      <a:solidFill>
+                        <a:srgbClr val="EEEEEE"/>
+                      </a:solidFill>
+                      <a:prstDash val="solid"/>
+                      <a:round/>
+                      <a:headEnd type="none" w="med" len="med"/>
+                      <a:tailEnd type="none" w="med" len="med"/>
+                    </a:lnR>
+                    <a:lnT w="2540" cap="flat" cmpd="sng" algn="ctr">
+                      <a:solidFill>
+                        <a:srgbClr val="EEEEEE"/>
+                      </a:solidFill>
+                      <a:prstDash val="solid"/>
+                      <a:round/>
+                      <a:headEnd type="none" w="med" len="med"/>
+                      <a:tailEnd type="none" w="med" len="med"/>
+                    </a:lnT>
+                    <a:lnB w="2540" cap="flat" cmpd="sng" algn="ctr">
+                      <a:solidFill>
+                        <a:srgbClr val="EEEEEE"/>
+                      </a:solidFill>
+                      <a:prstDash val="solid"/>
+                      <a:round/>
+                      <a:headEnd type="none" w="med" len="med"/>
+                      <a:tailEnd type="none" w="med" len="med"/>
+                    </a:lnB>
+                  </a:tcPr>
+                </a:tc>
+                <a:tc>
+                  <a:txBody>
+                    <a:bodyPr/>
+                    <a:lstStyle/>
+                    <a:p>
+                      <a:pPr algn="ctr" indent="0" marL="0">
+                        <a:buNone/>
+                      </a:pPr>
+                      <a:endParaRPr lang="en-US" sz="500" dirty="0">
+                        <a:latin typeface="Calibri" charset="0"/>
+                        <a:ea typeface="Calibri" charset="0"/>
+                        <a:cs typeface="Calibri" charset="0"/>
+                      </a:endParaRPr>
+                    </a:p>
+                  </a:txBody>
+                  <a:tcPr marL="91440" marR="91440" marT="45720" marB="45720">
+                    <a:lnL w="2540" cap="flat" cmpd="sng" algn="ctr">
+                      <a:solidFill>
+                        <a:srgbClr val="EEEEEE"/>
+                      </a:solidFill>
+                      <a:prstDash val="solid"/>
+                      <a:round/>
+                      <a:headEnd type="none" w="med" len="med"/>
+                      <a:tailEnd type="none" w="med" len="med"/>
+                    </a:lnL>
+                    <a:lnR w="2540" cap="flat" cmpd="sng" algn="ctr">
+                      <a:solidFill>
+                        <a:srgbClr val="EEEEEE"/>
+                      </a:solidFill>
+                      <a:prstDash val="solid"/>
+                      <a:round/>
+                      <a:headEnd type="none" w="med" len="med"/>
+                      <a:tailEnd type="none" w="med" len="med"/>
+                    </a:lnR>
+                    <a:lnT w="2540" cap="flat" cmpd="sng" algn="ctr">
+                      <a:solidFill>
+                        <a:srgbClr val="EEEEEE"/>
+                      </a:solidFill>
+                      <a:prstDash val="solid"/>
+                      <a:round/>
+                      <a:headEnd type="none" w="med" len="med"/>
+                      <a:tailEnd type="none" w="med" len="med"/>
+                    </a:lnT>
+                    <a:lnB w="2540" cap="flat" cmpd="sng" algn="ctr">
+                      <a:solidFill>
+                        <a:srgbClr val="EEEEEE"/>
+                      </a:solidFill>
+                      <a:prstDash val="solid"/>
+                      <a:round/>
+                      <a:headEnd type="none" w="med" len="med"/>
+                      <a:tailEnd type="none" w="med" len="med"/>
+                    </a:lnB>
+                  </a:tcPr>
+                </a:tc>
+                <a:tc>
+                  <a:txBody>
+                    <a:bodyPr/>
+                    <a:lstStyle/>
+                    <a:p>
+                      <a:pPr algn="ctr" indent="0" marL="0">
+                        <a:buNone/>
+                      </a:pPr>
+                      <a:endParaRPr lang="en-US" sz="500" dirty="0">
+                        <a:latin typeface="Calibri" charset="0"/>
+                        <a:ea typeface="Calibri" charset="0"/>
+                        <a:cs typeface="Calibri" charset="0"/>
+                      </a:endParaRPr>
+                    </a:p>
+                  </a:txBody>
+                  <a:tcPr marL="91440" marR="91440" marT="45720" marB="45720">
+                    <a:lnL w="2540" cap="flat" cmpd="sng" algn="ctr">
+                      <a:solidFill>
+                        <a:srgbClr val="EEEEEE"/>
+                      </a:solidFill>
+                      <a:prstDash val="solid"/>
+                      <a:round/>
+                      <a:headEnd type="none" w="med" len="med"/>
+                      <a:tailEnd type="none" w="med" len="med"/>
+                    </a:lnL>
+                    <a:lnR w="2540" cap="flat" cmpd="sng" algn="ctr">
+                      <a:solidFill>
+                        <a:srgbClr val="EEEEEE"/>
+                      </a:solidFill>
+                      <a:prstDash val="solid"/>
+                      <a:round/>
+                      <a:headEnd type="none" w="med" len="med"/>
+                      <a:tailEnd type="none" w="med" len="med"/>
+                    </a:lnR>
+                    <a:lnT w="2540" cap="flat" cmpd="sng" algn="ctr">
+                      <a:solidFill>
+                        <a:srgbClr val="EEEEEE"/>
+                      </a:solidFill>
+                      <a:prstDash val="solid"/>
+                      <a:round/>
+                      <a:headEnd type="none" w="med" len="med"/>
+                      <a:tailEnd type="none" w="med" len="med"/>
+                    </a:lnT>
+                    <a:lnB w="2540" cap="flat" cmpd="sng" algn="ctr">
+                      <a:solidFill>
+                        <a:srgbClr val="EEEEEE"/>
+                      </a:solidFill>
+                      <a:prstDash val="solid"/>
+                      <a:round/>
+                      <a:headEnd type="none" w="med" len="med"/>
+                      <a:tailEnd type="none" w="med" len="med"/>
+                    </a:lnB>
+                  </a:tcPr>
+                </a:tc>
+                <a:tc>
+                  <a:txBody>
+                    <a:bodyPr/>
+                    <a:lstStyle/>
+                    <a:p>
+                      <a:pPr algn="ctr" indent="0" marL="0">
+                        <a:buNone/>
+                      </a:pPr>
+                      <a:endParaRPr lang="en-US" sz="500" dirty="0">
+                        <a:latin typeface="Calibri" charset="0"/>
+                        <a:ea typeface="Calibri" charset="0"/>
+                        <a:cs typeface="Calibri" charset="0"/>
+                      </a:endParaRPr>
+                    </a:p>
+                  </a:txBody>
+                  <a:tcPr marL="91440" marR="91440" marT="45720" marB="45720">
+                    <a:lnL w="2540" cap="flat" cmpd="sng" algn="ctr">
+                      <a:solidFill>
+                        <a:srgbClr val="EEEEEE"/>
+                      </a:solidFill>
+                      <a:prstDash val="solid"/>
+                      <a:round/>
+                      <a:headEnd type="none" w="med" len="med"/>
+                      <a:tailEnd type="none" w="med" len="med"/>
+                    </a:lnL>
+                    <a:lnR w="2540" cap="flat" cmpd="sng" algn="ctr">
+                      <a:solidFill>
+                        <a:srgbClr val="EEEEEE"/>
+                      </a:solidFill>
+                      <a:prstDash val="solid"/>
+                      <a:round/>
+                      <a:headEnd type="none" w="med" len="med"/>
+                      <a:tailEnd type="none" w="med" len="med"/>
+                    </a:lnR>
+                    <a:lnT w="2540" cap="flat" cmpd="sng" algn="ctr">
+                      <a:solidFill>
+                        <a:srgbClr val="EEEEEE"/>
+                      </a:solidFill>
+                      <a:prstDash val="solid"/>
+                      <a:round/>
+                      <a:headEnd type="none" w="med" len="med"/>
+                      <a:tailEnd type="none" w="med" len="med"/>
+                    </a:lnT>
+                    <a:lnB w="2540" cap="flat" cmpd="sng" algn="ctr">
+                      <a:solidFill>
+                        <a:srgbClr val="EEEEEE"/>
+                      </a:solidFill>
+                      <a:prstDash val="solid"/>
+                      <a:round/>
+                      <a:headEnd type="none" w="med" len="med"/>
+                      <a:tailEnd type="none" w="med" len="med"/>
+                    </a:lnB>
+                  </a:tcPr>
+                </a:tc>
+                <a:tc>
+                  <a:txBody>
+                    <a:bodyPr/>
+                    <a:lstStyle/>
+                    <a:p>
+                      <a:pPr algn="ctr" indent="0" marL="0">
+                        <a:buNone/>
+                      </a:pPr>
+                      <a:endParaRPr lang="en-US" sz="500" dirty="0">
+                        <a:latin typeface="Calibri" charset="0"/>
+                        <a:ea typeface="Calibri" charset="0"/>
+                        <a:cs typeface="Calibri" charset="0"/>
+                      </a:endParaRPr>
+                    </a:p>
+                  </a:txBody>
+                  <a:tcPr marL="91440" marR="91440" marT="45720" marB="45720">
+                    <a:lnL w="2540" cap="flat" cmpd="sng" algn="ctr">
+                      <a:solidFill>
+                        <a:srgbClr val="EEEEEE"/>
+                      </a:solidFill>
+                      <a:prstDash val="solid"/>
+                      <a:round/>
+                      <a:headEnd type="none" w="med" len="med"/>
+                      <a:tailEnd type="none" w="med" len="med"/>
+                    </a:lnL>
+                    <a:lnR w="2540" cap="flat" cmpd="sng" algn="ctr">
+                      <a:solidFill>
+                        <a:srgbClr val="EEEEEE"/>
+                      </a:solidFill>
+                      <a:prstDash val="solid"/>
+                      <a:round/>
+                      <a:headEnd type="none" w="med" len="med"/>
+                      <a:tailEnd type="none" w="med" len="med"/>
+                    </a:lnR>
+                    <a:lnT w="2540" cap="flat" cmpd="sng" algn="ctr">
+                      <a:solidFill>
+                        <a:srgbClr val="EEEEEE"/>
+                      </a:solidFill>
+                      <a:prstDash val="solid"/>
+                      <a:round/>
+                      <a:headEnd type="none" w="med" len="med"/>
+                      <a:tailEnd type="none" w="med" len="med"/>
+                    </a:lnT>
+                    <a:lnB w="2540" cap="flat" cmpd="sng" algn="ctr">
+                      <a:solidFill>
+                        <a:srgbClr val="EEEEEE"/>
+                      </a:solidFill>
+                      <a:prstDash val="solid"/>
+                      <a:round/>
+                      <a:headEnd type="none" w="med" len="med"/>
+                      <a:tailEnd type="none" w="med" len="med"/>
+                    </a:lnB>
+                  </a:tcPr>
+                </a:tc>
+                <a:tc>
+                  <a:txBody>
+                    <a:bodyPr/>
+                    <a:lstStyle/>
+                    <a:p>
+                      <a:pPr algn="ctr" indent="0" marL="0">
+                        <a:buNone/>
+                      </a:pPr>
+                      <a:endParaRPr lang="en-US" sz="500" dirty="0">
+                        <a:latin typeface="Calibri" charset="0"/>
+                        <a:ea typeface="Calibri" charset="0"/>
+                        <a:cs typeface="Calibri" charset="0"/>
+                      </a:endParaRPr>
+                    </a:p>
+                  </a:txBody>
+                  <a:tcPr marL="91440" marR="91440" marT="45720" marB="45720">
+                    <a:lnL w="2540" cap="flat" cmpd="sng" algn="ctr">
+                      <a:solidFill>
+                        <a:srgbClr val="EEEEEE"/>
+                      </a:solidFill>
+                      <a:prstDash val="solid"/>
+                      <a:round/>
+                      <a:headEnd type="none" w="med" len="med"/>
+                      <a:tailEnd type="none" w="med" len="med"/>
+                    </a:lnL>
+                    <a:lnR w="2540" cap="flat" cmpd="sng" algn="ctr">
+                      <a:solidFill>
+                        <a:srgbClr val="EEEEEE"/>
+                      </a:solidFill>
+                      <a:prstDash val="solid"/>
+                      <a:round/>
+                      <a:headEnd type="none" w="med" len="med"/>
+                      <a:tailEnd type="none" w="med" len="med"/>
+                    </a:lnR>
+                    <a:lnT w="2540" cap="flat" cmpd="sng" algn="ctr">
+                      <a:solidFill>
+                        <a:srgbClr val="EEEEEE"/>
+                      </a:solidFill>
+                      <a:prstDash val="solid"/>
+                      <a:round/>
+                      <a:headEnd type="none" w="med" len="med"/>
+                      <a:tailEnd type="none" w="med" len="med"/>
+                    </a:lnT>
+                    <a:lnB w="2540" cap="flat" cmpd="sng" algn="ctr">
+                      <a:solidFill>
+                        <a:srgbClr val="EEEEEE"/>
+                      </a:solidFill>
+                      <a:prstDash val="solid"/>
+                      <a:round/>
+                      <a:headEnd type="none" w="med" len="med"/>
+                      <a:tailEnd type="none" w="med" len="med"/>
+                    </a:lnB>
+                  </a:tcPr>
+                </a:tc>
+                <a:tc>
+                  <a:txBody>
+                    <a:bodyPr/>
+                    <a:lstStyle/>
+                    <a:p>
+                      <a:pPr algn="ctr" indent="0" marL="0">
+                        <a:buNone/>
+                      </a:pPr>
+                      <a:endParaRPr lang="en-US" sz="500" dirty="0">
+                        <a:latin typeface="Calibri" charset="0"/>
+                        <a:ea typeface="Calibri" charset="0"/>
+                        <a:cs typeface="Calibri" charset="0"/>
+                      </a:endParaRPr>
+                    </a:p>
+                  </a:txBody>
+                  <a:tcPr marL="91440" marR="91440" marT="45720" marB="45720">
+                    <a:lnL w="2540" cap="flat" cmpd="sng" algn="ctr">
+                      <a:solidFill>
+                        <a:srgbClr val="EEEEEE"/>
+                      </a:solidFill>
+                      <a:prstDash val="solid"/>
+                      <a:round/>
+                      <a:headEnd type="none" w="med" len="med"/>
+                      <a:tailEnd type="none" w="med" len="med"/>
+                    </a:lnL>
+                    <a:lnR w="2540" cap="flat" cmpd="sng" algn="ctr">
+                      <a:solidFill>
+                        <a:srgbClr val="EEEEEE"/>
+                      </a:solidFill>
+                      <a:prstDash val="solid"/>
+                      <a:round/>
+                      <a:headEnd type="none" w="med" len="med"/>
+                      <a:tailEnd type="none" w="med" len="med"/>
+                    </a:lnR>
+                    <a:lnT w="2540" cap="flat" cmpd="sng" algn="ctr">
+                      <a:solidFill>
+                        <a:srgbClr val="EEEEEE"/>
+                      </a:solidFill>
+                      <a:prstDash val="solid"/>
+                      <a:round/>
+                      <a:headEnd type="none" w="med" len="med"/>
+                      <a:tailEnd type="none" w="med" len="med"/>
+                    </a:lnT>
+                    <a:lnB w="2540" cap="flat" cmpd="sng" algn="ctr">
+                      <a:solidFill>
+                        <a:srgbClr val="EEEEEE"/>
+                      </a:solidFill>
+                      <a:prstDash val="solid"/>
+                      <a:round/>
+                      <a:headEnd type="none" w="med" len="med"/>
+                      <a:tailEnd type="none" w="med" len="med"/>
+                    </a:lnB>
+                  </a:tcPr>
+                </a:tc>
+                <a:tc>
+                  <a:txBody>
+                    <a:bodyPr/>
+                    <a:lstStyle/>
+                    <a:p>
+                      <a:pPr algn="ctr" indent="0" marL="0">
+                        <a:buNone/>
+                      </a:pPr>
+                      <a:r>
                         <a:rPr lang="en-US" sz="500" b="1" dirty="0">
                           <a:solidFill>
                             <a:srgbClr val="777777"/>
@@ -12590,7 +15726,7 @@
                           <a:ea typeface="Calibri" pitchFamily="34" charset="-122"/>
                           <a:cs typeface="Calibri" pitchFamily="34" charset="-120"/>
                         </a:rPr>
-                        <a:t>4.99%</a:t>
+                        <a:t>3.39%</a:t>
                       </a:r>
                       <a:endParaRPr lang="en-US" sz="500" dirty="0">
                         <a:latin typeface="Calibri" charset="0"/>
@@ -12776,2828 +15912,7 @@
                           <a:ea typeface="Calibri" pitchFamily="34" charset="-122"/>
                           <a:cs typeface="Calibri" pitchFamily="34" charset="-120"/>
                         </a:rPr>
-                        <a:t>0.00%</a:t>
-                      </a:r>
-                      <a:endParaRPr lang="en-US" sz="500" dirty="0">
-                        <a:latin typeface="Calibri" charset="0"/>
-                        <a:ea typeface="Calibri" charset="0"/>
-                        <a:cs typeface="Calibri" charset="0"/>
-                      </a:endParaRPr>
-                    </a:p>
-                  </a:txBody>
-                  <a:tcPr marL="91440" marR="91440" marT="45720" marB="45720">
-                    <a:lnL w="2540" cap="flat" cmpd="sng" algn="ctr">
-                      <a:solidFill>
-                        <a:srgbClr val="EEEEEE"/>
-                      </a:solidFill>
-                      <a:prstDash val="solid"/>
-                      <a:round/>
-                      <a:headEnd type="none" w="med" len="med"/>
-                      <a:tailEnd type="none" w="med" len="med"/>
-                    </a:lnL>
-                    <a:lnR w="2540" cap="flat" cmpd="sng" algn="ctr">
-                      <a:solidFill>
-                        <a:srgbClr val="EEEEEE"/>
-                      </a:solidFill>
-                      <a:prstDash val="solid"/>
-                      <a:round/>
-                      <a:headEnd type="none" w="med" len="med"/>
-                      <a:tailEnd type="none" w="med" len="med"/>
-                    </a:lnR>
-                    <a:lnT w="2540" cap="flat" cmpd="sng" algn="ctr">
-                      <a:solidFill>
-                        <a:srgbClr val="EEEEEE"/>
-                      </a:solidFill>
-                      <a:prstDash val="solid"/>
-                      <a:round/>
-                      <a:headEnd type="none" w="med" len="med"/>
-                      <a:tailEnd type="none" w="med" len="med"/>
-                    </a:lnT>
-                    <a:lnB w="2540" cap="flat" cmpd="sng" algn="ctr">
-                      <a:solidFill>
-                        <a:srgbClr val="EEEEEE"/>
-                      </a:solidFill>
-                      <a:prstDash val="solid"/>
-                      <a:round/>
-                      <a:headEnd type="none" w="med" len="med"/>
-                      <a:tailEnd type="none" w="med" len="med"/>
-                    </a:lnB>
-                  </a:tcPr>
-                </a:tc>
-                <a:tc>
-                  <a:txBody>
-                    <a:bodyPr/>
-                    <a:lstStyle/>
-                    <a:p>
-                      <a:pPr algn="ctr" indent="0" marL="0">
-                        <a:buNone/>
-                      </a:pPr>
-                      <a:r>
-                        <a:rPr lang="en-US" sz="500" dirty="0">
-                          <a:solidFill>
-                            <a:srgbClr val="999999"/>
-                          </a:solidFill>
-                          <a:latin typeface="Calibri" pitchFamily="34" charset="0"/>
-                          <a:ea typeface="Calibri" pitchFamily="34" charset="-122"/>
-                          <a:cs typeface="Calibri" pitchFamily="34" charset="-120"/>
-                        </a:rPr>
-                        <a:t>0.28%</a:t>
-                      </a:r>
-                      <a:endParaRPr lang="en-US" sz="500" dirty="0">
-                        <a:latin typeface="Calibri" charset="0"/>
-                        <a:ea typeface="Calibri" charset="0"/>
-                        <a:cs typeface="Calibri" charset="0"/>
-                      </a:endParaRPr>
-                    </a:p>
-                  </a:txBody>
-                  <a:tcPr marL="91440" marR="91440" marT="45720" marB="45720">
-                    <a:lnL w="2540" cap="flat" cmpd="sng" algn="ctr">
-                      <a:solidFill>
-                        <a:srgbClr val="EEEEEE"/>
-                      </a:solidFill>
-                      <a:prstDash val="solid"/>
-                      <a:round/>
-                      <a:headEnd type="none" w="med" len="med"/>
-                      <a:tailEnd type="none" w="med" len="med"/>
-                    </a:lnL>
-                    <a:lnR w="2540" cap="flat" cmpd="sng" algn="ctr">
-                      <a:solidFill>
-                        <a:srgbClr val="EEEEEE"/>
-                      </a:solidFill>
-                      <a:prstDash val="solid"/>
-                      <a:round/>
-                      <a:headEnd type="none" w="med" len="med"/>
-                      <a:tailEnd type="none" w="med" len="med"/>
-                    </a:lnR>
-                    <a:lnT w="2540" cap="flat" cmpd="sng" algn="ctr">
-                      <a:solidFill>
-                        <a:srgbClr val="EEEEEE"/>
-                      </a:solidFill>
-                      <a:prstDash val="solid"/>
-                      <a:round/>
-                      <a:headEnd type="none" w="med" len="med"/>
-                      <a:tailEnd type="none" w="med" len="med"/>
-                    </a:lnT>
-                    <a:lnB w="2540" cap="flat" cmpd="sng" algn="ctr">
-                      <a:solidFill>
-                        <a:srgbClr val="EEEEEE"/>
-                      </a:solidFill>
-                      <a:prstDash val="solid"/>
-                      <a:round/>
-                      <a:headEnd type="none" w="med" len="med"/>
-                      <a:tailEnd type="none" w="med" len="med"/>
-                    </a:lnB>
-                  </a:tcPr>
-                </a:tc>
-                <a:tc>
-                  <a:txBody>
-                    <a:bodyPr/>
-                    <a:lstStyle/>
-                    <a:p>
-                      <a:pPr algn="ctr" indent="0" marL="0">
-                        <a:buNone/>
-                      </a:pPr>
-                      <a:r>
-                        <a:rPr lang="en-US" sz="500" dirty="0">
-                          <a:solidFill>
-                            <a:srgbClr val="999999"/>
-                          </a:solidFill>
-                          <a:latin typeface="Calibri" pitchFamily="34" charset="0"/>
-                          <a:ea typeface="Calibri" pitchFamily="34" charset="-122"/>
-                          <a:cs typeface="Calibri" pitchFamily="34" charset="-120"/>
-                        </a:rPr>
-                        <a:t>0.31%</a:t>
-                      </a:r>
-                      <a:endParaRPr lang="en-US" sz="500" dirty="0">
-                        <a:latin typeface="Calibri" charset="0"/>
-                        <a:ea typeface="Calibri" charset="0"/>
-                        <a:cs typeface="Calibri" charset="0"/>
-                      </a:endParaRPr>
-                    </a:p>
-                  </a:txBody>
-                  <a:tcPr marL="91440" marR="91440" marT="45720" marB="45720">
-                    <a:lnL w="2540" cap="flat" cmpd="sng" algn="ctr">
-                      <a:solidFill>
-                        <a:srgbClr val="EEEEEE"/>
-                      </a:solidFill>
-                      <a:prstDash val="solid"/>
-                      <a:round/>
-                      <a:headEnd type="none" w="med" len="med"/>
-                      <a:tailEnd type="none" w="med" len="med"/>
-                    </a:lnL>
-                    <a:lnR w="2540" cap="flat" cmpd="sng" algn="ctr">
-                      <a:solidFill>
-                        <a:srgbClr val="EEEEEE"/>
-                      </a:solidFill>
-                      <a:prstDash val="solid"/>
-                      <a:round/>
-                      <a:headEnd type="none" w="med" len="med"/>
-                      <a:tailEnd type="none" w="med" len="med"/>
-                    </a:lnR>
-                    <a:lnT w="2540" cap="flat" cmpd="sng" algn="ctr">
-                      <a:solidFill>
-                        <a:srgbClr val="EEEEEE"/>
-                      </a:solidFill>
-                      <a:prstDash val="solid"/>
-                      <a:round/>
-                      <a:headEnd type="none" w="med" len="med"/>
-                      <a:tailEnd type="none" w="med" len="med"/>
-                    </a:lnT>
-                    <a:lnB w="2540" cap="flat" cmpd="sng" algn="ctr">
-                      <a:solidFill>
-                        <a:srgbClr val="EEEEEE"/>
-                      </a:solidFill>
-                      <a:prstDash val="solid"/>
-                      <a:round/>
-                      <a:headEnd type="none" w="med" len="med"/>
-                      <a:tailEnd type="none" w="med" len="med"/>
-                    </a:lnB>
-                  </a:tcPr>
-                </a:tc>
-                <a:tc>
-                  <a:txBody>
-                    <a:bodyPr/>
-                    <a:lstStyle/>
-                    <a:p>
-                      <a:pPr algn="ctr" indent="0" marL="0">
-                        <a:buNone/>
-                      </a:pPr>
-                      <a:r>
-                        <a:rPr lang="en-US" sz="500" dirty="0">
-                          <a:solidFill>
-                            <a:srgbClr val="999999"/>
-                          </a:solidFill>
-                          <a:latin typeface="Calibri" pitchFamily="34" charset="0"/>
-                          <a:ea typeface="Calibri" pitchFamily="34" charset="-122"/>
-                          <a:cs typeface="Calibri" pitchFamily="34" charset="-120"/>
-                        </a:rPr>
-                        <a:t>0.30%</a:t>
-                      </a:r>
-                      <a:endParaRPr lang="en-US" sz="500" dirty="0">
-                        <a:latin typeface="Calibri" charset="0"/>
-                        <a:ea typeface="Calibri" charset="0"/>
-                        <a:cs typeface="Calibri" charset="0"/>
-                      </a:endParaRPr>
-                    </a:p>
-                  </a:txBody>
-                  <a:tcPr marL="91440" marR="91440" marT="45720" marB="45720">
-                    <a:lnL w="2540" cap="flat" cmpd="sng" algn="ctr">
-                      <a:solidFill>
-                        <a:srgbClr val="EEEEEE"/>
-                      </a:solidFill>
-                      <a:prstDash val="solid"/>
-                      <a:round/>
-                      <a:headEnd type="none" w="med" len="med"/>
-                      <a:tailEnd type="none" w="med" len="med"/>
-                    </a:lnL>
-                    <a:lnR w="2540" cap="flat" cmpd="sng" algn="ctr">
-                      <a:solidFill>
-                        <a:srgbClr val="EEEEEE"/>
-                      </a:solidFill>
-                      <a:prstDash val="solid"/>
-                      <a:round/>
-                      <a:headEnd type="none" w="med" len="med"/>
-                      <a:tailEnd type="none" w="med" len="med"/>
-                    </a:lnR>
-                    <a:lnT w="2540" cap="flat" cmpd="sng" algn="ctr">
-                      <a:solidFill>
-                        <a:srgbClr val="EEEEEE"/>
-                      </a:solidFill>
-                      <a:prstDash val="solid"/>
-                      <a:round/>
-                      <a:headEnd type="none" w="med" len="med"/>
-                      <a:tailEnd type="none" w="med" len="med"/>
-                    </a:lnT>
-                    <a:lnB w="2540" cap="flat" cmpd="sng" algn="ctr">
-                      <a:solidFill>
-                        <a:srgbClr val="EEEEEE"/>
-                      </a:solidFill>
-                      <a:prstDash val="solid"/>
-                      <a:round/>
-                      <a:headEnd type="none" w="med" len="med"/>
-                      <a:tailEnd type="none" w="med" len="med"/>
-                    </a:lnB>
-                  </a:tcPr>
-                </a:tc>
-                <a:tc>
-                  <a:txBody>
-                    <a:bodyPr/>
-                    <a:lstStyle/>
-                    <a:p>
-                      <a:pPr algn="ctr" indent="0" marL="0">
-                        <a:buNone/>
-                      </a:pPr>
-                      <a:r>
-                        <a:rPr lang="en-US" sz="500" dirty="0">
-                          <a:solidFill>
-                            <a:srgbClr val="999999"/>
-                          </a:solidFill>
-                          <a:latin typeface="Calibri" pitchFamily="34" charset="0"/>
-                          <a:ea typeface="Calibri" pitchFamily="34" charset="-122"/>
-                          <a:cs typeface="Calibri" pitchFamily="34" charset="-120"/>
-                        </a:rPr>
-                        <a:t>0.31%</a:t>
-                      </a:r>
-                      <a:endParaRPr lang="en-US" sz="500" dirty="0">
-                        <a:latin typeface="Calibri" charset="0"/>
-                        <a:ea typeface="Calibri" charset="0"/>
-                        <a:cs typeface="Calibri" charset="0"/>
-                      </a:endParaRPr>
-                    </a:p>
-                  </a:txBody>
-                  <a:tcPr marL="91440" marR="91440" marT="45720" marB="45720">
-                    <a:lnL w="2540" cap="flat" cmpd="sng" algn="ctr">
-                      <a:solidFill>
-                        <a:srgbClr val="EEEEEE"/>
-                      </a:solidFill>
-                      <a:prstDash val="solid"/>
-                      <a:round/>
-                      <a:headEnd type="none" w="med" len="med"/>
-                      <a:tailEnd type="none" w="med" len="med"/>
-                    </a:lnL>
-                    <a:lnR w="2540" cap="flat" cmpd="sng" algn="ctr">
-                      <a:solidFill>
-                        <a:srgbClr val="EEEEEE"/>
-                      </a:solidFill>
-                      <a:prstDash val="solid"/>
-                      <a:round/>
-                      <a:headEnd type="none" w="med" len="med"/>
-                      <a:tailEnd type="none" w="med" len="med"/>
-                    </a:lnR>
-                    <a:lnT w="2540" cap="flat" cmpd="sng" algn="ctr">
-                      <a:solidFill>
-                        <a:srgbClr val="EEEEEE"/>
-                      </a:solidFill>
-                      <a:prstDash val="solid"/>
-                      <a:round/>
-                      <a:headEnd type="none" w="med" len="med"/>
-                      <a:tailEnd type="none" w="med" len="med"/>
-                    </a:lnT>
-                    <a:lnB w="2540" cap="flat" cmpd="sng" algn="ctr">
-                      <a:solidFill>
-                        <a:srgbClr val="EEEEEE"/>
-                      </a:solidFill>
-                      <a:prstDash val="solid"/>
-                      <a:round/>
-                      <a:headEnd type="none" w="med" len="med"/>
-                      <a:tailEnd type="none" w="med" len="med"/>
-                    </a:lnB>
-                  </a:tcPr>
-                </a:tc>
-                <a:tc>
-                  <a:txBody>
-                    <a:bodyPr/>
-                    <a:lstStyle/>
-                    <a:p>
-                      <a:pPr algn="ctr" indent="0" marL="0">
-                        <a:buNone/>
-                      </a:pPr>
-                      <a:r>
-                        <a:rPr lang="en-US" sz="500" dirty="0">
-                          <a:solidFill>
-                            <a:srgbClr val="999999"/>
-                          </a:solidFill>
-                          <a:latin typeface="Calibri" pitchFamily="34" charset="0"/>
-                          <a:ea typeface="Calibri" pitchFamily="34" charset="-122"/>
-                          <a:cs typeface="Calibri" pitchFamily="34" charset="-120"/>
-                        </a:rPr>
-                        <a:t>0.30%</a:t>
-                      </a:r>
-                      <a:endParaRPr lang="en-US" sz="500" dirty="0">
-                        <a:latin typeface="Calibri" charset="0"/>
-                        <a:ea typeface="Calibri" charset="0"/>
-                        <a:cs typeface="Calibri" charset="0"/>
-                      </a:endParaRPr>
-                    </a:p>
-                  </a:txBody>
-                  <a:tcPr marL="91440" marR="91440" marT="45720" marB="45720">
-                    <a:lnL w="2540" cap="flat" cmpd="sng" algn="ctr">
-                      <a:solidFill>
-                        <a:srgbClr val="EEEEEE"/>
-                      </a:solidFill>
-                      <a:prstDash val="solid"/>
-                      <a:round/>
-                      <a:headEnd type="none" w="med" len="med"/>
-                      <a:tailEnd type="none" w="med" len="med"/>
-                    </a:lnL>
-                    <a:lnR w="2540" cap="flat" cmpd="sng" algn="ctr">
-                      <a:solidFill>
-                        <a:srgbClr val="EEEEEE"/>
-                      </a:solidFill>
-                      <a:prstDash val="solid"/>
-                      <a:round/>
-                      <a:headEnd type="none" w="med" len="med"/>
-                      <a:tailEnd type="none" w="med" len="med"/>
-                    </a:lnR>
-                    <a:lnT w="2540" cap="flat" cmpd="sng" algn="ctr">
-                      <a:solidFill>
-                        <a:srgbClr val="EEEEEE"/>
-                      </a:solidFill>
-                      <a:prstDash val="solid"/>
-                      <a:round/>
-                      <a:headEnd type="none" w="med" len="med"/>
-                      <a:tailEnd type="none" w="med" len="med"/>
-                    </a:lnT>
-                    <a:lnB w="2540" cap="flat" cmpd="sng" algn="ctr">
-                      <a:solidFill>
-                        <a:srgbClr val="EEEEEE"/>
-                      </a:solidFill>
-                      <a:prstDash val="solid"/>
-                      <a:round/>
-                      <a:headEnd type="none" w="med" len="med"/>
-                      <a:tailEnd type="none" w="med" len="med"/>
-                    </a:lnB>
-                  </a:tcPr>
-                </a:tc>
-                <a:tc>
-                  <a:txBody>
-                    <a:bodyPr/>
-                    <a:lstStyle/>
-                    <a:p>
-                      <a:pPr algn="ctr" indent="0" marL="0">
-                        <a:buNone/>
-                      </a:pPr>
-                      <a:r>
-                        <a:rPr lang="en-US" sz="500" dirty="0">
-                          <a:solidFill>
-                            <a:srgbClr val="999999"/>
-                          </a:solidFill>
-                          <a:latin typeface="Calibri" pitchFamily="34" charset="0"/>
-                          <a:ea typeface="Calibri" pitchFamily="34" charset="-122"/>
-                          <a:cs typeface="Calibri" pitchFamily="34" charset="-120"/>
-                        </a:rPr>
-                        <a:t>0.30%</a:t>
-                      </a:r>
-                      <a:endParaRPr lang="en-US" sz="500" dirty="0">
-                        <a:latin typeface="Calibri" charset="0"/>
-                        <a:ea typeface="Calibri" charset="0"/>
-                        <a:cs typeface="Calibri" charset="0"/>
-                      </a:endParaRPr>
-                    </a:p>
-                  </a:txBody>
-                  <a:tcPr marL="91440" marR="91440" marT="45720" marB="45720">
-                    <a:lnL w="2540" cap="flat" cmpd="sng" algn="ctr">
-                      <a:solidFill>
-                        <a:srgbClr val="EEEEEE"/>
-                      </a:solidFill>
-                      <a:prstDash val="solid"/>
-                      <a:round/>
-                      <a:headEnd type="none" w="med" len="med"/>
-                      <a:tailEnd type="none" w="med" len="med"/>
-                    </a:lnL>
-                    <a:lnR w="2540" cap="flat" cmpd="sng" algn="ctr">
-                      <a:solidFill>
-                        <a:srgbClr val="EEEEEE"/>
-                      </a:solidFill>
-                      <a:prstDash val="solid"/>
-                      <a:round/>
-                      <a:headEnd type="none" w="med" len="med"/>
-                      <a:tailEnd type="none" w="med" len="med"/>
-                    </a:lnR>
-                    <a:lnT w="2540" cap="flat" cmpd="sng" algn="ctr">
-                      <a:solidFill>
-                        <a:srgbClr val="EEEEEE"/>
-                      </a:solidFill>
-                      <a:prstDash val="solid"/>
-                      <a:round/>
-                      <a:headEnd type="none" w="med" len="med"/>
-                      <a:tailEnd type="none" w="med" len="med"/>
-                    </a:lnT>
-                    <a:lnB w="2540" cap="flat" cmpd="sng" algn="ctr">
-                      <a:solidFill>
-                        <a:srgbClr val="EEEEEE"/>
-                      </a:solidFill>
-                      <a:prstDash val="solid"/>
-                      <a:round/>
-                      <a:headEnd type="none" w="med" len="med"/>
-                      <a:tailEnd type="none" w="med" len="med"/>
-                    </a:lnB>
-                  </a:tcPr>
-                </a:tc>
-                <a:tc>
-                  <a:txBody>
-                    <a:bodyPr/>
-                    <a:lstStyle/>
-                    <a:p>
-                      <a:pPr algn="ctr" indent="0" marL="0">
-                        <a:buNone/>
-                      </a:pPr>
-                      <a:r>
-                        <a:rPr lang="en-US" sz="500" dirty="0">
-                          <a:solidFill>
-                            <a:srgbClr val="999999"/>
-                          </a:solidFill>
-                          <a:latin typeface="Calibri" pitchFamily="34" charset="0"/>
-                          <a:ea typeface="Calibri" pitchFamily="34" charset="-122"/>
-                          <a:cs typeface="Calibri" pitchFamily="34" charset="-120"/>
-                        </a:rPr>
-                        <a:t>0.30%</a:t>
-                      </a:r>
-                      <a:endParaRPr lang="en-US" sz="500" dirty="0">
-                        <a:latin typeface="Calibri" charset="0"/>
-                        <a:ea typeface="Calibri" charset="0"/>
-                        <a:cs typeface="Calibri" charset="0"/>
-                      </a:endParaRPr>
-                    </a:p>
-                  </a:txBody>
-                  <a:tcPr marL="91440" marR="91440" marT="45720" marB="45720">
-                    <a:lnL w="2540" cap="flat" cmpd="sng" algn="ctr">
-                      <a:solidFill>
-                        <a:srgbClr val="EEEEEE"/>
-                      </a:solidFill>
-                      <a:prstDash val="solid"/>
-                      <a:round/>
-                      <a:headEnd type="none" w="med" len="med"/>
-                      <a:tailEnd type="none" w="med" len="med"/>
-                    </a:lnL>
-                    <a:lnR w="2540" cap="flat" cmpd="sng" algn="ctr">
-                      <a:solidFill>
-                        <a:srgbClr val="EEEEEE"/>
-                      </a:solidFill>
-                      <a:prstDash val="solid"/>
-                      <a:round/>
-                      <a:headEnd type="none" w="med" len="med"/>
-                      <a:tailEnd type="none" w="med" len="med"/>
-                    </a:lnR>
-                    <a:lnT w="2540" cap="flat" cmpd="sng" algn="ctr">
-                      <a:solidFill>
-                        <a:srgbClr val="EEEEEE"/>
-                      </a:solidFill>
-                      <a:prstDash val="solid"/>
-                      <a:round/>
-                      <a:headEnd type="none" w="med" len="med"/>
-                      <a:tailEnd type="none" w="med" len="med"/>
-                    </a:lnT>
-                    <a:lnB w="2540" cap="flat" cmpd="sng" algn="ctr">
-                      <a:solidFill>
-                        <a:srgbClr val="EEEEEE"/>
-                      </a:solidFill>
-                      <a:prstDash val="solid"/>
-                      <a:round/>
-                      <a:headEnd type="none" w="med" len="med"/>
-                      <a:tailEnd type="none" w="med" len="med"/>
-                    </a:lnB>
-                  </a:tcPr>
-                </a:tc>
-                <a:tc>
-                  <a:txBody>
-                    <a:bodyPr/>
-                    <a:lstStyle/>
-                    <a:p>
-                      <a:pPr algn="ctr" indent="0" marL="0">
-                        <a:buNone/>
-                      </a:pPr>
-                      <a:r>
-                        <a:rPr lang="en-US" sz="500" dirty="0">
-                          <a:solidFill>
-                            <a:srgbClr val="999999"/>
-                          </a:solidFill>
-                          <a:latin typeface="Calibri" pitchFamily="34" charset="0"/>
-                          <a:ea typeface="Calibri" pitchFamily="34" charset="-122"/>
-                          <a:cs typeface="Calibri" pitchFamily="34" charset="-120"/>
-                        </a:rPr>
-                        <a:t>0.28%</a:t>
-                      </a:r>
-                      <a:endParaRPr lang="en-US" sz="500" dirty="0">
-                        <a:latin typeface="Calibri" charset="0"/>
-                        <a:ea typeface="Calibri" charset="0"/>
-                        <a:cs typeface="Calibri" charset="0"/>
-                      </a:endParaRPr>
-                    </a:p>
-                  </a:txBody>
-                  <a:tcPr marL="91440" marR="91440" marT="45720" marB="45720">
-                    <a:lnL w="2540" cap="flat" cmpd="sng" algn="ctr">
-                      <a:solidFill>
-                        <a:srgbClr val="EEEEEE"/>
-                      </a:solidFill>
-                      <a:prstDash val="solid"/>
-                      <a:round/>
-                      <a:headEnd type="none" w="med" len="med"/>
-                      <a:tailEnd type="none" w="med" len="med"/>
-                    </a:lnL>
-                    <a:lnR w="2540" cap="flat" cmpd="sng" algn="ctr">
-                      <a:solidFill>
-                        <a:srgbClr val="EEEEEE"/>
-                      </a:solidFill>
-                      <a:prstDash val="solid"/>
-                      <a:round/>
-                      <a:headEnd type="none" w="med" len="med"/>
-                      <a:tailEnd type="none" w="med" len="med"/>
-                    </a:lnR>
-                    <a:lnT w="2540" cap="flat" cmpd="sng" algn="ctr">
-                      <a:solidFill>
-                        <a:srgbClr val="EEEEEE"/>
-                      </a:solidFill>
-                      <a:prstDash val="solid"/>
-                      <a:round/>
-                      <a:headEnd type="none" w="med" len="med"/>
-                      <a:tailEnd type="none" w="med" len="med"/>
-                    </a:lnT>
-                    <a:lnB w="2540" cap="flat" cmpd="sng" algn="ctr">
-                      <a:solidFill>
-                        <a:srgbClr val="EEEEEE"/>
-                      </a:solidFill>
-                      <a:prstDash val="solid"/>
-                      <a:round/>
-                      <a:headEnd type="none" w="med" len="med"/>
-                      <a:tailEnd type="none" w="med" len="med"/>
-                    </a:lnB>
-                  </a:tcPr>
-                </a:tc>
-                <a:tc>
-                  <a:txBody>
-                    <a:bodyPr/>
-                    <a:lstStyle/>
-                    <a:p>
-                      <a:pPr algn="ctr" indent="0" marL="0">
-                        <a:buNone/>
-                      </a:pPr>
-                      <a:r>
-                        <a:rPr lang="en-US" sz="500" dirty="0">
-                          <a:solidFill>
-                            <a:srgbClr val="999999"/>
-                          </a:solidFill>
-                          <a:latin typeface="Calibri" pitchFamily="34" charset="0"/>
-                          <a:ea typeface="Calibri" pitchFamily="34" charset="-122"/>
-                          <a:cs typeface="Calibri" pitchFamily="34" charset="-120"/>
-                        </a:rPr>
-                        <a:t>0.29%</a:t>
-                      </a:r>
-                      <a:endParaRPr lang="en-US" sz="500" dirty="0">
-                        <a:latin typeface="Calibri" charset="0"/>
-                        <a:ea typeface="Calibri" charset="0"/>
-                        <a:cs typeface="Calibri" charset="0"/>
-                      </a:endParaRPr>
-                    </a:p>
-                  </a:txBody>
-                  <a:tcPr marL="91440" marR="91440" marT="45720" marB="45720">
-                    <a:lnL w="2540" cap="flat" cmpd="sng" algn="ctr">
-                      <a:solidFill>
-                        <a:srgbClr val="EEEEEE"/>
-                      </a:solidFill>
-                      <a:prstDash val="solid"/>
-                      <a:round/>
-                      <a:headEnd type="none" w="med" len="med"/>
-                      <a:tailEnd type="none" w="med" len="med"/>
-                    </a:lnL>
-                    <a:lnR w="2540" cap="flat" cmpd="sng" algn="ctr">
-                      <a:solidFill>
-                        <a:srgbClr val="EEEEEE"/>
-                      </a:solidFill>
-                      <a:prstDash val="solid"/>
-                      <a:round/>
-                      <a:headEnd type="none" w="med" len="med"/>
-                      <a:tailEnd type="none" w="med" len="med"/>
-                    </a:lnR>
-                    <a:lnT w="2540" cap="flat" cmpd="sng" algn="ctr">
-                      <a:solidFill>
-                        <a:srgbClr val="EEEEEE"/>
-                      </a:solidFill>
-                      <a:prstDash val="solid"/>
-                      <a:round/>
-                      <a:headEnd type="none" w="med" len="med"/>
-                      <a:tailEnd type="none" w="med" len="med"/>
-                    </a:lnT>
-                    <a:lnB w="2540" cap="flat" cmpd="sng" algn="ctr">
-                      <a:solidFill>
-                        <a:srgbClr val="EEEEEE"/>
-                      </a:solidFill>
-                      <a:prstDash val="solid"/>
-                      <a:round/>
-                      <a:headEnd type="none" w="med" len="med"/>
-                      <a:tailEnd type="none" w="med" len="med"/>
-                    </a:lnB>
-                  </a:tcPr>
-                </a:tc>
-                <a:tc>
-                  <a:txBody>
-                    <a:bodyPr/>
-                    <a:lstStyle/>
-                    <a:p>
-                      <a:pPr algn="ctr" indent="0" marL="0">
-                        <a:buNone/>
-                      </a:pPr>
-                      <a:r>
-                        <a:rPr lang="en-US" sz="500" dirty="0">
-                          <a:solidFill>
-                            <a:srgbClr val="999999"/>
-                          </a:solidFill>
-                          <a:latin typeface="Calibri" pitchFamily="34" charset="0"/>
-                          <a:ea typeface="Calibri" pitchFamily="34" charset="-122"/>
-                          <a:cs typeface="Calibri" pitchFamily="34" charset="-120"/>
-                        </a:rPr>
-                        <a:t>0.28%</a:t>
-                      </a:r>
-                      <a:endParaRPr lang="en-US" sz="500" dirty="0">
-                        <a:latin typeface="Calibri" charset="0"/>
-                        <a:ea typeface="Calibri" charset="0"/>
-                        <a:cs typeface="Calibri" charset="0"/>
-                      </a:endParaRPr>
-                    </a:p>
-                  </a:txBody>
-                  <a:tcPr marL="91440" marR="91440" marT="45720" marB="45720">
-                    <a:lnL w="2540" cap="flat" cmpd="sng" algn="ctr">
-                      <a:solidFill>
-                        <a:srgbClr val="EEEEEE"/>
-                      </a:solidFill>
-                      <a:prstDash val="solid"/>
-                      <a:round/>
-                      <a:headEnd type="none" w="med" len="med"/>
-                      <a:tailEnd type="none" w="med" len="med"/>
-                    </a:lnL>
-                    <a:lnR w="2540" cap="flat" cmpd="sng" algn="ctr">
-                      <a:solidFill>
-                        <a:srgbClr val="EEEEEE"/>
-                      </a:solidFill>
-                      <a:prstDash val="solid"/>
-                      <a:round/>
-                      <a:headEnd type="none" w="med" len="med"/>
-                      <a:tailEnd type="none" w="med" len="med"/>
-                    </a:lnR>
-                    <a:lnT w="2540" cap="flat" cmpd="sng" algn="ctr">
-                      <a:solidFill>
-                        <a:srgbClr val="EEEEEE"/>
-                      </a:solidFill>
-                      <a:prstDash val="solid"/>
-                      <a:round/>
-                      <a:headEnd type="none" w="med" len="med"/>
-                      <a:tailEnd type="none" w="med" len="med"/>
-                    </a:lnT>
-                    <a:lnB w="2540" cap="flat" cmpd="sng" algn="ctr">
-                      <a:solidFill>
-                        <a:srgbClr val="EEEEEE"/>
-                      </a:solidFill>
-                      <a:prstDash val="solid"/>
-                      <a:round/>
-                      <a:headEnd type="none" w="med" len="med"/>
-                      <a:tailEnd type="none" w="med" len="med"/>
-                    </a:lnB>
-                  </a:tcPr>
-                </a:tc>
-                <a:tc>
-                  <a:txBody>
-                    <a:bodyPr/>
-                    <a:lstStyle/>
-                    <a:p>
-                      <a:pPr algn="ctr" indent="0" marL="0">
-                        <a:buNone/>
-                      </a:pPr>
-                      <a:r>
-                        <a:rPr lang="en-US" sz="500" dirty="0">
-                          <a:solidFill>
-                            <a:srgbClr val="999999"/>
-                          </a:solidFill>
-                          <a:latin typeface="Calibri" pitchFamily="34" charset="0"/>
-                          <a:ea typeface="Calibri" pitchFamily="34" charset="-122"/>
-                          <a:cs typeface="Calibri" pitchFamily="34" charset="-120"/>
-                        </a:rPr>
-                        <a:t>0.56%</a:t>
-                      </a:r>
-                      <a:endParaRPr lang="en-US" sz="500" dirty="0">
-                        <a:latin typeface="Calibri" charset="0"/>
-                        <a:ea typeface="Calibri" charset="0"/>
-                        <a:cs typeface="Calibri" charset="0"/>
-                      </a:endParaRPr>
-                    </a:p>
-                  </a:txBody>
-                  <a:tcPr marL="91440" marR="91440" marT="45720" marB="45720">
-                    <a:lnL w="2540" cap="flat" cmpd="sng" algn="ctr">
-                      <a:solidFill>
-                        <a:srgbClr val="EEEEEE"/>
-                      </a:solidFill>
-                      <a:prstDash val="solid"/>
-                      <a:round/>
-                      <a:headEnd type="none" w="med" len="med"/>
-                      <a:tailEnd type="none" w="med" len="med"/>
-                    </a:lnL>
-                    <a:lnR w="2540" cap="flat" cmpd="sng" algn="ctr">
-                      <a:solidFill>
-                        <a:srgbClr val="EEEEEE"/>
-                      </a:solidFill>
-                      <a:prstDash val="solid"/>
-                      <a:round/>
-                      <a:headEnd type="none" w="med" len="med"/>
-                      <a:tailEnd type="none" w="med" len="med"/>
-                    </a:lnR>
-                    <a:lnT w="2540" cap="flat" cmpd="sng" algn="ctr">
-                      <a:solidFill>
-                        <a:srgbClr val="EEEEEE"/>
-                      </a:solidFill>
-                      <a:prstDash val="solid"/>
-                      <a:round/>
-                      <a:headEnd type="none" w="med" len="med"/>
-                      <a:tailEnd type="none" w="med" len="med"/>
-                    </a:lnT>
-                    <a:lnB w="2540" cap="flat" cmpd="sng" algn="ctr">
-                      <a:solidFill>
-                        <a:srgbClr val="EEEEEE"/>
-                      </a:solidFill>
-                      <a:prstDash val="solid"/>
-                      <a:round/>
-                      <a:headEnd type="none" w="med" len="med"/>
-                      <a:tailEnd type="none" w="med" len="med"/>
-                    </a:lnB>
-                  </a:tcPr>
-                </a:tc>
-                <a:tc>
-                  <a:txBody>
-                    <a:bodyPr/>
-                    <a:lstStyle/>
-                    <a:p>
-                      <a:pPr algn="ctr" indent="0" marL="0">
-                        <a:buNone/>
-                      </a:pPr>
-                      <a:r>
-                        <a:rPr lang="en-US" sz="500" b="1" dirty="0">
-                          <a:solidFill>
-                            <a:srgbClr val="999999"/>
-                          </a:solidFill>
-                          <a:latin typeface="Calibri" pitchFamily="34" charset="0"/>
-                          <a:ea typeface="Calibri" pitchFamily="34" charset="-122"/>
-                          <a:cs typeface="Calibri" pitchFamily="34" charset="-120"/>
-                        </a:rPr>
-                        <a:t>3.54%</a:t>
-                      </a:r>
-                      <a:endParaRPr lang="en-US" sz="500" dirty="0">
-                        <a:latin typeface="Calibri" charset="0"/>
-                        <a:ea typeface="Calibri" charset="0"/>
-                        <a:cs typeface="Calibri" charset="0"/>
-                      </a:endParaRPr>
-                    </a:p>
-                  </a:txBody>
-                  <a:tcPr marL="91440" marR="91440" marT="45720" marB="45720">
-                    <a:lnL w="2540" cap="flat" cmpd="sng" algn="ctr">
-                      <a:solidFill>
-                        <a:srgbClr val="EEEEEE"/>
-                      </a:solidFill>
-                      <a:prstDash val="solid"/>
-                      <a:round/>
-                      <a:headEnd type="none" w="med" len="med"/>
-                      <a:tailEnd type="none" w="med" len="med"/>
-                    </a:lnL>
-                    <a:lnR w="2540" cap="flat" cmpd="sng" algn="ctr">
-                      <a:solidFill>
-                        <a:srgbClr val="EEEEEE"/>
-                      </a:solidFill>
-                      <a:prstDash val="solid"/>
-                      <a:round/>
-                      <a:headEnd type="none" w="med" len="med"/>
-                      <a:tailEnd type="none" w="med" len="med"/>
-                    </a:lnR>
-                    <a:lnT w="2540" cap="flat" cmpd="sng" algn="ctr">
-                      <a:solidFill>
-                        <a:srgbClr val="EEEEEE"/>
-                      </a:solidFill>
-                      <a:prstDash val="solid"/>
-                      <a:round/>
-                      <a:headEnd type="none" w="med" len="med"/>
-                      <a:tailEnd type="none" w="med" len="med"/>
-                    </a:lnT>
-                    <a:lnB w="2540" cap="flat" cmpd="sng" algn="ctr">
-                      <a:solidFill>
-                        <a:srgbClr val="EEEEEE"/>
-                      </a:solidFill>
-                      <a:prstDash val="solid"/>
-                      <a:round/>
-                      <a:headEnd type="none" w="med" len="med"/>
-                      <a:tailEnd type="none" w="med" len="med"/>
-                    </a:lnB>
-                  </a:tcPr>
-                </a:tc>
-              </a:tr>
-              <a:tr h="123444">
-                <a:tc>
-                  <a:txBody>
-                    <a:bodyPr/>
-                    <a:lstStyle/>
-                    <a:p>
-                      <a:pPr algn="l" indent="0" marL="0">
-                        <a:buNone/>
-                      </a:pPr>
-                      <a:endParaRPr lang="en-US" sz="500" dirty="0">
-                        <a:latin typeface="Calibri" charset="0"/>
-                        <a:ea typeface="Calibri" charset="0"/>
-                        <a:cs typeface="Calibri" charset="0"/>
-                      </a:endParaRPr>
-                    </a:p>
-                  </a:txBody>
-                  <a:tcPr marL="91440" marR="91440" marT="45720" marB="45720">
-                    <a:lnL w="2540" cap="flat" cmpd="sng" algn="ctr">
-                      <a:solidFill>
-                        <a:srgbClr val="EEEEEE"/>
-                      </a:solidFill>
-                      <a:prstDash val="solid"/>
-                      <a:round/>
-                      <a:headEnd type="none" w="med" len="med"/>
-                      <a:tailEnd type="none" w="med" len="med"/>
-                    </a:lnL>
-                    <a:lnR w="2540" cap="flat" cmpd="sng" algn="ctr">
-                      <a:solidFill>
-                        <a:srgbClr val="EEEEEE"/>
-                      </a:solidFill>
-                      <a:prstDash val="solid"/>
-                      <a:round/>
-                      <a:headEnd type="none" w="med" len="med"/>
-                      <a:tailEnd type="none" w="med" len="med"/>
-                    </a:lnR>
-                    <a:lnT w="2540" cap="flat" cmpd="sng" algn="ctr">
-                      <a:solidFill>
-                        <a:srgbClr val="EEEEEE"/>
-                      </a:solidFill>
-                      <a:prstDash val="solid"/>
-                      <a:round/>
-                      <a:headEnd type="none" w="med" len="med"/>
-                      <a:tailEnd type="none" w="med" len="med"/>
-                    </a:lnT>
-                    <a:lnB w="2540" cap="flat" cmpd="sng" algn="ctr">
-                      <a:solidFill>
-                        <a:srgbClr val="EEEEEE"/>
-                      </a:solidFill>
-                      <a:prstDash val="solid"/>
-                      <a:round/>
-                      <a:headEnd type="none" w="med" len="med"/>
-                      <a:tailEnd type="none" w="med" len="med"/>
-                    </a:lnB>
-                  </a:tcPr>
-                </a:tc>
-                <a:tc>
-                  <a:txBody>
-                    <a:bodyPr/>
-                    <a:lstStyle/>
-                    <a:p>
-                      <a:pPr algn="l" indent="0" marL="0">
-                        <a:buNone/>
-                      </a:pPr>
-                      <a:r>
-                        <a:rPr lang="en-US" sz="500" dirty="0">
-                          <a:solidFill>
-                            <a:srgbClr val="000000"/>
-                          </a:solidFill>
-                          <a:latin typeface="Calibri" pitchFamily="34" charset="0"/>
-                          <a:ea typeface="Calibri" pitchFamily="34" charset="-122"/>
-                          <a:cs typeface="Calibri" pitchFamily="34" charset="-120"/>
-                        </a:rPr>
-                        <a:t>FIP LIQUIDEZ Permanente</a:t>
-                      </a:r>
-                      <a:endParaRPr lang="en-US" sz="500" dirty="0">
-                        <a:latin typeface="Calibri" charset="0"/>
-                        <a:ea typeface="Calibri" charset="0"/>
-                        <a:cs typeface="Calibri" charset="0"/>
-                      </a:endParaRPr>
-                    </a:p>
-                  </a:txBody>
-                  <a:tcPr marL="91440" marR="91440" marT="45720" marB="45720">
-                    <a:lnL w="2540" cap="flat" cmpd="sng" algn="ctr">
-                      <a:solidFill>
-                        <a:srgbClr val="EEEEEE"/>
-                      </a:solidFill>
-                      <a:prstDash val="solid"/>
-                      <a:round/>
-                      <a:headEnd type="none" w="med" len="med"/>
-                      <a:tailEnd type="none" w="med" len="med"/>
-                    </a:lnL>
-                    <a:lnR w="2540" cap="flat" cmpd="sng" algn="ctr">
-                      <a:solidFill>
-                        <a:srgbClr val="EEEEEE"/>
-                      </a:solidFill>
-                      <a:prstDash val="solid"/>
-                      <a:round/>
-                      <a:headEnd type="none" w="med" len="med"/>
-                      <a:tailEnd type="none" w="med" len="med"/>
-                    </a:lnR>
-                    <a:lnT w="2540" cap="flat" cmpd="sng" algn="ctr">
-                      <a:solidFill>
-                        <a:srgbClr val="EEEEEE"/>
-                      </a:solidFill>
-                      <a:prstDash val="solid"/>
-                      <a:round/>
-                      <a:headEnd type="none" w="med" len="med"/>
-                      <a:tailEnd type="none" w="med" len="med"/>
-                    </a:lnT>
-                    <a:lnB w="2540" cap="flat" cmpd="sng" algn="ctr">
-                      <a:solidFill>
-                        <a:srgbClr val="EEEEEE"/>
-                      </a:solidFill>
-                      <a:prstDash val="solid"/>
-                      <a:round/>
-                      <a:headEnd type="none" w="med" len="med"/>
-                      <a:tailEnd type="none" w="med" len="med"/>
-                    </a:lnB>
-                  </a:tcPr>
-                </a:tc>
-                <a:tc>
-                  <a:txBody>
-                    <a:bodyPr/>
-                    <a:lstStyle/>
-                    <a:p>
-                      <a:pPr algn="ctr" indent="0" marL="0">
-                        <a:buNone/>
-                      </a:pPr>
-                      <a:r>
-                        <a:rPr lang="en-US" sz="500" dirty="0">
-                          <a:solidFill>
-                            <a:srgbClr val="000000"/>
-                          </a:solidFill>
-                          <a:latin typeface="Calibri" pitchFamily="34" charset="0"/>
-                          <a:ea typeface="Calibri" pitchFamily="34" charset="-122"/>
-                          <a:cs typeface="Calibri" pitchFamily="34" charset="-120"/>
-                        </a:rPr>
-                        <a:t>0.34%</a:t>
-                      </a:r>
-                      <a:endParaRPr lang="en-US" sz="500" dirty="0">
-                        <a:latin typeface="Calibri" charset="0"/>
-                        <a:ea typeface="Calibri" charset="0"/>
-                        <a:cs typeface="Calibri" charset="0"/>
-                      </a:endParaRPr>
-                    </a:p>
-                  </a:txBody>
-                  <a:tcPr marL="91440" marR="91440" marT="45720" marB="45720">
-                    <a:lnL w="2540" cap="flat" cmpd="sng" algn="ctr">
-                      <a:solidFill>
-                        <a:srgbClr val="EEEEEE"/>
-                      </a:solidFill>
-                      <a:prstDash val="solid"/>
-                      <a:round/>
-                      <a:headEnd type="none" w="med" len="med"/>
-                      <a:tailEnd type="none" w="med" len="med"/>
-                    </a:lnL>
-                    <a:lnR w="2540" cap="flat" cmpd="sng" algn="ctr">
-                      <a:solidFill>
-                        <a:srgbClr val="EEEEEE"/>
-                      </a:solidFill>
-                      <a:prstDash val="solid"/>
-                      <a:round/>
-                      <a:headEnd type="none" w="med" len="med"/>
-                      <a:tailEnd type="none" w="med" len="med"/>
-                    </a:lnR>
-                    <a:lnT w="2540" cap="flat" cmpd="sng" algn="ctr">
-                      <a:solidFill>
-                        <a:srgbClr val="EEEEEE"/>
-                      </a:solidFill>
-                      <a:prstDash val="solid"/>
-                      <a:round/>
-                      <a:headEnd type="none" w="med" len="med"/>
-                      <a:tailEnd type="none" w="med" len="med"/>
-                    </a:lnT>
-                    <a:lnB w="2540" cap="flat" cmpd="sng" algn="ctr">
-                      <a:solidFill>
-                        <a:srgbClr val="EEEEEE"/>
-                      </a:solidFill>
-                      <a:prstDash val="solid"/>
-                      <a:round/>
-                      <a:headEnd type="none" w="med" len="med"/>
-                      <a:tailEnd type="none" w="med" len="med"/>
-                    </a:lnB>
-                  </a:tcPr>
-                </a:tc>
-                <a:tc>
-                  <a:txBody>
-                    <a:bodyPr/>
-                    <a:lstStyle/>
-                    <a:p>
-                      <a:pPr algn="ctr" indent="0" marL="0">
-                        <a:buNone/>
-                      </a:pPr>
-                      <a:r>
-                        <a:rPr lang="en-US" sz="500" dirty="0">
-                          <a:solidFill>
-                            <a:srgbClr val="000000"/>
-                          </a:solidFill>
-                          <a:latin typeface="Calibri" pitchFamily="34" charset="0"/>
-                          <a:ea typeface="Calibri" pitchFamily="34" charset="-122"/>
-                          <a:cs typeface="Calibri" pitchFamily="34" charset="-120"/>
-                        </a:rPr>
-                        <a:t>0.39%</a:t>
-                      </a:r>
-                      <a:endParaRPr lang="en-US" sz="500" dirty="0">
-                        <a:latin typeface="Calibri" charset="0"/>
-                        <a:ea typeface="Calibri" charset="0"/>
-                        <a:cs typeface="Calibri" charset="0"/>
-                      </a:endParaRPr>
-                    </a:p>
-                  </a:txBody>
-                  <a:tcPr marL="91440" marR="91440" marT="45720" marB="45720">
-                    <a:lnL w="2540" cap="flat" cmpd="sng" algn="ctr">
-                      <a:solidFill>
-                        <a:srgbClr val="EEEEEE"/>
-                      </a:solidFill>
-                      <a:prstDash val="solid"/>
-                      <a:round/>
-                      <a:headEnd type="none" w="med" len="med"/>
-                      <a:tailEnd type="none" w="med" len="med"/>
-                    </a:lnL>
-                    <a:lnR w="2540" cap="flat" cmpd="sng" algn="ctr">
-                      <a:solidFill>
-                        <a:srgbClr val="EEEEEE"/>
-                      </a:solidFill>
-                      <a:prstDash val="solid"/>
-                      <a:round/>
-                      <a:headEnd type="none" w="med" len="med"/>
-                      <a:tailEnd type="none" w="med" len="med"/>
-                    </a:lnR>
-                    <a:lnT w="2540" cap="flat" cmpd="sng" algn="ctr">
-                      <a:solidFill>
-                        <a:srgbClr val="EEEEEE"/>
-                      </a:solidFill>
-                      <a:prstDash val="solid"/>
-                      <a:round/>
-                      <a:headEnd type="none" w="med" len="med"/>
-                      <a:tailEnd type="none" w="med" len="med"/>
-                    </a:lnT>
-                    <a:lnB w="2540" cap="flat" cmpd="sng" algn="ctr">
-                      <a:solidFill>
-                        <a:srgbClr val="EEEEEE"/>
-                      </a:solidFill>
-                      <a:prstDash val="solid"/>
-                      <a:round/>
-                      <a:headEnd type="none" w="med" len="med"/>
-                      <a:tailEnd type="none" w="med" len="med"/>
-                    </a:lnB>
-                  </a:tcPr>
-                </a:tc>
-                <a:tc>
-                  <a:txBody>
-                    <a:bodyPr/>
-                    <a:lstStyle/>
-                    <a:p>
-                      <a:pPr algn="ctr" indent="0" marL="0">
-                        <a:buNone/>
-                      </a:pPr>
-                      <a:r>
-                        <a:rPr lang="en-US" sz="500" dirty="0">
-                          <a:solidFill>
-                            <a:srgbClr val="000000"/>
-                          </a:solidFill>
-                          <a:latin typeface="Calibri" pitchFamily="34" charset="0"/>
-                          <a:ea typeface="Calibri" pitchFamily="34" charset="-122"/>
-                          <a:cs typeface="Calibri" pitchFamily="34" charset="-120"/>
-                        </a:rPr>
-                        <a:t>0.51%</a:t>
-                      </a:r>
-                      <a:endParaRPr lang="en-US" sz="500" dirty="0">
-                        <a:latin typeface="Calibri" charset="0"/>
-                        <a:ea typeface="Calibri" charset="0"/>
-                        <a:cs typeface="Calibri" charset="0"/>
-                      </a:endParaRPr>
-                    </a:p>
-                  </a:txBody>
-                  <a:tcPr marL="91440" marR="91440" marT="45720" marB="45720">
-                    <a:lnL w="2540" cap="flat" cmpd="sng" algn="ctr">
-                      <a:solidFill>
-                        <a:srgbClr val="EEEEEE"/>
-                      </a:solidFill>
-                      <a:prstDash val="solid"/>
-                      <a:round/>
-                      <a:headEnd type="none" w="med" len="med"/>
-                      <a:tailEnd type="none" w="med" len="med"/>
-                    </a:lnL>
-                    <a:lnR w="2540" cap="flat" cmpd="sng" algn="ctr">
-                      <a:solidFill>
-                        <a:srgbClr val="EEEEEE"/>
-                      </a:solidFill>
-                      <a:prstDash val="solid"/>
-                      <a:round/>
-                      <a:headEnd type="none" w="med" len="med"/>
-                      <a:tailEnd type="none" w="med" len="med"/>
-                    </a:lnR>
-                    <a:lnT w="2540" cap="flat" cmpd="sng" algn="ctr">
-                      <a:solidFill>
-                        <a:srgbClr val="EEEEEE"/>
-                      </a:solidFill>
-                      <a:prstDash val="solid"/>
-                      <a:round/>
-                      <a:headEnd type="none" w="med" len="med"/>
-                      <a:tailEnd type="none" w="med" len="med"/>
-                    </a:lnT>
-                    <a:lnB w="2540" cap="flat" cmpd="sng" algn="ctr">
-                      <a:solidFill>
-                        <a:srgbClr val="EEEEEE"/>
-                      </a:solidFill>
-                      <a:prstDash val="solid"/>
-                      <a:round/>
-                      <a:headEnd type="none" w="med" len="med"/>
-                      <a:tailEnd type="none" w="med" len="med"/>
-                    </a:lnB>
-                  </a:tcPr>
-                </a:tc>
-                <a:tc>
-                  <a:txBody>
-                    <a:bodyPr/>
-                    <a:lstStyle/>
-                    <a:p>
-                      <a:pPr algn="ctr" indent="0" marL="0">
-                        <a:buNone/>
-                      </a:pPr>
-                      <a:r>
-                        <a:rPr lang="en-US" sz="500" dirty="0">
-                          <a:solidFill>
-                            <a:srgbClr val="000000"/>
-                          </a:solidFill>
-                          <a:latin typeface="Calibri" pitchFamily="34" charset="0"/>
-                          <a:ea typeface="Calibri" pitchFamily="34" charset="-122"/>
-                          <a:cs typeface="Calibri" pitchFamily="34" charset="-120"/>
-                        </a:rPr>
-                        <a:t>0.50%</a:t>
-                      </a:r>
-                      <a:endParaRPr lang="en-US" sz="500" dirty="0">
-                        <a:latin typeface="Calibri" charset="0"/>
-                        <a:ea typeface="Calibri" charset="0"/>
-                        <a:cs typeface="Calibri" charset="0"/>
-                      </a:endParaRPr>
-                    </a:p>
-                  </a:txBody>
-                  <a:tcPr marL="91440" marR="91440" marT="45720" marB="45720">
-                    <a:lnL w="2540" cap="flat" cmpd="sng" algn="ctr">
-                      <a:solidFill>
-                        <a:srgbClr val="EEEEEE"/>
-                      </a:solidFill>
-                      <a:prstDash val="solid"/>
-                      <a:round/>
-                      <a:headEnd type="none" w="med" len="med"/>
-                      <a:tailEnd type="none" w="med" len="med"/>
-                    </a:lnL>
-                    <a:lnR w="2540" cap="flat" cmpd="sng" algn="ctr">
-                      <a:solidFill>
-                        <a:srgbClr val="EEEEEE"/>
-                      </a:solidFill>
-                      <a:prstDash val="solid"/>
-                      <a:round/>
-                      <a:headEnd type="none" w="med" len="med"/>
-                      <a:tailEnd type="none" w="med" len="med"/>
-                    </a:lnR>
-                    <a:lnT w="2540" cap="flat" cmpd="sng" algn="ctr">
-                      <a:solidFill>
-                        <a:srgbClr val="EEEEEE"/>
-                      </a:solidFill>
-                      <a:prstDash val="solid"/>
-                      <a:round/>
-                      <a:headEnd type="none" w="med" len="med"/>
-                      <a:tailEnd type="none" w="med" len="med"/>
-                    </a:lnT>
-                    <a:lnB w="2540" cap="flat" cmpd="sng" algn="ctr">
-                      <a:solidFill>
-                        <a:srgbClr val="EEEEEE"/>
-                      </a:solidFill>
-                      <a:prstDash val="solid"/>
-                      <a:round/>
-                      <a:headEnd type="none" w="med" len="med"/>
-                      <a:tailEnd type="none" w="med" len="med"/>
-                    </a:lnB>
-                  </a:tcPr>
-                </a:tc>
-                <a:tc>
-                  <a:txBody>
-                    <a:bodyPr/>
-                    <a:lstStyle/>
-                    <a:p>
-                      <a:pPr algn="ctr" indent="0" marL="0">
-                        <a:buNone/>
-                      </a:pPr>
-                      <a:r>
-                        <a:rPr lang="en-US" sz="500" dirty="0">
-                          <a:solidFill>
-                            <a:srgbClr val="000000"/>
-                          </a:solidFill>
-                          <a:latin typeface="Calibri" pitchFamily="34" charset="0"/>
-                          <a:ea typeface="Calibri" pitchFamily="34" charset="-122"/>
-                          <a:cs typeface="Calibri" pitchFamily="34" charset="-120"/>
-                        </a:rPr>
-                        <a:t>0.59%</a:t>
-                      </a:r>
-                      <a:endParaRPr lang="en-US" sz="500" dirty="0">
-                        <a:latin typeface="Calibri" charset="0"/>
-                        <a:ea typeface="Calibri" charset="0"/>
-                        <a:cs typeface="Calibri" charset="0"/>
-                      </a:endParaRPr>
-                    </a:p>
-                  </a:txBody>
-                  <a:tcPr marL="91440" marR="91440" marT="45720" marB="45720">
-                    <a:lnL w="2540" cap="flat" cmpd="sng" algn="ctr">
-                      <a:solidFill>
-                        <a:srgbClr val="EEEEEE"/>
-                      </a:solidFill>
-                      <a:prstDash val="solid"/>
-                      <a:round/>
-                      <a:headEnd type="none" w="med" len="med"/>
-                      <a:tailEnd type="none" w="med" len="med"/>
-                    </a:lnL>
-                    <a:lnR w="2540" cap="flat" cmpd="sng" algn="ctr">
-                      <a:solidFill>
-                        <a:srgbClr val="EEEEEE"/>
-                      </a:solidFill>
-                      <a:prstDash val="solid"/>
-                      <a:round/>
-                      <a:headEnd type="none" w="med" len="med"/>
-                      <a:tailEnd type="none" w="med" len="med"/>
-                    </a:lnR>
-                    <a:lnT w="2540" cap="flat" cmpd="sng" algn="ctr">
-                      <a:solidFill>
-                        <a:srgbClr val="EEEEEE"/>
-                      </a:solidFill>
-                      <a:prstDash val="solid"/>
-                      <a:round/>
-                      <a:headEnd type="none" w="med" len="med"/>
-                      <a:tailEnd type="none" w="med" len="med"/>
-                    </a:lnT>
-                    <a:lnB w="2540" cap="flat" cmpd="sng" algn="ctr">
-                      <a:solidFill>
-                        <a:srgbClr val="EEEEEE"/>
-                      </a:solidFill>
-                      <a:prstDash val="solid"/>
-                      <a:round/>
-                      <a:headEnd type="none" w="med" len="med"/>
-                      <a:tailEnd type="none" w="med" len="med"/>
-                    </a:lnB>
-                  </a:tcPr>
-                </a:tc>
-                <a:tc>
-                  <a:txBody>
-                    <a:bodyPr/>
-                    <a:lstStyle/>
-                    <a:p>
-                      <a:pPr algn="ctr" indent="0" marL="0">
-                        <a:buNone/>
-                      </a:pPr>
-                      <a:r>
-                        <a:rPr lang="en-US" sz="500" dirty="0">
-                          <a:solidFill>
-                            <a:srgbClr val="000000"/>
-                          </a:solidFill>
-                          <a:latin typeface="Calibri" pitchFamily="34" charset="0"/>
-                          <a:ea typeface="Calibri" pitchFamily="34" charset="-122"/>
-                          <a:cs typeface="Calibri" pitchFamily="34" charset="-120"/>
-                        </a:rPr>
-                        <a:t>0.58%</a:t>
-                      </a:r>
-                      <a:endParaRPr lang="en-US" sz="500" dirty="0">
-                        <a:latin typeface="Calibri" charset="0"/>
-                        <a:ea typeface="Calibri" charset="0"/>
-                        <a:cs typeface="Calibri" charset="0"/>
-                      </a:endParaRPr>
-                    </a:p>
-                  </a:txBody>
-                  <a:tcPr marL="91440" marR="91440" marT="45720" marB="45720">
-                    <a:lnL w="2540" cap="flat" cmpd="sng" algn="ctr">
-                      <a:solidFill>
-                        <a:srgbClr val="EEEEEE"/>
-                      </a:solidFill>
-                      <a:prstDash val="solid"/>
-                      <a:round/>
-                      <a:headEnd type="none" w="med" len="med"/>
-                      <a:tailEnd type="none" w="med" len="med"/>
-                    </a:lnL>
-                    <a:lnR w="2540" cap="flat" cmpd="sng" algn="ctr">
-                      <a:solidFill>
-                        <a:srgbClr val="EEEEEE"/>
-                      </a:solidFill>
-                      <a:prstDash val="solid"/>
-                      <a:round/>
-                      <a:headEnd type="none" w="med" len="med"/>
-                      <a:tailEnd type="none" w="med" len="med"/>
-                    </a:lnR>
-                    <a:lnT w="2540" cap="flat" cmpd="sng" algn="ctr">
-                      <a:solidFill>
-                        <a:srgbClr val="EEEEEE"/>
-                      </a:solidFill>
-                      <a:prstDash val="solid"/>
-                      <a:round/>
-                      <a:headEnd type="none" w="med" len="med"/>
-                      <a:tailEnd type="none" w="med" len="med"/>
-                    </a:lnT>
-                    <a:lnB w="2540" cap="flat" cmpd="sng" algn="ctr">
-                      <a:solidFill>
-                        <a:srgbClr val="EEEEEE"/>
-                      </a:solidFill>
-                      <a:prstDash val="solid"/>
-                      <a:round/>
-                      <a:headEnd type="none" w="med" len="med"/>
-                      <a:tailEnd type="none" w="med" len="med"/>
-                    </a:lnB>
-                  </a:tcPr>
-                </a:tc>
-                <a:tc>
-                  <a:txBody>
-                    <a:bodyPr/>
-                    <a:lstStyle/>
-                    <a:p>
-                      <a:pPr algn="ctr" indent="0" marL="0">
-                        <a:buNone/>
-                      </a:pPr>
-                      <a:r>
-                        <a:rPr lang="en-US" sz="500" dirty="0">
-                          <a:solidFill>
-                            <a:srgbClr val="000000"/>
-                          </a:solidFill>
-                          <a:latin typeface="Calibri" pitchFamily="34" charset="0"/>
-                          <a:ea typeface="Calibri" pitchFamily="34" charset="-122"/>
-                          <a:cs typeface="Calibri" pitchFamily="34" charset="-120"/>
-                        </a:rPr>
-                        <a:t>0.71%</a:t>
-                      </a:r>
-                      <a:endParaRPr lang="en-US" sz="500" dirty="0">
-                        <a:latin typeface="Calibri" charset="0"/>
-                        <a:ea typeface="Calibri" charset="0"/>
-                        <a:cs typeface="Calibri" charset="0"/>
-                      </a:endParaRPr>
-                    </a:p>
-                  </a:txBody>
-                  <a:tcPr marL="91440" marR="91440" marT="45720" marB="45720">
-                    <a:lnL w="2540" cap="flat" cmpd="sng" algn="ctr">
-                      <a:solidFill>
-                        <a:srgbClr val="EEEEEE"/>
-                      </a:solidFill>
-                      <a:prstDash val="solid"/>
-                      <a:round/>
-                      <a:headEnd type="none" w="med" len="med"/>
-                      <a:tailEnd type="none" w="med" len="med"/>
-                    </a:lnL>
-                    <a:lnR w="2540" cap="flat" cmpd="sng" algn="ctr">
-                      <a:solidFill>
-                        <a:srgbClr val="EEEEEE"/>
-                      </a:solidFill>
-                      <a:prstDash val="solid"/>
-                      <a:round/>
-                      <a:headEnd type="none" w="med" len="med"/>
-                      <a:tailEnd type="none" w="med" len="med"/>
-                    </a:lnR>
-                    <a:lnT w="2540" cap="flat" cmpd="sng" algn="ctr">
-                      <a:solidFill>
-                        <a:srgbClr val="EEEEEE"/>
-                      </a:solidFill>
-                      <a:prstDash val="solid"/>
-                      <a:round/>
-                      <a:headEnd type="none" w="med" len="med"/>
-                      <a:tailEnd type="none" w="med" len="med"/>
-                    </a:lnT>
-                    <a:lnB w="2540" cap="flat" cmpd="sng" algn="ctr">
-                      <a:solidFill>
-                        <a:srgbClr val="EEEEEE"/>
-                      </a:solidFill>
-                      <a:prstDash val="solid"/>
-                      <a:round/>
-                      <a:headEnd type="none" w="med" len="med"/>
-                      <a:tailEnd type="none" w="med" len="med"/>
-                    </a:lnB>
-                  </a:tcPr>
-                </a:tc>
-                <a:tc>
-                  <a:txBody>
-                    <a:bodyPr/>
-                    <a:lstStyle/>
-                    <a:p>
-                      <a:pPr algn="ctr" indent="0" marL="0">
-                        <a:buNone/>
-                      </a:pPr>
-                      <a:r>
-                        <a:rPr lang="en-US" sz="500" dirty="0">
-                          <a:solidFill>
-                            <a:srgbClr val="000000"/>
-                          </a:solidFill>
-                          <a:latin typeface="Calibri" pitchFamily="34" charset="0"/>
-                          <a:ea typeface="Calibri" pitchFamily="34" charset="-122"/>
-                          <a:cs typeface="Calibri" pitchFamily="34" charset="-120"/>
-                        </a:rPr>
-                        <a:t>0.67%</a:t>
-                      </a:r>
-                      <a:endParaRPr lang="en-US" sz="500" dirty="0">
-                        <a:latin typeface="Calibri" charset="0"/>
-                        <a:ea typeface="Calibri" charset="0"/>
-                        <a:cs typeface="Calibri" charset="0"/>
-                      </a:endParaRPr>
-                    </a:p>
-                  </a:txBody>
-                  <a:tcPr marL="91440" marR="91440" marT="45720" marB="45720">
-                    <a:lnL w="2540" cap="flat" cmpd="sng" algn="ctr">
-                      <a:solidFill>
-                        <a:srgbClr val="EEEEEE"/>
-                      </a:solidFill>
-                      <a:prstDash val="solid"/>
-                      <a:round/>
-                      <a:headEnd type="none" w="med" len="med"/>
-                      <a:tailEnd type="none" w="med" len="med"/>
-                    </a:lnL>
-                    <a:lnR w="2540" cap="flat" cmpd="sng" algn="ctr">
-                      <a:solidFill>
-                        <a:srgbClr val="EEEEEE"/>
-                      </a:solidFill>
-                      <a:prstDash val="solid"/>
-                      <a:round/>
-                      <a:headEnd type="none" w="med" len="med"/>
-                      <a:tailEnd type="none" w="med" len="med"/>
-                    </a:lnR>
-                    <a:lnT w="2540" cap="flat" cmpd="sng" algn="ctr">
-                      <a:solidFill>
-                        <a:srgbClr val="EEEEEE"/>
-                      </a:solidFill>
-                      <a:prstDash val="solid"/>
-                      <a:round/>
-                      <a:headEnd type="none" w="med" len="med"/>
-                      <a:tailEnd type="none" w="med" len="med"/>
-                    </a:lnT>
-                    <a:lnB w="2540" cap="flat" cmpd="sng" algn="ctr">
-                      <a:solidFill>
-                        <a:srgbClr val="EEEEEE"/>
-                      </a:solidFill>
-                      <a:prstDash val="solid"/>
-                      <a:round/>
-                      <a:headEnd type="none" w="med" len="med"/>
-                      <a:tailEnd type="none" w="med" len="med"/>
-                    </a:lnB>
-                  </a:tcPr>
-                </a:tc>
-                <a:tc>
-                  <a:txBody>
-                    <a:bodyPr/>
-                    <a:lstStyle/>
-                    <a:p>
-                      <a:pPr algn="ctr" indent="0" marL="0">
-                        <a:buNone/>
-                      </a:pPr>
-                      <a:r>
-                        <a:rPr lang="en-US" sz="500" dirty="0">
-                          <a:solidFill>
-                            <a:srgbClr val="000000"/>
-                          </a:solidFill>
-                          <a:latin typeface="Calibri" pitchFamily="34" charset="0"/>
-                          <a:ea typeface="Calibri" pitchFamily="34" charset="-122"/>
-                          <a:cs typeface="Calibri" pitchFamily="34" charset="-120"/>
-                        </a:rPr>
-                        <a:t>0.60%</a:t>
-                      </a:r>
-                      <a:endParaRPr lang="en-US" sz="500" dirty="0">
-                        <a:latin typeface="Calibri" charset="0"/>
-                        <a:ea typeface="Calibri" charset="0"/>
-                        <a:cs typeface="Calibri" charset="0"/>
-                      </a:endParaRPr>
-                    </a:p>
-                  </a:txBody>
-                  <a:tcPr marL="91440" marR="91440" marT="45720" marB="45720">
-                    <a:lnL w="2540" cap="flat" cmpd="sng" algn="ctr">
-                      <a:solidFill>
-                        <a:srgbClr val="EEEEEE"/>
-                      </a:solidFill>
-                      <a:prstDash val="solid"/>
-                      <a:round/>
-                      <a:headEnd type="none" w="med" len="med"/>
-                      <a:tailEnd type="none" w="med" len="med"/>
-                    </a:lnL>
-                    <a:lnR w="2540" cap="flat" cmpd="sng" algn="ctr">
-                      <a:solidFill>
-                        <a:srgbClr val="EEEEEE"/>
-                      </a:solidFill>
-                      <a:prstDash val="solid"/>
-                      <a:round/>
-                      <a:headEnd type="none" w="med" len="med"/>
-                      <a:tailEnd type="none" w="med" len="med"/>
-                    </a:lnR>
-                    <a:lnT w="2540" cap="flat" cmpd="sng" algn="ctr">
-                      <a:solidFill>
-                        <a:srgbClr val="EEEEEE"/>
-                      </a:solidFill>
-                      <a:prstDash val="solid"/>
-                      <a:round/>
-                      <a:headEnd type="none" w="med" len="med"/>
-                      <a:tailEnd type="none" w="med" len="med"/>
-                    </a:lnT>
-                    <a:lnB w="2540" cap="flat" cmpd="sng" algn="ctr">
-                      <a:solidFill>
-                        <a:srgbClr val="EEEEEE"/>
-                      </a:solidFill>
-                      <a:prstDash val="solid"/>
-                      <a:round/>
-                      <a:headEnd type="none" w="med" len="med"/>
-                      <a:tailEnd type="none" w="med" len="med"/>
-                    </a:lnB>
-                  </a:tcPr>
-                </a:tc>
-                <a:tc>
-                  <a:txBody>
-                    <a:bodyPr/>
-                    <a:lstStyle/>
-                    <a:p>
-                      <a:pPr algn="ctr" indent="0" marL="0">
-                        <a:buNone/>
-                      </a:pPr>
-                      <a:r>
-                        <a:rPr lang="en-US" sz="500" dirty="0">
-                          <a:solidFill>
-                            <a:srgbClr val="000000"/>
-                          </a:solidFill>
-                          <a:latin typeface="Calibri" pitchFamily="34" charset="0"/>
-                          <a:ea typeface="Calibri" pitchFamily="34" charset="-122"/>
-                          <a:cs typeface="Calibri" pitchFamily="34" charset="-120"/>
-                        </a:rPr>
-                        <a:t>0.58%</a:t>
-                      </a:r>
-                      <a:endParaRPr lang="en-US" sz="500" dirty="0">
-                        <a:latin typeface="Calibri" charset="0"/>
-                        <a:ea typeface="Calibri" charset="0"/>
-                        <a:cs typeface="Calibri" charset="0"/>
-                      </a:endParaRPr>
-                    </a:p>
-                  </a:txBody>
-                  <a:tcPr marL="91440" marR="91440" marT="45720" marB="45720">
-                    <a:lnL w="2540" cap="flat" cmpd="sng" algn="ctr">
-                      <a:solidFill>
-                        <a:srgbClr val="EEEEEE"/>
-                      </a:solidFill>
-                      <a:prstDash val="solid"/>
-                      <a:round/>
-                      <a:headEnd type="none" w="med" len="med"/>
-                      <a:tailEnd type="none" w="med" len="med"/>
-                    </a:lnL>
-                    <a:lnR w="2540" cap="flat" cmpd="sng" algn="ctr">
-                      <a:solidFill>
-                        <a:srgbClr val="EEEEEE"/>
-                      </a:solidFill>
-                      <a:prstDash val="solid"/>
-                      <a:round/>
-                      <a:headEnd type="none" w="med" len="med"/>
-                      <a:tailEnd type="none" w="med" len="med"/>
-                    </a:lnR>
-                    <a:lnT w="2540" cap="flat" cmpd="sng" algn="ctr">
-                      <a:solidFill>
-                        <a:srgbClr val="EEEEEE"/>
-                      </a:solidFill>
-                      <a:prstDash val="solid"/>
-                      <a:round/>
-                      <a:headEnd type="none" w="med" len="med"/>
-                      <a:tailEnd type="none" w="med" len="med"/>
-                    </a:lnT>
-                    <a:lnB w="2540" cap="flat" cmpd="sng" algn="ctr">
-                      <a:solidFill>
-                        <a:srgbClr val="EEEEEE"/>
-                      </a:solidFill>
-                      <a:prstDash val="solid"/>
-                      <a:round/>
-                      <a:headEnd type="none" w="med" len="med"/>
-                      <a:tailEnd type="none" w="med" len="med"/>
-                    </a:lnB>
-                  </a:tcPr>
-                </a:tc>
-                <a:tc>
-                  <a:txBody>
-                    <a:bodyPr/>
-                    <a:lstStyle/>
-                    <a:p>
-                      <a:pPr algn="ctr" indent="0" marL="0">
-                        <a:buNone/>
-                      </a:pPr>
-                      <a:r>
-                        <a:rPr lang="en-US" sz="500" dirty="0">
-                          <a:solidFill>
-                            <a:srgbClr val="000000"/>
-                          </a:solidFill>
-                          <a:latin typeface="Calibri" pitchFamily="34" charset="0"/>
-                          <a:ea typeface="Calibri" pitchFamily="34" charset="-122"/>
-                          <a:cs typeface="Calibri" pitchFamily="34" charset="-120"/>
-                        </a:rPr>
-                        <a:t>0.79%</a:t>
-                      </a:r>
-                      <a:endParaRPr lang="en-US" sz="500" dirty="0">
-                        <a:latin typeface="Calibri" charset="0"/>
-                        <a:ea typeface="Calibri" charset="0"/>
-                        <a:cs typeface="Calibri" charset="0"/>
-                      </a:endParaRPr>
-                    </a:p>
-                  </a:txBody>
-                  <a:tcPr marL="91440" marR="91440" marT="45720" marB="45720">
-                    <a:lnL w="2540" cap="flat" cmpd="sng" algn="ctr">
-                      <a:solidFill>
-                        <a:srgbClr val="EEEEEE"/>
-                      </a:solidFill>
-                      <a:prstDash val="solid"/>
-                      <a:round/>
-                      <a:headEnd type="none" w="med" len="med"/>
-                      <a:tailEnd type="none" w="med" len="med"/>
-                    </a:lnL>
-                    <a:lnR w="2540" cap="flat" cmpd="sng" algn="ctr">
-                      <a:solidFill>
-                        <a:srgbClr val="EEEEEE"/>
-                      </a:solidFill>
-                      <a:prstDash val="solid"/>
-                      <a:round/>
-                      <a:headEnd type="none" w="med" len="med"/>
-                      <a:tailEnd type="none" w="med" len="med"/>
-                    </a:lnR>
-                    <a:lnT w="2540" cap="flat" cmpd="sng" algn="ctr">
-                      <a:solidFill>
-                        <a:srgbClr val="EEEEEE"/>
-                      </a:solidFill>
-                      <a:prstDash val="solid"/>
-                      <a:round/>
-                      <a:headEnd type="none" w="med" len="med"/>
-                      <a:tailEnd type="none" w="med" len="med"/>
-                    </a:lnT>
-                    <a:lnB w="2540" cap="flat" cmpd="sng" algn="ctr">
-                      <a:solidFill>
-                        <a:srgbClr val="EEEEEE"/>
-                      </a:solidFill>
-                      <a:prstDash val="solid"/>
-                      <a:round/>
-                      <a:headEnd type="none" w="med" len="med"/>
-                      <a:tailEnd type="none" w="med" len="med"/>
-                    </a:lnB>
-                  </a:tcPr>
-                </a:tc>
-                <a:tc>
-                  <a:txBody>
-                    <a:bodyPr/>
-                    <a:lstStyle/>
-                    <a:p>
-                      <a:pPr algn="ctr" indent="0" marL="0">
-                        <a:buNone/>
-                      </a:pPr>
-                      <a:r>
-                        <a:rPr lang="en-US" sz="500" dirty="0">
-                          <a:solidFill>
-                            <a:srgbClr val="000000"/>
-                          </a:solidFill>
-                          <a:latin typeface="Calibri" pitchFamily="34" charset="0"/>
-                          <a:ea typeface="Calibri" pitchFamily="34" charset="-122"/>
-                          <a:cs typeface="Calibri" pitchFamily="34" charset="-120"/>
-                        </a:rPr>
-                        <a:t>4.04%</a:t>
-                      </a:r>
-                      <a:endParaRPr lang="en-US" sz="500" dirty="0">
-                        <a:latin typeface="Calibri" charset="0"/>
-                        <a:ea typeface="Calibri" charset="0"/>
-                        <a:cs typeface="Calibri" charset="0"/>
-                      </a:endParaRPr>
-                    </a:p>
-                  </a:txBody>
-                  <a:tcPr marL="91440" marR="91440" marT="45720" marB="45720">
-                    <a:lnL w="2540" cap="flat" cmpd="sng" algn="ctr">
-                      <a:solidFill>
-                        <a:srgbClr val="EEEEEE"/>
-                      </a:solidFill>
-                      <a:prstDash val="solid"/>
-                      <a:round/>
-                      <a:headEnd type="none" w="med" len="med"/>
-                      <a:tailEnd type="none" w="med" len="med"/>
-                    </a:lnL>
-                    <a:lnR w="2540" cap="flat" cmpd="sng" algn="ctr">
-                      <a:solidFill>
-                        <a:srgbClr val="EEEEEE"/>
-                      </a:solidFill>
-                      <a:prstDash val="solid"/>
-                      <a:round/>
-                      <a:headEnd type="none" w="med" len="med"/>
-                      <a:tailEnd type="none" w="med" len="med"/>
-                    </a:lnR>
-                    <a:lnT w="2540" cap="flat" cmpd="sng" algn="ctr">
-                      <a:solidFill>
-                        <a:srgbClr val="EEEEEE"/>
-                      </a:solidFill>
-                      <a:prstDash val="solid"/>
-                      <a:round/>
-                      <a:headEnd type="none" w="med" len="med"/>
-                      <a:tailEnd type="none" w="med" len="med"/>
-                    </a:lnT>
-                    <a:lnB w="2540" cap="flat" cmpd="sng" algn="ctr">
-                      <a:solidFill>
-                        <a:srgbClr val="EEEEEE"/>
-                      </a:solidFill>
-                      <a:prstDash val="solid"/>
-                      <a:round/>
-                      <a:headEnd type="none" w="med" len="med"/>
-                      <a:tailEnd type="none" w="med" len="med"/>
-                    </a:lnB>
-                  </a:tcPr>
-                </a:tc>
-                <a:tc>
-                  <a:txBody>
-                    <a:bodyPr/>
-                    <a:lstStyle/>
-                    <a:p>
-                      <a:pPr algn="ctr" indent="0" marL="0">
-                        <a:buNone/>
-                      </a:pPr>
-                      <a:r>
-                        <a:rPr lang="en-US" sz="500" b="1" dirty="0">
-                          <a:solidFill>
-                            <a:srgbClr val="000000"/>
-                          </a:solidFill>
-                          <a:latin typeface="Calibri" pitchFamily="34" charset="0"/>
-                          <a:ea typeface="Calibri" pitchFamily="34" charset="-122"/>
-                          <a:cs typeface="Calibri" pitchFamily="34" charset="-120"/>
-                        </a:rPr>
-                        <a:t>10.74%</a:t>
-                      </a:r>
-                      <a:endParaRPr lang="en-US" sz="500" dirty="0">
-                        <a:latin typeface="Calibri" charset="0"/>
-                        <a:ea typeface="Calibri" charset="0"/>
-                        <a:cs typeface="Calibri" charset="0"/>
-                      </a:endParaRPr>
-                    </a:p>
-                  </a:txBody>
-                  <a:tcPr marL="91440" marR="91440" marT="45720" marB="45720">
-                    <a:lnL w="2540" cap="flat" cmpd="sng" algn="ctr">
-                      <a:solidFill>
-                        <a:srgbClr val="EEEEEE"/>
-                      </a:solidFill>
-                      <a:prstDash val="solid"/>
-                      <a:round/>
-                      <a:headEnd type="none" w="med" len="med"/>
-                      <a:tailEnd type="none" w="med" len="med"/>
-                    </a:lnL>
-                    <a:lnR w="2540" cap="flat" cmpd="sng" algn="ctr">
-                      <a:solidFill>
-                        <a:srgbClr val="EEEEEE"/>
-                      </a:solidFill>
-                      <a:prstDash val="solid"/>
-                      <a:round/>
-                      <a:headEnd type="none" w="med" len="med"/>
-                      <a:tailEnd type="none" w="med" len="med"/>
-                    </a:lnR>
-                    <a:lnT w="2540" cap="flat" cmpd="sng" algn="ctr">
-                      <a:solidFill>
-                        <a:srgbClr val="EEEEEE"/>
-                      </a:solidFill>
-                      <a:prstDash val="solid"/>
-                      <a:round/>
-                      <a:headEnd type="none" w="med" len="med"/>
-                      <a:tailEnd type="none" w="med" len="med"/>
-                    </a:lnT>
-                    <a:lnB w="2540" cap="flat" cmpd="sng" algn="ctr">
-                      <a:solidFill>
-                        <a:srgbClr val="EEEEEE"/>
-                      </a:solidFill>
-                      <a:prstDash val="solid"/>
-                      <a:round/>
-                      <a:headEnd type="none" w="med" len="med"/>
-                      <a:tailEnd type="none" w="med" len="med"/>
-                    </a:lnB>
-                  </a:tcPr>
-                </a:tc>
-              </a:tr>
-              <a:tr h="123444">
-                <a:tc>
-                  <a:txBody>
-                    <a:bodyPr/>
-                    <a:lstStyle/>
-                    <a:p>
-                      <a:pPr algn="l" indent="0" marL="0">
-                        <a:buNone/>
-                      </a:pPr>
-                      <a:r>
-                        <a:rPr lang="en-US" sz="500" b="1" dirty="0">
-                          <a:solidFill>
-                            <a:srgbClr val="000000"/>
-                          </a:solidFill>
-                          <a:latin typeface="Calibri" pitchFamily="34" charset="0"/>
-                          <a:ea typeface="Calibri" pitchFamily="34" charset="-122"/>
-                          <a:cs typeface="Calibri" pitchFamily="34" charset="-120"/>
-                        </a:rPr>
-                        <a:t>2026</a:t>
-                      </a:r>
-                      <a:endParaRPr lang="en-US" sz="500" dirty="0">
-                        <a:latin typeface="Calibri" charset="0"/>
-                        <a:ea typeface="Calibri" charset="0"/>
-                        <a:cs typeface="Calibri" charset="0"/>
-                      </a:endParaRPr>
-                    </a:p>
-                  </a:txBody>
-                  <a:tcPr marL="91440" marR="91440" marT="45720" marB="45720">
-                    <a:lnL w="2540" cap="flat" cmpd="sng" algn="ctr">
-                      <a:solidFill>
-                        <a:srgbClr val="EEEEEE"/>
-                      </a:solidFill>
-                      <a:prstDash val="solid"/>
-                      <a:round/>
-                      <a:headEnd type="none" w="med" len="med"/>
-                      <a:tailEnd type="none" w="med" len="med"/>
-                    </a:lnL>
-                    <a:lnR w="2540" cap="flat" cmpd="sng" algn="ctr">
-                      <a:solidFill>
-                        <a:srgbClr val="EEEEEE"/>
-                      </a:solidFill>
-                      <a:prstDash val="solid"/>
-                      <a:round/>
-                      <a:headEnd type="none" w="med" len="med"/>
-                      <a:tailEnd type="none" w="med" len="med"/>
-                    </a:lnR>
-                    <a:lnT w="2540" cap="flat" cmpd="sng" algn="ctr">
-                      <a:solidFill>
-                        <a:srgbClr val="EEEEEE"/>
-                      </a:solidFill>
-                      <a:prstDash val="solid"/>
-                      <a:round/>
-                      <a:headEnd type="none" w="med" len="med"/>
-                      <a:tailEnd type="none" w="med" len="med"/>
-                    </a:lnT>
-                    <a:lnB w="2540" cap="flat" cmpd="sng" algn="ctr">
-                      <a:solidFill>
-                        <a:srgbClr val="EEEEEE"/>
-                      </a:solidFill>
-                      <a:prstDash val="solid"/>
-                      <a:round/>
-                      <a:headEnd type="none" w="med" len="med"/>
-                      <a:tailEnd type="none" w="med" len="med"/>
-                    </a:lnB>
-                  </a:tcPr>
-                </a:tc>
-                <a:tc>
-                  <a:txBody>
-                    <a:bodyPr/>
-                    <a:lstStyle/>
-                    <a:p>
-                      <a:pPr algn="l" indent="0" marL="0">
-                        <a:buNone/>
-                      </a:pPr>
-                      <a:r>
-                        <a:rPr lang="en-US" sz="500" dirty="0">
-                          <a:solidFill>
-                            <a:srgbClr val="777777"/>
-                          </a:solidFill>
-                          <a:latin typeface="Calibri" pitchFamily="34" charset="0"/>
-                          <a:ea typeface="Calibri" pitchFamily="34" charset="-122"/>
-                          <a:cs typeface="Calibri" pitchFamily="34" charset="-120"/>
-                        </a:rPr>
-                        <a:t>ICP</a:t>
-                      </a:r>
-                      <a:endParaRPr lang="en-US" sz="500" dirty="0">
-                        <a:latin typeface="Calibri" charset="0"/>
-                        <a:ea typeface="Calibri" charset="0"/>
-                        <a:cs typeface="Calibri" charset="0"/>
-                      </a:endParaRPr>
-                    </a:p>
-                  </a:txBody>
-                  <a:tcPr marL="91440" marR="91440" marT="45720" marB="45720">
-                    <a:lnL w="2540" cap="flat" cmpd="sng" algn="ctr">
-                      <a:solidFill>
-                        <a:srgbClr val="EEEEEE"/>
-                      </a:solidFill>
-                      <a:prstDash val="solid"/>
-                      <a:round/>
-                      <a:headEnd type="none" w="med" len="med"/>
-                      <a:tailEnd type="none" w="med" len="med"/>
-                    </a:lnL>
-                    <a:lnR w="2540" cap="flat" cmpd="sng" algn="ctr">
-                      <a:solidFill>
-                        <a:srgbClr val="EEEEEE"/>
-                      </a:solidFill>
-                      <a:prstDash val="solid"/>
-                      <a:round/>
-                      <a:headEnd type="none" w="med" len="med"/>
-                      <a:tailEnd type="none" w="med" len="med"/>
-                    </a:lnR>
-                    <a:lnT w="2540" cap="flat" cmpd="sng" algn="ctr">
-                      <a:solidFill>
-                        <a:srgbClr val="EEEEEE"/>
-                      </a:solidFill>
-                      <a:prstDash val="solid"/>
-                      <a:round/>
-                      <a:headEnd type="none" w="med" len="med"/>
-                      <a:tailEnd type="none" w="med" len="med"/>
-                    </a:lnT>
-                    <a:lnB w="2540" cap="flat" cmpd="sng" algn="ctr">
-                      <a:solidFill>
-                        <a:srgbClr val="EEEEEE"/>
-                      </a:solidFill>
-                      <a:prstDash val="solid"/>
-                      <a:round/>
-                      <a:headEnd type="none" w="med" len="med"/>
-                      <a:tailEnd type="none" w="med" len="med"/>
-                    </a:lnB>
-                  </a:tcPr>
-                </a:tc>
-                <a:tc>
-                  <a:txBody>
-                    <a:bodyPr/>
-                    <a:lstStyle/>
-                    <a:p>
-                      <a:pPr algn="ctr" indent="0" marL="0">
-                        <a:buNone/>
-                      </a:pPr>
-                      <a:r>
-                        <a:rPr lang="en-US" sz="500" dirty="0">
-                          <a:solidFill>
-                            <a:srgbClr val="777777"/>
-                          </a:solidFill>
-                          <a:latin typeface="Calibri" pitchFamily="34" charset="0"/>
-                          <a:ea typeface="Calibri" pitchFamily="34" charset="-122"/>
-                          <a:cs typeface="Calibri" pitchFamily="34" charset="-120"/>
-                        </a:rPr>
-                        <a:t>0.37%</a:t>
-                      </a:r>
-                      <a:endParaRPr lang="en-US" sz="500" dirty="0">
-                        <a:latin typeface="Calibri" charset="0"/>
-                        <a:ea typeface="Calibri" charset="0"/>
-                        <a:cs typeface="Calibri" charset="0"/>
-                      </a:endParaRPr>
-                    </a:p>
-                  </a:txBody>
-                  <a:tcPr marL="91440" marR="91440" marT="45720" marB="45720">
-                    <a:lnL w="2540" cap="flat" cmpd="sng" algn="ctr">
-                      <a:solidFill>
-                        <a:srgbClr val="EEEEEE"/>
-                      </a:solidFill>
-                      <a:prstDash val="solid"/>
-                      <a:round/>
-                      <a:headEnd type="none" w="med" len="med"/>
-                      <a:tailEnd type="none" w="med" len="med"/>
-                    </a:lnL>
-                    <a:lnR w="2540" cap="flat" cmpd="sng" algn="ctr">
-                      <a:solidFill>
-                        <a:srgbClr val="EEEEEE"/>
-                      </a:solidFill>
-                      <a:prstDash val="solid"/>
-                      <a:round/>
-                      <a:headEnd type="none" w="med" len="med"/>
-                      <a:tailEnd type="none" w="med" len="med"/>
-                    </a:lnR>
-                    <a:lnT w="2540" cap="flat" cmpd="sng" algn="ctr">
-                      <a:solidFill>
-                        <a:srgbClr val="EEEEEE"/>
-                      </a:solidFill>
-                      <a:prstDash val="solid"/>
-                      <a:round/>
-                      <a:headEnd type="none" w="med" len="med"/>
-                      <a:tailEnd type="none" w="med" len="med"/>
-                    </a:lnT>
-                    <a:lnB w="2540" cap="flat" cmpd="sng" algn="ctr">
-                      <a:solidFill>
-                        <a:srgbClr val="EEEEEE"/>
-                      </a:solidFill>
-                      <a:prstDash val="solid"/>
-                      <a:round/>
-                      <a:headEnd type="none" w="med" len="med"/>
-                      <a:tailEnd type="none" w="med" len="med"/>
-                    </a:lnB>
-                  </a:tcPr>
-                </a:tc>
-                <a:tc>
-                  <a:txBody>
-                    <a:bodyPr/>
-                    <a:lstStyle/>
-                    <a:p>
-                      <a:pPr algn="ctr" indent="0" marL="0">
-                        <a:buNone/>
-                      </a:pPr>
-                      <a:r>
-                        <a:rPr lang="en-US" sz="500" dirty="0">
-                          <a:solidFill>
-                            <a:srgbClr val="777777"/>
-                          </a:solidFill>
-                          <a:latin typeface="Calibri" pitchFamily="34" charset="0"/>
-                          <a:ea typeface="Calibri" pitchFamily="34" charset="-122"/>
-                          <a:cs typeface="Calibri" pitchFamily="34" charset="-120"/>
-                        </a:rPr>
-                        <a:t>0.37%</a:t>
-                      </a:r>
-                      <a:endParaRPr lang="en-US" sz="500" dirty="0">
-                        <a:latin typeface="Calibri" charset="0"/>
-                        <a:ea typeface="Calibri" charset="0"/>
-                        <a:cs typeface="Calibri" charset="0"/>
-                      </a:endParaRPr>
-                    </a:p>
-                  </a:txBody>
-                  <a:tcPr marL="91440" marR="91440" marT="45720" marB="45720">
-                    <a:lnL w="2540" cap="flat" cmpd="sng" algn="ctr">
-                      <a:solidFill>
-                        <a:srgbClr val="EEEEEE"/>
-                      </a:solidFill>
-                      <a:prstDash val="solid"/>
-                      <a:round/>
-                      <a:headEnd type="none" w="med" len="med"/>
-                      <a:tailEnd type="none" w="med" len="med"/>
-                    </a:lnL>
-                    <a:lnR w="2540" cap="flat" cmpd="sng" algn="ctr">
-                      <a:solidFill>
-                        <a:srgbClr val="EEEEEE"/>
-                      </a:solidFill>
-                      <a:prstDash val="solid"/>
-                      <a:round/>
-                      <a:headEnd type="none" w="med" len="med"/>
-                      <a:tailEnd type="none" w="med" len="med"/>
-                    </a:lnR>
-                    <a:lnT w="2540" cap="flat" cmpd="sng" algn="ctr">
-                      <a:solidFill>
-                        <a:srgbClr val="EEEEEE"/>
-                      </a:solidFill>
-                      <a:prstDash val="solid"/>
-                      <a:round/>
-                      <a:headEnd type="none" w="med" len="med"/>
-                      <a:tailEnd type="none" w="med" len="med"/>
-                    </a:lnT>
-                    <a:lnB w="2540" cap="flat" cmpd="sng" algn="ctr">
-                      <a:solidFill>
-                        <a:srgbClr val="EEEEEE"/>
-                      </a:solidFill>
-                      <a:prstDash val="solid"/>
-                      <a:round/>
-                      <a:headEnd type="none" w="med" len="med"/>
-                      <a:tailEnd type="none" w="med" len="med"/>
-                    </a:lnB>
-                  </a:tcPr>
-                </a:tc>
-                <a:tc>
-                  <a:txBody>
-                    <a:bodyPr/>
-                    <a:lstStyle/>
-                    <a:p>
-                      <a:pPr algn="ctr" indent="0" marL="0">
-                        <a:buNone/>
-                      </a:pPr>
-                      <a:r>
-                        <a:rPr lang="en-US" sz="500" dirty="0">
-                          <a:solidFill>
-                            <a:srgbClr val="777777"/>
-                          </a:solidFill>
-                          <a:latin typeface="Calibri" pitchFamily="34" charset="0"/>
-                          <a:ea typeface="Calibri" pitchFamily="34" charset="-122"/>
-                          <a:cs typeface="Calibri" pitchFamily="34" charset="-120"/>
-                        </a:rPr>
-                        <a:t>0.37%</a:t>
-                      </a:r>
-                      <a:endParaRPr lang="en-US" sz="500" dirty="0">
-                        <a:latin typeface="Calibri" charset="0"/>
-                        <a:ea typeface="Calibri" charset="0"/>
-                        <a:cs typeface="Calibri" charset="0"/>
-                      </a:endParaRPr>
-                    </a:p>
-                  </a:txBody>
-                  <a:tcPr marL="91440" marR="91440" marT="45720" marB="45720">
-                    <a:lnL w="2540" cap="flat" cmpd="sng" algn="ctr">
-                      <a:solidFill>
-                        <a:srgbClr val="EEEEEE"/>
-                      </a:solidFill>
-                      <a:prstDash val="solid"/>
-                      <a:round/>
-                      <a:headEnd type="none" w="med" len="med"/>
-                      <a:tailEnd type="none" w="med" len="med"/>
-                    </a:lnL>
-                    <a:lnR w="2540" cap="flat" cmpd="sng" algn="ctr">
-                      <a:solidFill>
-                        <a:srgbClr val="EEEEEE"/>
-                      </a:solidFill>
-                      <a:prstDash val="solid"/>
-                      <a:round/>
-                      <a:headEnd type="none" w="med" len="med"/>
-                      <a:tailEnd type="none" w="med" len="med"/>
-                    </a:lnR>
-                    <a:lnT w="2540" cap="flat" cmpd="sng" algn="ctr">
-                      <a:solidFill>
-                        <a:srgbClr val="EEEEEE"/>
-                      </a:solidFill>
-                      <a:prstDash val="solid"/>
-                      <a:round/>
-                      <a:headEnd type="none" w="med" len="med"/>
-                      <a:tailEnd type="none" w="med" len="med"/>
-                    </a:lnT>
-                    <a:lnB w="2540" cap="flat" cmpd="sng" algn="ctr">
-                      <a:solidFill>
-                        <a:srgbClr val="EEEEEE"/>
-                      </a:solidFill>
-                      <a:prstDash val="solid"/>
-                      <a:round/>
-                      <a:headEnd type="none" w="med" len="med"/>
-                      <a:tailEnd type="none" w="med" len="med"/>
-                    </a:lnB>
-                  </a:tcPr>
-                </a:tc>
-                <a:tc>
-                  <a:txBody>
-                    <a:bodyPr/>
-                    <a:lstStyle/>
-                    <a:p>
-                      <a:pPr algn="ctr" indent="0" marL="0">
-                        <a:buNone/>
-                      </a:pPr>
-                      <a:r>
-                        <a:rPr lang="en-US" sz="500" dirty="0">
-                          <a:solidFill>
-                            <a:srgbClr val="777777"/>
-                          </a:solidFill>
-                          <a:latin typeface="Calibri" pitchFamily="34" charset="0"/>
-                          <a:ea typeface="Calibri" pitchFamily="34" charset="-122"/>
-                          <a:cs typeface="Calibri" pitchFamily="34" charset="-120"/>
-                        </a:rPr>
-                        <a:t>0.37%</a:t>
-                      </a:r>
-                      <a:endParaRPr lang="en-US" sz="500" dirty="0">
-                        <a:latin typeface="Calibri" charset="0"/>
-                        <a:ea typeface="Calibri" charset="0"/>
-                        <a:cs typeface="Calibri" charset="0"/>
-                      </a:endParaRPr>
-                    </a:p>
-                  </a:txBody>
-                  <a:tcPr marL="91440" marR="91440" marT="45720" marB="45720">
-                    <a:lnL w="2540" cap="flat" cmpd="sng" algn="ctr">
-                      <a:solidFill>
-                        <a:srgbClr val="EEEEEE"/>
-                      </a:solidFill>
-                      <a:prstDash val="solid"/>
-                      <a:round/>
-                      <a:headEnd type="none" w="med" len="med"/>
-                      <a:tailEnd type="none" w="med" len="med"/>
-                    </a:lnL>
-                    <a:lnR w="2540" cap="flat" cmpd="sng" algn="ctr">
-                      <a:solidFill>
-                        <a:srgbClr val="EEEEEE"/>
-                      </a:solidFill>
-                      <a:prstDash val="solid"/>
-                      <a:round/>
-                      <a:headEnd type="none" w="med" len="med"/>
-                      <a:tailEnd type="none" w="med" len="med"/>
-                    </a:lnR>
-                    <a:lnT w="2540" cap="flat" cmpd="sng" algn="ctr">
-                      <a:solidFill>
-                        <a:srgbClr val="EEEEEE"/>
-                      </a:solidFill>
-                      <a:prstDash val="solid"/>
-                      <a:round/>
-                      <a:headEnd type="none" w="med" len="med"/>
-                      <a:tailEnd type="none" w="med" len="med"/>
-                    </a:lnT>
-                    <a:lnB w="2540" cap="flat" cmpd="sng" algn="ctr">
-                      <a:solidFill>
-                        <a:srgbClr val="EEEEEE"/>
-                      </a:solidFill>
-                      <a:prstDash val="solid"/>
-                      <a:round/>
-                      <a:headEnd type="none" w="med" len="med"/>
-                      <a:tailEnd type="none" w="med" len="med"/>
-                    </a:lnB>
-                  </a:tcPr>
-                </a:tc>
-                <a:tc>
-                  <a:txBody>
-                    <a:bodyPr/>
-                    <a:lstStyle/>
-                    <a:p>
-                      <a:pPr algn="ctr" indent="0" marL="0">
-                        <a:buNone/>
-                      </a:pPr>
-                      <a:endParaRPr lang="en-US" sz="500" dirty="0">
-                        <a:latin typeface="Calibri" charset="0"/>
-                        <a:ea typeface="Calibri" charset="0"/>
-                        <a:cs typeface="Calibri" charset="0"/>
-                      </a:endParaRPr>
-                    </a:p>
-                  </a:txBody>
-                  <a:tcPr marL="91440" marR="91440" marT="45720" marB="45720">
-                    <a:lnL w="2540" cap="flat" cmpd="sng" algn="ctr">
-                      <a:solidFill>
-                        <a:srgbClr val="EEEEEE"/>
-                      </a:solidFill>
-                      <a:prstDash val="solid"/>
-                      <a:round/>
-                      <a:headEnd type="none" w="med" len="med"/>
-                      <a:tailEnd type="none" w="med" len="med"/>
-                    </a:lnL>
-                    <a:lnR w="2540" cap="flat" cmpd="sng" algn="ctr">
-                      <a:solidFill>
-                        <a:srgbClr val="EEEEEE"/>
-                      </a:solidFill>
-                      <a:prstDash val="solid"/>
-                      <a:round/>
-                      <a:headEnd type="none" w="med" len="med"/>
-                      <a:tailEnd type="none" w="med" len="med"/>
-                    </a:lnR>
-                    <a:lnT w="2540" cap="flat" cmpd="sng" algn="ctr">
-                      <a:solidFill>
-                        <a:srgbClr val="EEEEEE"/>
-                      </a:solidFill>
-                      <a:prstDash val="solid"/>
-                      <a:round/>
-                      <a:headEnd type="none" w="med" len="med"/>
-                      <a:tailEnd type="none" w="med" len="med"/>
-                    </a:lnT>
-                    <a:lnB w="2540" cap="flat" cmpd="sng" algn="ctr">
-                      <a:solidFill>
-                        <a:srgbClr val="EEEEEE"/>
-                      </a:solidFill>
-                      <a:prstDash val="solid"/>
-                      <a:round/>
-                      <a:headEnd type="none" w="med" len="med"/>
-                      <a:tailEnd type="none" w="med" len="med"/>
-                    </a:lnB>
-                  </a:tcPr>
-                </a:tc>
-                <a:tc>
-                  <a:txBody>
-                    <a:bodyPr/>
-                    <a:lstStyle/>
-                    <a:p>
-                      <a:pPr algn="ctr" indent="0" marL="0">
-                        <a:buNone/>
-                      </a:pPr>
-                      <a:endParaRPr lang="en-US" sz="500" dirty="0">
-                        <a:latin typeface="Calibri" charset="0"/>
-                        <a:ea typeface="Calibri" charset="0"/>
-                        <a:cs typeface="Calibri" charset="0"/>
-                      </a:endParaRPr>
-                    </a:p>
-                  </a:txBody>
-                  <a:tcPr marL="91440" marR="91440" marT="45720" marB="45720">
-                    <a:lnL w="2540" cap="flat" cmpd="sng" algn="ctr">
-                      <a:solidFill>
-                        <a:srgbClr val="EEEEEE"/>
-                      </a:solidFill>
-                      <a:prstDash val="solid"/>
-                      <a:round/>
-                      <a:headEnd type="none" w="med" len="med"/>
-                      <a:tailEnd type="none" w="med" len="med"/>
-                    </a:lnL>
-                    <a:lnR w="2540" cap="flat" cmpd="sng" algn="ctr">
-                      <a:solidFill>
-                        <a:srgbClr val="EEEEEE"/>
-                      </a:solidFill>
-                      <a:prstDash val="solid"/>
-                      <a:round/>
-                      <a:headEnd type="none" w="med" len="med"/>
-                      <a:tailEnd type="none" w="med" len="med"/>
-                    </a:lnR>
-                    <a:lnT w="2540" cap="flat" cmpd="sng" algn="ctr">
-                      <a:solidFill>
-                        <a:srgbClr val="EEEEEE"/>
-                      </a:solidFill>
-                      <a:prstDash val="solid"/>
-                      <a:round/>
-                      <a:headEnd type="none" w="med" len="med"/>
-                      <a:tailEnd type="none" w="med" len="med"/>
-                    </a:lnT>
-                    <a:lnB w="2540" cap="flat" cmpd="sng" algn="ctr">
-                      <a:solidFill>
-                        <a:srgbClr val="EEEEEE"/>
-                      </a:solidFill>
-                      <a:prstDash val="solid"/>
-                      <a:round/>
-                      <a:headEnd type="none" w="med" len="med"/>
-                      <a:tailEnd type="none" w="med" len="med"/>
-                    </a:lnB>
-                  </a:tcPr>
-                </a:tc>
-                <a:tc>
-                  <a:txBody>
-                    <a:bodyPr/>
-                    <a:lstStyle/>
-                    <a:p>
-                      <a:pPr algn="ctr" indent="0" marL="0">
-                        <a:buNone/>
-                      </a:pPr>
-                      <a:endParaRPr lang="en-US" sz="500" dirty="0">
-                        <a:latin typeface="Calibri" charset="0"/>
-                        <a:ea typeface="Calibri" charset="0"/>
-                        <a:cs typeface="Calibri" charset="0"/>
-                      </a:endParaRPr>
-                    </a:p>
-                  </a:txBody>
-                  <a:tcPr marL="91440" marR="91440" marT="45720" marB="45720">
-                    <a:lnL w="2540" cap="flat" cmpd="sng" algn="ctr">
-                      <a:solidFill>
-                        <a:srgbClr val="EEEEEE"/>
-                      </a:solidFill>
-                      <a:prstDash val="solid"/>
-                      <a:round/>
-                      <a:headEnd type="none" w="med" len="med"/>
-                      <a:tailEnd type="none" w="med" len="med"/>
-                    </a:lnL>
-                    <a:lnR w="2540" cap="flat" cmpd="sng" algn="ctr">
-                      <a:solidFill>
-                        <a:srgbClr val="EEEEEE"/>
-                      </a:solidFill>
-                      <a:prstDash val="solid"/>
-                      <a:round/>
-                      <a:headEnd type="none" w="med" len="med"/>
-                      <a:tailEnd type="none" w="med" len="med"/>
-                    </a:lnR>
-                    <a:lnT w="2540" cap="flat" cmpd="sng" algn="ctr">
-                      <a:solidFill>
-                        <a:srgbClr val="EEEEEE"/>
-                      </a:solidFill>
-                      <a:prstDash val="solid"/>
-                      <a:round/>
-                      <a:headEnd type="none" w="med" len="med"/>
-                      <a:tailEnd type="none" w="med" len="med"/>
-                    </a:lnT>
-                    <a:lnB w="2540" cap="flat" cmpd="sng" algn="ctr">
-                      <a:solidFill>
-                        <a:srgbClr val="EEEEEE"/>
-                      </a:solidFill>
-                      <a:prstDash val="solid"/>
-                      <a:round/>
-                      <a:headEnd type="none" w="med" len="med"/>
-                      <a:tailEnd type="none" w="med" len="med"/>
-                    </a:lnB>
-                  </a:tcPr>
-                </a:tc>
-                <a:tc>
-                  <a:txBody>
-                    <a:bodyPr/>
-                    <a:lstStyle/>
-                    <a:p>
-                      <a:pPr algn="ctr" indent="0" marL="0">
-                        <a:buNone/>
-                      </a:pPr>
-                      <a:endParaRPr lang="en-US" sz="500" dirty="0">
-                        <a:latin typeface="Calibri" charset="0"/>
-                        <a:ea typeface="Calibri" charset="0"/>
-                        <a:cs typeface="Calibri" charset="0"/>
-                      </a:endParaRPr>
-                    </a:p>
-                  </a:txBody>
-                  <a:tcPr marL="91440" marR="91440" marT="45720" marB="45720">
-                    <a:lnL w="2540" cap="flat" cmpd="sng" algn="ctr">
-                      <a:solidFill>
-                        <a:srgbClr val="EEEEEE"/>
-                      </a:solidFill>
-                      <a:prstDash val="solid"/>
-                      <a:round/>
-                      <a:headEnd type="none" w="med" len="med"/>
-                      <a:tailEnd type="none" w="med" len="med"/>
-                    </a:lnL>
-                    <a:lnR w="2540" cap="flat" cmpd="sng" algn="ctr">
-                      <a:solidFill>
-                        <a:srgbClr val="EEEEEE"/>
-                      </a:solidFill>
-                      <a:prstDash val="solid"/>
-                      <a:round/>
-                      <a:headEnd type="none" w="med" len="med"/>
-                      <a:tailEnd type="none" w="med" len="med"/>
-                    </a:lnR>
-                    <a:lnT w="2540" cap="flat" cmpd="sng" algn="ctr">
-                      <a:solidFill>
-                        <a:srgbClr val="EEEEEE"/>
-                      </a:solidFill>
-                      <a:prstDash val="solid"/>
-                      <a:round/>
-                      <a:headEnd type="none" w="med" len="med"/>
-                      <a:tailEnd type="none" w="med" len="med"/>
-                    </a:lnT>
-                    <a:lnB w="2540" cap="flat" cmpd="sng" algn="ctr">
-                      <a:solidFill>
-                        <a:srgbClr val="EEEEEE"/>
-                      </a:solidFill>
-                      <a:prstDash val="solid"/>
-                      <a:round/>
-                      <a:headEnd type="none" w="med" len="med"/>
-                      <a:tailEnd type="none" w="med" len="med"/>
-                    </a:lnB>
-                  </a:tcPr>
-                </a:tc>
-                <a:tc>
-                  <a:txBody>
-                    <a:bodyPr/>
-                    <a:lstStyle/>
-                    <a:p>
-                      <a:pPr algn="ctr" indent="0" marL="0">
-                        <a:buNone/>
-                      </a:pPr>
-                      <a:endParaRPr lang="en-US" sz="500" dirty="0">
-                        <a:latin typeface="Calibri" charset="0"/>
-                        <a:ea typeface="Calibri" charset="0"/>
-                        <a:cs typeface="Calibri" charset="0"/>
-                      </a:endParaRPr>
-                    </a:p>
-                  </a:txBody>
-                  <a:tcPr marL="91440" marR="91440" marT="45720" marB="45720">
-                    <a:lnL w="2540" cap="flat" cmpd="sng" algn="ctr">
-                      <a:solidFill>
-                        <a:srgbClr val="EEEEEE"/>
-                      </a:solidFill>
-                      <a:prstDash val="solid"/>
-                      <a:round/>
-                      <a:headEnd type="none" w="med" len="med"/>
-                      <a:tailEnd type="none" w="med" len="med"/>
-                    </a:lnL>
-                    <a:lnR w="2540" cap="flat" cmpd="sng" algn="ctr">
-                      <a:solidFill>
-                        <a:srgbClr val="EEEEEE"/>
-                      </a:solidFill>
-                      <a:prstDash val="solid"/>
-                      <a:round/>
-                      <a:headEnd type="none" w="med" len="med"/>
-                      <a:tailEnd type="none" w="med" len="med"/>
-                    </a:lnR>
-                    <a:lnT w="2540" cap="flat" cmpd="sng" algn="ctr">
-                      <a:solidFill>
-                        <a:srgbClr val="EEEEEE"/>
-                      </a:solidFill>
-                      <a:prstDash val="solid"/>
-                      <a:round/>
-                      <a:headEnd type="none" w="med" len="med"/>
-                      <a:tailEnd type="none" w="med" len="med"/>
-                    </a:lnT>
-                    <a:lnB w="2540" cap="flat" cmpd="sng" algn="ctr">
-                      <a:solidFill>
-                        <a:srgbClr val="EEEEEE"/>
-                      </a:solidFill>
-                      <a:prstDash val="solid"/>
-                      <a:round/>
-                      <a:headEnd type="none" w="med" len="med"/>
-                      <a:tailEnd type="none" w="med" len="med"/>
-                    </a:lnB>
-                  </a:tcPr>
-                </a:tc>
-                <a:tc>
-                  <a:txBody>
-                    <a:bodyPr/>
-                    <a:lstStyle/>
-                    <a:p>
-                      <a:pPr algn="ctr" indent="0" marL="0">
-                        <a:buNone/>
-                      </a:pPr>
-                      <a:endParaRPr lang="en-US" sz="500" dirty="0">
-                        <a:latin typeface="Calibri" charset="0"/>
-                        <a:ea typeface="Calibri" charset="0"/>
-                        <a:cs typeface="Calibri" charset="0"/>
-                      </a:endParaRPr>
-                    </a:p>
-                  </a:txBody>
-                  <a:tcPr marL="91440" marR="91440" marT="45720" marB="45720">
-                    <a:lnL w="2540" cap="flat" cmpd="sng" algn="ctr">
-                      <a:solidFill>
-                        <a:srgbClr val="EEEEEE"/>
-                      </a:solidFill>
-                      <a:prstDash val="solid"/>
-                      <a:round/>
-                      <a:headEnd type="none" w="med" len="med"/>
-                      <a:tailEnd type="none" w="med" len="med"/>
-                    </a:lnL>
-                    <a:lnR w="2540" cap="flat" cmpd="sng" algn="ctr">
-                      <a:solidFill>
-                        <a:srgbClr val="EEEEEE"/>
-                      </a:solidFill>
-                      <a:prstDash val="solid"/>
-                      <a:round/>
-                      <a:headEnd type="none" w="med" len="med"/>
-                      <a:tailEnd type="none" w="med" len="med"/>
-                    </a:lnR>
-                    <a:lnT w="2540" cap="flat" cmpd="sng" algn="ctr">
-                      <a:solidFill>
-                        <a:srgbClr val="EEEEEE"/>
-                      </a:solidFill>
-                      <a:prstDash val="solid"/>
-                      <a:round/>
-                      <a:headEnd type="none" w="med" len="med"/>
-                      <a:tailEnd type="none" w="med" len="med"/>
-                    </a:lnT>
-                    <a:lnB w="2540" cap="flat" cmpd="sng" algn="ctr">
-                      <a:solidFill>
-                        <a:srgbClr val="EEEEEE"/>
-                      </a:solidFill>
-                      <a:prstDash val="solid"/>
-                      <a:round/>
-                      <a:headEnd type="none" w="med" len="med"/>
-                      <a:tailEnd type="none" w="med" len="med"/>
-                    </a:lnB>
-                  </a:tcPr>
-                </a:tc>
-                <a:tc>
-                  <a:txBody>
-                    <a:bodyPr/>
-                    <a:lstStyle/>
-                    <a:p>
-                      <a:pPr algn="ctr" indent="0" marL="0">
-                        <a:buNone/>
-                      </a:pPr>
-                      <a:endParaRPr lang="en-US" sz="500" dirty="0">
-                        <a:latin typeface="Calibri" charset="0"/>
-                        <a:ea typeface="Calibri" charset="0"/>
-                        <a:cs typeface="Calibri" charset="0"/>
-                      </a:endParaRPr>
-                    </a:p>
-                  </a:txBody>
-                  <a:tcPr marL="91440" marR="91440" marT="45720" marB="45720">
-                    <a:lnL w="2540" cap="flat" cmpd="sng" algn="ctr">
-                      <a:solidFill>
-                        <a:srgbClr val="EEEEEE"/>
-                      </a:solidFill>
-                      <a:prstDash val="solid"/>
-                      <a:round/>
-                      <a:headEnd type="none" w="med" len="med"/>
-                      <a:tailEnd type="none" w="med" len="med"/>
-                    </a:lnL>
-                    <a:lnR w="2540" cap="flat" cmpd="sng" algn="ctr">
-                      <a:solidFill>
-                        <a:srgbClr val="EEEEEE"/>
-                      </a:solidFill>
-                      <a:prstDash val="solid"/>
-                      <a:round/>
-                      <a:headEnd type="none" w="med" len="med"/>
-                      <a:tailEnd type="none" w="med" len="med"/>
-                    </a:lnR>
-                    <a:lnT w="2540" cap="flat" cmpd="sng" algn="ctr">
-                      <a:solidFill>
-                        <a:srgbClr val="EEEEEE"/>
-                      </a:solidFill>
-                      <a:prstDash val="solid"/>
-                      <a:round/>
-                      <a:headEnd type="none" w="med" len="med"/>
-                      <a:tailEnd type="none" w="med" len="med"/>
-                    </a:lnT>
-                    <a:lnB w="2540" cap="flat" cmpd="sng" algn="ctr">
-                      <a:solidFill>
-                        <a:srgbClr val="EEEEEE"/>
-                      </a:solidFill>
-                      <a:prstDash val="solid"/>
-                      <a:round/>
-                      <a:headEnd type="none" w="med" len="med"/>
-                      <a:tailEnd type="none" w="med" len="med"/>
-                    </a:lnB>
-                  </a:tcPr>
-                </a:tc>
-                <a:tc>
-                  <a:txBody>
-                    <a:bodyPr/>
-                    <a:lstStyle/>
-                    <a:p>
-                      <a:pPr algn="ctr" indent="0" marL="0">
-                        <a:buNone/>
-                      </a:pPr>
-                      <a:endParaRPr lang="en-US" sz="500" dirty="0">
-                        <a:latin typeface="Calibri" charset="0"/>
-                        <a:ea typeface="Calibri" charset="0"/>
-                        <a:cs typeface="Calibri" charset="0"/>
-                      </a:endParaRPr>
-                    </a:p>
-                  </a:txBody>
-                  <a:tcPr marL="91440" marR="91440" marT="45720" marB="45720">
-                    <a:lnL w="2540" cap="flat" cmpd="sng" algn="ctr">
-                      <a:solidFill>
-                        <a:srgbClr val="EEEEEE"/>
-                      </a:solidFill>
-                      <a:prstDash val="solid"/>
-                      <a:round/>
-                      <a:headEnd type="none" w="med" len="med"/>
-                      <a:tailEnd type="none" w="med" len="med"/>
-                    </a:lnL>
-                    <a:lnR w="2540" cap="flat" cmpd="sng" algn="ctr">
-                      <a:solidFill>
-                        <a:srgbClr val="EEEEEE"/>
-                      </a:solidFill>
-                      <a:prstDash val="solid"/>
-                      <a:round/>
-                      <a:headEnd type="none" w="med" len="med"/>
-                      <a:tailEnd type="none" w="med" len="med"/>
-                    </a:lnR>
-                    <a:lnT w="2540" cap="flat" cmpd="sng" algn="ctr">
-                      <a:solidFill>
-                        <a:srgbClr val="EEEEEE"/>
-                      </a:solidFill>
-                      <a:prstDash val="solid"/>
-                      <a:round/>
-                      <a:headEnd type="none" w="med" len="med"/>
-                      <a:tailEnd type="none" w="med" len="med"/>
-                    </a:lnT>
-                    <a:lnB w="2540" cap="flat" cmpd="sng" algn="ctr">
-                      <a:solidFill>
-                        <a:srgbClr val="EEEEEE"/>
-                      </a:solidFill>
-                      <a:prstDash val="solid"/>
-                      <a:round/>
-                      <a:headEnd type="none" w="med" len="med"/>
-                      <a:tailEnd type="none" w="med" len="med"/>
-                    </a:lnB>
-                  </a:tcPr>
-                </a:tc>
-                <a:tc>
-                  <a:txBody>
-                    <a:bodyPr/>
-                    <a:lstStyle/>
-                    <a:p>
-                      <a:pPr algn="ctr" indent="0" marL="0">
-                        <a:buNone/>
-                      </a:pPr>
-                      <a:r>
-                        <a:rPr lang="en-US" sz="500" b="1" dirty="0">
-                          <a:solidFill>
-                            <a:srgbClr val="777777"/>
-                          </a:solidFill>
-                          <a:latin typeface="Calibri" pitchFamily="34" charset="0"/>
-                          <a:ea typeface="Calibri" pitchFamily="34" charset="-122"/>
-                          <a:cs typeface="Calibri" pitchFamily="34" charset="-120"/>
-                        </a:rPr>
-                        <a:t>3.39%</a:t>
-                      </a:r>
-                      <a:endParaRPr lang="en-US" sz="500" dirty="0">
-                        <a:latin typeface="Calibri" charset="0"/>
-                        <a:ea typeface="Calibri" charset="0"/>
-                        <a:cs typeface="Calibri" charset="0"/>
-                      </a:endParaRPr>
-                    </a:p>
-                  </a:txBody>
-                  <a:tcPr marL="91440" marR="91440" marT="45720" marB="45720">
-                    <a:lnL w="2540" cap="flat" cmpd="sng" algn="ctr">
-                      <a:solidFill>
-                        <a:srgbClr val="EEEEEE"/>
-                      </a:solidFill>
-                      <a:prstDash val="solid"/>
-                      <a:round/>
-                      <a:headEnd type="none" w="med" len="med"/>
-                      <a:tailEnd type="none" w="med" len="med"/>
-                    </a:lnL>
-                    <a:lnR w="2540" cap="flat" cmpd="sng" algn="ctr">
-                      <a:solidFill>
-                        <a:srgbClr val="EEEEEE"/>
-                      </a:solidFill>
-                      <a:prstDash val="solid"/>
-                      <a:round/>
-                      <a:headEnd type="none" w="med" len="med"/>
-                      <a:tailEnd type="none" w="med" len="med"/>
-                    </a:lnR>
-                    <a:lnT w="2540" cap="flat" cmpd="sng" algn="ctr">
-                      <a:solidFill>
-                        <a:srgbClr val="EEEEEE"/>
-                      </a:solidFill>
-                      <a:prstDash val="solid"/>
-                      <a:round/>
-                      <a:headEnd type="none" w="med" len="med"/>
-                      <a:tailEnd type="none" w="med" len="med"/>
-                    </a:lnT>
-                    <a:lnB w="2540" cap="flat" cmpd="sng" algn="ctr">
-                      <a:solidFill>
-                        <a:srgbClr val="EEEEEE"/>
-                      </a:solidFill>
-                      <a:prstDash val="solid"/>
-                      <a:round/>
-                      <a:headEnd type="none" w="med" len="med"/>
-                      <a:tailEnd type="none" w="med" len="med"/>
-                    </a:lnB>
-                  </a:tcPr>
-                </a:tc>
-              </a:tr>
-              <a:tr h="123444">
-                <a:tc>
-                  <a:txBody>
-                    <a:bodyPr/>
-                    <a:lstStyle/>
-                    <a:p>
-                      <a:pPr algn="l" indent="0" marL="0">
-                        <a:buNone/>
-                      </a:pPr>
-                      <a:endParaRPr lang="en-US" sz="500" dirty="0">
-                        <a:latin typeface="Calibri" charset="0"/>
-                        <a:ea typeface="Calibri" charset="0"/>
-                        <a:cs typeface="Calibri" charset="0"/>
-                      </a:endParaRPr>
-                    </a:p>
-                  </a:txBody>
-                  <a:tcPr marL="91440" marR="91440" marT="45720" marB="45720">
-                    <a:lnL w="2540" cap="flat" cmpd="sng" algn="ctr">
-                      <a:solidFill>
-                        <a:srgbClr val="EEEEEE"/>
-                      </a:solidFill>
-                      <a:prstDash val="solid"/>
-                      <a:round/>
-                      <a:headEnd type="none" w="med" len="med"/>
-                      <a:tailEnd type="none" w="med" len="med"/>
-                    </a:lnL>
-                    <a:lnR w="2540" cap="flat" cmpd="sng" algn="ctr">
-                      <a:solidFill>
-                        <a:srgbClr val="EEEEEE"/>
-                      </a:solidFill>
-                      <a:prstDash val="solid"/>
-                      <a:round/>
-                      <a:headEnd type="none" w="med" len="med"/>
-                      <a:tailEnd type="none" w="med" len="med"/>
-                    </a:lnR>
-                    <a:lnT w="2540" cap="flat" cmpd="sng" algn="ctr">
-                      <a:solidFill>
-                        <a:srgbClr val="EEEEEE"/>
-                      </a:solidFill>
-                      <a:prstDash val="solid"/>
-                      <a:round/>
-                      <a:headEnd type="none" w="med" len="med"/>
-                      <a:tailEnd type="none" w="med" len="med"/>
-                    </a:lnT>
-                    <a:lnB w="2540" cap="flat" cmpd="sng" algn="ctr">
-                      <a:solidFill>
-                        <a:srgbClr val="EEEEEE"/>
-                      </a:solidFill>
-                      <a:prstDash val="solid"/>
-                      <a:round/>
-                      <a:headEnd type="none" w="med" len="med"/>
-                      <a:tailEnd type="none" w="med" len="med"/>
-                    </a:lnB>
-                  </a:tcPr>
-                </a:tc>
-                <a:tc>
-                  <a:txBody>
-                    <a:bodyPr/>
-                    <a:lstStyle/>
-                    <a:p>
-                      <a:pPr algn="l" indent="0" marL="0">
-                        <a:buNone/>
-                      </a:pPr>
-                      <a:r>
-                        <a:rPr lang="en-US" sz="500" dirty="0">
-                          <a:solidFill>
-                            <a:srgbClr val="999999"/>
-                          </a:solidFill>
-                          <a:latin typeface="Calibri" pitchFamily="34" charset="0"/>
-                          <a:ea typeface="Calibri" pitchFamily="34" charset="-122"/>
-                          <a:cs typeface="Calibri" pitchFamily="34" charset="-120"/>
-                        </a:rPr>
-                        <a:t>Competencia</a:t>
-                      </a:r>
-                      <a:endParaRPr lang="en-US" sz="500" dirty="0">
-                        <a:latin typeface="Calibri" charset="0"/>
-                        <a:ea typeface="Calibri" charset="0"/>
-                        <a:cs typeface="Calibri" charset="0"/>
-                      </a:endParaRPr>
-                    </a:p>
-                  </a:txBody>
-                  <a:tcPr marL="91440" marR="91440" marT="45720" marB="45720">
-                    <a:lnL w="2540" cap="flat" cmpd="sng" algn="ctr">
-                      <a:solidFill>
-                        <a:srgbClr val="EEEEEE"/>
-                      </a:solidFill>
-                      <a:prstDash val="solid"/>
-                      <a:round/>
-                      <a:headEnd type="none" w="med" len="med"/>
-                      <a:tailEnd type="none" w="med" len="med"/>
-                    </a:lnL>
-                    <a:lnR w="2540" cap="flat" cmpd="sng" algn="ctr">
-                      <a:solidFill>
-                        <a:srgbClr val="EEEEEE"/>
-                      </a:solidFill>
-                      <a:prstDash val="solid"/>
-                      <a:round/>
-                      <a:headEnd type="none" w="med" len="med"/>
-                      <a:tailEnd type="none" w="med" len="med"/>
-                    </a:lnR>
-                    <a:lnT w="2540" cap="flat" cmpd="sng" algn="ctr">
-                      <a:solidFill>
-                        <a:srgbClr val="EEEEEE"/>
-                      </a:solidFill>
-                      <a:prstDash val="solid"/>
-                      <a:round/>
-                      <a:headEnd type="none" w="med" len="med"/>
-                      <a:tailEnd type="none" w="med" len="med"/>
-                    </a:lnT>
-                    <a:lnB w="2540" cap="flat" cmpd="sng" algn="ctr">
-                      <a:solidFill>
-                        <a:srgbClr val="EEEEEE"/>
-                      </a:solidFill>
-                      <a:prstDash val="solid"/>
-                      <a:round/>
-                      <a:headEnd type="none" w="med" len="med"/>
-                      <a:tailEnd type="none" w="med" len="med"/>
-                    </a:lnB>
-                  </a:tcPr>
-                </a:tc>
-                <a:tc>
-                  <a:txBody>
-                    <a:bodyPr/>
-                    <a:lstStyle/>
-                    <a:p>
-                      <a:pPr algn="ctr" indent="0" marL="0">
-                        <a:buNone/>
-                      </a:pPr>
-                      <a:r>
-                        <a:rPr lang="en-US" sz="500" dirty="0">
-                          <a:solidFill>
-                            <a:srgbClr val="999999"/>
-                          </a:solidFill>
-                          <a:latin typeface="Calibri" pitchFamily="34" charset="0"/>
-                          <a:ea typeface="Calibri" pitchFamily="34" charset="-122"/>
-                          <a:cs typeface="Calibri" pitchFamily="34" charset="-120"/>
-                        </a:rPr>
-                        <a:t>0.00%</a:t>
+                        <a:t>0.27%</a:t>
                       </a:r>
                       <a:endParaRPr lang="en-US" sz="500" dirty="0">
                         <a:latin typeface="Calibri" charset="0"/>
@@ -16402,7 +16717,7 @@
                         <a:buNone/>
                       </a:pPr>
                       <a:r>
-                        <a:rPr lang="en-US" sz="500" dirty="0">
+                        <a:rPr lang="en-US" sz="400" dirty="0">
                           <a:solidFill>
                             <a:srgbClr val="000000"/>
                           </a:solidFill>
@@ -16412,7 +16727,7 @@
                         </a:rPr>
                         <a:t>FIP LIQUIDEZ Permanente</a:t>
                       </a:r>
-                      <a:endParaRPr lang="en-US" sz="500" dirty="0">
+                      <a:endParaRPr lang="en-US" sz="400" dirty="0">
                         <a:latin typeface="Calibri" charset="0"/>
                         <a:ea typeface="Calibri" charset="0"/>
                         <a:cs typeface="Calibri" charset="0"/>
@@ -16475,7 +16790,7 @@
                           <a:ea typeface="Calibri" pitchFamily="34" charset="-122"/>
                           <a:cs typeface="Calibri" pitchFamily="34" charset="-120"/>
                         </a:rPr>
-                        <a:t>-2.53%</a:t>
+                        <a:t>0.72%</a:t>
                       </a:r>
                       <a:endParaRPr lang="en-US" sz="500" dirty="0">
                         <a:latin typeface="Calibri" charset="0"/>
@@ -16540,7 +16855,7 @@
                           <a:ea typeface="Calibri" pitchFamily="34" charset="-122"/>
                           <a:cs typeface="Calibri" pitchFamily="34" charset="-120"/>
                         </a:rPr>
-                        <a:t>0.54%</a:t>
+                        <a:t>0.56%</a:t>
                       </a:r>
                       <a:endParaRPr lang="en-US" sz="500" dirty="0">
                         <a:latin typeface="Calibri" charset="0"/>

--- a/folletos/2026-04/pptx/FIP_VANTRUST_LIQUIDEZ_PERMANENTE.pptx
+++ b/folletos/2026-04/pptx/FIP_VANTRUST_LIQUIDEZ_PERMANENTE.pptx
@@ -3527,7 +3527,7 @@
                 <a:ea typeface="Calibri" pitchFamily="34" charset="-122"/>
                 <a:cs typeface="Calibri" pitchFamily="34" charset="-120"/>
               </a:rPr>
-              <a:t>prueba CLP</a:t>
+              <a:t>prueba 13 CLP</a:t>
             </a:r>
             <a:endParaRPr lang="en-US" sz="800" dirty="0"/>
           </a:p>

--- a/folletos/2026-04/pptx/FIP_VANTRUST_LIQUIDEZ_PERMANENTE.pptx
+++ b/folletos/2026-04/pptx/FIP_VANTRUST_LIQUIDEZ_PERMANENTE.pptx
@@ -399,7 +399,7 @@
                   <c:v>116.77</c:v>
                 </c:pt>
                 <c:pt idx="32">
-                  <c:v>117.21</c:v>
+                  <c:v>87.07</c:v>
                 </c:pt>
               </c:numCache>
             </c:numRef>
@@ -975,7 +975,7 @@
                   <c:v>112.4</c:v>
                 </c:pt>
                 <c:pt idx="32">
-                  <c:v>112.69</c:v>
+                  <c:v/>
                 </c:pt>
               </c:numCache>
             </c:numRef>
@@ -1057,7 +1057,7 @@
         <c:axId val="2094734552"/>
         <c:scaling>
           <c:orientation val="minMax"/>
-          <c:min val="97"/>
+          <c:min val="84"/>
         </c:scaling>
         <c:delete val="0"/>
         <c:axPos val="l"/>
@@ -3527,7 +3527,7 @@
                 <a:ea typeface="Calibri" pitchFamily="34" charset="-122"/>
                 <a:cs typeface="Calibri" pitchFamily="34" charset="-120"/>
               </a:rPr>
-              <a:t>prueba 13 CLP</a:t>
+              <a:t>prueba CLP</a:t>
             </a:r>
             <a:endParaRPr lang="en-US" sz="800" dirty="0"/>
           </a:p>
@@ -4176,7 +4176,7 @@
                           <a:ea typeface="Calibri" pitchFamily="34" charset="-122"/>
                           <a:cs typeface="Calibri" pitchFamily="34" charset="-120"/>
                         </a:rPr>
-                        <a:t>0.38%</a:t>
+                        <a:t>-25.44%</a:t>
                       </a:r>
                       <a:endParaRPr lang="en-US" sz="750" dirty="0">
                         <a:latin typeface="Calibri" charset="0"/>
@@ -4244,7 +4244,7 @@
                           <a:ea typeface="Calibri" pitchFamily="34" charset="-122"/>
                           <a:cs typeface="Calibri" pitchFamily="34" charset="-120"/>
                         </a:rPr>
-                        <a:t>1.13%</a:t>
+                        <a:t>-24.88%</a:t>
                       </a:r>
                       <a:endParaRPr lang="en-US" sz="750" dirty="0">
                         <a:latin typeface="Calibri" charset="0"/>
@@ -4312,7 +4312,7 @@
                           <a:ea typeface="Calibri" pitchFamily="34" charset="-122"/>
                           <a:cs typeface="Calibri" pitchFamily="34" charset="-120"/>
                         </a:rPr>
-                        <a:t>2.33%</a:t>
+                        <a:t>-23.98%</a:t>
                       </a:r>
                       <a:endParaRPr lang="en-US" sz="750" dirty="0">
                         <a:latin typeface="Calibri" charset="0"/>
@@ -4448,7 +4448,7 @@
                           <a:ea typeface="Calibri" pitchFamily="34" charset="-122"/>
                           <a:cs typeface="Calibri" pitchFamily="34" charset="-120"/>
                         </a:rPr>
-                        <a:t>3.39%</a:t>
+                        <a:t>-74.63%</a:t>
                       </a:r>
                       <a:endParaRPr lang="en-US" sz="750" dirty="0">
                         <a:latin typeface="Calibri" charset="0"/>
@@ -4586,7 +4586,7 @@
                           <a:ea typeface="Calibri" pitchFamily="34" charset="-122"/>
                           <a:cs typeface="Calibri" pitchFamily="34" charset="-120"/>
                         </a:rPr>
-                        <a:t>0.26%</a:t>
+                        <a:t>-100.00%</a:t>
                       </a:r>
                       <a:endParaRPr lang="en-US" sz="750" dirty="0">
                         <a:latin typeface="Calibri" charset="0"/>
@@ -4654,7 +4654,7 @@
                           <a:ea typeface="Calibri" pitchFamily="34" charset="-122"/>
                           <a:cs typeface="Calibri" pitchFamily="34" charset="-120"/>
                         </a:rPr>
-                        <a:t>0.77%</a:t>
+                        <a:t>-100.00%</a:t>
                       </a:r>
                       <a:endParaRPr lang="en-US" sz="750" dirty="0">
                         <a:latin typeface="Calibri" charset="0"/>
@@ -4722,7 +4722,7 @@
                           <a:ea typeface="Calibri" pitchFamily="34" charset="-122"/>
                           <a:cs typeface="Calibri" pitchFamily="34" charset="-120"/>
                         </a:rPr>
-                        <a:t>1.62%</a:t>
+                        <a:t>-100.00%</a:t>
                       </a:r>
                       <a:endParaRPr lang="en-US" sz="750" dirty="0">
                         <a:latin typeface="Calibri" charset="0"/>
@@ -4858,7 +4858,7 @@
                           <a:ea typeface="Calibri" pitchFamily="34" charset="-122"/>
                           <a:cs typeface="Calibri" pitchFamily="34" charset="-120"/>
                         </a:rPr>
-                        <a:t>2.32%</a:t>
+                        <a:t>-300.00%</a:t>
                       </a:r>
                       <a:endParaRPr lang="en-US" sz="750" dirty="0">
                         <a:latin typeface="Calibri" charset="0"/>
@@ -15229,7 +15229,7 @@
                           <a:ea typeface="Calibri" pitchFamily="34" charset="-122"/>
                           <a:cs typeface="Calibri" pitchFamily="34" charset="-120"/>
                         </a:rPr>
-                        <a:t>0.38%</a:t>
+                        <a:t>-25.44%</a:t>
                       </a:r>
                       <a:endParaRPr lang="en-US" sz="500" dirty="0">
                         <a:latin typeface="Calibri" charset="0"/>
@@ -15726,7 +15726,7 @@
                           <a:ea typeface="Calibri" pitchFamily="34" charset="-122"/>
                           <a:cs typeface="Calibri" pitchFamily="34" charset="-120"/>
                         </a:rPr>
-                        <a:t>3.39%</a:t>
+                        <a:t>-74.63%</a:t>
                       </a:r>
                       <a:endParaRPr lang="en-US" sz="500" dirty="0">
                         <a:latin typeface="Calibri" charset="0"/>
@@ -16107,7 +16107,7 @@
                           <a:ea typeface="Calibri" pitchFamily="34" charset="-122"/>
                           <a:cs typeface="Calibri" pitchFamily="34" charset="-120"/>
                         </a:rPr>
-                        <a:t>0.26%</a:t>
+                        <a:t>-100.00%</a:t>
                       </a:r>
                       <a:endParaRPr lang="en-US" sz="500" dirty="0">
                         <a:latin typeface="Calibri" charset="0"/>
@@ -16604,7 +16604,7 @@
                           <a:ea typeface="Calibri" pitchFamily="34" charset="-122"/>
                           <a:cs typeface="Calibri" pitchFamily="34" charset="-120"/>
                         </a:rPr>
-                        <a:t>2.32%</a:t>
+                        <a:t>-300.00%</a:t>
                       </a:r>
                       <a:endParaRPr lang="en-US" sz="500" dirty="0">
                         <a:latin typeface="Calibri" charset="0"/>

--- a/folletos/2026-04/pptx/FIP_VANTRUST_LIQUIDEZ_PERMANENTE.pptx
+++ b/folletos/2026-04/pptx/FIP_VANTRUST_LIQUIDEZ_PERMANENTE.pptx
@@ -3527,7 +3527,7 @@
                 <a:ea typeface="Calibri" pitchFamily="34" charset="-122"/>
                 <a:cs typeface="Calibri" pitchFamily="34" charset="-120"/>
               </a:rPr>
-              <a:t>prueba CLP</a:t>
+              <a:t>prueba 14 CLP</a:t>
             </a:r>
             <a:endParaRPr lang="en-US" sz="800" dirty="0"/>
           </a:p>
